--- a/artifacts/mdpr-vs-skill/mdpr-baseline-result.pptx
+++ b/artifacts/mdpr-vs-skill/mdpr-baseline-result.pptx
@@ -4965,7 +4965,7 @@
       </p:sp>
       <p:sp>
         <p:nvSpPr>
-          <p:cNvPr id="5" name="Text 3"/>
+          <p:cNvPr id="5" name="mdpr:mdpr-corpus-baseline-vs-design-components-skill-3dadcf:title:__title:mdpr-corpus-baseline-vs-design-components-skill-3dadcf"/>
           <p:cNvSpPr txBox="1"/>
           <p:nvPr/>
         </p:nvSpPr>
@@ -5120,7 +5120,7 @@
       </p:sp>
       <p:sp>
         <p:nvSpPr>
-          <p:cNvPr id="5" name="Text 3"/>
+          <p:cNvPr id="5" name="mdpr:6-11-ff4f6e:title:__title:6-11-ff4f6e"/>
           <p:cNvSpPr txBox="1"/>
           <p:nvPr/>
         </p:nvSpPr>
@@ -5162,7 +5162,7 @@
       </p:sp>
       <p:sp>
         <p:nvSpPr>
-          <p:cNvPr id="6" name="Text 4"/>
+          <p:cNvPr id="6" name="mdpr:6-11-ff4f6e:left:block-6-chunk-6"/>
           <p:cNvSpPr txBox="1"/>
           <p:nvPr/>
         </p:nvSpPr>
@@ -5221,7 +5221,7 @@
       </p:sp>
       <p:sp>
         <p:nvSpPr>
-          <p:cNvPr id="7" name="Text 5"/>
+          <p:cNvPr id="7" name="mdpr:6-11-ff4f6e:right:block-6-chunk-6"/>
           <p:cNvSpPr txBox="1"/>
           <p:nvPr/>
         </p:nvSpPr>
@@ -5393,7 +5393,7 @@
       </p:sp>
       <p:sp>
         <p:nvSpPr>
-          <p:cNvPr id="5" name="Text 3"/>
+          <p:cNvPr id="5" name="mdpr:7-11-2ba0ba:title:__title:7-11-2ba0ba"/>
           <p:cNvSpPr txBox="1"/>
           <p:nvPr/>
         </p:nvSpPr>
@@ -5435,7 +5435,7 @@
       </p:sp>
       <p:sp>
         <p:nvSpPr>
-          <p:cNvPr id="6" name="Text 4"/>
+          <p:cNvPr id="6" name="mdpr:7-11-2ba0ba:left:block-6-chunk-7"/>
           <p:cNvSpPr txBox="1"/>
           <p:nvPr/>
         </p:nvSpPr>
@@ -5486,7 +5486,7 @@
                 <a:ea typeface="Pretendard" pitchFamily="34" charset="-122"/>
                 <a:cs typeface="Pretendard" pitchFamily="34" charset="-120"/>
               </a:rPr>
-              <a:t>  11. Validation and Overflow Policy (12 headings, 9740 chars)</a:t>
+              <a:t>  11. Validation and Overflow Policy (12 headings, 10704 chars)</a:t>
             </a:r>
             <a:endParaRPr lang="en-US" sz="2200" dirty="0"/>
           </a:p>
@@ -5494,7 +5494,7 @@
       </p:sp>
       <p:sp>
         <p:nvSpPr>
-          <p:cNvPr id="7" name="Text 5"/>
+          <p:cNvPr id="7" name="mdpr:7-11-2ba0ba:right:block-6-chunk-7"/>
           <p:cNvSpPr txBox="1"/>
           <p:nvPr/>
         </p:nvSpPr>
@@ -5666,7 +5666,7 @@
       </p:sp>
       <p:sp>
         <p:nvSpPr>
-          <p:cNvPr id="5" name="Text 3"/>
+          <p:cNvPr id="5" name="mdpr:8-11-42f575:title:__title:8-11-42f575"/>
           <p:cNvSpPr txBox="1"/>
           <p:nvPr/>
         </p:nvSpPr>
@@ -5708,7 +5708,7 @@
       </p:sp>
       <p:sp>
         <p:nvSpPr>
-          <p:cNvPr id="6" name="Text 4"/>
+          <p:cNvPr id="6" name="mdpr:8-11-42f575:left:block-6-chunk-8"/>
           <p:cNvSpPr txBox="1"/>
           <p:nvPr/>
         </p:nvSpPr>
@@ -5767,7 +5767,7 @@
       </p:sp>
       <p:sp>
         <p:nvSpPr>
-          <p:cNvPr id="7" name="Text 5"/>
+          <p:cNvPr id="7" name="mdpr:8-11-42f575:right:block-6-chunk-8"/>
           <p:cNvSpPr txBox="1"/>
           <p:nvPr/>
         </p:nvSpPr>
@@ -5939,7 +5939,7 @@
       </p:sp>
       <p:sp>
         <p:nvSpPr>
-          <p:cNvPr id="5" name="Text 3"/>
+          <p:cNvPr id="5" name="mdpr:9-11-ac29ad:title:__title:9-11-ac29ad"/>
           <p:cNvSpPr txBox="1"/>
           <p:nvPr/>
         </p:nvSpPr>
@@ -5981,7 +5981,7 @@
       </p:sp>
       <p:sp>
         <p:nvSpPr>
-          <p:cNvPr id="6" name="Text 4"/>
+          <p:cNvPr id="6" name="mdpr:9-11-ac29ad:left:block-6-chunk-9"/>
           <p:cNvSpPr txBox="1"/>
           <p:nvPr/>
         </p:nvSpPr>
@@ -6040,7 +6040,7 @@
       </p:sp>
       <p:sp>
         <p:nvSpPr>
-          <p:cNvPr id="7" name="Text 5"/>
+          <p:cNvPr id="7" name="mdpr:9-11-ac29ad:right:block-6-chunk-9"/>
           <p:cNvSpPr txBox="1"/>
           <p:nvPr/>
         </p:nvSpPr>
@@ -6212,7 +6212,7 @@
       </p:sp>
       <p:sp>
         <p:nvSpPr>
-          <p:cNvPr id="5" name="Text 3"/>
+          <p:cNvPr id="5" name="mdpr:10-11-2dfe2e:title:__title:10-11-2dfe2e"/>
           <p:cNvSpPr txBox="1"/>
           <p:nvPr/>
         </p:nvSpPr>
@@ -6254,7 +6254,7 @@
       </p:sp>
       <p:sp>
         <p:nvSpPr>
-          <p:cNvPr id="6" name="Text 4"/>
+          <p:cNvPr id="6" name="mdpr:10-11-2dfe2e:left:block-6-chunk-10"/>
           <p:cNvSpPr txBox="1"/>
           <p:nvPr/>
         </p:nvSpPr>
@@ -6313,7 +6313,7 @@
       </p:sp>
       <p:sp>
         <p:nvSpPr>
-          <p:cNvPr id="7" name="Text 5"/>
+          <p:cNvPr id="7" name="mdpr:10-11-2dfe2e:right:block-6-chunk-10"/>
           <p:cNvSpPr txBox="1"/>
           <p:nvPr/>
         </p:nvSpPr>
@@ -6524,7 +6524,7 @@
       </p:sp>
       <p:sp>
         <p:nvSpPr>
-          <p:cNvPr id="6" name="Text 3"/>
+          <p:cNvPr id="6" name="mdpr:11-11-a1bc56:title:__title:11-11-a1bc56"/>
           <p:cNvSpPr txBox="1"/>
           <p:nvPr/>
         </p:nvSpPr>
@@ -6623,7 +6623,7 @@
       </p:pic>
       <p:sp>
         <p:nvSpPr>
-          <p:cNvPr id="9" name="Text 5"/>
+          <p:cNvPr id="9" name="mdpr:11-11-a1bc56:item-1:block-6-chunk-11"/>
           <p:cNvSpPr txBox="1"/>
           <p:nvPr/>
         </p:nvSpPr>
@@ -6741,7 +6741,7 @@
       </p:sp>
       <p:sp>
         <p:nvSpPr>
-          <p:cNvPr id="3" name="Text 1"/>
+          <p:cNvPr id="3" name="mdpr:1-2-be6b30:title:__title:1-2-be6b30"/>
           <p:cNvSpPr txBox="1"/>
           <p:nvPr/>
         </p:nvSpPr>
@@ -8464,7 +8464,7 @@
       </p:sp>
       <p:sp>
         <p:nvSpPr>
-          <p:cNvPr id="3" name="Text 1"/>
+          <p:cNvPr id="3" name="mdpr:2-2-33e8c2:title:__title:2-2-33e8c2"/>
           <p:cNvSpPr txBox="1"/>
           <p:nvPr/>
         </p:nvSpPr>
@@ -9741,7 +9741,7 @@
       </p:sp>
       <p:sp>
         <p:nvSpPr>
-          <p:cNvPr id="3" name="Text 1"/>
+          <p:cNvPr id="3" name="mdpr:parser-and-splitting-topics-5e36b3:title:__title:parser-and-splitting-topics-5e36b3"/>
           <p:cNvSpPr txBox="1"/>
           <p:nvPr/>
         </p:nvSpPr>
@@ -10214,7 +10214,7 @@
       </p:sp>
       <p:sp>
         <p:nvSpPr>
-          <p:cNvPr id="15" name="Text 9"/>
+          <p:cNvPr id="15" name="mdpr:1-2-cde5ef:title:__title:1-2-cde5ef"/>
           <p:cNvSpPr txBox="1"/>
           <p:nvPr/>
         </p:nvSpPr>
@@ -10310,7 +10310,7 @@
       </p:sp>
       <p:sp>
         <p:nvSpPr>
-          <p:cNvPr id="17" name="Text 11"/>
+          <p:cNvPr id="17" name="mdpr:1-2-cde5ef:item-1:block-12-chunk-1"/>
           <p:cNvSpPr txBox="1"/>
           <p:nvPr/>
         </p:nvSpPr>
@@ -10409,7 +10409,7 @@
       </p:pic>
       <p:sp>
         <p:nvSpPr>
-          <p:cNvPr id="20" name="Text 13"/>
+          <p:cNvPr id="20" name="mdpr:1-2-cde5ef:item-2:block-12-chunk-1"/>
           <p:cNvSpPr txBox="1"/>
           <p:nvPr/>
         </p:nvSpPr>
@@ -10508,7 +10508,7 @@
       </p:pic>
       <p:sp>
         <p:nvSpPr>
-          <p:cNvPr id="23" name="Text 15"/>
+          <p:cNvPr id="23" name="mdpr:1-2-cde5ef:item-3:block-12-chunk-1"/>
           <p:cNvSpPr txBox="1"/>
           <p:nvPr/>
         </p:nvSpPr>
@@ -10607,7 +10607,7 @@
       </p:pic>
       <p:sp>
         <p:nvSpPr>
-          <p:cNvPr id="26" name="Text 17"/>
+          <p:cNvPr id="26" name="mdpr:1-2-cde5ef:item-4:block-12-chunk-1"/>
           <p:cNvSpPr txBox="1"/>
           <p:nvPr/>
         </p:nvSpPr>
@@ -11169,7 +11169,7 @@
       </p:sp>
       <p:sp>
         <p:nvSpPr>
-          <p:cNvPr id="20" name="Text 18"/>
+          <p:cNvPr id="20" name="mdpr:1-2-0772f8:title:__title:1-2-0772f8"/>
           <p:cNvSpPr txBox="1"/>
           <p:nvPr/>
         </p:nvSpPr>
@@ -11211,7 +11211,7 @@
       </p:sp>
       <p:sp>
         <p:nvSpPr>
-          <p:cNvPr id="21" name="Text 19"/>
+          <p:cNvPr id="21" name="mdpr:1-2-0772f8:toc-item-1:toc-item-1"/>
           <p:cNvSpPr txBox="1"/>
           <p:nvPr/>
         </p:nvSpPr>
@@ -11253,7 +11253,7 @@
       </p:sp>
       <p:sp>
         <p:nvSpPr>
-          <p:cNvPr id="22" name="Text 20"/>
+          <p:cNvPr id="22" name="mdpr:1-2-0772f8:toc-item-2:toc-item-2"/>
           <p:cNvSpPr txBox="1"/>
           <p:nvPr/>
         </p:nvSpPr>
@@ -11295,7 +11295,7 @@
       </p:sp>
       <p:sp>
         <p:nvSpPr>
-          <p:cNvPr id="23" name="Text 21"/>
+          <p:cNvPr id="23" name="mdpr:1-2-0772f8:toc-item-3:toc-item-3"/>
           <p:cNvSpPr txBox="1"/>
           <p:nvPr/>
         </p:nvSpPr>
@@ -11337,7 +11337,7 @@
       </p:sp>
       <p:sp>
         <p:nvSpPr>
-          <p:cNvPr id="24" name="Text 22"/>
+          <p:cNvPr id="24" name="mdpr:1-2-0772f8:toc-item-4:toc-item-4"/>
           <p:cNvSpPr txBox="1"/>
           <p:nvPr/>
         </p:nvSpPr>
@@ -11379,7 +11379,7 @@
       </p:sp>
       <p:sp>
         <p:nvSpPr>
-          <p:cNvPr id="25" name="Text 23"/>
+          <p:cNvPr id="25" name="mdpr:1-2-0772f8:toc-item-5:toc-item-5"/>
           <p:cNvSpPr txBox="1"/>
           <p:nvPr/>
         </p:nvSpPr>
@@ -11421,7 +11421,7 @@
       </p:sp>
       <p:sp>
         <p:nvSpPr>
-          <p:cNvPr id="26" name="Text 24"/>
+          <p:cNvPr id="26" name="mdpr:1-2-0772f8:toc-item-6:toc-item-6"/>
           <p:cNvSpPr txBox="1"/>
           <p:nvPr/>
         </p:nvSpPr>
@@ -11463,7 +11463,7 @@
       </p:sp>
       <p:sp>
         <p:nvSpPr>
-          <p:cNvPr id="27" name="Text 25"/>
+          <p:cNvPr id="27" name="mdpr:1-2-0772f8:toc-item-7:toc-item-7"/>
           <p:cNvSpPr txBox="1"/>
           <p:nvPr/>
         </p:nvSpPr>
@@ -11505,7 +11505,7 @@
       </p:sp>
       <p:sp>
         <p:nvSpPr>
-          <p:cNvPr id="28" name="Text 26"/>
+          <p:cNvPr id="28" name="mdpr:1-2-0772f8:toc-item-8:toc-item-8"/>
           <p:cNvSpPr txBox="1"/>
           <p:nvPr/>
         </p:nvSpPr>
@@ -11547,7 +11547,7 @@
       </p:sp>
       <p:sp>
         <p:nvSpPr>
-          <p:cNvPr id="29" name="Text 27"/>
+          <p:cNvPr id="29" name="mdpr:1-2-0772f8:toc-item-9:toc-item-9"/>
           <p:cNvSpPr txBox="1"/>
           <p:nvPr/>
         </p:nvSpPr>
@@ -11589,7 +11589,7 @@
       </p:sp>
       <p:sp>
         <p:nvSpPr>
-          <p:cNvPr id="30" name="Text 28"/>
+          <p:cNvPr id="30" name="mdpr:1-2-0772f8:toc-item-10:toc-item-10"/>
           <p:cNvSpPr txBox="1"/>
           <p:nvPr/>
         </p:nvSpPr>
@@ -11631,7 +11631,7 @@
       </p:sp>
       <p:sp>
         <p:nvSpPr>
-          <p:cNvPr id="31" name="Text 29"/>
+          <p:cNvPr id="31" name="mdpr:1-2-0772f8:toc-item-11:toc-item-11"/>
           <p:cNvSpPr txBox="1"/>
           <p:nvPr/>
         </p:nvSpPr>
@@ -11673,7 +11673,7 @@
       </p:sp>
       <p:sp>
         <p:nvSpPr>
-          <p:cNvPr id="32" name="Text 30"/>
+          <p:cNvPr id="32" name="mdpr:1-2-0772f8:toc-item-12:toc-item-12"/>
           <p:cNvSpPr txBox="1"/>
           <p:nvPr/>
         </p:nvSpPr>
@@ -11715,7 +11715,7 @@
       </p:sp>
       <p:sp>
         <p:nvSpPr>
-          <p:cNvPr id="33" name="Text 31"/>
+          <p:cNvPr id="33" name="mdpr:1-2-0772f8:toc-item-13:toc-item-13"/>
           <p:cNvSpPr txBox="1"/>
           <p:nvPr/>
         </p:nvSpPr>
@@ -11757,7 +11757,7 @@
       </p:sp>
       <p:sp>
         <p:nvSpPr>
-          <p:cNvPr id="34" name="Text 32"/>
+          <p:cNvPr id="34" name="mdpr:1-2-0772f8:toc-item-14:toc-item-14"/>
           <p:cNvSpPr txBox="1"/>
           <p:nvPr/>
         </p:nvSpPr>
@@ -11858,7 +11858,7 @@
       </p:sp>
       <p:sp>
         <p:nvSpPr>
-          <p:cNvPr id="3" name="Text 1"/>
+          <p:cNvPr id="3" name="mdpr:2-2-68dc04:title:__title:2-2-68dc04"/>
           <p:cNvSpPr txBox="1"/>
           <p:nvPr/>
         </p:nvSpPr>
@@ -13507,7 +13507,7 @@
       </p:sp>
       <p:sp>
         <p:nvSpPr>
-          <p:cNvPr id="15" name="Text 9"/>
+          <p:cNvPr id="15" name="mdpr:1-3-1dab31:title:__title:1-3-1dab31"/>
           <p:cNvSpPr txBox="1"/>
           <p:nvPr/>
         </p:nvSpPr>
@@ -13603,7 +13603,7 @@
       </p:sp>
       <p:sp>
         <p:nvSpPr>
-          <p:cNvPr id="17" name="Text 11"/>
+          <p:cNvPr id="17" name="mdpr:1-3-1dab31:item-1:block-15-chunk-1"/>
           <p:cNvSpPr txBox="1"/>
           <p:nvPr/>
         </p:nvSpPr>
@@ -13702,7 +13702,7 @@
       </p:pic>
       <p:sp>
         <p:nvSpPr>
-          <p:cNvPr id="20" name="Text 13"/>
+          <p:cNvPr id="20" name="mdpr:1-3-1dab31:item-2:block-15-chunk-1"/>
           <p:cNvSpPr txBox="1"/>
           <p:nvPr/>
         </p:nvSpPr>
@@ -13801,7 +13801,7 @@
       </p:pic>
       <p:sp>
         <p:nvSpPr>
-          <p:cNvPr id="23" name="Text 15"/>
+          <p:cNvPr id="23" name="mdpr:1-3-1dab31:item-3:block-15-chunk-1"/>
           <p:cNvSpPr txBox="1"/>
           <p:nvPr/>
         </p:nvSpPr>
@@ -13900,7 +13900,7 @@
       </p:pic>
       <p:sp>
         <p:nvSpPr>
-          <p:cNvPr id="26" name="Text 17"/>
+          <p:cNvPr id="26" name="mdpr:1-3-1dab31:item-4:block-15-chunk-1"/>
           <p:cNvSpPr txBox="1"/>
           <p:nvPr/>
         </p:nvSpPr>
@@ -14373,7 +14373,7 @@
       </p:sp>
       <p:sp>
         <p:nvSpPr>
-          <p:cNvPr id="15" name="Text 9"/>
+          <p:cNvPr id="15" name="mdpr:2-3-9039a0:title:__title:2-3-9039a0"/>
           <p:cNvSpPr txBox="1"/>
           <p:nvPr/>
         </p:nvSpPr>
@@ -14472,7 +14472,7 @@
       </p:pic>
       <p:sp>
         <p:nvSpPr>
-          <p:cNvPr id="18" name="Text 11"/>
+          <p:cNvPr id="18" name="mdpr:2-3-9039a0:item-1:block-15-chunk-2"/>
           <p:cNvSpPr txBox="1"/>
           <p:nvPr/>
         </p:nvSpPr>
@@ -14571,7 +14571,7 @@
       </p:pic>
       <p:sp>
         <p:nvSpPr>
-          <p:cNvPr id="21" name="Text 13"/>
+          <p:cNvPr id="21" name="mdpr:2-3-9039a0:item-2:block-15-chunk-2"/>
           <p:cNvSpPr txBox="1"/>
           <p:nvPr/>
         </p:nvSpPr>
@@ -14670,7 +14670,7 @@
       </p:pic>
       <p:sp>
         <p:nvSpPr>
-          <p:cNvPr id="24" name="Text 15"/>
+          <p:cNvPr id="24" name="mdpr:2-3-9039a0:item-3:block-15-chunk-2"/>
           <p:cNvSpPr txBox="1"/>
           <p:nvPr/>
         </p:nvSpPr>
@@ -14769,7 +14769,7 @@
       </p:pic>
       <p:sp>
         <p:nvSpPr>
-          <p:cNvPr id="27" name="Text 17"/>
+          <p:cNvPr id="27" name="mdpr:2-3-9039a0:item-4:block-15-chunk-2"/>
           <p:cNvSpPr txBox="1"/>
           <p:nvPr/>
         </p:nvSpPr>
@@ -14936,7 +14936,7 @@
       </p:sp>
       <p:sp>
         <p:nvSpPr>
-          <p:cNvPr id="5" name="Text 2"/>
+          <p:cNvPr id="5" name="mdpr:3-3-b52831:title:__title:3-3-b52831"/>
           <p:cNvSpPr txBox="1"/>
           <p:nvPr/>
         </p:nvSpPr>
@@ -14978,7 +14978,7 @@
       </p:sp>
       <p:graphicFrame>
         <p:nvGraphicFramePr>
-          <p:cNvPr id="24" name="Table 0"/>
+          <p:cNvPr id="24" name="mdpr:3-3-b52831:table:block-16"/>
           <p:cNvGraphicFramePr>
             <a:graphicFrameLocks noGrp="1"/>
           </p:cNvGraphicFramePr>
@@ -16311,7 +16311,7 @@
       </p:sp>
       <p:sp>
         <p:nvSpPr>
-          <p:cNvPr id="21" name="Text 13"/>
+          <p:cNvPr id="21" name="mdpr:1-2-a054ea:title:__title:1-2-a054ea"/>
           <p:cNvSpPr txBox="1"/>
           <p:nvPr/>
         </p:nvSpPr>
@@ -16407,7 +16407,7 @@
       </p:sp>
       <p:sp>
         <p:nvSpPr>
-          <p:cNvPr id="23" name="Text 15"/>
+          <p:cNvPr id="23" name="mdpr:1-2-a054ea:item-1:block-19"/>
           <p:cNvSpPr txBox="1"/>
           <p:nvPr/>
         </p:nvSpPr>
@@ -16506,7 +16506,7 @@
       </p:pic>
       <p:sp>
         <p:nvSpPr>
-          <p:cNvPr id="26" name="Text 17"/>
+          <p:cNvPr id="26" name="mdpr:1-2-a054ea:item-2:block-19"/>
           <p:cNvSpPr txBox="1"/>
           <p:nvPr/>
         </p:nvSpPr>
@@ -16605,7 +16605,7 @@
       </p:pic>
       <p:sp>
         <p:nvSpPr>
-          <p:cNvPr id="29" name="Text 19"/>
+          <p:cNvPr id="29" name="mdpr:1-2-a054ea:item-3:block-19"/>
           <p:cNvSpPr txBox="1"/>
           <p:nvPr/>
         </p:nvSpPr>
@@ -16704,7 +16704,7 @@
       </p:pic>
       <p:sp>
         <p:nvSpPr>
-          <p:cNvPr id="32" name="Text 21"/>
+          <p:cNvPr id="32" name="mdpr:1-2-a054ea:item-4:block-19"/>
           <p:cNvSpPr txBox="1"/>
           <p:nvPr/>
         </p:nvSpPr>
@@ -16803,7 +16803,7 @@
       </p:pic>
       <p:sp>
         <p:nvSpPr>
-          <p:cNvPr id="35" name="Text 23"/>
+          <p:cNvPr id="35" name="mdpr:1-2-a054ea:item-5:block-19"/>
           <p:cNvSpPr txBox="1"/>
           <p:nvPr/>
         </p:nvSpPr>
@@ -16902,7 +16902,7 @@
       </p:pic>
       <p:sp>
         <p:nvSpPr>
-          <p:cNvPr id="38" name="Text 25"/>
+          <p:cNvPr id="38" name="mdpr:1-2-a054ea:item-6:block-19"/>
           <p:cNvSpPr txBox="1"/>
           <p:nvPr/>
         </p:nvSpPr>
@@ -17086,7 +17086,7 @@
       </p:sp>
       <p:sp>
         <p:nvSpPr>
-          <p:cNvPr id="5" name="Text 2"/>
+          <p:cNvPr id="5" name="mdpr:2-2-a7385b:title:__title:2-2-a7385b"/>
           <p:cNvSpPr txBox="1"/>
           <p:nvPr/>
         </p:nvSpPr>
@@ -17128,7 +17128,7 @@
       </p:sp>
       <p:graphicFrame>
         <p:nvGraphicFramePr>
-          <p:cNvPr id="26" name="Table 0"/>
+          <p:cNvPr id="26" name="mdpr:2-2-a7385b:table:block-20"/>
           <p:cNvGraphicFramePr>
             <a:graphicFrameLocks noGrp="1"/>
           </p:cNvGraphicFramePr>
@@ -18275,7 +18275,7 @@
       </p:sp>
       <p:sp>
         <p:nvSpPr>
-          <p:cNvPr id="15" name="Text 9"/>
+          <p:cNvPr id="15" name="mdpr:1-3-0d40ba:title:__title:1-3-0d40ba"/>
           <p:cNvSpPr txBox="1"/>
           <p:nvPr/>
         </p:nvSpPr>
@@ -18371,7 +18371,7 @@
       </p:sp>
       <p:sp>
         <p:nvSpPr>
-          <p:cNvPr id="17" name="Text 11"/>
+          <p:cNvPr id="17" name="mdpr:1-3-0d40ba:item-1:block-23-chunk-1"/>
           <p:cNvSpPr txBox="1"/>
           <p:nvPr/>
         </p:nvSpPr>
@@ -18470,7 +18470,7 @@
       </p:pic>
       <p:sp>
         <p:nvSpPr>
-          <p:cNvPr id="20" name="Text 13"/>
+          <p:cNvPr id="20" name="mdpr:1-3-0d40ba:item-2:block-23-chunk-1"/>
           <p:cNvSpPr txBox="1"/>
           <p:nvPr/>
         </p:nvSpPr>
@@ -18569,7 +18569,7 @@
       </p:pic>
       <p:sp>
         <p:nvSpPr>
-          <p:cNvPr id="23" name="Text 15"/>
+          <p:cNvPr id="23" name="mdpr:1-3-0d40ba:item-3:block-23-chunk-1"/>
           <p:cNvSpPr txBox="1"/>
           <p:nvPr/>
         </p:nvSpPr>
@@ -18668,7 +18668,7 @@
       </p:pic>
       <p:sp>
         <p:nvSpPr>
-          <p:cNvPr id="26" name="Text 17"/>
+          <p:cNvPr id="26" name="mdpr:1-3-0d40ba:item-4:block-23-chunk-1"/>
           <p:cNvSpPr txBox="1"/>
           <p:nvPr/>
         </p:nvSpPr>
@@ -19141,7 +19141,7 @@
       </p:sp>
       <p:sp>
         <p:nvSpPr>
-          <p:cNvPr id="15" name="Text 9"/>
+          <p:cNvPr id="15" name="mdpr:2-3-702eef:title:__title:2-3-702eef"/>
           <p:cNvSpPr txBox="1"/>
           <p:nvPr/>
         </p:nvSpPr>
@@ -19240,7 +19240,7 @@
       </p:pic>
       <p:sp>
         <p:nvSpPr>
-          <p:cNvPr id="18" name="Text 11"/>
+          <p:cNvPr id="18" name="mdpr:2-3-702eef:item-1:block-23-chunk-2"/>
           <p:cNvSpPr txBox="1"/>
           <p:nvPr/>
         </p:nvSpPr>
@@ -19339,7 +19339,7 @@
       </p:pic>
       <p:sp>
         <p:nvSpPr>
-          <p:cNvPr id="21" name="Text 13"/>
+          <p:cNvPr id="21" name="mdpr:2-3-702eef:item-2:block-23-chunk-2"/>
           <p:cNvSpPr txBox="1"/>
           <p:nvPr/>
         </p:nvSpPr>
@@ -19438,7 +19438,7 @@
       </p:pic>
       <p:sp>
         <p:nvSpPr>
-          <p:cNvPr id="24" name="Text 15"/>
+          <p:cNvPr id="24" name="mdpr:2-3-702eef:item-3:block-23-chunk-2"/>
           <p:cNvSpPr txBox="1"/>
           <p:nvPr/>
         </p:nvSpPr>
@@ -19537,7 +19537,7 @@
       </p:pic>
       <p:sp>
         <p:nvSpPr>
-          <p:cNvPr id="27" name="Text 17"/>
+          <p:cNvPr id="27" name="mdpr:2-3-702eef:item-4:block-23-chunk-2"/>
           <p:cNvSpPr txBox="1"/>
           <p:nvPr/>
         </p:nvSpPr>
@@ -19704,7 +19704,7 @@
       </p:sp>
       <p:sp>
         <p:nvSpPr>
-          <p:cNvPr id="5" name="Text 2"/>
+          <p:cNvPr id="5" name="mdpr:3-3-86deb9:title:__title:3-3-86deb9"/>
           <p:cNvSpPr txBox="1"/>
           <p:nvPr/>
         </p:nvSpPr>
@@ -19746,7 +19746,7 @@
       </p:sp>
       <p:sp>
         <p:nvSpPr>
-          <p:cNvPr id="6" name="Text 3"/>
+          <p:cNvPr id="6" name="mdpr:3-3-86deb9:code:block-24"/>
           <p:cNvSpPr txBox="1"/>
           <p:nvPr/>
         </p:nvSpPr>
@@ -20256,7 +20256,7 @@
       </p:sp>
       <p:sp>
         <p:nvSpPr>
-          <p:cNvPr id="15" name="Text 9"/>
+          <p:cNvPr id="15" name="mdpr:1-3-f5174a:title:__title:1-3-f5174a"/>
           <p:cNvSpPr txBox="1"/>
           <p:nvPr/>
         </p:nvSpPr>
@@ -20352,7 +20352,7 @@
       </p:sp>
       <p:sp>
         <p:nvSpPr>
-          <p:cNvPr id="17" name="Text 11"/>
+          <p:cNvPr id="17" name="mdpr:1-3-f5174a:item-1:block-26-chunk-1"/>
           <p:cNvSpPr txBox="1"/>
           <p:nvPr/>
         </p:nvSpPr>
@@ -20451,7 +20451,7 @@
       </p:pic>
       <p:sp>
         <p:nvSpPr>
-          <p:cNvPr id="20" name="Text 13"/>
+          <p:cNvPr id="20" name="mdpr:1-3-f5174a:item-2:block-26-chunk-1"/>
           <p:cNvSpPr txBox="1"/>
           <p:nvPr/>
         </p:nvSpPr>
@@ -20550,7 +20550,7 @@
       </p:pic>
       <p:sp>
         <p:nvSpPr>
-          <p:cNvPr id="23" name="Text 15"/>
+          <p:cNvPr id="23" name="mdpr:1-3-f5174a:item-3:block-26-chunk-1"/>
           <p:cNvSpPr txBox="1"/>
           <p:nvPr/>
         </p:nvSpPr>
@@ -20649,7 +20649,7 @@
       </p:pic>
       <p:sp>
         <p:nvSpPr>
-          <p:cNvPr id="26" name="Text 17"/>
+          <p:cNvPr id="26" name="mdpr:1-3-f5174a:item-4:block-26-chunk-1"/>
           <p:cNvSpPr txBox="1"/>
           <p:nvPr/>
         </p:nvSpPr>
@@ -20912,7 +20912,7 @@
       </p:sp>
       <p:sp>
         <p:nvSpPr>
-          <p:cNvPr id="9" name="Text 7"/>
+          <p:cNvPr id="9" name="mdpr:2-2-7bfb60:title:__title:2-2-7bfb60"/>
           <p:cNvSpPr txBox="1"/>
           <p:nvPr/>
         </p:nvSpPr>
@@ -20954,7 +20954,7 @@
       </p:sp>
       <p:sp>
         <p:nvSpPr>
-          <p:cNvPr id="10" name="Text 8"/>
+          <p:cNvPr id="10" name="mdpr:2-2-7bfb60:toc-item-1:toc-item-15"/>
           <p:cNvSpPr txBox="1"/>
           <p:nvPr/>
         </p:nvSpPr>
@@ -20996,7 +20996,7 @@
       </p:sp>
       <p:sp>
         <p:nvSpPr>
-          <p:cNvPr id="11" name="Text 9"/>
+          <p:cNvPr id="11" name="mdpr:2-2-7bfb60:toc-item-2:toc-item-16"/>
           <p:cNvSpPr txBox="1"/>
           <p:nvPr/>
         </p:nvSpPr>
@@ -21038,7 +21038,7 @@
       </p:sp>
       <p:sp>
         <p:nvSpPr>
-          <p:cNvPr id="12" name="Text 10"/>
+          <p:cNvPr id="12" name="mdpr:2-2-7bfb60:toc-item-3:toc-item-17"/>
           <p:cNvSpPr txBox="1"/>
           <p:nvPr/>
         </p:nvSpPr>
@@ -21080,7 +21080,7 @@
       </p:sp>
       <p:sp>
         <p:nvSpPr>
-          <p:cNvPr id="13" name="Text 11"/>
+          <p:cNvPr id="13" name="mdpr:2-2-7bfb60:toc-item-4:toc-item-18"/>
           <p:cNvSpPr txBox="1"/>
           <p:nvPr/>
         </p:nvSpPr>
@@ -21553,7 +21553,7 @@
       </p:sp>
       <p:sp>
         <p:nvSpPr>
-          <p:cNvPr id="15" name="Text 9"/>
+          <p:cNvPr id="15" name="mdpr:2-3-d10faa:title:__title:2-3-d10faa"/>
           <p:cNvSpPr txBox="1"/>
           <p:nvPr/>
         </p:nvSpPr>
@@ -21652,7 +21652,7 @@
       </p:pic>
       <p:sp>
         <p:nvSpPr>
-          <p:cNvPr id="18" name="Text 11"/>
+          <p:cNvPr id="18" name="mdpr:2-3-d10faa:item-1:block-26-chunk-2"/>
           <p:cNvSpPr txBox="1"/>
           <p:nvPr/>
         </p:nvSpPr>
@@ -21751,7 +21751,7 @@
       </p:pic>
       <p:sp>
         <p:nvSpPr>
-          <p:cNvPr id="21" name="Text 13"/>
+          <p:cNvPr id="21" name="mdpr:2-3-d10faa:item-2:block-26-chunk-2"/>
           <p:cNvSpPr txBox="1"/>
           <p:nvPr/>
         </p:nvSpPr>
@@ -21850,7 +21850,7 @@
       </p:pic>
       <p:sp>
         <p:nvSpPr>
-          <p:cNvPr id="24" name="Text 15"/>
+          <p:cNvPr id="24" name="mdpr:2-3-d10faa:item-3:block-26-chunk-2"/>
           <p:cNvSpPr txBox="1"/>
           <p:nvPr/>
         </p:nvSpPr>
@@ -21949,7 +21949,7 @@
       </p:pic>
       <p:sp>
         <p:nvSpPr>
-          <p:cNvPr id="27" name="Text 17"/>
+          <p:cNvPr id="27" name="mdpr:2-3-d10faa:item-4:block-26-chunk-2"/>
           <p:cNvSpPr txBox="1"/>
           <p:nvPr/>
         </p:nvSpPr>
@@ -22116,7 +22116,7 @@
       </p:sp>
       <p:sp>
         <p:nvSpPr>
-          <p:cNvPr id="5" name="Text 2"/>
+          <p:cNvPr id="5" name="mdpr:3-3-cd9a13:title:__title:3-3-cd9a13"/>
           <p:cNvSpPr txBox="1"/>
           <p:nvPr/>
         </p:nvSpPr>
@@ -22158,7 +22158,7 @@
       </p:sp>
       <p:sp>
         <p:nvSpPr>
-          <p:cNvPr id="6" name="Text 3"/>
+          <p:cNvPr id="6" name="mdpr:3-3-cd9a13:code:block-27"/>
           <p:cNvSpPr txBox="1"/>
           <p:nvPr/>
         </p:nvSpPr>
@@ -22410,7 +22410,7 @@
       </p:sp>
       <p:sp>
         <p:nvSpPr>
-          <p:cNvPr id="5" name="Text 3"/>
+          <p:cNvPr id="5" name="mdpr:example-decks-from-mdpr-5cd58c:title:__title:example-decks-from-mdpr-5cd58c"/>
           <p:cNvSpPr txBox="1"/>
           <p:nvPr/>
         </p:nvSpPr>
@@ -22452,7 +22452,7 @@
       </p:sp>
       <p:sp>
         <p:nvSpPr>
-          <p:cNvPr id="6" name="Text 4"/>
+          <p:cNvPr id="6" name="mdpr:example-decks-from-mdpr-5cd58c:left:block-29-block-29-block-29"/>
           <p:cNvSpPr txBox="1"/>
           <p:nvPr/>
         </p:nvSpPr>
@@ -22494,7 +22494,7 @@
       </p:sp>
       <p:sp>
         <p:nvSpPr>
-          <p:cNvPr id="7" name="Text 5"/>
+          <p:cNvPr id="7" name="mdpr:example-decks-from-mdpr-5cd58c:left:block-29-block-29-block-29"/>
           <p:cNvSpPr txBox="1"/>
           <p:nvPr/>
         </p:nvSpPr>
@@ -22536,7 +22536,7 @@
       </p:sp>
       <p:sp>
         <p:nvSpPr>
-          <p:cNvPr id="8" name="Text 6"/>
+          <p:cNvPr id="8" name="mdpr:example-decks-from-mdpr-5cd58c:left:block-29-block-29-block-29"/>
           <p:cNvSpPr txBox="1"/>
           <p:nvPr/>
         </p:nvSpPr>
@@ -22578,7 +22578,7 @@
       </p:sp>
       <p:sp>
         <p:nvSpPr>
-          <p:cNvPr id="9" name="Text 7"/>
+          <p:cNvPr id="9" name="mdpr:example-decks-from-mdpr-5cd58c:right:block-29-block-29"/>
           <p:cNvSpPr txBox="1"/>
           <p:nvPr/>
         </p:nvSpPr>
@@ -22620,7 +22620,7 @@
       </p:sp>
       <p:sp>
         <p:nvSpPr>
-          <p:cNvPr id="10" name="Text 8"/>
+          <p:cNvPr id="10" name="mdpr:example-decks-from-mdpr-5cd58c:right:block-29-block-29"/>
           <p:cNvSpPr txBox="1"/>
           <p:nvPr/>
         </p:nvSpPr>
@@ -23093,7 +23093,7 @@
       </p:sp>
       <p:sp>
         <p:nvSpPr>
-          <p:cNvPr id="15" name="Text 9"/>
+          <p:cNvPr id="15" name="mdpr:1-3-f5a922:title:__title:1-3-f5a922"/>
           <p:cNvSpPr txBox="1"/>
           <p:nvPr/>
         </p:nvSpPr>
@@ -23192,7 +23192,7 @@
       </p:pic>
       <p:sp>
         <p:nvSpPr>
-          <p:cNvPr id="18" name="Text 11"/>
+          <p:cNvPr id="18" name="mdpr:1-3-f5a922:item-1:block-31-chunk-1"/>
           <p:cNvSpPr txBox="1"/>
           <p:nvPr/>
         </p:nvSpPr>
@@ -23291,7 +23291,7 @@
       </p:pic>
       <p:sp>
         <p:nvSpPr>
-          <p:cNvPr id="21" name="Text 13"/>
+          <p:cNvPr id="21" name="mdpr:1-3-f5a922:item-2:block-31-chunk-1"/>
           <p:cNvSpPr txBox="1"/>
           <p:nvPr/>
         </p:nvSpPr>
@@ -23390,7 +23390,7 @@
       </p:pic>
       <p:sp>
         <p:nvSpPr>
-          <p:cNvPr id="24" name="Text 15"/>
+          <p:cNvPr id="24" name="mdpr:1-3-f5a922:item-3:block-31-chunk-1"/>
           <p:cNvSpPr txBox="1"/>
           <p:nvPr/>
         </p:nvSpPr>
@@ -23489,7 +23489,7 @@
       </p:pic>
       <p:sp>
         <p:nvSpPr>
-          <p:cNvPr id="27" name="Text 17"/>
+          <p:cNvPr id="27" name="mdpr:1-3-f5a922:item-4:block-31-chunk-1"/>
           <p:cNvSpPr txBox="1"/>
           <p:nvPr/>
         </p:nvSpPr>
@@ -23962,7 +23962,7 @@
       </p:sp>
       <p:sp>
         <p:nvSpPr>
-          <p:cNvPr id="15" name="Text 9"/>
+          <p:cNvPr id="15" name="mdpr:2-3-464793:title:__title:2-3-464793"/>
           <p:cNvSpPr txBox="1"/>
           <p:nvPr/>
         </p:nvSpPr>
@@ -24061,7 +24061,7 @@
       </p:pic>
       <p:sp>
         <p:nvSpPr>
-          <p:cNvPr id="18" name="Text 11"/>
+          <p:cNvPr id="18" name="mdpr:2-3-464793:item-1:block-31-chunk-2"/>
           <p:cNvSpPr txBox="1"/>
           <p:nvPr/>
         </p:nvSpPr>
@@ -24160,7 +24160,7 @@
       </p:pic>
       <p:sp>
         <p:nvSpPr>
-          <p:cNvPr id="21" name="Text 13"/>
+          <p:cNvPr id="21" name="mdpr:2-3-464793:item-2:block-31-chunk-2"/>
           <p:cNvSpPr txBox="1"/>
           <p:nvPr/>
         </p:nvSpPr>
@@ -24259,7 +24259,7 @@
       </p:pic>
       <p:sp>
         <p:nvSpPr>
-          <p:cNvPr id="24" name="Text 15"/>
+          <p:cNvPr id="24" name="mdpr:2-3-464793:item-3:block-31-chunk-2"/>
           <p:cNvSpPr txBox="1"/>
           <p:nvPr/>
         </p:nvSpPr>
@@ -24358,7 +24358,7 @@
       </p:pic>
       <p:sp>
         <p:nvSpPr>
-          <p:cNvPr id="27" name="Text 17"/>
+          <p:cNvPr id="27" name="mdpr:2-3-464793:item-4:block-31-chunk-2"/>
           <p:cNvSpPr txBox="1"/>
           <p:nvPr/>
         </p:nvSpPr>
@@ -24513,7 +24513,7 @@
       </p:sp>
       <p:sp>
         <p:nvSpPr>
-          <p:cNvPr id="5" name="Text 3"/>
+          <p:cNvPr id="5" name="mdpr:3-3-478121:title:__title:3-3-478121"/>
           <p:cNvSpPr txBox="1"/>
           <p:nvPr/>
         </p:nvSpPr>
@@ -24555,7 +24555,7 @@
       </p:sp>
       <p:sp>
         <p:nvSpPr>
-          <p:cNvPr id="6" name="Text 4"/>
+          <p:cNvPr id="6" name="mdpr:3-3-478121:left:block-31-chunk-3"/>
           <p:cNvSpPr txBox="1"/>
           <p:nvPr/>
         </p:nvSpPr>
@@ -24597,7 +24597,7 @@
       </p:sp>
       <p:sp>
         <p:nvSpPr>
-          <p:cNvPr id="7" name="Text 5"/>
+          <p:cNvPr id="7" name="mdpr:3-3-478121:right:block-31-chunk-3"/>
           <p:cNvSpPr txBox="1"/>
           <p:nvPr/>
         </p:nvSpPr>
@@ -25070,7 +25070,7 @@
       </p:sp>
       <p:sp>
         <p:nvSpPr>
-          <p:cNvPr id="15" name="Text 9"/>
+          <p:cNvPr id="15" name="mdpr:1-2-b655b6:title:__title:1-2-b655b6"/>
           <p:cNvSpPr txBox="1"/>
           <p:nvPr/>
         </p:nvSpPr>
@@ -25169,7 +25169,7 @@
       </p:pic>
       <p:sp>
         <p:nvSpPr>
-          <p:cNvPr id="18" name="Text 11"/>
+          <p:cNvPr id="18" name="mdpr:1-2-b655b6:item-1:block-33-chunk-1"/>
           <p:cNvSpPr txBox="1"/>
           <p:nvPr/>
         </p:nvSpPr>
@@ -25268,7 +25268,7 @@
       </p:pic>
       <p:sp>
         <p:nvSpPr>
-          <p:cNvPr id="21" name="Text 13"/>
+          <p:cNvPr id="21" name="mdpr:1-2-b655b6:item-2:block-33-chunk-1"/>
           <p:cNvSpPr txBox="1"/>
           <p:nvPr/>
         </p:nvSpPr>
@@ -25367,7 +25367,7 @@
       </p:pic>
       <p:sp>
         <p:nvSpPr>
-          <p:cNvPr id="24" name="Text 15"/>
+          <p:cNvPr id="24" name="mdpr:1-2-b655b6:item-3:block-33-chunk-1"/>
           <p:cNvSpPr txBox="1"/>
           <p:nvPr/>
         </p:nvSpPr>
@@ -25466,7 +25466,7 @@
       </p:pic>
       <p:sp>
         <p:nvSpPr>
-          <p:cNvPr id="27" name="Text 17"/>
+          <p:cNvPr id="27" name="mdpr:1-2-b655b6:item-4:block-33-chunk-1"/>
           <p:cNvSpPr txBox="1"/>
           <p:nvPr/>
         </p:nvSpPr>
@@ -25939,7 +25939,7 @@
       </p:sp>
       <p:sp>
         <p:nvSpPr>
-          <p:cNvPr id="15" name="Text 9"/>
+          <p:cNvPr id="15" name="mdpr:2-2-a09f2a:title:__title:2-2-a09f2a"/>
           <p:cNvSpPr txBox="1"/>
           <p:nvPr/>
         </p:nvSpPr>
@@ -26038,7 +26038,7 @@
       </p:pic>
       <p:sp>
         <p:nvSpPr>
-          <p:cNvPr id="18" name="Text 11"/>
+          <p:cNvPr id="18" name="mdpr:2-2-a09f2a:item-1:block-33-chunk-2"/>
           <p:cNvSpPr txBox="1"/>
           <p:nvPr/>
         </p:nvSpPr>
@@ -26137,7 +26137,7 @@
       </p:pic>
       <p:sp>
         <p:nvSpPr>
-          <p:cNvPr id="21" name="Text 13"/>
+          <p:cNvPr id="21" name="mdpr:2-2-a09f2a:item-2:block-33-chunk-2"/>
           <p:cNvSpPr txBox="1"/>
           <p:nvPr/>
         </p:nvSpPr>
@@ -26236,7 +26236,7 @@
       </p:pic>
       <p:sp>
         <p:nvSpPr>
-          <p:cNvPr id="24" name="Text 15"/>
+          <p:cNvPr id="24" name="mdpr:2-2-a09f2a:item-3:block-33-chunk-2"/>
           <p:cNvSpPr txBox="1"/>
           <p:nvPr/>
         </p:nvSpPr>
@@ -26335,7 +26335,7 @@
       </p:pic>
       <p:sp>
         <p:nvSpPr>
-          <p:cNvPr id="27" name="Text 17"/>
+          <p:cNvPr id="27" name="mdpr:2-2-a09f2a:item-4:block-33-chunk-2"/>
           <p:cNvSpPr txBox="1"/>
           <p:nvPr/>
         </p:nvSpPr>
@@ -26808,7 +26808,7 @@
       </p:sp>
       <p:sp>
         <p:nvSpPr>
-          <p:cNvPr id="15" name="Text 9"/>
+          <p:cNvPr id="15" name="mdpr:1-2-e58f65:title:__title:1-2-e58f65"/>
           <p:cNvSpPr txBox="1"/>
           <p:nvPr/>
         </p:nvSpPr>
@@ -26907,7 +26907,7 @@
       </p:pic>
       <p:sp>
         <p:nvSpPr>
-          <p:cNvPr id="18" name="Text 11"/>
+          <p:cNvPr id="18" name="mdpr:1-2-e58f65:item-1:block-35-chunk-1"/>
           <p:cNvSpPr txBox="1"/>
           <p:nvPr/>
         </p:nvSpPr>
@@ -27006,7 +27006,7 @@
       </p:pic>
       <p:sp>
         <p:nvSpPr>
-          <p:cNvPr id="21" name="Text 13"/>
+          <p:cNvPr id="21" name="mdpr:1-2-e58f65:item-2:block-35-chunk-1"/>
           <p:cNvSpPr txBox="1"/>
           <p:nvPr/>
         </p:nvSpPr>
@@ -27105,7 +27105,7 @@
       </p:pic>
       <p:sp>
         <p:nvSpPr>
-          <p:cNvPr id="24" name="Text 15"/>
+          <p:cNvPr id="24" name="mdpr:1-2-e58f65:item-3:block-35-chunk-1"/>
           <p:cNvSpPr txBox="1"/>
           <p:nvPr/>
         </p:nvSpPr>
@@ -27204,7 +27204,7 @@
       </p:pic>
       <p:sp>
         <p:nvSpPr>
-          <p:cNvPr id="27" name="Text 17"/>
+          <p:cNvPr id="27" name="mdpr:1-2-e58f65:item-4:block-35-chunk-1"/>
           <p:cNvSpPr txBox="1"/>
           <p:nvPr/>
         </p:nvSpPr>
@@ -27613,7 +27613,7 @@
       </p:sp>
       <p:sp>
         <p:nvSpPr>
-          <p:cNvPr id="13" name="Text 8"/>
+          <p:cNvPr id="13" name="mdpr:2-2-98af17:title:__title:2-2-98af17"/>
           <p:cNvSpPr txBox="1"/>
           <p:nvPr/>
         </p:nvSpPr>
@@ -27712,7 +27712,7 @@
       </p:pic>
       <p:sp>
         <p:nvSpPr>
-          <p:cNvPr id="16" name="Text 10"/>
+          <p:cNvPr id="16" name="mdpr:2-2-98af17:item-1:block-35-chunk-2"/>
           <p:cNvSpPr txBox="1"/>
           <p:nvPr/>
         </p:nvSpPr>
@@ -27811,7 +27811,7 @@
       </p:pic>
       <p:sp>
         <p:nvSpPr>
-          <p:cNvPr id="19" name="Text 12"/>
+          <p:cNvPr id="19" name="mdpr:2-2-98af17:item-2:block-35-chunk-2"/>
           <p:cNvSpPr txBox="1"/>
           <p:nvPr/>
         </p:nvSpPr>
@@ -27910,7 +27910,7 @@
       </p:pic>
       <p:sp>
         <p:nvSpPr>
-          <p:cNvPr id="22" name="Text 14"/>
+          <p:cNvPr id="22" name="mdpr:2-2-98af17:item-3:block-35-chunk-2"/>
           <p:cNvSpPr txBox="1"/>
           <p:nvPr/>
         </p:nvSpPr>
@@ -28077,7 +28077,7 @@
       </p:sp>
       <p:sp>
         <p:nvSpPr>
-          <p:cNvPr id="5" name="Text 2"/>
+          <p:cNvPr id="5" name="mdpr:difference-at-a-glance-c5e94b:title:__title:difference-at-a-glance-c5e94b"/>
           <p:cNvSpPr txBox="1"/>
           <p:nvPr/>
         </p:nvSpPr>
@@ -28119,7 +28119,7 @@
       </p:sp>
       <p:graphicFrame>
         <p:nvGraphicFramePr>
-          <p:cNvPr id="5" name="Table 0"/>
+          <p:cNvPr id="5" name="mdpr:difference-at-a-glance-c5e94b:table:block-4"/>
           <p:cNvGraphicFramePr>
             <a:graphicFrameLocks noGrp="1"/>
           </p:cNvGraphicFramePr>
@@ -29791,7 +29791,7 @@
       </p:sp>
       <p:sp>
         <p:nvSpPr>
-          <p:cNvPr id="21" name="Text 13"/>
+          <p:cNvPr id="21" name="mdpr:example-examples-diagram-arrangements-deck-md-9ee663:title:__title:example-examples-diagram-arrangements-deck-md-9ee663"/>
           <p:cNvSpPr txBox="1"/>
           <p:nvPr/>
         </p:nvSpPr>
@@ -29890,7 +29890,7 @@
       </p:pic>
       <p:sp>
         <p:nvSpPr>
-          <p:cNvPr id="24" name="Text 15"/>
+          <p:cNvPr id="24" name="mdpr:example-examples-diagram-arrangements-deck-md-9ee663:item-1:block-37"/>
           <p:cNvSpPr txBox="1"/>
           <p:nvPr/>
         </p:nvSpPr>
@@ -29989,7 +29989,7 @@
       </p:pic>
       <p:sp>
         <p:nvSpPr>
-          <p:cNvPr id="27" name="Text 17"/>
+          <p:cNvPr id="27" name="mdpr:example-examples-diagram-arrangements-deck-md-9ee663:item-2:block-37"/>
           <p:cNvSpPr txBox="1"/>
           <p:nvPr/>
         </p:nvSpPr>
@@ -30088,7 +30088,7 @@
       </p:pic>
       <p:sp>
         <p:nvSpPr>
-          <p:cNvPr id="30" name="Text 19"/>
+          <p:cNvPr id="30" name="mdpr:example-examples-diagram-arrangements-deck-md-9ee663:item-3:block-37"/>
           <p:cNvSpPr txBox="1"/>
           <p:nvPr/>
         </p:nvSpPr>
@@ -30187,7 +30187,7 @@
       </p:pic>
       <p:sp>
         <p:nvSpPr>
-          <p:cNvPr id="33" name="Text 21"/>
+          <p:cNvPr id="33" name="mdpr:example-examples-diagram-arrangements-deck-md-9ee663:item-4:block-37"/>
           <p:cNvSpPr txBox="1"/>
           <p:nvPr/>
         </p:nvSpPr>
@@ -30286,7 +30286,7 @@
       </p:pic>
       <p:sp>
         <p:nvSpPr>
-          <p:cNvPr id="36" name="Text 23"/>
+          <p:cNvPr id="36" name="mdpr:example-examples-diagram-arrangements-deck-md-9ee663:item-5:block-37"/>
           <p:cNvSpPr txBox="1"/>
           <p:nvPr/>
         </p:nvSpPr>
@@ -30385,7 +30385,7 @@
       </p:pic>
       <p:sp>
         <p:nvSpPr>
-          <p:cNvPr id="39" name="Text 25"/>
+          <p:cNvPr id="39" name="mdpr:example-examples-diagram-arrangements-deck-md-9ee663:item-6:block-37"/>
           <p:cNvSpPr txBox="1"/>
           <p:nvPr/>
         </p:nvSpPr>
@@ -31044,7 +31044,7 @@
       </p:sp>
       <p:sp>
         <p:nvSpPr>
-          <p:cNvPr id="21" name="Text 13"/>
+          <p:cNvPr id="21" name="mdpr:example-examples-five-methods-deck-md-172c5a:title:__title:example-examples-five-methods-deck-md-172c5a"/>
           <p:cNvSpPr txBox="1"/>
           <p:nvPr/>
         </p:nvSpPr>
@@ -31143,7 +31143,7 @@
       </p:pic>
       <p:sp>
         <p:nvSpPr>
-          <p:cNvPr id="24" name="Text 15"/>
+          <p:cNvPr id="24" name="mdpr:example-examples-five-methods-deck-md-172c5a:item-1:block-39"/>
           <p:cNvSpPr txBox="1"/>
           <p:nvPr/>
         </p:nvSpPr>
@@ -31242,7 +31242,7 @@
       </p:pic>
       <p:sp>
         <p:nvSpPr>
-          <p:cNvPr id="27" name="Text 17"/>
+          <p:cNvPr id="27" name="mdpr:example-examples-five-methods-deck-md-172c5a:item-2:block-39"/>
           <p:cNvSpPr txBox="1"/>
           <p:nvPr/>
         </p:nvSpPr>
@@ -31341,7 +31341,7 @@
       </p:pic>
       <p:sp>
         <p:nvSpPr>
-          <p:cNvPr id="30" name="Text 19"/>
+          <p:cNvPr id="30" name="mdpr:example-examples-five-methods-deck-md-172c5a:item-3:block-39"/>
           <p:cNvSpPr txBox="1"/>
           <p:nvPr/>
         </p:nvSpPr>
@@ -31440,7 +31440,7 @@
       </p:pic>
       <p:sp>
         <p:nvSpPr>
-          <p:cNvPr id="33" name="Text 21"/>
+          <p:cNvPr id="33" name="mdpr:example-examples-five-methods-deck-md-172c5a:item-4:block-39"/>
           <p:cNvSpPr txBox="1"/>
           <p:nvPr/>
         </p:nvSpPr>
@@ -31539,7 +31539,7 @@
       </p:pic>
       <p:sp>
         <p:nvSpPr>
-          <p:cNvPr id="36" name="Text 23"/>
+          <p:cNvPr id="36" name="mdpr:example-examples-five-methods-deck-md-172c5a:item-5:block-39"/>
           <p:cNvSpPr txBox="1"/>
           <p:nvPr/>
         </p:nvSpPr>
@@ -31638,7 +31638,7 @@
       </p:pic>
       <p:sp>
         <p:nvSpPr>
-          <p:cNvPr id="39" name="Text 25"/>
+          <p:cNvPr id="39" name="mdpr:example-examples-five-methods-deck-md-172c5a:item-6:block-39"/>
           <p:cNvSpPr txBox="1"/>
           <p:nvPr/>
         </p:nvSpPr>
@@ -32111,7 +32111,7 @@
       </p:sp>
       <p:sp>
         <p:nvSpPr>
-          <p:cNvPr id="15" name="Text 9"/>
+          <p:cNvPr id="15" name="mdpr:1-3-15c6dd:title:__title:1-3-15c6dd"/>
           <p:cNvSpPr txBox="1"/>
           <p:nvPr/>
         </p:nvSpPr>
@@ -32210,7 +32210,7 @@
       </p:pic>
       <p:sp>
         <p:nvSpPr>
-          <p:cNvPr id="18" name="Text 11"/>
+          <p:cNvPr id="18" name="mdpr:1-3-15c6dd:item-1:block-41-chunk-1"/>
           <p:cNvSpPr txBox="1"/>
           <p:nvPr/>
         </p:nvSpPr>
@@ -32309,7 +32309,7 @@
       </p:pic>
       <p:sp>
         <p:nvSpPr>
-          <p:cNvPr id="21" name="Text 13"/>
+          <p:cNvPr id="21" name="mdpr:1-3-15c6dd:item-2:block-41-chunk-1"/>
           <p:cNvSpPr txBox="1"/>
           <p:nvPr/>
         </p:nvSpPr>
@@ -32408,7 +32408,7 @@
       </p:pic>
       <p:sp>
         <p:nvSpPr>
-          <p:cNvPr id="24" name="Text 15"/>
+          <p:cNvPr id="24" name="mdpr:1-3-15c6dd:item-3:block-41-chunk-1"/>
           <p:cNvSpPr txBox="1"/>
           <p:nvPr/>
         </p:nvSpPr>
@@ -32507,7 +32507,7 @@
       </p:pic>
       <p:sp>
         <p:nvSpPr>
-          <p:cNvPr id="27" name="Text 17"/>
+          <p:cNvPr id="27" name="mdpr:1-3-15c6dd:item-4:block-41-chunk-1"/>
           <p:cNvSpPr txBox="1"/>
           <p:nvPr/>
         </p:nvSpPr>
@@ -32980,7 +32980,7 @@
       </p:sp>
       <p:sp>
         <p:nvSpPr>
-          <p:cNvPr id="15" name="Text 9"/>
+          <p:cNvPr id="15" name="mdpr:2-3-da3843:title:__title:2-3-da3843"/>
           <p:cNvSpPr txBox="1"/>
           <p:nvPr/>
         </p:nvSpPr>
@@ -33079,7 +33079,7 @@
       </p:pic>
       <p:sp>
         <p:nvSpPr>
-          <p:cNvPr id="18" name="Text 11"/>
+          <p:cNvPr id="18" name="mdpr:2-3-da3843:item-1:block-41-chunk-2"/>
           <p:cNvSpPr txBox="1"/>
           <p:nvPr/>
         </p:nvSpPr>
@@ -33178,7 +33178,7 @@
       </p:pic>
       <p:sp>
         <p:nvSpPr>
-          <p:cNvPr id="21" name="Text 13"/>
+          <p:cNvPr id="21" name="mdpr:2-3-da3843:item-2:block-41-chunk-2"/>
           <p:cNvSpPr txBox="1"/>
           <p:nvPr/>
         </p:nvSpPr>
@@ -33277,7 +33277,7 @@
       </p:pic>
       <p:sp>
         <p:nvSpPr>
-          <p:cNvPr id="24" name="Text 15"/>
+          <p:cNvPr id="24" name="mdpr:2-3-da3843:item-3:block-41-chunk-2"/>
           <p:cNvSpPr txBox="1"/>
           <p:nvPr/>
         </p:nvSpPr>
@@ -33393,7 +33393,7 @@
       </p:pic>
       <p:sp>
         <p:nvSpPr>
-          <p:cNvPr id="27" name="Text 17"/>
+          <p:cNvPr id="27" name="mdpr:2-3-da3843:item-4:block-41-chunk-2"/>
           <p:cNvSpPr txBox="1"/>
           <p:nvPr/>
         </p:nvSpPr>
@@ -33565,7 +33565,7 @@
       </p:sp>
       <p:sp>
         <p:nvSpPr>
-          <p:cNvPr id="5" name="Text 3"/>
+          <p:cNvPr id="5" name="mdpr:3-3-c1353b:title:__title:3-3-c1353b"/>
           <p:cNvSpPr txBox="1"/>
           <p:nvPr/>
         </p:nvSpPr>
@@ -33607,7 +33607,7 @@
       </p:sp>
       <p:sp>
         <p:nvSpPr>
-          <p:cNvPr id="6" name="Text 4"/>
+          <p:cNvPr id="6" name="mdpr:3-3-c1353b:left:block-41-chunk-3"/>
           <p:cNvSpPr txBox="1"/>
           <p:nvPr/>
         </p:nvSpPr>
@@ -33666,7 +33666,7 @@
       </p:sp>
       <p:sp>
         <p:nvSpPr>
-          <p:cNvPr id="7" name="Text 5"/>
+          <p:cNvPr id="7" name="mdpr:3-3-c1353b:right:block-41-chunk-3"/>
           <p:cNvSpPr txBox="1"/>
           <p:nvPr/>
         </p:nvSpPr>
@@ -34156,7 +34156,7 @@
       </p:sp>
       <p:sp>
         <p:nvSpPr>
-          <p:cNvPr id="15" name="Text 9"/>
+          <p:cNvPr id="15" name="mdpr:current-skill-output-expectations-e88695:title:__title:current-skill-output-expectations-e88695"/>
           <p:cNvSpPr txBox="1"/>
           <p:nvPr/>
         </p:nvSpPr>
@@ -34255,7 +34255,7 @@
       </p:pic>
       <p:sp>
         <p:nvSpPr>
-          <p:cNvPr id="18" name="Text 11"/>
+          <p:cNvPr id="18" name="mdpr:current-skill-output-expectations-e88695:item-1:block-43"/>
           <p:cNvSpPr txBox="1"/>
           <p:nvPr/>
         </p:nvSpPr>
@@ -34354,7 +34354,7 @@
       </p:pic>
       <p:sp>
         <p:nvSpPr>
-          <p:cNvPr id="21" name="Text 13"/>
+          <p:cNvPr id="21" name="mdpr:current-skill-output-expectations-e88695:item-2:block-43"/>
           <p:cNvSpPr txBox="1"/>
           <p:nvPr/>
         </p:nvSpPr>
@@ -34453,7 +34453,7 @@
       </p:pic>
       <p:sp>
         <p:nvSpPr>
-          <p:cNvPr id="24" name="Text 15"/>
+          <p:cNvPr id="24" name="mdpr:current-skill-output-expectations-e88695:item-3:block-43"/>
           <p:cNvSpPr txBox="1"/>
           <p:nvPr/>
         </p:nvSpPr>
@@ -34552,7 +34552,7 @@
       </p:pic>
       <p:sp>
         <p:nvSpPr>
-          <p:cNvPr id="27" name="Text 17"/>
+          <p:cNvPr id="27" name="mdpr:current-skill-output-expectations-e88695:item-4:block-43"/>
           <p:cNvSpPr txBox="1"/>
           <p:nvPr/>
         </p:nvSpPr>
@@ -34748,7 +34748,7 @@
       </p:sp>
       <p:sp>
         <p:nvSpPr>
-          <p:cNvPr id="6" name="Text 3"/>
+          <p:cNvPr id="6" name="mdpr:end-state-749f07:title:__title:end-state-749f07"/>
           <p:cNvSpPr txBox="1"/>
           <p:nvPr/>
         </p:nvSpPr>
@@ -34790,7 +34790,7 @@
       </p:sp>
       <p:sp>
         <p:nvSpPr>
-          <p:cNvPr id="7" name="Text 4"/>
+          <p:cNvPr id="7" name="mdpr:end-state-749f07:key-message:block-45"/>
           <p:cNvSpPr txBox="1"/>
           <p:nvPr/>
         </p:nvSpPr>
@@ -34945,7 +34945,7 @@
       </p:sp>
       <p:sp>
         <p:nvSpPr>
-          <p:cNvPr id="5" name="Text 3"/>
+          <p:cNvPr id="5" name="mdpr:1-11-cfaa2b:title:__title:1-11-cfaa2b"/>
           <p:cNvSpPr txBox="1"/>
           <p:nvPr/>
         </p:nvSpPr>
@@ -34987,7 +34987,7 @@
       </p:sp>
       <p:sp>
         <p:nvSpPr>
-          <p:cNvPr id="6" name="Text 4"/>
+          <p:cNvPr id="6" name="mdpr:1-11-cfaa2b:left:block-6-chunk-1"/>
           <p:cNvSpPr txBox="1"/>
           <p:nvPr/>
         </p:nvSpPr>
@@ -35038,7 +35038,7 @@
                 <a:ea typeface="Pretendard" pitchFamily="34" charset="-122"/>
                 <a:cs typeface="Pretendard" pitchFamily="34" charset="-120"/>
               </a:rPr>
-              <a:t>  mdpresent (13 headings, 14613 chars)</a:t>
+              <a:t>  mdpresent (13 headings, 15017 chars)</a:t>
             </a:r>
             <a:endParaRPr lang="en-US" sz="2200" dirty="0"/>
           </a:p>
@@ -35046,7 +35046,7 @@
       </p:sp>
       <p:sp>
         <p:nvSpPr>
-          <p:cNvPr id="7" name="Text 5"/>
+          <p:cNvPr id="7" name="mdpr:1-11-cfaa2b:right:block-6-chunk-1"/>
           <p:cNvSpPr txBox="1"/>
           <p:nvPr/>
         </p:nvSpPr>
@@ -35218,7 +35218,7 @@
       </p:sp>
       <p:sp>
         <p:nvSpPr>
-          <p:cNvPr id="5" name="Text 3"/>
+          <p:cNvPr id="5" name="mdpr:2-11-953f23:title:__title:2-11-953f23"/>
           <p:cNvSpPr txBox="1"/>
           <p:nvPr/>
         </p:nvSpPr>
@@ -35260,7 +35260,7 @@
       </p:sp>
       <p:sp>
         <p:nvSpPr>
-          <p:cNvPr id="6" name="Text 4"/>
+          <p:cNvPr id="6" name="mdpr:2-11-953f23:left:block-6-chunk-2"/>
           <p:cNvSpPr txBox="1"/>
           <p:nvPr/>
         </p:nvSpPr>
@@ -35311,7 +35311,7 @@
                 <a:ea typeface="Pretendard" pitchFamily="34" charset="-122"/>
                 <a:cs typeface="Pretendard" pitchFamily="34" charset="-120"/>
               </a:rPr>
-              <a:t>  01. Architecture (4 headings, 3083 chars)</a:t>
+              <a:t>  01. Architecture (4 headings, 3366 chars)</a:t>
             </a:r>
             <a:endParaRPr lang="en-US" sz="2200" dirty="0"/>
           </a:p>
@@ -35319,7 +35319,7 @@
       </p:sp>
       <p:sp>
         <p:nvSpPr>
-          <p:cNvPr id="7" name="Text 5"/>
+          <p:cNvPr id="7" name="mdpr:2-11-953f23:right:block-6-chunk-2"/>
           <p:cNvSpPr txBox="1"/>
           <p:nvPr/>
         </p:nvSpPr>
@@ -35491,7 +35491,7 @@
       </p:sp>
       <p:sp>
         <p:nvSpPr>
-          <p:cNvPr id="5" name="Text 3"/>
+          <p:cNvPr id="5" name="mdpr:3-11-7e9600:title:__title:3-11-7e9600"/>
           <p:cNvSpPr txBox="1"/>
           <p:nvPr/>
         </p:nvSpPr>
@@ -35533,7 +35533,7 @@
       </p:sp>
       <p:sp>
         <p:nvSpPr>
-          <p:cNvPr id="6" name="Text 4"/>
+          <p:cNvPr id="6" name="mdpr:3-11-7e9600:left:block-6-chunk-3"/>
           <p:cNvSpPr txBox="1"/>
           <p:nvPr/>
         </p:nvSpPr>
@@ -35592,7 +35592,7 @@
       </p:sp>
       <p:sp>
         <p:nvSpPr>
-          <p:cNvPr id="7" name="Text 5"/>
+          <p:cNvPr id="7" name="mdpr:3-11-7e9600:right:block-6-chunk-3"/>
           <p:cNvSpPr txBox="1"/>
           <p:nvPr/>
         </p:nvSpPr>
@@ -35764,7 +35764,7 @@
       </p:sp>
       <p:sp>
         <p:nvSpPr>
-          <p:cNvPr id="5" name="Text 3"/>
+          <p:cNvPr id="5" name="mdpr:4-11-726d4f:title:__title:4-11-726d4f"/>
           <p:cNvSpPr txBox="1"/>
           <p:nvPr/>
         </p:nvSpPr>
@@ -35806,7 +35806,7 @@
       </p:sp>
       <p:sp>
         <p:nvSpPr>
-          <p:cNvPr id="6" name="Text 4"/>
+          <p:cNvPr id="6" name="mdpr:4-11-726d4f:left:block-6-chunk-4"/>
           <p:cNvSpPr txBox="1"/>
           <p:nvPr/>
         </p:nvSpPr>
@@ -35857,7 +35857,7 @@
                 <a:ea typeface="Pretendard" pitchFamily="34" charset="-122"/>
                 <a:cs typeface="Pretendard" pitchFamily="34" charset="-120"/>
               </a:rPr>
-              <a:t>  05. Override Manifest (9 headings, 3415 chars)</a:t>
+              <a:t>  05. Override Manifest (9 headings, 4030 chars)</a:t>
             </a:r>
             <a:endParaRPr lang="en-US" sz="2200" dirty="0"/>
           </a:p>
@@ -35865,7 +35865,7 @@
       </p:sp>
       <p:sp>
         <p:nvSpPr>
-          <p:cNvPr id="7" name="Text 5"/>
+          <p:cNvPr id="7" name="mdpr:4-11-726d4f:right:block-6-chunk-4"/>
           <p:cNvSpPr txBox="1"/>
           <p:nvPr/>
         </p:nvSpPr>
@@ -36037,7 +36037,7 @@
       </p:sp>
       <p:sp>
         <p:nvSpPr>
-          <p:cNvPr id="5" name="Text 3"/>
+          <p:cNvPr id="5" name="mdpr:5-11-929290:title:__title:5-11-929290"/>
           <p:cNvSpPr txBox="1"/>
           <p:nvPr/>
         </p:nvSpPr>
@@ -36079,7 +36079,7 @@
       </p:sp>
       <p:sp>
         <p:nvSpPr>
-          <p:cNvPr id="6" name="Text 4"/>
+          <p:cNvPr id="6" name="mdpr:5-11-929290:left:block-6-chunk-5"/>
           <p:cNvSpPr txBox="1"/>
           <p:nvPr/>
         </p:nvSpPr>
@@ -36138,7 +36138,7 @@
       </p:sp>
       <p:sp>
         <p:nvSpPr>
-          <p:cNvPr id="7" name="Text 5"/>
+          <p:cNvPr id="7" name="mdpr:5-11-929290:right:block-6-chunk-5"/>
           <p:cNvSpPr txBox="1"/>
           <p:nvPr/>
         </p:nvSpPr>

--- a/artifacts/mdpr-vs-skill/mdpr-baseline-result.pptx
+++ b/artifacts/mdpr-vs-skill/mdpr-baseline-result.pptx
@@ -4024,8 +4024,8 @@
         </p:blipFill>
         <p:spPr>
           <a:xfrm>
-            <a:off x="822960" y="1463040"/>
-            <a:ext cx="5029200" cy="1920240"/>
+            <a:off x="914400" y="1865376"/>
+            <a:ext cx="10241280" cy="1024128"/>
           </a:xfrm>
           <a:prstGeom prst="rect">
             <a:avLst/>
@@ -4040,8 +4040,8 @@
         </p:nvSpPr>
         <p:spPr>
           <a:xfrm>
-            <a:off x="822960" y="1463040"/>
-            <a:ext cx="5029200" cy="1920240"/>
+            <a:off x="914400" y="1865376"/>
+            <a:ext cx="10241280" cy="1024128"/>
           </a:xfrm>
           <a:prstGeom prst="rect">
             <a:avLst/>
@@ -4090,8 +4090,8 @@
         </p:blipFill>
         <p:spPr>
           <a:xfrm>
-            <a:off x="6309360" y="1463040"/>
-            <a:ext cx="5029200" cy="1920240"/>
+            <a:off x="914400" y="3191256"/>
+            <a:ext cx="10241280" cy="1024128"/>
           </a:xfrm>
           <a:prstGeom prst="rect">
             <a:avLst/>
@@ -4106,8 +4106,8 @@
         </p:nvSpPr>
         <p:spPr>
           <a:xfrm>
-            <a:off x="6309360" y="1463040"/>
-            <a:ext cx="5029200" cy="1920240"/>
+            <a:off x="914400" y="3191256"/>
+            <a:ext cx="10241280" cy="1024128"/>
           </a:xfrm>
           <a:prstGeom prst="rect">
             <a:avLst/>
@@ -4156,8 +4156,8 @@
         </p:blipFill>
         <p:spPr>
           <a:xfrm>
-            <a:off x="822960" y="3749040"/>
-            <a:ext cx="5029200" cy="1920240"/>
+            <a:off x="914400" y="4507992"/>
+            <a:ext cx="10241280" cy="1024128"/>
           </a:xfrm>
           <a:prstGeom prst="rect">
             <a:avLst/>
@@ -4172,8 +4172,8 @@
         </p:nvSpPr>
         <p:spPr>
           <a:xfrm>
-            <a:off x="822960" y="3749040"/>
-            <a:ext cx="5029200" cy="1920240"/>
+            <a:off x="914400" y="4507992"/>
+            <a:ext cx="10241280" cy="1024128"/>
           </a:xfrm>
           <a:prstGeom prst="rect">
             <a:avLst/>
@@ -4200,82 +4200,45 @@
           </a:effectLst>
         </p:spPr>
       </p:sp>
-      <p:pic>
-        <p:nvPicPr>
-          <p:cNvPr id="8" name="Image 3" descr="preencoded.png">    </p:cNvPr>
-          <p:cNvPicPr>
-            <a:picLocks noChangeAspect="1"/>
-          </p:cNvPicPr>
-          <p:nvPr/>
-        </p:nvPicPr>
-        <p:blipFill>
-          <a:blip r:embed="rId7">
-            <a:extLst>
-              <a:ext uri="{96DAC541-7B7A-43D3-8B79-37D633B846F1}">
-                <asvg:svgBlip xmlns:asvg="http://schemas.microsoft.com/office/drawing/2016/SVG/main" r:embed="rId8"/>
-              </a:ext>
-            </a:extLst>
-          </a:blip>
-          <a:stretch>
-            <a:fillRect/>
-          </a:stretch>
-        </p:blipFill>
-        <p:spPr>
-          <a:xfrm>
-            <a:off x="6309360" y="3749040"/>
-            <a:ext cx="5029200" cy="1920240"/>
-          </a:xfrm>
-          <a:prstGeom prst="rect">
-            <a:avLst/>
-          </a:prstGeom>
-        </p:spPr>
-      </p:pic>
-      <p:sp>
-        <p:nvSpPr>
-          <p:cNvPr id="9" name="Shape 3"/>
-          <p:cNvSpPr/>
-          <p:nvPr/>
-        </p:nvSpPr>
-        <p:spPr>
-          <a:xfrm>
-            <a:off x="6309360" y="3749040"/>
-            <a:ext cx="5029200" cy="1920240"/>
-          </a:xfrm>
-          <a:prstGeom prst="rect">
-            <a:avLst/>
-          </a:prstGeom>
-          <a:solidFill>
-            <a:srgbClr val="FFFFFF">
-              <a:alpha val="0"/>
+      <p:sp>
+        <p:nvSpPr>
+          <p:cNvPr id="8" name="Shape 3"/>
+          <p:cNvSpPr/>
+          <p:nvPr/>
+        </p:nvSpPr>
+        <p:spPr>
+          <a:xfrm>
+            <a:off x="786384" y="1956816"/>
+            <a:ext cx="32004" cy="3483864"/>
+          </a:xfrm>
+          <a:prstGeom prst="rect">
+            <a:avLst/>
+          </a:prstGeom>
+          <a:solidFill>
+            <a:srgbClr val="DBEAFE">
+              <a:alpha val="80000"/>
             </a:srgbClr>
           </a:solidFill>
           <a:ln w="12700">
             <a:solidFill>
-              <a:srgbClr val="E2E8F0">
+              <a:srgbClr val="DBEAFE">
                 <a:alpha val="0"/>
               </a:srgbClr>
             </a:solidFill>
             <a:prstDash val="solid"/>
           </a:ln>
-          <a:effectLst>
-            <a:outerShdw sx="100000" sy="100000" kx="0" ky="0" algn="bl" rotWithShape="0" blurRad="12700" dist="50800" dir="2700000">
-              <a:srgbClr val="000000">
-                <a:alpha val="8000"/>
-              </a:srgbClr>
-            </a:outerShdw>
-          </a:effectLst>
-        </p:spPr>
-      </p:sp>
-      <p:sp>
-        <p:nvSpPr>
-          <p:cNvPr id="10" name="Shape 4"/>
-          <p:cNvSpPr/>
-          <p:nvPr/>
-        </p:nvSpPr>
-        <p:spPr>
-          <a:xfrm>
-            <a:off x="822960" y="1463040"/>
-            <a:ext cx="73152" cy="1920240"/>
+        </p:spPr>
+      </p:sp>
+      <p:sp>
+        <p:nvSpPr>
+          <p:cNvPr id="9" name="Shape 4"/>
+          <p:cNvSpPr/>
+          <p:nvPr/>
+        </p:nvSpPr>
+        <p:spPr>
+          <a:xfrm>
+            <a:off x="914400" y="1865376"/>
+            <a:ext cx="73152" cy="1024128"/>
           </a:xfrm>
           <a:prstGeom prst="rect">
             <a:avLst/>
@@ -4295,14 +4258,14 @@
       </p:sp>
       <p:sp>
         <p:nvSpPr>
-          <p:cNvPr id="11" name="Shape 5"/>
-          <p:cNvSpPr/>
-          <p:nvPr/>
-        </p:nvSpPr>
-        <p:spPr>
-          <a:xfrm>
-            <a:off x="6309360" y="1463040"/>
-            <a:ext cx="73152" cy="1920240"/>
+          <p:cNvPr id="10" name="Shape 5"/>
+          <p:cNvSpPr/>
+          <p:nvPr/>
+        </p:nvSpPr>
+        <p:spPr>
+          <a:xfrm>
+            <a:off x="914400" y="3191256"/>
+            <a:ext cx="73152" cy="1024128"/>
           </a:xfrm>
           <a:prstGeom prst="rect">
             <a:avLst/>
@@ -4322,14 +4285,14 @@
       </p:sp>
       <p:sp>
         <p:nvSpPr>
-          <p:cNvPr id="12" name="Shape 6"/>
-          <p:cNvSpPr/>
-          <p:nvPr/>
-        </p:nvSpPr>
-        <p:spPr>
-          <a:xfrm>
-            <a:off x="822960" y="3749040"/>
-            <a:ext cx="73152" cy="1920240"/>
+          <p:cNvPr id="11" name="Shape 6"/>
+          <p:cNvSpPr/>
+          <p:nvPr/>
+        </p:nvSpPr>
+        <p:spPr>
+          <a:xfrm>
+            <a:off x="914400" y="4507992"/>
+            <a:ext cx="73152" cy="1024128"/>
           </a:xfrm>
           <a:prstGeom prst="rect">
             <a:avLst/>
@@ -4349,34 +4312,7 @@
       </p:sp>
       <p:sp>
         <p:nvSpPr>
-          <p:cNvPr id="13" name="Shape 7"/>
-          <p:cNvSpPr/>
-          <p:nvPr/>
-        </p:nvSpPr>
-        <p:spPr>
-          <a:xfrm>
-            <a:off x="6309360" y="3749040"/>
-            <a:ext cx="73152" cy="1920240"/>
-          </a:xfrm>
-          <a:prstGeom prst="rect">
-            <a:avLst/>
-          </a:prstGeom>
-          <a:solidFill>
-            <a:srgbClr val="DBEAFE"/>
-          </a:solidFill>
-          <a:ln w="12700">
-            <a:solidFill>
-              <a:srgbClr val="DBEAFE">
-                <a:alpha val="0"/>
-              </a:srgbClr>
-            </a:solidFill>
-            <a:prstDash val="solid"/>
-          </a:ln>
-        </p:spPr>
-      </p:sp>
-      <p:sp>
-        <p:nvSpPr>
-          <p:cNvPr id="14" name="mdpr:2-3-2107ad:title:__title:2-3-2107ad"/>
+          <p:cNvPr id="12" name="mdpr:2-3-2107ad:title:__title:2-3-2107ad"/>
           <p:cNvSpPr txBox="1"/>
           <p:nvPr/>
         </p:nvSpPr>
@@ -4418,14 +4354,56 @@
       </p:sp>
       <p:sp>
         <p:nvSpPr>
-          <p:cNvPr id="15" name="mdpr:2-3-2107ad:item-1:block-12-chunk-2"/>
+          <p:cNvPr id="13" name="mdpr:2-3-2107ad:item-1:block-12-chunk-2"/>
           <p:cNvSpPr txBox="1"/>
           <p:nvPr/>
         </p:nvSpPr>
         <p:spPr>
           <a:xfrm>
-            <a:off x="1042416" y="2209800"/>
-            <a:ext cx="4608576" cy="426720"/>
+            <a:off x="1133856" y="2164080"/>
+            <a:ext cx="9820656" cy="426720"/>
+          </a:xfrm>
+          <a:prstGeom prst="rect">
+            <a:avLst/>
+          </a:prstGeom>
+          <a:noFill/>
+          <a:ln/>
+        </p:spPr>
+        <p:txBody>
+          <a:bodyPr wrap="square" lIns="0" tIns="25400" rIns="25400" bIns="0" rtlCol="0" anchor="ctr"/>
+          <a:lstStyle/>
+          <a:p>
+            <a:pPr algn="ctr" indent="0" marL="0">
+              <a:lnSpc>
+                <a:spcPct val="120000"/>
+              </a:lnSpc>
+              <a:buNone/>
+            </a:pPr>
+            <a:r>
+              <a:rPr lang="en-US" sz="2200" dirty="0">
+                <a:solidFill>
+                  <a:srgbClr val="111111"/>
+                </a:solidFill>
+                <a:latin typeface="Pretendard" pitchFamily="34" charset="0"/>
+                <a:ea typeface="Pretendard" pitchFamily="34" charset="-122"/>
+                <a:cs typeface="Pretendard" pitchFamily="34" charset="-120"/>
+              </a:rPr>
+              <a:t>slide candidate</a:t>
+            </a:r>
+            <a:endParaRPr lang="en-US" sz="2200" dirty="0"/>
+          </a:p>
+        </p:txBody>
+      </p:sp>
+      <p:sp>
+        <p:nvSpPr>
+          <p:cNvPr id="14" name="mdpr:2-3-2107ad:item-2:block-12-chunk-2"/>
+          <p:cNvSpPr txBox="1"/>
+          <p:nvPr/>
+        </p:nvSpPr>
+        <p:spPr>
+          <a:xfrm>
+            <a:off x="1133856" y="3489960"/>
+            <a:ext cx="9820656" cy="426720"/>
           </a:xfrm>
           <a:prstGeom prst="rect">
             <a:avLst/>
@@ -4460,14 +4438,14 @@
       </p:sp>
       <p:sp>
         <p:nvSpPr>
-          <p:cNvPr id="16" name="mdpr:2-3-2107ad:item-2:block-12-chunk-2"/>
+          <p:cNvPr id="15" name="mdpr:2-3-2107ad:item-3:block-12-chunk-2"/>
           <p:cNvSpPr txBox="1"/>
           <p:nvPr/>
         </p:nvSpPr>
         <p:spPr>
           <a:xfrm>
-            <a:off x="6528816" y="2042160"/>
-            <a:ext cx="4608576" cy="762000"/>
+            <a:off x="1133856" y="4806696"/>
+            <a:ext cx="9820656" cy="426720"/>
           </a:xfrm>
           <a:prstGeom prst="rect">
             <a:avLst/>
@@ -4495,90 +4473,6 @@
                 <a:cs typeface="Pretendard" pitchFamily="34" charset="-120"/>
               </a:rPr>
               <a:t>Parse CommonMark/GFM Markdown into an AST.</a:t>
-            </a:r>
-            <a:endParaRPr lang="en-US" sz="2200" dirty="0"/>
-          </a:p>
-        </p:txBody>
-      </p:sp>
-      <p:sp>
-        <p:nvSpPr>
-          <p:cNvPr id="17" name="mdpr:2-3-2107ad:item-3:block-12-chunk-2"/>
-          <p:cNvSpPr txBox="1"/>
-          <p:nvPr/>
-        </p:nvSpPr>
-        <p:spPr>
-          <a:xfrm>
-            <a:off x="1042416" y="4160520"/>
-            <a:ext cx="4608576" cy="1097280"/>
-          </a:xfrm>
-          <a:prstGeom prst="rect">
-            <a:avLst/>
-          </a:prstGeom>
-          <a:noFill/>
-          <a:ln/>
-        </p:spPr>
-        <p:txBody>
-          <a:bodyPr wrap="square" lIns="0" tIns="25400" rIns="25400" bIns="0" rtlCol="0" anchor="ctr"/>
-          <a:lstStyle/>
-          <a:p>
-            <a:pPr algn="ctr" indent="0" marL="0">
-              <a:lnSpc>
-                <a:spcPct val="120000"/>
-              </a:lnSpc>
-              <a:buNone/>
-            </a:pPr>
-            <a:r>
-              <a:rPr lang="en-US" sz="2200" dirty="0">
-                <a:solidFill>
-                  <a:srgbClr val="111111"/>
-                </a:solidFill>
-                <a:latin typeface="Pretendard" pitchFamily="34" charset="0"/>
-                <a:ea typeface="Pretendard" pitchFamily="34" charset="-122"/>
-                <a:cs typeface="Pretendard" pitchFamily="34" charset="-120"/>
-              </a:rPr>
-              <a:t>Convert the AST into MDPR BlockIR while preserving presentation-relevant</a:t>
-            </a:r>
-            <a:endParaRPr lang="en-US" sz="2200" dirty="0"/>
-          </a:p>
-        </p:txBody>
-      </p:sp>
-      <p:sp>
-        <p:nvSpPr>
-          <p:cNvPr id="18" name="mdpr:2-3-2107ad:item-4:block-12-chunk-2"/>
-          <p:cNvSpPr txBox="1"/>
-          <p:nvPr/>
-        </p:nvSpPr>
-        <p:spPr>
-          <a:xfrm>
-            <a:off x="6528816" y="4160520"/>
-            <a:ext cx="4608576" cy="1097280"/>
-          </a:xfrm>
-          <a:prstGeom prst="rect">
-            <a:avLst/>
-          </a:prstGeom>
-          <a:noFill/>
-          <a:ln/>
-        </p:spPr>
-        <p:txBody>
-          <a:bodyPr wrap="square" lIns="0" tIns="25400" rIns="25400" bIns="0" rtlCol="0" anchor="ctr"/>
-          <a:lstStyle/>
-          <a:p>
-            <a:pPr algn="ctr" indent="0" marL="0">
-              <a:lnSpc>
-                <a:spcPct val="120000"/>
-              </a:lnSpc>
-              <a:buNone/>
-            </a:pPr>
-            <a:r>
-              <a:rPr lang="en-US" sz="2200" dirty="0">
-                <a:solidFill>
-                  <a:srgbClr val="111111"/>
-                </a:solidFill>
-                <a:latin typeface="Pretendard" pitchFamily="34" charset="0"/>
-                <a:ea typeface="Pretendard" pitchFamily="34" charset="-122"/>
-                <a:cs typeface="Pretendard" pitchFamily="34" charset="-120"/>
-              </a:rPr>
-              <a:t>Normalize Pandoc JSON into BlockIR when --parser pandoc is selected.</a:t>
             </a:r>
             <a:endParaRPr lang="en-US" sz="2200" dirty="0"/>
           </a:p>
@@ -4787,8 +4681,51 @@
                 <a:ea typeface="Pretendard" pitchFamily="34" charset="-122"/>
                 <a:cs typeface="Pretendard" pitchFamily="34" charset="-120"/>
               </a:rPr>
+              <a:t>- Convert the AST into MDPR BlockIR while preserving presentation-relevant</a:t>
+            </a:r>
+            <a:endParaRPr lang="en-US" sz="1800" dirty="0"/>
+          </a:p>
+          <a:p>
+            <a:pPr algn="l" indent="0" marL="0">
+              <a:lnSpc>
+                <a:spcPct val="120000"/>
+              </a:lnSpc>
+              <a:buNone/>
+            </a:pPr>
+            <a:r>
+              <a:rPr lang="en-US" sz="1800" dirty="0">
+                <a:solidFill>
+                  <a:srgbClr val="111111"/>
+                </a:solidFill>
+                <a:latin typeface="Pretendard" pitchFamily="34" charset="0"/>
+                <a:ea typeface="Pretendard" pitchFamily="34" charset="-122"/>
+                <a:cs typeface="Pretendard" pitchFamily="34" charset="-120"/>
+              </a:rPr>
+              <a:t>- Normalize Pandoc JSON into BlockIR when --parser pandoc is selected.</a:t>
+            </a:r>
+            <a:endParaRPr lang="en-US" sz="1800" dirty="0"/>
+          </a:p>
+          <a:p>
+            <a:pPr algn="l" indent="0" marL="0">
+              <a:lnSpc>
+                <a:spcPct val="120000"/>
+              </a:lnSpc>
+              <a:buNone/>
+            </a:pPr>
+            <a:r>
+              <a:rPr lang="en-US" sz="1800" dirty="0">
+                <a:solidFill>
+                  <a:srgbClr val="111111"/>
+                </a:solidFill>
+                <a:latin typeface="Pretendard" pitchFamily="34" charset="0"/>
+                <a:ea typeface="Pretendard" pitchFamily="34" charset="-122"/>
+                <a:cs typeface="Pretendard" pitchFamily="34" charset="-120"/>
+              </a:rPr>
               <a:t>- Build the heading tree.</a:t>
             </a:r>
+            <a:endParaRPr lang="en-US" sz="1800" dirty="0"/>
+          </a:p>
+          <a:p>
             <a:pPr algn="l" indent="0" marL="0">
               <a:lnSpc>
                 <a:spcPct val="120000"/>
@@ -5640,8 +5577,8 @@
         </p:blipFill>
         <p:spPr>
           <a:xfrm>
-            <a:off x="822960" y="1463040"/>
-            <a:ext cx="5029200" cy="1920240"/>
+            <a:off x="914400" y="1865376"/>
+            <a:ext cx="10241280" cy="1024128"/>
           </a:xfrm>
           <a:prstGeom prst="rect">
             <a:avLst/>
@@ -5656,8 +5593,8 @@
         </p:nvSpPr>
         <p:spPr>
           <a:xfrm>
-            <a:off x="822960" y="1463040"/>
-            <a:ext cx="5029200" cy="1920240"/>
+            <a:off x="914400" y="1865376"/>
+            <a:ext cx="10241280" cy="1024128"/>
           </a:xfrm>
           <a:prstGeom prst="rect">
             <a:avLst/>
@@ -5706,8 +5643,8 @@
         </p:blipFill>
         <p:spPr>
           <a:xfrm>
-            <a:off x="6309360" y="1463040"/>
-            <a:ext cx="5029200" cy="1920240"/>
+            <a:off x="914400" y="3191256"/>
+            <a:ext cx="10241280" cy="1024128"/>
           </a:xfrm>
           <a:prstGeom prst="rect">
             <a:avLst/>
@@ -5722,8 +5659,8 @@
         </p:nvSpPr>
         <p:spPr>
           <a:xfrm>
-            <a:off x="6309360" y="1463040"/>
-            <a:ext cx="5029200" cy="1920240"/>
+            <a:off x="914400" y="3191256"/>
+            <a:ext cx="10241280" cy="1024128"/>
           </a:xfrm>
           <a:prstGeom prst="rect">
             <a:avLst/>
@@ -5772,8 +5709,8 @@
         </p:blipFill>
         <p:spPr>
           <a:xfrm>
-            <a:off x="822960" y="3749040"/>
-            <a:ext cx="5029200" cy="1920240"/>
+            <a:off x="914400" y="4507992"/>
+            <a:ext cx="10241280" cy="1024128"/>
           </a:xfrm>
           <a:prstGeom prst="rect">
             <a:avLst/>
@@ -5788,8 +5725,8 @@
         </p:nvSpPr>
         <p:spPr>
           <a:xfrm>
-            <a:off x="822960" y="3749040"/>
-            <a:ext cx="5029200" cy="1920240"/>
+            <a:off x="914400" y="4507992"/>
+            <a:ext cx="10241280" cy="1024128"/>
           </a:xfrm>
           <a:prstGeom prst="rect">
             <a:avLst/>
@@ -5816,82 +5753,45 @@
           </a:effectLst>
         </p:spPr>
       </p:sp>
-      <p:pic>
-        <p:nvPicPr>
-          <p:cNvPr id="8" name="Image 3" descr="preencoded.png">    </p:cNvPr>
-          <p:cNvPicPr>
-            <a:picLocks noChangeAspect="1"/>
-          </p:cNvPicPr>
-          <p:nvPr/>
-        </p:nvPicPr>
-        <p:blipFill>
-          <a:blip r:embed="rId7">
-            <a:extLst>
-              <a:ext uri="{96DAC541-7B7A-43D3-8B79-37D633B846F1}">
-                <asvg:svgBlip xmlns:asvg="http://schemas.microsoft.com/office/drawing/2016/SVG/main" r:embed="rId8"/>
-              </a:ext>
-            </a:extLst>
-          </a:blip>
-          <a:stretch>
-            <a:fillRect/>
-          </a:stretch>
-        </p:blipFill>
-        <p:spPr>
-          <a:xfrm>
-            <a:off x="6309360" y="3749040"/>
-            <a:ext cx="5029200" cy="1920240"/>
-          </a:xfrm>
-          <a:prstGeom prst="rect">
-            <a:avLst/>
-          </a:prstGeom>
-        </p:spPr>
-      </p:pic>
-      <p:sp>
-        <p:nvSpPr>
-          <p:cNvPr id="9" name="Shape 3"/>
-          <p:cNvSpPr/>
-          <p:nvPr/>
-        </p:nvSpPr>
-        <p:spPr>
-          <a:xfrm>
-            <a:off x="6309360" y="3749040"/>
-            <a:ext cx="5029200" cy="1920240"/>
-          </a:xfrm>
-          <a:prstGeom prst="rect">
-            <a:avLst/>
-          </a:prstGeom>
-          <a:solidFill>
-            <a:srgbClr val="FFFFFF">
-              <a:alpha val="0"/>
+      <p:sp>
+        <p:nvSpPr>
+          <p:cNvPr id="8" name="Shape 3"/>
+          <p:cNvSpPr/>
+          <p:nvPr/>
+        </p:nvSpPr>
+        <p:spPr>
+          <a:xfrm>
+            <a:off x="786384" y="1956816"/>
+            <a:ext cx="32004" cy="3483864"/>
+          </a:xfrm>
+          <a:prstGeom prst="rect">
+            <a:avLst/>
+          </a:prstGeom>
+          <a:solidFill>
+            <a:srgbClr val="DBEAFE">
+              <a:alpha val="80000"/>
             </a:srgbClr>
           </a:solidFill>
           <a:ln w="12700">
             <a:solidFill>
-              <a:srgbClr val="E2E8F0">
+              <a:srgbClr val="DBEAFE">
                 <a:alpha val="0"/>
               </a:srgbClr>
             </a:solidFill>
             <a:prstDash val="solid"/>
           </a:ln>
-          <a:effectLst>
-            <a:outerShdw sx="100000" sy="100000" kx="0" ky="0" algn="bl" rotWithShape="0" blurRad="12700" dist="50800" dir="2700000">
-              <a:srgbClr val="000000">
-                <a:alpha val="8000"/>
-              </a:srgbClr>
-            </a:outerShdw>
-          </a:effectLst>
-        </p:spPr>
-      </p:sp>
-      <p:sp>
-        <p:nvSpPr>
-          <p:cNvPr id="10" name="Shape 4"/>
-          <p:cNvSpPr/>
-          <p:nvPr/>
-        </p:nvSpPr>
-        <p:spPr>
-          <a:xfrm>
-            <a:off x="822960" y="1463040"/>
-            <a:ext cx="73152" cy="1920240"/>
+        </p:spPr>
+      </p:sp>
+      <p:sp>
+        <p:nvSpPr>
+          <p:cNvPr id="9" name="Shape 4"/>
+          <p:cNvSpPr/>
+          <p:nvPr/>
+        </p:nvSpPr>
+        <p:spPr>
+          <a:xfrm>
+            <a:off x="914400" y="1865376"/>
+            <a:ext cx="73152" cy="1024128"/>
           </a:xfrm>
           <a:prstGeom prst="rect">
             <a:avLst/>
@@ -5911,14 +5811,14 @@
       </p:sp>
       <p:sp>
         <p:nvSpPr>
-          <p:cNvPr id="11" name="Shape 5"/>
-          <p:cNvSpPr/>
-          <p:nvPr/>
-        </p:nvSpPr>
-        <p:spPr>
-          <a:xfrm>
-            <a:off x="6309360" y="1463040"/>
-            <a:ext cx="73152" cy="1920240"/>
+          <p:cNvPr id="10" name="Shape 5"/>
+          <p:cNvSpPr/>
+          <p:nvPr/>
+        </p:nvSpPr>
+        <p:spPr>
+          <a:xfrm>
+            <a:off x="914400" y="3191256"/>
+            <a:ext cx="73152" cy="1024128"/>
           </a:xfrm>
           <a:prstGeom prst="rect">
             <a:avLst/>
@@ -5938,14 +5838,14 @@
       </p:sp>
       <p:sp>
         <p:nvSpPr>
-          <p:cNvPr id="12" name="Shape 6"/>
-          <p:cNvSpPr/>
-          <p:nvPr/>
-        </p:nvSpPr>
-        <p:spPr>
-          <a:xfrm>
-            <a:off x="822960" y="3749040"/>
-            <a:ext cx="73152" cy="1920240"/>
+          <p:cNvPr id="11" name="Shape 6"/>
+          <p:cNvSpPr/>
+          <p:nvPr/>
+        </p:nvSpPr>
+        <p:spPr>
+          <a:xfrm>
+            <a:off x="914400" y="4507992"/>
+            <a:ext cx="73152" cy="1024128"/>
           </a:xfrm>
           <a:prstGeom prst="rect">
             <a:avLst/>
@@ -5965,34 +5865,7 @@
       </p:sp>
       <p:sp>
         <p:nvSpPr>
-          <p:cNvPr id="13" name="Shape 7"/>
-          <p:cNvSpPr/>
-          <p:nvPr/>
-        </p:nvSpPr>
-        <p:spPr>
-          <a:xfrm>
-            <a:off x="6309360" y="3749040"/>
-            <a:ext cx="73152" cy="1920240"/>
-          </a:xfrm>
-          <a:prstGeom prst="rect">
-            <a:avLst/>
-          </a:prstGeom>
-          <a:solidFill>
-            <a:srgbClr val="DBEAFE"/>
-          </a:solidFill>
-          <a:ln w="12700">
-            <a:solidFill>
-              <a:srgbClr val="DBEAFE">
-                <a:alpha val="0"/>
-              </a:srgbClr>
-            </a:solidFill>
-            <a:prstDash val="solid"/>
-          </a:ln>
-        </p:spPr>
-      </p:sp>
-      <p:sp>
-        <p:nvSpPr>
-          <p:cNvPr id="14" name="mdpr:1-3-c0cf7e:title:__title:1-3-c0cf7e"/>
+          <p:cNvPr id="12" name="mdpr:1-3-c0cf7e:title:__title:1-3-c0cf7e"/>
           <p:cNvSpPr txBox="1"/>
           <p:nvPr/>
         </p:nvSpPr>
@@ -6034,14 +5907,14 @@
       </p:sp>
       <p:sp>
         <p:nvSpPr>
-          <p:cNvPr id="15" name="mdpr:1-3-c0cf7e:item-1:block-16-chunk-1"/>
+          <p:cNvPr id="13" name="mdpr:1-3-c0cf7e:item-1:block-16-chunk-1"/>
           <p:cNvSpPr txBox="1"/>
           <p:nvPr/>
         </p:nvSpPr>
         <p:spPr>
           <a:xfrm>
-            <a:off x="1042416" y="2209800"/>
-            <a:ext cx="4608576" cy="426720"/>
+            <a:off x="1133856" y="2164080"/>
+            <a:ext cx="9820656" cy="426720"/>
           </a:xfrm>
           <a:prstGeom prst="rect">
             <a:avLst/>
@@ -6076,14 +5949,14 @@
       </p:sp>
       <p:sp>
         <p:nvSpPr>
-          <p:cNvPr id="16" name="mdpr:1-3-c0cf7e:item-2:block-16-chunk-1"/>
+          <p:cNvPr id="14" name="mdpr:1-3-c0cf7e:item-2:block-16-chunk-1"/>
           <p:cNvSpPr txBox="1"/>
           <p:nvPr/>
         </p:nvSpPr>
         <p:spPr>
           <a:xfrm>
-            <a:off x="6528816" y="2209800"/>
-            <a:ext cx="4608576" cy="426720"/>
+            <a:off x="1133856" y="3489960"/>
+            <a:ext cx="9820656" cy="426720"/>
           </a:xfrm>
           <a:prstGeom prst="rect">
             <a:avLst/>
@@ -6118,14 +5991,14 @@
       </p:sp>
       <p:sp>
         <p:nvSpPr>
-          <p:cNvPr id="17" name="mdpr:1-3-c0cf7e:item-3:block-16-chunk-1"/>
+          <p:cNvPr id="15" name="mdpr:1-3-c0cf7e:item-3:block-16-chunk-1"/>
           <p:cNvSpPr txBox="1"/>
           <p:nvPr/>
         </p:nvSpPr>
         <p:spPr>
           <a:xfrm>
-            <a:off x="1042416" y="4495800"/>
-            <a:ext cx="4608576" cy="426720"/>
+            <a:off x="1133856" y="4806696"/>
+            <a:ext cx="9820656" cy="426720"/>
           </a:xfrm>
           <a:prstGeom prst="rect">
             <a:avLst/>
@@ -6153,48 +6026,6 @@
                 <a:cs typeface="Pretendard" pitchFamily="34" charset="-120"/>
               </a:rPr>
               <a:t>Intent Detection</a:t>
-            </a:r>
-            <a:endParaRPr lang="en-US" sz="2200" dirty="0"/>
-          </a:p>
-        </p:txBody>
-      </p:sp>
-      <p:sp>
-        <p:nvSpPr>
-          <p:cNvPr id="18" name="mdpr:1-3-c0cf7e:item-4:block-16-chunk-1"/>
-          <p:cNvSpPr txBox="1"/>
-          <p:nvPr/>
-        </p:nvSpPr>
-        <p:spPr>
-          <a:xfrm>
-            <a:off x="6528816" y="4495800"/>
-            <a:ext cx="4608576" cy="426720"/>
-          </a:xfrm>
-          <a:prstGeom prst="rect">
-            <a:avLst/>
-          </a:prstGeom>
-          <a:noFill/>
-          <a:ln/>
-        </p:spPr>
-        <p:txBody>
-          <a:bodyPr wrap="square" lIns="0" tIns="25400" rIns="25400" bIns="0" rtlCol="0" anchor="ctr"/>
-          <a:lstStyle/>
-          <a:p>
-            <a:pPr algn="ctr" indent="0" marL="0">
-              <a:lnSpc>
-                <a:spcPct val="120000"/>
-              </a:lnSpc>
-              <a:buNone/>
-            </a:pPr>
-            <a:r>
-              <a:rPr lang="en-US" sz="2200" dirty="0">
-                <a:solidFill>
-                  <a:srgbClr val="111111"/>
-                </a:solidFill>
-                <a:latin typeface="Pretendard" pitchFamily="34" charset="0"/>
-                <a:ea typeface="Pretendard" pitchFamily="34" charset="-122"/>
-                <a:cs typeface="Pretendard" pitchFamily="34" charset="-120"/>
-              </a:rPr>
-              <a:t>Count-Based Layouts</a:t>
             </a:r>
             <a:endParaRPr lang="en-US" sz="2200" dirty="0"/>
           </a:p>
@@ -6254,8 +6085,8 @@
         </p:blipFill>
         <p:spPr>
           <a:xfrm>
-            <a:off x="822960" y="1463040"/>
-            <a:ext cx="5029200" cy="1920240"/>
+            <a:off x="914400" y="1865376"/>
+            <a:ext cx="10241280" cy="1024128"/>
           </a:xfrm>
           <a:prstGeom prst="rect">
             <a:avLst/>
@@ -6270,8 +6101,8 @@
         </p:nvSpPr>
         <p:spPr>
           <a:xfrm>
-            <a:off x="822960" y="1463040"/>
-            <a:ext cx="5029200" cy="1920240"/>
+            <a:off x="914400" y="1865376"/>
+            <a:ext cx="10241280" cy="1024128"/>
           </a:xfrm>
           <a:prstGeom prst="rect">
             <a:avLst/>
@@ -6320,8 +6151,8 @@
         </p:blipFill>
         <p:spPr>
           <a:xfrm>
-            <a:off x="6309360" y="1463040"/>
-            <a:ext cx="5029200" cy="1920240"/>
+            <a:off x="914400" y="3191256"/>
+            <a:ext cx="10241280" cy="1024128"/>
           </a:xfrm>
           <a:prstGeom prst="rect">
             <a:avLst/>
@@ -6336,8 +6167,8 @@
         </p:nvSpPr>
         <p:spPr>
           <a:xfrm>
-            <a:off x="6309360" y="1463040"/>
-            <a:ext cx="5029200" cy="1920240"/>
+            <a:off x="914400" y="3191256"/>
+            <a:ext cx="10241280" cy="1024128"/>
           </a:xfrm>
           <a:prstGeom prst="rect">
             <a:avLst/>
@@ -6386,8 +6217,8 @@
         </p:blipFill>
         <p:spPr>
           <a:xfrm>
-            <a:off x="822960" y="3749040"/>
-            <a:ext cx="5029200" cy="1920240"/>
+            <a:off x="914400" y="4507992"/>
+            <a:ext cx="10241280" cy="1024128"/>
           </a:xfrm>
           <a:prstGeom prst="rect">
             <a:avLst/>
@@ -6402,8 +6233,8 @@
         </p:nvSpPr>
         <p:spPr>
           <a:xfrm>
-            <a:off x="822960" y="3749040"/>
-            <a:ext cx="5029200" cy="1920240"/>
+            <a:off x="914400" y="4507992"/>
+            <a:ext cx="10241280" cy="1024128"/>
           </a:xfrm>
           <a:prstGeom prst="rect">
             <a:avLst/>
@@ -6430,82 +6261,45 @@
           </a:effectLst>
         </p:spPr>
       </p:sp>
-      <p:pic>
-        <p:nvPicPr>
-          <p:cNvPr id="8" name="Image 3" descr="preencoded.png">    </p:cNvPr>
-          <p:cNvPicPr>
-            <a:picLocks noChangeAspect="1"/>
-          </p:cNvPicPr>
-          <p:nvPr/>
-        </p:nvPicPr>
-        <p:blipFill>
-          <a:blip r:embed="rId7">
-            <a:extLst>
-              <a:ext uri="{96DAC541-7B7A-43D3-8B79-37D633B846F1}">
-                <asvg:svgBlip xmlns:asvg="http://schemas.microsoft.com/office/drawing/2016/SVG/main" r:embed="rId8"/>
-              </a:ext>
-            </a:extLst>
-          </a:blip>
-          <a:stretch>
-            <a:fillRect/>
-          </a:stretch>
-        </p:blipFill>
-        <p:spPr>
-          <a:xfrm>
-            <a:off x="6309360" y="3749040"/>
-            <a:ext cx="5029200" cy="1920240"/>
-          </a:xfrm>
-          <a:prstGeom prst="rect">
-            <a:avLst/>
-          </a:prstGeom>
-        </p:spPr>
-      </p:pic>
-      <p:sp>
-        <p:nvSpPr>
-          <p:cNvPr id="9" name="Shape 3"/>
-          <p:cNvSpPr/>
-          <p:nvPr/>
-        </p:nvSpPr>
-        <p:spPr>
-          <a:xfrm>
-            <a:off x="6309360" y="3749040"/>
-            <a:ext cx="5029200" cy="1920240"/>
-          </a:xfrm>
-          <a:prstGeom prst="rect">
-            <a:avLst/>
-          </a:prstGeom>
-          <a:solidFill>
-            <a:srgbClr val="FFFFFF">
-              <a:alpha val="0"/>
+      <p:sp>
+        <p:nvSpPr>
+          <p:cNvPr id="8" name="Shape 3"/>
+          <p:cNvSpPr/>
+          <p:nvPr/>
+        </p:nvSpPr>
+        <p:spPr>
+          <a:xfrm>
+            <a:off x="786384" y="1956816"/>
+            <a:ext cx="32004" cy="3483864"/>
+          </a:xfrm>
+          <a:prstGeom prst="rect">
+            <a:avLst/>
+          </a:prstGeom>
+          <a:solidFill>
+            <a:srgbClr val="DBEAFE">
+              <a:alpha val="80000"/>
             </a:srgbClr>
           </a:solidFill>
           <a:ln w="12700">
             <a:solidFill>
-              <a:srgbClr val="E2E8F0">
+              <a:srgbClr val="DBEAFE">
                 <a:alpha val="0"/>
               </a:srgbClr>
             </a:solidFill>
             <a:prstDash val="solid"/>
           </a:ln>
-          <a:effectLst>
-            <a:outerShdw sx="100000" sy="100000" kx="0" ky="0" algn="bl" rotWithShape="0" blurRad="12700" dist="50800" dir="2700000">
-              <a:srgbClr val="000000">
-                <a:alpha val="8000"/>
-              </a:srgbClr>
-            </a:outerShdw>
-          </a:effectLst>
-        </p:spPr>
-      </p:sp>
-      <p:sp>
-        <p:nvSpPr>
-          <p:cNvPr id="10" name="Shape 4"/>
-          <p:cNvSpPr/>
-          <p:nvPr/>
-        </p:nvSpPr>
-        <p:spPr>
-          <a:xfrm>
-            <a:off x="822960" y="1463040"/>
-            <a:ext cx="73152" cy="1920240"/>
+        </p:spPr>
+      </p:sp>
+      <p:sp>
+        <p:nvSpPr>
+          <p:cNvPr id="9" name="Shape 4"/>
+          <p:cNvSpPr/>
+          <p:nvPr/>
+        </p:nvSpPr>
+        <p:spPr>
+          <a:xfrm>
+            <a:off x="914400" y="1865376"/>
+            <a:ext cx="73152" cy="1024128"/>
           </a:xfrm>
           <a:prstGeom prst="rect">
             <a:avLst/>
@@ -6525,14 +6319,14 @@
       </p:sp>
       <p:sp>
         <p:nvSpPr>
-          <p:cNvPr id="11" name="Shape 5"/>
-          <p:cNvSpPr/>
-          <p:nvPr/>
-        </p:nvSpPr>
-        <p:spPr>
-          <a:xfrm>
-            <a:off x="6309360" y="1463040"/>
-            <a:ext cx="73152" cy="1920240"/>
+          <p:cNvPr id="10" name="Shape 5"/>
+          <p:cNvSpPr/>
+          <p:nvPr/>
+        </p:nvSpPr>
+        <p:spPr>
+          <a:xfrm>
+            <a:off x="914400" y="3191256"/>
+            <a:ext cx="73152" cy="1024128"/>
           </a:xfrm>
           <a:prstGeom prst="rect">
             <a:avLst/>
@@ -6552,14 +6346,14 @@
       </p:sp>
       <p:sp>
         <p:nvSpPr>
-          <p:cNvPr id="12" name="Shape 6"/>
-          <p:cNvSpPr/>
-          <p:nvPr/>
-        </p:nvSpPr>
-        <p:spPr>
-          <a:xfrm>
-            <a:off x="822960" y="3749040"/>
-            <a:ext cx="73152" cy="1920240"/>
+          <p:cNvPr id="11" name="Shape 6"/>
+          <p:cNvSpPr/>
+          <p:nvPr/>
+        </p:nvSpPr>
+        <p:spPr>
+          <a:xfrm>
+            <a:off x="914400" y="4507992"/>
+            <a:ext cx="73152" cy="1024128"/>
           </a:xfrm>
           <a:prstGeom prst="rect">
             <a:avLst/>
@@ -6579,34 +6373,7 @@
       </p:sp>
       <p:sp>
         <p:nvSpPr>
-          <p:cNvPr id="13" name="Shape 7"/>
-          <p:cNvSpPr/>
-          <p:nvPr/>
-        </p:nvSpPr>
-        <p:spPr>
-          <a:xfrm>
-            <a:off x="6309360" y="3749040"/>
-            <a:ext cx="73152" cy="1920240"/>
-          </a:xfrm>
-          <a:prstGeom prst="rect">
-            <a:avLst/>
-          </a:prstGeom>
-          <a:solidFill>
-            <a:srgbClr val="DBEAFE"/>
-          </a:solidFill>
-          <a:ln w="12700">
-            <a:solidFill>
-              <a:srgbClr val="DBEAFE">
-                <a:alpha val="0"/>
-              </a:srgbClr>
-            </a:solidFill>
-            <a:prstDash val="solid"/>
-          </a:ln>
-        </p:spPr>
-      </p:sp>
-      <p:sp>
-        <p:nvSpPr>
-          <p:cNvPr id="14" name="mdpr:2-3-500204:title:__title:2-3-500204"/>
+          <p:cNvPr id="12" name="mdpr:2-3-500204:title:__title:2-3-500204"/>
           <p:cNvSpPr txBox="1"/>
           <p:nvPr/>
         </p:nvSpPr>
@@ -6648,14 +6415,56 @@
       </p:sp>
       <p:sp>
         <p:nvSpPr>
-          <p:cNvPr id="15" name="mdpr:2-3-500204:item-1:block-16-chunk-2"/>
+          <p:cNvPr id="13" name="mdpr:2-3-500204:item-1:block-16-chunk-2"/>
           <p:cNvSpPr txBox="1"/>
           <p:nvPr/>
         </p:nvSpPr>
         <p:spPr>
           <a:xfrm>
-            <a:off x="1042416" y="2209800"/>
-            <a:ext cx="4608576" cy="426720"/>
+            <a:off x="1133856" y="2164080"/>
+            <a:ext cx="9820656" cy="426720"/>
+          </a:xfrm>
+          <a:prstGeom prst="rect">
+            <a:avLst/>
+          </a:prstGeom>
+          <a:noFill/>
+          <a:ln/>
+        </p:spPr>
+        <p:txBody>
+          <a:bodyPr wrap="square" lIns="0" tIns="25400" rIns="25400" bIns="0" rtlCol="0" anchor="ctr"/>
+          <a:lstStyle/>
+          <a:p>
+            <a:pPr algn="ctr" indent="0" marL="0">
+              <a:lnSpc>
+                <a:spcPct val="120000"/>
+              </a:lnSpc>
+              <a:buNone/>
+            </a:pPr>
+            <a:r>
+              <a:rPr lang="en-US" sz="2200" dirty="0">
+                <a:solidFill>
+                  <a:srgbClr val="111111"/>
+                </a:solidFill>
+                <a:latin typeface="Pretendard" pitchFamily="34" charset="0"/>
+                <a:ea typeface="Pretendard" pitchFamily="34" charset="-122"/>
+                <a:cs typeface="Pretendard" pitchFamily="34" charset="-120"/>
+              </a:rPr>
+              <a:t>Count-Based Layouts</a:t>
+            </a:r>
+            <a:endParaRPr lang="en-US" sz="2200" dirty="0"/>
+          </a:p>
+        </p:txBody>
+      </p:sp>
+      <p:sp>
+        <p:nvSpPr>
+          <p:cNvPr id="14" name="mdpr:2-3-500204:item-2:block-16-chunk-2"/>
+          <p:cNvSpPr txBox="1"/>
+          <p:nvPr/>
+        </p:nvSpPr>
+        <p:spPr>
+          <a:xfrm>
+            <a:off x="1133856" y="3489960"/>
+            <a:ext cx="9820656" cy="426720"/>
           </a:xfrm>
           <a:prstGeom prst="rect">
             <a:avLst/>
@@ -6690,14 +6499,14 @@
       </p:sp>
       <p:sp>
         <p:nvSpPr>
-          <p:cNvPr id="16" name="mdpr:2-3-500204:item-2:block-16-chunk-2"/>
+          <p:cNvPr id="15" name="mdpr:2-3-500204:item-3:block-16-chunk-2"/>
           <p:cNvSpPr txBox="1"/>
           <p:nvPr/>
         </p:nvSpPr>
         <p:spPr>
           <a:xfrm>
-            <a:off x="6528816" y="2042160"/>
-            <a:ext cx="4608576" cy="762000"/>
+            <a:off x="1133856" y="4806696"/>
+            <a:ext cx="9820656" cy="426720"/>
           </a:xfrm>
           <a:prstGeom prst="rect">
             <a:avLst/>
@@ -6725,90 +6534,6 @@
                 <a:cs typeface="Pretendard" pitchFamily="34" charset="-120"/>
               </a:rPr>
               <a:t>Use the deck title as the single header.</a:t>
-            </a:r>
-            <a:endParaRPr lang="en-US" sz="2200" dirty="0"/>
-          </a:p>
-        </p:txBody>
-      </p:sp>
-      <p:sp>
-        <p:nvSpPr>
-          <p:cNvPr id="17" name="mdpr:2-3-500204:item-3:block-16-chunk-2"/>
-          <p:cNvSpPr txBox="1"/>
-          <p:nvPr/>
-        </p:nvSpPr>
-        <p:spPr>
-          <a:xfrm>
-            <a:off x="1042416" y="4160520"/>
-            <a:ext cx="4608576" cy="1097280"/>
-          </a:xfrm>
-          <a:prstGeom prst="rect">
-            <a:avLst/>
-          </a:prstGeom>
-          <a:noFill/>
-          <a:ln/>
-        </p:spPr>
-        <p:txBody>
-          <a:bodyPr wrap="square" lIns="0" tIns="25400" rIns="25400" bIns="0" rtlCol="0" anchor="ctr"/>
-          <a:lstStyle/>
-          <a:p>
-            <a:pPr algn="ctr" indent="0" marL="0">
-              <a:lnSpc>
-                <a:spcPct val="120000"/>
-              </a:lnSpc>
-              <a:buNone/>
-            </a:pPr>
-            <a:r>
-              <a:rPr lang="en-US" sz="2200" dirty="0">
-                <a:solidFill>
-                  <a:srgbClr val="111111"/>
-                </a:solidFill>
-                <a:latin typeface="Pretendard" pitchFamily="34" charset="0"/>
-                <a:ea typeface="Pretendard" pitchFamily="34" charset="-122"/>
-                <a:cs typeface="Pretendard" pitchFamily="34" charset="-120"/>
-              </a:rPr>
-              <a:t>Select the first pipeline diagram in source order as the hero object.</a:t>
-            </a:r>
-            <a:endParaRPr lang="en-US" sz="2200" dirty="0"/>
-          </a:p>
-        </p:txBody>
-      </p:sp>
-      <p:sp>
-        <p:nvSpPr>
-          <p:cNvPr id="18" name="mdpr:2-3-500204:item-4:block-16-chunk-2"/>
-          <p:cNvSpPr txBox="1"/>
-          <p:nvPr/>
-        </p:nvSpPr>
-        <p:spPr>
-          <a:xfrm>
-            <a:off x="6528816" y="4160520"/>
-            <a:ext cx="4608576" cy="1097280"/>
-          </a:xfrm>
-          <a:prstGeom prst="rect">
-            <a:avLst/>
-          </a:prstGeom>
-          <a:noFill/>
-          <a:ln/>
-        </p:spPr>
-        <p:txBody>
-          <a:bodyPr wrap="square" lIns="0" tIns="25400" rIns="25400" bIns="0" rtlCol="0" anchor="ctr"/>
-          <a:lstStyle/>
-          <a:p>
-            <a:pPr algn="ctr" indent="0" marL="0">
-              <a:lnSpc>
-                <a:spcPct val="120000"/>
-              </a:lnSpc>
-              <a:buNone/>
-            </a:pPr>
-            <a:r>
-              <a:rPr lang="en-US" sz="2200" dirty="0">
-                <a:solidFill>
-                  <a:srgbClr val="111111"/>
-                </a:solidFill>
-                <a:latin typeface="Pretendard" pitchFamily="34" charset="0"/>
-                <a:ea typeface="Pretendard" pitchFamily="34" charset="-122"/>
-                <a:cs typeface="Pretendard" pitchFamily="34" charset="-120"/>
-              </a:rPr>
-              <a:t>Synthesize one *-teaser-overview bullet list from up to four source sections.</a:t>
             </a:r>
             <a:endParaRPr lang="en-US" sz="2200" dirty="0"/>
           </a:p>
@@ -7017,8 +6742,51 @@
                 <a:ea typeface="Pretendard" pitchFamily="34" charset="-122"/>
                 <a:cs typeface="Pretendard" pitchFamily="34" charset="-120"/>
               </a:rPr>
+              <a:t>- Select the first pipeline diagram in source order as the hero object.</a:t>
+            </a:r>
+            <a:endParaRPr lang="en-US" sz="1800" dirty="0"/>
+          </a:p>
+          <a:p>
+            <a:pPr algn="l" indent="0" marL="0">
+              <a:lnSpc>
+                <a:spcPct val="120000"/>
+              </a:lnSpc>
+              <a:buNone/>
+            </a:pPr>
+            <a:r>
+              <a:rPr lang="en-US" sz="1800" dirty="0">
+                <a:solidFill>
+                  <a:srgbClr val="111111"/>
+                </a:solidFill>
+                <a:latin typeface="Pretendard" pitchFamily="34" charset="0"/>
+                <a:ea typeface="Pretendard" pitchFamily="34" charset="-122"/>
+                <a:cs typeface="Pretendard" pitchFamily="34" charset="-120"/>
+              </a:rPr>
+              <a:t>- Synthesize one *-teaser-overview bullet list from up to four source sections.</a:t>
+            </a:r>
+            <a:endParaRPr lang="en-US" sz="1800" dirty="0"/>
+          </a:p>
+          <a:p>
+            <a:pPr algn="l" indent="0" marL="0">
+              <a:lnSpc>
+                <a:spcPct val="120000"/>
+              </a:lnSpc>
+              <a:buNone/>
+            </a:pPr>
+            <a:r>
+              <a:rPr lang="en-US" sz="1800" dirty="0">
+                <a:solidFill>
+                  <a:srgbClr val="111111"/>
+                </a:solidFill>
+                <a:latin typeface="Pretendard" pitchFamily="34" charset="0"/>
+                <a:ea typeface="Pretendard" pitchFamily="34" charset="-122"/>
+                <a:cs typeface="Pretendard" pitchFamily="34" charset="-120"/>
+              </a:rPr>
               <a:t>- Keep the first chart, table, and image in source order as proof objects.</a:t>
             </a:r>
+            <a:endParaRPr lang="en-US" sz="1800" dirty="0"/>
+          </a:p>
+          <a:p>
             <a:pPr algn="l" indent="0" marL="0">
               <a:lnSpc>
                 <a:spcPct val="120000"/>
@@ -7810,8 +7578,8 @@
         </p:blipFill>
         <p:spPr>
           <a:xfrm>
-            <a:off x="822960" y="1463040"/>
-            <a:ext cx="5029200" cy="1920240"/>
+            <a:off x="914400" y="1865376"/>
+            <a:ext cx="10241280" cy="1024128"/>
           </a:xfrm>
           <a:prstGeom prst="rect">
             <a:avLst/>
@@ -7826,8 +7594,8 @@
         </p:nvSpPr>
         <p:spPr>
           <a:xfrm>
-            <a:off x="822960" y="1463040"/>
-            <a:ext cx="5029200" cy="1920240"/>
+            <a:off x="914400" y="1865376"/>
+            <a:ext cx="10241280" cy="1024128"/>
           </a:xfrm>
           <a:prstGeom prst="rect">
             <a:avLst/>
@@ -7876,8 +7644,8 @@
         </p:blipFill>
         <p:spPr>
           <a:xfrm>
-            <a:off x="6309360" y="1463040"/>
-            <a:ext cx="5029200" cy="1920240"/>
+            <a:off x="914400" y="3191256"/>
+            <a:ext cx="10241280" cy="1024128"/>
           </a:xfrm>
           <a:prstGeom prst="rect">
             <a:avLst/>
@@ -7892,8 +7660,8 @@
         </p:nvSpPr>
         <p:spPr>
           <a:xfrm>
-            <a:off x="6309360" y="1463040"/>
-            <a:ext cx="5029200" cy="1920240"/>
+            <a:off x="914400" y="3191256"/>
+            <a:ext cx="10241280" cy="1024128"/>
           </a:xfrm>
           <a:prstGeom prst="rect">
             <a:avLst/>
@@ -7942,8 +7710,8 @@
         </p:blipFill>
         <p:spPr>
           <a:xfrm>
-            <a:off x="822960" y="3749040"/>
-            <a:ext cx="5029200" cy="1920240"/>
+            <a:off x="914400" y="4507992"/>
+            <a:ext cx="10241280" cy="1024128"/>
           </a:xfrm>
           <a:prstGeom prst="rect">
             <a:avLst/>
@@ -7958,8 +7726,8 @@
         </p:nvSpPr>
         <p:spPr>
           <a:xfrm>
-            <a:off x="822960" y="3749040"/>
-            <a:ext cx="5029200" cy="1920240"/>
+            <a:off x="914400" y="4507992"/>
+            <a:ext cx="10241280" cy="1024128"/>
           </a:xfrm>
           <a:prstGeom prst="rect">
             <a:avLst/>
@@ -7986,82 +7754,45 @@
           </a:effectLst>
         </p:spPr>
       </p:sp>
-      <p:pic>
-        <p:nvPicPr>
-          <p:cNvPr id="8" name="Image 3" descr="preencoded.png">    </p:cNvPr>
-          <p:cNvPicPr>
-            <a:picLocks noChangeAspect="1"/>
-          </p:cNvPicPr>
-          <p:nvPr/>
-        </p:nvPicPr>
-        <p:blipFill>
-          <a:blip r:embed="rId7">
-            <a:extLst>
-              <a:ext uri="{96DAC541-7B7A-43D3-8B79-37D633B846F1}">
-                <asvg:svgBlip xmlns:asvg="http://schemas.microsoft.com/office/drawing/2016/SVG/main" r:embed="rId8"/>
-              </a:ext>
-            </a:extLst>
-          </a:blip>
-          <a:stretch>
-            <a:fillRect/>
-          </a:stretch>
-        </p:blipFill>
-        <p:spPr>
-          <a:xfrm>
-            <a:off x="6309360" y="3749040"/>
-            <a:ext cx="5029200" cy="1920240"/>
-          </a:xfrm>
-          <a:prstGeom prst="rect">
-            <a:avLst/>
-          </a:prstGeom>
-        </p:spPr>
-      </p:pic>
-      <p:sp>
-        <p:nvSpPr>
-          <p:cNvPr id="9" name="Shape 3"/>
-          <p:cNvSpPr/>
-          <p:nvPr/>
-        </p:nvSpPr>
-        <p:spPr>
-          <a:xfrm>
-            <a:off x="6309360" y="3749040"/>
-            <a:ext cx="5029200" cy="1920240"/>
-          </a:xfrm>
-          <a:prstGeom prst="rect">
-            <a:avLst/>
-          </a:prstGeom>
-          <a:solidFill>
-            <a:srgbClr val="FFFFFF">
-              <a:alpha val="0"/>
+      <p:sp>
+        <p:nvSpPr>
+          <p:cNvPr id="8" name="Shape 3"/>
+          <p:cNvSpPr/>
+          <p:nvPr/>
+        </p:nvSpPr>
+        <p:spPr>
+          <a:xfrm>
+            <a:off x="786384" y="1956816"/>
+            <a:ext cx="32004" cy="3483864"/>
+          </a:xfrm>
+          <a:prstGeom prst="rect">
+            <a:avLst/>
+          </a:prstGeom>
+          <a:solidFill>
+            <a:srgbClr val="DBEAFE">
+              <a:alpha val="80000"/>
             </a:srgbClr>
           </a:solidFill>
           <a:ln w="12700">
             <a:solidFill>
-              <a:srgbClr val="E2E8F0">
+              <a:srgbClr val="DBEAFE">
                 <a:alpha val="0"/>
               </a:srgbClr>
             </a:solidFill>
             <a:prstDash val="solid"/>
           </a:ln>
-          <a:effectLst>
-            <a:outerShdw sx="100000" sy="100000" kx="0" ky="0" algn="bl" rotWithShape="0" blurRad="12700" dist="50800" dir="2700000">
-              <a:srgbClr val="000000">
-                <a:alpha val="8000"/>
-              </a:srgbClr>
-            </a:outerShdw>
-          </a:effectLst>
-        </p:spPr>
-      </p:sp>
-      <p:sp>
-        <p:nvSpPr>
-          <p:cNvPr id="10" name="Shape 4"/>
-          <p:cNvSpPr/>
-          <p:nvPr/>
-        </p:nvSpPr>
-        <p:spPr>
-          <a:xfrm>
-            <a:off x="822960" y="1463040"/>
-            <a:ext cx="73152" cy="1920240"/>
+        </p:spPr>
+      </p:sp>
+      <p:sp>
+        <p:nvSpPr>
+          <p:cNvPr id="9" name="Shape 4"/>
+          <p:cNvSpPr/>
+          <p:nvPr/>
+        </p:nvSpPr>
+        <p:spPr>
+          <a:xfrm>
+            <a:off x="914400" y="1865376"/>
+            <a:ext cx="73152" cy="1024128"/>
           </a:xfrm>
           <a:prstGeom prst="rect">
             <a:avLst/>
@@ -8081,14 +7812,14 @@
       </p:sp>
       <p:sp>
         <p:nvSpPr>
-          <p:cNvPr id="11" name="Shape 5"/>
-          <p:cNvSpPr/>
-          <p:nvPr/>
-        </p:nvSpPr>
-        <p:spPr>
-          <a:xfrm>
-            <a:off x="6309360" y="1463040"/>
-            <a:ext cx="73152" cy="1920240"/>
+          <p:cNvPr id="10" name="Shape 5"/>
+          <p:cNvSpPr/>
+          <p:nvPr/>
+        </p:nvSpPr>
+        <p:spPr>
+          <a:xfrm>
+            <a:off x="914400" y="3191256"/>
+            <a:ext cx="73152" cy="1024128"/>
           </a:xfrm>
           <a:prstGeom prst="rect">
             <a:avLst/>
@@ -8108,14 +7839,14 @@
       </p:sp>
       <p:sp>
         <p:nvSpPr>
-          <p:cNvPr id="12" name="Shape 6"/>
-          <p:cNvSpPr/>
-          <p:nvPr/>
-        </p:nvSpPr>
-        <p:spPr>
-          <a:xfrm>
-            <a:off x="822960" y="3749040"/>
-            <a:ext cx="73152" cy="1920240"/>
+          <p:cNvPr id="11" name="Shape 6"/>
+          <p:cNvSpPr/>
+          <p:nvPr/>
+        </p:nvSpPr>
+        <p:spPr>
+          <a:xfrm>
+            <a:off x="914400" y="4507992"/>
+            <a:ext cx="73152" cy="1024128"/>
           </a:xfrm>
           <a:prstGeom prst="rect">
             <a:avLst/>
@@ -8135,34 +7866,7 @@
       </p:sp>
       <p:sp>
         <p:nvSpPr>
-          <p:cNvPr id="13" name="Shape 7"/>
-          <p:cNvSpPr/>
-          <p:nvPr/>
-        </p:nvSpPr>
-        <p:spPr>
-          <a:xfrm>
-            <a:off x="6309360" y="3749040"/>
-            <a:ext cx="73152" cy="1920240"/>
-          </a:xfrm>
-          <a:prstGeom prst="rect">
-            <a:avLst/>
-          </a:prstGeom>
-          <a:solidFill>
-            <a:srgbClr val="DBEAFE"/>
-          </a:solidFill>
-          <a:ln w="12700">
-            <a:solidFill>
-              <a:srgbClr val="DBEAFE">
-                <a:alpha val="0"/>
-              </a:srgbClr>
-            </a:solidFill>
-            <a:prstDash val="solid"/>
-          </a:ln>
-        </p:spPr>
-      </p:sp>
-      <p:sp>
-        <p:nvSpPr>
-          <p:cNvPr id="14" name="mdpr:1-3-0466ef:title:__title:1-3-0466ef"/>
+          <p:cNvPr id="12" name="mdpr:1-3-0466ef:title:__title:1-3-0466ef"/>
           <p:cNvSpPr txBox="1"/>
           <p:nvPr/>
         </p:nvSpPr>
@@ -8204,14 +7908,14 @@
       </p:sp>
       <p:sp>
         <p:nvSpPr>
-          <p:cNvPr id="15" name="mdpr:1-3-0466ef:item-1:block-20-chunk-1"/>
+          <p:cNvPr id="13" name="mdpr:1-3-0466ef:item-1:block-20-chunk-1"/>
           <p:cNvSpPr txBox="1"/>
           <p:nvPr/>
         </p:nvSpPr>
         <p:spPr>
           <a:xfrm>
-            <a:off x="1042416" y="2209800"/>
-            <a:ext cx="4608576" cy="426720"/>
+            <a:off x="1133856" y="2164080"/>
+            <a:ext cx="9820656" cy="426720"/>
           </a:xfrm>
           <a:prstGeom prst="rect">
             <a:avLst/>
@@ -8246,14 +7950,14 @@
       </p:sp>
       <p:sp>
         <p:nvSpPr>
-          <p:cNvPr id="16" name="mdpr:1-3-0466ef:item-2:block-20-chunk-1"/>
+          <p:cNvPr id="14" name="mdpr:1-3-0466ef:item-2:block-20-chunk-1"/>
           <p:cNvSpPr txBox="1"/>
           <p:nvPr/>
         </p:nvSpPr>
         <p:spPr>
           <a:xfrm>
-            <a:off x="6528816" y="2209800"/>
-            <a:ext cx="4608576" cy="426720"/>
+            <a:off x="1133856" y="3489960"/>
+            <a:ext cx="9820656" cy="426720"/>
           </a:xfrm>
           <a:prstGeom prst="rect">
             <a:avLst/>
@@ -8288,14 +7992,14 @@
       </p:sp>
       <p:sp>
         <p:nvSpPr>
-          <p:cNvPr id="17" name="mdpr:1-3-0466ef:item-3:block-20-chunk-1"/>
+          <p:cNvPr id="15" name="mdpr:1-3-0466ef:item-3:block-20-chunk-1"/>
           <p:cNvSpPr txBox="1"/>
           <p:nvPr/>
         </p:nvSpPr>
         <p:spPr>
           <a:xfrm>
-            <a:off x="1042416" y="4495800"/>
-            <a:ext cx="4608576" cy="426720"/>
+            <a:off x="1133856" y="4806696"/>
+            <a:ext cx="9820656" cy="426720"/>
           </a:xfrm>
           <a:prstGeom prst="rect">
             <a:avLst/>
@@ -8323,48 +8027,6 @@
                 <a:cs typeface="Pretendard" pitchFamily="34" charset="-120"/>
               </a:rPr>
               <a:t>PPTX Renderer</a:t>
-            </a:r>
-            <a:endParaRPr lang="en-US" sz="2200" dirty="0"/>
-          </a:p>
-        </p:txBody>
-      </p:sp>
-      <p:sp>
-        <p:nvSpPr>
-          <p:cNvPr id="18" name="mdpr:1-3-0466ef:item-4:block-20-chunk-1"/>
-          <p:cNvSpPr txBox="1"/>
-          <p:nvPr/>
-        </p:nvSpPr>
-        <p:spPr>
-          <a:xfrm>
-            <a:off x="6528816" y="4495800"/>
-            <a:ext cx="4608576" cy="426720"/>
-          </a:xfrm>
-          <a:prstGeom prst="rect">
-            <a:avLst/>
-          </a:prstGeom>
-          <a:noFill/>
-          <a:ln/>
-        </p:spPr>
-        <p:txBody>
-          <a:bodyPr wrap="square" lIns="0" tIns="25400" rIns="25400" bIns="0" rtlCol="0" anchor="ctr"/>
-          <a:lstStyle/>
-          <a:p>
-            <a:pPr algn="ctr" indent="0" marL="0">
-              <a:lnSpc>
-                <a:spcPct val="120000"/>
-              </a:lnSpc>
-              <a:buNone/>
-            </a:pPr>
-            <a:r>
-              <a:rPr lang="en-US" sz="2200" dirty="0">
-                <a:solidFill>
-                  <a:srgbClr val="111111"/>
-                </a:solidFill>
-                <a:latin typeface="Pretendard" pitchFamily="34" charset="0"/>
-                <a:ea typeface="Pretendard" pitchFamily="34" charset="-122"/>
-                <a:cs typeface="Pretendard" pitchFamily="34" charset="-120"/>
-              </a:rPr>
-              <a:t>Decoration Styles</a:t>
             </a:r>
             <a:endParaRPr lang="en-US" sz="2200" dirty="0"/>
           </a:p>
@@ -8424,8 +8086,8 @@
         </p:blipFill>
         <p:spPr>
           <a:xfrm>
-            <a:off x="822960" y="1463040"/>
-            <a:ext cx="5029200" cy="1920240"/>
+            <a:off x="914400" y="1865376"/>
+            <a:ext cx="10241280" cy="1024128"/>
           </a:xfrm>
           <a:prstGeom prst="rect">
             <a:avLst/>
@@ -8440,8 +8102,8 @@
         </p:nvSpPr>
         <p:spPr>
           <a:xfrm>
-            <a:off x="822960" y="1463040"/>
-            <a:ext cx="5029200" cy="1920240"/>
+            <a:off x="914400" y="1865376"/>
+            <a:ext cx="10241280" cy="1024128"/>
           </a:xfrm>
           <a:prstGeom prst="rect">
             <a:avLst/>
@@ -8490,8 +8152,8 @@
         </p:blipFill>
         <p:spPr>
           <a:xfrm>
-            <a:off x="6309360" y="1463040"/>
-            <a:ext cx="5029200" cy="1920240"/>
+            <a:off x="914400" y="3191256"/>
+            <a:ext cx="10241280" cy="1024128"/>
           </a:xfrm>
           <a:prstGeom prst="rect">
             <a:avLst/>
@@ -8506,8 +8168,8 @@
         </p:nvSpPr>
         <p:spPr>
           <a:xfrm>
-            <a:off x="6309360" y="1463040"/>
-            <a:ext cx="5029200" cy="1920240"/>
+            <a:off x="914400" y="3191256"/>
+            <a:ext cx="10241280" cy="1024128"/>
           </a:xfrm>
           <a:prstGeom prst="rect">
             <a:avLst/>
@@ -8556,8 +8218,8 @@
         </p:blipFill>
         <p:spPr>
           <a:xfrm>
-            <a:off x="822960" y="3749040"/>
-            <a:ext cx="5029200" cy="1920240"/>
+            <a:off x="914400" y="4507992"/>
+            <a:ext cx="10241280" cy="1024128"/>
           </a:xfrm>
           <a:prstGeom prst="rect">
             <a:avLst/>
@@ -8572,8 +8234,8 @@
         </p:nvSpPr>
         <p:spPr>
           <a:xfrm>
-            <a:off x="822960" y="3749040"/>
-            <a:ext cx="5029200" cy="1920240"/>
+            <a:off x="914400" y="4507992"/>
+            <a:ext cx="10241280" cy="1024128"/>
           </a:xfrm>
           <a:prstGeom prst="rect">
             <a:avLst/>
@@ -8600,82 +8262,45 @@
           </a:effectLst>
         </p:spPr>
       </p:sp>
-      <p:pic>
-        <p:nvPicPr>
-          <p:cNvPr id="8" name="Image 3" descr="preencoded.png">    </p:cNvPr>
-          <p:cNvPicPr>
-            <a:picLocks noChangeAspect="1"/>
-          </p:cNvPicPr>
-          <p:nvPr/>
-        </p:nvPicPr>
-        <p:blipFill>
-          <a:blip r:embed="rId7">
-            <a:extLst>
-              <a:ext uri="{96DAC541-7B7A-43D3-8B79-37D633B846F1}">
-                <asvg:svgBlip xmlns:asvg="http://schemas.microsoft.com/office/drawing/2016/SVG/main" r:embed="rId8"/>
-              </a:ext>
-            </a:extLst>
-          </a:blip>
-          <a:stretch>
-            <a:fillRect/>
-          </a:stretch>
-        </p:blipFill>
-        <p:spPr>
-          <a:xfrm>
-            <a:off x="6309360" y="3749040"/>
-            <a:ext cx="5029200" cy="1920240"/>
-          </a:xfrm>
-          <a:prstGeom prst="rect">
-            <a:avLst/>
-          </a:prstGeom>
-        </p:spPr>
-      </p:pic>
-      <p:sp>
-        <p:nvSpPr>
-          <p:cNvPr id="9" name="Shape 3"/>
-          <p:cNvSpPr/>
-          <p:nvPr/>
-        </p:nvSpPr>
-        <p:spPr>
-          <a:xfrm>
-            <a:off x="6309360" y="3749040"/>
-            <a:ext cx="5029200" cy="1920240"/>
-          </a:xfrm>
-          <a:prstGeom prst="rect">
-            <a:avLst/>
-          </a:prstGeom>
-          <a:solidFill>
-            <a:srgbClr val="FFFFFF">
-              <a:alpha val="0"/>
+      <p:sp>
+        <p:nvSpPr>
+          <p:cNvPr id="8" name="Shape 3"/>
+          <p:cNvSpPr/>
+          <p:nvPr/>
+        </p:nvSpPr>
+        <p:spPr>
+          <a:xfrm>
+            <a:off x="786384" y="1956816"/>
+            <a:ext cx="32004" cy="3483864"/>
+          </a:xfrm>
+          <a:prstGeom prst="rect">
+            <a:avLst/>
+          </a:prstGeom>
+          <a:solidFill>
+            <a:srgbClr val="DBEAFE">
+              <a:alpha val="80000"/>
             </a:srgbClr>
           </a:solidFill>
           <a:ln w="12700">
             <a:solidFill>
-              <a:srgbClr val="E2E8F0">
+              <a:srgbClr val="DBEAFE">
                 <a:alpha val="0"/>
               </a:srgbClr>
             </a:solidFill>
             <a:prstDash val="solid"/>
           </a:ln>
-          <a:effectLst>
-            <a:outerShdw sx="100000" sy="100000" kx="0" ky="0" algn="bl" rotWithShape="0" blurRad="12700" dist="50800" dir="2700000">
-              <a:srgbClr val="000000">
-                <a:alpha val="8000"/>
-              </a:srgbClr>
-            </a:outerShdw>
-          </a:effectLst>
-        </p:spPr>
-      </p:sp>
-      <p:sp>
-        <p:nvSpPr>
-          <p:cNvPr id="10" name="Shape 4"/>
-          <p:cNvSpPr/>
-          <p:nvPr/>
-        </p:nvSpPr>
-        <p:spPr>
-          <a:xfrm>
-            <a:off x="822960" y="1463040"/>
-            <a:ext cx="73152" cy="1920240"/>
+        </p:spPr>
+      </p:sp>
+      <p:sp>
+        <p:nvSpPr>
+          <p:cNvPr id="9" name="Shape 4"/>
+          <p:cNvSpPr/>
+          <p:nvPr/>
+        </p:nvSpPr>
+        <p:spPr>
+          <a:xfrm>
+            <a:off x="914400" y="1865376"/>
+            <a:ext cx="73152" cy="1024128"/>
           </a:xfrm>
           <a:prstGeom prst="rect">
             <a:avLst/>
@@ -8695,14 +8320,14 @@
       </p:sp>
       <p:sp>
         <p:nvSpPr>
-          <p:cNvPr id="11" name="Shape 5"/>
-          <p:cNvSpPr/>
-          <p:nvPr/>
-        </p:nvSpPr>
-        <p:spPr>
-          <a:xfrm>
-            <a:off x="6309360" y="1463040"/>
-            <a:ext cx="73152" cy="1920240"/>
+          <p:cNvPr id="10" name="Shape 5"/>
+          <p:cNvSpPr/>
+          <p:nvPr/>
+        </p:nvSpPr>
+        <p:spPr>
+          <a:xfrm>
+            <a:off x="914400" y="3191256"/>
+            <a:ext cx="73152" cy="1024128"/>
           </a:xfrm>
           <a:prstGeom prst="rect">
             <a:avLst/>
@@ -8722,14 +8347,14 @@
       </p:sp>
       <p:sp>
         <p:nvSpPr>
-          <p:cNvPr id="12" name="Shape 6"/>
-          <p:cNvSpPr/>
-          <p:nvPr/>
-        </p:nvSpPr>
-        <p:spPr>
-          <a:xfrm>
-            <a:off x="822960" y="3749040"/>
-            <a:ext cx="73152" cy="1920240"/>
+          <p:cNvPr id="11" name="Shape 6"/>
+          <p:cNvSpPr/>
+          <p:nvPr/>
+        </p:nvSpPr>
+        <p:spPr>
+          <a:xfrm>
+            <a:off x="914400" y="4507992"/>
+            <a:ext cx="73152" cy="1024128"/>
           </a:xfrm>
           <a:prstGeom prst="rect">
             <a:avLst/>
@@ -8749,34 +8374,7 @@
       </p:sp>
       <p:sp>
         <p:nvSpPr>
-          <p:cNvPr id="13" name="Shape 7"/>
-          <p:cNvSpPr/>
-          <p:nvPr/>
-        </p:nvSpPr>
-        <p:spPr>
-          <a:xfrm>
-            <a:off x="6309360" y="3749040"/>
-            <a:ext cx="73152" cy="1920240"/>
-          </a:xfrm>
-          <a:prstGeom prst="rect">
-            <a:avLst/>
-          </a:prstGeom>
-          <a:solidFill>
-            <a:srgbClr val="DBEAFE"/>
-          </a:solidFill>
-          <a:ln w="12700">
-            <a:solidFill>
-              <a:srgbClr val="DBEAFE">
-                <a:alpha val="0"/>
-              </a:srgbClr>
-            </a:solidFill>
-            <a:prstDash val="solid"/>
-          </a:ln>
-        </p:spPr>
-      </p:sp>
-      <p:sp>
-        <p:nvSpPr>
-          <p:cNvPr id="14" name="mdpr:2-3-068207:title:__title:2-3-068207"/>
+          <p:cNvPr id="12" name="mdpr:2-3-068207:title:__title:2-3-068207"/>
           <p:cNvSpPr txBox="1"/>
           <p:nvPr/>
         </p:nvSpPr>
@@ -8818,14 +8416,56 @@
       </p:sp>
       <p:sp>
         <p:nvSpPr>
-          <p:cNvPr id="15" name="mdpr:2-3-068207:item-1:block-20-chunk-2"/>
+          <p:cNvPr id="13" name="mdpr:2-3-068207:item-1:block-20-chunk-2"/>
           <p:cNvSpPr txBox="1"/>
           <p:nvPr/>
         </p:nvSpPr>
         <p:spPr>
           <a:xfrm>
-            <a:off x="1042416" y="2209800"/>
-            <a:ext cx="4608576" cy="426720"/>
+            <a:off x="1133856" y="2164080"/>
+            <a:ext cx="9820656" cy="426720"/>
+          </a:xfrm>
+          <a:prstGeom prst="rect">
+            <a:avLst/>
+          </a:prstGeom>
+          <a:noFill/>
+          <a:ln/>
+        </p:spPr>
+        <p:txBody>
+          <a:bodyPr wrap="square" lIns="0" tIns="25400" rIns="25400" bIns="0" rtlCol="0" anchor="ctr"/>
+          <a:lstStyle/>
+          <a:p>
+            <a:pPr algn="ctr" indent="0" marL="0">
+              <a:lnSpc>
+                <a:spcPct val="120000"/>
+              </a:lnSpc>
+              <a:buNone/>
+            </a:pPr>
+            <a:r>
+              <a:rPr lang="en-US" sz="2200" dirty="0">
+                <a:solidFill>
+                  <a:srgbClr val="111111"/>
+                </a:solidFill>
+                <a:latin typeface="Pretendard" pitchFamily="34" charset="0"/>
+                <a:ea typeface="Pretendard" pitchFamily="34" charset="-122"/>
+                <a:cs typeface="Pretendard" pitchFamily="34" charset="-120"/>
+              </a:rPr>
+              <a:t>Decoration Styles</a:t>
+            </a:r>
+            <a:endParaRPr lang="en-US" sz="2200" dirty="0"/>
+          </a:p>
+        </p:txBody>
+      </p:sp>
+      <p:sp>
+        <p:nvSpPr>
+          <p:cNvPr id="14" name="mdpr:2-3-068207:item-2:block-20-chunk-2"/>
+          <p:cNvSpPr txBox="1"/>
+          <p:nvPr/>
+        </p:nvSpPr>
+        <p:spPr>
+          <a:xfrm>
+            <a:off x="1133856" y="3489960"/>
+            <a:ext cx="9820656" cy="426720"/>
           </a:xfrm>
           <a:prstGeom prst="rect">
             <a:avLst/>
@@ -8860,14 +8500,14 @@
       </p:sp>
       <p:sp>
         <p:nvSpPr>
-          <p:cNvPr id="16" name="mdpr:2-3-068207:item-2:block-20-chunk-2"/>
+          <p:cNvPr id="15" name="mdpr:2-3-068207:item-3:block-20-chunk-2"/>
           <p:cNvSpPr txBox="1"/>
           <p:nvPr/>
         </p:nvSpPr>
         <p:spPr>
           <a:xfrm>
-            <a:off x="6528816" y="2042160"/>
-            <a:ext cx="4608576" cy="762000"/>
+            <a:off x="1133856" y="4806696"/>
+            <a:ext cx="9820656" cy="426720"/>
           </a:xfrm>
           <a:prstGeom prst="rect">
             <a:avLst/>
@@ -8895,90 +8535,6 @@
                 <a:cs typeface="Pretendard" pitchFamily="34" charset="-120"/>
               </a:rPr>
               <a:t>consumes { Presentation IR, Layout IR }</a:t>
-            </a:r>
-            <a:endParaRPr lang="en-US" sz="2200" dirty="0"/>
-          </a:p>
-        </p:txBody>
-      </p:sp>
-      <p:sp>
-        <p:nvSpPr>
-          <p:cNvPr id="17" name="mdpr:2-3-068207:item-3:block-20-chunk-2"/>
-          <p:cNvSpPr txBox="1"/>
-          <p:nvPr/>
-        </p:nvSpPr>
-        <p:spPr>
-          <a:xfrm>
-            <a:off x="1042416" y="4160520"/>
-            <a:ext cx="4608576" cy="1097280"/>
-          </a:xfrm>
-          <a:prstGeom prst="rect">
-            <a:avLst/>
-          </a:prstGeom>
-          <a:noFill/>
-          <a:ln/>
-        </p:spPr>
-        <p:txBody>
-          <a:bodyPr wrap="square" lIns="0" tIns="25400" rIns="25400" bIns="0" rtlCol="0" anchor="ctr"/>
-          <a:lstStyle/>
-          <a:p>
-            <a:pPr algn="ctr" indent="0" marL="0">
-              <a:lnSpc>
-                <a:spcPct val="120000"/>
-              </a:lnSpc>
-              <a:buNone/>
-            </a:pPr>
-            <a:r>
-              <a:rPr lang="en-US" sz="2200" dirty="0">
-                <a:solidFill>
-                  <a:srgbClr val="111111"/>
-                </a:solidFill>
-                <a:latin typeface="Pretendard" pitchFamily="34" charset="0"/>
-                <a:ea typeface="Pretendard" pitchFamily="34" charset="-122"/>
-                <a:cs typeface="Pretendard" pitchFamily="34" charset="-120"/>
-              </a:rPr>
-              <a:t>uses Layout IR slide size, regions, theme fonts, colors, z-order, and overflow policy</a:t>
-            </a:r>
-            <a:endParaRPr lang="en-US" sz="2200" dirty="0"/>
-          </a:p>
-        </p:txBody>
-      </p:sp>
-      <p:sp>
-        <p:nvSpPr>
-          <p:cNvPr id="18" name="mdpr:2-3-068207:item-4:block-20-chunk-2"/>
-          <p:cNvSpPr txBox="1"/>
-          <p:nvPr/>
-        </p:nvSpPr>
-        <p:spPr>
-          <a:xfrm>
-            <a:off x="6528816" y="4160520"/>
-            <a:ext cx="4608576" cy="1097280"/>
-          </a:xfrm>
-          <a:prstGeom prst="rect">
-            <a:avLst/>
-          </a:prstGeom>
-          <a:noFill/>
-          <a:ln/>
-        </p:spPr>
-        <p:txBody>
-          <a:bodyPr wrap="square" lIns="0" tIns="25400" rIns="25400" bIns="0" rtlCol="0" anchor="ctr"/>
-          <a:lstStyle/>
-          <a:p>
-            <a:pPr algn="ctr" indent="0" marL="0">
-              <a:lnSpc>
-                <a:spcPct val="120000"/>
-              </a:lnSpc>
-              <a:buNone/>
-            </a:pPr>
-            <a:r>
-              <a:rPr lang="en-US" sz="2200" dirty="0">
-                <a:solidFill>
-                  <a:srgbClr val="111111"/>
-                </a:solidFill>
-                <a:latin typeface="Pretendard" pitchFamily="34" charset="0"/>
-                <a:ea typeface="Pretendard" pitchFamily="34" charset="-122"/>
-                <a:cs typeface="Pretendard" pitchFamily="34" charset="-120"/>
-              </a:rPr>
-              <a:t>emits editable text boxes for titles, paragraphs, lists, code, and fallback text</a:t>
             </a:r>
             <a:endParaRPr lang="en-US" sz="2200" dirty="0"/>
           </a:p>
@@ -9260,8 +8816,8 @@
         </p:blipFill>
         <p:spPr>
           <a:xfrm>
-            <a:off x="822960" y="1463040"/>
-            <a:ext cx="5029200" cy="1920240"/>
+            <a:off x="914400" y="1865376"/>
+            <a:ext cx="10241280" cy="1024128"/>
           </a:xfrm>
           <a:prstGeom prst="rect">
             <a:avLst/>
@@ -9276,8 +8832,8 @@
         </p:nvSpPr>
         <p:spPr>
           <a:xfrm>
-            <a:off x="822960" y="1463040"/>
-            <a:ext cx="5029200" cy="1920240"/>
+            <a:off x="914400" y="1865376"/>
+            <a:ext cx="10241280" cy="1024128"/>
           </a:xfrm>
           <a:prstGeom prst="rect">
             <a:avLst/>
@@ -9326,8 +8882,8 @@
         </p:blipFill>
         <p:spPr>
           <a:xfrm>
-            <a:off x="6309360" y="1463040"/>
-            <a:ext cx="5029200" cy="1920240"/>
+            <a:off x="914400" y="3191256"/>
+            <a:ext cx="10241280" cy="1024128"/>
           </a:xfrm>
           <a:prstGeom prst="rect">
             <a:avLst/>
@@ -9342,8 +8898,8 @@
         </p:nvSpPr>
         <p:spPr>
           <a:xfrm>
-            <a:off x="6309360" y="1463040"/>
-            <a:ext cx="5029200" cy="1920240"/>
+            <a:off x="914400" y="3191256"/>
+            <a:ext cx="10241280" cy="1024128"/>
           </a:xfrm>
           <a:prstGeom prst="rect">
             <a:avLst/>
@@ -9392,8 +8948,8 @@
         </p:blipFill>
         <p:spPr>
           <a:xfrm>
-            <a:off x="822960" y="3749040"/>
-            <a:ext cx="5029200" cy="1920240"/>
+            <a:off x="914400" y="4507992"/>
+            <a:ext cx="10241280" cy="1024128"/>
           </a:xfrm>
           <a:prstGeom prst="rect">
             <a:avLst/>
@@ -9408,8 +8964,8 @@
         </p:nvSpPr>
         <p:spPr>
           <a:xfrm>
-            <a:off x="822960" y="3749040"/>
-            <a:ext cx="5029200" cy="1920240"/>
+            <a:off x="914400" y="4507992"/>
+            <a:ext cx="10241280" cy="1024128"/>
           </a:xfrm>
           <a:prstGeom prst="rect">
             <a:avLst/>
@@ -9436,82 +8992,45 @@
           </a:effectLst>
         </p:spPr>
       </p:sp>
-      <p:pic>
-        <p:nvPicPr>
-          <p:cNvPr id="8" name="Image 3" descr="preencoded.png">    </p:cNvPr>
-          <p:cNvPicPr>
-            <a:picLocks noChangeAspect="1"/>
-          </p:cNvPicPr>
-          <p:nvPr/>
-        </p:nvPicPr>
-        <p:blipFill>
-          <a:blip r:embed="rId7">
-            <a:extLst>
-              <a:ext uri="{96DAC541-7B7A-43D3-8B79-37D633B846F1}">
-                <asvg:svgBlip xmlns:asvg="http://schemas.microsoft.com/office/drawing/2016/SVG/main" r:embed="rId8"/>
-              </a:ext>
-            </a:extLst>
-          </a:blip>
-          <a:stretch>
-            <a:fillRect/>
-          </a:stretch>
-        </p:blipFill>
-        <p:spPr>
-          <a:xfrm>
-            <a:off x="6309360" y="3749040"/>
-            <a:ext cx="5029200" cy="1920240"/>
-          </a:xfrm>
-          <a:prstGeom prst="rect">
-            <a:avLst/>
-          </a:prstGeom>
-        </p:spPr>
-      </p:pic>
-      <p:sp>
-        <p:nvSpPr>
-          <p:cNvPr id="9" name="Shape 3"/>
-          <p:cNvSpPr/>
-          <p:nvPr/>
-        </p:nvSpPr>
-        <p:spPr>
-          <a:xfrm>
-            <a:off x="6309360" y="3749040"/>
-            <a:ext cx="5029200" cy="1920240"/>
-          </a:xfrm>
-          <a:prstGeom prst="rect">
-            <a:avLst/>
-          </a:prstGeom>
-          <a:solidFill>
-            <a:srgbClr val="FFFFFF">
-              <a:alpha val="0"/>
+      <p:sp>
+        <p:nvSpPr>
+          <p:cNvPr id="8" name="Shape 3"/>
+          <p:cNvSpPr/>
+          <p:nvPr/>
+        </p:nvSpPr>
+        <p:spPr>
+          <a:xfrm>
+            <a:off x="786384" y="1956816"/>
+            <a:ext cx="32004" cy="3483864"/>
+          </a:xfrm>
+          <a:prstGeom prst="rect">
+            <a:avLst/>
+          </a:prstGeom>
+          <a:solidFill>
+            <a:srgbClr val="DBEAFE">
+              <a:alpha val="80000"/>
             </a:srgbClr>
           </a:solidFill>
           <a:ln w="12700">
             <a:solidFill>
-              <a:srgbClr val="E2E8F0">
+              <a:srgbClr val="DBEAFE">
                 <a:alpha val="0"/>
               </a:srgbClr>
             </a:solidFill>
             <a:prstDash val="solid"/>
           </a:ln>
-          <a:effectLst>
-            <a:outerShdw sx="100000" sy="100000" kx="0" ky="0" algn="bl" rotWithShape="0" blurRad="12700" dist="50800" dir="2700000">
-              <a:srgbClr val="000000">
-                <a:alpha val="8000"/>
-              </a:srgbClr>
-            </a:outerShdw>
-          </a:effectLst>
-        </p:spPr>
-      </p:sp>
-      <p:sp>
-        <p:nvSpPr>
-          <p:cNvPr id="10" name="Shape 4"/>
-          <p:cNvSpPr/>
-          <p:nvPr/>
-        </p:nvSpPr>
-        <p:spPr>
-          <a:xfrm>
-            <a:off x="822960" y="1463040"/>
-            <a:ext cx="73152" cy="1920240"/>
+        </p:spPr>
+      </p:sp>
+      <p:sp>
+        <p:nvSpPr>
+          <p:cNvPr id="9" name="Shape 4"/>
+          <p:cNvSpPr/>
+          <p:nvPr/>
+        </p:nvSpPr>
+        <p:spPr>
+          <a:xfrm>
+            <a:off x="914400" y="1865376"/>
+            <a:ext cx="73152" cy="1024128"/>
           </a:xfrm>
           <a:prstGeom prst="rect">
             <a:avLst/>
@@ -9531,14 +9050,14 @@
       </p:sp>
       <p:sp>
         <p:nvSpPr>
-          <p:cNvPr id="11" name="Shape 5"/>
-          <p:cNvSpPr/>
-          <p:nvPr/>
-        </p:nvSpPr>
-        <p:spPr>
-          <a:xfrm>
-            <a:off x="6309360" y="1463040"/>
-            <a:ext cx="73152" cy="1920240"/>
+          <p:cNvPr id="10" name="Shape 5"/>
+          <p:cNvSpPr/>
+          <p:nvPr/>
+        </p:nvSpPr>
+        <p:spPr>
+          <a:xfrm>
+            <a:off x="914400" y="3191256"/>
+            <a:ext cx="73152" cy="1024128"/>
           </a:xfrm>
           <a:prstGeom prst="rect">
             <a:avLst/>
@@ -9558,14 +9077,14 @@
       </p:sp>
       <p:sp>
         <p:nvSpPr>
-          <p:cNvPr id="12" name="Shape 6"/>
-          <p:cNvSpPr/>
-          <p:nvPr/>
-        </p:nvSpPr>
-        <p:spPr>
-          <a:xfrm>
-            <a:off x="822960" y="3749040"/>
-            <a:ext cx="73152" cy="1920240"/>
+          <p:cNvPr id="11" name="Shape 6"/>
+          <p:cNvSpPr/>
+          <p:nvPr/>
+        </p:nvSpPr>
+        <p:spPr>
+          <a:xfrm>
+            <a:off x="914400" y="4507992"/>
+            <a:ext cx="73152" cy="1024128"/>
           </a:xfrm>
           <a:prstGeom prst="rect">
             <a:avLst/>
@@ -9585,34 +9104,7 @@
       </p:sp>
       <p:sp>
         <p:nvSpPr>
-          <p:cNvPr id="13" name="Shape 7"/>
-          <p:cNvSpPr/>
-          <p:nvPr/>
-        </p:nvSpPr>
-        <p:spPr>
-          <a:xfrm>
-            <a:off x="6309360" y="3749040"/>
-            <a:ext cx="73152" cy="1920240"/>
-          </a:xfrm>
-          <a:prstGeom prst="rect">
-            <a:avLst/>
-          </a:prstGeom>
-          <a:solidFill>
-            <a:srgbClr val="DBEAFE"/>
-          </a:solidFill>
-          <a:ln w="12700">
-            <a:solidFill>
-              <a:srgbClr val="DBEAFE">
-                <a:alpha val="0"/>
-              </a:srgbClr>
-            </a:solidFill>
-            <a:prstDash val="solid"/>
-          </a:ln>
-        </p:spPr>
-      </p:sp>
-      <p:sp>
-        <p:nvSpPr>
-          <p:cNvPr id="14" name="mdpr:1-3-4b2f30:title:__title:1-3-4b2f30"/>
+          <p:cNvPr id="12" name="mdpr:1-3-4b2f30:title:__title:1-3-4b2f30"/>
           <p:cNvSpPr txBox="1"/>
           <p:nvPr/>
         </p:nvSpPr>
@@ -9654,14 +9146,14 @@
       </p:sp>
       <p:sp>
         <p:nvSpPr>
-          <p:cNvPr id="15" name="mdpr:1-3-4b2f30:item-1:block-23-chunk-1"/>
+          <p:cNvPr id="13" name="mdpr:1-3-4b2f30:item-1:block-23-chunk-1"/>
           <p:cNvSpPr txBox="1"/>
           <p:nvPr/>
         </p:nvSpPr>
         <p:spPr>
           <a:xfrm>
-            <a:off x="1042416" y="2209800"/>
-            <a:ext cx="4608576" cy="426720"/>
+            <a:off x="1133856" y="2164080"/>
+            <a:ext cx="9820656" cy="426720"/>
           </a:xfrm>
           <a:prstGeom prst="rect">
             <a:avLst/>
@@ -9696,14 +9188,14 @@
       </p:sp>
       <p:sp>
         <p:nvSpPr>
-          <p:cNvPr id="16" name="mdpr:1-3-4b2f30:item-2:block-23-chunk-1"/>
+          <p:cNvPr id="14" name="mdpr:1-3-4b2f30:item-2:block-23-chunk-1"/>
           <p:cNvSpPr txBox="1"/>
           <p:nvPr/>
         </p:nvSpPr>
         <p:spPr>
           <a:xfrm>
-            <a:off x="6528816" y="2209800"/>
-            <a:ext cx="4608576" cy="426720"/>
+            <a:off x="1133856" y="3489960"/>
+            <a:ext cx="9820656" cy="426720"/>
           </a:xfrm>
           <a:prstGeom prst="rect">
             <a:avLst/>
@@ -9738,14 +9230,14 @@
       </p:sp>
       <p:sp>
         <p:nvSpPr>
-          <p:cNvPr id="17" name="mdpr:1-3-4b2f30:item-3:block-23-chunk-1"/>
+          <p:cNvPr id="15" name="mdpr:1-3-4b2f30:item-3:block-23-chunk-1"/>
           <p:cNvSpPr txBox="1"/>
           <p:nvPr/>
         </p:nvSpPr>
         <p:spPr>
           <a:xfrm>
-            <a:off x="1042416" y="4495800"/>
-            <a:ext cx="4608576" cy="426720"/>
+            <a:off x="1133856" y="4806696"/>
+            <a:ext cx="9820656" cy="426720"/>
           </a:xfrm>
           <a:prstGeom prst="rect">
             <a:avLst/>
@@ -9773,48 +9265,6 @@
                 <a:cs typeface="Pretendard" pitchFamily="34" charset="-120"/>
               </a:rPr>
               <a:t>Overflow Resolution Order</a:t>
-            </a:r>
-            <a:endParaRPr lang="en-US" sz="2200" dirty="0"/>
-          </a:p>
-        </p:txBody>
-      </p:sp>
-      <p:sp>
-        <p:nvSpPr>
-          <p:cNvPr id="18" name="mdpr:1-3-4b2f30:item-4:block-23-chunk-1"/>
-          <p:cNvSpPr txBox="1"/>
-          <p:nvPr/>
-        </p:nvSpPr>
-        <p:spPr>
-          <a:xfrm>
-            <a:off x="6528816" y="4495800"/>
-            <a:ext cx="4608576" cy="426720"/>
-          </a:xfrm>
-          <a:prstGeom prst="rect">
-            <a:avLst/>
-          </a:prstGeom>
-          <a:noFill/>
-          <a:ln/>
-        </p:spPr>
-        <p:txBody>
-          <a:bodyPr wrap="square" lIns="0" tIns="25400" rIns="25400" bIns="0" rtlCol="0" anchor="ctr"/>
-          <a:lstStyle/>
-          <a:p>
-            <a:pPr algn="ctr" indent="0" marL="0">
-              <a:lnSpc>
-                <a:spcPct val="120000"/>
-              </a:lnSpc>
-              <a:buNone/>
-            </a:pPr>
-            <a:r>
-              <a:rPr lang="en-US" sz="2200" dirty="0">
-                <a:solidFill>
-                  <a:srgbClr val="111111"/>
-                </a:solidFill>
-                <a:latin typeface="Pretendard" pitchFamily="34" charset="0"/>
-                <a:ea typeface="Pretendard" pitchFamily="34" charset="-122"/>
-                <a:cs typeface="Pretendard" pitchFamily="34" charset="-120"/>
-              </a:rPr>
-              <a:t>Diagnostics</a:t>
             </a:r>
             <a:endParaRPr lang="en-US" sz="2200" dirty="0"/>
           </a:p>
@@ -9874,8 +9324,8 @@
         </p:blipFill>
         <p:spPr>
           <a:xfrm>
-            <a:off x="822960" y="1463040"/>
-            <a:ext cx="5029200" cy="1920240"/>
+            <a:off x="914400" y="1865376"/>
+            <a:ext cx="10241280" cy="1024128"/>
           </a:xfrm>
           <a:prstGeom prst="rect">
             <a:avLst/>
@@ -9890,8 +9340,8 @@
         </p:nvSpPr>
         <p:spPr>
           <a:xfrm>
-            <a:off x="822960" y="1463040"/>
-            <a:ext cx="5029200" cy="1920240"/>
+            <a:off x="914400" y="1865376"/>
+            <a:ext cx="10241280" cy="1024128"/>
           </a:xfrm>
           <a:prstGeom prst="rect">
             <a:avLst/>
@@ -9940,8 +9390,8 @@
         </p:blipFill>
         <p:spPr>
           <a:xfrm>
-            <a:off x="6309360" y="1463040"/>
-            <a:ext cx="5029200" cy="1920240"/>
+            <a:off x="914400" y="3191256"/>
+            <a:ext cx="10241280" cy="1024128"/>
           </a:xfrm>
           <a:prstGeom prst="rect">
             <a:avLst/>
@@ -9956,8 +9406,8 @@
         </p:nvSpPr>
         <p:spPr>
           <a:xfrm>
-            <a:off x="6309360" y="1463040"/>
-            <a:ext cx="5029200" cy="1920240"/>
+            <a:off x="914400" y="3191256"/>
+            <a:ext cx="10241280" cy="1024128"/>
           </a:xfrm>
           <a:prstGeom prst="rect">
             <a:avLst/>
@@ -10006,8 +9456,8 @@
         </p:blipFill>
         <p:spPr>
           <a:xfrm>
-            <a:off x="822960" y="3749040"/>
-            <a:ext cx="5029200" cy="1920240"/>
+            <a:off x="914400" y="4507992"/>
+            <a:ext cx="10241280" cy="1024128"/>
           </a:xfrm>
           <a:prstGeom prst="rect">
             <a:avLst/>
@@ -10022,8 +9472,8 @@
         </p:nvSpPr>
         <p:spPr>
           <a:xfrm>
-            <a:off x="822960" y="3749040"/>
-            <a:ext cx="5029200" cy="1920240"/>
+            <a:off x="914400" y="4507992"/>
+            <a:ext cx="10241280" cy="1024128"/>
           </a:xfrm>
           <a:prstGeom prst="rect">
             <a:avLst/>
@@ -10050,82 +9500,45 @@
           </a:effectLst>
         </p:spPr>
       </p:sp>
-      <p:pic>
-        <p:nvPicPr>
-          <p:cNvPr id="8" name="Image 3" descr="preencoded.png">    </p:cNvPr>
-          <p:cNvPicPr>
-            <a:picLocks noChangeAspect="1"/>
-          </p:cNvPicPr>
-          <p:nvPr/>
-        </p:nvPicPr>
-        <p:blipFill>
-          <a:blip r:embed="rId7">
-            <a:extLst>
-              <a:ext uri="{96DAC541-7B7A-43D3-8B79-37D633B846F1}">
-                <asvg:svgBlip xmlns:asvg="http://schemas.microsoft.com/office/drawing/2016/SVG/main" r:embed="rId8"/>
-              </a:ext>
-            </a:extLst>
-          </a:blip>
-          <a:stretch>
-            <a:fillRect/>
-          </a:stretch>
-        </p:blipFill>
-        <p:spPr>
-          <a:xfrm>
-            <a:off x="6309360" y="3749040"/>
-            <a:ext cx="5029200" cy="1920240"/>
-          </a:xfrm>
-          <a:prstGeom prst="rect">
-            <a:avLst/>
-          </a:prstGeom>
-        </p:spPr>
-      </p:pic>
-      <p:sp>
-        <p:nvSpPr>
-          <p:cNvPr id="9" name="Shape 3"/>
-          <p:cNvSpPr/>
-          <p:nvPr/>
-        </p:nvSpPr>
-        <p:spPr>
-          <a:xfrm>
-            <a:off x="6309360" y="3749040"/>
-            <a:ext cx="5029200" cy="1920240"/>
-          </a:xfrm>
-          <a:prstGeom prst="rect">
-            <a:avLst/>
-          </a:prstGeom>
-          <a:solidFill>
-            <a:srgbClr val="FFFFFF">
-              <a:alpha val="0"/>
+      <p:sp>
+        <p:nvSpPr>
+          <p:cNvPr id="8" name="Shape 3"/>
+          <p:cNvSpPr/>
+          <p:nvPr/>
+        </p:nvSpPr>
+        <p:spPr>
+          <a:xfrm>
+            <a:off x="786384" y="1956816"/>
+            <a:ext cx="32004" cy="3483864"/>
+          </a:xfrm>
+          <a:prstGeom prst="rect">
+            <a:avLst/>
+          </a:prstGeom>
+          <a:solidFill>
+            <a:srgbClr val="DBEAFE">
+              <a:alpha val="80000"/>
             </a:srgbClr>
           </a:solidFill>
           <a:ln w="12700">
             <a:solidFill>
-              <a:srgbClr val="E2E8F0">
+              <a:srgbClr val="DBEAFE">
                 <a:alpha val="0"/>
               </a:srgbClr>
             </a:solidFill>
             <a:prstDash val="solid"/>
           </a:ln>
-          <a:effectLst>
-            <a:outerShdw sx="100000" sy="100000" kx="0" ky="0" algn="bl" rotWithShape="0" blurRad="12700" dist="50800" dir="2700000">
-              <a:srgbClr val="000000">
-                <a:alpha val="8000"/>
-              </a:srgbClr>
-            </a:outerShdw>
-          </a:effectLst>
-        </p:spPr>
-      </p:sp>
-      <p:sp>
-        <p:nvSpPr>
-          <p:cNvPr id="10" name="Shape 4"/>
-          <p:cNvSpPr/>
-          <p:nvPr/>
-        </p:nvSpPr>
-        <p:spPr>
-          <a:xfrm>
-            <a:off x="822960" y="1463040"/>
-            <a:ext cx="73152" cy="1920240"/>
+        </p:spPr>
+      </p:sp>
+      <p:sp>
+        <p:nvSpPr>
+          <p:cNvPr id="9" name="Shape 4"/>
+          <p:cNvSpPr/>
+          <p:nvPr/>
+        </p:nvSpPr>
+        <p:spPr>
+          <a:xfrm>
+            <a:off x="914400" y="1865376"/>
+            <a:ext cx="73152" cy="1024128"/>
           </a:xfrm>
           <a:prstGeom prst="rect">
             <a:avLst/>
@@ -10145,14 +9558,14 @@
       </p:sp>
       <p:sp>
         <p:nvSpPr>
-          <p:cNvPr id="11" name="Shape 5"/>
-          <p:cNvSpPr/>
-          <p:nvPr/>
-        </p:nvSpPr>
-        <p:spPr>
-          <a:xfrm>
-            <a:off x="6309360" y="1463040"/>
-            <a:ext cx="73152" cy="1920240"/>
+          <p:cNvPr id="10" name="Shape 5"/>
+          <p:cNvSpPr/>
+          <p:nvPr/>
+        </p:nvSpPr>
+        <p:spPr>
+          <a:xfrm>
+            <a:off x="914400" y="3191256"/>
+            <a:ext cx="73152" cy="1024128"/>
           </a:xfrm>
           <a:prstGeom prst="rect">
             <a:avLst/>
@@ -10172,14 +9585,14 @@
       </p:sp>
       <p:sp>
         <p:nvSpPr>
-          <p:cNvPr id="12" name="Shape 6"/>
-          <p:cNvSpPr/>
-          <p:nvPr/>
-        </p:nvSpPr>
-        <p:spPr>
-          <a:xfrm>
-            <a:off x="822960" y="3749040"/>
-            <a:ext cx="73152" cy="1920240"/>
+          <p:cNvPr id="11" name="Shape 6"/>
+          <p:cNvSpPr/>
+          <p:nvPr/>
+        </p:nvSpPr>
+        <p:spPr>
+          <a:xfrm>
+            <a:off x="914400" y="4507992"/>
+            <a:ext cx="73152" cy="1024128"/>
           </a:xfrm>
           <a:prstGeom prst="rect">
             <a:avLst/>
@@ -10199,34 +9612,7 @@
       </p:sp>
       <p:sp>
         <p:nvSpPr>
-          <p:cNvPr id="13" name="Shape 7"/>
-          <p:cNvSpPr/>
-          <p:nvPr/>
-        </p:nvSpPr>
-        <p:spPr>
-          <a:xfrm>
-            <a:off x="6309360" y="3749040"/>
-            <a:ext cx="73152" cy="1920240"/>
-          </a:xfrm>
-          <a:prstGeom prst="rect">
-            <a:avLst/>
-          </a:prstGeom>
-          <a:solidFill>
-            <a:srgbClr val="DBEAFE"/>
-          </a:solidFill>
-          <a:ln w="12700">
-            <a:solidFill>
-              <a:srgbClr val="DBEAFE">
-                <a:alpha val="0"/>
-              </a:srgbClr>
-            </a:solidFill>
-            <a:prstDash val="solid"/>
-          </a:ln>
-        </p:spPr>
-      </p:sp>
-      <p:sp>
-        <p:nvSpPr>
-          <p:cNvPr id="14" name="mdpr:2-3-fe6c97:title:__title:2-3-fe6c97"/>
+          <p:cNvPr id="12" name="mdpr:2-3-fe6c97:title:__title:2-3-fe6c97"/>
           <p:cNvSpPr txBox="1"/>
           <p:nvPr/>
         </p:nvSpPr>
@@ -10268,14 +9654,56 @@
       </p:sp>
       <p:sp>
         <p:nvSpPr>
-          <p:cNvPr id="15" name="mdpr:2-3-fe6c97:item-1:block-23-chunk-2"/>
+          <p:cNvPr id="13" name="mdpr:2-3-fe6c97:item-1:block-23-chunk-2"/>
           <p:cNvSpPr txBox="1"/>
           <p:nvPr/>
         </p:nvSpPr>
         <p:spPr>
           <a:xfrm>
-            <a:off x="1042416" y="2209800"/>
-            <a:ext cx="4608576" cy="426720"/>
+            <a:off x="1133856" y="2164080"/>
+            <a:ext cx="9820656" cy="426720"/>
+          </a:xfrm>
+          <a:prstGeom prst="rect">
+            <a:avLst/>
+          </a:prstGeom>
+          <a:noFill/>
+          <a:ln/>
+        </p:spPr>
+        <p:txBody>
+          <a:bodyPr wrap="square" lIns="0" tIns="25400" rIns="25400" bIns="0" rtlCol="0" anchor="ctr"/>
+          <a:lstStyle/>
+          <a:p>
+            <a:pPr algn="ctr" indent="0" marL="0">
+              <a:lnSpc>
+                <a:spcPct val="120000"/>
+              </a:lnSpc>
+              <a:buNone/>
+            </a:pPr>
+            <a:r>
+              <a:rPr lang="en-US" sz="2200" dirty="0">
+                <a:solidFill>
+                  <a:srgbClr val="111111"/>
+                </a:solidFill>
+                <a:latin typeface="Pretendard" pitchFamily="34" charset="0"/>
+                <a:ea typeface="Pretendard" pitchFamily="34" charset="-122"/>
+                <a:cs typeface="Pretendard" pitchFamily="34" charset="-120"/>
+              </a:rPr>
+              <a:t>Diagnostics</a:t>
+            </a:r>
+            <a:endParaRPr lang="en-US" sz="2200" dirty="0"/>
+          </a:p>
+        </p:txBody>
+      </p:sp>
+      <p:sp>
+        <p:nvSpPr>
+          <p:cNvPr id="14" name="mdpr:2-3-fe6c97:item-2:block-23-chunk-2"/>
+          <p:cNvSpPr txBox="1"/>
+          <p:nvPr/>
+        </p:nvSpPr>
+        <p:spPr>
+          <a:xfrm>
+            <a:off x="1133856" y="3489960"/>
+            <a:ext cx="9820656" cy="426720"/>
           </a:xfrm>
           <a:prstGeom prst="rect">
             <a:avLst/>
@@ -10310,14 +9738,14 @@
       </p:sp>
       <p:sp>
         <p:nvSpPr>
-          <p:cNvPr id="16" name="mdpr:2-3-fe6c97:item-2:block-23-chunk-2"/>
+          <p:cNvPr id="15" name="mdpr:2-3-fe6c97:item-3:block-23-chunk-2"/>
           <p:cNvSpPr txBox="1"/>
           <p:nvPr/>
         </p:nvSpPr>
         <p:spPr>
           <a:xfrm>
-            <a:off x="6528816" y="2209800"/>
-            <a:ext cx="4608576" cy="426720"/>
+            <a:off x="1133856" y="4806696"/>
+            <a:ext cx="9820656" cy="426720"/>
           </a:xfrm>
           <a:prstGeom prst="rect">
             <a:avLst/>
@@ -10345,90 +9773,6 @@
                 <a:cs typeface="Pretendard" pitchFamily="34" charset="-120"/>
               </a:rPr>
               <a:t>text overflow</a:t>
-            </a:r>
-            <a:endParaRPr lang="en-US" sz="2200" dirty="0"/>
-          </a:p>
-        </p:txBody>
-      </p:sp>
-      <p:sp>
-        <p:nvSpPr>
-          <p:cNvPr id="17" name="mdpr:2-3-fe6c97:item-3:block-23-chunk-2"/>
-          <p:cNvSpPr txBox="1"/>
-          <p:nvPr/>
-        </p:nvSpPr>
-        <p:spPr>
-          <a:xfrm>
-            <a:off x="1042416" y="4495800"/>
-            <a:ext cx="4608576" cy="426720"/>
-          </a:xfrm>
-          <a:prstGeom prst="rect">
-            <a:avLst/>
-          </a:prstGeom>
-          <a:noFill/>
-          <a:ln/>
-        </p:spPr>
-        <p:txBody>
-          <a:bodyPr wrap="square" lIns="0" tIns="25400" rIns="25400" bIns="0" rtlCol="0" anchor="ctr"/>
-          <a:lstStyle/>
-          <a:p>
-            <a:pPr algn="ctr" indent="0" marL="0">
-              <a:lnSpc>
-                <a:spcPct val="120000"/>
-              </a:lnSpc>
-              <a:buNone/>
-            </a:pPr>
-            <a:r>
-              <a:rPr lang="en-US" sz="2200" dirty="0">
-                <a:solidFill>
-                  <a:srgbClr val="111111"/>
-                </a:solidFill>
-                <a:latin typeface="Pretendard" pitchFamily="34" charset="0"/>
-                <a:ea typeface="Pretendard" pitchFamily="34" charset="-122"/>
-                <a:cs typeface="Pretendard" pitchFamily="34" charset="-120"/>
-              </a:rPr>
-              <a:t>table overflow</a:t>
-            </a:r>
-            <a:endParaRPr lang="en-US" sz="2200" dirty="0"/>
-          </a:p>
-        </p:txBody>
-      </p:sp>
-      <p:sp>
-        <p:nvSpPr>
-          <p:cNvPr id="18" name="mdpr:2-3-fe6c97:item-4:block-23-chunk-2"/>
-          <p:cNvSpPr txBox="1"/>
-          <p:nvPr/>
-        </p:nvSpPr>
-        <p:spPr>
-          <a:xfrm>
-            <a:off x="6528816" y="4495800"/>
-            <a:ext cx="4608576" cy="426720"/>
-          </a:xfrm>
-          <a:prstGeom prst="rect">
-            <a:avLst/>
-          </a:prstGeom>
-          <a:noFill/>
-          <a:ln/>
-        </p:spPr>
-        <p:txBody>
-          <a:bodyPr wrap="square" lIns="0" tIns="25400" rIns="25400" bIns="0" rtlCol="0" anchor="ctr"/>
-          <a:lstStyle/>
-          <a:p>
-            <a:pPr algn="ctr" indent="0" marL="0">
-              <a:lnSpc>
-                <a:spcPct val="120000"/>
-              </a:lnSpc>
-              <a:buNone/>
-            </a:pPr>
-            <a:r>
-              <a:rPr lang="en-US" sz="2200" dirty="0">
-                <a:solidFill>
-                  <a:srgbClr val="111111"/>
-                </a:solidFill>
-                <a:latin typeface="Pretendard" pitchFamily="34" charset="0"/>
-                <a:ea typeface="Pretendard" pitchFamily="34" charset="-122"/>
-                <a:cs typeface="Pretendard" pitchFamily="34" charset="-120"/>
-              </a:rPr>
-              <a:t>missing images</a:t>
             </a:r>
             <a:endParaRPr lang="en-US" sz="2200" dirty="0"/>
           </a:p>
@@ -10474,8 +9818,8 @@
         </p:nvSpPr>
         <p:spPr>
           <a:xfrm>
-            <a:off x="6080760" y="1389888"/>
-            <a:ext cx="22860" cy="4846320"/>
+            <a:off x="6080760" y="1737360"/>
+            <a:ext cx="22860" cy="3968496"/>
           </a:xfrm>
           <a:prstGeom prst="rect">
             <a:avLst/>
@@ -10503,8 +9847,8 @@
         </p:nvSpPr>
         <p:spPr>
           <a:xfrm>
-            <a:off x="822960" y="1389888"/>
-            <a:ext cx="73152" cy="566928"/>
+            <a:off x="822960" y="1737360"/>
+            <a:ext cx="73152" cy="841248"/>
           </a:xfrm>
           <a:prstGeom prst="rect">
             <a:avLst/>
@@ -10530,8 +9874,8 @@
         </p:nvSpPr>
         <p:spPr>
           <a:xfrm>
-            <a:off x="822960" y="2103120"/>
-            <a:ext cx="73152" cy="566928"/>
+            <a:off x="822960" y="2779776"/>
+            <a:ext cx="73152" cy="841248"/>
           </a:xfrm>
           <a:prstGeom prst="rect">
             <a:avLst/>
@@ -10557,8 +9901,8 @@
         </p:nvSpPr>
         <p:spPr>
           <a:xfrm>
-            <a:off x="822960" y="2816352"/>
-            <a:ext cx="73152" cy="566928"/>
+            <a:off x="822960" y="3822192"/>
+            <a:ext cx="73152" cy="841248"/>
           </a:xfrm>
           <a:prstGeom prst="rect">
             <a:avLst/>
@@ -10584,8 +9928,8 @@
         </p:nvSpPr>
         <p:spPr>
           <a:xfrm>
-            <a:off x="822960" y="3529584"/>
-            <a:ext cx="73152" cy="566928"/>
+            <a:off x="822960" y="4864608"/>
+            <a:ext cx="73152" cy="841248"/>
           </a:xfrm>
           <a:prstGeom prst="rect">
             <a:avLst/>
@@ -10611,8 +9955,8 @@
         </p:nvSpPr>
         <p:spPr>
           <a:xfrm>
-            <a:off x="822960" y="4242816"/>
-            <a:ext cx="73152" cy="566928"/>
+            <a:off x="6272784" y="1737360"/>
+            <a:ext cx="73152" cy="841248"/>
           </a:xfrm>
           <a:prstGeom prst="rect">
             <a:avLst/>
@@ -10638,8 +9982,8 @@
         </p:nvSpPr>
         <p:spPr>
           <a:xfrm>
-            <a:off x="822960" y="4956048"/>
-            <a:ext cx="73152" cy="566928"/>
+            <a:off x="6272784" y="2779776"/>
+            <a:ext cx="73152" cy="841248"/>
           </a:xfrm>
           <a:prstGeom prst="rect">
             <a:avLst/>
@@ -10665,8 +10009,8 @@
         </p:nvSpPr>
         <p:spPr>
           <a:xfrm>
-            <a:off x="822960" y="5669280"/>
-            <a:ext cx="73152" cy="566928"/>
+            <a:off x="6272784" y="3822192"/>
+            <a:ext cx="73152" cy="841248"/>
           </a:xfrm>
           <a:prstGeom prst="rect">
             <a:avLst/>
@@ -10692,8 +10036,8 @@
         </p:nvSpPr>
         <p:spPr>
           <a:xfrm>
-            <a:off x="6272784" y="1389888"/>
-            <a:ext cx="73152" cy="566928"/>
+            <a:off x="6272784" y="4864608"/>
+            <a:ext cx="73152" cy="841248"/>
           </a:xfrm>
           <a:prstGeom prst="rect">
             <a:avLst/>
@@ -10713,169 +10057,7 @@
       </p:sp>
       <p:sp>
         <p:nvSpPr>
-          <p:cNvPr id="11" name="Shape 9"/>
-          <p:cNvSpPr/>
-          <p:nvPr/>
-        </p:nvSpPr>
-        <p:spPr>
-          <a:xfrm>
-            <a:off x="6272784" y="2103120"/>
-            <a:ext cx="73152" cy="566928"/>
-          </a:xfrm>
-          <a:prstGeom prst="rect">
-            <a:avLst/>
-          </a:prstGeom>
-          <a:solidFill>
-            <a:srgbClr val="2563EB"/>
-          </a:solidFill>
-          <a:ln w="12700">
-            <a:solidFill>
-              <a:srgbClr val="2563EB">
-                <a:alpha val="0"/>
-              </a:srgbClr>
-            </a:solidFill>
-            <a:prstDash val="solid"/>
-          </a:ln>
-        </p:spPr>
-      </p:sp>
-      <p:sp>
-        <p:nvSpPr>
-          <p:cNvPr id="12" name="Shape 10"/>
-          <p:cNvSpPr/>
-          <p:nvPr/>
-        </p:nvSpPr>
-        <p:spPr>
-          <a:xfrm>
-            <a:off x="6272784" y="2816352"/>
-            <a:ext cx="73152" cy="566928"/>
-          </a:xfrm>
-          <a:prstGeom prst="rect">
-            <a:avLst/>
-          </a:prstGeom>
-          <a:solidFill>
-            <a:srgbClr val="DBEAFE"/>
-          </a:solidFill>
-          <a:ln w="12700">
-            <a:solidFill>
-              <a:srgbClr val="DBEAFE">
-                <a:alpha val="0"/>
-              </a:srgbClr>
-            </a:solidFill>
-            <a:prstDash val="solid"/>
-          </a:ln>
-        </p:spPr>
-      </p:sp>
-      <p:sp>
-        <p:nvSpPr>
-          <p:cNvPr id="13" name="Shape 11"/>
-          <p:cNvSpPr/>
-          <p:nvPr/>
-        </p:nvSpPr>
-        <p:spPr>
-          <a:xfrm>
-            <a:off x="6272784" y="3529584"/>
-            <a:ext cx="73152" cy="566928"/>
-          </a:xfrm>
-          <a:prstGeom prst="rect">
-            <a:avLst/>
-          </a:prstGeom>
-          <a:solidFill>
-            <a:srgbClr val="2563EB"/>
-          </a:solidFill>
-          <a:ln w="12700">
-            <a:solidFill>
-              <a:srgbClr val="2563EB">
-                <a:alpha val="0"/>
-              </a:srgbClr>
-            </a:solidFill>
-            <a:prstDash val="solid"/>
-          </a:ln>
-        </p:spPr>
-      </p:sp>
-      <p:sp>
-        <p:nvSpPr>
-          <p:cNvPr id="14" name="Shape 12"/>
-          <p:cNvSpPr/>
-          <p:nvPr/>
-        </p:nvSpPr>
-        <p:spPr>
-          <a:xfrm>
-            <a:off x="6272784" y="4242816"/>
-            <a:ext cx="73152" cy="566928"/>
-          </a:xfrm>
-          <a:prstGeom prst="rect">
-            <a:avLst/>
-          </a:prstGeom>
-          <a:solidFill>
-            <a:srgbClr val="DBEAFE"/>
-          </a:solidFill>
-          <a:ln w="12700">
-            <a:solidFill>
-              <a:srgbClr val="DBEAFE">
-                <a:alpha val="0"/>
-              </a:srgbClr>
-            </a:solidFill>
-            <a:prstDash val="solid"/>
-          </a:ln>
-        </p:spPr>
-      </p:sp>
-      <p:sp>
-        <p:nvSpPr>
-          <p:cNvPr id="15" name="Shape 13"/>
-          <p:cNvSpPr/>
-          <p:nvPr/>
-        </p:nvSpPr>
-        <p:spPr>
-          <a:xfrm>
-            <a:off x="6272784" y="4956048"/>
-            <a:ext cx="73152" cy="566928"/>
-          </a:xfrm>
-          <a:prstGeom prst="rect">
-            <a:avLst/>
-          </a:prstGeom>
-          <a:solidFill>
-            <a:srgbClr val="2563EB"/>
-          </a:solidFill>
-          <a:ln w="12700">
-            <a:solidFill>
-              <a:srgbClr val="2563EB">
-                <a:alpha val="0"/>
-              </a:srgbClr>
-            </a:solidFill>
-            <a:prstDash val="solid"/>
-          </a:ln>
-        </p:spPr>
-      </p:sp>
-      <p:sp>
-        <p:nvSpPr>
-          <p:cNvPr id="16" name="Shape 14"/>
-          <p:cNvSpPr/>
-          <p:nvPr/>
-        </p:nvSpPr>
-        <p:spPr>
-          <a:xfrm>
-            <a:off x="6272784" y="5669280"/>
-            <a:ext cx="73152" cy="566928"/>
-          </a:xfrm>
-          <a:prstGeom prst="rect">
-            <a:avLst/>
-          </a:prstGeom>
-          <a:solidFill>
-            <a:srgbClr val="DBEAFE"/>
-          </a:solidFill>
-          <a:ln w="12700">
-            <a:solidFill>
-              <a:srgbClr val="DBEAFE">
-                <a:alpha val="0"/>
-              </a:srgbClr>
-            </a:solidFill>
-            <a:prstDash val="solid"/>
-          </a:ln>
-        </p:spPr>
-      </p:sp>
-      <p:sp>
-        <p:nvSpPr>
-          <p:cNvPr id="17" name="mdpr:1-2-0772f8:title:__title:1-2-0772f8"/>
+          <p:cNvPr id="11" name="mdpr:1-2-0772f8:title:__title:1-2-0772f8"/>
           <p:cNvSpPr txBox="1"/>
           <p:nvPr/>
         </p:nvSpPr>
@@ -10917,14 +10099,14 @@
       </p:sp>
       <p:sp>
         <p:nvSpPr>
-          <p:cNvPr id="18" name="mdpr:1-2-0772f8:toc-item-1:toc-item-1"/>
+          <p:cNvPr id="12" name="mdpr:1-2-0772f8:toc-item-1:toc-item-1"/>
           <p:cNvSpPr txBox="1"/>
           <p:nvPr/>
         </p:nvSpPr>
         <p:spPr>
           <a:xfrm>
-            <a:off x="1042416" y="1481328"/>
-            <a:ext cx="4645152" cy="384048"/>
+            <a:off x="1042416" y="1828800"/>
+            <a:ext cx="4645152" cy="658368"/>
           </a:xfrm>
           <a:prstGeom prst="rect">
             <a:avLst/>
@@ -10959,14 +10141,14 @@
       </p:sp>
       <p:sp>
         <p:nvSpPr>
-          <p:cNvPr id="19" name="mdpr:1-2-0772f8:toc-item-2:toc-item-2"/>
+          <p:cNvPr id="13" name="mdpr:1-2-0772f8:toc-item-2:toc-item-2"/>
           <p:cNvSpPr txBox="1"/>
           <p:nvPr/>
         </p:nvSpPr>
         <p:spPr>
           <a:xfrm>
-            <a:off x="1042416" y="2194560"/>
-            <a:ext cx="4645152" cy="384048"/>
+            <a:off x="1042416" y="2871216"/>
+            <a:ext cx="4645152" cy="658368"/>
           </a:xfrm>
           <a:prstGeom prst="rect">
             <a:avLst/>
@@ -11001,14 +10183,14 @@
       </p:sp>
       <p:sp>
         <p:nvSpPr>
-          <p:cNvPr id="20" name="mdpr:1-2-0772f8:toc-item-3:toc-item-3"/>
+          <p:cNvPr id="14" name="mdpr:1-2-0772f8:toc-item-3:toc-item-3"/>
           <p:cNvSpPr txBox="1"/>
           <p:nvPr/>
         </p:nvSpPr>
         <p:spPr>
           <a:xfrm>
-            <a:off x="1042416" y="2907792"/>
-            <a:ext cx="4645152" cy="384048"/>
+            <a:off x="1042416" y="3913632"/>
+            <a:ext cx="4645152" cy="658368"/>
           </a:xfrm>
           <a:prstGeom prst="rect">
             <a:avLst/>
@@ -11043,14 +10225,14 @@
       </p:sp>
       <p:sp>
         <p:nvSpPr>
-          <p:cNvPr id="21" name="mdpr:1-2-0772f8:toc-item-4:toc-item-4"/>
+          <p:cNvPr id="15" name="mdpr:1-2-0772f8:toc-item-4:toc-item-4"/>
           <p:cNvSpPr txBox="1"/>
           <p:nvPr/>
         </p:nvSpPr>
         <p:spPr>
           <a:xfrm>
-            <a:off x="1042416" y="3621024"/>
-            <a:ext cx="4645152" cy="384048"/>
+            <a:off x="1042416" y="4956048"/>
+            <a:ext cx="4645152" cy="658368"/>
           </a:xfrm>
           <a:prstGeom prst="rect">
             <a:avLst/>
@@ -11085,14 +10267,14 @@
       </p:sp>
       <p:sp>
         <p:nvSpPr>
-          <p:cNvPr id="22" name="mdpr:1-2-0772f8:toc-item-5:toc-item-5"/>
+          <p:cNvPr id="16" name="mdpr:1-2-0772f8:toc-item-5:toc-item-5"/>
           <p:cNvSpPr txBox="1"/>
           <p:nvPr/>
         </p:nvSpPr>
         <p:spPr>
           <a:xfrm>
-            <a:off x="1042416" y="4334256"/>
-            <a:ext cx="4645152" cy="384048"/>
+            <a:off x="6492240" y="1828800"/>
+            <a:ext cx="4645152" cy="658368"/>
           </a:xfrm>
           <a:prstGeom prst="rect">
             <a:avLst/>
@@ -11127,14 +10309,14 @@
       </p:sp>
       <p:sp>
         <p:nvSpPr>
-          <p:cNvPr id="23" name="mdpr:1-2-0772f8:toc-item-6:toc-item-6"/>
+          <p:cNvPr id="17" name="mdpr:1-2-0772f8:toc-item-6:toc-item-6"/>
           <p:cNvSpPr txBox="1"/>
           <p:nvPr/>
         </p:nvSpPr>
         <p:spPr>
           <a:xfrm>
-            <a:off x="1042416" y="5047488"/>
-            <a:ext cx="4645152" cy="384048"/>
+            <a:off x="6492240" y="2871216"/>
+            <a:ext cx="4645152" cy="658368"/>
           </a:xfrm>
           <a:prstGeom prst="rect">
             <a:avLst/>
@@ -11169,14 +10351,14 @@
       </p:sp>
       <p:sp>
         <p:nvSpPr>
-          <p:cNvPr id="24" name="mdpr:1-2-0772f8:toc-item-7:toc-item-7"/>
+          <p:cNvPr id="18" name="mdpr:1-2-0772f8:toc-item-7:toc-item-7"/>
           <p:cNvSpPr txBox="1"/>
           <p:nvPr/>
         </p:nvSpPr>
         <p:spPr>
           <a:xfrm>
-            <a:off x="1042416" y="5760720"/>
-            <a:ext cx="4645152" cy="384048"/>
+            <a:off x="6492240" y="3913632"/>
+            <a:ext cx="4645152" cy="658368"/>
           </a:xfrm>
           <a:prstGeom prst="rect">
             <a:avLst/>
@@ -11211,14 +10393,14 @@
       </p:sp>
       <p:sp>
         <p:nvSpPr>
-          <p:cNvPr id="25" name="mdpr:1-2-0772f8:toc-item-8:toc-item-8"/>
+          <p:cNvPr id="19" name="mdpr:1-2-0772f8:toc-item-8:toc-item-8"/>
           <p:cNvSpPr txBox="1"/>
           <p:nvPr/>
         </p:nvSpPr>
         <p:spPr>
           <a:xfrm>
-            <a:off x="6492240" y="1481328"/>
-            <a:ext cx="4645152" cy="384048"/>
+            <a:off x="6492240" y="4956048"/>
+            <a:ext cx="4645152" cy="658368"/>
           </a:xfrm>
           <a:prstGeom prst="rect">
             <a:avLst/>
@@ -11246,258 +10428,6 @@
                 <a:cs typeface="Pretendard" pitchFamily="34" charset="-120"/>
               </a:rPr>
               <a:t>08  Example decks from MDPR</a:t>
-            </a:r>
-            <a:endParaRPr lang="en-US" sz="1800" dirty="0"/>
-          </a:p>
-        </p:txBody>
-      </p:sp>
-      <p:sp>
-        <p:nvSpPr>
-          <p:cNvPr id="26" name="mdpr:1-2-0772f8:toc-item-9:toc-item-9"/>
-          <p:cNvSpPr txBox="1"/>
-          <p:nvPr/>
-        </p:nvSpPr>
-        <p:spPr>
-          <a:xfrm>
-            <a:off x="6492240" y="2194560"/>
-            <a:ext cx="4645152" cy="384048"/>
-          </a:xfrm>
-          <a:prstGeom prst="rect">
-            <a:avLst/>
-          </a:prstGeom>
-          <a:noFill/>
-          <a:ln/>
-        </p:spPr>
-        <p:txBody>
-          <a:bodyPr wrap="square" lIns="0" tIns="25400" rIns="25400" bIns="0" rtlCol="0" anchor="ctr"/>
-          <a:lstStyle/>
-          <a:p>
-            <a:pPr algn="ctr" indent="0" marL="0">
-              <a:lnSpc>
-                <a:spcPct val="120000"/>
-              </a:lnSpc>
-              <a:buNone/>
-            </a:pPr>
-            <a:r>
-              <a:rPr lang="en-US" sz="1800" dirty="0">
-                <a:solidFill>
-                  <a:srgbClr val="111111"/>
-                </a:solidFill>
-                <a:latin typeface="Pretendard" pitchFamily="34" charset="0"/>
-                <a:ea typeface="Pretendard" pitchFamily="34" charset="-122"/>
-                <a:cs typeface="Pretendard" pitchFamily="34" charset="-120"/>
-              </a:rPr>
-              <a:t>09  Example: examples/basic/deck.md</a:t>
-            </a:r>
-            <a:endParaRPr lang="en-US" sz="1800" dirty="0"/>
-          </a:p>
-        </p:txBody>
-      </p:sp>
-      <p:sp>
-        <p:nvSpPr>
-          <p:cNvPr id="27" name="mdpr:1-2-0772f8:toc-item-10:toc-item-10"/>
-          <p:cNvSpPr txBox="1"/>
-          <p:nvPr/>
-        </p:nvSpPr>
-        <p:spPr>
-          <a:xfrm>
-            <a:off x="6492240" y="2907792"/>
-            <a:ext cx="4645152" cy="384048"/>
-          </a:xfrm>
-          <a:prstGeom prst="rect">
-            <a:avLst/>
-          </a:prstGeom>
-          <a:noFill/>
-          <a:ln/>
-        </p:spPr>
-        <p:txBody>
-          <a:bodyPr wrap="square" lIns="0" tIns="25400" rIns="25400" bIns="0" rtlCol="0" anchor="ctr"/>
-          <a:lstStyle/>
-          <a:p>
-            <a:pPr algn="ctr" indent="0" marL="0">
-              <a:lnSpc>
-                <a:spcPct val="120000"/>
-              </a:lnSpc>
-              <a:buNone/>
-            </a:pPr>
-            <a:r>
-              <a:rPr lang="en-US" sz="1800" dirty="0">
-                <a:solidFill>
-                  <a:srgbClr val="111111"/>
-                </a:solidFill>
-                <a:latin typeface="Pretendard" pitchFamily="34" charset="0"/>
-                <a:ea typeface="Pretendard" pitchFamily="34" charset="-122"/>
-                <a:cs typeface="Pretendard" pitchFamily="34" charset="-120"/>
-              </a:rPr>
-              <a:t>10  Example: examples/comparison/deck.md</a:t>
-            </a:r>
-            <a:endParaRPr lang="en-US" sz="1800" dirty="0"/>
-          </a:p>
-        </p:txBody>
-      </p:sp>
-      <p:sp>
-        <p:nvSpPr>
-          <p:cNvPr id="28" name="mdpr:1-2-0772f8:toc-item-11:toc-item-11"/>
-          <p:cNvSpPr txBox="1"/>
-          <p:nvPr/>
-        </p:nvSpPr>
-        <p:spPr>
-          <a:xfrm>
-            <a:off x="6492240" y="3621024"/>
-            <a:ext cx="4645152" cy="384048"/>
-          </a:xfrm>
-          <a:prstGeom prst="rect">
-            <a:avLst/>
-          </a:prstGeom>
-          <a:noFill/>
-          <a:ln/>
-        </p:spPr>
-        <p:txBody>
-          <a:bodyPr wrap="square" lIns="0" tIns="25400" rIns="25400" bIns="0" rtlCol="0" anchor="ctr"/>
-          <a:lstStyle/>
-          <a:p>
-            <a:pPr algn="ctr" indent="0" marL="0">
-              <a:lnSpc>
-                <a:spcPct val="120000"/>
-              </a:lnSpc>
-              <a:buNone/>
-            </a:pPr>
-            <a:r>
-              <a:rPr lang="en-US" sz="1800" dirty="0">
-                <a:solidFill>
-                  <a:srgbClr val="111111"/>
-                </a:solidFill>
-                <a:latin typeface="Pretendard" pitchFamily="34" charset="0"/>
-                <a:ea typeface="Pretendard" pitchFamily="34" charset="-122"/>
-                <a:cs typeface="Pretendard" pitchFamily="34" charset="-120"/>
-              </a:rPr>
-              <a:t>11  Example: examples/pipeline/deck.md</a:t>
-            </a:r>
-            <a:endParaRPr lang="en-US" sz="1800" dirty="0"/>
-          </a:p>
-        </p:txBody>
-      </p:sp>
-      <p:sp>
-        <p:nvSpPr>
-          <p:cNvPr id="29" name="mdpr:1-2-0772f8:toc-item-12:toc-item-12"/>
-          <p:cNvSpPr txBox="1"/>
-          <p:nvPr/>
-        </p:nvSpPr>
-        <p:spPr>
-          <a:xfrm>
-            <a:off x="6492240" y="4334256"/>
-            <a:ext cx="4645152" cy="384048"/>
-          </a:xfrm>
-          <a:prstGeom prst="rect">
-            <a:avLst/>
-          </a:prstGeom>
-          <a:noFill/>
-          <a:ln/>
-        </p:spPr>
-        <p:txBody>
-          <a:bodyPr wrap="square" lIns="0" tIns="25400" rIns="25400" bIns="0" rtlCol="0" anchor="ctr"/>
-          <a:lstStyle/>
-          <a:p>
-            <a:pPr algn="ctr" indent="0" marL="0">
-              <a:lnSpc>
-                <a:spcPct val="120000"/>
-              </a:lnSpc>
-              <a:buNone/>
-            </a:pPr>
-            <a:r>
-              <a:rPr lang="en-US" sz="1800" dirty="0">
-                <a:solidFill>
-                  <a:srgbClr val="111111"/>
-                </a:solidFill>
-                <a:latin typeface="Pretendard" pitchFamily="34" charset="0"/>
-                <a:ea typeface="Pretendard" pitchFamily="34" charset="-122"/>
-                <a:cs typeface="Pretendard" pitchFamily="34" charset="-120"/>
-              </a:rPr>
-              <a:t>12  Example: examples/diagram-arrangements/deck.md</a:t>
-            </a:r>
-            <a:endParaRPr lang="en-US" sz="1800" dirty="0"/>
-          </a:p>
-        </p:txBody>
-      </p:sp>
-      <p:sp>
-        <p:nvSpPr>
-          <p:cNvPr id="30" name="mdpr:1-2-0772f8:toc-item-13:toc-item-13"/>
-          <p:cNvSpPr txBox="1"/>
-          <p:nvPr/>
-        </p:nvSpPr>
-        <p:spPr>
-          <a:xfrm>
-            <a:off x="6492240" y="5047488"/>
-            <a:ext cx="4645152" cy="384048"/>
-          </a:xfrm>
-          <a:prstGeom prst="rect">
-            <a:avLst/>
-          </a:prstGeom>
-          <a:noFill/>
-          <a:ln/>
-        </p:spPr>
-        <p:txBody>
-          <a:bodyPr wrap="square" lIns="0" tIns="25400" rIns="25400" bIns="0" rtlCol="0" anchor="ctr"/>
-          <a:lstStyle/>
-          <a:p>
-            <a:pPr algn="ctr" indent="0" marL="0">
-              <a:lnSpc>
-                <a:spcPct val="120000"/>
-              </a:lnSpc>
-              <a:buNone/>
-            </a:pPr>
-            <a:r>
-              <a:rPr lang="en-US" sz="1800" dirty="0">
-                <a:solidFill>
-                  <a:srgbClr val="111111"/>
-                </a:solidFill>
-                <a:latin typeface="Pretendard" pitchFamily="34" charset="0"/>
-                <a:ea typeface="Pretendard" pitchFamily="34" charset="-122"/>
-                <a:cs typeface="Pretendard" pitchFamily="34" charset="-120"/>
-              </a:rPr>
-              <a:t>13  Example: examples/five-methods/deck.md</a:t>
-            </a:r>
-            <a:endParaRPr lang="en-US" sz="1800" dirty="0"/>
-          </a:p>
-        </p:txBody>
-      </p:sp>
-      <p:sp>
-        <p:nvSpPr>
-          <p:cNvPr id="31" name="mdpr:1-2-0772f8:toc-item-14:toc-item-14"/>
-          <p:cNvSpPr txBox="1"/>
-          <p:nvPr/>
-        </p:nvSpPr>
-        <p:spPr>
-          <a:xfrm>
-            <a:off x="6492240" y="5760720"/>
-            <a:ext cx="4645152" cy="384048"/>
-          </a:xfrm>
-          <a:prstGeom prst="rect">
-            <a:avLst/>
-          </a:prstGeom>
-          <a:noFill/>
-          <a:ln/>
-        </p:spPr>
-        <p:txBody>
-          <a:bodyPr wrap="square" lIns="0" tIns="25400" rIns="25400" bIns="0" rtlCol="0" anchor="ctr"/>
-          <a:lstStyle/>
-          <a:p>
-            <a:pPr algn="ctr" indent="0" marL="0">
-              <a:lnSpc>
-                <a:spcPct val="120000"/>
-              </a:lnSpc>
-              <a:buNone/>
-            </a:pPr>
-            <a:r>
-              <a:rPr lang="en-US" sz="1800" dirty="0">
-                <a:solidFill>
-                  <a:srgbClr val="111111"/>
-                </a:solidFill>
-                <a:latin typeface="Pretendard" pitchFamily="34" charset="0"/>
-                <a:ea typeface="Pretendard" pitchFamily="34" charset="-122"/>
-                <a:cs typeface="Pretendard" pitchFamily="34" charset="-120"/>
-              </a:rPr>
-              <a:t>14  Example: examples/theme-preview-en/deck.md</a:t>
             </a:r>
             <a:endParaRPr lang="en-US" sz="1800" dirty="0"/>
           </a:p>
@@ -12791,8 +11721,8 @@
         </p:blipFill>
         <p:spPr>
           <a:xfrm>
-            <a:off x="822960" y="1463040"/>
-            <a:ext cx="5029200" cy="1920240"/>
+            <a:off x="914400" y="1865376"/>
+            <a:ext cx="10241280" cy="1024128"/>
           </a:xfrm>
           <a:prstGeom prst="rect">
             <a:avLst/>
@@ -12807,8 +11737,8 @@
         </p:nvSpPr>
         <p:spPr>
           <a:xfrm>
-            <a:off x="822960" y="1463040"/>
-            <a:ext cx="5029200" cy="1920240"/>
+            <a:off x="914400" y="1865376"/>
+            <a:ext cx="10241280" cy="1024128"/>
           </a:xfrm>
           <a:prstGeom prst="rect">
             <a:avLst/>
@@ -12857,8 +11787,8 @@
         </p:blipFill>
         <p:spPr>
           <a:xfrm>
-            <a:off x="6309360" y="1463040"/>
-            <a:ext cx="5029200" cy="1920240"/>
+            <a:off x="914400" y="3191256"/>
+            <a:ext cx="10241280" cy="1024128"/>
           </a:xfrm>
           <a:prstGeom prst="rect">
             <a:avLst/>
@@ -12873,8 +11803,8 @@
         </p:nvSpPr>
         <p:spPr>
           <a:xfrm>
-            <a:off x="6309360" y="1463040"/>
-            <a:ext cx="5029200" cy="1920240"/>
+            <a:off x="914400" y="3191256"/>
+            <a:ext cx="10241280" cy="1024128"/>
           </a:xfrm>
           <a:prstGeom prst="rect">
             <a:avLst/>
@@ -12923,8 +11853,8 @@
         </p:blipFill>
         <p:spPr>
           <a:xfrm>
-            <a:off x="822960" y="3749040"/>
-            <a:ext cx="5029200" cy="1920240"/>
+            <a:off x="914400" y="4507992"/>
+            <a:ext cx="10241280" cy="1024128"/>
           </a:xfrm>
           <a:prstGeom prst="rect">
             <a:avLst/>
@@ -12939,8 +11869,8 @@
         </p:nvSpPr>
         <p:spPr>
           <a:xfrm>
-            <a:off x="822960" y="3749040"/>
-            <a:ext cx="5029200" cy="1920240"/>
+            <a:off x="914400" y="4507992"/>
+            <a:ext cx="10241280" cy="1024128"/>
           </a:xfrm>
           <a:prstGeom prst="rect">
             <a:avLst/>
@@ -12967,82 +11897,45 @@
           </a:effectLst>
         </p:spPr>
       </p:sp>
-      <p:pic>
-        <p:nvPicPr>
-          <p:cNvPr id="8" name="Image 3" descr="preencoded.png">    </p:cNvPr>
-          <p:cNvPicPr>
-            <a:picLocks noChangeAspect="1"/>
-          </p:cNvPicPr>
-          <p:nvPr/>
-        </p:nvPicPr>
-        <p:blipFill>
-          <a:blip r:embed="rId7">
-            <a:extLst>
-              <a:ext uri="{96DAC541-7B7A-43D3-8B79-37D633B846F1}">
-                <asvg:svgBlip xmlns:asvg="http://schemas.microsoft.com/office/drawing/2016/SVG/main" r:embed="rId8"/>
-              </a:ext>
-            </a:extLst>
-          </a:blip>
-          <a:stretch>
-            <a:fillRect/>
-          </a:stretch>
-        </p:blipFill>
-        <p:spPr>
-          <a:xfrm>
-            <a:off x="6309360" y="3749040"/>
-            <a:ext cx="5029200" cy="1920240"/>
-          </a:xfrm>
-          <a:prstGeom prst="rect">
-            <a:avLst/>
-          </a:prstGeom>
-        </p:spPr>
-      </p:pic>
-      <p:sp>
-        <p:nvSpPr>
-          <p:cNvPr id="9" name="Shape 3"/>
-          <p:cNvSpPr/>
-          <p:nvPr/>
-        </p:nvSpPr>
-        <p:spPr>
-          <a:xfrm>
-            <a:off x="6309360" y="3749040"/>
-            <a:ext cx="5029200" cy="1920240"/>
-          </a:xfrm>
-          <a:prstGeom prst="rect">
-            <a:avLst/>
-          </a:prstGeom>
-          <a:solidFill>
-            <a:srgbClr val="FFFFFF">
-              <a:alpha val="0"/>
+      <p:sp>
+        <p:nvSpPr>
+          <p:cNvPr id="8" name="Shape 3"/>
+          <p:cNvSpPr/>
+          <p:nvPr/>
+        </p:nvSpPr>
+        <p:spPr>
+          <a:xfrm>
+            <a:off x="786384" y="1956816"/>
+            <a:ext cx="32004" cy="3483864"/>
+          </a:xfrm>
+          <a:prstGeom prst="rect">
+            <a:avLst/>
+          </a:prstGeom>
+          <a:solidFill>
+            <a:srgbClr val="DBEAFE">
+              <a:alpha val="80000"/>
             </a:srgbClr>
           </a:solidFill>
           <a:ln w="12700">
             <a:solidFill>
-              <a:srgbClr val="E2E8F0">
+              <a:srgbClr val="DBEAFE">
                 <a:alpha val="0"/>
               </a:srgbClr>
             </a:solidFill>
             <a:prstDash val="solid"/>
           </a:ln>
-          <a:effectLst>
-            <a:outerShdw sx="100000" sy="100000" kx="0" ky="0" algn="bl" rotWithShape="0" blurRad="12700" dist="50800" dir="2700000">
-              <a:srgbClr val="000000">
-                <a:alpha val="8000"/>
-              </a:srgbClr>
-            </a:outerShdw>
-          </a:effectLst>
-        </p:spPr>
-      </p:sp>
-      <p:sp>
-        <p:nvSpPr>
-          <p:cNvPr id="10" name="Shape 4"/>
-          <p:cNvSpPr/>
-          <p:nvPr/>
-        </p:nvSpPr>
-        <p:spPr>
-          <a:xfrm>
-            <a:off x="822960" y="1463040"/>
-            <a:ext cx="73152" cy="1920240"/>
+        </p:spPr>
+      </p:sp>
+      <p:sp>
+        <p:nvSpPr>
+          <p:cNvPr id="9" name="Shape 4"/>
+          <p:cNvSpPr/>
+          <p:nvPr/>
+        </p:nvSpPr>
+        <p:spPr>
+          <a:xfrm>
+            <a:off x="914400" y="1865376"/>
+            <a:ext cx="73152" cy="1024128"/>
           </a:xfrm>
           <a:prstGeom prst="rect">
             <a:avLst/>
@@ -13062,14 +11955,14 @@
       </p:sp>
       <p:sp>
         <p:nvSpPr>
-          <p:cNvPr id="11" name="Shape 5"/>
-          <p:cNvSpPr/>
-          <p:nvPr/>
-        </p:nvSpPr>
-        <p:spPr>
-          <a:xfrm>
-            <a:off x="6309360" y="1463040"/>
-            <a:ext cx="73152" cy="1920240"/>
+          <p:cNvPr id="10" name="Shape 5"/>
+          <p:cNvSpPr/>
+          <p:nvPr/>
+        </p:nvSpPr>
+        <p:spPr>
+          <a:xfrm>
+            <a:off x="914400" y="3191256"/>
+            <a:ext cx="73152" cy="1024128"/>
           </a:xfrm>
           <a:prstGeom prst="rect">
             <a:avLst/>
@@ -13089,14 +11982,14 @@
       </p:sp>
       <p:sp>
         <p:nvSpPr>
-          <p:cNvPr id="12" name="Shape 6"/>
-          <p:cNvSpPr/>
-          <p:nvPr/>
-        </p:nvSpPr>
-        <p:spPr>
-          <a:xfrm>
-            <a:off x="822960" y="3749040"/>
-            <a:ext cx="73152" cy="1920240"/>
+          <p:cNvPr id="11" name="Shape 6"/>
+          <p:cNvSpPr/>
+          <p:nvPr/>
+        </p:nvSpPr>
+        <p:spPr>
+          <a:xfrm>
+            <a:off x="914400" y="4507992"/>
+            <a:ext cx="73152" cy="1024128"/>
           </a:xfrm>
           <a:prstGeom prst="rect">
             <a:avLst/>
@@ -13116,34 +12009,7 @@
       </p:sp>
       <p:sp>
         <p:nvSpPr>
-          <p:cNvPr id="13" name="Shape 7"/>
-          <p:cNvSpPr/>
-          <p:nvPr/>
-        </p:nvSpPr>
-        <p:spPr>
-          <a:xfrm>
-            <a:off x="6309360" y="3749040"/>
-            <a:ext cx="73152" cy="1920240"/>
-          </a:xfrm>
-          <a:prstGeom prst="rect">
-            <a:avLst/>
-          </a:prstGeom>
-          <a:solidFill>
-            <a:srgbClr val="DBEAFE"/>
-          </a:solidFill>
-          <a:ln w="12700">
-            <a:solidFill>
-              <a:srgbClr val="DBEAFE">
-                <a:alpha val="0"/>
-              </a:srgbClr>
-            </a:solidFill>
-            <a:prstDash val="solid"/>
-          </a:ln>
-        </p:spPr>
-      </p:sp>
-      <p:sp>
-        <p:nvSpPr>
-          <p:cNvPr id="14" name="mdpr:2-3-4f52c2:title:__title:2-3-4f52c2"/>
+          <p:cNvPr id="12" name="mdpr:2-3-4f52c2:title:__title:2-3-4f52c2"/>
           <p:cNvSpPr txBox="1"/>
           <p:nvPr/>
         </p:nvSpPr>
@@ -13185,14 +12051,14 @@
       </p:sp>
       <p:sp>
         <p:nvSpPr>
-          <p:cNvPr id="15" name="mdpr:2-3-4f52c2:item-1:block-28-chunk-2"/>
+          <p:cNvPr id="13" name="mdpr:2-3-4f52c2:item-1:block-28-chunk-2"/>
           <p:cNvSpPr txBox="1"/>
           <p:nvPr/>
         </p:nvSpPr>
         <p:spPr>
           <a:xfrm>
-            <a:off x="1042416" y="2042160"/>
-            <a:ext cx="4608576" cy="762000"/>
+            <a:off x="1133856" y="2164080"/>
+            <a:ext cx="9820656" cy="426720"/>
           </a:xfrm>
           <a:prstGeom prst="rect">
             <a:avLst/>
@@ -13227,14 +12093,14 @@
       </p:sp>
       <p:sp>
         <p:nvSpPr>
-          <p:cNvPr id="16" name="mdpr:2-3-4f52c2:item-2:block-28-chunk-2"/>
+          <p:cNvPr id="14" name="mdpr:2-3-4f52c2:item-2:block-28-chunk-2"/>
           <p:cNvSpPr txBox="1"/>
           <p:nvPr/>
         </p:nvSpPr>
         <p:spPr>
           <a:xfrm>
-            <a:off x="6528816" y="2209800"/>
-            <a:ext cx="4608576" cy="426720"/>
+            <a:off x="1133856" y="3489960"/>
+            <a:ext cx="9820656" cy="426720"/>
           </a:xfrm>
           <a:prstGeom prst="rect">
             <a:avLst/>
@@ -13269,14 +12135,14 @@
       </p:sp>
       <p:sp>
         <p:nvSpPr>
-          <p:cNvPr id="17" name="mdpr:2-3-4f52c2:item-3:block-28-chunk-2"/>
+          <p:cNvPr id="15" name="mdpr:2-3-4f52c2:item-3:block-28-chunk-2"/>
           <p:cNvSpPr txBox="1"/>
           <p:nvPr/>
         </p:nvSpPr>
         <p:spPr>
           <a:xfrm>
-            <a:off x="1042416" y="4495800"/>
-            <a:ext cx="4608576" cy="426720"/>
+            <a:off x="1133856" y="4806696"/>
+            <a:ext cx="9820656" cy="426720"/>
           </a:xfrm>
           <a:prstGeom prst="rect">
             <a:avLst/>
@@ -13304,48 +12170,6 @@
                 <a:cs typeface="Pretendard" pitchFamily="34" charset="-120"/>
               </a:rPr>
               <a:t>Meeting note cleanup</a:t>
-            </a:r>
-            <a:endParaRPr lang="en-US" sz="2200" dirty="0"/>
-          </a:p>
-        </p:txBody>
-      </p:sp>
-      <p:sp>
-        <p:nvSpPr>
-          <p:cNvPr id="18" name="mdpr:2-3-4f52c2:item-4:block-28-chunk-2"/>
-          <p:cNvSpPr txBox="1"/>
-          <p:nvPr/>
-        </p:nvSpPr>
-        <p:spPr>
-          <a:xfrm>
-            <a:off x="6528816" y="4495800"/>
-            <a:ext cx="4608576" cy="426720"/>
-          </a:xfrm>
-          <a:prstGeom prst="rect">
-            <a:avLst/>
-          </a:prstGeom>
-          <a:noFill/>
-          <a:ln/>
-        </p:spPr>
-        <p:txBody>
-          <a:bodyPr wrap="square" lIns="0" tIns="25400" rIns="25400" bIns="0" rtlCol="0" anchor="ctr"/>
-          <a:lstStyle/>
-          <a:p>
-            <a:pPr algn="ctr" indent="0" marL="0">
-              <a:lnSpc>
-                <a:spcPct val="120000"/>
-              </a:lnSpc>
-              <a:buNone/>
-            </a:pPr>
-            <a:r>
-              <a:rPr lang="en-US" sz="2200" dirty="0">
-                <a:solidFill>
-                  <a:srgbClr val="111111"/>
-                </a:solidFill>
-                <a:latin typeface="Pretendard" pitchFamily="34" charset="0"/>
-                <a:ea typeface="Pretendard" pitchFamily="34" charset="-122"/>
-                <a:cs typeface="Pretendard" pitchFamily="34" charset="-120"/>
-              </a:rPr>
-              <a:t>Report draft writing</a:t>
             </a:r>
             <a:endParaRPr lang="en-US" sz="2200" dirty="0"/>
           </a:p>
@@ -13383,16 +12207,243 @@
           <a:chExt cx="0" cy="0"/>
         </a:xfrm>
       </p:grpSpPr>
-      <p:sp>
-        <p:nvSpPr>
-          <p:cNvPr id="2" name="Shape 0"/>
-          <p:cNvSpPr/>
-          <p:nvPr/>
-        </p:nvSpPr>
-        <p:spPr>
-          <a:xfrm>
-            <a:off x="822960" y="1554480"/>
-            <a:ext cx="4937760" cy="73152"/>
+      <p:pic>
+        <p:nvPicPr>
+          <p:cNvPr id="2" name="Image 0" descr="preencoded.png">    </p:cNvPr>
+          <p:cNvPicPr>
+            <a:picLocks noChangeAspect="1"/>
+          </p:cNvPicPr>
+          <p:nvPr/>
+        </p:nvPicPr>
+        <p:blipFill>
+          <a:blip r:embed="rId1">
+            <a:extLst>
+              <a:ext uri="{96DAC541-7B7A-43D3-8B79-37D633B846F1}">
+                <asvg:svgBlip xmlns:asvg="http://schemas.microsoft.com/office/drawing/2016/SVG/main" r:embed="rId2"/>
+              </a:ext>
+            </a:extLst>
+          </a:blip>
+          <a:stretch>
+            <a:fillRect/>
+          </a:stretch>
+        </p:blipFill>
+        <p:spPr>
+          <a:xfrm>
+            <a:off x="914400" y="1865376"/>
+            <a:ext cx="10241280" cy="1024128"/>
+          </a:xfrm>
+          <a:prstGeom prst="rect">
+            <a:avLst/>
+          </a:prstGeom>
+        </p:spPr>
+      </p:pic>
+      <p:sp>
+        <p:nvSpPr>
+          <p:cNvPr id="3" name="Shape 0"/>
+          <p:cNvSpPr/>
+          <p:nvPr/>
+        </p:nvSpPr>
+        <p:spPr>
+          <a:xfrm>
+            <a:off x="914400" y="1865376"/>
+            <a:ext cx="10241280" cy="1024128"/>
+          </a:xfrm>
+          <a:prstGeom prst="rect">
+            <a:avLst/>
+          </a:prstGeom>
+          <a:solidFill>
+            <a:srgbClr val="FFFFFF">
+              <a:alpha val="0"/>
+            </a:srgbClr>
+          </a:solidFill>
+          <a:ln w="12700">
+            <a:solidFill>
+              <a:srgbClr val="E2E8F0">
+                <a:alpha val="0"/>
+              </a:srgbClr>
+            </a:solidFill>
+            <a:prstDash val="solid"/>
+          </a:ln>
+          <a:effectLst>
+            <a:outerShdw sx="100000" sy="100000" kx="0" ky="0" algn="bl" rotWithShape="0" blurRad="12700" dist="50800" dir="2700000">
+              <a:srgbClr val="000000">
+                <a:alpha val="8000"/>
+              </a:srgbClr>
+            </a:outerShdw>
+          </a:effectLst>
+        </p:spPr>
+      </p:sp>
+      <p:pic>
+        <p:nvPicPr>
+          <p:cNvPr id="4" name="Image 1" descr="preencoded.png">    </p:cNvPr>
+          <p:cNvPicPr>
+            <a:picLocks noChangeAspect="1"/>
+          </p:cNvPicPr>
+          <p:nvPr/>
+        </p:nvPicPr>
+        <p:blipFill>
+          <a:blip r:embed="rId3">
+            <a:extLst>
+              <a:ext uri="{96DAC541-7B7A-43D3-8B79-37D633B846F1}">
+                <asvg:svgBlip xmlns:asvg="http://schemas.microsoft.com/office/drawing/2016/SVG/main" r:embed="rId4"/>
+              </a:ext>
+            </a:extLst>
+          </a:blip>
+          <a:stretch>
+            <a:fillRect/>
+          </a:stretch>
+        </p:blipFill>
+        <p:spPr>
+          <a:xfrm>
+            <a:off x="914400" y="3191256"/>
+            <a:ext cx="10241280" cy="1024128"/>
+          </a:xfrm>
+          <a:prstGeom prst="rect">
+            <a:avLst/>
+          </a:prstGeom>
+        </p:spPr>
+      </p:pic>
+      <p:sp>
+        <p:nvSpPr>
+          <p:cNvPr id="5" name="Shape 1"/>
+          <p:cNvSpPr/>
+          <p:nvPr/>
+        </p:nvSpPr>
+        <p:spPr>
+          <a:xfrm>
+            <a:off x="914400" y="3191256"/>
+            <a:ext cx="10241280" cy="1024128"/>
+          </a:xfrm>
+          <a:prstGeom prst="rect">
+            <a:avLst/>
+          </a:prstGeom>
+          <a:solidFill>
+            <a:srgbClr val="FFFFFF">
+              <a:alpha val="0"/>
+            </a:srgbClr>
+          </a:solidFill>
+          <a:ln w="12700">
+            <a:solidFill>
+              <a:srgbClr val="E2E8F0">
+                <a:alpha val="0"/>
+              </a:srgbClr>
+            </a:solidFill>
+            <a:prstDash val="solid"/>
+          </a:ln>
+          <a:effectLst>
+            <a:outerShdw sx="100000" sy="100000" kx="0" ky="0" algn="bl" rotWithShape="0" blurRad="12700" dist="50800" dir="2700000">
+              <a:srgbClr val="000000">
+                <a:alpha val="8000"/>
+              </a:srgbClr>
+            </a:outerShdw>
+          </a:effectLst>
+        </p:spPr>
+      </p:sp>
+      <p:pic>
+        <p:nvPicPr>
+          <p:cNvPr id="6" name="Image 2" descr="preencoded.png">    </p:cNvPr>
+          <p:cNvPicPr>
+            <a:picLocks noChangeAspect="1"/>
+          </p:cNvPicPr>
+          <p:nvPr/>
+        </p:nvPicPr>
+        <p:blipFill>
+          <a:blip r:embed="rId5">
+            <a:extLst>
+              <a:ext uri="{96DAC541-7B7A-43D3-8B79-37D633B846F1}">
+                <asvg:svgBlip xmlns:asvg="http://schemas.microsoft.com/office/drawing/2016/SVG/main" r:embed="rId6"/>
+              </a:ext>
+            </a:extLst>
+          </a:blip>
+          <a:stretch>
+            <a:fillRect/>
+          </a:stretch>
+        </p:blipFill>
+        <p:spPr>
+          <a:xfrm>
+            <a:off x="914400" y="4507992"/>
+            <a:ext cx="10241280" cy="1024128"/>
+          </a:xfrm>
+          <a:prstGeom prst="rect">
+            <a:avLst/>
+          </a:prstGeom>
+        </p:spPr>
+      </p:pic>
+      <p:sp>
+        <p:nvSpPr>
+          <p:cNvPr id="7" name="Shape 2"/>
+          <p:cNvSpPr/>
+          <p:nvPr/>
+        </p:nvSpPr>
+        <p:spPr>
+          <a:xfrm>
+            <a:off x="914400" y="4507992"/>
+            <a:ext cx="10241280" cy="1024128"/>
+          </a:xfrm>
+          <a:prstGeom prst="rect">
+            <a:avLst/>
+          </a:prstGeom>
+          <a:solidFill>
+            <a:srgbClr val="FFFFFF">
+              <a:alpha val="0"/>
+            </a:srgbClr>
+          </a:solidFill>
+          <a:ln w="12700">
+            <a:solidFill>
+              <a:srgbClr val="E2E8F0">
+                <a:alpha val="0"/>
+              </a:srgbClr>
+            </a:solidFill>
+            <a:prstDash val="solid"/>
+          </a:ln>
+          <a:effectLst>
+            <a:outerShdw sx="100000" sy="100000" kx="0" ky="0" algn="bl" rotWithShape="0" blurRad="12700" dist="50800" dir="2700000">
+              <a:srgbClr val="000000">
+                <a:alpha val="8000"/>
+              </a:srgbClr>
+            </a:outerShdw>
+          </a:effectLst>
+        </p:spPr>
+      </p:sp>
+      <p:sp>
+        <p:nvSpPr>
+          <p:cNvPr id="8" name="Shape 3"/>
+          <p:cNvSpPr/>
+          <p:nvPr/>
+        </p:nvSpPr>
+        <p:spPr>
+          <a:xfrm>
+            <a:off x="786384" y="1956816"/>
+            <a:ext cx="32004" cy="3483864"/>
+          </a:xfrm>
+          <a:prstGeom prst="rect">
+            <a:avLst/>
+          </a:prstGeom>
+          <a:solidFill>
+            <a:srgbClr val="DBEAFE">
+              <a:alpha val="80000"/>
+            </a:srgbClr>
+          </a:solidFill>
+          <a:ln w="12700">
+            <a:solidFill>
+              <a:srgbClr val="DBEAFE">
+                <a:alpha val="0"/>
+              </a:srgbClr>
+            </a:solidFill>
+            <a:prstDash val="solid"/>
+          </a:ln>
+        </p:spPr>
+      </p:sp>
+      <p:sp>
+        <p:nvSpPr>
+          <p:cNvPr id="9" name="Shape 4"/>
+          <p:cNvSpPr/>
+          <p:nvPr/>
+        </p:nvSpPr>
+        <p:spPr>
+          <a:xfrm>
+            <a:off x="914400" y="1865376"/>
+            <a:ext cx="73152" cy="1024128"/>
           </a:xfrm>
           <a:prstGeom prst="rect">
             <a:avLst/>
@@ -13412,14 +12463,41 @@
       </p:sp>
       <p:sp>
         <p:nvSpPr>
-          <p:cNvPr id="3" name="Shape 1"/>
-          <p:cNvSpPr/>
-          <p:nvPr/>
-        </p:nvSpPr>
-        <p:spPr>
-          <a:xfrm>
-            <a:off x="6400800" y="1554480"/>
-            <a:ext cx="4937760" cy="73152"/>
+          <p:cNvPr id="10" name="Shape 5"/>
+          <p:cNvSpPr/>
+          <p:nvPr/>
+        </p:nvSpPr>
+        <p:spPr>
+          <a:xfrm>
+            <a:off x="914400" y="3191256"/>
+            <a:ext cx="73152" cy="1024128"/>
+          </a:xfrm>
+          <a:prstGeom prst="rect">
+            <a:avLst/>
+          </a:prstGeom>
+          <a:solidFill>
+            <a:srgbClr val="DBEAFE"/>
+          </a:solidFill>
+          <a:ln w="12700">
+            <a:solidFill>
+              <a:srgbClr val="DBEAFE">
+                <a:alpha val="0"/>
+              </a:srgbClr>
+            </a:solidFill>
+            <a:prstDash val="solid"/>
+          </a:ln>
+        </p:spPr>
+      </p:sp>
+      <p:sp>
+        <p:nvSpPr>
+          <p:cNvPr id="11" name="Shape 6"/>
+          <p:cNvSpPr/>
+          <p:nvPr/>
+        </p:nvSpPr>
+        <p:spPr>
+          <a:xfrm>
+            <a:off x="914400" y="4507992"/>
+            <a:ext cx="73152" cy="1024128"/>
           </a:xfrm>
           <a:prstGeom prst="rect">
             <a:avLst/>
@@ -13439,7 +12517,7 @@
       </p:sp>
       <p:sp>
         <p:nvSpPr>
-          <p:cNvPr id="4" name="mdpr:3-3-9304f5:title:__title:3-3-9304f5"/>
+          <p:cNvPr id="12" name="mdpr:3-3-9304f5:title:__title:3-3-9304f5"/>
           <p:cNvSpPr txBox="1"/>
           <p:nvPr/>
         </p:nvSpPr>
@@ -13481,14 +12559,14 @@
       </p:sp>
       <p:sp>
         <p:nvSpPr>
-          <p:cNvPr id="5" name="mdpr:3-3-9304f5:left:block-28-chunk-3"/>
+          <p:cNvPr id="13" name="mdpr:3-3-9304f5:item-1:block-28-chunk-3"/>
           <p:cNvSpPr txBox="1"/>
           <p:nvPr/>
         </p:nvSpPr>
         <p:spPr>
           <a:xfrm>
-            <a:off x="896112" y="3535680"/>
-            <a:ext cx="4791456" cy="426720"/>
+            <a:off x="1133856" y="2164080"/>
+            <a:ext cx="9820656" cy="426720"/>
           </a:xfrm>
           <a:prstGeom prst="rect">
             <a:avLst/>
@@ -13500,7 +12578,7 @@
           <a:bodyPr wrap="square" lIns="0" tIns="25400" rIns="25400" bIns="0" rtlCol="0" anchor="ctr"/>
           <a:lstStyle/>
           <a:p>
-            <a:pPr algn="l" indent="0" marL="0">
+            <a:pPr algn="ctr" indent="0" marL="0">
               <a:lnSpc>
                 <a:spcPct val="120000"/>
               </a:lnSpc>
@@ -13515,7 +12593,7 @@
                 <a:ea typeface="Pretendard" pitchFamily="34" charset="-122"/>
                 <a:cs typeface="Pretendard" pitchFamily="34" charset="-120"/>
               </a:rPr>
-              <a:t>- Data collection</a:t>
+              <a:t>Report draft writing</a:t>
             </a:r>
             <a:endParaRPr lang="en-US" sz="2200" dirty="0"/>
           </a:p>
@@ -13523,14 +12601,14 @@
       </p:sp>
       <p:sp>
         <p:nvSpPr>
-          <p:cNvPr id="6" name="mdpr:3-3-9304f5:right:block-28-chunk-3"/>
+          <p:cNvPr id="14" name="mdpr:3-3-9304f5:item-2:block-28-chunk-3"/>
           <p:cNvSpPr txBox="1"/>
           <p:nvPr/>
         </p:nvSpPr>
         <p:spPr>
           <a:xfrm>
-            <a:off x="6473952" y="3535680"/>
-            <a:ext cx="4791456" cy="426720"/>
+            <a:off x="1133856" y="3489960"/>
+            <a:ext cx="9820656" cy="426720"/>
           </a:xfrm>
           <a:prstGeom prst="rect">
             <a:avLst/>
@@ -13542,7 +12620,7 @@
           <a:bodyPr wrap="square" lIns="0" tIns="25400" rIns="25400" bIns="0" rtlCol="0" anchor="ctr"/>
           <a:lstStyle/>
           <a:p>
-            <a:pPr algn="l" indent="0" marL="0">
+            <a:pPr algn="ctr" indent="0" marL="0">
               <a:lnSpc>
                 <a:spcPct val="120000"/>
               </a:lnSpc>
@@ -13557,7 +12635,49 @@
                 <a:ea typeface="Pretendard" pitchFamily="34" charset="-122"/>
                 <a:cs typeface="Pretendard" pitchFamily="34" charset="-120"/>
               </a:rPr>
-              <a:t>- Source location is unclear</a:t>
+              <a:t>Data collection</a:t>
+            </a:r>
+            <a:endParaRPr lang="en-US" sz="2200" dirty="0"/>
+          </a:p>
+        </p:txBody>
+      </p:sp>
+      <p:sp>
+        <p:nvSpPr>
+          <p:cNvPr id="15" name="mdpr:3-3-9304f5:item-3:block-28-chunk-3"/>
+          <p:cNvSpPr txBox="1"/>
+          <p:nvPr/>
+        </p:nvSpPr>
+        <p:spPr>
+          <a:xfrm>
+            <a:off x="1133856" y="4806696"/>
+            <a:ext cx="9820656" cy="426720"/>
+          </a:xfrm>
+          <a:prstGeom prst="rect">
+            <a:avLst/>
+          </a:prstGeom>
+          <a:noFill/>
+          <a:ln/>
+        </p:spPr>
+        <p:txBody>
+          <a:bodyPr wrap="square" lIns="0" tIns="25400" rIns="25400" bIns="0" rtlCol="0" anchor="ctr"/>
+          <a:lstStyle/>
+          <a:p>
+            <a:pPr algn="ctr" indent="0" marL="0">
+              <a:lnSpc>
+                <a:spcPct val="120000"/>
+              </a:lnSpc>
+              <a:buNone/>
+            </a:pPr>
+            <a:r>
+              <a:rPr lang="en-US" sz="2200" dirty="0">
+                <a:solidFill>
+                  <a:srgbClr val="111111"/>
+                </a:solidFill>
+                <a:latin typeface="Pretendard" pitchFamily="34" charset="0"/>
+                <a:ea typeface="Pretendard" pitchFamily="34" charset="-122"/>
+                <a:cs typeface="Pretendard" pitchFamily="34" charset="-120"/>
+              </a:rPr>
+              <a:t>Source location is unclear</a:t>
             </a:r>
             <a:endParaRPr lang="en-US" sz="2200" dirty="0"/>
           </a:p>
@@ -16837,6 +15957,62 @@
         </p:nvSpPr>
         <p:spPr>
           <a:xfrm>
+            <a:off x="6080760" y="1737360"/>
+            <a:ext cx="22860" cy="3968496"/>
+          </a:xfrm>
+          <a:prstGeom prst="rect">
+            <a:avLst/>
+          </a:prstGeom>
+          <a:solidFill>
+            <a:srgbClr val="E2E8F0">
+              <a:alpha val="90000"/>
+            </a:srgbClr>
+          </a:solidFill>
+          <a:ln w="12700">
+            <a:solidFill>
+              <a:srgbClr val="E2E8F0">
+                <a:alpha val="0"/>
+              </a:srgbClr>
+            </a:solidFill>
+            <a:prstDash val="solid"/>
+          </a:ln>
+        </p:spPr>
+      </p:sp>
+      <p:sp>
+        <p:nvSpPr>
+          <p:cNvPr id="3" name="Shape 1"/>
+          <p:cNvSpPr/>
+          <p:nvPr/>
+        </p:nvSpPr>
+        <p:spPr>
+          <a:xfrm>
+            <a:off x="822960" y="1737360"/>
+            <a:ext cx="73152" cy="841248"/>
+          </a:xfrm>
+          <a:prstGeom prst="rect">
+            <a:avLst/>
+          </a:prstGeom>
+          <a:solidFill>
+            <a:srgbClr val="2563EB"/>
+          </a:solidFill>
+          <a:ln w="12700">
+            <a:solidFill>
+              <a:srgbClr val="2563EB">
+                <a:alpha val="0"/>
+              </a:srgbClr>
+            </a:solidFill>
+            <a:prstDash val="solid"/>
+          </a:ln>
+        </p:spPr>
+      </p:sp>
+      <p:sp>
+        <p:nvSpPr>
+          <p:cNvPr id="4" name="Shape 2"/>
+          <p:cNvSpPr/>
+          <p:nvPr/>
+        </p:nvSpPr>
+        <p:spPr>
+          <a:xfrm>
             <a:off x="822960" y="2779776"/>
             <a:ext cx="73152" cy="841248"/>
           </a:xfrm>
@@ -16844,6 +16020,33 @@
             <a:avLst/>
           </a:prstGeom>
           <a:solidFill>
+            <a:srgbClr val="DBEAFE"/>
+          </a:solidFill>
+          <a:ln w="12700">
+            <a:solidFill>
+              <a:srgbClr val="DBEAFE">
+                <a:alpha val="0"/>
+              </a:srgbClr>
+            </a:solidFill>
+            <a:prstDash val="solid"/>
+          </a:ln>
+        </p:spPr>
+      </p:sp>
+      <p:sp>
+        <p:nvSpPr>
+          <p:cNvPr id="5" name="Shape 3"/>
+          <p:cNvSpPr/>
+          <p:nvPr/>
+        </p:nvSpPr>
+        <p:spPr>
+          <a:xfrm>
+            <a:off x="822960" y="3822192"/>
+            <a:ext cx="73152" cy="841248"/>
+          </a:xfrm>
+          <a:prstGeom prst="rect">
+            <a:avLst/>
+          </a:prstGeom>
+          <a:solidFill>
             <a:srgbClr val="2563EB"/>
           </a:solidFill>
           <a:ln w="12700">
@@ -16858,13 +16061,13 @@
       </p:sp>
       <p:sp>
         <p:nvSpPr>
-          <p:cNvPr id="3" name="Shape 1"/>
-          <p:cNvSpPr/>
-          <p:nvPr/>
-        </p:nvSpPr>
-        <p:spPr>
-          <a:xfrm>
-            <a:off x="822960" y="3822192"/>
+          <p:cNvPr id="6" name="Shape 4"/>
+          <p:cNvSpPr/>
+          <p:nvPr/>
+        </p:nvSpPr>
+        <p:spPr>
+          <a:xfrm>
+            <a:off x="822960" y="4864608"/>
             <a:ext cx="73152" cy="841248"/>
           </a:xfrm>
           <a:prstGeom prst="rect">
@@ -16885,7 +16088,115 @@
       </p:sp>
       <p:sp>
         <p:nvSpPr>
-          <p:cNvPr id="4" name="mdpr:2-2-7bfb60:title:__title:2-2-7bfb60"/>
+          <p:cNvPr id="7" name="Shape 5"/>
+          <p:cNvSpPr/>
+          <p:nvPr/>
+        </p:nvSpPr>
+        <p:spPr>
+          <a:xfrm>
+            <a:off x="6272784" y="1737360"/>
+            <a:ext cx="73152" cy="841248"/>
+          </a:xfrm>
+          <a:prstGeom prst="rect">
+            <a:avLst/>
+          </a:prstGeom>
+          <a:solidFill>
+            <a:srgbClr val="2563EB"/>
+          </a:solidFill>
+          <a:ln w="12700">
+            <a:solidFill>
+              <a:srgbClr val="2563EB">
+                <a:alpha val="0"/>
+              </a:srgbClr>
+            </a:solidFill>
+            <a:prstDash val="solid"/>
+          </a:ln>
+        </p:spPr>
+      </p:sp>
+      <p:sp>
+        <p:nvSpPr>
+          <p:cNvPr id="8" name="Shape 6"/>
+          <p:cNvSpPr/>
+          <p:nvPr/>
+        </p:nvSpPr>
+        <p:spPr>
+          <a:xfrm>
+            <a:off x="6272784" y="2779776"/>
+            <a:ext cx="73152" cy="841248"/>
+          </a:xfrm>
+          <a:prstGeom prst="rect">
+            <a:avLst/>
+          </a:prstGeom>
+          <a:solidFill>
+            <a:srgbClr val="DBEAFE"/>
+          </a:solidFill>
+          <a:ln w="12700">
+            <a:solidFill>
+              <a:srgbClr val="DBEAFE">
+                <a:alpha val="0"/>
+              </a:srgbClr>
+            </a:solidFill>
+            <a:prstDash val="solid"/>
+          </a:ln>
+        </p:spPr>
+      </p:sp>
+      <p:sp>
+        <p:nvSpPr>
+          <p:cNvPr id="9" name="Shape 7"/>
+          <p:cNvSpPr/>
+          <p:nvPr/>
+        </p:nvSpPr>
+        <p:spPr>
+          <a:xfrm>
+            <a:off x="6272784" y="3822192"/>
+            <a:ext cx="73152" cy="841248"/>
+          </a:xfrm>
+          <a:prstGeom prst="rect">
+            <a:avLst/>
+          </a:prstGeom>
+          <a:solidFill>
+            <a:srgbClr val="2563EB"/>
+          </a:solidFill>
+          <a:ln w="12700">
+            <a:solidFill>
+              <a:srgbClr val="2563EB">
+                <a:alpha val="0"/>
+              </a:srgbClr>
+            </a:solidFill>
+            <a:prstDash val="solid"/>
+          </a:ln>
+        </p:spPr>
+      </p:sp>
+      <p:sp>
+        <p:nvSpPr>
+          <p:cNvPr id="10" name="Shape 8"/>
+          <p:cNvSpPr/>
+          <p:nvPr/>
+        </p:nvSpPr>
+        <p:spPr>
+          <a:xfrm>
+            <a:off x="6272784" y="4864608"/>
+            <a:ext cx="73152" cy="841248"/>
+          </a:xfrm>
+          <a:prstGeom prst="rect">
+            <a:avLst/>
+          </a:prstGeom>
+          <a:solidFill>
+            <a:srgbClr val="DBEAFE"/>
+          </a:solidFill>
+          <a:ln w="12700">
+            <a:solidFill>
+              <a:srgbClr val="DBEAFE">
+                <a:alpha val="0"/>
+              </a:srgbClr>
+            </a:solidFill>
+            <a:prstDash val="solid"/>
+          </a:ln>
+        </p:spPr>
+      </p:sp>
+      <p:sp>
+        <p:nvSpPr>
+          <p:cNvPr id="11" name="mdpr:2-2-7bfb60:title:__title:2-2-7bfb60"/>
           <p:cNvSpPr txBox="1"/>
           <p:nvPr/>
         </p:nvSpPr>
@@ -16927,14 +16238,14 @@
       </p:sp>
       <p:sp>
         <p:nvSpPr>
-          <p:cNvPr id="5" name="mdpr:2-2-7bfb60:toc-item-1:toc-item-15"/>
+          <p:cNvPr id="12" name="mdpr:2-2-7bfb60:toc-item-1:toc-item-9"/>
           <p:cNvSpPr txBox="1"/>
           <p:nvPr/>
         </p:nvSpPr>
         <p:spPr>
           <a:xfrm>
-            <a:off x="1042416" y="2871216"/>
-            <a:ext cx="10094976" cy="658368"/>
+            <a:off x="1042416" y="1828800"/>
+            <a:ext cx="4645152" cy="658368"/>
           </a:xfrm>
           <a:prstGeom prst="rect">
             <a:avLst/>
@@ -16953,7 +16264,7 @@
               <a:buNone/>
             </a:pPr>
             <a:r>
-              <a:rPr lang="en-US" sz="2200" dirty="0">
+              <a:rPr lang="en-US" sz="1800" dirty="0">
                 <a:solidFill>
                   <a:srgbClr val="111111"/>
                 </a:solidFill>
@@ -16961,22 +16272,22 @@
                 <a:ea typeface="Pretendard" pitchFamily="34" charset="-122"/>
                 <a:cs typeface="Pretendard" pitchFamily="34" charset="-120"/>
               </a:rPr>
-              <a:t>01  Current skill output expectations</a:t>
+              <a:t>01  Example: examples/basic/deck.md</a:t>
             </a:r>
-            <a:endParaRPr lang="en-US" sz="2200" dirty="0"/>
+            <a:endParaRPr lang="en-US" sz="1800" dirty="0"/>
           </a:p>
         </p:txBody>
       </p:sp>
       <p:sp>
         <p:nvSpPr>
-          <p:cNvPr id="6" name="mdpr:2-2-7bfb60:toc-item-2:toc-item-16"/>
+          <p:cNvPr id="13" name="mdpr:2-2-7bfb60:toc-item-2:toc-item-10"/>
           <p:cNvSpPr txBox="1"/>
           <p:nvPr/>
         </p:nvSpPr>
         <p:spPr>
           <a:xfrm>
-            <a:off x="1042416" y="3913632"/>
-            <a:ext cx="10094976" cy="658368"/>
+            <a:off x="1042416" y="2871216"/>
+            <a:ext cx="4645152" cy="658368"/>
           </a:xfrm>
           <a:prstGeom prst="rect">
             <a:avLst/>
@@ -16995,7 +16306,7 @@
               <a:buNone/>
             </a:pPr>
             <a:r>
-              <a:rPr lang="en-US" sz="2200" dirty="0">
+              <a:rPr lang="en-US" sz="1800" dirty="0">
                 <a:solidFill>
                   <a:srgbClr val="111111"/>
                 </a:solidFill>
@@ -17003,9 +16314,261 @@
                 <a:ea typeface="Pretendard" pitchFamily="34" charset="-122"/>
                 <a:cs typeface="Pretendard" pitchFamily="34" charset="-120"/>
               </a:rPr>
-              <a:t>02  End state</a:t>
+              <a:t>02  Example: examples/comparison/deck.md</a:t>
             </a:r>
-            <a:endParaRPr lang="en-US" sz="2200" dirty="0"/>
+            <a:endParaRPr lang="en-US" sz="1800" dirty="0"/>
+          </a:p>
+        </p:txBody>
+      </p:sp>
+      <p:sp>
+        <p:nvSpPr>
+          <p:cNvPr id="14" name="mdpr:2-2-7bfb60:toc-item-3:toc-item-11"/>
+          <p:cNvSpPr txBox="1"/>
+          <p:nvPr/>
+        </p:nvSpPr>
+        <p:spPr>
+          <a:xfrm>
+            <a:off x="1042416" y="3913632"/>
+            <a:ext cx="4645152" cy="658368"/>
+          </a:xfrm>
+          <a:prstGeom prst="rect">
+            <a:avLst/>
+          </a:prstGeom>
+          <a:noFill/>
+          <a:ln/>
+        </p:spPr>
+        <p:txBody>
+          <a:bodyPr wrap="square" lIns="0" tIns="25400" rIns="25400" bIns="0" rtlCol="0" anchor="ctr"/>
+          <a:lstStyle/>
+          <a:p>
+            <a:pPr algn="ctr" indent="0" marL="0">
+              <a:lnSpc>
+                <a:spcPct val="120000"/>
+              </a:lnSpc>
+              <a:buNone/>
+            </a:pPr>
+            <a:r>
+              <a:rPr lang="en-US" sz="1800" dirty="0">
+                <a:solidFill>
+                  <a:srgbClr val="111111"/>
+                </a:solidFill>
+                <a:latin typeface="Pretendard" pitchFamily="34" charset="0"/>
+                <a:ea typeface="Pretendard" pitchFamily="34" charset="-122"/>
+                <a:cs typeface="Pretendard" pitchFamily="34" charset="-120"/>
+              </a:rPr>
+              <a:t>03  Example: examples/pipeline/deck.md</a:t>
+            </a:r>
+            <a:endParaRPr lang="en-US" sz="1800" dirty="0"/>
+          </a:p>
+        </p:txBody>
+      </p:sp>
+      <p:sp>
+        <p:nvSpPr>
+          <p:cNvPr id="15" name="mdpr:2-2-7bfb60:toc-item-4:toc-item-12"/>
+          <p:cNvSpPr txBox="1"/>
+          <p:nvPr/>
+        </p:nvSpPr>
+        <p:spPr>
+          <a:xfrm>
+            <a:off x="1042416" y="4956048"/>
+            <a:ext cx="4645152" cy="658368"/>
+          </a:xfrm>
+          <a:prstGeom prst="rect">
+            <a:avLst/>
+          </a:prstGeom>
+          <a:noFill/>
+          <a:ln/>
+        </p:spPr>
+        <p:txBody>
+          <a:bodyPr wrap="square" lIns="0" tIns="25400" rIns="25400" bIns="0" rtlCol="0" anchor="ctr"/>
+          <a:lstStyle/>
+          <a:p>
+            <a:pPr algn="ctr" indent="0" marL="0">
+              <a:lnSpc>
+                <a:spcPct val="120000"/>
+              </a:lnSpc>
+              <a:buNone/>
+            </a:pPr>
+            <a:r>
+              <a:rPr lang="en-US" sz="1800" dirty="0">
+                <a:solidFill>
+                  <a:srgbClr val="111111"/>
+                </a:solidFill>
+                <a:latin typeface="Pretendard" pitchFamily="34" charset="0"/>
+                <a:ea typeface="Pretendard" pitchFamily="34" charset="-122"/>
+                <a:cs typeface="Pretendard" pitchFamily="34" charset="-120"/>
+              </a:rPr>
+              <a:t>04  Example: examples/diagram-arrangements/deck.md</a:t>
+            </a:r>
+            <a:endParaRPr lang="en-US" sz="1800" dirty="0"/>
+          </a:p>
+        </p:txBody>
+      </p:sp>
+      <p:sp>
+        <p:nvSpPr>
+          <p:cNvPr id="16" name="mdpr:2-2-7bfb60:toc-item-5:toc-item-13"/>
+          <p:cNvSpPr txBox="1"/>
+          <p:nvPr/>
+        </p:nvSpPr>
+        <p:spPr>
+          <a:xfrm>
+            <a:off x="6492240" y="1828800"/>
+            <a:ext cx="4645152" cy="658368"/>
+          </a:xfrm>
+          <a:prstGeom prst="rect">
+            <a:avLst/>
+          </a:prstGeom>
+          <a:noFill/>
+          <a:ln/>
+        </p:spPr>
+        <p:txBody>
+          <a:bodyPr wrap="square" lIns="0" tIns="25400" rIns="25400" bIns="0" rtlCol="0" anchor="ctr"/>
+          <a:lstStyle/>
+          <a:p>
+            <a:pPr algn="ctr" indent="0" marL="0">
+              <a:lnSpc>
+                <a:spcPct val="120000"/>
+              </a:lnSpc>
+              <a:buNone/>
+            </a:pPr>
+            <a:r>
+              <a:rPr lang="en-US" sz="1800" dirty="0">
+                <a:solidFill>
+                  <a:srgbClr val="111111"/>
+                </a:solidFill>
+                <a:latin typeface="Pretendard" pitchFamily="34" charset="0"/>
+                <a:ea typeface="Pretendard" pitchFamily="34" charset="-122"/>
+                <a:cs typeface="Pretendard" pitchFamily="34" charset="-120"/>
+              </a:rPr>
+              <a:t>05  Example: examples/five-methods/deck.md</a:t>
+            </a:r>
+            <a:endParaRPr lang="en-US" sz="1800" dirty="0"/>
+          </a:p>
+        </p:txBody>
+      </p:sp>
+      <p:sp>
+        <p:nvSpPr>
+          <p:cNvPr id="17" name="mdpr:2-2-7bfb60:toc-item-6:toc-item-14"/>
+          <p:cNvSpPr txBox="1"/>
+          <p:nvPr/>
+        </p:nvSpPr>
+        <p:spPr>
+          <a:xfrm>
+            <a:off x="6492240" y="2871216"/>
+            <a:ext cx="4645152" cy="658368"/>
+          </a:xfrm>
+          <a:prstGeom prst="rect">
+            <a:avLst/>
+          </a:prstGeom>
+          <a:noFill/>
+          <a:ln/>
+        </p:spPr>
+        <p:txBody>
+          <a:bodyPr wrap="square" lIns="0" tIns="25400" rIns="25400" bIns="0" rtlCol="0" anchor="ctr"/>
+          <a:lstStyle/>
+          <a:p>
+            <a:pPr algn="ctr" indent="0" marL="0">
+              <a:lnSpc>
+                <a:spcPct val="120000"/>
+              </a:lnSpc>
+              <a:buNone/>
+            </a:pPr>
+            <a:r>
+              <a:rPr lang="en-US" sz="1800" dirty="0">
+                <a:solidFill>
+                  <a:srgbClr val="111111"/>
+                </a:solidFill>
+                <a:latin typeface="Pretendard" pitchFamily="34" charset="0"/>
+                <a:ea typeface="Pretendard" pitchFamily="34" charset="-122"/>
+                <a:cs typeface="Pretendard" pitchFamily="34" charset="-120"/>
+              </a:rPr>
+              <a:t>06  Example: examples/theme-preview-en/deck.md</a:t>
+            </a:r>
+            <a:endParaRPr lang="en-US" sz="1800" dirty="0"/>
+          </a:p>
+        </p:txBody>
+      </p:sp>
+      <p:sp>
+        <p:nvSpPr>
+          <p:cNvPr id="18" name="mdpr:2-2-7bfb60:toc-item-7:toc-item-15"/>
+          <p:cNvSpPr txBox="1"/>
+          <p:nvPr/>
+        </p:nvSpPr>
+        <p:spPr>
+          <a:xfrm>
+            <a:off x="6492240" y="3913632"/>
+            <a:ext cx="4645152" cy="658368"/>
+          </a:xfrm>
+          <a:prstGeom prst="rect">
+            <a:avLst/>
+          </a:prstGeom>
+          <a:noFill/>
+          <a:ln/>
+        </p:spPr>
+        <p:txBody>
+          <a:bodyPr wrap="square" lIns="0" tIns="25400" rIns="25400" bIns="0" rtlCol="0" anchor="ctr"/>
+          <a:lstStyle/>
+          <a:p>
+            <a:pPr algn="ctr" indent="0" marL="0">
+              <a:lnSpc>
+                <a:spcPct val="120000"/>
+              </a:lnSpc>
+              <a:buNone/>
+            </a:pPr>
+            <a:r>
+              <a:rPr lang="en-US" sz="1800" dirty="0">
+                <a:solidFill>
+                  <a:srgbClr val="111111"/>
+                </a:solidFill>
+                <a:latin typeface="Pretendard" pitchFamily="34" charset="0"/>
+                <a:ea typeface="Pretendard" pitchFamily="34" charset="-122"/>
+                <a:cs typeface="Pretendard" pitchFamily="34" charset="-120"/>
+              </a:rPr>
+              <a:t>07  Current skill output expectations</a:t>
+            </a:r>
+            <a:endParaRPr lang="en-US" sz="1800" dirty="0"/>
+          </a:p>
+        </p:txBody>
+      </p:sp>
+      <p:sp>
+        <p:nvSpPr>
+          <p:cNvPr id="19" name="mdpr:2-2-7bfb60:toc-item-8:toc-item-16"/>
+          <p:cNvSpPr txBox="1"/>
+          <p:nvPr/>
+        </p:nvSpPr>
+        <p:spPr>
+          <a:xfrm>
+            <a:off x="6492240" y="4956048"/>
+            <a:ext cx="4645152" cy="658368"/>
+          </a:xfrm>
+          <a:prstGeom prst="rect">
+            <a:avLst/>
+          </a:prstGeom>
+          <a:noFill/>
+          <a:ln/>
+        </p:spPr>
+        <p:txBody>
+          <a:bodyPr wrap="square" lIns="0" tIns="25400" rIns="25400" bIns="0" rtlCol="0" anchor="ctr"/>
+          <a:lstStyle/>
+          <a:p>
+            <a:pPr algn="ctr" indent="0" marL="0">
+              <a:lnSpc>
+                <a:spcPct val="120000"/>
+              </a:lnSpc>
+              <a:buNone/>
+            </a:pPr>
+            <a:r>
+              <a:rPr lang="en-US" sz="1800" dirty="0">
+                <a:solidFill>
+                  <a:srgbClr val="111111"/>
+                </a:solidFill>
+                <a:latin typeface="Pretendard" pitchFamily="34" charset="0"/>
+                <a:ea typeface="Pretendard" pitchFamily="34" charset="-122"/>
+                <a:cs typeface="Pretendard" pitchFamily="34" charset="-120"/>
+              </a:rPr>
+              <a:t>08  End state</a:t>
+            </a:r>
+            <a:endParaRPr lang="en-US" sz="1800" dirty="0"/>
           </a:p>
         </p:txBody>
       </p:sp>
@@ -18561,8 +18124,8 @@
         </p:blipFill>
         <p:spPr>
           <a:xfrm>
-            <a:off x="822960" y="1463040"/>
-            <a:ext cx="5029200" cy="1920240"/>
+            <a:off x="914400" y="1865376"/>
+            <a:ext cx="10241280" cy="1024128"/>
           </a:xfrm>
           <a:prstGeom prst="rect">
             <a:avLst/>
@@ -18577,8 +18140,8 @@
         </p:nvSpPr>
         <p:spPr>
           <a:xfrm>
-            <a:off x="822960" y="1463040"/>
-            <a:ext cx="5029200" cy="1920240"/>
+            <a:off x="914400" y="1865376"/>
+            <a:ext cx="10241280" cy="1024128"/>
           </a:xfrm>
           <a:prstGeom prst="rect">
             <a:avLst/>
@@ -18627,8 +18190,8 @@
         </p:blipFill>
         <p:spPr>
           <a:xfrm>
-            <a:off x="6309360" y="1463040"/>
-            <a:ext cx="5029200" cy="1920240"/>
+            <a:off x="914400" y="3191256"/>
+            <a:ext cx="10241280" cy="1024128"/>
           </a:xfrm>
           <a:prstGeom prst="rect">
             <a:avLst/>
@@ -18643,8 +18206,8 @@
         </p:nvSpPr>
         <p:spPr>
           <a:xfrm>
-            <a:off x="6309360" y="1463040"/>
-            <a:ext cx="5029200" cy="1920240"/>
+            <a:off x="914400" y="3191256"/>
+            <a:ext cx="10241280" cy="1024128"/>
           </a:xfrm>
           <a:prstGeom prst="rect">
             <a:avLst/>
@@ -18693,8 +18256,8 @@
         </p:blipFill>
         <p:spPr>
           <a:xfrm>
-            <a:off x="822960" y="3749040"/>
-            <a:ext cx="5029200" cy="1920240"/>
+            <a:off x="914400" y="4507992"/>
+            <a:ext cx="10241280" cy="1024128"/>
           </a:xfrm>
           <a:prstGeom prst="rect">
             <a:avLst/>
@@ -18709,8 +18272,8 @@
         </p:nvSpPr>
         <p:spPr>
           <a:xfrm>
-            <a:off x="822960" y="3749040"/>
-            <a:ext cx="5029200" cy="1920240"/>
+            <a:off x="914400" y="4507992"/>
+            <a:ext cx="10241280" cy="1024128"/>
           </a:xfrm>
           <a:prstGeom prst="rect">
             <a:avLst/>
@@ -18737,82 +18300,45 @@
           </a:effectLst>
         </p:spPr>
       </p:sp>
-      <p:pic>
-        <p:nvPicPr>
-          <p:cNvPr id="8" name="Image 3" descr="preencoded.png">    </p:cNvPr>
-          <p:cNvPicPr>
-            <a:picLocks noChangeAspect="1"/>
-          </p:cNvPicPr>
-          <p:nvPr/>
-        </p:nvPicPr>
-        <p:blipFill>
-          <a:blip r:embed="rId7">
-            <a:extLst>
-              <a:ext uri="{96DAC541-7B7A-43D3-8B79-37D633B846F1}">
-                <asvg:svgBlip xmlns:asvg="http://schemas.microsoft.com/office/drawing/2016/SVG/main" r:embed="rId8"/>
-              </a:ext>
-            </a:extLst>
-          </a:blip>
-          <a:stretch>
-            <a:fillRect/>
-          </a:stretch>
-        </p:blipFill>
-        <p:spPr>
-          <a:xfrm>
-            <a:off x="6309360" y="3749040"/>
-            <a:ext cx="5029200" cy="1920240"/>
-          </a:xfrm>
-          <a:prstGeom prst="rect">
-            <a:avLst/>
-          </a:prstGeom>
-        </p:spPr>
-      </p:pic>
-      <p:sp>
-        <p:nvSpPr>
-          <p:cNvPr id="9" name="Shape 3"/>
-          <p:cNvSpPr/>
-          <p:nvPr/>
-        </p:nvSpPr>
-        <p:spPr>
-          <a:xfrm>
-            <a:off x="6309360" y="3749040"/>
-            <a:ext cx="5029200" cy="1920240"/>
-          </a:xfrm>
-          <a:prstGeom prst="rect">
-            <a:avLst/>
-          </a:prstGeom>
-          <a:solidFill>
-            <a:srgbClr val="FFFFFF">
-              <a:alpha val="0"/>
+      <p:sp>
+        <p:nvSpPr>
+          <p:cNvPr id="8" name="Shape 3"/>
+          <p:cNvSpPr/>
+          <p:nvPr/>
+        </p:nvSpPr>
+        <p:spPr>
+          <a:xfrm>
+            <a:off x="786384" y="1956816"/>
+            <a:ext cx="32004" cy="3483864"/>
+          </a:xfrm>
+          <a:prstGeom prst="rect">
+            <a:avLst/>
+          </a:prstGeom>
+          <a:solidFill>
+            <a:srgbClr val="DBEAFE">
+              <a:alpha val="80000"/>
             </a:srgbClr>
           </a:solidFill>
           <a:ln w="12700">
             <a:solidFill>
-              <a:srgbClr val="E2E8F0">
+              <a:srgbClr val="DBEAFE">
                 <a:alpha val="0"/>
               </a:srgbClr>
             </a:solidFill>
             <a:prstDash val="solid"/>
           </a:ln>
-          <a:effectLst>
-            <a:outerShdw sx="100000" sy="100000" kx="0" ky="0" algn="bl" rotWithShape="0" blurRad="12700" dist="50800" dir="2700000">
-              <a:srgbClr val="000000">
-                <a:alpha val="8000"/>
-              </a:srgbClr>
-            </a:outerShdw>
-          </a:effectLst>
-        </p:spPr>
-      </p:sp>
-      <p:sp>
-        <p:nvSpPr>
-          <p:cNvPr id="10" name="Shape 4"/>
-          <p:cNvSpPr/>
-          <p:nvPr/>
-        </p:nvSpPr>
-        <p:spPr>
-          <a:xfrm>
-            <a:off x="822960" y="1463040"/>
-            <a:ext cx="73152" cy="1920240"/>
+        </p:spPr>
+      </p:sp>
+      <p:sp>
+        <p:nvSpPr>
+          <p:cNvPr id="9" name="Shape 4"/>
+          <p:cNvSpPr/>
+          <p:nvPr/>
+        </p:nvSpPr>
+        <p:spPr>
+          <a:xfrm>
+            <a:off x="914400" y="1865376"/>
+            <a:ext cx="73152" cy="1024128"/>
           </a:xfrm>
           <a:prstGeom prst="rect">
             <a:avLst/>
@@ -18832,14 +18358,14 @@
       </p:sp>
       <p:sp>
         <p:nvSpPr>
-          <p:cNvPr id="11" name="Shape 5"/>
-          <p:cNvSpPr/>
-          <p:nvPr/>
-        </p:nvSpPr>
-        <p:spPr>
-          <a:xfrm>
-            <a:off x="6309360" y="1463040"/>
-            <a:ext cx="73152" cy="1920240"/>
+          <p:cNvPr id="10" name="Shape 5"/>
+          <p:cNvSpPr/>
+          <p:nvPr/>
+        </p:nvSpPr>
+        <p:spPr>
+          <a:xfrm>
+            <a:off x="914400" y="3191256"/>
+            <a:ext cx="73152" cy="1024128"/>
           </a:xfrm>
           <a:prstGeom prst="rect">
             <a:avLst/>
@@ -18859,14 +18385,14 @@
       </p:sp>
       <p:sp>
         <p:nvSpPr>
-          <p:cNvPr id="12" name="Shape 6"/>
-          <p:cNvSpPr/>
-          <p:nvPr/>
-        </p:nvSpPr>
-        <p:spPr>
-          <a:xfrm>
-            <a:off x="822960" y="3749040"/>
-            <a:ext cx="73152" cy="1920240"/>
+          <p:cNvPr id="11" name="Shape 6"/>
+          <p:cNvSpPr/>
+          <p:nvPr/>
+        </p:nvSpPr>
+        <p:spPr>
+          <a:xfrm>
+            <a:off x="914400" y="4507992"/>
+            <a:ext cx="73152" cy="1024128"/>
           </a:xfrm>
           <a:prstGeom prst="rect">
             <a:avLst/>
@@ -18886,34 +18412,7 @@
       </p:sp>
       <p:sp>
         <p:nvSpPr>
-          <p:cNvPr id="13" name="Shape 7"/>
-          <p:cNvSpPr/>
-          <p:nvPr/>
-        </p:nvSpPr>
-        <p:spPr>
-          <a:xfrm>
-            <a:off x="6309360" y="3749040"/>
-            <a:ext cx="73152" cy="1920240"/>
-          </a:xfrm>
-          <a:prstGeom prst="rect">
-            <a:avLst/>
-          </a:prstGeom>
-          <a:solidFill>
-            <a:srgbClr val="DBEAFE"/>
-          </a:solidFill>
-          <a:ln w="12700">
-            <a:solidFill>
-              <a:srgbClr val="DBEAFE">
-                <a:alpha val="0"/>
-              </a:srgbClr>
-            </a:solidFill>
-            <a:prstDash val="solid"/>
-          </a:ln>
-        </p:spPr>
-      </p:sp>
-      <p:sp>
-        <p:nvSpPr>
-          <p:cNvPr id="14" name="mdpr:2-3-298275:title:__title:2-3-298275"/>
+          <p:cNvPr id="12" name="mdpr:2-3-298275:title:__title:2-3-298275"/>
           <p:cNvSpPr txBox="1"/>
           <p:nvPr/>
         </p:nvSpPr>
@@ -18955,14 +18454,14 @@
       </p:sp>
       <p:sp>
         <p:nvSpPr>
-          <p:cNvPr id="15" name="mdpr:2-3-298275:item-1:block-38-chunk-2"/>
+          <p:cNvPr id="13" name="mdpr:2-3-298275:item-1:block-38-chunk-2"/>
           <p:cNvSpPr txBox="1"/>
           <p:nvPr/>
         </p:nvSpPr>
         <p:spPr>
           <a:xfrm>
-            <a:off x="1042416" y="2209800"/>
-            <a:ext cx="4608576" cy="426720"/>
+            <a:off x="1133856" y="2164080"/>
+            <a:ext cx="9820656" cy="426720"/>
           </a:xfrm>
           <a:prstGeom prst="rect">
             <a:avLst/>
@@ -18997,14 +18496,14 @@
       </p:sp>
       <p:sp>
         <p:nvSpPr>
-          <p:cNvPr id="16" name="mdpr:2-3-298275:item-2:block-38-chunk-2"/>
+          <p:cNvPr id="14" name="mdpr:2-3-298275:item-2:block-38-chunk-2"/>
           <p:cNvSpPr txBox="1"/>
           <p:nvPr/>
         </p:nvSpPr>
         <p:spPr>
           <a:xfrm>
-            <a:off x="6528816" y="2209800"/>
-            <a:ext cx="4608576" cy="426720"/>
+            <a:off x="1133856" y="3489960"/>
+            <a:ext cx="9820656" cy="426720"/>
           </a:xfrm>
           <a:prstGeom prst="rect">
             <a:avLst/>
@@ -19039,14 +18538,14 @@
       </p:sp>
       <p:sp>
         <p:nvSpPr>
-          <p:cNvPr id="17" name="mdpr:2-3-298275:item-3:block-38-chunk-2"/>
+          <p:cNvPr id="15" name="mdpr:2-3-298275:item-3:block-38-chunk-2"/>
           <p:cNvSpPr txBox="1"/>
           <p:nvPr/>
         </p:nvSpPr>
         <p:spPr>
           <a:xfrm>
-            <a:off x="1042416" y="3913632"/>
-            <a:ext cx="4608576" cy="1591056"/>
+            <a:off x="1133856" y="4600164"/>
+            <a:ext cx="9820656" cy="839785"/>
           </a:xfrm>
           <a:prstGeom prst="rect">
             <a:avLst/>
@@ -19096,16 +18595,398 @@
           </a:p>
         </p:txBody>
       </p:sp>
-      <p:sp>
-        <p:nvSpPr>
-          <p:cNvPr id="18" name="mdpr:2-3-298275:item-4:block-38-chunk-2"/>
+    </p:spTree>
+  </p:cSld>
+  <p:clrMapOvr>
+    <a:masterClrMapping/>
+  </p:clrMapOvr>
+</p:sld>
+</file>
+
+<file path=ppt/slides/slide33.xml><?xml version="1.0" encoding="utf-8"?>
+<p:sld xmlns:a="http://schemas.openxmlformats.org/drawingml/2006/main" xmlns:r="http://schemas.openxmlformats.org/officeDocument/2006/relationships" xmlns:p="http://schemas.openxmlformats.org/presentationml/2006/main">
+  <p:cSld name="Slide 33">
+    <p:bg>
+      <p:bgPr>
+        <a:solidFill>
+          <a:srgbClr val="F8FAFC"/>
+        </a:solidFill>
+      </p:bgPr>
+    </p:bg>
+    <p:spTree>
+      <p:nvGrpSpPr>
+        <p:cNvPr id="1" name=""/>
+        <p:cNvGrpSpPr/>
+        <p:nvPr/>
+      </p:nvGrpSpPr>
+      <p:grpSpPr>
+        <a:xfrm>
+          <a:off x="0" y="0"/>
+          <a:ext cx="0" cy="0"/>
+          <a:chOff x="0" y="0"/>
+          <a:chExt cx="0" cy="0"/>
+        </a:xfrm>
+      </p:grpSpPr>
+      <p:pic>
+        <p:nvPicPr>
+          <p:cNvPr id="2" name="Image 0" descr="preencoded.png">    </p:cNvPr>
+          <p:cNvPicPr>
+            <a:picLocks noChangeAspect="1"/>
+          </p:cNvPicPr>
+          <p:nvPr/>
+        </p:nvPicPr>
+        <p:blipFill>
+          <a:blip r:embed="rId1">
+            <a:extLst>
+              <a:ext uri="{96DAC541-7B7A-43D3-8B79-37D633B846F1}">
+                <asvg:svgBlip xmlns:asvg="http://schemas.microsoft.com/office/drawing/2016/SVG/main" r:embed="rId2"/>
+              </a:ext>
+            </a:extLst>
+          </a:blip>
+          <a:stretch>
+            <a:fillRect/>
+          </a:stretch>
+        </p:blipFill>
+        <p:spPr>
+          <a:xfrm>
+            <a:off x="914400" y="1865376"/>
+            <a:ext cx="10241280" cy="1024128"/>
+          </a:xfrm>
+          <a:prstGeom prst="rect">
+            <a:avLst/>
+          </a:prstGeom>
+        </p:spPr>
+      </p:pic>
+      <p:sp>
+        <p:nvSpPr>
+          <p:cNvPr id="3" name="Shape 0"/>
+          <p:cNvSpPr/>
+          <p:nvPr/>
+        </p:nvSpPr>
+        <p:spPr>
+          <a:xfrm>
+            <a:off x="914400" y="1865376"/>
+            <a:ext cx="10241280" cy="1024128"/>
+          </a:xfrm>
+          <a:prstGeom prst="rect">
+            <a:avLst/>
+          </a:prstGeom>
+          <a:solidFill>
+            <a:srgbClr val="FFFFFF">
+              <a:alpha val="0"/>
+            </a:srgbClr>
+          </a:solidFill>
+          <a:ln w="12700">
+            <a:solidFill>
+              <a:srgbClr val="E2E8F0">
+                <a:alpha val="0"/>
+              </a:srgbClr>
+            </a:solidFill>
+            <a:prstDash val="solid"/>
+          </a:ln>
+          <a:effectLst>
+            <a:outerShdw sx="100000" sy="100000" kx="0" ky="0" algn="bl" rotWithShape="0" blurRad="12700" dist="50800" dir="2700000">
+              <a:srgbClr val="000000">
+                <a:alpha val="8000"/>
+              </a:srgbClr>
+            </a:outerShdw>
+          </a:effectLst>
+        </p:spPr>
+      </p:sp>
+      <p:pic>
+        <p:nvPicPr>
+          <p:cNvPr id="4" name="Image 1" descr="preencoded.png">    </p:cNvPr>
+          <p:cNvPicPr>
+            <a:picLocks noChangeAspect="1"/>
+          </p:cNvPicPr>
+          <p:nvPr/>
+        </p:nvPicPr>
+        <p:blipFill>
+          <a:blip r:embed="rId3">
+            <a:extLst>
+              <a:ext uri="{96DAC541-7B7A-43D3-8B79-37D633B846F1}">
+                <asvg:svgBlip xmlns:asvg="http://schemas.microsoft.com/office/drawing/2016/SVG/main" r:embed="rId4"/>
+              </a:ext>
+            </a:extLst>
+          </a:blip>
+          <a:stretch>
+            <a:fillRect/>
+          </a:stretch>
+        </p:blipFill>
+        <p:spPr>
+          <a:xfrm>
+            <a:off x="914400" y="3191256"/>
+            <a:ext cx="10241280" cy="1024128"/>
+          </a:xfrm>
+          <a:prstGeom prst="rect">
+            <a:avLst/>
+          </a:prstGeom>
+        </p:spPr>
+      </p:pic>
+      <p:sp>
+        <p:nvSpPr>
+          <p:cNvPr id="5" name="Shape 1"/>
+          <p:cNvSpPr/>
+          <p:nvPr/>
+        </p:nvSpPr>
+        <p:spPr>
+          <a:xfrm>
+            <a:off x="914400" y="3191256"/>
+            <a:ext cx="10241280" cy="1024128"/>
+          </a:xfrm>
+          <a:prstGeom prst="rect">
+            <a:avLst/>
+          </a:prstGeom>
+          <a:solidFill>
+            <a:srgbClr val="FFFFFF">
+              <a:alpha val="0"/>
+            </a:srgbClr>
+          </a:solidFill>
+          <a:ln w="12700">
+            <a:solidFill>
+              <a:srgbClr val="E2E8F0">
+                <a:alpha val="0"/>
+              </a:srgbClr>
+            </a:solidFill>
+            <a:prstDash val="solid"/>
+          </a:ln>
+          <a:effectLst>
+            <a:outerShdw sx="100000" sy="100000" kx="0" ky="0" algn="bl" rotWithShape="0" blurRad="12700" dist="50800" dir="2700000">
+              <a:srgbClr val="000000">
+                <a:alpha val="8000"/>
+              </a:srgbClr>
+            </a:outerShdw>
+          </a:effectLst>
+        </p:spPr>
+      </p:sp>
+      <p:pic>
+        <p:nvPicPr>
+          <p:cNvPr id="6" name="Image 2" descr="preencoded.png">    </p:cNvPr>
+          <p:cNvPicPr>
+            <a:picLocks noChangeAspect="1"/>
+          </p:cNvPicPr>
+          <p:nvPr/>
+        </p:nvPicPr>
+        <p:blipFill>
+          <a:blip r:embed="rId5">
+            <a:extLst>
+              <a:ext uri="{96DAC541-7B7A-43D3-8B79-37D633B846F1}">
+                <asvg:svgBlip xmlns:asvg="http://schemas.microsoft.com/office/drawing/2016/SVG/main" r:embed="rId6"/>
+              </a:ext>
+            </a:extLst>
+          </a:blip>
+          <a:stretch>
+            <a:fillRect/>
+          </a:stretch>
+        </p:blipFill>
+        <p:spPr>
+          <a:xfrm>
+            <a:off x="914400" y="4507992"/>
+            <a:ext cx="10241280" cy="1024128"/>
+          </a:xfrm>
+          <a:prstGeom prst="rect">
+            <a:avLst/>
+          </a:prstGeom>
+        </p:spPr>
+      </p:pic>
+      <p:sp>
+        <p:nvSpPr>
+          <p:cNvPr id="7" name="Shape 2"/>
+          <p:cNvSpPr/>
+          <p:nvPr/>
+        </p:nvSpPr>
+        <p:spPr>
+          <a:xfrm>
+            <a:off x="914400" y="4507992"/>
+            <a:ext cx="10241280" cy="1024128"/>
+          </a:xfrm>
+          <a:prstGeom prst="rect">
+            <a:avLst/>
+          </a:prstGeom>
+          <a:solidFill>
+            <a:srgbClr val="FFFFFF">
+              <a:alpha val="0"/>
+            </a:srgbClr>
+          </a:solidFill>
+          <a:ln w="12700">
+            <a:solidFill>
+              <a:srgbClr val="E2E8F0">
+                <a:alpha val="0"/>
+              </a:srgbClr>
+            </a:solidFill>
+            <a:prstDash val="solid"/>
+          </a:ln>
+          <a:effectLst>
+            <a:outerShdw sx="100000" sy="100000" kx="0" ky="0" algn="bl" rotWithShape="0" blurRad="12700" dist="50800" dir="2700000">
+              <a:srgbClr val="000000">
+                <a:alpha val="8000"/>
+              </a:srgbClr>
+            </a:outerShdw>
+          </a:effectLst>
+        </p:spPr>
+      </p:sp>
+      <p:sp>
+        <p:nvSpPr>
+          <p:cNvPr id="8" name="Shape 3"/>
+          <p:cNvSpPr/>
+          <p:nvPr/>
+        </p:nvSpPr>
+        <p:spPr>
+          <a:xfrm>
+            <a:off x="786384" y="1956816"/>
+            <a:ext cx="32004" cy="3483864"/>
+          </a:xfrm>
+          <a:prstGeom prst="rect">
+            <a:avLst/>
+          </a:prstGeom>
+          <a:solidFill>
+            <a:srgbClr val="DBEAFE">
+              <a:alpha val="80000"/>
+            </a:srgbClr>
+          </a:solidFill>
+          <a:ln w="12700">
+            <a:solidFill>
+              <a:srgbClr val="DBEAFE">
+                <a:alpha val="0"/>
+              </a:srgbClr>
+            </a:solidFill>
+            <a:prstDash val="solid"/>
+          </a:ln>
+        </p:spPr>
+      </p:sp>
+      <p:sp>
+        <p:nvSpPr>
+          <p:cNvPr id="9" name="Shape 4"/>
+          <p:cNvSpPr/>
+          <p:nvPr/>
+        </p:nvSpPr>
+        <p:spPr>
+          <a:xfrm>
+            <a:off x="914400" y="1865376"/>
+            <a:ext cx="73152" cy="1024128"/>
+          </a:xfrm>
+          <a:prstGeom prst="rect">
+            <a:avLst/>
+          </a:prstGeom>
+          <a:solidFill>
+            <a:srgbClr val="2563EB"/>
+          </a:solidFill>
+          <a:ln w="12700">
+            <a:solidFill>
+              <a:srgbClr val="2563EB">
+                <a:alpha val="0"/>
+              </a:srgbClr>
+            </a:solidFill>
+            <a:prstDash val="solid"/>
+          </a:ln>
+        </p:spPr>
+      </p:sp>
+      <p:sp>
+        <p:nvSpPr>
+          <p:cNvPr id="10" name="Shape 5"/>
+          <p:cNvSpPr/>
+          <p:nvPr/>
+        </p:nvSpPr>
+        <p:spPr>
+          <a:xfrm>
+            <a:off x="914400" y="3191256"/>
+            <a:ext cx="73152" cy="1024128"/>
+          </a:xfrm>
+          <a:prstGeom prst="rect">
+            <a:avLst/>
+          </a:prstGeom>
+          <a:solidFill>
+            <a:srgbClr val="DBEAFE"/>
+          </a:solidFill>
+          <a:ln w="12700">
+            <a:solidFill>
+              <a:srgbClr val="DBEAFE">
+                <a:alpha val="0"/>
+              </a:srgbClr>
+            </a:solidFill>
+            <a:prstDash val="solid"/>
+          </a:ln>
+        </p:spPr>
+      </p:sp>
+      <p:sp>
+        <p:nvSpPr>
+          <p:cNvPr id="11" name="Shape 6"/>
+          <p:cNvSpPr/>
+          <p:nvPr/>
+        </p:nvSpPr>
+        <p:spPr>
+          <a:xfrm>
+            <a:off x="914400" y="4507992"/>
+            <a:ext cx="73152" cy="1024128"/>
+          </a:xfrm>
+          <a:prstGeom prst="rect">
+            <a:avLst/>
+          </a:prstGeom>
+          <a:solidFill>
+            <a:srgbClr val="2563EB"/>
+          </a:solidFill>
+          <a:ln w="12700">
+            <a:solidFill>
+              <a:srgbClr val="2563EB">
+                <a:alpha val="0"/>
+              </a:srgbClr>
+            </a:solidFill>
+            <a:prstDash val="solid"/>
+          </a:ln>
+        </p:spPr>
+      </p:sp>
+      <p:sp>
+        <p:nvSpPr>
+          <p:cNvPr id="12" name="mdpr:3-3-bec926:title:__title:3-3-bec926"/>
           <p:cNvSpPr txBox="1"/>
           <p:nvPr/>
         </p:nvSpPr>
         <p:spPr>
           <a:xfrm>
-            <a:off x="6528816" y="3913632"/>
-            <a:ext cx="4608576" cy="1591056"/>
+            <a:off x="731520" y="457200"/>
+            <a:ext cx="10698480" cy="731520"/>
+          </a:xfrm>
+          <a:prstGeom prst="rect">
+            <a:avLst/>
+          </a:prstGeom>
+          <a:noFill/>
+          <a:ln/>
+        </p:spPr>
+        <p:txBody>
+          <a:bodyPr wrap="square" lIns="0" tIns="0" rIns="0" bIns="0" rtlCol="0" anchor="ctr"/>
+          <a:lstStyle/>
+          <a:p>
+            <a:pPr algn="ctr" indent="0" marL="0">
+              <a:lnSpc>
+                <a:spcPct val="120000"/>
+              </a:lnSpc>
+              <a:buNone/>
+            </a:pPr>
+            <a:r>
+              <a:rPr lang="en-US" sz="3400" b="1" dirty="0">
+                <a:solidFill>
+                  <a:srgbClr val="111111"/>
+                </a:solidFill>
+                <a:latin typeface="Pretendard" pitchFamily="34" charset="0"/>
+                <a:ea typeface="Pretendard" pitchFamily="34" charset="-122"/>
+                <a:cs typeface="Pretendard" pitchFamily="34" charset="-120"/>
+              </a:rPr>
+              <a:t>Example: examples/theme-preview-en/deck.md (Cont. 3/3)</a:t>
+            </a:r>
+            <a:endParaRPr lang="en-US" sz="3400" dirty="0"/>
+          </a:p>
+        </p:txBody>
+      </p:sp>
+      <p:sp>
+        <p:nvSpPr>
+          <p:cNvPr id="13" name="mdpr:3-3-bec926:item-1:block-38-chunk-3"/>
+          <p:cNvSpPr txBox="1"/>
+          <p:nvPr/>
+        </p:nvSpPr>
+        <p:spPr>
+          <a:xfrm>
+            <a:off x="1133856" y="1957548"/>
+            <a:ext cx="9820656" cy="839785"/>
           </a:xfrm>
           <a:prstGeom prst="rect">
             <a:avLst/>
@@ -19155,102 +19036,16 @@
           </a:p>
         </p:txBody>
       </p:sp>
-    </p:spTree>
-  </p:cSld>
-  <p:clrMapOvr>
-    <a:masterClrMapping/>
-  </p:clrMapOvr>
-</p:sld>
-</file>
-
-<file path=ppt/slides/slide33.xml><?xml version="1.0" encoding="utf-8"?>
-<p:sld xmlns:a="http://schemas.openxmlformats.org/drawingml/2006/main" xmlns:r="http://schemas.openxmlformats.org/officeDocument/2006/relationships" xmlns:p="http://schemas.openxmlformats.org/presentationml/2006/main">
-  <p:cSld name="Slide 33">
-    <p:bg>
-      <p:bgPr>
-        <a:solidFill>
-          <a:srgbClr val="F8FAFC"/>
-        </a:solidFill>
-      </p:bgPr>
-    </p:bg>
-    <p:spTree>
-      <p:nvGrpSpPr>
-        <p:cNvPr id="1" name=""/>
-        <p:cNvGrpSpPr/>
-        <p:nvPr/>
-      </p:nvGrpSpPr>
-      <p:grpSpPr>
-        <a:xfrm>
-          <a:off x="0" y="0"/>
-          <a:ext cx="0" cy="0"/>
-          <a:chOff x="0" y="0"/>
-          <a:chExt cx="0" cy="0"/>
-        </a:xfrm>
-      </p:grpSpPr>
-      <p:sp>
-        <p:nvSpPr>
-          <p:cNvPr id="2" name="Shape 0"/>
-          <p:cNvSpPr/>
-          <p:nvPr/>
-        </p:nvSpPr>
-        <p:spPr>
-          <a:xfrm>
-            <a:off x="822960" y="1554480"/>
-            <a:ext cx="4937760" cy="73152"/>
-          </a:xfrm>
-          <a:prstGeom prst="rect">
-            <a:avLst/>
-          </a:prstGeom>
-          <a:solidFill>
-            <a:srgbClr val="2563EB"/>
-          </a:solidFill>
-          <a:ln w="12700">
-            <a:solidFill>
-              <a:srgbClr val="2563EB">
-                <a:alpha val="0"/>
-              </a:srgbClr>
-            </a:solidFill>
-            <a:prstDash val="solid"/>
-          </a:ln>
-        </p:spPr>
-      </p:sp>
-      <p:sp>
-        <p:nvSpPr>
-          <p:cNvPr id="3" name="Shape 1"/>
-          <p:cNvSpPr/>
-          <p:nvPr/>
-        </p:nvSpPr>
-        <p:spPr>
-          <a:xfrm>
-            <a:off x="6400800" y="1554480"/>
-            <a:ext cx="4937760" cy="73152"/>
-          </a:xfrm>
-          <a:prstGeom prst="rect">
-            <a:avLst/>
-          </a:prstGeom>
-          <a:solidFill>
-            <a:srgbClr val="2563EB"/>
-          </a:solidFill>
-          <a:ln w="12700">
-            <a:solidFill>
-              <a:srgbClr val="2563EB">
-                <a:alpha val="0"/>
-              </a:srgbClr>
-            </a:solidFill>
-            <a:prstDash val="solid"/>
-          </a:ln>
-        </p:spPr>
-      </p:sp>
-      <p:sp>
-        <p:nvSpPr>
-          <p:cNvPr id="4" name="mdpr:3-3-bec926:title:__title:3-3-bec926"/>
+      <p:sp>
+        <p:nvSpPr>
+          <p:cNvPr id="14" name="mdpr:3-3-bec926:item-2:block-38-chunk-3"/>
           <p:cNvSpPr txBox="1"/>
           <p:nvPr/>
         </p:nvSpPr>
         <p:spPr>
           <a:xfrm>
-            <a:off x="731520" y="457200"/>
-            <a:ext cx="10698480" cy="731520"/>
+            <a:off x="1133856" y="3283428"/>
+            <a:ext cx="9820656" cy="839785"/>
           </a:xfrm>
           <a:prstGeom prst="rect">
             <a:avLst/>
@@ -19259,49 +19054,7 @@
           <a:ln/>
         </p:spPr>
         <p:txBody>
-          <a:bodyPr wrap="square" lIns="0" tIns="0" rIns="0" bIns="0" rtlCol="0" anchor="ctr"/>
-          <a:lstStyle/>
-          <a:p>
-            <a:pPr algn="ctr" indent="0" marL="0">
-              <a:lnSpc>
-                <a:spcPct val="120000"/>
-              </a:lnSpc>
-              <a:buNone/>
-            </a:pPr>
-            <a:r>
-              <a:rPr lang="en-US" sz="3400" b="1" dirty="0">
-                <a:solidFill>
-                  <a:srgbClr val="111111"/>
-                </a:solidFill>
-                <a:latin typeface="Pretendard" pitchFamily="34" charset="0"/>
-                <a:ea typeface="Pretendard" pitchFamily="34" charset="-122"/>
-                <a:cs typeface="Pretendard" pitchFamily="34" charset="-120"/>
-              </a:rPr>
-              <a:t>Example: examples/theme-preview-en/deck.md (Cont. 3/3)</a:t>
-            </a:r>
-            <a:endParaRPr lang="en-US" sz="3400" dirty="0"/>
-          </a:p>
-        </p:txBody>
-      </p:sp>
-      <p:sp>
-        <p:nvSpPr>
-          <p:cNvPr id="5" name="mdpr:3-3-bec926:left:block-38-chunk-3"/>
-          <p:cNvSpPr txBox="1"/>
-          <p:nvPr/>
-        </p:nvSpPr>
-        <p:spPr>
-          <a:xfrm>
-            <a:off x="896112" y="1664208"/>
-            <a:ext cx="4791456" cy="4169664"/>
-          </a:xfrm>
-          <a:prstGeom prst="rect">
-            <a:avLst/>
-          </a:prstGeom>
-          <a:noFill/>
-          <a:ln/>
-        </p:spPr>
-        <p:txBody>
-          <a:bodyPr wrap="square" lIns="0" tIns="25400" rIns="25400" bIns="0" rtlCol="0" anchor="t"/>
+          <a:bodyPr wrap="square" lIns="0" tIns="25400" rIns="25400" bIns="0" rtlCol="0" anchor="ctr"/>
           <a:lstStyle/>
           <a:p>
             <a:pPr algn="l" indent="0" marL="0">
@@ -19319,7 +19072,7 @@
                 <a:ea typeface="Pretendard" pitchFamily="34" charset="-122"/>
                 <a:cs typeface="Pretendard" pitchFamily="34" charset="-120"/>
               </a:rPr>
-              <a:t>- Object support</a:t>
+              <a:t>Object support</a:t>
             </a:r>
             <a:pPr algn="l" indent="0" marL="0">
               <a:lnSpc>
@@ -19344,14 +19097,14 @@
       </p:sp>
       <p:sp>
         <p:nvSpPr>
-          <p:cNvPr id="6" name="mdpr:3-3-bec926:right:block-38-chunk-3"/>
+          <p:cNvPr id="15" name="mdpr:3-3-bec926:item-3:block-38-chunk-3"/>
           <p:cNvSpPr txBox="1"/>
           <p:nvPr/>
         </p:nvSpPr>
         <p:spPr>
           <a:xfrm>
-            <a:off x="6473952" y="1664208"/>
-            <a:ext cx="4791456" cy="4169664"/>
+            <a:off x="1133856" y="4600164"/>
+            <a:ext cx="9820656" cy="839785"/>
           </a:xfrm>
           <a:prstGeom prst="rect">
             <a:avLst/>
@@ -19360,7 +19113,7 @@
           <a:ln/>
         </p:spPr>
         <p:txBody>
-          <a:bodyPr wrap="square" lIns="0" tIns="25400" rIns="25400" bIns="0" rtlCol="0" anchor="t"/>
+          <a:bodyPr wrap="square" lIns="0" tIns="25400" rIns="25400" bIns="0" rtlCol="0" anchor="ctr"/>
           <a:lstStyle/>
           <a:p>
             <a:pPr algn="l" indent="0" marL="0">
@@ -19378,7 +19131,7 @@
                 <a:ea typeface="Pretendard" pitchFamily="34" charset="-122"/>
                 <a:cs typeface="Pretendard" pitchFamily="34" charset="-120"/>
               </a:rPr>
-              <a:t>- Validation contract</a:t>
+              <a:t>Validation contract</a:t>
             </a:r>
             <a:pPr algn="l" indent="0" marL="0">
               <a:lnSpc>
@@ -25685,8 +25438,8 @@
         </p:blipFill>
         <p:spPr>
           <a:xfrm>
-            <a:off x="822960" y="1463040"/>
-            <a:ext cx="5029200" cy="1920240"/>
+            <a:off x="914400" y="1865376"/>
+            <a:ext cx="10241280" cy="1024128"/>
           </a:xfrm>
           <a:prstGeom prst="rect">
             <a:avLst/>
@@ -25701,8 +25454,8 @@
         </p:nvSpPr>
         <p:spPr>
           <a:xfrm>
-            <a:off x="822960" y="1463040"/>
-            <a:ext cx="5029200" cy="1920240"/>
+            <a:off x="914400" y="1865376"/>
+            <a:ext cx="10241280" cy="1024128"/>
           </a:xfrm>
           <a:prstGeom prst="rect">
             <a:avLst/>
@@ -25751,8 +25504,8 @@
         </p:blipFill>
         <p:spPr>
           <a:xfrm>
-            <a:off x="6309360" y="1463040"/>
-            <a:ext cx="5029200" cy="1920240"/>
+            <a:off x="914400" y="3191256"/>
+            <a:ext cx="10241280" cy="1024128"/>
           </a:xfrm>
           <a:prstGeom prst="rect">
             <a:avLst/>
@@ -25767,8 +25520,8 @@
         </p:nvSpPr>
         <p:spPr>
           <a:xfrm>
-            <a:off x="6309360" y="1463040"/>
-            <a:ext cx="5029200" cy="1920240"/>
+            <a:off x="914400" y="3191256"/>
+            <a:ext cx="10241280" cy="1024128"/>
           </a:xfrm>
           <a:prstGeom prst="rect">
             <a:avLst/>
@@ -25817,8 +25570,8 @@
         </p:blipFill>
         <p:spPr>
           <a:xfrm>
-            <a:off x="822960" y="3749040"/>
-            <a:ext cx="5029200" cy="1920240"/>
+            <a:off x="914400" y="4507992"/>
+            <a:ext cx="10241280" cy="1024128"/>
           </a:xfrm>
           <a:prstGeom prst="rect">
             <a:avLst/>
@@ -25833,8 +25586,8 @@
         </p:nvSpPr>
         <p:spPr>
           <a:xfrm>
-            <a:off x="822960" y="3749040"/>
-            <a:ext cx="5029200" cy="1920240"/>
+            <a:off x="914400" y="4507992"/>
+            <a:ext cx="10241280" cy="1024128"/>
           </a:xfrm>
           <a:prstGeom prst="rect">
             <a:avLst/>
@@ -25861,82 +25614,45 @@
           </a:effectLst>
         </p:spPr>
       </p:sp>
-      <p:pic>
-        <p:nvPicPr>
-          <p:cNvPr id="8" name="Image 3" descr="preencoded.png">    </p:cNvPr>
-          <p:cNvPicPr>
-            <a:picLocks noChangeAspect="1"/>
-          </p:cNvPicPr>
-          <p:nvPr/>
-        </p:nvPicPr>
-        <p:blipFill>
-          <a:blip r:embed="rId7">
-            <a:extLst>
-              <a:ext uri="{96DAC541-7B7A-43D3-8B79-37D633B846F1}">
-                <asvg:svgBlip xmlns:asvg="http://schemas.microsoft.com/office/drawing/2016/SVG/main" r:embed="rId8"/>
-              </a:ext>
-            </a:extLst>
-          </a:blip>
-          <a:stretch>
-            <a:fillRect/>
-          </a:stretch>
-        </p:blipFill>
-        <p:spPr>
-          <a:xfrm>
-            <a:off x="6309360" y="3749040"/>
-            <a:ext cx="5029200" cy="1920240"/>
-          </a:xfrm>
-          <a:prstGeom prst="rect">
-            <a:avLst/>
-          </a:prstGeom>
-        </p:spPr>
-      </p:pic>
-      <p:sp>
-        <p:nvSpPr>
-          <p:cNvPr id="9" name="Shape 3"/>
-          <p:cNvSpPr/>
-          <p:nvPr/>
-        </p:nvSpPr>
-        <p:spPr>
-          <a:xfrm>
-            <a:off x="6309360" y="3749040"/>
-            <a:ext cx="5029200" cy="1920240"/>
-          </a:xfrm>
-          <a:prstGeom prst="rect">
-            <a:avLst/>
-          </a:prstGeom>
-          <a:solidFill>
-            <a:srgbClr val="FFFFFF">
-              <a:alpha val="0"/>
+      <p:sp>
+        <p:nvSpPr>
+          <p:cNvPr id="8" name="Shape 3"/>
+          <p:cNvSpPr/>
+          <p:nvPr/>
+        </p:nvSpPr>
+        <p:spPr>
+          <a:xfrm>
+            <a:off x="786384" y="1956816"/>
+            <a:ext cx="32004" cy="3483864"/>
+          </a:xfrm>
+          <a:prstGeom prst="rect">
+            <a:avLst/>
+          </a:prstGeom>
+          <a:solidFill>
+            <a:srgbClr val="DBEAFE">
+              <a:alpha val="80000"/>
             </a:srgbClr>
           </a:solidFill>
           <a:ln w="12700">
             <a:solidFill>
-              <a:srgbClr val="E2E8F0">
+              <a:srgbClr val="DBEAFE">
                 <a:alpha val="0"/>
               </a:srgbClr>
             </a:solidFill>
             <a:prstDash val="solid"/>
           </a:ln>
-          <a:effectLst>
-            <a:outerShdw sx="100000" sy="100000" kx="0" ky="0" algn="bl" rotWithShape="0" blurRad="12700" dist="50800" dir="2700000">
-              <a:srgbClr val="000000">
-                <a:alpha val="8000"/>
-              </a:srgbClr>
-            </a:outerShdw>
-          </a:effectLst>
-        </p:spPr>
-      </p:sp>
-      <p:sp>
-        <p:nvSpPr>
-          <p:cNvPr id="10" name="Shape 4"/>
-          <p:cNvSpPr/>
-          <p:nvPr/>
-        </p:nvSpPr>
-        <p:spPr>
-          <a:xfrm>
-            <a:off x="822960" y="1463040"/>
-            <a:ext cx="73152" cy="1920240"/>
+        </p:spPr>
+      </p:sp>
+      <p:sp>
+        <p:nvSpPr>
+          <p:cNvPr id="9" name="Shape 4"/>
+          <p:cNvSpPr/>
+          <p:nvPr/>
+        </p:nvSpPr>
+        <p:spPr>
+          <a:xfrm>
+            <a:off x="914400" y="1865376"/>
+            <a:ext cx="73152" cy="1024128"/>
           </a:xfrm>
           <a:prstGeom prst="rect">
             <a:avLst/>
@@ -25956,14 +25672,14 @@
       </p:sp>
       <p:sp>
         <p:nvSpPr>
-          <p:cNvPr id="11" name="Shape 5"/>
-          <p:cNvSpPr/>
-          <p:nvPr/>
-        </p:nvSpPr>
-        <p:spPr>
-          <a:xfrm>
-            <a:off x="6309360" y="1463040"/>
-            <a:ext cx="73152" cy="1920240"/>
+          <p:cNvPr id="10" name="Shape 5"/>
+          <p:cNvSpPr/>
+          <p:nvPr/>
+        </p:nvSpPr>
+        <p:spPr>
+          <a:xfrm>
+            <a:off x="914400" y="3191256"/>
+            <a:ext cx="73152" cy="1024128"/>
           </a:xfrm>
           <a:prstGeom prst="rect">
             <a:avLst/>
@@ -25983,14 +25699,14 @@
       </p:sp>
       <p:sp>
         <p:nvSpPr>
-          <p:cNvPr id="12" name="Shape 6"/>
-          <p:cNvSpPr/>
-          <p:nvPr/>
-        </p:nvSpPr>
-        <p:spPr>
-          <a:xfrm>
-            <a:off x="822960" y="3749040"/>
-            <a:ext cx="73152" cy="1920240"/>
+          <p:cNvPr id="11" name="Shape 6"/>
+          <p:cNvSpPr/>
+          <p:nvPr/>
+        </p:nvSpPr>
+        <p:spPr>
+          <a:xfrm>
+            <a:off x="914400" y="4507992"/>
+            <a:ext cx="73152" cy="1024128"/>
           </a:xfrm>
           <a:prstGeom prst="rect">
             <a:avLst/>
@@ -26010,34 +25726,7 @@
       </p:sp>
       <p:sp>
         <p:nvSpPr>
-          <p:cNvPr id="13" name="Shape 7"/>
-          <p:cNvSpPr/>
-          <p:nvPr/>
-        </p:nvSpPr>
-        <p:spPr>
-          <a:xfrm>
-            <a:off x="6309360" y="3749040"/>
-            <a:ext cx="73152" cy="1920240"/>
-          </a:xfrm>
-          <a:prstGeom prst="rect">
-            <a:avLst/>
-          </a:prstGeom>
-          <a:solidFill>
-            <a:srgbClr val="DBEAFE"/>
-          </a:solidFill>
-          <a:ln w="12700">
-            <a:solidFill>
-              <a:srgbClr val="DBEAFE">
-                <a:alpha val="0"/>
-              </a:srgbClr>
-            </a:solidFill>
-            <a:prstDash val="solid"/>
-          </a:ln>
-        </p:spPr>
-      </p:sp>
-      <p:sp>
-        <p:nvSpPr>
-          <p:cNvPr id="14" name="mdpr:1-3-c49d80:title:__title:1-3-c49d80"/>
+          <p:cNvPr id="12" name="mdpr:1-3-c49d80:title:__title:1-3-c49d80"/>
           <p:cNvSpPr txBox="1"/>
           <p:nvPr/>
         </p:nvSpPr>
@@ -26079,14 +25768,14 @@
       </p:sp>
       <p:sp>
         <p:nvSpPr>
-          <p:cNvPr id="15" name="mdpr:1-3-c49d80:item-1:block-12-chunk-1"/>
+          <p:cNvPr id="13" name="mdpr:1-3-c49d80:item-1:block-12-chunk-1"/>
           <p:cNvSpPr txBox="1"/>
           <p:nvPr/>
         </p:nvSpPr>
         <p:spPr>
           <a:xfrm>
-            <a:off x="1042416" y="2209800"/>
-            <a:ext cx="4608576" cy="426720"/>
+            <a:off x="1133856" y="2164080"/>
+            <a:ext cx="9820656" cy="426720"/>
           </a:xfrm>
           <a:prstGeom prst="rect">
             <a:avLst/>
@@ -26121,14 +25810,14 @@
       </p:sp>
       <p:sp>
         <p:nvSpPr>
-          <p:cNvPr id="16" name="mdpr:1-3-c49d80:item-2:block-12-chunk-1"/>
+          <p:cNvPr id="14" name="mdpr:1-3-c49d80:item-2:block-12-chunk-1"/>
           <p:cNvSpPr txBox="1"/>
           <p:nvPr/>
         </p:nvSpPr>
         <p:spPr>
           <a:xfrm>
-            <a:off x="6528816" y="2209800"/>
-            <a:ext cx="4608576" cy="426720"/>
+            <a:off x="1133856" y="3489960"/>
+            <a:ext cx="9820656" cy="426720"/>
           </a:xfrm>
           <a:prstGeom prst="rect">
             <a:avLst/>
@@ -26163,14 +25852,14 @@
       </p:sp>
       <p:sp>
         <p:nvSpPr>
-          <p:cNvPr id="17" name="mdpr:1-3-c49d80:item-3:block-12-chunk-1"/>
+          <p:cNvPr id="15" name="mdpr:1-3-c49d80:item-3:block-12-chunk-1"/>
           <p:cNvSpPr txBox="1"/>
           <p:nvPr/>
         </p:nvSpPr>
         <p:spPr>
           <a:xfrm>
-            <a:off x="1042416" y="4495800"/>
-            <a:ext cx="4608576" cy="426720"/>
+            <a:off x="1133856" y="4806696"/>
+            <a:ext cx="9820656" cy="426720"/>
           </a:xfrm>
           <a:prstGeom prst="rect">
             <a:avLst/>
@@ -26198,48 +25887,6 @@
                 <a:cs typeface="Pretendard" pitchFamily="34" charset="-120"/>
               </a:rPr>
               <a:t>cover or section</a:t>
-            </a:r>
-            <a:endParaRPr lang="en-US" sz="2200" dirty="0"/>
-          </a:p>
-        </p:txBody>
-      </p:sp>
-      <p:sp>
-        <p:nvSpPr>
-          <p:cNvPr id="18" name="mdpr:1-3-c49d80:item-4:block-12-chunk-1"/>
-          <p:cNvSpPr txBox="1"/>
-          <p:nvPr/>
-        </p:nvSpPr>
-        <p:spPr>
-          <a:xfrm>
-            <a:off x="6528816" y="4495800"/>
-            <a:ext cx="4608576" cy="426720"/>
-          </a:xfrm>
-          <a:prstGeom prst="rect">
-            <a:avLst/>
-          </a:prstGeom>
-          <a:noFill/>
-          <a:ln/>
-        </p:spPr>
-        <p:txBody>
-          <a:bodyPr wrap="square" lIns="0" tIns="25400" rIns="25400" bIns="0" rtlCol="0" anchor="ctr"/>
-          <a:lstStyle/>
-          <a:p>
-            <a:pPr algn="ctr" indent="0" marL="0">
-              <a:lnSpc>
-                <a:spcPct val="120000"/>
-              </a:lnSpc>
-              <a:buNone/>
-            </a:pPr>
-            <a:r>
-              <a:rPr lang="en-US" sz="2200" dirty="0">
-                <a:solidFill>
-                  <a:srgbClr val="111111"/>
-                </a:solidFill>
-                <a:latin typeface="Pretendard" pitchFamily="34" charset="0"/>
-                <a:ea typeface="Pretendard" pitchFamily="34" charset="-122"/>
-                <a:cs typeface="Pretendard" pitchFamily="34" charset="-120"/>
-              </a:rPr>
-              <a:t>slide candidate</a:t>
             </a:r>
             <a:endParaRPr lang="en-US" sz="2200" dirty="0"/>
           </a:p>

--- a/artifacts/mdpr-vs-skill/mdpr-baseline-result.pptx
+++ b/artifacts/mdpr-vs-skill/mdpr-baseline-result.pptx
@@ -6802,7 +6802,7 @@
                 <a:ea typeface="Pretendard" pitchFamily="34" charset="-122"/>
                 <a:cs typeface="Pretendard" pitchFamily="34" charset="-120"/>
               </a:rPr>
-              <a:t>SlideIntentScoreProfile + itemCount + blockType + density =&gt; candidate LayoutPresets =&gt; deterministic score =&gt; selected LayoutPreset</a:t>
+              <a:t>SlideIntentScoreProfile + itemCount + blockType + density =&gt; candidate LayoutPresets =&gt; deterministic score + bounded recent-geometry reuse penalty =&gt; selected LayoutPreset</a:t>
             </a:r>
             <a:endParaRPr lang="en-US" sz="1800" dirty="0"/>
           </a:p>
@@ -10749,61 +10749,7 @@
       </p:grpSpPr>
       <p:sp>
         <p:nvSpPr>
-          <p:cNvPr id="2" name="Shape 0"/>
-          <p:cNvSpPr/>
-          <p:nvPr/>
-        </p:nvSpPr>
-        <p:spPr>
-          <a:xfrm>
-            <a:off x="822960" y="1554480"/>
-            <a:ext cx="4937760" cy="73152"/>
-          </a:xfrm>
-          <a:prstGeom prst="rect">
-            <a:avLst/>
-          </a:prstGeom>
-          <a:solidFill>
-            <a:srgbClr val="2563EB"/>
-          </a:solidFill>
-          <a:ln w="12700">
-            <a:solidFill>
-              <a:srgbClr val="2563EB">
-                <a:alpha val="0"/>
-              </a:srgbClr>
-            </a:solidFill>
-            <a:prstDash val="solid"/>
-          </a:ln>
-        </p:spPr>
-      </p:sp>
-      <p:sp>
-        <p:nvSpPr>
-          <p:cNvPr id="3" name="Shape 1"/>
-          <p:cNvSpPr/>
-          <p:nvPr/>
-        </p:nvSpPr>
-        <p:spPr>
-          <a:xfrm>
-            <a:off x="6400800" y="1554480"/>
-            <a:ext cx="4937760" cy="73152"/>
-          </a:xfrm>
-          <a:prstGeom prst="rect">
-            <a:avLst/>
-          </a:prstGeom>
-          <a:solidFill>
-            <a:srgbClr val="2563EB"/>
-          </a:solidFill>
-          <a:ln w="12700">
-            <a:solidFill>
-              <a:srgbClr val="2563EB">
-                <a:alpha val="0"/>
-              </a:srgbClr>
-            </a:solidFill>
-            <a:prstDash val="solid"/>
-          </a:ln>
-        </p:spPr>
-      </p:sp>
-      <p:sp>
-        <p:nvSpPr>
-          <p:cNvPr id="4" name="mdpr:example-decks-from-mdpr-1f8782:title:__title:example-decks-from-mdpr-1f8782"/>
+          <p:cNvPr id="2" name="mdpr:example-decks-from-mdpr-1f8782:title:__title:example-decks-from-mdpr-1f8782"/>
           <p:cNvSpPr txBox="1"/>
           <p:nvPr/>
         </p:nvSpPr>
@@ -10845,13 +10791,13 @@
       </p:sp>
       <p:sp>
         <p:nvSpPr>
-          <p:cNvPr id="5" name="mdpr:example-decks-from-mdpr-1f8782:left:block-26-block-26-block-26"/>
+          <p:cNvPr id="3" name="mdpr:example-decks-from-mdpr-1f8782:left:block-26-block-26-block-26"/>
           <p:cNvSpPr txBox="1"/>
           <p:nvPr/>
         </p:nvSpPr>
         <p:spPr>
           <a:xfrm>
-            <a:off x="896112" y="2606040"/>
+            <a:off x="896112" y="1463040"/>
             <a:ext cx="4791456" cy="762000"/>
           </a:xfrm>
           <a:prstGeom prst="rect">
@@ -10861,7 +10807,7 @@
           <a:ln/>
         </p:spPr>
         <p:txBody>
-          <a:bodyPr wrap="square" lIns="0" tIns="25400" rIns="25400" bIns="0" rtlCol="0" anchor="ctr"/>
+          <a:bodyPr wrap="square" lIns="0" tIns="25400" rIns="25400" bIns="0" rtlCol="0" anchor="t"/>
           <a:lstStyle/>
           <a:p>
             <a:pPr algn="l" indent="0" marL="0">
@@ -10887,13 +10833,13 @@
       </p:sp>
       <p:sp>
         <p:nvSpPr>
-          <p:cNvPr id="6" name="mdpr:example-decks-from-mdpr-1f8782:left:block-26-block-26-block-26"/>
+          <p:cNvPr id="4" name="mdpr:example-decks-from-mdpr-1f8782:left:block-26-block-26-block-26"/>
           <p:cNvSpPr txBox="1"/>
           <p:nvPr/>
         </p:nvSpPr>
         <p:spPr>
           <a:xfrm>
-            <a:off x="896112" y="3368040"/>
+            <a:off x="896112" y="2225040"/>
             <a:ext cx="4791456" cy="762000"/>
           </a:xfrm>
           <a:prstGeom prst="rect">
@@ -10903,7 +10849,7 @@
           <a:ln/>
         </p:spPr>
         <p:txBody>
-          <a:bodyPr wrap="square" lIns="0" tIns="25400" rIns="25400" bIns="0" rtlCol="0" anchor="ctr"/>
+          <a:bodyPr wrap="square" lIns="0" tIns="25400" rIns="25400" bIns="0" rtlCol="0" anchor="t"/>
           <a:lstStyle/>
           <a:p>
             <a:pPr algn="l" indent="0" marL="0">
@@ -10929,13 +10875,13 @@
       </p:sp>
       <p:sp>
         <p:nvSpPr>
-          <p:cNvPr id="7" name="mdpr:example-decks-from-mdpr-1f8782:left:block-26-block-26-block-26"/>
+          <p:cNvPr id="5" name="mdpr:example-decks-from-mdpr-1f8782:left:block-26-block-26-block-26"/>
           <p:cNvSpPr txBox="1"/>
           <p:nvPr/>
         </p:nvSpPr>
         <p:spPr>
           <a:xfrm>
-            <a:off x="896112" y="4130040"/>
+            <a:off x="896112" y="2987040"/>
             <a:ext cx="4791456" cy="762000"/>
           </a:xfrm>
           <a:prstGeom prst="rect">
@@ -10945,7 +10891,7 @@
           <a:ln/>
         </p:spPr>
         <p:txBody>
-          <a:bodyPr wrap="square" lIns="0" tIns="25400" rIns="25400" bIns="0" rtlCol="0" anchor="ctr"/>
+          <a:bodyPr wrap="square" lIns="0" tIns="25400" rIns="25400" bIns="0" rtlCol="0" anchor="t"/>
           <a:lstStyle/>
           <a:p>
             <a:pPr algn="l" indent="0" marL="0">
@@ -10971,13 +10917,13 @@
       </p:sp>
       <p:sp>
         <p:nvSpPr>
-          <p:cNvPr id="8" name="mdpr:example-decks-from-mdpr-1f8782:right:block-26-block-26"/>
+          <p:cNvPr id="6" name="mdpr:example-decks-from-mdpr-1f8782:right:block-26-block-26"/>
           <p:cNvSpPr txBox="1"/>
           <p:nvPr/>
         </p:nvSpPr>
         <p:spPr>
           <a:xfrm>
-            <a:off x="6473952" y="2819400"/>
+            <a:off x="6473952" y="1463040"/>
             <a:ext cx="4791456" cy="1097280"/>
           </a:xfrm>
           <a:prstGeom prst="rect">
@@ -10987,7 +10933,7 @@
           <a:ln/>
         </p:spPr>
         <p:txBody>
-          <a:bodyPr wrap="square" lIns="0" tIns="25400" rIns="25400" bIns="0" rtlCol="0" anchor="ctr"/>
+          <a:bodyPr wrap="square" lIns="0" tIns="25400" rIns="25400" bIns="0" rtlCol="0" anchor="t"/>
           <a:lstStyle/>
           <a:p>
             <a:pPr algn="l" indent="0" marL="0">
@@ -11013,13 +10959,13 @@
       </p:sp>
       <p:sp>
         <p:nvSpPr>
-          <p:cNvPr id="9" name="mdpr:example-decks-from-mdpr-1f8782:right:block-26-block-26"/>
+          <p:cNvPr id="7" name="mdpr:example-decks-from-mdpr-1f8782:right:block-26-block-26"/>
           <p:cNvSpPr txBox="1"/>
           <p:nvPr/>
         </p:nvSpPr>
         <p:spPr>
           <a:xfrm>
-            <a:off x="6473952" y="3916680"/>
+            <a:off x="6473952" y="2560320"/>
             <a:ext cx="4791456" cy="762000"/>
           </a:xfrm>
           <a:prstGeom prst="rect">
@@ -11029,7 +10975,7 @@
           <a:ln/>
         </p:spPr>
         <p:txBody>
-          <a:bodyPr wrap="square" lIns="0" tIns="25400" rIns="25400" bIns="0" rtlCol="0" anchor="ctr"/>
+          <a:bodyPr wrap="square" lIns="0" tIns="25400" rIns="25400" bIns="0" rtlCol="0" anchor="t"/>
           <a:lstStyle/>
           <a:p>
             <a:pPr algn="l" indent="0" marL="0">

--- a/artifacts/mdpr-vs-skill/mdpr-baseline-result.pptx
+++ b/artifacts/mdpr-vs-skill/mdpr-baseline-result.pptx
@@ -4388,7 +4388,7 @@
                 <a:ea typeface="Pretendard" pitchFamily="34" charset="-122"/>
                 <a:cs typeface="Pretendard" pitchFamily="34" charset="-120"/>
               </a:rPr>
-              <a:t>slide candidate</a:t>
+              <a:t>subsection or autosplit boundary</a:t>
             </a:r>
             <a:endParaRPr lang="en-US" sz="2200" dirty="0"/>
           </a:p>
@@ -4430,7 +4430,7 @@
                 <a:ea typeface="Pretendard" pitchFamily="34" charset="-122"/>
                 <a:cs typeface="Pretendard" pitchFamily="34" charset="-120"/>
               </a:rPr>
-              <a:t>subsection or autosplit boundary</a:t>
+              <a:t>Procedure</a:t>
             </a:r>
             <a:endParaRPr lang="en-US" sz="2200" dirty="0"/>
           </a:p>
@@ -5941,48 +5941,6 @@
                 <a:ea typeface="Pretendard" pitchFamily="34" charset="-122"/>
                 <a:cs typeface="Pretendard" pitchFamily="34" charset="-120"/>
               </a:rPr>
-              <a:t>Layout Selection Rules</a:t>
-            </a:r>
-            <a:endParaRPr lang="en-US" sz="2200" dirty="0"/>
-          </a:p>
-        </p:txBody>
-      </p:sp>
-      <p:sp>
-        <p:nvSpPr>
-          <p:cNvPr id="14" name="mdpr:1-3-c0cf7e:item-2:block-16-chunk-1"/>
-          <p:cNvSpPr txBox="1"/>
-          <p:nvPr/>
-        </p:nvSpPr>
-        <p:spPr>
-          <a:xfrm>
-            <a:off x="1133856" y="3489960"/>
-            <a:ext cx="9820656" cy="426720"/>
-          </a:xfrm>
-          <a:prstGeom prst="rect">
-            <a:avLst/>
-          </a:prstGeom>
-          <a:noFill/>
-          <a:ln/>
-        </p:spPr>
-        <p:txBody>
-          <a:bodyPr wrap="square" lIns="0" tIns="25400" rIns="25400" bIns="0" rtlCol="0" anchor="ctr"/>
-          <a:lstStyle/>
-          <a:p>
-            <a:pPr algn="ctr" indent="0" marL="0">
-              <a:lnSpc>
-                <a:spcPct val="120000"/>
-              </a:lnSpc>
-              <a:buNone/>
-            </a:pPr>
-            <a:r>
-              <a:rPr lang="en-US" sz="2200" dirty="0">
-                <a:solidFill>
-                  <a:srgbClr val="111111"/>
-                </a:solidFill>
-                <a:latin typeface="Pretendard" pitchFamily="34" charset="0"/>
-                <a:ea typeface="Pretendard" pitchFamily="34" charset="-122"/>
-                <a:cs typeface="Pretendard" pitchFamily="34" charset="-120"/>
-              </a:rPr>
               <a:t>Selection Formula</a:t>
             </a:r>
             <a:endParaRPr lang="en-US" sz="2200" dirty="0"/>
@@ -5991,13 +5949,13 @@
       </p:sp>
       <p:sp>
         <p:nvSpPr>
-          <p:cNvPr id="15" name="mdpr:1-3-c0cf7e:item-3:block-16-chunk-1"/>
+          <p:cNvPr id="14" name="mdpr:1-3-c0cf7e:item-2:block-16-chunk-1"/>
           <p:cNvSpPr txBox="1"/>
           <p:nvPr/>
         </p:nvSpPr>
         <p:spPr>
           <a:xfrm>
-            <a:off x="1133856" y="4806696"/>
+            <a:off x="1133856" y="3489960"/>
             <a:ext cx="9820656" cy="426720"/>
           </a:xfrm>
           <a:prstGeom prst="rect">
@@ -6026,6 +5984,48 @@
                 <a:cs typeface="Pretendard" pitchFamily="34" charset="-120"/>
               </a:rPr>
               <a:t>Intent Detection</a:t>
+            </a:r>
+            <a:endParaRPr lang="en-US" sz="2200" dirty="0"/>
+          </a:p>
+        </p:txBody>
+      </p:sp>
+      <p:sp>
+        <p:nvSpPr>
+          <p:cNvPr id="15" name="mdpr:1-3-c0cf7e:item-3:block-16-chunk-1"/>
+          <p:cNvSpPr txBox="1"/>
+          <p:nvPr/>
+        </p:nvSpPr>
+        <p:spPr>
+          <a:xfrm>
+            <a:off x="1133856" y="4806696"/>
+            <a:ext cx="9820656" cy="426720"/>
+          </a:xfrm>
+          <a:prstGeom prst="rect">
+            <a:avLst/>
+          </a:prstGeom>
+          <a:noFill/>
+          <a:ln/>
+        </p:spPr>
+        <p:txBody>
+          <a:bodyPr wrap="square" lIns="0" tIns="25400" rIns="25400" bIns="0" rtlCol="0" anchor="ctr"/>
+          <a:lstStyle/>
+          <a:p>
+            <a:pPr algn="ctr" indent="0" marL="0">
+              <a:lnSpc>
+                <a:spcPct val="120000"/>
+              </a:lnSpc>
+              <a:buNone/>
+            </a:pPr>
+            <a:r>
+              <a:rPr lang="en-US" sz="2200" dirty="0">
+                <a:solidFill>
+                  <a:srgbClr val="111111"/>
+                </a:solidFill>
+                <a:latin typeface="Pretendard" pitchFamily="34" charset="0"/>
+                <a:ea typeface="Pretendard" pitchFamily="34" charset="-122"/>
+                <a:cs typeface="Pretendard" pitchFamily="34" charset="-120"/>
+              </a:rPr>
+              <a:t>Count-Based Layouts</a:t>
             </a:r>
             <a:endParaRPr lang="en-US" sz="2200" dirty="0"/>
           </a:p>
@@ -6449,7 +6449,7 @@
                 <a:ea typeface="Pretendard" pitchFamily="34" charset="-122"/>
                 <a:cs typeface="Pretendard" pitchFamily="34" charset="-120"/>
               </a:rPr>
-              <a:t>Count-Based Layouts</a:t>
+              <a:t>Presets</a:t>
             </a:r>
             <a:endParaRPr lang="en-US" sz="2200" dirty="0"/>
           </a:p>
@@ -6491,7 +6491,7 @@
                 <a:ea typeface="Pretendard" pitchFamily="34" charset="-122"/>
                 <a:cs typeface="Pretendard" pitchFamily="34" charset="-120"/>
               </a:rPr>
-              <a:t>Presets</a:t>
+              <a:t>Pipeline Diagram Routing</a:t>
             </a:r>
             <a:endParaRPr lang="en-US" sz="2200" dirty="0"/>
           </a:p>
@@ -7942,48 +7942,6 @@
                 <a:ea typeface="Pretendard" pitchFamily="34" charset="-122"/>
                 <a:cs typeface="Pretendard" pitchFamily="34" charset="-120"/>
               </a:rPr>
-              <a:t>Rendering Rules</a:t>
-            </a:r>
-            <a:endParaRPr lang="en-US" sz="2200" dirty="0"/>
-          </a:p>
-        </p:txBody>
-      </p:sp>
-      <p:sp>
-        <p:nvSpPr>
-          <p:cNvPr id="14" name="mdpr:1-3-0466ef:item-2:block-20-chunk-1"/>
-          <p:cNvSpPr txBox="1"/>
-          <p:nvPr/>
-        </p:nvSpPr>
-        <p:spPr>
-          <a:xfrm>
-            <a:off x="1133856" y="3489960"/>
-            <a:ext cx="9820656" cy="426720"/>
-          </a:xfrm>
-          <a:prstGeom prst="rect">
-            <a:avLst/>
-          </a:prstGeom>
-          <a:noFill/>
-          <a:ln/>
-        </p:spPr>
-        <p:txBody>
-          <a:bodyPr wrap="square" lIns="0" tIns="25400" rIns="25400" bIns="0" rtlCol="0" anchor="ctr"/>
-          <a:lstStyle/>
-          <a:p>
-            <a:pPr algn="ctr" indent="0" marL="0">
-              <a:lnSpc>
-                <a:spcPct val="120000"/>
-              </a:lnSpc>
-              <a:buNone/>
-            </a:pPr>
-            <a:r>
-              <a:rPr lang="en-US" sz="2200" dirty="0">
-                <a:solidFill>
-                  <a:srgbClr val="111111"/>
-                </a:solidFill>
-                <a:latin typeface="Pretendard" pitchFamily="34" charset="0"/>
-                <a:ea typeface="Pretendard" pitchFamily="34" charset="-122"/>
-                <a:cs typeface="Pretendard" pitchFamily="34" charset="-120"/>
-              </a:rPr>
               <a:t>Shared Renderer Contract</a:t>
             </a:r>
             <a:endParaRPr lang="en-US" sz="2200" dirty="0"/>
@@ -7992,13 +7950,13 @@
       </p:sp>
       <p:sp>
         <p:nvSpPr>
-          <p:cNvPr id="15" name="mdpr:1-3-0466ef:item-3:block-20-chunk-1"/>
+          <p:cNvPr id="14" name="mdpr:1-3-0466ef:item-2:block-20-chunk-1"/>
           <p:cNvSpPr txBox="1"/>
           <p:nvPr/>
         </p:nvSpPr>
         <p:spPr>
           <a:xfrm>
-            <a:off x="1133856" y="4806696"/>
+            <a:off x="1133856" y="3489960"/>
             <a:ext cx="9820656" cy="426720"/>
           </a:xfrm>
           <a:prstGeom prst="rect">
@@ -8027,6 +7985,48 @@
                 <a:cs typeface="Pretendard" pitchFamily="34" charset="-120"/>
               </a:rPr>
               <a:t>PPTX Renderer</a:t>
+            </a:r>
+            <a:endParaRPr lang="en-US" sz="2200" dirty="0"/>
+          </a:p>
+        </p:txBody>
+      </p:sp>
+      <p:sp>
+        <p:nvSpPr>
+          <p:cNvPr id="15" name="mdpr:1-3-0466ef:item-3:block-20-chunk-1"/>
+          <p:cNvSpPr txBox="1"/>
+          <p:nvPr/>
+        </p:nvSpPr>
+        <p:spPr>
+          <a:xfrm>
+            <a:off x="1133856" y="4806696"/>
+            <a:ext cx="9820656" cy="426720"/>
+          </a:xfrm>
+          <a:prstGeom prst="rect">
+            <a:avLst/>
+          </a:prstGeom>
+          <a:noFill/>
+          <a:ln/>
+        </p:spPr>
+        <p:txBody>
+          <a:bodyPr wrap="square" lIns="0" tIns="25400" rIns="25400" bIns="0" rtlCol="0" anchor="ctr"/>
+          <a:lstStyle/>
+          <a:p>
+            <a:pPr algn="ctr" indent="0" marL="0">
+              <a:lnSpc>
+                <a:spcPct val="120000"/>
+              </a:lnSpc>
+              <a:buNone/>
+            </a:pPr>
+            <a:r>
+              <a:rPr lang="en-US" sz="2200" dirty="0">
+                <a:solidFill>
+                  <a:srgbClr val="111111"/>
+                </a:solidFill>
+                <a:latin typeface="Pretendard" pitchFamily="34" charset="0"/>
+                <a:ea typeface="Pretendard" pitchFamily="34" charset="-122"/>
+                <a:cs typeface="Pretendard" pitchFamily="34" charset="-120"/>
+              </a:rPr>
+              <a:t>Decoration Styles</a:t>
             </a:r>
             <a:endParaRPr lang="en-US" sz="2200" dirty="0"/>
           </a:p>
@@ -8450,7 +8450,7 @@
                 <a:ea typeface="Pretendard" pitchFamily="34" charset="-122"/>
                 <a:cs typeface="Pretendard" pitchFamily="34" charset="-120"/>
               </a:rPr>
-              <a:t>Decoration Styles</a:t>
+              <a:t>Color and Theme Policy</a:t>
             </a:r>
             <a:endParaRPr lang="en-US" sz="2200" dirty="0"/>
           </a:p>
@@ -8492,7 +8492,7 @@
                 <a:ea typeface="Pretendard" pitchFamily="34" charset="-122"/>
                 <a:cs typeface="Pretendard" pitchFamily="34" charset="-120"/>
               </a:rPr>
-              <a:t>Color and Theme Policy</a:t>
+              <a:t>Surface Policy</a:t>
             </a:r>
             <a:endParaRPr lang="en-US" sz="2200" dirty="0"/>
           </a:p>
@@ -9180,48 +9180,6 @@
                 <a:ea typeface="Pretendard" pitchFamily="34" charset="-122"/>
                 <a:cs typeface="Pretendard" pitchFamily="34" charset="-120"/>
               </a:rPr>
-              <a:t>Validation and Overflow Policy</a:t>
-            </a:r>
-            <a:endParaRPr lang="en-US" sz="2200" dirty="0"/>
-          </a:p>
-        </p:txBody>
-      </p:sp>
-      <p:sp>
-        <p:nvSpPr>
-          <p:cNvPr id="14" name="mdpr:1-3-4b2f30:item-2:block-23-chunk-1"/>
-          <p:cNvSpPr txBox="1"/>
-          <p:nvPr/>
-        </p:nvSpPr>
-        <p:spPr>
-          <a:xfrm>
-            <a:off x="1133856" y="3489960"/>
-            <a:ext cx="9820656" cy="426720"/>
-          </a:xfrm>
-          <a:prstGeom prst="rect">
-            <a:avLst/>
-          </a:prstGeom>
-          <a:noFill/>
-          <a:ln/>
-        </p:spPr>
-        <p:txBody>
-          <a:bodyPr wrap="square" lIns="0" tIns="25400" rIns="25400" bIns="0" rtlCol="0" anchor="ctr"/>
-          <a:lstStyle/>
-          <a:p>
-            <a:pPr algn="ctr" indent="0" marL="0">
-              <a:lnSpc>
-                <a:spcPct val="120000"/>
-              </a:lnSpc>
-              <a:buNone/>
-            </a:pPr>
-            <a:r>
-              <a:rPr lang="en-US" sz="2200" dirty="0">
-                <a:solidFill>
-                  <a:srgbClr val="111111"/>
-                </a:solidFill>
-                <a:latin typeface="Pretendard" pitchFamily="34" charset="0"/>
-                <a:ea typeface="Pretendard" pitchFamily="34" charset="-122"/>
-                <a:cs typeface="Pretendard" pitchFamily="34" charset="-120"/>
-              </a:rPr>
               <a:t>Validation Checks</a:t>
             </a:r>
             <a:endParaRPr lang="en-US" sz="2200" dirty="0"/>
@@ -9230,13 +9188,13 @@
       </p:sp>
       <p:sp>
         <p:nvSpPr>
-          <p:cNvPr id="15" name="mdpr:1-3-4b2f30:item-3:block-23-chunk-1"/>
+          <p:cNvPr id="14" name="mdpr:1-3-4b2f30:item-2:block-23-chunk-1"/>
           <p:cNvSpPr txBox="1"/>
           <p:nvPr/>
         </p:nvSpPr>
         <p:spPr>
           <a:xfrm>
-            <a:off x="1133856" y="4806696"/>
+            <a:off x="1133856" y="3489960"/>
             <a:ext cx="9820656" cy="426720"/>
           </a:xfrm>
           <a:prstGeom prst="rect">
@@ -9265,6 +9223,48 @@
                 <a:cs typeface="Pretendard" pitchFamily="34" charset="-120"/>
               </a:rPr>
               <a:t>Overflow Resolution Order</a:t>
+            </a:r>
+            <a:endParaRPr lang="en-US" sz="2200" dirty="0"/>
+          </a:p>
+        </p:txBody>
+      </p:sp>
+      <p:sp>
+        <p:nvSpPr>
+          <p:cNvPr id="15" name="mdpr:1-3-4b2f30:item-3:block-23-chunk-1"/>
+          <p:cNvSpPr txBox="1"/>
+          <p:nvPr/>
+        </p:nvSpPr>
+        <p:spPr>
+          <a:xfrm>
+            <a:off x="1133856" y="4806696"/>
+            <a:ext cx="9820656" cy="426720"/>
+          </a:xfrm>
+          <a:prstGeom prst="rect">
+            <a:avLst/>
+          </a:prstGeom>
+          <a:noFill/>
+          <a:ln/>
+        </p:spPr>
+        <p:txBody>
+          <a:bodyPr wrap="square" lIns="0" tIns="25400" rIns="25400" bIns="0" rtlCol="0" anchor="ctr"/>
+          <a:lstStyle/>
+          <a:p>
+            <a:pPr algn="ctr" indent="0" marL="0">
+              <a:lnSpc>
+                <a:spcPct val="120000"/>
+              </a:lnSpc>
+              <a:buNone/>
+            </a:pPr>
+            <a:r>
+              <a:rPr lang="en-US" sz="2200" dirty="0">
+                <a:solidFill>
+                  <a:srgbClr val="111111"/>
+                </a:solidFill>
+                <a:latin typeface="Pretendard" pitchFamily="34" charset="0"/>
+                <a:ea typeface="Pretendard" pitchFamily="34" charset="-122"/>
+                <a:cs typeface="Pretendard" pitchFamily="34" charset="-120"/>
+              </a:rPr>
+              <a:t>Diagnostics</a:t>
             </a:r>
             <a:endParaRPr lang="en-US" sz="2200" dirty="0"/>
           </a:p>
@@ -9688,7 +9688,7 @@
                 <a:ea typeface="Pretendard" pitchFamily="34" charset="-122"/>
                 <a:cs typeface="Pretendard" pitchFamily="34" charset="-120"/>
               </a:rPr>
-              <a:t>Diagnostics</a:t>
+              <a:t>Text Normalization</a:t>
             </a:r>
             <a:endParaRPr lang="en-US" sz="2200" dirty="0"/>
           </a:p>
@@ -9730,7 +9730,7 @@
                 <a:ea typeface="Pretendard" pitchFamily="34" charset="-122"/>
                 <a:cs typeface="Pretendard" pitchFamily="34" charset="-120"/>
               </a:rPr>
-              <a:t>Text Normalization</a:t>
+              <a:t>Title Regions</a:t>
             </a:r>
             <a:endParaRPr lang="en-US" sz="2200" dirty="0"/>
           </a:p>
@@ -23948,48 +23948,6 @@
                 <a:ea typeface="Pretendard" pitchFamily="34" charset="-122"/>
                 <a:cs typeface="Pretendard" pitchFamily="34" charset="-120"/>
               </a:rPr>
-              <a:t>Architecture</a:t>
-            </a:r>
-            <a:endParaRPr lang="en-US" sz="2200" dirty="0"/>
-          </a:p>
-        </p:txBody>
-      </p:sp>
-      <p:sp>
-        <p:nvSpPr>
-          <p:cNvPr id="16" name="mdpr:1-2-c51ee9:item-2:block-9-chunk-1"/>
-          <p:cNvSpPr txBox="1"/>
-          <p:nvPr/>
-        </p:nvSpPr>
-        <p:spPr>
-          <a:xfrm>
-            <a:off x="6528816" y="2209800"/>
-            <a:ext cx="4608576" cy="426720"/>
-          </a:xfrm>
-          <a:prstGeom prst="rect">
-            <a:avLst/>
-          </a:prstGeom>
-          <a:noFill/>
-          <a:ln/>
-        </p:spPr>
-        <p:txBody>
-          <a:bodyPr wrap="square" lIns="0" tIns="25400" rIns="25400" bIns="0" rtlCol="0" anchor="ctr"/>
-          <a:lstStyle/>
-          <a:p>
-            <a:pPr algn="ctr" indent="0" marL="0">
-              <a:lnSpc>
-                <a:spcPct val="120000"/>
-              </a:lnSpc>
-              <a:buNone/>
-            </a:pPr>
-            <a:r>
-              <a:rPr lang="en-US" sz="2200" dirty="0">
-                <a:solidFill>
-                  <a:srgbClr val="111111"/>
-                </a:solidFill>
-                <a:latin typeface="Pretendard" pitchFamily="34" charset="0"/>
-                <a:ea typeface="Pretendard" pitchFamily="34" charset="-122"/>
-                <a:cs typeface="Pretendard" pitchFamily="34" charset="-120"/>
-              </a:rPr>
               <a:t>Flow</a:t>
             </a:r>
             <a:endParaRPr lang="en-US" sz="2200" dirty="0"/>
@@ -23998,13 +23956,13 @@
       </p:sp>
       <p:sp>
         <p:nvSpPr>
-          <p:cNvPr id="17" name="mdpr:1-2-c51ee9:item-3:block-9-chunk-1"/>
+          <p:cNvPr id="16" name="mdpr:1-2-c51ee9:item-2:block-9-chunk-1"/>
           <p:cNvSpPr txBox="1"/>
           <p:nvPr/>
         </p:nvSpPr>
         <p:spPr>
           <a:xfrm>
-            <a:off x="1042416" y="4495800"/>
+            <a:off x="6528816" y="2209800"/>
             <a:ext cx="4608576" cy="426720"/>
           </a:xfrm>
           <a:prstGeom prst="rect">
@@ -24040,13 +23998,13 @@
       </p:sp>
       <p:sp>
         <p:nvSpPr>
-          <p:cNvPr id="18" name="mdpr:1-2-c51ee9:item-4:block-9-chunk-1"/>
+          <p:cNvPr id="17" name="mdpr:1-2-c51ee9:item-3:block-9-chunk-1"/>
           <p:cNvSpPr txBox="1"/>
           <p:nvPr/>
         </p:nvSpPr>
         <p:spPr>
           <a:xfrm>
-            <a:off x="6528816" y="4495800"/>
+            <a:off x="1042416" y="4495800"/>
             <a:ext cx="4608576" cy="426720"/>
           </a:xfrm>
           <a:prstGeom prst="rect">
@@ -24075,6 +24033,48 @@
                 <a:cs typeface="Pretendard" pitchFamily="34" charset="-120"/>
               </a:rPr>
               <a:t>Design Principles</a:t>
+            </a:r>
+            <a:endParaRPr lang="en-US" sz="2200" dirty="0"/>
+          </a:p>
+        </p:txBody>
+      </p:sp>
+      <p:sp>
+        <p:nvSpPr>
+          <p:cNvPr id="18" name="mdpr:1-2-c51ee9:item-4:block-9-chunk-1"/>
+          <p:cNvSpPr txBox="1"/>
+          <p:nvPr/>
+        </p:nvSpPr>
+        <p:spPr>
+          <a:xfrm>
+            <a:off x="6528816" y="4328160"/>
+            <a:ext cx="4608576" cy="762000"/>
+          </a:xfrm>
+          <a:prstGeom prst="rect">
+            <a:avLst/>
+          </a:prstGeom>
+          <a:noFill/>
+          <a:ln/>
+        </p:spPr>
+        <p:txBody>
+          <a:bodyPr wrap="square" lIns="0" tIns="25400" rIns="25400" bIns="0" rtlCol="0" anchor="ctr"/>
+          <a:lstStyle/>
+          <a:p>
+            <a:pPr algn="ctr" indent="0" marL="0">
+              <a:lnSpc>
+                <a:spcPct val="120000"/>
+              </a:lnSpc>
+              <a:buNone/>
+            </a:pPr>
+            <a:r>
+              <a:rPr lang="en-US" sz="2200" dirty="0">
+                <a:solidFill>
+                  <a:srgbClr val="111111"/>
+                </a:solidFill>
+                <a:latin typeface="Pretendard" pitchFamily="34" charset="0"/>
+                <a:ea typeface="Pretendard" pitchFamily="34" charset="-122"/>
+                <a:cs typeface="Pretendard" pitchFamily="34" charset="-120"/>
+              </a:rPr>
+              <a:t>core does not know renderers. It emits Presentation IR only.</a:t>
             </a:r>
             <a:endParaRPr lang="en-US" sz="2200" dirty="0"/>
           </a:p>
@@ -25748,48 +25748,6 @@
                 <a:ea typeface="Pretendard" pitchFamily="34" charset="-122"/>
                 <a:cs typeface="Pretendard" pitchFamily="34" charset="-120"/>
               </a:rPr>
-              <a:t>Page Splitting Rules</a:t>
-            </a:r>
-            <a:endParaRPr lang="en-US" sz="2200" dirty="0"/>
-          </a:p>
-        </p:txBody>
-      </p:sp>
-      <p:sp>
-        <p:nvSpPr>
-          <p:cNvPr id="14" name="mdpr:1-3-c49d80:item-2:block-12-chunk-1"/>
-          <p:cNvSpPr txBox="1"/>
-          <p:nvPr/>
-        </p:nvSpPr>
-        <p:spPr>
-          <a:xfrm>
-            <a:off x="1133856" y="3489960"/>
-            <a:ext cx="9820656" cy="426720"/>
-          </a:xfrm>
-          <a:prstGeom prst="rect">
-            <a:avLst/>
-          </a:prstGeom>
-          <a:noFill/>
-          <a:ln/>
-        </p:spPr>
-        <p:txBody>
-          <a:bodyPr wrap="square" lIns="0" tIns="25400" rIns="25400" bIns="0" rtlCol="0" anchor="ctr"/>
-          <a:lstStyle/>
-          <a:p>
-            <a:pPr algn="ctr" indent="0" marL="0">
-              <a:lnSpc>
-                <a:spcPct val="120000"/>
-              </a:lnSpc>
-              <a:buNone/>
-            </a:pPr>
-            <a:r>
-              <a:rPr lang="en-US" sz="2200" dirty="0">
-                <a:solidFill>
-                  <a:srgbClr val="111111"/>
-                </a:solidFill>
-                <a:latin typeface="Pretendard" pitchFamily="34" charset="0"/>
-                <a:ea typeface="Pretendard" pitchFamily="34" charset="-122"/>
-                <a:cs typeface="Pretendard" pitchFamily="34" charset="-120"/>
-              </a:rPr>
               <a:t>Heading Rules</a:t>
             </a:r>
             <a:endParaRPr lang="en-US" sz="2200" dirty="0"/>
@@ -25798,13 +25756,13 @@
       </p:sp>
       <p:sp>
         <p:nvSpPr>
-          <p:cNvPr id="15" name="mdpr:1-3-c49d80:item-3:block-12-chunk-1"/>
+          <p:cNvPr id="14" name="mdpr:1-3-c49d80:item-2:block-12-chunk-1"/>
           <p:cNvSpPr txBox="1"/>
           <p:nvPr/>
         </p:nvSpPr>
         <p:spPr>
           <a:xfrm>
-            <a:off x="1133856" y="4806696"/>
+            <a:off x="1133856" y="3489960"/>
             <a:ext cx="9820656" cy="426720"/>
           </a:xfrm>
           <a:prstGeom prst="rect">
@@ -25833,6 +25791,48 @@
                 <a:cs typeface="Pretendard" pitchFamily="34" charset="-120"/>
               </a:rPr>
               <a:t>cover or section</a:t>
+            </a:r>
+            <a:endParaRPr lang="en-US" sz="2200" dirty="0"/>
+          </a:p>
+        </p:txBody>
+      </p:sp>
+      <p:sp>
+        <p:nvSpPr>
+          <p:cNvPr id="15" name="mdpr:1-3-c49d80:item-3:block-12-chunk-1"/>
+          <p:cNvSpPr txBox="1"/>
+          <p:nvPr/>
+        </p:nvSpPr>
+        <p:spPr>
+          <a:xfrm>
+            <a:off x="1133856" y="4806696"/>
+            <a:ext cx="9820656" cy="426720"/>
+          </a:xfrm>
+          <a:prstGeom prst="rect">
+            <a:avLst/>
+          </a:prstGeom>
+          <a:noFill/>
+          <a:ln/>
+        </p:spPr>
+        <p:txBody>
+          <a:bodyPr wrap="square" lIns="0" tIns="25400" rIns="25400" bIns="0" rtlCol="0" anchor="ctr"/>
+          <a:lstStyle/>
+          <a:p>
+            <a:pPr algn="ctr" indent="0" marL="0">
+              <a:lnSpc>
+                <a:spcPct val="120000"/>
+              </a:lnSpc>
+              <a:buNone/>
+            </a:pPr>
+            <a:r>
+              <a:rPr lang="en-US" sz="2200" dirty="0">
+                <a:solidFill>
+                  <a:srgbClr val="111111"/>
+                </a:solidFill>
+                <a:latin typeface="Pretendard" pitchFamily="34" charset="0"/>
+                <a:ea typeface="Pretendard" pitchFamily="34" charset="-122"/>
+                <a:cs typeface="Pretendard" pitchFamily="34" charset="-120"/>
+              </a:rPr>
+              <a:t>slide candidate</a:t>
             </a:r>
             <a:endParaRPr lang="en-US" sz="2200" dirty="0"/>
           </a:p>

--- a/artifacts/mdpr-vs-skill/mdpr-baseline-result.pptx
+++ b/artifacts/mdpr-vs-skill/mdpr-baseline-result.pptx
@@ -16218,7 +16218,7 @@
                 <a:ea typeface="Pretendard" pitchFamily="34" charset="-122"/>
                 <a:cs typeface="Pretendard" pitchFamily="34" charset="-120"/>
               </a:rPr>
-              <a:t>01  Example: examples/basic/deck.md</a:t>
+              <a:t>09  Example: examples/basic/deck.md</a:t>
             </a:r>
             <a:endParaRPr lang="en-US" sz="1800" dirty="0"/>
           </a:p>
@@ -16260,7 +16260,7 @@
                 <a:ea typeface="Pretendard" pitchFamily="34" charset="-122"/>
                 <a:cs typeface="Pretendard" pitchFamily="34" charset="-120"/>
               </a:rPr>
-              <a:t>02  Example: examples/comparison/deck.md</a:t>
+              <a:t>10  Example: examples/comparison/deck.md</a:t>
             </a:r>
             <a:endParaRPr lang="en-US" sz="1800" dirty="0"/>
           </a:p>
@@ -16302,7 +16302,7 @@
                 <a:ea typeface="Pretendard" pitchFamily="34" charset="-122"/>
                 <a:cs typeface="Pretendard" pitchFamily="34" charset="-120"/>
               </a:rPr>
-              <a:t>03  Example: examples/pipeline/deck.md</a:t>
+              <a:t>11  Example: examples/pipeline/deck.md</a:t>
             </a:r>
             <a:endParaRPr lang="en-US" sz="1800" dirty="0"/>
           </a:p>
@@ -16344,7 +16344,7 @@
                 <a:ea typeface="Pretendard" pitchFamily="34" charset="-122"/>
                 <a:cs typeface="Pretendard" pitchFamily="34" charset="-120"/>
               </a:rPr>
-              <a:t>04  Example: examples/diagram-arrangements/deck.md</a:t>
+              <a:t>12  Example: examples/diagram-arrangements/deck.md</a:t>
             </a:r>
             <a:endParaRPr lang="en-US" sz="1800" dirty="0"/>
           </a:p>
@@ -16386,7 +16386,7 @@
                 <a:ea typeface="Pretendard" pitchFamily="34" charset="-122"/>
                 <a:cs typeface="Pretendard" pitchFamily="34" charset="-120"/>
               </a:rPr>
-              <a:t>05  Example: examples/five-methods/deck.md</a:t>
+              <a:t>13  Example: examples/five-methods/deck.md</a:t>
             </a:r>
             <a:endParaRPr lang="en-US" sz="1800" dirty="0"/>
           </a:p>
@@ -16428,7 +16428,7 @@
                 <a:ea typeface="Pretendard" pitchFamily="34" charset="-122"/>
                 <a:cs typeface="Pretendard" pitchFamily="34" charset="-120"/>
               </a:rPr>
-              <a:t>06  Example: examples/theme-preview-en/deck.md</a:t>
+              <a:t>14  Example: examples/theme-preview-en/deck.md</a:t>
             </a:r>
             <a:endParaRPr lang="en-US" sz="1800" dirty="0"/>
           </a:p>
@@ -16470,7 +16470,7 @@
                 <a:ea typeface="Pretendard" pitchFamily="34" charset="-122"/>
                 <a:cs typeface="Pretendard" pitchFamily="34" charset="-120"/>
               </a:rPr>
-              <a:t>07  Current skill output expectations</a:t>
+              <a:t>15  Current skill output expectations</a:t>
             </a:r>
             <a:endParaRPr lang="en-US" sz="1800" dirty="0"/>
           </a:p>
@@ -16512,7 +16512,7 @@
                 <a:ea typeface="Pretendard" pitchFamily="34" charset="-122"/>
                 <a:cs typeface="Pretendard" pitchFamily="34" charset="-120"/>
               </a:rPr>
-              <a:t>08  End state</a:t>
+              <a:t>16  End state</a:t>
             </a:r>
             <a:endParaRPr lang="en-US" sz="1800" dirty="0"/>
           </a:p>

--- a/artifacts/mdpr-vs-skill/mdpr-baseline-result.pptx
+++ b/artifacts/mdpr-vs-skill/mdpr-baseline-result.pptx
@@ -8594,8 +8594,8 @@
         </p:blipFill>
         <p:spPr>
           <a:xfrm>
-            <a:off x="777240" y="1417320"/>
-            <a:ext cx="10652760" cy="4800600"/>
+            <a:off x="777240" y="3035808"/>
+            <a:ext cx="10652760" cy="1572768"/>
           </a:xfrm>
           <a:prstGeom prst="rect">
             <a:avLst/>
@@ -8610,8 +8610,8 @@
         </p:nvSpPr>
         <p:spPr>
           <a:xfrm>
-            <a:off x="777240" y="1417320"/>
-            <a:ext cx="10652760" cy="4800600"/>
+            <a:off x="777240" y="3035808"/>
+            <a:ext cx="10652760" cy="1572768"/>
           </a:xfrm>
           <a:prstGeom prst="rect">
             <a:avLst/>
@@ -8688,8 +8688,8 @@
         </p:nvSpPr>
         <p:spPr>
           <a:xfrm>
-            <a:off x="941832" y="1563624"/>
-            <a:ext cx="10323576" cy="4507992"/>
+            <a:off x="941832" y="3182112"/>
+            <a:ext cx="10323576" cy="1280160"/>
           </a:xfrm>
           <a:prstGeom prst="rect">
             <a:avLst/>
@@ -10487,8 +10487,8 @@
         </p:blipFill>
         <p:spPr>
           <a:xfrm>
-            <a:off x="777240" y="1417320"/>
-            <a:ext cx="10652760" cy="4800600"/>
+            <a:off x="777240" y="2560320"/>
+            <a:ext cx="10652760" cy="2505456"/>
           </a:xfrm>
           <a:prstGeom prst="rect">
             <a:avLst/>
@@ -10503,8 +10503,8 @@
         </p:nvSpPr>
         <p:spPr>
           <a:xfrm>
-            <a:off x="777240" y="1417320"/>
-            <a:ext cx="10652760" cy="4800600"/>
+            <a:off x="777240" y="2560320"/>
+            <a:ext cx="10652760" cy="2505456"/>
           </a:xfrm>
           <a:prstGeom prst="rect">
             <a:avLst/>
@@ -10581,8 +10581,8 @@
         </p:nvSpPr>
         <p:spPr>
           <a:xfrm>
-            <a:off x="941832" y="1563624"/>
-            <a:ext cx="10323576" cy="4507992"/>
+            <a:off x="941832" y="2706624"/>
+            <a:ext cx="10323576" cy="2212848"/>
           </a:xfrm>
           <a:prstGeom prst="rect">
             <a:avLst/>

--- a/artifacts/mdpr-vs-skill/mdpr-baseline-result.pptx
+++ b/artifacts/mdpr-vs-skill/mdpr-baseline-result.pptx
@@ -4002,243 +4002,16 @@
           <a:chExt cx="0" cy="0"/>
         </a:xfrm>
       </p:grpSpPr>
-      <p:pic>
-        <p:nvPicPr>
-          <p:cNvPr id="2" name="Image 0" descr="preencoded.png">    </p:cNvPr>
-          <p:cNvPicPr>
-            <a:picLocks noChangeAspect="1"/>
-          </p:cNvPicPr>
-          <p:nvPr/>
-        </p:nvPicPr>
-        <p:blipFill>
-          <a:blip r:embed="rId1">
-            <a:extLst>
-              <a:ext uri="{96DAC541-7B7A-43D3-8B79-37D633B846F1}">
-                <asvg:svgBlip xmlns:asvg="http://schemas.microsoft.com/office/drawing/2016/SVG/main" r:embed="rId2"/>
-              </a:ext>
-            </a:extLst>
-          </a:blip>
-          <a:stretch>
-            <a:fillRect/>
-          </a:stretch>
-        </p:blipFill>
-        <p:spPr>
-          <a:xfrm>
-            <a:off x="914400" y="1865376"/>
-            <a:ext cx="10241280" cy="1024128"/>
-          </a:xfrm>
-          <a:prstGeom prst="rect">
-            <a:avLst/>
-          </a:prstGeom>
-        </p:spPr>
-      </p:pic>
-      <p:sp>
-        <p:nvSpPr>
-          <p:cNvPr id="3" name="Shape 0"/>
+      <p:sp>
+        <p:nvSpPr>
+          <p:cNvPr id="2" name="Shape 0"/>
           <p:cNvSpPr/>
           <p:nvPr/>
         </p:nvSpPr>
         <p:spPr>
           <a:xfrm>
-            <a:off x="914400" y="1865376"/>
-            <a:ext cx="10241280" cy="1024128"/>
-          </a:xfrm>
-          <a:prstGeom prst="rect">
-            <a:avLst/>
-          </a:prstGeom>
-          <a:solidFill>
-            <a:srgbClr val="FFFFFF">
-              <a:alpha val="0"/>
-            </a:srgbClr>
-          </a:solidFill>
-          <a:ln w="12700">
-            <a:solidFill>
-              <a:srgbClr val="E2E8F0">
-                <a:alpha val="0"/>
-              </a:srgbClr>
-            </a:solidFill>
-            <a:prstDash val="solid"/>
-          </a:ln>
-          <a:effectLst>
-            <a:outerShdw sx="100000" sy="100000" kx="0" ky="0" algn="bl" rotWithShape="0" blurRad="12700" dist="50800" dir="2700000">
-              <a:srgbClr val="000000">
-                <a:alpha val="8000"/>
-              </a:srgbClr>
-            </a:outerShdw>
-          </a:effectLst>
-        </p:spPr>
-      </p:sp>
-      <p:pic>
-        <p:nvPicPr>
-          <p:cNvPr id="4" name="Image 1" descr="preencoded.png">    </p:cNvPr>
-          <p:cNvPicPr>
-            <a:picLocks noChangeAspect="1"/>
-          </p:cNvPicPr>
-          <p:nvPr/>
-        </p:nvPicPr>
-        <p:blipFill>
-          <a:blip r:embed="rId3">
-            <a:extLst>
-              <a:ext uri="{96DAC541-7B7A-43D3-8B79-37D633B846F1}">
-                <asvg:svgBlip xmlns:asvg="http://schemas.microsoft.com/office/drawing/2016/SVG/main" r:embed="rId4"/>
-              </a:ext>
-            </a:extLst>
-          </a:blip>
-          <a:stretch>
-            <a:fillRect/>
-          </a:stretch>
-        </p:blipFill>
-        <p:spPr>
-          <a:xfrm>
-            <a:off x="914400" y="3191256"/>
-            <a:ext cx="10241280" cy="1024128"/>
-          </a:xfrm>
-          <a:prstGeom prst="rect">
-            <a:avLst/>
-          </a:prstGeom>
-        </p:spPr>
-      </p:pic>
-      <p:sp>
-        <p:nvSpPr>
-          <p:cNvPr id="5" name="Shape 1"/>
-          <p:cNvSpPr/>
-          <p:nvPr/>
-        </p:nvSpPr>
-        <p:spPr>
-          <a:xfrm>
-            <a:off x="914400" y="3191256"/>
-            <a:ext cx="10241280" cy="1024128"/>
-          </a:xfrm>
-          <a:prstGeom prst="rect">
-            <a:avLst/>
-          </a:prstGeom>
-          <a:solidFill>
-            <a:srgbClr val="FFFFFF">
-              <a:alpha val="0"/>
-            </a:srgbClr>
-          </a:solidFill>
-          <a:ln w="12700">
-            <a:solidFill>
-              <a:srgbClr val="E2E8F0">
-                <a:alpha val="0"/>
-              </a:srgbClr>
-            </a:solidFill>
-            <a:prstDash val="solid"/>
-          </a:ln>
-          <a:effectLst>
-            <a:outerShdw sx="100000" sy="100000" kx="0" ky="0" algn="bl" rotWithShape="0" blurRad="12700" dist="50800" dir="2700000">
-              <a:srgbClr val="000000">
-                <a:alpha val="8000"/>
-              </a:srgbClr>
-            </a:outerShdw>
-          </a:effectLst>
-        </p:spPr>
-      </p:sp>
-      <p:pic>
-        <p:nvPicPr>
-          <p:cNvPr id="6" name="Image 2" descr="preencoded.png">    </p:cNvPr>
-          <p:cNvPicPr>
-            <a:picLocks noChangeAspect="1"/>
-          </p:cNvPicPr>
-          <p:nvPr/>
-        </p:nvPicPr>
-        <p:blipFill>
-          <a:blip r:embed="rId5">
-            <a:extLst>
-              <a:ext uri="{96DAC541-7B7A-43D3-8B79-37D633B846F1}">
-                <asvg:svgBlip xmlns:asvg="http://schemas.microsoft.com/office/drawing/2016/SVG/main" r:embed="rId6"/>
-              </a:ext>
-            </a:extLst>
-          </a:blip>
-          <a:stretch>
-            <a:fillRect/>
-          </a:stretch>
-        </p:blipFill>
-        <p:spPr>
-          <a:xfrm>
-            <a:off x="914400" y="4507992"/>
-            <a:ext cx="10241280" cy="1024128"/>
-          </a:xfrm>
-          <a:prstGeom prst="rect">
-            <a:avLst/>
-          </a:prstGeom>
-        </p:spPr>
-      </p:pic>
-      <p:sp>
-        <p:nvSpPr>
-          <p:cNvPr id="7" name="Shape 2"/>
-          <p:cNvSpPr/>
-          <p:nvPr/>
-        </p:nvSpPr>
-        <p:spPr>
-          <a:xfrm>
-            <a:off x="914400" y="4507992"/>
-            <a:ext cx="10241280" cy="1024128"/>
-          </a:xfrm>
-          <a:prstGeom prst="rect">
-            <a:avLst/>
-          </a:prstGeom>
-          <a:solidFill>
-            <a:srgbClr val="FFFFFF">
-              <a:alpha val="0"/>
-            </a:srgbClr>
-          </a:solidFill>
-          <a:ln w="12700">
-            <a:solidFill>
-              <a:srgbClr val="E2E8F0">
-                <a:alpha val="0"/>
-              </a:srgbClr>
-            </a:solidFill>
-            <a:prstDash val="solid"/>
-          </a:ln>
-          <a:effectLst>
-            <a:outerShdw sx="100000" sy="100000" kx="0" ky="0" algn="bl" rotWithShape="0" blurRad="12700" dist="50800" dir="2700000">
-              <a:srgbClr val="000000">
-                <a:alpha val="8000"/>
-              </a:srgbClr>
-            </a:outerShdw>
-          </a:effectLst>
-        </p:spPr>
-      </p:sp>
-      <p:sp>
-        <p:nvSpPr>
-          <p:cNvPr id="8" name="Shape 3"/>
-          <p:cNvSpPr/>
-          <p:nvPr/>
-        </p:nvSpPr>
-        <p:spPr>
-          <a:xfrm>
-            <a:off x="786384" y="1956816"/>
-            <a:ext cx="32004" cy="3483864"/>
-          </a:xfrm>
-          <a:prstGeom prst="rect">
-            <a:avLst/>
-          </a:prstGeom>
-          <a:solidFill>
-            <a:srgbClr val="DBEAFE">
-              <a:alpha val="80000"/>
-            </a:srgbClr>
-          </a:solidFill>
-          <a:ln w="12700">
-            <a:solidFill>
-              <a:srgbClr val="DBEAFE">
-                <a:alpha val="0"/>
-              </a:srgbClr>
-            </a:solidFill>
-            <a:prstDash val="solid"/>
-          </a:ln>
-        </p:spPr>
-      </p:sp>
-      <p:sp>
-        <p:nvSpPr>
-          <p:cNvPr id="9" name="Shape 4"/>
-          <p:cNvSpPr/>
-          <p:nvPr/>
-        </p:nvSpPr>
-        <p:spPr>
-          <a:xfrm>
-            <a:off x="914400" y="1865376"/>
-            <a:ext cx="73152" cy="1024128"/>
+            <a:off x="822960" y="1938528"/>
+            <a:ext cx="73152" cy="2514600"/>
           </a:xfrm>
           <a:prstGeom prst="rect">
             <a:avLst/>
@@ -4258,14 +4031,14 @@
       </p:sp>
       <p:sp>
         <p:nvSpPr>
-          <p:cNvPr id="10" name="Shape 5"/>
+          <p:cNvPr id="3" name="Shape 1"/>
           <p:cNvSpPr/>
           <p:nvPr/>
         </p:nvSpPr>
         <p:spPr>
           <a:xfrm>
-            <a:off x="914400" y="3191256"/>
-            <a:ext cx="73152" cy="1024128"/>
+            <a:off x="4343400" y="1938528"/>
+            <a:ext cx="73152" cy="2514600"/>
           </a:xfrm>
           <a:prstGeom prst="rect">
             <a:avLst/>
@@ -4285,14 +4058,14 @@
       </p:sp>
       <p:sp>
         <p:nvSpPr>
-          <p:cNvPr id="11" name="Shape 6"/>
+          <p:cNvPr id="4" name="Shape 2"/>
           <p:cNvSpPr/>
           <p:nvPr/>
         </p:nvSpPr>
         <p:spPr>
           <a:xfrm>
-            <a:off x="914400" y="4507992"/>
-            <a:ext cx="73152" cy="1024128"/>
+            <a:off x="7863840" y="1938528"/>
+            <a:ext cx="73152" cy="2514600"/>
           </a:xfrm>
           <a:prstGeom prst="rect">
             <a:avLst/>
@@ -4312,7 +4085,7 @@
       </p:sp>
       <p:sp>
         <p:nvSpPr>
-          <p:cNvPr id="12" name="mdpr:2-3-2107ad:title:__title:2-3-2107ad"/>
+          <p:cNvPr id="5" name="mdpr:2-3-2107ad:title:__title:2-3-2107ad"/>
           <p:cNvSpPr txBox="1"/>
           <p:nvPr/>
         </p:nvSpPr>
@@ -4346,7 +4119,24 @@
                 <a:ea typeface="Pretendard" pitchFamily="34" charset="-122"/>
                 <a:cs typeface="Pretendard" pitchFamily="34" charset="-120"/>
               </a:rPr>
-              <a:t>Page Splitting Rules (Cont. 2/3)</a:t>
+              <a:t>Page Splitting Rules</a:t>
+            </a:r>
+            <a:pPr algn="ctr" indent="0" marL="0">
+              <a:lnSpc>
+                <a:spcPct val="120000"/>
+              </a:lnSpc>
+              <a:buNone/>
+            </a:pPr>
+            <a:r>
+              <a:rPr lang="en-US" sz="2000" dirty="0">
+                <a:solidFill>
+                  <a:srgbClr val="919191"/>
+                </a:solidFill>
+                <a:latin typeface="Pretendard" pitchFamily="34" charset="0"/>
+                <a:ea typeface="Pretendard" pitchFamily="34" charset="-122"/>
+                <a:cs typeface="Pretendard" pitchFamily="34" charset="-120"/>
+              </a:rPr>
+              <a:t> (Cont. 2/3)</a:t>
             </a:r>
             <a:endParaRPr lang="en-US" sz="3400" dirty="0"/>
           </a:p>
@@ -4354,14 +4144,14 @@
       </p:sp>
       <p:sp>
         <p:nvSpPr>
-          <p:cNvPr id="13" name="mdpr:2-3-2107ad:item-1:block-12-chunk-2"/>
+          <p:cNvPr id="6" name="mdpr:2-3-2107ad:item-1:block-12-chunk-2"/>
           <p:cNvSpPr txBox="1"/>
           <p:nvPr/>
         </p:nvSpPr>
         <p:spPr>
           <a:xfrm>
-            <a:off x="1133856" y="2164080"/>
-            <a:ext cx="9820656" cy="426720"/>
+            <a:off x="1042416" y="2814828"/>
+            <a:ext cx="2825496" cy="762000"/>
           </a:xfrm>
           <a:prstGeom prst="rect">
             <a:avLst/>
@@ -4396,14 +4186,14 @@
       </p:sp>
       <p:sp>
         <p:nvSpPr>
-          <p:cNvPr id="14" name="mdpr:2-3-2107ad:item-2:block-12-chunk-2"/>
+          <p:cNvPr id="7" name="mdpr:2-3-2107ad:item-2:block-12-chunk-2"/>
           <p:cNvSpPr txBox="1"/>
           <p:nvPr/>
         </p:nvSpPr>
         <p:spPr>
           <a:xfrm>
-            <a:off x="1133856" y="3489960"/>
-            <a:ext cx="9820656" cy="426720"/>
+            <a:off x="4562856" y="2982468"/>
+            <a:ext cx="2825496" cy="426720"/>
           </a:xfrm>
           <a:prstGeom prst="rect">
             <a:avLst/>
@@ -4438,14 +4228,14 @@
       </p:sp>
       <p:sp>
         <p:nvSpPr>
-          <p:cNvPr id="15" name="mdpr:2-3-2107ad:item-3:block-12-chunk-2"/>
+          <p:cNvPr id="8" name="mdpr:2-3-2107ad:item-3:block-12-chunk-2"/>
           <p:cNvSpPr txBox="1"/>
           <p:nvPr/>
         </p:nvSpPr>
         <p:spPr>
           <a:xfrm>
-            <a:off x="1133856" y="4806696"/>
-            <a:ext cx="9820656" cy="426720"/>
+            <a:off x="8083296" y="2647188"/>
+            <a:ext cx="2825496" cy="1097280"/>
           </a:xfrm>
           <a:prstGeom prst="rect">
             <a:avLst/>
@@ -4639,7 +4429,24 @@
                 <a:ea typeface="Pretendard" pitchFamily="34" charset="-122"/>
                 <a:cs typeface="Pretendard" pitchFamily="34" charset="-120"/>
               </a:rPr>
-              <a:t>Page Splitting Rules (Cont. 3/3)</a:t>
+              <a:t>Page Splitting Rules</a:t>
+            </a:r>
+            <a:pPr algn="ctr" indent="0" marL="0">
+              <a:lnSpc>
+                <a:spcPct val="120000"/>
+              </a:lnSpc>
+              <a:buNone/>
+            </a:pPr>
+            <a:r>
+              <a:rPr lang="en-US" sz="2000" dirty="0">
+                <a:solidFill>
+                  <a:srgbClr val="919191"/>
+                </a:solidFill>
+                <a:latin typeface="Pretendard" pitchFamily="34" charset="0"/>
+                <a:ea typeface="Pretendard" pitchFamily="34" charset="-122"/>
+                <a:cs typeface="Pretendard" pitchFamily="34" charset="-120"/>
+              </a:rPr>
+              <a:t> (Cont. 3/3)</a:t>
             </a:r>
             <a:endParaRPr lang="en-US" sz="3400" dirty="0"/>
           </a:p>
@@ -5761,35 +5568,6 @@
         </p:nvSpPr>
         <p:spPr>
           <a:xfrm>
-            <a:off x="786384" y="1956816"/>
-            <a:ext cx="32004" cy="3483864"/>
-          </a:xfrm>
-          <a:prstGeom prst="rect">
-            <a:avLst/>
-          </a:prstGeom>
-          <a:solidFill>
-            <a:srgbClr val="DBEAFE">
-              <a:alpha val="80000"/>
-            </a:srgbClr>
-          </a:solidFill>
-          <a:ln w="12700">
-            <a:solidFill>
-              <a:srgbClr val="DBEAFE">
-                <a:alpha val="0"/>
-              </a:srgbClr>
-            </a:solidFill>
-            <a:prstDash val="solid"/>
-          </a:ln>
-        </p:spPr>
-      </p:sp>
-      <p:sp>
-        <p:nvSpPr>
-          <p:cNvPr id="9" name="Shape 4"/>
-          <p:cNvSpPr/>
-          <p:nvPr/>
-        </p:nvSpPr>
-        <p:spPr>
-          <a:xfrm>
             <a:off x="914400" y="1865376"/>
             <a:ext cx="73152" cy="1024128"/>
           </a:xfrm>
@@ -5811,7 +5589,7 @@
       </p:sp>
       <p:sp>
         <p:nvSpPr>
-          <p:cNvPr id="10" name="Shape 5"/>
+          <p:cNvPr id="9" name="Shape 4"/>
           <p:cNvSpPr/>
           <p:nvPr/>
         </p:nvSpPr>
@@ -5838,7 +5616,7 @@
       </p:sp>
       <p:sp>
         <p:nvSpPr>
-          <p:cNvPr id="11" name="Shape 6"/>
+          <p:cNvPr id="10" name="Shape 5"/>
           <p:cNvSpPr/>
           <p:nvPr/>
         </p:nvSpPr>
@@ -5865,7 +5643,7 @@
       </p:sp>
       <p:sp>
         <p:nvSpPr>
-          <p:cNvPr id="12" name="mdpr:1-3-c0cf7e:title:__title:1-3-c0cf7e"/>
+          <p:cNvPr id="11" name="mdpr:1-3-c0cf7e:title:__title:1-3-c0cf7e"/>
           <p:cNvSpPr txBox="1"/>
           <p:nvPr/>
         </p:nvSpPr>
@@ -5907,7 +5685,7 @@
       </p:sp>
       <p:sp>
         <p:nvSpPr>
-          <p:cNvPr id="13" name="mdpr:1-3-c0cf7e:item-1:block-16-chunk-1"/>
+          <p:cNvPr id="12" name="mdpr:1-3-c0cf7e:item-1:block-16-chunk-1"/>
           <p:cNvSpPr txBox="1"/>
           <p:nvPr/>
         </p:nvSpPr>
@@ -5949,7 +5727,7 @@
       </p:sp>
       <p:sp>
         <p:nvSpPr>
-          <p:cNvPr id="14" name="mdpr:1-3-c0cf7e:item-2:block-16-chunk-1"/>
+          <p:cNvPr id="13" name="mdpr:1-3-c0cf7e:item-2:block-16-chunk-1"/>
           <p:cNvSpPr txBox="1"/>
           <p:nvPr/>
         </p:nvSpPr>
@@ -5991,7 +5769,7 @@
       </p:sp>
       <p:sp>
         <p:nvSpPr>
-          <p:cNvPr id="15" name="mdpr:1-3-c0cf7e:item-3:block-16-chunk-1"/>
+          <p:cNvPr id="14" name="mdpr:1-3-c0cf7e:item-3:block-16-chunk-1"/>
           <p:cNvSpPr txBox="1"/>
           <p:nvPr/>
         </p:nvSpPr>
@@ -6269,35 +6047,6 @@
         </p:nvSpPr>
         <p:spPr>
           <a:xfrm>
-            <a:off x="786384" y="1956816"/>
-            <a:ext cx="32004" cy="3483864"/>
-          </a:xfrm>
-          <a:prstGeom prst="rect">
-            <a:avLst/>
-          </a:prstGeom>
-          <a:solidFill>
-            <a:srgbClr val="DBEAFE">
-              <a:alpha val="80000"/>
-            </a:srgbClr>
-          </a:solidFill>
-          <a:ln w="12700">
-            <a:solidFill>
-              <a:srgbClr val="DBEAFE">
-                <a:alpha val="0"/>
-              </a:srgbClr>
-            </a:solidFill>
-            <a:prstDash val="solid"/>
-          </a:ln>
-        </p:spPr>
-      </p:sp>
-      <p:sp>
-        <p:nvSpPr>
-          <p:cNvPr id="9" name="Shape 4"/>
-          <p:cNvSpPr/>
-          <p:nvPr/>
-        </p:nvSpPr>
-        <p:spPr>
-          <a:xfrm>
             <a:off x="914400" y="1865376"/>
             <a:ext cx="73152" cy="1024128"/>
           </a:xfrm>
@@ -6319,7 +6068,7 @@
       </p:sp>
       <p:sp>
         <p:nvSpPr>
-          <p:cNvPr id="10" name="Shape 5"/>
+          <p:cNvPr id="9" name="Shape 4"/>
           <p:cNvSpPr/>
           <p:nvPr/>
         </p:nvSpPr>
@@ -6346,7 +6095,7 @@
       </p:sp>
       <p:sp>
         <p:nvSpPr>
-          <p:cNvPr id="11" name="Shape 6"/>
+          <p:cNvPr id="10" name="Shape 5"/>
           <p:cNvSpPr/>
           <p:nvPr/>
         </p:nvSpPr>
@@ -6373,7 +6122,7 @@
       </p:sp>
       <p:sp>
         <p:nvSpPr>
-          <p:cNvPr id="12" name="mdpr:2-3-500204:title:__title:2-3-500204"/>
+          <p:cNvPr id="11" name="mdpr:2-3-500204:title:__title:2-3-500204"/>
           <p:cNvSpPr txBox="1"/>
           <p:nvPr/>
         </p:nvSpPr>
@@ -6407,7 +6156,24 @@
                 <a:ea typeface="Pretendard" pitchFamily="34" charset="-122"/>
                 <a:cs typeface="Pretendard" pitchFamily="34" charset="-120"/>
               </a:rPr>
-              <a:t>Layout Selection Rules (Cont. 2/3)</a:t>
+              <a:t>Layout Selection Rules</a:t>
+            </a:r>
+            <a:pPr algn="ctr" indent="0" marL="0">
+              <a:lnSpc>
+                <a:spcPct val="120000"/>
+              </a:lnSpc>
+              <a:buNone/>
+            </a:pPr>
+            <a:r>
+              <a:rPr lang="en-US" sz="2000" dirty="0">
+                <a:solidFill>
+                  <a:srgbClr val="919191"/>
+                </a:solidFill>
+                <a:latin typeface="Pretendard" pitchFamily="34" charset="0"/>
+                <a:ea typeface="Pretendard" pitchFamily="34" charset="-122"/>
+                <a:cs typeface="Pretendard" pitchFamily="34" charset="-120"/>
+              </a:rPr>
+              <a:t> (Cont. 2/3)</a:t>
             </a:r>
             <a:endParaRPr lang="en-US" sz="3400" dirty="0"/>
           </a:p>
@@ -6415,7 +6181,7 @@
       </p:sp>
       <p:sp>
         <p:nvSpPr>
-          <p:cNvPr id="13" name="mdpr:2-3-500204:item-1:block-16-chunk-2"/>
+          <p:cNvPr id="12" name="mdpr:2-3-500204:item-1:block-16-chunk-2"/>
           <p:cNvSpPr txBox="1"/>
           <p:nvPr/>
         </p:nvSpPr>
@@ -6457,7 +6223,7 @@
       </p:sp>
       <p:sp>
         <p:nvSpPr>
-          <p:cNvPr id="14" name="mdpr:2-3-500204:item-2:block-16-chunk-2"/>
+          <p:cNvPr id="13" name="mdpr:2-3-500204:item-2:block-16-chunk-2"/>
           <p:cNvSpPr txBox="1"/>
           <p:nvPr/>
         </p:nvSpPr>
@@ -6499,7 +6265,7 @@
       </p:sp>
       <p:sp>
         <p:nvSpPr>
-          <p:cNvPr id="15" name="mdpr:2-3-500204:item-3:block-16-chunk-2"/>
+          <p:cNvPr id="14" name="mdpr:2-3-500204:item-3:block-16-chunk-2"/>
           <p:cNvSpPr txBox="1"/>
           <p:nvPr/>
         </p:nvSpPr>
@@ -6700,7 +6466,24 @@
                 <a:ea typeface="Pretendard" pitchFamily="34" charset="-122"/>
                 <a:cs typeface="Pretendard" pitchFamily="34" charset="-120"/>
               </a:rPr>
-              <a:t>Layout Selection Rules (Cont. 3/3)</a:t>
+              <a:t>Layout Selection Rules</a:t>
+            </a:r>
+            <a:pPr algn="ctr" indent="0" marL="0">
+              <a:lnSpc>
+                <a:spcPct val="120000"/>
+              </a:lnSpc>
+              <a:buNone/>
+            </a:pPr>
+            <a:r>
+              <a:rPr lang="en-US" sz="2000" dirty="0">
+                <a:solidFill>
+                  <a:srgbClr val="919191"/>
+                </a:solidFill>
+                <a:latin typeface="Pretendard" pitchFamily="34" charset="0"/>
+                <a:ea typeface="Pretendard" pitchFamily="34" charset="-122"/>
+                <a:cs typeface="Pretendard" pitchFamily="34" charset="-120"/>
+              </a:rPr>
+              <a:t> (Cont. 3/3)</a:t>
             </a:r>
             <a:endParaRPr lang="en-US" sz="3400" dirty="0"/>
           </a:p>
@@ -7556,243 +7339,16 @@
           <a:chExt cx="0" cy="0"/>
         </a:xfrm>
       </p:grpSpPr>
-      <p:pic>
-        <p:nvPicPr>
-          <p:cNvPr id="2" name="Image 0" descr="preencoded.png">    </p:cNvPr>
-          <p:cNvPicPr>
-            <a:picLocks noChangeAspect="1"/>
-          </p:cNvPicPr>
-          <p:nvPr/>
-        </p:nvPicPr>
-        <p:blipFill>
-          <a:blip r:embed="rId1">
-            <a:extLst>
-              <a:ext uri="{96DAC541-7B7A-43D3-8B79-37D633B846F1}">
-                <asvg:svgBlip xmlns:asvg="http://schemas.microsoft.com/office/drawing/2016/SVG/main" r:embed="rId2"/>
-              </a:ext>
-            </a:extLst>
-          </a:blip>
-          <a:stretch>
-            <a:fillRect/>
-          </a:stretch>
-        </p:blipFill>
-        <p:spPr>
-          <a:xfrm>
-            <a:off x="914400" y="1865376"/>
-            <a:ext cx="10241280" cy="1024128"/>
-          </a:xfrm>
-          <a:prstGeom prst="rect">
-            <a:avLst/>
-          </a:prstGeom>
-        </p:spPr>
-      </p:pic>
-      <p:sp>
-        <p:nvSpPr>
-          <p:cNvPr id="3" name="Shape 0"/>
+      <p:sp>
+        <p:nvSpPr>
+          <p:cNvPr id="2" name="Shape 0"/>
           <p:cNvSpPr/>
           <p:nvPr/>
         </p:nvSpPr>
         <p:spPr>
           <a:xfrm>
-            <a:off x="914400" y="1865376"/>
-            <a:ext cx="10241280" cy="1024128"/>
-          </a:xfrm>
-          <a:prstGeom prst="rect">
-            <a:avLst/>
-          </a:prstGeom>
-          <a:solidFill>
-            <a:srgbClr val="FFFFFF">
-              <a:alpha val="0"/>
-            </a:srgbClr>
-          </a:solidFill>
-          <a:ln w="12700">
-            <a:solidFill>
-              <a:srgbClr val="E2E8F0">
-                <a:alpha val="0"/>
-              </a:srgbClr>
-            </a:solidFill>
-            <a:prstDash val="solid"/>
-          </a:ln>
-          <a:effectLst>
-            <a:outerShdw sx="100000" sy="100000" kx="0" ky="0" algn="bl" rotWithShape="0" blurRad="12700" dist="50800" dir="2700000">
-              <a:srgbClr val="000000">
-                <a:alpha val="8000"/>
-              </a:srgbClr>
-            </a:outerShdw>
-          </a:effectLst>
-        </p:spPr>
-      </p:sp>
-      <p:pic>
-        <p:nvPicPr>
-          <p:cNvPr id="4" name="Image 1" descr="preencoded.png">    </p:cNvPr>
-          <p:cNvPicPr>
-            <a:picLocks noChangeAspect="1"/>
-          </p:cNvPicPr>
-          <p:nvPr/>
-        </p:nvPicPr>
-        <p:blipFill>
-          <a:blip r:embed="rId3">
-            <a:extLst>
-              <a:ext uri="{96DAC541-7B7A-43D3-8B79-37D633B846F1}">
-                <asvg:svgBlip xmlns:asvg="http://schemas.microsoft.com/office/drawing/2016/SVG/main" r:embed="rId4"/>
-              </a:ext>
-            </a:extLst>
-          </a:blip>
-          <a:stretch>
-            <a:fillRect/>
-          </a:stretch>
-        </p:blipFill>
-        <p:spPr>
-          <a:xfrm>
-            <a:off x="914400" y="3191256"/>
-            <a:ext cx="10241280" cy="1024128"/>
-          </a:xfrm>
-          <a:prstGeom prst="rect">
-            <a:avLst/>
-          </a:prstGeom>
-        </p:spPr>
-      </p:pic>
-      <p:sp>
-        <p:nvSpPr>
-          <p:cNvPr id="5" name="Shape 1"/>
-          <p:cNvSpPr/>
-          <p:nvPr/>
-        </p:nvSpPr>
-        <p:spPr>
-          <a:xfrm>
-            <a:off x="914400" y="3191256"/>
-            <a:ext cx="10241280" cy="1024128"/>
-          </a:xfrm>
-          <a:prstGeom prst="rect">
-            <a:avLst/>
-          </a:prstGeom>
-          <a:solidFill>
-            <a:srgbClr val="FFFFFF">
-              <a:alpha val="0"/>
-            </a:srgbClr>
-          </a:solidFill>
-          <a:ln w="12700">
-            <a:solidFill>
-              <a:srgbClr val="E2E8F0">
-                <a:alpha val="0"/>
-              </a:srgbClr>
-            </a:solidFill>
-            <a:prstDash val="solid"/>
-          </a:ln>
-          <a:effectLst>
-            <a:outerShdw sx="100000" sy="100000" kx="0" ky="0" algn="bl" rotWithShape="0" blurRad="12700" dist="50800" dir="2700000">
-              <a:srgbClr val="000000">
-                <a:alpha val="8000"/>
-              </a:srgbClr>
-            </a:outerShdw>
-          </a:effectLst>
-        </p:spPr>
-      </p:sp>
-      <p:pic>
-        <p:nvPicPr>
-          <p:cNvPr id="6" name="Image 2" descr="preencoded.png">    </p:cNvPr>
-          <p:cNvPicPr>
-            <a:picLocks noChangeAspect="1"/>
-          </p:cNvPicPr>
-          <p:nvPr/>
-        </p:nvPicPr>
-        <p:blipFill>
-          <a:blip r:embed="rId5">
-            <a:extLst>
-              <a:ext uri="{96DAC541-7B7A-43D3-8B79-37D633B846F1}">
-                <asvg:svgBlip xmlns:asvg="http://schemas.microsoft.com/office/drawing/2016/SVG/main" r:embed="rId6"/>
-              </a:ext>
-            </a:extLst>
-          </a:blip>
-          <a:stretch>
-            <a:fillRect/>
-          </a:stretch>
-        </p:blipFill>
-        <p:spPr>
-          <a:xfrm>
-            <a:off x="914400" y="4507992"/>
-            <a:ext cx="10241280" cy="1024128"/>
-          </a:xfrm>
-          <a:prstGeom prst="rect">
-            <a:avLst/>
-          </a:prstGeom>
-        </p:spPr>
-      </p:pic>
-      <p:sp>
-        <p:nvSpPr>
-          <p:cNvPr id="7" name="Shape 2"/>
-          <p:cNvSpPr/>
-          <p:nvPr/>
-        </p:nvSpPr>
-        <p:spPr>
-          <a:xfrm>
-            <a:off x="914400" y="4507992"/>
-            <a:ext cx="10241280" cy="1024128"/>
-          </a:xfrm>
-          <a:prstGeom prst="rect">
-            <a:avLst/>
-          </a:prstGeom>
-          <a:solidFill>
-            <a:srgbClr val="FFFFFF">
-              <a:alpha val="0"/>
-            </a:srgbClr>
-          </a:solidFill>
-          <a:ln w="12700">
-            <a:solidFill>
-              <a:srgbClr val="E2E8F0">
-                <a:alpha val="0"/>
-              </a:srgbClr>
-            </a:solidFill>
-            <a:prstDash val="solid"/>
-          </a:ln>
-          <a:effectLst>
-            <a:outerShdw sx="100000" sy="100000" kx="0" ky="0" algn="bl" rotWithShape="0" blurRad="12700" dist="50800" dir="2700000">
-              <a:srgbClr val="000000">
-                <a:alpha val="8000"/>
-              </a:srgbClr>
-            </a:outerShdw>
-          </a:effectLst>
-        </p:spPr>
-      </p:sp>
-      <p:sp>
-        <p:nvSpPr>
-          <p:cNvPr id="8" name="Shape 3"/>
-          <p:cNvSpPr/>
-          <p:nvPr/>
-        </p:nvSpPr>
-        <p:spPr>
-          <a:xfrm>
-            <a:off x="786384" y="1956816"/>
-            <a:ext cx="32004" cy="3483864"/>
-          </a:xfrm>
-          <a:prstGeom prst="rect">
-            <a:avLst/>
-          </a:prstGeom>
-          <a:solidFill>
-            <a:srgbClr val="DBEAFE">
-              <a:alpha val="80000"/>
-            </a:srgbClr>
-          </a:solidFill>
-          <a:ln w="12700">
-            <a:solidFill>
-              <a:srgbClr val="DBEAFE">
-                <a:alpha val="0"/>
-              </a:srgbClr>
-            </a:solidFill>
-            <a:prstDash val="solid"/>
-          </a:ln>
-        </p:spPr>
-      </p:sp>
-      <p:sp>
-        <p:nvSpPr>
-          <p:cNvPr id="9" name="Shape 4"/>
-          <p:cNvSpPr/>
-          <p:nvPr/>
-        </p:nvSpPr>
-        <p:spPr>
-          <a:xfrm>
-            <a:off x="914400" y="1865376"/>
-            <a:ext cx="73152" cy="1024128"/>
+            <a:off x="914400" y="1463040"/>
+            <a:ext cx="10241280" cy="73152"/>
           </a:xfrm>
           <a:prstGeom prst="rect">
             <a:avLst/>
@@ -7812,61 +7368,7 @@
       </p:sp>
       <p:sp>
         <p:nvSpPr>
-          <p:cNvPr id="10" name="Shape 5"/>
-          <p:cNvSpPr/>
-          <p:nvPr/>
-        </p:nvSpPr>
-        <p:spPr>
-          <a:xfrm>
-            <a:off x="914400" y="3191256"/>
-            <a:ext cx="73152" cy="1024128"/>
-          </a:xfrm>
-          <a:prstGeom prst="rect">
-            <a:avLst/>
-          </a:prstGeom>
-          <a:solidFill>
-            <a:srgbClr val="DBEAFE"/>
-          </a:solidFill>
-          <a:ln w="12700">
-            <a:solidFill>
-              <a:srgbClr val="DBEAFE">
-                <a:alpha val="0"/>
-              </a:srgbClr>
-            </a:solidFill>
-            <a:prstDash val="solid"/>
-          </a:ln>
-        </p:spPr>
-      </p:sp>
-      <p:sp>
-        <p:nvSpPr>
-          <p:cNvPr id="11" name="Shape 6"/>
-          <p:cNvSpPr/>
-          <p:nvPr/>
-        </p:nvSpPr>
-        <p:spPr>
-          <a:xfrm>
-            <a:off x="914400" y="4507992"/>
-            <a:ext cx="73152" cy="1024128"/>
-          </a:xfrm>
-          <a:prstGeom prst="rect">
-            <a:avLst/>
-          </a:prstGeom>
-          <a:solidFill>
-            <a:srgbClr val="2563EB"/>
-          </a:solidFill>
-          <a:ln w="12700">
-            <a:solidFill>
-              <a:srgbClr val="2563EB">
-                <a:alpha val="0"/>
-              </a:srgbClr>
-            </a:solidFill>
-            <a:prstDash val="solid"/>
-          </a:ln>
-        </p:spPr>
-      </p:sp>
-      <p:sp>
-        <p:nvSpPr>
-          <p:cNvPr id="12" name="mdpr:1-3-0466ef:title:__title:1-3-0466ef"/>
+          <p:cNvPr id="3" name="mdpr:1-3-0466ef:title:__title:1-3-0466ef"/>
           <p:cNvSpPr txBox="1"/>
           <p:nvPr/>
         </p:nvSpPr>
@@ -7908,14 +7410,14 @@
       </p:sp>
       <p:sp>
         <p:nvSpPr>
-          <p:cNvPr id="13" name="mdpr:1-3-0466ef:item-1:block-20-chunk-1"/>
+          <p:cNvPr id="4" name="mdpr:1-3-0466ef:body:block-20-chunk-1"/>
           <p:cNvSpPr txBox="1"/>
           <p:nvPr/>
         </p:nvSpPr>
         <p:spPr>
           <a:xfrm>
-            <a:off x="1133856" y="2164080"/>
-            <a:ext cx="9820656" cy="426720"/>
+            <a:off x="987552" y="3063240"/>
+            <a:ext cx="10094976" cy="426720"/>
           </a:xfrm>
           <a:prstGeom prst="rect">
             <a:avLst/>
@@ -7927,7 +7429,7 @@
           <a:bodyPr wrap="square" lIns="0" tIns="25400" rIns="25400" bIns="0" rtlCol="0" anchor="ctr"/>
           <a:lstStyle/>
           <a:p>
-            <a:pPr algn="ctr" indent="0" marL="0">
+            <a:pPr algn="l" indent="0" marL="0">
               <a:lnSpc>
                 <a:spcPct val="120000"/>
               </a:lnSpc>
@@ -7942,7 +7444,7 @@
                 <a:ea typeface="Pretendard" pitchFamily="34" charset="-122"/>
                 <a:cs typeface="Pretendard" pitchFamily="34" charset="-120"/>
               </a:rPr>
-              <a:t>Shared Renderer Contract</a:t>
+              <a:t>- Shared Renderer Contract</a:t>
             </a:r>
             <a:endParaRPr lang="en-US" sz="2200" dirty="0"/>
           </a:p>
@@ -7950,14 +7452,14 @@
       </p:sp>
       <p:sp>
         <p:nvSpPr>
-          <p:cNvPr id="14" name="mdpr:1-3-0466ef:item-2:block-20-chunk-1"/>
+          <p:cNvPr id="5" name="mdpr:1-3-0466ef:body:block-20-chunk-1"/>
           <p:cNvSpPr txBox="1"/>
           <p:nvPr/>
         </p:nvSpPr>
         <p:spPr>
           <a:xfrm>
-            <a:off x="1133856" y="3489960"/>
-            <a:ext cx="9820656" cy="426720"/>
+            <a:off x="987552" y="3489960"/>
+            <a:ext cx="10094976" cy="426720"/>
           </a:xfrm>
           <a:prstGeom prst="rect">
             <a:avLst/>
@@ -7969,7 +7471,7 @@
           <a:bodyPr wrap="square" lIns="0" tIns="25400" rIns="25400" bIns="0" rtlCol="0" anchor="ctr"/>
           <a:lstStyle/>
           <a:p>
-            <a:pPr algn="ctr" indent="0" marL="0">
+            <a:pPr algn="l" indent="0" marL="0">
               <a:lnSpc>
                 <a:spcPct val="120000"/>
               </a:lnSpc>
@@ -7984,7 +7486,7 @@
                 <a:ea typeface="Pretendard" pitchFamily="34" charset="-122"/>
                 <a:cs typeface="Pretendard" pitchFamily="34" charset="-120"/>
               </a:rPr>
-              <a:t>PPTX Renderer</a:t>
+              <a:t>- PPTX Renderer</a:t>
             </a:r>
             <a:endParaRPr lang="en-US" sz="2200" dirty="0"/>
           </a:p>
@@ -7992,14 +7494,14 @@
       </p:sp>
       <p:sp>
         <p:nvSpPr>
-          <p:cNvPr id="15" name="mdpr:1-3-0466ef:item-3:block-20-chunk-1"/>
+          <p:cNvPr id="6" name="mdpr:1-3-0466ef:body:block-20-chunk-1"/>
           <p:cNvSpPr txBox="1"/>
           <p:nvPr/>
         </p:nvSpPr>
         <p:spPr>
           <a:xfrm>
-            <a:off x="1133856" y="4806696"/>
-            <a:ext cx="9820656" cy="426720"/>
+            <a:off x="987552" y="3916680"/>
+            <a:ext cx="10094976" cy="426720"/>
           </a:xfrm>
           <a:prstGeom prst="rect">
             <a:avLst/>
@@ -8011,7 +7513,7 @@
           <a:bodyPr wrap="square" lIns="0" tIns="25400" rIns="25400" bIns="0" rtlCol="0" anchor="ctr"/>
           <a:lstStyle/>
           <a:p>
-            <a:pPr algn="ctr" indent="0" marL="0">
+            <a:pPr algn="l" indent="0" marL="0">
               <a:lnSpc>
                 <a:spcPct val="120000"/>
               </a:lnSpc>
@@ -8026,7 +7528,7 @@
                 <a:ea typeface="Pretendard" pitchFamily="34" charset="-122"/>
                 <a:cs typeface="Pretendard" pitchFamily="34" charset="-120"/>
               </a:rPr>
-              <a:t>Decoration Styles</a:t>
+              <a:t>- Decoration Styles</a:t>
             </a:r>
             <a:endParaRPr lang="en-US" sz="2200" dirty="0"/>
           </a:p>
@@ -8064,243 +7566,16 @@
           <a:chExt cx="0" cy="0"/>
         </a:xfrm>
       </p:grpSpPr>
-      <p:pic>
-        <p:nvPicPr>
-          <p:cNvPr id="2" name="Image 0" descr="preencoded.png">    </p:cNvPr>
-          <p:cNvPicPr>
-            <a:picLocks noChangeAspect="1"/>
-          </p:cNvPicPr>
-          <p:nvPr/>
-        </p:nvPicPr>
-        <p:blipFill>
-          <a:blip r:embed="rId1">
-            <a:extLst>
-              <a:ext uri="{96DAC541-7B7A-43D3-8B79-37D633B846F1}">
-                <asvg:svgBlip xmlns:asvg="http://schemas.microsoft.com/office/drawing/2016/SVG/main" r:embed="rId2"/>
-              </a:ext>
-            </a:extLst>
-          </a:blip>
-          <a:stretch>
-            <a:fillRect/>
-          </a:stretch>
-        </p:blipFill>
-        <p:spPr>
-          <a:xfrm>
-            <a:off x="914400" y="1865376"/>
-            <a:ext cx="10241280" cy="1024128"/>
-          </a:xfrm>
-          <a:prstGeom prst="rect">
-            <a:avLst/>
-          </a:prstGeom>
-        </p:spPr>
-      </p:pic>
-      <p:sp>
-        <p:nvSpPr>
-          <p:cNvPr id="3" name="Shape 0"/>
+      <p:sp>
+        <p:nvSpPr>
+          <p:cNvPr id="2" name="Shape 0"/>
           <p:cNvSpPr/>
           <p:nvPr/>
         </p:nvSpPr>
         <p:spPr>
           <a:xfrm>
-            <a:off x="914400" y="1865376"/>
-            <a:ext cx="10241280" cy="1024128"/>
-          </a:xfrm>
-          <a:prstGeom prst="rect">
-            <a:avLst/>
-          </a:prstGeom>
-          <a:solidFill>
-            <a:srgbClr val="FFFFFF">
-              <a:alpha val="0"/>
-            </a:srgbClr>
-          </a:solidFill>
-          <a:ln w="12700">
-            <a:solidFill>
-              <a:srgbClr val="E2E8F0">
-                <a:alpha val="0"/>
-              </a:srgbClr>
-            </a:solidFill>
-            <a:prstDash val="solid"/>
-          </a:ln>
-          <a:effectLst>
-            <a:outerShdw sx="100000" sy="100000" kx="0" ky="0" algn="bl" rotWithShape="0" blurRad="12700" dist="50800" dir="2700000">
-              <a:srgbClr val="000000">
-                <a:alpha val="8000"/>
-              </a:srgbClr>
-            </a:outerShdw>
-          </a:effectLst>
-        </p:spPr>
-      </p:sp>
-      <p:pic>
-        <p:nvPicPr>
-          <p:cNvPr id="4" name="Image 1" descr="preencoded.png">    </p:cNvPr>
-          <p:cNvPicPr>
-            <a:picLocks noChangeAspect="1"/>
-          </p:cNvPicPr>
-          <p:nvPr/>
-        </p:nvPicPr>
-        <p:blipFill>
-          <a:blip r:embed="rId3">
-            <a:extLst>
-              <a:ext uri="{96DAC541-7B7A-43D3-8B79-37D633B846F1}">
-                <asvg:svgBlip xmlns:asvg="http://schemas.microsoft.com/office/drawing/2016/SVG/main" r:embed="rId4"/>
-              </a:ext>
-            </a:extLst>
-          </a:blip>
-          <a:stretch>
-            <a:fillRect/>
-          </a:stretch>
-        </p:blipFill>
-        <p:spPr>
-          <a:xfrm>
-            <a:off x="914400" y="3191256"/>
-            <a:ext cx="10241280" cy="1024128"/>
-          </a:xfrm>
-          <a:prstGeom prst="rect">
-            <a:avLst/>
-          </a:prstGeom>
-        </p:spPr>
-      </p:pic>
-      <p:sp>
-        <p:nvSpPr>
-          <p:cNvPr id="5" name="Shape 1"/>
-          <p:cNvSpPr/>
-          <p:nvPr/>
-        </p:nvSpPr>
-        <p:spPr>
-          <a:xfrm>
-            <a:off x="914400" y="3191256"/>
-            <a:ext cx="10241280" cy="1024128"/>
-          </a:xfrm>
-          <a:prstGeom prst="rect">
-            <a:avLst/>
-          </a:prstGeom>
-          <a:solidFill>
-            <a:srgbClr val="FFFFFF">
-              <a:alpha val="0"/>
-            </a:srgbClr>
-          </a:solidFill>
-          <a:ln w="12700">
-            <a:solidFill>
-              <a:srgbClr val="E2E8F0">
-                <a:alpha val="0"/>
-              </a:srgbClr>
-            </a:solidFill>
-            <a:prstDash val="solid"/>
-          </a:ln>
-          <a:effectLst>
-            <a:outerShdw sx="100000" sy="100000" kx="0" ky="0" algn="bl" rotWithShape="0" blurRad="12700" dist="50800" dir="2700000">
-              <a:srgbClr val="000000">
-                <a:alpha val="8000"/>
-              </a:srgbClr>
-            </a:outerShdw>
-          </a:effectLst>
-        </p:spPr>
-      </p:sp>
-      <p:pic>
-        <p:nvPicPr>
-          <p:cNvPr id="6" name="Image 2" descr="preencoded.png">    </p:cNvPr>
-          <p:cNvPicPr>
-            <a:picLocks noChangeAspect="1"/>
-          </p:cNvPicPr>
-          <p:nvPr/>
-        </p:nvPicPr>
-        <p:blipFill>
-          <a:blip r:embed="rId5">
-            <a:extLst>
-              <a:ext uri="{96DAC541-7B7A-43D3-8B79-37D633B846F1}">
-                <asvg:svgBlip xmlns:asvg="http://schemas.microsoft.com/office/drawing/2016/SVG/main" r:embed="rId6"/>
-              </a:ext>
-            </a:extLst>
-          </a:blip>
-          <a:stretch>
-            <a:fillRect/>
-          </a:stretch>
-        </p:blipFill>
-        <p:spPr>
-          <a:xfrm>
-            <a:off x="914400" y="4507992"/>
-            <a:ext cx="10241280" cy="1024128"/>
-          </a:xfrm>
-          <a:prstGeom prst="rect">
-            <a:avLst/>
-          </a:prstGeom>
-        </p:spPr>
-      </p:pic>
-      <p:sp>
-        <p:nvSpPr>
-          <p:cNvPr id="7" name="Shape 2"/>
-          <p:cNvSpPr/>
-          <p:nvPr/>
-        </p:nvSpPr>
-        <p:spPr>
-          <a:xfrm>
-            <a:off x="914400" y="4507992"/>
-            <a:ext cx="10241280" cy="1024128"/>
-          </a:xfrm>
-          <a:prstGeom prst="rect">
-            <a:avLst/>
-          </a:prstGeom>
-          <a:solidFill>
-            <a:srgbClr val="FFFFFF">
-              <a:alpha val="0"/>
-            </a:srgbClr>
-          </a:solidFill>
-          <a:ln w="12700">
-            <a:solidFill>
-              <a:srgbClr val="E2E8F0">
-                <a:alpha val="0"/>
-              </a:srgbClr>
-            </a:solidFill>
-            <a:prstDash val="solid"/>
-          </a:ln>
-          <a:effectLst>
-            <a:outerShdw sx="100000" sy="100000" kx="0" ky="0" algn="bl" rotWithShape="0" blurRad="12700" dist="50800" dir="2700000">
-              <a:srgbClr val="000000">
-                <a:alpha val="8000"/>
-              </a:srgbClr>
-            </a:outerShdw>
-          </a:effectLst>
-        </p:spPr>
-      </p:sp>
-      <p:sp>
-        <p:nvSpPr>
-          <p:cNvPr id="8" name="Shape 3"/>
-          <p:cNvSpPr/>
-          <p:nvPr/>
-        </p:nvSpPr>
-        <p:spPr>
-          <a:xfrm>
-            <a:off x="786384" y="1956816"/>
-            <a:ext cx="32004" cy="3483864"/>
-          </a:xfrm>
-          <a:prstGeom prst="rect">
-            <a:avLst/>
-          </a:prstGeom>
-          <a:solidFill>
-            <a:srgbClr val="DBEAFE">
-              <a:alpha val="80000"/>
-            </a:srgbClr>
-          </a:solidFill>
-          <a:ln w="12700">
-            <a:solidFill>
-              <a:srgbClr val="DBEAFE">
-                <a:alpha val="0"/>
-              </a:srgbClr>
-            </a:solidFill>
-            <a:prstDash val="solid"/>
-          </a:ln>
-        </p:spPr>
-      </p:sp>
-      <p:sp>
-        <p:nvSpPr>
-          <p:cNvPr id="9" name="Shape 4"/>
-          <p:cNvSpPr/>
-          <p:nvPr/>
-        </p:nvSpPr>
-        <p:spPr>
-          <a:xfrm>
-            <a:off x="914400" y="1865376"/>
-            <a:ext cx="73152" cy="1024128"/>
+            <a:off x="822960" y="1938528"/>
+            <a:ext cx="73152" cy="2514600"/>
           </a:xfrm>
           <a:prstGeom prst="rect">
             <a:avLst/>
@@ -8320,14 +7595,14 @@
       </p:sp>
       <p:sp>
         <p:nvSpPr>
-          <p:cNvPr id="10" name="Shape 5"/>
+          <p:cNvPr id="3" name="Shape 1"/>
           <p:cNvSpPr/>
           <p:nvPr/>
         </p:nvSpPr>
         <p:spPr>
           <a:xfrm>
-            <a:off x="914400" y="3191256"/>
-            <a:ext cx="73152" cy="1024128"/>
+            <a:off x="4343400" y="1938528"/>
+            <a:ext cx="73152" cy="2514600"/>
           </a:xfrm>
           <a:prstGeom prst="rect">
             <a:avLst/>
@@ -8347,14 +7622,14 @@
       </p:sp>
       <p:sp>
         <p:nvSpPr>
-          <p:cNvPr id="11" name="Shape 6"/>
+          <p:cNvPr id="4" name="Shape 2"/>
           <p:cNvSpPr/>
           <p:nvPr/>
         </p:nvSpPr>
         <p:spPr>
           <a:xfrm>
-            <a:off x="914400" y="4507992"/>
-            <a:ext cx="73152" cy="1024128"/>
+            <a:off x="7863840" y="1938528"/>
+            <a:ext cx="73152" cy="2514600"/>
           </a:xfrm>
           <a:prstGeom prst="rect">
             <a:avLst/>
@@ -8374,7 +7649,7 @@
       </p:sp>
       <p:sp>
         <p:nvSpPr>
-          <p:cNvPr id="12" name="mdpr:2-3-068207:title:__title:2-3-068207"/>
+          <p:cNvPr id="5" name="mdpr:2-3-068207:title:__title:2-3-068207"/>
           <p:cNvSpPr txBox="1"/>
           <p:nvPr/>
         </p:nvSpPr>
@@ -8408,7 +7683,24 @@
                 <a:ea typeface="Pretendard" pitchFamily="34" charset="-122"/>
                 <a:cs typeface="Pretendard" pitchFamily="34" charset="-120"/>
               </a:rPr>
-              <a:t>Rendering Rules (Cont. 2/3)</a:t>
+              <a:t>Rendering Rules</a:t>
+            </a:r>
+            <a:pPr algn="ctr" indent="0" marL="0">
+              <a:lnSpc>
+                <a:spcPct val="120000"/>
+              </a:lnSpc>
+              <a:buNone/>
+            </a:pPr>
+            <a:r>
+              <a:rPr lang="en-US" sz="2000" dirty="0">
+                <a:solidFill>
+                  <a:srgbClr val="919191"/>
+                </a:solidFill>
+                <a:latin typeface="Pretendard" pitchFamily="34" charset="0"/>
+                <a:ea typeface="Pretendard" pitchFamily="34" charset="-122"/>
+                <a:cs typeface="Pretendard" pitchFamily="34" charset="-120"/>
+              </a:rPr>
+              <a:t> (Cont. 2/3)</a:t>
             </a:r>
             <a:endParaRPr lang="en-US" sz="3400" dirty="0"/>
           </a:p>
@@ -8416,14 +7708,14 @@
       </p:sp>
       <p:sp>
         <p:nvSpPr>
-          <p:cNvPr id="13" name="mdpr:2-3-068207:item-1:block-20-chunk-2"/>
+          <p:cNvPr id="6" name="mdpr:2-3-068207:item-1:block-20-chunk-2"/>
           <p:cNvSpPr txBox="1"/>
           <p:nvPr/>
         </p:nvSpPr>
         <p:spPr>
           <a:xfrm>
-            <a:off x="1133856" y="2164080"/>
-            <a:ext cx="9820656" cy="426720"/>
+            <a:off x="1042416" y="2814828"/>
+            <a:ext cx="2825496" cy="762000"/>
           </a:xfrm>
           <a:prstGeom prst="rect">
             <a:avLst/>
@@ -8458,14 +7750,14 @@
       </p:sp>
       <p:sp>
         <p:nvSpPr>
-          <p:cNvPr id="14" name="mdpr:2-3-068207:item-2:block-20-chunk-2"/>
+          <p:cNvPr id="7" name="mdpr:2-3-068207:item-2:block-20-chunk-2"/>
           <p:cNvSpPr txBox="1"/>
           <p:nvPr/>
         </p:nvSpPr>
         <p:spPr>
           <a:xfrm>
-            <a:off x="1133856" y="3489960"/>
-            <a:ext cx="9820656" cy="426720"/>
+            <a:off x="4562856" y="2982468"/>
+            <a:ext cx="2825496" cy="426720"/>
           </a:xfrm>
           <a:prstGeom prst="rect">
             <a:avLst/>
@@ -8500,14 +7792,14 @@
       </p:sp>
       <p:sp>
         <p:nvSpPr>
-          <p:cNvPr id="15" name="mdpr:2-3-068207:item-3:block-20-chunk-2"/>
+          <p:cNvPr id="8" name="mdpr:2-3-068207:item-3:block-20-chunk-2"/>
           <p:cNvSpPr txBox="1"/>
           <p:nvPr/>
         </p:nvSpPr>
         <p:spPr>
           <a:xfrm>
-            <a:off x="1133856" y="4806696"/>
-            <a:ext cx="9820656" cy="426720"/>
+            <a:off x="8083296" y="2647188"/>
+            <a:ext cx="2825496" cy="1097280"/>
           </a:xfrm>
           <a:prstGeom prst="rect">
             <a:avLst/>
@@ -8674,7 +7966,24 @@
                 <a:ea typeface="Pretendard" pitchFamily="34" charset="-122"/>
                 <a:cs typeface="Pretendard" pitchFamily="34" charset="-120"/>
               </a:rPr>
-              <a:t>Rendering Rules (Cont. 3/3)</a:t>
+              <a:t>Rendering Rules</a:t>
+            </a:r>
+            <a:pPr algn="ctr" indent="0" marL="0">
+              <a:lnSpc>
+                <a:spcPct val="120000"/>
+              </a:lnSpc>
+              <a:buNone/>
+            </a:pPr>
+            <a:r>
+              <a:rPr lang="en-US" sz="2000" dirty="0">
+                <a:solidFill>
+                  <a:srgbClr val="919191"/>
+                </a:solidFill>
+                <a:latin typeface="Pretendard" pitchFamily="34" charset="0"/>
+                <a:ea typeface="Pretendard" pitchFamily="34" charset="-122"/>
+                <a:cs typeface="Pretendard" pitchFamily="34" charset="-120"/>
+              </a:rPr>
+              <a:t> (Cont. 3/3)</a:t>
             </a:r>
             <a:endParaRPr lang="en-US" sz="3400" dirty="0"/>
           </a:p>
@@ -8794,243 +8103,16 @@
           <a:chExt cx="0" cy="0"/>
         </a:xfrm>
       </p:grpSpPr>
-      <p:pic>
-        <p:nvPicPr>
-          <p:cNvPr id="2" name="Image 0" descr="preencoded.png">    </p:cNvPr>
-          <p:cNvPicPr>
-            <a:picLocks noChangeAspect="1"/>
-          </p:cNvPicPr>
-          <p:nvPr/>
-        </p:nvPicPr>
-        <p:blipFill>
-          <a:blip r:embed="rId1">
-            <a:extLst>
-              <a:ext uri="{96DAC541-7B7A-43D3-8B79-37D633B846F1}">
-                <asvg:svgBlip xmlns:asvg="http://schemas.microsoft.com/office/drawing/2016/SVG/main" r:embed="rId2"/>
-              </a:ext>
-            </a:extLst>
-          </a:blip>
-          <a:stretch>
-            <a:fillRect/>
-          </a:stretch>
-        </p:blipFill>
-        <p:spPr>
-          <a:xfrm>
-            <a:off x="914400" y="1865376"/>
-            <a:ext cx="10241280" cy="1024128"/>
-          </a:xfrm>
-          <a:prstGeom prst="rect">
-            <a:avLst/>
-          </a:prstGeom>
-        </p:spPr>
-      </p:pic>
-      <p:sp>
-        <p:nvSpPr>
-          <p:cNvPr id="3" name="Shape 0"/>
+      <p:sp>
+        <p:nvSpPr>
+          <p:cNvPr id="2" name="Shape 0"/>
           <p:cNvSpPr/>
           <p:nvPr/>
         </p:nvSpPr>
         <p:spPr>
           <a:xfrm>
-            <a:off x="914400" y="1865376"/>
-            <a:ext cx="10241280" cy="1024128"/>
-          </a:xfrm>
-          <a:prstGeom prst="rect">
-            <a:avLst/>
-          </a:prstGeom>
-          <a:solidFill>
-            <a:srgbClr val="FFFFFF">
-              <a:alpha val="0"/>
-            </a:srgbClr>
-          </a:solidFill>
-          <a:ln w="12700">
-            <a:solidFill>
-              <a:srgbClr val="E2E8F0">
-                <a:alpha val="0"/>
-              </a:srgbClr>
-            </a:solidFill>
-            <a:prstDash val="solid"/>
-          </a:ln>
-          <a:effectLst>
-            <a:outerShdw sx="100000" sy="100000" kx="0" ky="0" algn="bl" rotWithShape="0" blurRad="12700" dist="50800" dir="2700000">
-              <a:srgbClr val="000000">
-                <a:alpha val="8000"/>
-              </a:srgbClr>
-            </a:outerShdw>
-          </a:effectLst>
-        </p:spPr>
-      </p:sp>
-      <p:pic>
-        <p:nvPicPr>
-          <p:cNvPr id="4" name="Image 1" descr="preencoded.png">    </p:cNvPr>
-          <p:cNvPicPr>
-            <a:picLocks noChangeAspect="1"/>
-          </p:cNvPicPr>
-          <p:nvPr/>
-        </p:nvPicPr>
-        <p:blipFill>
-          <a:blip r:embed="rId3">
-            <a:extLst>
-              <a:ext uri="{96DAC541-7B7A-43D3-8B79-37D633B846F1}">
-                <asvg:svgBlip xmlns:asvg="http://schemas.microsoft.com/office/drawing/2016/SVG/main" r:embed="rId4"/>
-              </a:ext>
-            </a:extLst>
-          </a:blip>
-          <a:stretch>
-            <a:fillRect/>
-          </a:stretch>
-        </p:blipFill>
-        <p:spPr>
-          <a:xfrm>
-            <a:off x="914400" y="3191256"/>
-            <a:ext cx="10241280" cy="1024128"/>
-          </a:xfrm>
-          <a:prstGeom prst="rect">
-            <a:avLst/>
-          </a:prstGeom>
-        </p:spPr>
-      </p:pic>
-      <p:sp>
-        <p:nvSpPr>
-          <p:cNvPr id="5" name="Shape 1"/>
-          <p:cNvSpPr/>
-          <p:nvPr/>
-        </p:nvSpPr>
-        <p:spPr>
-          <a:xfrm>
-            <a:off x="914400" y="3191256"/>
-            <a:ext cx="10241280" cy="1024128"/>
-          </a:xfrm>
-          <a:prstGeom prst="rect">
-            <a:avLst/>
-          </a:prstGeom>
-          <a:solidFill>
-            <a:srgbClr val="FFFFFF">
-              <a:alpha val="0"/>
-            </a:srgbClr>
-          </a:solidFill>
-          <a:ln w="12700">
-            <a:solidFill>
-              <a:srgbClr val="E2E8F0">
-                <a:alpha val="0"/>
-              </a:srgbClr>
-            </a:solidFill>
-            <a:prstDash val="solid"/>
-          </a:ln>
-          <a:effectLst>
-            <a:outerShdw sx="100000" sy="100000" kx="0" ky="0" algn="bl" rotWithShape="0" blurRad="12700" dist="50800" dir="2700000">
-              <a:srgbClr val="000000">
-                <a:alpha val="8000"/>
-              </a:srgbClr>
-            </a:outerShdw>
-          </a:effectLst>
-        </p:spPr>
-      </p:sp>
-      <p:pic>
-        <p:nvPicPr>
-          <p:cNvPr id="6" name="Image 2" descr="preencoded.png">    </p:cNvPr>
-          <p:cNvPicPr>
-            <a:picLocks noChangeAspect="1"/>
-          </p:cNvPicPr>
-          <p:nvPr/>
-        </p:nvPicPr>
-        <p:blipFill>
-          <a:blip r:embed="rId5">
-            <a:extLst>
-              <a:ext uri="{96DAC541-7B7A-43D3-8B79-37D633B846F1}">
-                <asvg:svgBlip xmlns:asvg="http://schemas.microsoft.com/office/drawing/2016/SVG/main" r:embed="rId6"/>
-              </a:ext>
-            </a:extLst>
-          </a:blip>
-          <a:stretch>
-            <a:fillRect/>
-          </a:stretch>
-        </p:blipFill>
-        <p:spPr>
-          <a:xfrm>
-            <a:off x="914400" y="4507992"/>
-            <a:ext cx="10241280" cy="1024128"/>
-          </a:xfrm>
-          <a:prstGeom prst="rect">
-            <a:avLst/>
-          </a:prstGeom>
-        </p:spPr>
-      </p:pic>
-      <p:sp>
-        <p:nvSpPr>
-          <p:cNvPr id="7" name="Shape 2"/>
-          <p:cNvSpPr/>
-          <p:nvPr/>
-        </p:nvSpPr>
-        <p:spPr>
-          <a:xfrm>
-            <a:off x="914400" y="4507992"/>
-            <a:ext cx="10241280" cy="1024128"/>
-          </a:xfrm>
-          <a:prstGeom prst="rect">
-            <a:avLst/>
-          </a:prstGeom>
-          <a:solidFill>
-            <a:srgbClr val="FFFFFF">
-              <a:alpha val="0"/>
-            </a:srgbClr>
-          </a:solidFill>
-          <a:ln w="12700">
-            <a:solidFill>
-              <a:srgbClr val="E2E8F0">
-                <a:alpha val="0"/>
-              </a:srgbClr>
-            </a:solidFill>
-            <a:prstDash val="solid"/>
-          </a:ln>
-          <a:effectLst>
-            <a:outerShdw sx="100000" sy="100000" kx="0" ky="0" algn="bl" rotWithShape="0" blurRad="12700" dist="50800" dir="2700000">
-              <a:srgbClr val="000000">
-                <a:alpha val="8000"/>
-              </a:srgbClr>
-            </a:outerShdw>
-          </a:effectLst>
-        </p:spPr>
-      </p:sp>
-      <p:sp>
-        <p:nvSpPr>
-          <p:cNvPr id="8" name="Shape 3"/>
-          <p:cNvSpPr/>
-          <p:nvPr/>
-        </p:nvSpPr>
-        <p:spPr>
-          <a:xfrm>
-            <a:off x="786384" y="1956816"/>
-            <a:ext cx="32004" cy="3483864"/>
-          </a:xfrm>
-          <a:prstGeom prst="rect">
-            <a:avLst/>
-          </a:prstGeom>
-          <a:solidFill>
-            <a:srgbClr val="DBEAFE">
-              <a:alpha val="80000"/>
-            </a:srgbClr>
-          </a:solidFill>
-          <a:ln w="12700">
-            <a:solidFill>
-              <a:srgbClr val="DBEAFE">
-                <a:alpha val="0"/>
-              </a:srgbClr>
-            </a:solidFill>
-            <a:prstDash val="solid"/>
-          </a:ln>
-        </p:spPr>
-      </p:sp>
-      <p:sp>
-        <p:nvSpPr>
-          <p:cNvPr id="9" name="Shape 4"/>
-          <p:cNvSpPr/>
-          <p:nvPr/>
-        </p:nvSpPr>
-        <p:spPr>
-          <a:xfrm>
-            <a:off x="914400" y="1865376"/>
-            <a:ext cx="73152" cy="1024128"/>
+            <a:off x="822960" y="1938528"/>
+            <a:ext cx="73152" cy="2514600"/>
           </a:xfrm>
           <a:prstGeom prst="rect">
             <a:avLst/>
@@ -9050,14 +8132,14 @@
       </p:sp>
       <p:sp>
         <p:nvSpPr>
-          <p:cNvPr id="10" name="Shape 5"/>
+          <p:cNvPr id="3" name="Shape 1"/>
           <p:cNvSpPr/>
           <p:nvPr/>
         </p:nvSpPr>
         <p:spPr>
           <a:xfrm>
-            <a:off x="914400" y="3191256"/>
-            <a:ext cx="73152" cy="1024128"/>
+            <a:off x="4343400" y="1938528"/>
+            <a:ext cx="73152" cy="2514600"/>
           </a:xfrm>
           <a:prstGeom prst="rect">
             <a:avLst/>
@@ -9077,14 +8159,14 @@
       </p:sp>
       <p:sp>
         <p:nvSpPr>
-          <p:cNvPr id="11" name="Shape 6"/>
+          <p:cNvPr id="4" name="Shape 2"/>
           <p:cNvSpPr/>
           <p:nvPr/>
         </p:nvSpPr>
         <p:spPr>
           <a:xfrm>
-            <a:off x="914400" y="4507992"/>
-            <a:ext cx="73152" cy="1024128"/>
+            <a:off x="7863840" y="1938528"/>
+            <a:ext cx="73152" cy="2514600"/>
           </a:xfrm>
           <a:prstGeom prst="rect">
             <a:avLst/>
@@ -9104,7 +8186,7 @@
       </p:sp>
       <p:sp>
         <p:nvSpPr>
-          <p:cNvPr id="12" name="mdpr:1-3-4b2f30:title:__title:1-3-4b2f30"/>
+          <p:cNvPr id="5" name="mdpr:1-3-4b2f30:title:__title:1-3-4b2f30"/>
           <p:cNvSpPr txBox="1"/>
           <p:nvPr/>
         </p:nvSpPr>
@@ -9146,14 +8228,14 @@
       </p:sp>
       <p:sp>
         <p:nvSpPr>
-          <p:cNvPr id="13" name="mdpr:1-3-4b2f30:item-1:block-23-chunk-1"/>
+          <p:cNvPr id="6" name="mdpr:1-3-4b2f30:item-1:block-23-chunk-1"/>
           <p:cNvSpPr txBox="1"/>
           <p:nvPr/>
         </p:nvSpPr>
         <p:spPr>
           <a:xfrm>
-            <a:off x="1133856" y="2164080"/>
-            <a:ext cx="9820656" cy="426720"/>
+            <a:off x="1042416" y="2982468"/>
+            <a:ext cx="2825496" cy="426720"/>
           </a:xfrm>
           <a:prstGeom prst="rect">
             <a:avLst/>
@@ -9188,14 +8270,14 @@
       </p:sp>
       <p:sp>
         <p:nvSpPr>
-          <p:cNvPr id="14" name="mdpr:1-3-4b2f30:item-2:block-23-chunk-1"/>
+          <p:cNvPr id="7" name="mdpr:1-3-4b2f30:item-2:block-23-chunk-1"/>
           <p:cNvSpPr txBox="1"/>
           <p:nvPr/>
         </p:nvSpPr>
         <p:spPr>
           <a:xfrm>
-            <a:off x="1133856" y="3489960"/>
-            <a:ext cx="9820656" cy="426720"/>
+            <a:off x="4562856" y="2814828"/>
+            <a:ext cx="2825496" cy="762000"/>
           </a:xfrm>
           <a:prstGeom prst="rect">
             <a:avLst/>
@@ -9230,14 +8312,14 @@
       </p:sp>
       <p:sp>
         <p:nvSpPr>
-          <p:cNvPr id="15" name="mdpr:1-3-4b2f30:item-3:block-23-chunk-1"/>
+          <p:cNvPr id="8" name="mdpr:1-3-4b2f30:item-3:block-23-chunk-1"/>
           <p:cNvSpPr txBox="1"/>
           <p:nvPr/>
         </p:nvSpPr>
         <p:spPr>
           <a:xfrm>
-            <a:off x="1133856" y="4806696"/>
-            <a:ext cx="9820656" cy="426720"/>
+            <a:off x="8083296" y="2982468"/>
+            <a:ext cx="2825496" cy="426720"/>
           </a:xfrm>
           <a:prstGeom prst="rect">
             <a:avLst/>
@@ -9508,35 +8590,6 @@
         </p:nvSpPr>
         <p:spPr>
           <a:xfrm>
-            <a:off x="786384" y="1956816"/>
-            <a:ext cx="32004" cy="3483864"/>
-          </a:xfrm>
-          <a:prstGeom prst="rect">
-            <a:avLst/>
-          </a:prstGeom>
-          <a:solidFill>
-            <a:srgbClr val="DBEAFE">
-              <a:alpha val="80000"/>
-            </a:srgbClr>
-          </a:solidFill>
-          <a:ln w="12700">
-            <a:solidFill>
-              <a:srgbClr val="DBEAFE">
-                <a:alpha val="0"/>
-              </a:srgbClr>
-            </a:solidFill>
-            <a:prstDash val="solid"/>
-          </a:ln>
-        </p:spPr>
-      </p:sp>
-      <p:sp>
-        <p:nvSpPr>
-          <p:cNvPr id="9" name="Shape 4"/>
-          <p:cNvSpPr/>
-          <p:nvPr/>
-        </p:nvSpPr>
-        <p:spPr>
-          <a:xfrm>
             <a:off x="914400" y="1865376"/>
             <a:ext cx="73152" cy="1024128"/>
           </a:xfrm>
@@ -9558,7 +8611,7 @@
       </p:sp>
       <p:sp>
         <p:nvSpPr>
-          <p:cNvPr id="10" name="Shape 5"/>
+          <p:cNvPr id="9" name="Shape 4"/>
           <p:cNvSpPr/>
           <p:nvPr/>
         </p:nvSpPr>
@@ -9585,7 +8638,7 @@
       </p:sp>
       <p:sp>
         <p:nvSpPr>
-          <p:cNvPr id="11" name="Shape 6"/>
+          <p:cNvPr id="10" name="Shape 5"/>
           <p:cNvSpPr/>
           <p:nvPr/>
         </p:nvSpPr>
@@ -9612,7 +8665,7 @@
       </p:sp>
       <p:sp>
         <p:nvSpPr>
-          <p:cNvPr id="12" name="mdpr:2-3-fe6c97:title:__title:2-3-fe6c97"/>
+          <p:cNvPr id="11" name="mdpr:2-3-fe6c97:title:__title:2-3-fe6c97"/>
           <p:cNvSpPr txBox="1"/>
           <p:nvPr/>
         </p:nvSpPr>
@@ -9646,7 +8699,24 @@
                 <a:ea typeface="Pretendard" pitchFamily="34" charset="-122"/>
                 <a:cs typeface="Pretendard" pitchFamily="34" charset="-120"/>
               </a:rPr>
-              <a:t>Validation and Overflow Policy (Cont. 2/3)</a:t>
+              <a:t>Validation and Overflow Policy</a:t>
+            </a:r>
+            <a:pPr algn="ctr" indent="0" marL="0">
+              <a:lnSpc>
+                <a:spcPct val="120000"/>
+              </a:lnSpc>
+              <a:buNone/>
+            </a:pPr>
+            <a:r>
+              <a:rPr lang="en-US" sz="2000" dirty="0">
+                <a:solidFill>
+                  <a:srgbClr val="919191"/>
+                </a:solidFill>
+                <a:latin typeface="Pretendard" pitchFamily="34" charset="0"/>
+                <a:ea typeface="Pretendard" pitchFamily="34" charset="-122"/>
+                <a:cs typeface="Pretendard" pitchFamily="34" charset="-120"/>
+              </a:rPr>
+              <a:t> (Cont. 2/3)</a:t>
             </a:r>
             <a:endParaRPr lang="en-US" sz="3400" dirty="0"/>
           </a:p>
@@ -9654,7 +8724,7 @@
       </p:sp>
       <p:sp>
         <p:nvSpPr>
-          <p:cNvPr id="13" name="mdpr:2-3-fe6c97:item-1:block-23-chunk-2"/>
+          <p:cNvPr id="12" name="mdpr:2-3-fe6c97:item-1:block-23-chunk-2"/>
           <p:cNvSpPr txBox="1"/>
           <p:nvPr/>
         </p:nvSpPr>
@@ -9696,7 +8766,7 @@
       </p:sp>
       <p:sp>
         <p:nvSpPr>
-          <p:cNvPr id="14" name="mdpr:2-3-fe6c97:item-2:block-23-chunk-2"/>
+          <p:cNvPr id="13" name="mdpr:2-3-fe6c97:item-2:block-23-chunk-2"/>
           <p:cNvSpPr txBox="1"/>
           <p:nvPr/>
         </p:nvSpPr>
@@ -9738,7 +8808,7 @@
       </p:sp>
       <p:sp>
         <p:nvSpPr>
-          <p:cNvPr id="15" name="mdpr:2-3-fe6c97:item-3:block-23-chunk-2"/>
+          <p:cNvPr id="14" name="mdpr:2-3-fe6c97:item-3:block-23-chunk-2"/>
           <p:cNvSpPr txBox="1"/>
           <p:nvPr/>
         </p:nvSpPr>
@@ -9818,35 +8888,6 @@
         </p:nvSpPr>
         <p:spPr>
           <a:xfrm>
-            <a:off x="6080760" y="1737360"/>
-            <a:ext cx="22860" cy="3968496"/>
-          </a:xfrm>
-          <a:prstGeom prst="rect">
-            <a:avLst/>
-          </a:prstGeom>
-          <a:solidFill>
-            <a:srgbClr val="E2E8F0">
-              <a:alpha val="90000"/>
-            </a:srgbClr>
-          </a:solidFill>
-          <a:ln w="12700">
-            <a:solidFill>
-              <a:srgbClr val="E2E8F0">
-                <a:alpha val="0"/>
-              </a:srgbClr>
-            </a:solidFill>
-            <a:prstDash val="solid"/>
-          </a:ln>
-        </p:spPr>
-      </p:sp>
-      <p:sp>
-        <p:nvSpPr>
-          <p:cNvPr id="3" name="Shape 1"/>
-          <p:cNvSpPr/>
-          <p:nvPr/>
-        </p:nvSpPr>
-        <p:spPr>
-          <a:xfrm>
             <a:off x="822960" y="1737360"/>
             <a:ext cx="73152" cy="841248"/>
           </a:xfrm>
@@ -9868,7 +8909,7 @@
       </p:sp>
       <p:sp>
         <p:nvSpPr>
-          <p:cNvPr id="4" name="Shape 2"/>
+          <p:cNvPr id="3" name="Shape 1"/>
           <p:cNvSpPr/>
           <p:nvPr/>
         </p:nvSpPr>
@@ -9895,7 +8936,7 @@
       </p:sp>
       <p:sp>
         <p:nvSpPr>
-          <p:cNvPr id="5" name="Shape 3"/>
+          <p:cNvPr id="4" name="Shape 2"/>
           <p:cNvSpPr/>
           <p:nvPr/>
         </p:nvSpPr>
@@ -9922,7 +8963,7 @@
       </p:sp>
       <p:sp>
         <p:nvSpPr>
-          <p:cNvPr id="6" name="Shape 4"/>
+          <p:cNvPr id="5" name="Shape 3"/>
           <p:cNvSpPr/>
           <p:nvPr/>
         </p:nvSpPr>
@@ -9949,7 +8990,7 @@
       </p:sp>
       <p:sp>
         <p:nvSpPr>
-          <p:cNvPr id="7" name="Shape 5"/>
+          <p:cNvPr id="6" name="Shape 4"/>
           <p:cNvSpPr/>
           <p:nvPr/>
         </p:nvSpPr>
@@ -9976,7 +9017,7 @@
       </p:sp>
       <p:sp>
         <p:nvSpPr>
-          <p:cNvPr id="8" name="Shape 6"/>
+          <p:cNvPr id="7" name="Shape 5"/>
           <p:cNvSpPr/>
           <p:nvPr/>
         </p:nvSpPr>
@@ -10003,7 +9044,7 @@
       </p:sp>
       <p:sp>
         <p:nvSpPr>
-          <p:cNvPr id="9" name="Shape 7"/>
+          <p:cNvPr id="8" name="Shape 6"/>
           <p:cNvSpPr/>
           <p:nvPr/>
         </p:nvSpPr>
@@ -10030,7 +9071,7 @@
       </p:sp>
       <p:sp>
         <p:nvSpPr>
-          <p:cNvPr id="10" name="Shape 8"/>
+          <p:cNvPr id="9" name="Shape 7"/>
           <p:cNvSpPr/>
           <p:nvPr/>
         </p:nvSpPr>
@@ -10057,7 +9098,7 @@
       </p:sp>
       <p:sp>
         <p:nvSpPr>
-          <p:cNvPr id="11" name="mdpr:1-2-0772f8:title:__title:1-2-0772f8"/>
+          <p:cNvPr id="10" name="mdpr:1-2-0772f8:title:__title:1-2-0772f8"/>
           <p:cNvSpPr txBox="1"/>
           <p:nvPr/>
         </p:nvSpPr>
@@ -10099,7 +9140,7 @@
       </p:sp>
       <p:sp>
         <p:nvSpPr>
-          <p:cNvPr id="12" name="mdpr:1-2-0772f8:toc-item-1:toc-item-1"/>
+          <p:cNvPr id="11" name="mdpr:1-2-0772f8:toc-item-1:toc-item-1"/>
           <p:cNvSpPr txBox="1"/>
           <p:nvPr/>
         </p:nvSpPr>
@@ -10141,7 +9182,7 @@
       </p:sp>
       <p:sp>
         <p:nvSpPr>
-          <p:cNvPr id="13" name="mdpr:1-2-0772f8:toc-item-2:toc-item-2"/>
+          <p:cNvPr id="12" name="mdpr:1-2-0772f8:toc-item-2:toc-item-2"/>
           <p:cNvSpPr txBox="1"/>
           <p:nvPr/>
         </p:nvSpPr>
@@ -10183,7 +9224,7 @@
       </p:sp>
       <p:sp>
         <p:nvSpPr>
-          <p:cNvPr id="14" name="mdpr:1-2-0772f8:toc-item-3:toc-item-3"/>
+          <p:cNvPr id="13" name="mdpr:1-2-0772f8:toc-item-3:toc-item-3"/>
           <p:cNvSpPr txBox="1"/>
           <p:nvPr/>
         </p:nvSpPr>
@@ -10225,7 +9266,7 @@
       </p:sp>
       <p:sp>
         <p:nvSpPr>
-          <p:cNvPr id="15" name="mdpr:1-2-0772f8:toc-item-4:toc-item-4"/>
+          <p:cNvPr id="14" name="mdpr:1-2-0772f8:toc-item-4:toc-item-4"/>
           <p:cNvSpPr txBox="1"/>
           <p:nvPr/>
         </p:nvSpPr>
@@ -10267,7 +9308,7 @@
       </p:sp>
       <p:sp>
         <p:nvSpPr>
-          <p:cNvPr id="16" name="mdpr:1-2-0772f8:toc-item-5:toc-item-5"/>
+          <p:cNvPr id="15" name="mdpr:1-2-0772f8:toc-item-5:toc-item-5"/>
           <p:cNvSpPr txBox="1"/>
           <p:nvPr/>
         </p:nvSpPr>
@@ -10309,7 +9350,7 @@
       </p:sp>
       <p:sp>
         <p:nvSpPr>
-          <p:cNvPr id="17" name="mdpr:1-2-0772f8:toc-item-6:toc-item-6"/>
+          <p:cNvPr id="16" name="mdpr:1-2-0772f8:toc-item-6:toc-item-6"/>
           <p:cNvSpPr txBox="1"/>
           <p:nvPr/>
         </p:nvSpPr>
@@ -10351,7 +9392,7 @@
       </p:sp>
       <p:sp>
         <p:nvSpPr>
-          <p:cNvPr id="18" name="mdpr:1-2-0772f8:toc-item-7:toc-item-7"/>
+          <p:cNvPr id="17" name="mdpr:1-2-0772f8:toc-item-7:toc-item-7"/>
           <p:cNvSpPr txBox="1"/>
           <p:nvPr/>
         </p:nvSpPr>
@@ -10393,7 +9434,7 @@
       </p:sp>
       <p:sp>
         <p:nvSpPr>
-          <p:cNvPr id="19" name="mdpr:1-2-0772f8:toc-item-8:toc-item-8"/>
+          <p:cNvPr id="18" name="mdpr:1-2-0772f8:toc-item-8:toc-item-8"/>
           <p:cNvSpPr txBox="1"/>
           <p:nvPr/>
         </p:nvSpPr>
@@ -10567,7 +9608,24 @@
                 <a:ea typeface="Pretendard" pitchFamily="34" charset="-122"/>
                 <a:cs typeface="Pretendard" pitchFamily="34" charset="-120"/>
               </a:rPr>
-              <a:t>Validation and Overflow Policy (Cont. 3/3)</a:t>
+              <a:t>Validation and Overflow Policy</a:t>
+            </a:r>
+            <a:pPr algn="ctr" indent="0" marL="0">
+              <a:lnSpc>
+                <a:spcPct val="120000"/>
+              </a:lnSpc>
+              <a:buNone/>
+            </a:pPr>
+            <a:r>
+              <a:rPr lang="en-US" sz="2000" dirty="0">
+                <a:solidFill>
+                  <a:srgbClr val="919191"/>
+                </a:solidFill>
+                <a:latin typeface="Pretendard" pitchFamily="34" charset="0"/>
+                <a:ea typeface="Pretendard" pitchFamily="34" charset="-122"/>
+                <a:cs typeface="Pretendard" pitchFamily="34" charset="-120"/>
+              </a:rPr>
+              <a:t> (Cont. 3/3)</a:t>
             </a:r>
             <a:endParaRPr lang="en-US" sz="3400" dirty="0"/>
           </a:p>
@@ -11851,35 +10909,6 @@
         </p:nvSpPr>
         <p:spPr>
           <a:xfrm>
-            <a:off x="786384" y="1956816"/>
-            <a:ext cx="32004" cy="3483864"/>
-          </a:xfrm>
-          <a:prstGeom prst="rect">
-            <a:avLst/>
-          </a:prstGeom>
-          <a:solidFill>
-            <a:srgbClr val="DBEAFE">
-              <a:alpha val="80000"/>
-            </a:srgbClr>
-          </a:solidFill>
-          <a:ln w="12700">
-            <a:solidFill>
-              <a:srgbClr val="DBEAFE">
-                <a:alpha val="0"/>
-              </a:srgbClr>
-            </a:solidFill>
-            <a:prstDash val="solid"/>
-          </a:ln>
-        </p:spPr>
-      </p:sp>
-      <p:sp>
-        <p:nvSpPr>
-          <p:cNvPr id="9" name="Shape 4"/>
-          <p:cNvSpPr/>
-          <p:nvPr/>
-        </p:nvSpPr>
-        <p:spPr>
-          <a:xfrm>
             <a:off x="914400" y="1865376"/>
             <a:ext cx="73152" cy="1024128"/>
           </a:xfrm>
@@ -11901,7 +10930,7 @@
       </p:sp>
       <p:sp>
         <p:nvSpPr>
-          <p:cNvPr id="10" name="Shape 5"/>
+          <p:cNvPr id="9" name="Shape 4"/>
           <p:cNvSpPr/>
           <p:nvPr/>
         </p:nvSpPr>
@@ -11928,7 +10957,7 @@
       </p:sp>
       <p:sp>
         <p:nvSpPr>
-          <p:cNvPr id="11" name="Shape 6"/>
+          <p:cNvPr id="10" name="Shape 5"/>
           <p:cNvSpPr/>
           <p:nvPr/>
         </p:nvSpPr>
@@ -11955,7 +10984,7 @@
       </p:sp>
       <p:sp>
         <p:nvSpPr>
-          <p:cNvPr id="12" name="mdpr:2-3-4f52c2:title:__title:2-3-4f52c2"/>
+          <p:cNvPr id="11" name="mdpr:2-3-4f52c2:title:__title:2-3-4f52c2"/>
           <p:cNvSpPr txBox="1"/>
           <p:nvPr/>
         </p:nvSpPr>
@@ -11989,7 +11018,24 @@
                 <a:ea typeface="Pretendard" pitchFamily="34" charset="-122"/>
                 <a:cs typeface="Pretendard" pitchFamily="34" charset="-120"/>
               </a:rPr>
-              <a:t>Example: examples/basic/deck.md (Cont. 2/3)</a:t>
+              <a:t>Example: examples/basic/deck.md</a:t>
+            </a:r>
+            <a:pPr algn="ctr" indent="0" marL="0">
+              <a:lnSpc>
+                <a:spcPct val="120000"/>
+              </a:lnSpc>
+              <a:buNone/>
+            </a:pPr>
+            <a:r>
+              <a:rPr lang="en-US" sz="2000" dirty="0">
+                <a:solidFill>
+                  <a:srgbClr val="919191"/>
+                </a:solidFill>
+                <a:latin typeface="Pretendard" pitchFamily="34" charset="0"/>
+                <a:ea typeface="Pretendard" pitchFamily="34" charset="-122"/>
+                <a:cs typeface="Pretendard" pitchFamily="34" charset="-120"/>
+              </a:rPr>
+              <a:t> (Cont. 2/3)</a:t>
             </a:r>
             <a:endParaRPr lang="en-US" sz="3400" dirty="0"/>
           </a:p>
@@ -11997,7 +11043,7 @@
       </p:sp>
       <p:sp>
         <p:nvSpPr>
-          <p:cNvPr id="13" name="mdpr:2-3-4f52c2:item-1:block-28-chunk-2"/>
+          <p:cNvPr id="12" name="mdpr:2-3-4f52c2:item-1:block-28-chunk-2"/>
           <p:cNvSpPr txBox="1"/>
           <p:nvPr/>
         </p:nvSpPr>
@@ -12039,7 +11085,7 @@
       </p:sp>
       <p:sp>
         <p:nvSpPr>
-          <p:cNvPr id="14" name="mdpr:2-3-4f52c2:item-2:block-28-chunk-2"/>
+          <p:cNvPr id="13" name="mdpr:2-3-4f52c2:item-2:block-28-chunk-2"/>
           <p:cNvSpPr txBox="1"/>
           <p:nvPr/>
         </p:nvSpPr>
@@ -12081,7 +11127,7 @@
       </p:sp>
       <p:sp>
         <p:nvSpPr>
-          <p:cNvPr id="15" name="mdpr:2-3-4f52c2:item-3:block-28-chunk-2"/>
+          <p:cNvPr id="14" name="mdpr:2-3-4f52c2:item-3:block-28-chunk-2"/>
           <p:cNvSpPr txBox="1"/>
           <p:nvPr/>
         </p:nvSpPr>
@@ -12153,243 +11199,16 @@
           <a:chExt cx="0" cy="0"/>
         </a:xfrm>
       </p:grpSpPr>
-      <p:pic>
-        <p:nvPicPr>
-          <p:cNvPr id="2" name="Image 0" descr="preencoded.png">    </p:cNvPr>
-          <p:cNvPicPr>
-            <a:picLocks noChangeAspect="1"/>
-          </p:cNvPicPr>
-          <p:nvPr/>
-        </p:nvPicPr>
-        <p:blipFill>
-          <a:blip r:embed="rId1">
-            <a:extLst>
-              <a:ext uri="{96DAC541-7B7A-43D3-8B79-37D633B846F1}">
-                <asvg:svgBlip xmlns:asvg="http://schemas.microsoft.com/office/drawing/2016/SVG/main" r:embed="rId2"/>
-              </a:ext>
-            </a:extLst>
-          </a:blip>
-          <a:stretch>
-            <a:fillRect/>
-          </a:stretch>
-        </p:blipFill>
-        <p:spPr>
-          <a:xfrm>
-            <a:off x="914400" y="1865376"/>
-            <a:ext cx="10241280" cy="1024128"/>
-          </a:xfrm>
-          <a:prstGeom prst="rect">
-            <a:avLst/>
-          </a:prstGeom>
-        </p:spPr>
-      </p:pic>
-      <p:sp>
-        <p:nvSpPr>
-          <p:cNvPr id="3" name="Shape 0"/>
+      <p:sp>
+        <p:nvSpPr>
+          <p:cNvPr id="2" name="Shape 0"/>
           <p:cNvSpPr/>
           <p:nvPr/>
         </p:nvSpPr>
         <p:spPr>
           <a:xfrm>
-            <a:off x="914400" y="1865376"/>
-            <a:ext cx="10241280" cy="1024128"/>
-          </a:xfrm>
-          <a:prstGeom prst="rect">
-            <a:avLst/>
-          </a:prstGeom>
-          <a:solidFill>
-            <a:srgbClr val="FFFFFF">
-              <a:alpha val="0"/>
-            </a:srgbClr>
-          </a:solidFill>
-          <a:ln w="12700">
-            <a:solidFill>
-              <a:srgbClr val="E2E8F0">
-                <a:alpha val="0"/>
-              </a:srgbClr>
-            </a:solidFill>
-            <a:prstDash val="solid"/>
-          </a:ln>
-          <a:effectLst>
-            <a:outerShdw sx="100000" sy="100000" kx="0" ky="0" algn="bl" rotWithShape="0" blurRad="12700" dist="50800" dir="2700000">
-              <a:srgbClr val="000000">
-                <a:alpha val="8000"/>
-              </a:srgbClr>
-            </a:outerShdw>
-          </a:effectLst>
-        </p:spPr>
-      </p:sp>
-      <p:pic>
-        <p:nvPicPr>
-          <p:cNvPr id="4" name="Image 1" descr="preencoded.png">    </p:cNvPr>
-          <p:cNvPicPr>
-            <a:picLocks noChangeAspect="1"/>
-          </p:cNvPicPr>
-          <p:nvPr/>
-        </p:nvPicPr>
-        <p:blipFill>
-          <a:blip r:embed="rId3">
-            <a:extLst>
-              <a:ext uri="{96DAC541-7B7A-43D3-8B79-37D633B846F1}">
-                <asvg:svgBlip xmlns:asvg="http://schemas.microsoft.com/office/drawing/2016/SVG/main" r:embed="rId4"/>
-              </a:ext>
-            </a:extLst>
-          </a:blip>
-          <a:stretch>
-            <a:fillRect/>
-          </a:stretch>
-        </p:blipFill>
-        <p:spPr>
-          <a:xfrm>
-            <a:off x="914400" y="3191256"/>
-            <a:ext cx="10241280" cy="1024128"/>
-          </a:xfrm>
-          <a:prstGeom prst="rect">
-            <a:avLst/>
-          </a:prstGeom>
-        </p:spPr>
-      </p:pic>
-      <p:sp>
-        <p:nvSpPr>
-          <p:cNvPr id="5" name="Shape 1"/>
-          <p:cNvSpPr/>
-          <p:nvPr/>
-        </p:nvSpPr>
-        <p:spPr>
-          <a:xfrm>
-            <a:off x="914400" y="3191256"/>
-            <a:ext cx="10241280" cy="1024128"/>
-          </a:xfrm>
-          <a:prstGeom prst="rect">
-            <a:avLst/>
-          </a:prstGeom>
-          <a:solidFill>
-            <a:srgbClr val="FFFFFF">
-              <a:alpha val="0"/>
-            </a:srgbClr>
-          </a:solidFill>
-          <a:ln w="12700">
-            <a:solidFill>
-              <a:srgbClr val="E2E8F0">
-                <a:alpha val="0"/>
-              </a:srgbClr>
-            </a:solidFill>
-            <a:prstDash val="solid"/>
-          </a:ln>
-          <a:effectLst>
-            <a:outerShdw sx="100000" sy="100000" kx="0" ky="0" algn="bl" rotWithShape="0" blurRad="12700" dist="50800" dir="2700000">
-              <a:srgbClr val="000000">
-                <a:alpha val="8000"/>
-              </a:srgbClr>
-            </a:outerShdw>
-          </a:effectLst>
-        </p:spPr>
-      </p:sp>
-      <p:pic>
-        <p:nvPicPr>
-          <p:cNvPr id="6" name="Image 2" descr="preencoded.png">    </p:cNvPr>
-          <p:cNvPicPr>
-            <a:picLocks noChangeAspect="1"/>
-          </p:cNvPicPr>
-          <p:nvPr/>
-        </p:nvPicPr>
-        <p:blipFill>
-          <a:blip r:embed="rId5">
-            <a:extLst>
-              <a:ext uri="{96DAC541-7B7A-43D3-8B79-37D633B846F1}">
-                <asvg:svgBlip xmlns:asvg="http://schemas.microsoft.com/office/drawing/2016/SVG/main" r:embed="rId6"/>
-              </a:ext>
-            </a:extLst>
-          </a:blip>
-          <a:stretch>
-            <a:fillRect/>
-          </a:stretch>
-        </p:blipFill>
-        <p:spPr>
-          <a:xfrm>
-            <a:off x="914400" y="4507992"/>
-            <a:ext cx="10241280" cy="1024128"/>
-          </a:xfrm>
-          <a:prstGeom prst="rect">
-            <a:avLst/>
-          </a:prstGeom>
-        </p:spPr>
-      </p:pic>
-      <p:sp>
-        <p:nvSpPr>
-          <p:cNvPr id="7" name="Shape 2"/>
-          <p:cNvSpPr/>
-          <p:nvPr/>
-        </p:nvSpPr>
-        <p:spPr>
-          <a:xfrm>
-            <a:off x="914400" y="4507992"/>
-            <a:ext cx="10241280" cy="1024128"/>
-          </a:xfrm>
-          <a:prstGeom prst="rect">
-            <a:avLst/>
-          </a:prstGeom>
-          <a:solidFill>
-            <a:srgbClr val="FFFFFF">
-              <a:alpha val="0"/>
-            </a:srgbClr>
-          </a:solidFill>
-          <a:ln w="12700">
-            <a:solidFill>
-              <a:srgbClr val="E2E8F0">
-                <a:alpha val="0"/>
-              </a:srgbClr>
-            </a:solidFill>
-            <a:prstDash val="solid"/>
-          </a:ln>
-          <a:effectLst>
-            <a:outerShdw sx="100000" sy="100000" kx="0" ky="0" algn="bl" rotWithShape="0" blurRad="12700" dist="50800" dir="2700000">
-              <a:srgbClr val="000000">
-                <a:alpha val="8000"/>
-              </a:srgbClr>
-            </a:outerShdw>
-          </a:effectLst>
-        </p:spPr>
-      </p:sp>
-      <p:sp>
-        <p:nvSpPr>
-          <p:cNvPr id="8" name="Shape 3"/>
-          <p:cNvSpPr/>
-          <p:nvPr/>
-        </p:nvSpPr>
-        <p:spPr>
-          <a:xfrm>
-            <a:off x="786384" y="1956816"/>
-            <a:ext cx="32004" cy="3483864"/>
-          </a:xfrm>
-          <a:prstGeom prst="rect">
-            <a:avLst/>
-          </a:prstGeom>
-          <a:solidFill>
-            <a:srgbClr val="DBEAFE">
-              <a:alpha val="80000"/>
-            </a:srgbClr>
-          </a:solidFill>
-          <a:ln w="12700">
-            <a:solidFill>
-              <a:srgbClr val="DBEAFE">
-                <a:alpha val="0"/>
-              </a:srgbClr>
-            </a:solidFill>
-            <a:prstDash val="solid"/>
-          </a:ln>
-        </p:spPr>
-      </p:sp>
-      <p:sp>
-        <p:nvSpPr>
-          <p:cNvPr id="9" name="Shape 4"/>
-          <p:cNvSpPr/>
-          <p:nvPr/>
-        </p:nvSpPr>
-        <p:spPr>
-          <a:xfrm>
-            <a:off x="914400" y="1865376"/>
-            <a:ext cx="73152" cy="1024128"/>
+            <a:off x="822960" y="1938528"/>
+            <a:ext cx="73152" cy="2514600"/>
           </a:xfrm>
           <a:prstGeom prst="rect">
             <a:avLst/>
@@ -12409,14 +11228,14 @@
       </p:sp>
       <p:sp>
         <p:nvSpPr>
-          <p:cNvPr id="10" name="Shape 5"/>
+          <p:cNvPr id="3" name="Shape 1"/>
           <p:cNvSpPr/>
           <p:nvPr/>
         </p:nvSpPr>
         <p:spPr>
           <a:xfrm>
-            <a:off x="914400" y="3191256"/>
-            <a:ext cx="73152" cy="1024128"/>
+            <a:off x="4343400" y="1938528"/>
+            <a:ext cx="73152" cy="2514600"/>
           </a:xfrm>
           <a:prstGeom prst="rect">
             <a:avLst/>
@@ -12436,14 +11255,14 @@
       </p:sp>
       <p:sp>
         <p:nvSpPr>
-          <p:cNvPr id="11" name="Shape 6"/>
+          <p:cNvPr id="4" name="Shape 2"/>
           <p:cNvSpPr/>
           <p:nvPr/>
         </p:nvSpPr>
         <p:spPr>
           <a:xfrm>
-            <a:off x="914400" y="4507992"/>
-            <a:ext cx="73152" cy="1024128"/>
+            <a:off x="7863840" y="1938528"/>
+            <a:ext cx="73152" cy="2514600"/>
           </a:xfrm>
           <a:prstGeom prst="rect">
             <a:avLst/>
@@ -12463,7 +11282,7 @@
       </p:sp>
       <p:sp>
         <p:nvSpPr>
-          <p:cNvPr id="12" name="mdpr:3-3-9304f5:title:__title:3-3-9304f5"/>
+          <p:cNvPr id="5" name="mdpr:3-3-9304f5:title:__title:3-3-9304f5"/>
           <p:cNvSpPr txBox="1"/>
           <p:nvPr/>
         </p:nvSpPr>
@@ -12497,7 +11316,24 @@
                 <a:ea typeface="Pretendard" pitchFamily="34" charset="-122"/>
                 <a:cs typeface="Pretendard" pitchFamily="34" charset="-120"/>
               </a:rPr>
-              <a:t>Example: examples/basic/deck.md (Cont. 3/3)</a:t>
+              <a:t>Example: examples/basic/deck.md</a:t>
+            </a:r>
+            <a:pPr algn="ctr" indent="0" marL="0">
+              <a:lnSpc>
+                <a:spcPct val="120000"/>
+              </a:lnSpc>
+              <a:buNone/>
+            </a:pPr>
+            <a:r>
+              <a:rPr lang="en-US" sz="2000" dirty="0">
+                <a:solidFill>
+                  <a:srgbClr val="919191"/>
+                </a:solidFill>
+                <a:latin typeface="Pretendard" pitchFamily="34" charset="0"/>
+                <a:ea typeface="Pretendard" pitchFamily="34" charset="-122"/>
+                <a:cs typeface="Pretendard" pitchFamily="34" charset="-120"/>
+              </a:rPr>
+              <a:t> (Cont. 3/3)</a:t>
             </a:r>
             <a:endParaRPr lang="en-US" sz="3400" dirty="0"/>
           </a:p>
@@ -12505,14 +11341,14 @@
       </p:sp>
       <p:sp>
         <p:nvSpPr>
-          <p:cNvPr id="13" name="mdpr:3-3-9304f5:item-1:block-28-chunk-3"/>
+          <p:cNvPr id="6" name="mdpr:3-3-9304f5:item-1:block-28-chunk-3"/>
           <p:cNvSpPr txBox="1"/>
           <p:nvPr/>
         </p:nvSpPr>
         <p:spPr>
           <a:xfrm>
-            <a:off x="1133856" y="2164080"/>
-            <a:ext cx="9820656" cy="426720"/>
+            <a:off x="1042416" y="2982468"/>
+            <a:ext cx="2825496" cy="426720"/>
           </a:xfrm>
           <a:prstGeom prst="rect">
             <a:avLst/>
@@ -12547,14 +11383,14 @@
       </p:sp>
       <p:sp>
         <p:nvSpPr>
-          <p:cNvPr id="14" name="mdpr:3-3-9304f5:item-2:block-28-chunk-3"/>
+          <p:cNvPr id="7" name="mdpr:3-3-9304f5:item-2:block-28-chunk-3"/>
           <p:cNvSpPr txBox="1"/>
           <p:nvPr/>
         </p:nvSpPr>
         <p:spPr>
           <a:xfrm>
-            <a:off x="1133856" y="3489960"/>
-            <a:ext cx="9820656" cy="426720"/>
+            <a:off x="4562856" y="2982468"/>
+            <a:ext cx="2825496" cy="426720"/>
           </a:xfrm>
           <a:prstGeom prst="rect">
             <a:avLst/>
@@ -12589,14 +11425,14 @@
       </p:sp>
       <p:sp>
         <p:nvSpPr>
-          <p:cNvPr id="15" name="mdpr:3-3-9304f5:item-3:block-28-chunk-3"/>
+          <p:cNvPr id="8" name="mdpr:3-3-9304f5:item-3:block-28-chunk-3"/>
           <p:cNvSpPr txBox="1"/>
           <p:nvPr/>
         </p:nvSpPr>
         <p:spPr>
           <a:xfrm>
-            <a:off x="1133856" y="4806696"/>
-            <a:ext cx="9820656" cy="426720"/>
+            <a:off x="8083296" y="2814828"/>
+            <a:ext cx="2825496" cy="762000"/>
           </a:xfrm>
           <a:prstGeom prst="rect">
             <a:avLst/>
@@ -13275,280 +12111,16 @@
           <a:chExt cx="0" cy="0"/>
         </a:xfrm>
       </p:grpSpPr>
-      <p:pic>
-        <p:nvPicPr>
-          <p:cNvPr id="2" name="Image 0" descr="preencoded.png">    </p:cNvPr>
-          <p:cNvPicPr>
-            <a:picLocks noChangeAspect="1"/>
-          </p:cNvPicPr>
-          <p:nvPr/>
-        </p:nvPicPr>
-        <p:blipFill>
-          <a:blip r:embed="rId1">
-            <a:extLst>
-              <a:ext uri="{96DAC541-7B7A-43D3-8B79-37D633B846F1}">
-                <asvg:svgBlip xmlns:asvg="http://schemas.microsoft.com/office/drawing/2016/SVG/main" r:embed="rId2"/>
-              </a:ext>
-            </a:extLst>
-          </a:blip>
-          <a:stretch>
-            <a:fillRect/>
-          </a:stretch>
-        </p:blipFill>
-        <p:spPr>
-          <a:xfrm>
-            <a:off x="822960" y="1463040"/>
-            <a:ext cx="5029200" cy="1920240"/>
-          </a:xfrm>
-          <a:prstGeom prst="rect">
-            <a:avLst/>
-          </a:prstGeom>
-        </p:spPr>
-      </p:pic>
-      <p:sp>
-        <p:nvSpPr>
-          <p:cNvPr id="3" name="Shape 0"/>
+      <p:sp>
+        <p:nvSpPr>
+          <p:cNvPr id="2" name="Shape 0"/>
           <p:cNvSpPr/>
           <p:nvPr/>
         </p:nvSpPr>
         <p:spPr>
           <a:xfrm>
-            <a:off x="822960" y="1463040"/>
-            <a:ext cx="5029200" cy="1920240"/>
-          </a:xfrm>
-          <a:prstGeom prst="rect">
-            <a:avLst/>
-          </a:prstGeom>
-          <a:solidFill>
-            <a:srgbClr val="FFFFFF">
-              <a:alpha val="0"/>
-            </a:srgbClr>
-          </a:solidFill>
-          <a:ln w="12700">
-            <a:solidFill>
-              <a:srgbClr val="E2E8F0">
-                <a:alpha val="0"/>
-              </a:srgbClr>
-            </a:solidFill>
-            <a:prstDash val="solid"/>
-          </a:ln>
-          <a:effectLst>
-            <a:outerShdw sx="100000" sy="100000" kx="0" ky="0" algn="bl" rotWithShape="0" blurRad="12700" dist="50800" dir="2700000">
-              <a:srgbClr val="000000">
-                <a:alpha val="8000"/>
-              </a:srgbClr>
-            </a:outerShdw>
-          </a:effectLst>
-        </p:spPr>
-      </p:sp>
-      <p:pic>
-        <p:nvPicPr>
-          <p:cNvPr id="4" name="Image 1" descr="preencoded.png">    </p:cNvPr>
-          <p:cNvPicPr>
-            <a:picLocks noChangeAspect="1"/>
-          </p:cNvPicPr>
-          <p:nvPr/>
-        </p:nvPicPr>
-        <p:blipFill>
-          <a:blip r:embed="rId3">
-            <a:extLst>
-              <a:ext uri="{96DAC541-7B7A-43D3-8B79-37D633B846F1}">
-                <asvg:svgBlip xmlns:asvg="http://schemas.microsoft.com/office/drawing/2016/SVG/main" r:embed="rId4"/>
-              </a:ext>
-            </a:extLst>
-          </a:blip>
-          <a:stretch>
-            <a:fillRect/>
-          </a:stretch>
-        </p:blipFill>
-        <p:spPr>
-          <a:xfrm>
-            <a:off x="6309360" y="1463040"/>
-            <a:ext cx="5029200" cy="1920240"/>
-          </a:xfrm>
-          <a:prstGeom prst="rect">
-            <a:avLst/>
-          </a:prstGeom>
-        </p:spPr>
-      </p:pic>
-      <p:sp>
-        <p:nvSpPr>
-          <p:cNvPr id="5" name="Shape 1"/>
-          <p:cNvSpPr/>
-          <p:nvPr/>
-        </p:nvSpPr>
-        <p:spPr>
-          <a:xfrm>
-            <a:off x="6309360" y="1463040"/>
-            <a:ext cx="5029200" cy="1920240"/>
-          </a:xfrm>
-          <a:prstGeom prst="rect">
-            <a:avLst/>
-          </a:prstGeom>
-          <a:solidFill>
-            <a:srgbClr val="FFFFFF">
-              <a:alpha val="0"/>
-            </a:srgbClr>
-          </a:solidFill>
-          <a:ln w="12700">
-            <a:solidFill>
-              <a:srgbClr val="E2E8F0">
-                <a:alpha val="0"/>
-              </a:srgbClr>
-            </a:solidFill>
-            <a:prstDash val="solid"/>
-          </a:ln>
-          <a:effectLst>
-            <a:outerShdw sx="100000" sy="100000" kx="0" ky="0" algn="bl" rotWithShape="0" blurRad="12700" dist="50800" dir="2700000">
-              <a:srgbClr val="000000">
-                <a:alpha val="8000"/>
-              </a:srgbClr>
-            </a:outerShdw>
-          </a:effectLst>
-        </p:spPr>
-      </p:sp>
-      <p:pic>
-        <p:nvPicPr>
-          <p:cNvPr id="6" name="Image 2" descr="preencoded.png">    </p:cNvPr>
-          <p:cNvPicPr>
-            <a:picLocks noChangeAspect="1"/>
-          </p:cNvPicPr>
-          <p:nvPr/>
-        </p:nvPicPr>
-        <p:blipFill>
-          <a:blip r:embed="rId5">
-            <a:extLst>
-              <a:ext uri="{96DAC541-7B7A-43D3-8B79-37D633B846F1}">
-                <asvg:svgBlip xmlns:asvg="http://schemas.microsoft.com/office/drawing/2016/SVG/main" r:embed="rId6"/>
-              </a:ext>
-            </a:extLst>
-          </a:blip>
-          <a:stretch>
-            <a:fillRect/>
-          </a:stretch>
-        </p:blipFill>
-        <p:spPr>
-          <a:xfrm>
-            <a:off x="822960" y="3749040"/>
-            <a:ext cx="5029200" cy="1920240"/>
-          </a:xfrm>
-          <a:prstGeom prst="rect">
-            <a:avLst/>
-          </a:prstGeom>
-        </p:spPr>
-      </p:pic>
-      <p:sp>
-        <p:nvSpPr>
-          <p:cNvPr id="7" name="Shape 2"/>
-          <p:cNvSpPr/>
-          <p:nvPr/>
-        </p:nvSpPr>
-        <p:spPr>
-          <a:xfrm>
-            <a:off x="822960" y="3749040"/>
-            <a:ext cx="5029200" cy="1920240"/>
-          </a:xfrm>
-          <a:prstGeom prst="rect">
-            <a:avLst/>
-          </a:prstGeom>
-          <a:solidFill>
-            <a:srgbClr val="FFFFFF">
-              <a:alpha val="0"/>
-            </a:srgbClr>
-          </a:solidFill>
-          <a:ln w="12700">
-            <a:solidFill>
-              <a:srgbClr val="E2E8F0">
-                <a:alpha val="0"/>
-              </a:srgbClr>
-            </a:solidFill>
-            <a:prstDash val="solid"/>
-          </a:ln>
-          <a:effectLst>
-            <a:outerShdw sx="100000" sy="100000" kx="0" ky="0" algn="bl" rotWithShape="0" blurRad="12700" dist="50800" dir="2700000">
-              <a:srgbClr val="000000">
-                <a:alpha val="8000"/>
-              </a:srgbClr>
-            </a:outerShdw>
-          </a:effectLst>
-        </p:spPr>
-      </p:sp>
-      <p:pic>
-        <p:nvPicPr>
-          <p:cNvPr id="8" name="Image 3" descr="preencoded.png">    </p:cNvPr>
-          <p:cNvPicPr>
-            <a:picLocks noChangeAspect="1"/>
-          </p:cNvPicPr>
-          <p:nvPr/>
-        </p:nvPicPr>
-        <p:blipFill>
-          <a:blip r:embed="rId7">
-            <a:extLst>
-              <a:ext uri="{96DAC541-7B7A-43D3-8B79-37D633B846F1}">
-                <asvg:svgBlip xmlns:asvg="http://schemas.microsoft.com/office/drawing/2016/SVG/main" r:embed="rId8"/>
-              </a:ext>
-            </a:extLst>
-          </a:blip>
-          <a:stretch>
-            <a:fillRect/>
-          </a:stretch>
-        </p:blipFill>
-        <p:spPr>
-          <a:xfrm>
-            <a:off x="6309360" y="3749040"/>
-            <a:ext cx="5029200" cy="1920240"/>
-          </a:xfrm>
-          <a:prstGeom prst="rect">
-            <a:avLst/>
-          </a:prstGeom>
-        </p:spPr>
-      </p:pic>
-      <p:sp>
-        <p:nvSpPr>
-          <p:cNvPr id="9" name="Shape 3"/>
-          <p:cNvSpPr/>
-          <p:nvPr/>
-        </p:nvSpPr>
-        <p:spPr>
-          <a:xfrm>
-            <a:off x="6309360" y="3749040"/>
-            <a:ext cx="5029200" cy="1920240"/>
-          </a:xfrm>
-          <a:prstGeom prst="rect">
-            <a:avLst/>
-          </a:prstGeom>
-          <a:solidFill>
-            <a:srgbClr val="FFFFFF">
-              <a:alpha val="0"/>
-            </a:srgbClr>
-          </a:solidFill>
-          <a:ln w="12700">
-            <a:solidFill>
-              <a:srgbClr val="E2E8F0">
-                <a:alpha val="0"/>
-              </a:srgbClr>
-            </a:solidFill>
-            <a:prstDash val="solid"/>
-          </a:ln>
-          <a:effectLst>
-            <a:outerShdw sx="100000" sy="100000" kx="0" ky="0" algn="bl" rotWithShape="0" blurRad="12700" dist="50800" dir="2700000">
-              <a:srgbClr val="000000">
-                <a:alpha val="8000"/>
-              </a:srgbClr>
-            </a:outerShdw>
-          </a:effectLst>
-        </p:spPr>
-      </p:sp>
-      <p:sp>
-        <p:nvSpPr>
-          <p:cNvPr id="10" name="Shape 4"/>
-          <p:cNvSpPr/>
-          <p:nvPr/>
-        </p:nvSpPr>
-        <p:spPr>
-          <a:xfrm>
-            <a:off x="822960" y="1463040"/>
-            <a:ext cx="73152" cy="1920240"/>
+            <a:off x="685800" y="2103120"/>
+            <a:ext cx="73152" cy="2240280"/>
           </a:xfrm>
           <a:prstGeom prst="rect">
             <a:avLst/>
@@ -13568,14 +12140,14 @@
       </p:sp>
       <p:sp>
         <p:nvSpPr>
-          <p:cNvPr id="11" name="Shape 5"/>
+          <p:cNvPr id="3" name="Shape 1"/>
           <p:cNvSpPr/>
           <p:nvPr/>
         </p:nvSpPr>
         <p:spPr>
           <a:xfrm>
-            <a:off x="6309360" y="1463040"/>
-            <a:ext cx="73152" cy="1920240"/>
+            <a:off x="3520440" y="2103120"/>
+            <a:ext cx="73152" cy="2240280"/>
           </a:xfrm>
           <a:prstGeom prst="rect">
             <a:avLst/>
@@ -13595,14 +12167,14 @@
       </p:sp>
       <p:sp>
         <p:nvSpPr>
-          <p:cNvPr id="12" name="Shape 6"/>
+          <p:cNvPr id="4" name="Shape 2"/>
           <p:cNvSpPr/>
           <p:nvPr/>
         </p:nvSpPr>
         <p:spPr>
           <a:xfrm>
-            <a:off x="822960" y="3749040"/>
-            <a:ext cx="73152" cy="1920240"/>
+            <a:off x="6355080" y="2103120"/>
+            <a:ext cx="73152" cy="2240280"/>
           </a:xfrm>
           <a:prstGeom prst="rect">
             <a:avLst/>
@@ -13622,14 +12194,14 @@
       </p:sp>
       <p:sp>
         <p:nvSpPr>
-          <p:cNvPr id="13" name="Shape 7"/>
+          <p:cNvPr id="5" name="Shape 3"/>
           <p:cNvSpPr/>
           <p:nvPr/>
         </p:nvSpPr>
         <p:spPr>
           <a:xfrm>
-            <a:off x="6309360" y="3749040"/>
-            <a:ext cx="73152" cy="1920240"/>
+            <a:off x="9189720" y="2103120"/>
+            <a:ext cx="73152" cy="2240280"/>
           </a:xfrm>
           <a:prstGeom prst="rect">
             <a:avLst/>
@@ -13649,7 +12221,7 @@
       </p:sp>
       <p:sp>
         <p:nvSpPr>
-          <p:cNvPr id="14" name="mdpr:2-2-447582:title:__title:2-2-447582"/>
+          <p:cNvPr id="6" name="mdpr:2-2-447582:title:__title:2-2-447582"/>
           <p:cNvSpPr txBox="1"/>
           <p:nvPr/>
         </p:nvSpPr>
@@ -13683,7 +12255,24 @@
                 <a:ea typeface="Pretendard" pitchFamily="34" charset="-122"/>
                 <a:cs typeface="Pretendard" pitchFamily="34" charset="-120"/>
               </a:rPr>
-              <a:t>Example: examples/comparison/deck.md (Cont. 2/2)</a:t>
+              <a:t>Example: examples/comparison/deck.md</a:t>
+            </a:r>
+            <a:pPr algn="ctr" indent="0" marL="0">
+              <a:lnSpc>
+                <a:spcPct val="120000"/>
+              </a:lnSpc>
+              <a:buNone/>
+            </a:pPr>
+            <a:r>
+              <a:rPr lang="en-US" sz="2000" dirty="0">
+                <a:solidFill>
+                  <a:srgbClr val="919191"/>
+                </a:solidFill>
+                <a:latin typeface="Pretendard" pitchFamily="34" charset="0"/>
+                <a:ea typeface="Pretendard" pitchFamily="34" charset="-122"/>
+                <a:cs typeface="Pretendard" pitchFamily="34" charset="-120"/>
+              </a:rPr>
+              <a:t> (Cont. 2/2)</a:t>
             </a:r>
             <a:endParaRPr lang="en-US" sz="3400" dirty="0"/>
           </a:p>
@@ -13691,14 +12280,14 @@
       </p:sp>
       <p:sp>
         <p:nvSpPr>
-          <p:cNvPr id="15" name="mdpr:2-2-447582:item-1:block-30-chunk-2"/>
+          <p:cNvPr id="7" name="mdpr:2-2-447582:item-1:block-30-chunk-2"/>
           <p:cNvSpPr txBox="1"/>
           <p:nvPr/>
         </p:nvSpPr>
         <p:spPr>
           <a:xfrm>
-            <a:off x="1042416" y="2209800"/>
-            <a:ext cx="4608576" cy="426720"/>
+            <a:off x="905256" y="2674620"/>
+            <a:ext cx="1911096" cy="1097280"/>
           </a:xfrm>
           <a:prstGeom prst="rect">
             <a:avLst/>
@@ -13733,14 +12322,14 @@
       </p:sp>
       <p:sp>
         <p:nvSpPr>
-          <p:cNvPr id="16" name="mdpr:2-2-447582:item-2:block-30-chunk-2"/>
+          <p:cNvPr id="8" name="mdpr:2-2-447582:item-2:block-30-chunk-2"/>
           <p:cNvSpPr txBox="1"/>
           <p:nvPr/>
         </p:nvSpPr>
         <p:spPr>
           <a:xfrm>
-            <a:off x="6528816" y="2209800"/>
-            <a:ext cx="4608576" cy="426720"/>
+            <a:off x="3739896" y="2842260"/>
+            <a:ext cx="1911096" cy="762000"/>
           </a:xfrm>
           <a:prstGeom prst="rect">
             <a:avLst/>
@@ -13775,14 +12364,14 @@
       </p:sp>
       <p:sp>
         <p:nvSpPr>
-          <p:cNvPr id="17" name="mdpr:2-2-447582:item-3:block-30-chunk-2"/>
+          <p:cNvPr id="9" name="mdpr:2-2-447582:item-3:block-30-chunk-2"/>
           <p:cNvSpPr txBox="1"/>
           <p:nvPr/>
         </p:nvSpPr>
         <p:spPr>
           <a:xfrm>
-            <a:off x="1042416" y="4495800"/>
-            <a:ext cx="4608576" cy="426720"/>
+            <a:off x="6574536" y="2842260"/>
+            <a:ext cx="1911096" cy="762000"/>
           </a:xfrm>
           <a:prstGeom prst="rect">
             <a:avLst/>
@@ -13817,14 +12406,14 @@
       </p:sp>
       <p:sp>
         <p:nvSpPr>
-          <p:cNvPr id="18" name="mdpr:2-2-447582:item-4:block-30-chunk-2"/>
+          <p:cNvPr id="10" name="mdpr:2-2-447582:item-4:block-30-chunk-2"/>
           <p:cNvSpPr txBox="1"/>
           <p:nvPr/>
         </p:nvSpPr>
         <p:spPr>
           <a:xfrm>
-            <a:off x="6528816" y="4328160"/>
-            <a:ext cx="4608576" cy="762000"/>
+            <a:off x="9409176" y="2674620"/>
+            <a:ext cx="1911096" cy="1097280"/>
           </a:xfrm>
           <a:prstGeom prst="rect">
             <a:avLst/>
@@ -14503,243 +13092,16 @@
           <a:chExt cx="0" cy="0"/>
         </a:xfrm>
       </p:grpSpPr>
-      <p:pic>
-        <p:nvPicPr>
-          <p:cNvPr id="2" name="Image 0" descr="preencoded.png">    </p:cNvPr>
-          <p:cNvPicPr>
-            <a:picLocks noChangeAspect="1"/>
-          </p:cNvPicPr>
-          <p:nvPr/>
-        </p:nvPicPr>
-        <p:blipFill>
-          <a:blip r:embed="rId1">
-            <a:extLst>
-              <a:ext uri="{96DAC541-7B7A-43D3-8B79-37D633B846F1}">
-                <asvg:svgBlip xmlns:asvg="http://schemas.microsoft.com/office/drawing/2016/SVG/main" r:embed="rId2"/>
-              </a:ext>
-            </a:extLst>
-          </a:blip>
-          <a:stretch>
-            <a:fillRect/>
-          </a:stretch>
-        </p:blipFill>
-        <p:spPr>
-          <a:xfrm>
-            <a:off x="914400" y="1865376"/>
-            <a:ext cx="10241280" cy="1024128"/>
-          </a:xfrm>
-          <a:prstGeom prst="rect">
-            <a:avLst/>
-          </a:prstGeom>
-        </p:spPr>
-      </p:pic>
-      <p:sp>
-        <p:nvSpPr>
-          <p:cNvPr id="3" name="Shape 0"/>
+      <p:sp>
+        <p:nvSpPr>
+          <p:cNvPr id="2" name="Shape 0"/>
           <p:cNvSpPr/>
           <p:nvPr/>
         </p:nvSpPr>
         <p:spPr>
           <a:xfrm>
-            <a:off x="914400" y="1865376"/>
-            <a:ext cx="10241280" cy="1024128"/>
-          </a:xfrm>
-          <a:prstGeom prst="rect">
-            <a:avLst/>
-          </a:prstGeom>
-          <a:solidFill>
-            <a:srgbClr val="FFFFFF">
-              <a:alpha val="0"/>
-            </a:srgbClr>
-          </a:solidFill>
-          <a:ln w="12700">
-            <a:solidFill>
-              <a:srgbClr val="E2E8F0">
-                <a:alpha val="0"/>
-              </a:srgbClr>
-            </a:solidFill>
-            <a:prstDash val="solid"/>
-          </a:ln>
-          <a:effectLst>
-            <a:outerShdw sx="100000" sy="100000" kx="0" ky="0" algn="bl" rotWithShape="0" blurRad="12700" dist="50800" dir="2700000">
-              <a:srgbClr val="000000">
-                <a:alpha val="8000"/>
-              </a:srgbClr>
-            </a:outerShdw>
-          </a:effectLst>
-        </p:spPr>
-      </p:sp>
-      <p:pic>
-        <p:nvPicPr>
-          <p:cNvPr id="4" name="Image 1" descr="preencoded.png">    </p:cNvPr>
-          <p:cNvPicPr>
-            <a:picLocks noChangeAspect="1"/>
-          </p:cNvPicPr>
-          <p:nvPr/>
-        </p:nvPicPr>
-        <p:blipFill>
-          <a:blip r:embed="rId3">
-            <a:extLst>
-              <a:ext uri="{96DAC541-7B7A-43D3-8B79-37D633B846F1}">
-                <asvg:svgBlip xmlns:asvg="http://schemas.microsoft.com/office/drawing/2016/SVG/main" r:embed="rId4"/>
-              </a:ext>
-            </a:extLst>
-          </a:blip>
-          <a:stretch>
-            <a:fillRect/>
-          </a:stretch>
-        </p:blipFill>
-        <p:spPr>
-          <a:xfrm>
-            <a:off x="914400" y="3191256"/>
-            <a:ext cx="10241280" cy="1024128"/>
-          </a:xfrm>
-          <a:prstGeom prst="rect">
-            <a:avLst/>
-          </a:prstGeom>
-        </p:spPr>
-      </p:pic>
-      <p:sp>
-        <p:nvSpPr>
-          <p:cNvPr id="5" name="Shape 1"/>
-          <p:cNvSpPr/>
-          <p:nvPr/>
-        </p:nvSpPr>
-        <p:spPr>
-          <a:xfrm>
-            <a:off x="914400" y="3191256"/>
-            <a:ext cx="10241280" cy="1024128"/>
-          </a:xfrm>
-          <a:prstGeom prst="rect">
-            <a:avLst/>
-          </a:prstGeom>
-          <a:solidFill>
-            <a:srgbClr val="FFFFFF">
-              <a:alpha val="0"/>
-            </a:srgbClr>
-          </a:solidFill>
-          <a:ln w="12700">
-            <a:solidFill>
-              <a:srgbClr val="E2E8F0">
-                <a:alpha val="0"/>
-              </a:srgbClr>
-            </a:solidFill>
-            <a:prstDash val="solid"/>
-          </a:ln>
-          <a:effectLst>
-            <a:outerShdw sx="100000" sy="100000" kx="0" ky="0" algn="bl" rotWithShape="0" blurRad="12700" dist="50800" dir="2700000">
-              <a:srgbClr val="000000">
-                <a:alpha val="8000"/>
-              </a:srgbClr>
-            </a:outerShdw>
-          </a:effectLst>
-        </p:spPr>
-      </p:sp>
-      <p:pic>
-        <p:nvPicPr>
-          <p:cNvPr id="6" name="Image 2" descr="preencoded.png">    </p:cNvPr>
-          <p:cNvPicPr>
-            <a:picLocks noChangeAspect="1"/>
-          </p:cNvPicPr>
-          <p:nvPr/>
-        </p:nvPicPr>
-        <p:blipFill>
-          <a:blip r:embed="rId5">
-            <a:extLst>
-              <a:ext uri="{96DAC541-7B7A-43D3-8B79-37D633B846F1}">
-                <asvg:svgBlip xmlns:asvg="http://schemas.microsoft.com/office/drawing/2016/SVG/main" r:embed="rId6"/>
-              </a:ext>
-            </a:extLst>
-          </a:blip>
-          <a:stretch>
-            <a:fillRect/>
-          </a:stretch>
-        </p:blipFill>
-        <p:spPr>
-          <a:xfrm>
-            <a:off x="914400" y="4507992"/>
-            <a:ext cx="10241280" cy="1024128"/>
-          </a:xfrm>
-          <a:prstGeom prst="rect">
-            <a:avLst/>
-          </a:prstGeom>
-        </p:spPr>
-      </p:pic>
-      <p:sp>
-        <p:nvSpPr>
-          <p:cNvPr id="7" name="Shape 2"/>
-          <p:cNvSpPr/>
-          <p:nvPr/>
-        </p:nvSpPr>
-        <p:spPr>
-          <a:xfrm>
-            <a:off x="914400" y="4507992"/>
-            <a:ext cx="10241280" cy="1024128"/>
-          </a:xfrm>
-          <a:prstGeom prst="rect">
-            <a:avLst/>
-          </a:prstGeom>
-          <a:solidFill>
-            <a:srgbClr val="FFFFFF">
-              <a:alpha val="0"/>
-            </a:srgbClr>
-          </a:solidFill>
-          <a:ln w="12700">
-            <a:solidFill>
-              <a:srgbClr val="E2E8F0">
-                <a:alpha val="0"/>
-              </a:srgbClr>
-            </a:solidFill>
-            <a:prstDash val="solid"/>
-          </a:ln>
-          <a:effectLst>
-            <a:outerShdw sx="100000" sy="100000" kx="0" ky="0" algn="bl" rotWithShape="0" blurRad="12700" dist="50800" dir="2700000">
-              <a:srgbClr val="000000">
-                <a:alpha val="8000"/>
-              </a:srgbClr>
-            </a:outerShdw>
-          </a:effectLst>
-        </p:spPr>
-      </p:sp>
-      <p:sp>
-        <p:nvSpPr>
-          <p:cNvPr id="8" name="Shape 3"/>
-          <p:cNvSpPr/>
-          <p:nvPr/>
-        </p:nvSpPr>
-        <p:spPr>
-          <a:xfrm>
-            <a:off x="786384" y="1956816"/>
-            <a:ext cx="32004" cy="3483864"/>
-          </a:xfrm>
-          <a:prstGeom prst="rect">
-            <a:avLst/>
-          </a:prstGeom>
-          <a:solidFill>
-            <a:srgbClr val="DBEAFE">
-              <a:alpha val="80000"/>
-            </a:srgbClr>
-          </a:solidFill>
-          <a:ln w="12700">
-            <a:solidFill>
-              <a:srgbClr val="DBEAFE">
-                <a:alpha val="0"/>
-              </a:srgbClr>
-            </a:solidFill>
-            <a:prstDash val="solid"/>
-          </a:ln>
-        </p:spPr>
-      </p:sp>
-      <p:sp>
-        <p:nvSpPr>
-          <p:cNvPr id="9" name="Shape 4"/>
-          <p:cNvSpPr/>
-          <p:nvPr/>
-        </p:nvSpPr>
-        <p:spPr>
-          <a:xfrm>
-            <a:off x="914400" y="1865376"/>
-            <a:ext cx="73152" cy="1024128"/>
+            <a:off x="822960" y="1938528"/>
+            <a:ext cx="73152" cy="2514600"/>
           </a:xfrm>
           <a:prstGeom prst="rect">
             <a:avLst/>
@@ -14759,14 +13121,14 @@
       </p:sp>
       <p:sp>
         <p:nvSpPr>
-          <p:cNvPr id="10" name="Shape 5"/>
+          <p:cNvPr id="3" name="Shape 1"/>
           <p:cNvSpPr/>
           <p:nvPr/>
         </p:nvSpPr>
         <p:spPr>
           <a:xfrm>
-            <a:off x="914400" y="3191256"/>
-            <a:ext cx="73152" cy="1024128"/>
+            <a:off x="4343400" y="1938528"/>
+            <a:ext cx="73152" cy="2514600"/>
           </a:xfrm>
           <a:prstGeom prst="rect">
             <a:avLst/>
@@ -14786,14 +13148,14 @@
       </p:sp>
       <p:sp>
         <p:nvSpPr>
-          <p:cNvPr id="11" name="Shape 6"/>
+          <p:cNvPr id="4" name="Shape 2"/>
           <p:cNvSpPr/>
           <p:nvPr/>
         </p:nvSpPr>
         <p:spPr>
           <a:xfrm>
-            <a:off x="914400" y="4507992"/>
-            <a:ext cx="73152" cy="1024128"/>
+            <a:off x="7863840" y="1938528"/>
+            <a:ext cx="73152" cy="2514600"/>
           </a:xfrm>
           <a:prstGeom prst="rect">
             <a:avLst/>
@@ -14813,7 +13175,7 @@
       </p:sp>
       <p:sp>
         <p:nvSpPr>
-          <p:cNvPr id="12" name="mdpr:2-2-a2c94a:title:__title:2-2-a2c94a"/>
+          <p:cNvPr id="5" name="mdpr:2-2-a2c94a:title:__title:2-2-a2c94a"/>
           <p:cNvSpPr txBox="1"/>
           <p:nvPr/>
         </p:nvSpPr>
@@ -14847,7 +13209,24 @@
                 <a:ea typeface="Pretendard" pitchFamily="34" charset="-122"/>
                 <a:cs typeface="Pretendard" pitchFamily="34" charset="-120"/>
               </a:rPr>
-              <a:t>Example: examples/pipeline/deck.md (Cont. 2/2)</a:t>
+              <a:t>Example: examples/pipeline/deck.md</a:t>
+            </a:r>
+            <a:pPr algn="ctr" indent="0" marL="0">
+              <a:lnSpc>
+                <a:spcPct val="120000"/>
+              </a:lnSpc>
+              <a:buNone/>
+            </a:pPr>
+            <a:r>
+              <a:rPr lang="en-US" sz="2000" dirty="0">
+                <a:solidFill>
+                  <a:srgbClr val="919191"/>
+                </a:solidFill>
+                <a:latin typeface="Pretendard" pitchFamily="34" charset="0"/>
+                <a:ea typeface="Pretendard" pitchFamily="34" charset="-122"/>
+                <a:cs typeface="Pretendard" pitchFamily="34" charset="-120"/>
+              </a:rPr>
+              <a:t> (Cont. 2/2)</a:t>
             </a:r>
             <a:endParaRPr lang="en-US" sz="3400" dirty="0"/>
           </a:p>
@@ -14855,14 +13234,14 @@
       </p:sp>
       <p:sp>
         <p:nvSpPr>
-          <p:cNvPr id="13" name="mdpr:2-2-a2c94a:item-1:block-32-chunk-2"/>
+          <p:cNvPr id="6" name="mdpr:2-2-a2c94a:item-1:block-32-chunk-2"/>
           <p:cNvSpPr txBox="1"/>
           <p:nvPr/>
         </p:nvSpPr>
         <p:spPr>
           <a:xfrm>
-            <a:off x="1133856" y="2164080"/>
-            <a:ext cx="9820656" cy="426720"/>
+            <a:off x="1042416" y="2982468"/>
+            <a:ext cx="2825496" cy="426720"/>
           </a:xfrm>
           <a:prstGeom prst="rect">
             <a:avLst/>
@@ -14897,14 +13276,14 @@
       </p:sp>
       <p:sp>
         <p:nvSpPr>
-          <p:cNvPr id="14" name="mdpr:2-2-a2c94a:item-2:block-32-chunk-2"/>
+          <p:cNvPr id="7" name="mdpr:2-2-a2c94a:item-2:block-32-chunk-2"/>
           <p:cNvSpPr txBox="1"/>
           <p:nvPr/>
         </p:nvSpPr>
         <p:spPr>
           <a:xfrm>
-            <a:off x="1133856" y="3489960"/>
-            <a:ext cx="9820656" cy="426720"/>
+            <a:off x="4562856" y="2982468"/>
+            <a:ext cx="2825496" cy="426720"/>
           </a:xfrm>
           <a:prstGeom prst="rect">
             <a:avLst/>
@@ -14939,14 +13318,14 @@
       </p:sp>
       <p:sp>
         <p:nvSpPr>
-          <p:cNvPr id="15" name="mdpr:2-2-a2c94a:item-3:block-32-chunk-2"/>
+          <p:cNvPr id="8" name="mdpr:2-2-a2c94a:item-3:block-32-chunk-2"/>
           <p:cNvSpPr txBox="1"/>
           <p:nvPr/>
         </p:nvSpPr>
         <p:spPr>
           <a:xfrm>
-            <a:off x="1133856" y="4806696"/>
-            <a:ext cx="9820656" cy="426720"/>
+            <a:off x="8083296" y="2982468"/>
+            <a:ext cx="2825496" cy="426720"/>
           </a:xfrm>
           <a:prstGeom prst="rect">
             <a:avLst/>
@@ -15903,35 +14282,6 @@
         </p:nvSpPr>
         <p:spPr>
           <a:xfrm>
-            <a:off x="6080760" y="1737360"/>
-            <a:ext cx="22860" cy="3968496"/>
-          </a:xfrm>
-          <a:prstGeom prst="rect">
-            <a:avLst/>
-          </a:prstGeom>
-          <a:solidFill>
-            <a:srgbClr val="E2E8F0">
-              <a:alpha val="90000"/>
-            </a:srgbClr>
-          </a:solidFill>
-          <a:ln w="12700">
-            <a:solidFill>
-              <a:srgbClr val="E2E8F0">
-                <a:alpha val="0"/>
-              </a:srgbClr>
-            </a:solidFill>
-            <a:prstDash val="solid"/>
-          </a:ln>
-        </p:spPr>
-      </p:sp>
-      <p:sp>
-        <p:nvSpPr>
-          <p:cNvPr id="3" name="Shape 1"/>
-          <p:cNvSpPr/>
-          <p:nvPr/>
-        </p:nvSpPr>
-        <p:spPr>
-          <a:xfrm>
             <a:off x="822960" y="1737360"/>
             <a:ext cx="73152" cy="841248"/>
           </a:xfrm>
@@ -15953,7 +14303,7 @@
       </p:sp>
       <p:sp>
         <p:nvSpPr>
-          <p:cNvPr id="4" name="Shape 2"/>
+          <p:cNvPr id="3" name="Shape 1"/>
           <p:cNvSpPr/>
           <p:nvPr/>
         </p:nvSpPr>
@@ -15980,7 +14330,7 @@
       </p:sp>
       <p:sp>
         <p:nvSpPr>
-          <p:cNvPr id="5" name="Shape 3"/>
+          <p:cNvPr id="4" name="Shape 2"/>
           <p:cNvSpPr/>
           <p:nvPr/>
         </p:nvSpPr>
@@ -16007,7 +14357,7 @@
       </p:sp>
       <p:sp>
         <p:nvSpPr>
-          <p:cNvPr id="6" name="Shape 4"/>
+          <p:cNvPr id="5" name="Shape 3"/>
           <p:cNvSpPr/>
           <p:nvPr/>
         </p:nvSpPr>
@@ -16034,7 +14384,7 @@
       </p:sp>
       <p:sp>
         <p:nvSpPr>
-          <p:cNvPr id="7" name="Shape 5"/>
+          <p:cNvPr id="6" name="Shape 4"/>
           <p:cNvSpPr/>
           <p:nvPr/>
         </p:nvSpPr>
@@ -16061,7 +14411,7 @@
       </p:sp>
       <p:sp>
         <p:nvSpPr>
-          <p:cNvPr id="8" name="Shape 6"/>
+          <p:cNvPr id="7" name="Shape 5"/>
           <p:cNvSpPr/>
           <p:nvPr/>
         </p:nvSpPr>
@@ -16088,7 +14438,7 @@
       </p:sp>
       <p:sp>
         <p:nvSpPr>
-          <p:cNvPr id="9" name="Shape 7"/>
+          <p:cNvPr id="8" name="Shape 6"/>
           <p:cNvSpPr/>
           <p:nvPr/>
         </p:nvSpPr>
@@ -16115,7 +14465,7 @@
       </p:sp>
       <p:sp>
         <p:nvSpPr>
-          <p:cNvPr id="10" name="Shape 8"/>
+          <p:cNvPr id="9" name="Shape 7"/>
           <p:cNvSpPr/>
           <p:nvPr/>
         </p:nvSpPr>
@@ -16142,7 +14492,7 @@
       </p:sp>
       <p:sp>
         <p:nvSpPr>
-          <p:cNvPr id="11" name="mdpr:2-2-7bfb60:title:__title:2-2-7bfb60"/>
+          <p:cNvPr id="10" name="mdpr:2-2-7bfb60:title:__title:2-2-7bfb60"/>
           <p:cNvSpPr txBox="1"/>
           <p:nvPr/>
         </p:nvSpPr>
@@ -16176,7 +14526,24 @@
                 <a:ea typeface="Pretendard" pitchFamily="34" charset="-122"/>
                 <a:cs typeface="Pretendard" pitchFamily="34" charset="-120"/>
               </a:rPr>
-              <a:t>Agenda (Cont. 2/2)</a:t>
+              <a:t>Agenda</a:t>
+            </a:r>
+            <a:pPr algn="ctr" indent="0" marL="0">
+              <a:lnSpc>
+                <a:spcPct val="120000"/>
+              </a:lnSpc>
+              <a:buNone/>
+            </a:pPr>
+            <a:r>
+              <a:rPr lang="en-US" sz="2300" dirty="0">
+                <a:solidFill>
+                  <a:srgbClr val="919191"/>
+                </a:solidFill>
+                <a:latin typeface="Pretendard" pitchFamily="34" charset="0"/>
+                <a:ea typeface="Pretendard" pitchFamily="34" charset="-122"/>
+                <a:cs typeface="Pretendard" pitchFamily="34" charset="-120"/>
+              </a:rPr>
+              <a:t> (Cont. 2/2)</a:t>
             </a:r>
             <a:endParaRPr lang="en-US" sz="3800" dirty="0"/>
           </a:p>
@@ -16184,7 +14551,7 @@
       </p:sp>
       <p:sp>
         <p:nvSpPr>
-          <p:cNvPr id="12" name="mdpr:2-2-7bfb60:toc-item-1:toc-item-9"/>
+          <p:cNvPr id="11" name="mdpr:2-2-7bfb60:toc-item-1:toc-item-9"/>
           <p:cNvSpPr txBox="1"/>
           <p:nvPr/>
         </p:nvSpPr>
@@ -16226,7 +14593,7 @@
       </p:sp>
       <p:sp>
         <p:nvSpPr>
-          <p:cNvPr id="13" name="mdpr:2-2-7bfb60:toc-item-2:toc-item-10"/>
+          <p:cNvPr id="12" name="mdpr:2-2-7bfb60:toc-item-2:toc-item-10"/>
           <p:cNvSpPr txBox="1"/>
           <p:nvPr/>
         </p:nvSpPr>
@@ -16268,7 +14635,7 @@
       </p:sp>
       <p:sp>
         <p:nvSpPr>
-          <p:cNvPr id="14" name="mdpr:2-2-7bfb60:toc-item-3:toc-item-11"/>
+          <p:cNvPr id="13" name="mdpr:2-2-7bfb60:toc-item-3:toc-item-11"/>
           <p:cNvSpPr txBox="1"/>
           <p:nvPr/>
         </p:nvSpPr>
@@ -16310,7 +14677,7 @@
       </p:sp>
       <p:sp>
         <p:nvSpPr>
-          <p:cNvPr id="15" name="mdpr:2-2-7bfb60:toc-item-4:toc-item-12"/>
+          <p:cNvPr id="14" name="mdpr:2-2-7bfb60:toc-item-4:toc-item-12"/>
           <p:cNvSpPr txBox="1"/>
           <p:nvPr/>
         </p:nvSpPr>
@@ -16352,7 +14719,7 @@
       </p:sp>
       <p:sp>
         <p:nvSpPr>
-          <p:cNvPr id="16" name="mdpr:2-2-7bfb60:toc-item-5:toc-item-13"/>
+          <p:cNvPr id="15" name="mdpr:2-2-7bfb60:toc-item-5:toc-item-13"/>
           <p:cNvSpPr txBox="1"/>
           <p:nvPr/>
         </p:nvSpPr>
@@ -16394,7 +14761,7 @@
       </p:sp>
       <p:sp>
         <p:nvSpPr>
-          <p:cNvPr id="17" name="mdpr:2-2-7bfb60:toc-item-6:toc-item-14"/>
+          <p:cNvPr id="16" name="mdpr:2-2-7bfb60:toc-item-6:toc-item-14"/>
           <p:cNvSpPr txBox="1"/>
           <p:nvPr/>
         </p:nvSpPr>
@@ -16436,7 +14803,7 @@
       </p:sp>
       <p:sp>
         <p:nvSpPr>
-          <p:cNvPr id="18" name="mdpr:2-2-7bfb60:toc-item-7:toc-item-15"/>
+          <p:cNvPr id="17" name="mdpr:2-2-7bfb60:toc-item-7:toc-item-15"/>
           <p:cNvSpPr txBox="1"/>
           <p:nvPr/>
         </p:nvSpPr>
@@ -16478,7 +14845,7 @@
       </p:sp>
       <p:sp>
         <p:nvSpPr>
-          <p:cNvPr id="19" name="mdpr:2-2-7bfb60:toc-item-8:toc-item-16"/>
+          <p:cNvPr id="18" name="mdpr:2-2-7bfb60:toc-item-8:toc-item-16"/>
           <p:cNvSpPr txBox="1"/>
           <p:nvPr/>
         </p:nvSpPr>
@@ -18048,243 +16415,16 @@
           <a:chExt cx="0" cy="0"/>
         </a:xfrm>
       </p:grpSpPr>
-      <p:pic>
-        <p:nvPicPr>
-          <p:cNvPr id="2" name="Image 0" descr="preencoded.png">    </p:cNvPr>
-          <p:cNvPicPr>
-            <a:picLocks noChangeAspect="1"/>
-          </p:cNvPicPr>
-          <p:nvPr/>
-        </p:nvPicPr>
-        <p:blipFill>
-          <a:blip r:embed="rId1">
-            <a:extLst>
-              <a:ext uri="{96DAC541-7B7A-43D3-8B79-37D633B846F1}">
-                <asvg:svgBlip xmlns:asvg="http://schemas.microsoft.com/office/drawing/2016/SVG/main" r:embed="rId2"/>
-              </a:ext>
-            </a:extLst>
-          </a:blip>
-          <a:stretch>
-            <a:fillRect/>
-          </a:stretch>
-        </p:blipFill>
-        <p:spPr>
-          <a:xfrm>
-            <a:off x="914400" y="1865376"/>
-            <a:ext cx="10241280" cy="1024128"/>
-          </a:xfrm>
-          <a:prstGeom prst="rect">
-            <a:avLst/>
-          </a:prstGeom>
-        </p:spPr>
-      </p:pic>
-      <p:sp>
-        <p:nvSpPr>
-          <p:cNvPr id="3" name="Shape 0"/>
+      <p:sp>
+        <p:nvSpPr>
+          <p:cNvPr id="2" name="Shape 0"/>
           <p:cNvSpPr/>
           <p:nvPr/>
         </p:nvSpPr>
         <p:spPr>
           <a:xfrm>
-            <a:off x="914400" y="1865376"/>
-            <a:ext cx="10241280" cy="1024128"/>
-          </a:xfrm>
-          <a:prstGeom prst="rect">
-            <a:avLst/>
-          </a:prstGeom>
-          <a:solidFill>
-            <a:srgbClr val="FFFFFF">
-              <a:alpha val="0"/>
-            </a:srgbClr>
-          </a:solidFill>
-          <a:ln w="12700">
-            <a:solidFill>
-              <a:srgbClr val="E2E8F0">
-                <a:alpha val="0"/>
-              </a:srgbClr>
-            </a:solidFill>
-            <a:prstDash val="solid"/>
-          </a:ln>
-          <a:effectLst>
-            <a:outerShdw sx="100000" sy="100000" kx="0" ky="0" algn="bl" rotWithShape="0" blurRad="12700" dist="50800" dir="2700000">
-              <a:srgbClr val="000000">
-                <a:alpha val="8000"/>
-              </a:srgbClr>
-            </a:outerShdw>
-          </a:effectLst>
-        </p:spPr>
-      </p:sp>
-      <p:pic>
-        <p:nvPicPr>
-          <p:cNvPr id="4" name="Image 1" descr="preencoded.png">    </p:cNvPr>
-          <p:cNvPicPr>
-            <a:picLocks noChangeAspect="1"/>
-          </p:cNvPicPr>
-          <p:nvPr/>
-        </p:nvPicPr>
-        <p:blipFill>
-          <a:blip r:embed="rId3">
-            <a:extLst>
-              <a:ext uri="{96DAC541-7B7A-43D3-8B79-37D633B846F1}">
-                <asvg:svgBlip xmlns:asvg="http://schemas.microsoft.com/office/drawing/2016/SVG/main" r:embed="rId4"/>
-              </a:ext>
-            </a:extLst>
-          </a:blip>
-          <a:stretch>
-            <a:fillRect/>
-          </a:stretch>
-        </p:blipFill>
-        <p:spPr>
-          <a:xfrm>
-            <a:off x="914400" y="3191256"/>
-            <a:ext cx="10241280" cy="1024128"/>
-          </a:xfrm>
-          <a:prstGeom prst="rect">
-            <a:avLst/>
-          </a:prstGeom>
-        </p:spPr>
-      </p:pic>
-      <p:sp>
-        <p:nvSpPr>
-          <p:cNvPr id="5" name="Shape 1"/>
-          <p:cNvSpPr/>
-          <p:nvPr/>
-        </p:nvSpPr>
-        <p:spPr>
-          <a:xfrm>
-            <a:off x="914400" y="3191256"/>
-            <a:ext cx="10241280" cy="1024128"/>
-          </a:xfrm>
-          <a:prstGeom prst="rect">
-            <a:avLst/>
-          </a:prstGeom>
-          <a:solidFill>
-            <a:srgbClr val="FFFFFF">
-              <a:alpha val="0"/>
-            </a:srgbClr>
-          </a:solidFill>
-          <a:ln w="12700">
-            <a:solidFill>
-              <a:srgbClr val="E2E8F0">
-                <a:alpha val="0"/>
-              </a:srgbClr>
-            </a:solidFill>
-            <a:prstDash val="solid"/>
-          </a:ln>
-          <a:effectLst>
-            <a:outerShdw sx="100000" sy="100000" kx="0" ky="0" algn="bl" rotWithShape="0" blurRad="12700" dist="50800" dir="2700000">
-              <a:srgbClr val="000000">
-                <a:alpha val="8000"/>
-              </a:srgbClr>
-            </a:outerShdw>
-          </a:effectLst>
-        </p:spPr>
-      </p:sp>
-      <p:pic>
-        <p:nvPicPr>
-          <p:cNvPr id="6" name="Image 2" descr="preencoded.png">    </p:cNvPr>
-          <p:cNvPicPr>
-            <a:picLocks noChangeAspect="1"/>
-          </p:cNvPicPr>
-          <p:nvPr/>
-        </p:nvPicPr>
-        <p:blipFill>
-          <a:blip r:embed="rId5">
-            <a:extLst>
-              <a:ext uri="{96DAC541-7B7A-43D3-8B79-37D633B846F1}">
-                <asvg:svgBlip xmlns:asvg="http://schemas.microsoft.com/office/drawing/2016/SVG/main" r:embed="rId6"/>
-              </a:ext>
-            </a:extLst>
-          </a:blip>
-          <a:stretch>
-            <a:fillRect/>
-          </a:stretch>
-        </p:blipFill>
-        <p:spPr>
-          <a:xfrm>
-            <a:off x="914400" y="4507992"/>
-            <a:ext cx="10241280" cy="1024128"/>
-          </a:xfrm>
-          <a:prstGeom prst="rect">
-            <a:avLst/>
-          </a:prstGeom>
-        </p:spPr>
-      </p:pic>
-      <p:sp>
-        <p:nvSpPr>
-          <p:cNvPr id="7" name="Shape 2"/>
-          <p:cNvSpPr/>
-          <p:nvPr/>
-        </p:nvSpPr>
-        <p:spPr>
-          <a:xfrm>
-            <a:off x="914400" y="4507992"/>
-            <a:ext cx="10241280" cy="1024128"/>
-          </a:xfrm>
-          <a:prstGeom prst="rect">
-            <a:avLst/>
-          </a:prstGeom>
-          <a:solidFill>
-            <a:srgbClr val="FFFFFF">
-              <a:alpha val="0"/>
-            </a:srgbClr>
-          </a:solidFill>
-          <a:ln w="12700">
-            <a:solidFill>
-              <a:srgbClr val="E2E8F0">
-                <a:alpha val="0"/>
-              </a:srgbClr>
-            </a:solidFill>
-            <a:prstDash val="solid"/>
-          </a:ln>
-          <a:effectLst>
-            <a:outerShdw sx="100000" sy="100000" kx="0" ky="0" algn="bl" rotWithShape="0" blurRad="12700" dist="50800" dir="2700000">
-              <a:srgbClr val="000000">
-                <a:alpha val="8000"/>
-              </a:srgbClr>
-            </a:outerShdw>
-          </a:effectLst>
-        </p:spPr>
-      </p:sp>
-      <p:sp>
-        <p:nvSpPr>
-          <p:cNvPr id="8" name="Shape 3"/>
-          <p:cNvSpPr/>
-          <p:nvPr/>
-        </p:nvSpPr>
-        <p:spPr>
-          <a:xfrm>
-            <a:off x="786384" y="1956816"/>
-            <a:ext cx="32004" cy="3483864"/>
-          </a:xfrm>
-          <a:prstGeom prst="rect">
-            <a:avLst/>
-          </a:prstGeom>
-          <a:solidFill>
-            <a:srgbClr val="DBEAFE">
-              <a:alpha val="80000"/>
-            </a:srgbClr>
-          </a:solidFill>
-          <a:ln w="12700">
-            <a:solidFill>
-              <a:srgbClr val="DBEAFE">
-                <a:alpha val="0"/>
-              </a:srgbClr>
-            </a:solidFill>
-            <a:prstDash val="solid"/>
-          </a:ln>
-        </p:spPr>
-      </p:sp>
-      <p:sp>
-        <p:nvSpPr>
-          <p:cNvPr id="9" name="Shape 4"/>
-          <p:cNvSpPr/>
-          <p:nvPr/>
-        </p:nvSpPr>
-        <p:spPr>
-          <a:xfrm>
-            <a:off x="914400" y="1865376"/>
-            <a:ext cx="73152" cy="1024128"/>
+            <a:off x="822960" y="1938528"/>
+            <a:ext cx="73152" cy="2514600"/>
           </a:xfrm>
           <a:prstGeom prst="rect">
             <a:avLst/>
@@ -18304,14 +16444,14 @@
       </p:sp>
       <p:sp>
         <p:nvSpPr>
-          <p:cNvPr id="10" name="Shape 5"/>
+          <p:cNvPr id="3" name="Shape 1"/>
           <p:cNvSpPr/>
           <p:nvPr/>
         </p:nvSpPr>
         <p:spPr>
           <a:xfrm>
-            <a:off x="914400" y="3191256"/>
-            <a:ext cx="73152" cy="1024128"/>
+            <a:off x="4343400" y="1938528"/>
+            <a:ext cx="73152" cy="2514600"/>
           </a:xfrm>
           <a:prstGeom prst="rect">
             <a:avLst/>
@@ -18331,14 +16471,14 @@
       </p:sp>
       <p:sp>
         <p:nvSpPr>
-          <p:cNvPr id="11" name="Shape 6"/>
+          <p:cNvPr id="4" name="Shape 2"/>
           <p:cNvSpPr/>
           <p:nvPr/>
         </p:nvSpPr>
         <p:spPr>
           <a:xfrm>
-            <a:off x="914400" y="4507992"/>
-            <a:ext cx="73152" cy="1024128"/>
+            <a:off x="7863840" y="1938528"/>
+            <a:ext cx="73152" cy="2514600"/>
           </a:xfrm>
           <a:prstGeom prst="rect">
             <a:avLst/>
@@ -18358,7 +16498,7 @@
       </p:sp>
       <p:sp>
         <p:nvSpPr>
-          <p:cNvPr id="12" name="mdpr:2-3-298275:title:__title:2-3-298275"/>
+          <p:cNvPr id="5" name="mdpr:2-3-298275:title:__title:2-3-298275"/>
           <p:cNvSpPr txBox="1"/>
           <p:nvPr/>
         </p:nvSpPr>
@@ -18392,7 +16532,24 @@
                 <a:ea typeface="Pretendard" pitchFamily="34" charset="-122"/>
                 <a:cs typeface="Pretendard" pitchFamily="34" charset="-120"/>
               </a:rPr>
-              <a:t>Example: examples/theme-preview-en/deck.md (Cont. 2/3)</a:t>
+              <a:t>Example: examples/theme-preview-en/deck.md</a:t>
+            </a:r>
+            <a:pPr algn="ctr" indent="0" marL="0">
+              <a:lnSpc>
+                <a:spcPct val="120000"/>
+              </a:lnSpc>
+              <a:buNone/>
+            </a:pPr>
+            <a:r>
+              <a:rPr lang="en-US" sz="2000" dirty="0">
+                <a:solidFill>
+                  <a:srgbClr val="919191"/>
+                </a:solidFill>
+                <a:latin typeface="Pretendard" pitchFamily="34" charset="0"/>
+                <a:ea typeface="Pretendard" pitchFamily="34" charset="-122"/>
+                <a:cs typeface="Pretendard" pitchFamily="34" charset="-120"/>
+              </a:rPr>
+              <a:t> (Cont. 2/3)</a:t>
             </a:r>
             <a:endParaRPr lang="en-US" sz="3400" dirty="0"/>
           </a:p>
@@ -18400,14 +16557,14 @@
       </p:sp>
       <p:sp>
         <p:nvSpPr>
-          <p:cNvPr id="13" name="mdpr:2-3-298275:item-1:block-38-chunk-2"/>
+          <p:cNvPr id="6" name="mdpr:2-3-298275:item-1:block-38-chunk-2"/>
           <p:cNvSpPr txBox="1"/>
           <p:nvPr/>
         </p:nvSpPr>
         <p:spPr>
           <a:xfrm>
-            <a:off x="1133856" y="2164080"/>
-            <a:ext cx="9820656" cy="426720"/>
+            <a:off x="1042416" y="2982468"/>
+            <a:ext cx="2825496" cy="426720"/>
           </a:xfrm>
           <a:prstGeom prst="rect">
             <a:avLst/>
@@ -18442,14 +16599,14 @@
       </p:sp>
       <p:sp>
         <p:nvSpPr>
-          <p:cNvPr id="14" name="mdpr:2-3-298275:item-2:block-38-chunk-2"/>
+          <p:cNvPr id="7" name="mdpr:2-3-298275:item-2:block-38-chunk-2"/>
           <p:cNvSpPr txBox="1"/>
           <p:nvPr/>
         </p:nvSpPr>
         <p:spPr>
           <a:xfrm>
-            <a:off x="1133856" y="3489960"/>
-            <a:ext cx="9820656" cy="426720"/>
+            <a:off x="4562856" y="2982468"/>
+            <a:ext cx="2825496" cy="426720"/>
           </a:xfrm>
           <a:prstGeom prst="rect">
             <a:avLst/>
@@ -18484,14 +16641,14 @@
       </p:sp>
       <p:sp>
         <p:nvSpPr>
-          <p:cNvPr id="15" name="mdpr:2-3-298275:item-3:block-38-chunk-2"/>
+          <p:cNvPr id="8" name="mdpr:2-3-298275:item-3:block-38-chunk-2"/>
           <p:cNvSpPr txBox="1"/>
           <p:nvPr/>
         </p:nvSpPr>
         <p:spPr>
           <a:xfrm>
-            <a:off x="1133856" y="4600164"/>
-            <a:ext cx="9820656" cy="839785"/>
+            <a:off x="8083296" y="2103120"/>
+            <a:ext cx="2825496" cy="2185416"/>
           </a:xfrm>
           <a:prstGeom prst="rect">
             <a:avLst/>
@@ -18573,243 +16730,16 @@
           <a:chExt cx="0" cy="0"/>
         </a:xfrm>
       </p:grpSpPr>
-      <p:pic>
-        <p:nvPicPr>
-          <p:cNvPr id="2" name="Image 0" descr="preencoded.png">    </p:cNvPr>
-          <p:cNvPicPr>
-            <a:picLocks noChangeAspect="1"/>
-          </p:cNvPicPr>
-          <p:nvPr/>
-        </p:nvPicPr>
-        <p:blipFill>
-          <a:blip r:embed="rId1">
-            <a:extLst>
-              <a:ext uri="{96DAC541-7B7A-43D3-8B79-37D633B846F1}">
-                <asvg:svgBlip xmlns:asvg="http://schemas.microsoft.com/office/drawing/2016/SVG/main" r:embed="rId2"/>
-              </a:ext>
-            </a:extLst>
-          </a:blip>
-          <a:stretch>
-            <a:fillRect/>
-          </a:stretch>
-        </p:blipFill>
-        <p:spPr>
-          <a:xfrm>
-            <a:off x="914400" y="1865376"/>
-            <a:ext cx="10241280" cy="1024128"/>
-          </a:xfrm>
-          <a:prstGeom prst="rect">
-            <a:avLst/>
-          </a:prstGeom>
-        </p:spPr>
-      </p:pic>
-      <p:sp>
-        <p:nvSpPr>
-          <p:cNvPr id="3" name="Shape 0"/>
+      <p:sp>
+        <p:nvSpPr>
+          <p:cNvPr id="2" name="Shape 0"/>
           <p:cNvSpPr/>
           <p:nvPr/>
         </p:nvSpPr>
         <p:spPr>
           <a:xfrm>
-            <a:off x="914400" y="1865376"/>
-            <a:ext cx="10241280" cy="1024128"/>
-          </a:xfrm>
-          <a:prstGeom prst="rect">
-            <a:avLst/>
-          </a:prstGeom>
-          <a:solidFill>
-            <a:srgbClr val="FFFFFF">
-              <a:alpha val="0"/>
-            </a:srgbClr>
-          </a:solidFill>
-          <a:ln w="12700">
-            <a:solidFill>
-              <a:srgbClr val="E2E8F0">
-                <a:alpha val="0"/>
-              </a:srgbClr>
-            </a:solidFill>
-            <a:prstDash val="solid"/>
-          </a:ln>
-          <a:effectLst>
-            <a:outerShdw sx="100000" sy="100000" kx="0" ky="0" algn="bl" rotWithShape="0" blurRad="12700" dist="50800" dir="2700000">
-              <a:srgbClr val="000000">
-                <a:alpha val="8000"/>
-              </a:srgbClr>
-            </a:outerShdw>
-          </a:effectLst>
-        </p:spPr>
-      </p:sp>
-      <p:pic>
-        <p:nvPicPr>
-          <p:cNvPr id="4" name="Image 1" descr="preencoded.png">    </p:cNvPr>
-          <p:cNvPicPr>
-            <a:picLocks noChangeAspect="1"/>
-          </p:cNvPicPr>
-          <p:nvPr/>
-        </p:nvPicPr>
-        <p:blipFill>
-          <a:blip r:embed="rId3">
-            <a:extLst>
-              <a:ext uri="{96DAC541-7B7A-43D3-8B79-37D633B846F1}">
-                <asvg:svgBlip xmlns:asvg="http://schemas.microsoft.com/office/drawing/2016/SVG/main" r:embed="rId4"/>
-              </a:ext>
-            </a:extLst>
-          </a:blip>
-          <a:stretch>
-            <a:fillRect/>
-          </a:stretch>
-        </p:blipFill>
-        <p:spPr>
-          <a:xfrm>
-            <a:off x="914400" y="3191256"/>
-            <a:ext cx="10241280" cy="1024128"/>
-          </a:xfrm>
-          <a:prstGeom prst="rect">
-            <a:avLst/>
-          </a:prstGeom>
-        </p:spPr>
-      </p:pic>
-      <p:sp>
-        <p:nvSpPr>
-          <p:cNvPr id="5" name="Shape 1"/>
-          <p:cNvSpPr/>
-          <p:nvPr/>
-        </p:nvSpPr>
-        <p:spPr>
-          <a:xfrm>
-            <a:off x="914400" y="3191256"/>
-            <a:ext cx="10241280" cy="1024128"/>
-          </a:xfrm>
-          <a:prstGeom prst="rect">
-            <a:avLst/>
-          </a:prstGeom>
-          <a:solidFill>
-            <a:srgbClr val="FFFFFF">
-              <a:alpha val="0"/>
-            </a:srgbClr>
-          </a:solidFill>
-          <a:ln w="12700">
-            <a:solidFill>
-              <a:srgbClr val="E2E8F0">
-                <a:alpha val="0"/>
-              </a:srgbClr>
-            </a:solidFill>
-            <a:prstDash val="solid"/>
-          </a:ln>
-          <a:effectLst>
-            <a:outerShdw sx="100000" sy="100000" kx="0" ky="0" algn="bl" rotWithShape="0" blurRad="12700" dist="50800" dir="2700000">
-              <a:srgbClr val="000000">
-                <a:alpha val="8000"/>
-              </a:srgbClr>
-            </a:outerShdw>
-          </a:effectLst>
-        </p:spPr>
-      </p:sp>
-      <p:pic>
-        <p:nvPicPr>
-          <p:cNvPr id="6" name="Image 2" descr="preencoded.png">    </p:cNvPr>
-          <p:cNvPicPr>
-            <a:picLocks noChangeAspect="1"/>
-          </p:cNvPicPr>
-          <p:nvPr/>
-        </p:nvPicPr>
-        <p:blipFill>
-          <a:blip r:embed="rId5">
-            <a:extLst>
-              <a:ext uri="{96DAC541-7B7A-43D3-8B79-37D633B846F1}">
-                <asvg:svgBlip xmlns:asvg="http://schemas.microsoft.com/office/drawing/2016/SVG/main" r:embed="rId6"/>
-              </a:ext>
-            </a:extLst>
-          </a:blip>
-          <a:stretch>
-            <a:fillRect/>
-          </a:stretch>
-        </p:blipFill>
-        <p:spPr>
-          <a:xfrm>
-            <a:off x="914400" y="4507992"/>
-            <a:ext cx="10241280" cy="1024128"/>
-          </a:xfrm>
-          <a:prstGeom prst="rect">
-            <a:avLst/>
-          </a:prstGeom>
-        </p:spPr>
-      </p:pic>
-      <p:sp>
-        <p:nvSpPr>
-          <p:cNvPr id="7" name="Shape 2"/>
-          <p:cNvSpPr/>
-          <p:nvPr/>
-        </p:nvSpPr>
-        <p:spPr>
-          <a:xfrm>
-            <a:off x="914400" y="4507992"/>
-            <a:ext cx="10241280" cy="1024128"/>
-          </a:xfrm>
-          <a:prstGeom prst="rect">
-            <a:avLst/>
-          </a:prstGeom>
-          <a:solidFill>
-            <a:srgbClr val="FFFFFF">
-              <a:alpha val="0"/>
-            </a:srgbClr>
-          </a:solidFill>
-          <a:ln w="12700">
-            <a:solidFill>
-              <a:srgbClr val="E2E8F0">
-                <a:alpha val="0"/>
-              </a:srgbClr>
-            </a:solidFill>
-            <a:prstDash val="solid"/>
-          </a:ln>
-          <a:effectLst>
-            <a:outerShdw sx="100000" sy="100000" kx="0" ky="0" algn="bl" rotWithShape="0" blurRad="12700" dist="50800" dir="2700000">
-              <a:srgbClr val="000000">
-                <a:alpha val="8000"/>
-              </a:srgbClr>
-            </a:outerShdw>
-          </a:effectLst>
-        </p:spPr>
-      </p:sp>
-      <p:sp>
-        <p:nvSpPr>
-          <p:cNvPr id="8" name="Shape 3"/>
-          <p:cNvSpPr/>
-          <p:nvPr/>
-        </p:nvSpPr>
-        <p:spPr>
-          <a:xfrm>
-            <a:off x="786384" y="1956816"/>
-            <a:ext cx="32004" cy="3483864"/>
-          </a:xfrm>
-          <a:prstGeom prst="rect">
-            <a:avLst/>
-          </a:prstGeom>
-          <a:solidFill>
-            <a:srgbClr val="DBEAFE">
-              <a:alpha val="80000"/>
-            </a:srgbClr>
-          </a:solidFill>
-          <a:ln w="12700">
-            <a:solidFill>
-              <a:srgbClr val="DBEAFE">
-                <a:alpha val="0"/>
-              </a:srgbClr>
-            </a:solidFill>
-            <a:prstDash val="solid"/>
-          </a:ln>
-        </p:spPr>
-      </p:sp>
-      <p:sp>
-        <p:nvSpPr>
-          <p:cNvPr id="9" name="Shape 4"/>
-          <p:cNvSpPr/>
-          <p:nvPr/>
-        </p:nvSpPr>
-        <p:spPr>
-          <a:xfrm>
-            <a:off x="914400" y="1865376"/>
-            <a:ext cx="73152" cy="1024128"/>
+            <a:off x="822960" y="1938528"/>
+            <a:ext cx="73152" cy="2514600"/>
           </a:xfrm>
           <a:prstGeom prst="rect">
             <a:avLst/>
@@ -18829,14 +16759,14 @@
       </p:sp>
       <p:sp>
         <p:nvSpPr>
-          <p:cNvPr id="10" name="Shape 5"/>
+          <p:cNvPr id="3" name="Shape 1"/>
           <p:cNvSpPr/>
           <p:nvPr/>
         </p:nvSpPr>
         <p:spPr>
           <a:xfrm>
-            <a:off x="914400" y="3191256"/>
-            <a:ext cx="73152" cy="1024128"/>
+            <a:off x="4343400" y="1938528"/>
+            <a:ext cx="73152" cy="2514600"/>
           </a:xfrm>
           <a:prstGeom prst="rect">
             <a:avLst/>
@@ -18856,14 +16786,14 @@
       </p:sp>
       <p:sp>
         <p:nvSpPr>
-          <p:cNvPr id="11" name="Shape 6"/>
+          <p:cNvPr id="4" name="Shape 2"/>
           <p:cNvSpPr/>
           <p:nvPr/>
         </p:nvSpPr>
         <p:spPr>
           <a:xfrm>
-            <a:off x="914400" y="4507992"/>
-            <a:ext cx="73152" cy="1024128"/>
+            <a:off x="7863840" y="1938528"/>
+            <a:ext cx="73152" cy="2514600"/>
           </a:xfrm>
           <a:prstGeom prst="rect">
             <a:avLst/>
@@ -18883,7 +16813,7 @@
       </p:sp>
       <p:sp>
         <p:nvSpPr>
-          <p:cNvPr id="12" name="mdpr:3-3-bec926:title:__title:3-3-bec926"/>
+          <p:cNvPr id="5" name="mdpr:3-3-bec926:title:__title:3-3-bec926"/>
           <p:cNvSpPr txBox="1"/>
           <p:nvPr/>
         </p:nvSpPr>
@@ -18917,7 +16847,24 @@
                 <a:ea typeface="Pretendard" pitchFamily="34" charset="-122"/>
                 <a:cs typeface="Pretendard" pitchFamily="34" charset="-120"/>
               </a:rPr>
-              <a:t>Example: examples/theme-preview-en/deck.md (Cont. 3/3)</a:t>
+              <a:t>Example: examples/theme-preview-en/deck.md</a:t>
+            </a:r>
+            <a:pPr algn="ctr" indent="0" marL="0">
+              <a:lnSpc>
+                <a:spcPct val="120000"/>
+              </a:lnSpc>
+              <a:buNone/>
+            </a:pPr>
+            <a:r>
+              <a:rPr lang="en-US" sz="2000" dirty="0">
+                <a:solidFill>
+                  <a:srgbClr val="919191"/>
+                </a:solidFill>
+                <a:latin typeface="Pretendard" pitchFamily="34" charset="0"/>
+                <a:ea typeface="Pretendard" pitchFamily="34" charset="-122"/>
+                <a:cs typeface="Pretendard" pitchFamily="34" charset="-120"/>
+              </a:rPr>
+              <a:t> (Cont. 3/3)</a:t>
             </a:r>
             <a:endParaRPr lang="en-US" sz="3400" dirty="0"/>
           </a:p>
@@ -18925,14 +16872,14 @@
       </p:sp>
       <p:sp>
         <p:nvSpPr>
-          <p:cNvPr id="13" name="mdpr:3-3-bec926:item-1:block-38-chunk-3"/>
+          <p:cNvPr id="6" name="mdpr:3-3-bec926:item-1:block-38-chunk-3"/>
           <p:cNvSpPr txBox="1"/>
           <p:nvPr/>
         </p:nvSpPr>
         <p:spPr>
           <a:xfrm>
-            <a:off x="1133856" y="1957548"/>
-            <a:ext cx="9820656" cy="839785"/>
+            <a:off x="1042416" y="2103120"/>
+            <a:ext cx="2825496" cy="2185416"/>
           </a:xfrm>
           <a:prstGeom prst="rect">
             <a:avLst/>
@@ -18984,14 +16931,14 @@
       </p:sp>
       <p:sp>
         <p:nvSpPr>
-          <p:cNvPr id="14" name="mdpr:3-3-bec926:item-2:block-38-chunk-3"/>
+          <p:cNvPr id="7" name="mdpr:3-3-bec926:item-2:block-38-chunk-3"/>
           <p:cNvSpPr txBox="1"/>
           <p:nvPr/>
         </p:nvSpPr>
         <p:spPr>
           <a:xfrm>
-            <a:off x="1133856" y="3283428"/>
-            <a:ext cx="9820656" cy="839785"/>
+            <a:off x="4562856" y="2103120"/>
+            <a:ext cx="2825496" cy="2185416"/>
           </a:xfrm>
           <a:prstGeom prst="rect">
             <a:avLst/>
@@ -19043,14 +16990,14 @@
       </p:sp>
       <p:sp>
         <p:nvSpPr>
-          <p:cNvPr id="15" name="mdpr:3-3-bec926:item-3:block-38-chunk-3"/>
+          <p:cNvPr id="8" name="mdpr:3-3-bec926:item-3:block-38-chunk-3"/>
           <p:cNvSpPr txBox="1"/>
           <p:nvPr/>
         </p:nvSpPr>
         <p:spPr>
           <a:xfrm>
-            <a:off x="1133856" y="4600164"/>
-            <a:ext cx="9820656" cy="839785"/>
+            <a:off x="8083296" y="2103120"/>
+            <a:ext cx="2825496" cy="2185416"/>
           </a:xfrm>
           <a:prstGeom prst="rect">
             <a:avLst/>
@@ -22884,7 +20831,24 @@
                 <a:ea typeface="Pretendard" pitchFamily="34" charset="-122"/>
                 <a:cs typeface="Pretendard" pitchFamily="34" charset="-120"/>
               </a:rPr>
-              <a:t>Pipeline boundary (Cont. 2/2)</a:t>
+              <a:t>Pipeline boundary</a:t>
+            </a:r>
+            <a:pPr algn="ctr" indent="0" marL="0">
+              <a:lnSpc>
+                <a:spcPct val="120000"/>
+              </a:lnSpc>
+              <a:buNone/>
+            </a:pPr>
+            <a:r>
+              <a:rPr lang="en-US" sz="2000" dirty="0">
+                <a:solidFill>
+                  <a:srgbClr val="919191"/>
+                </a:solidFill>
+                <a:latin typeface="Pretendard" pitchFamily="34" charset="0"/>
+                <a:ea typeface="Pretendard" pitchFamily="34" charset="-122"/>
+                <a:cs typeface="Pretendard" pitchFamily="34" charset="-120"/>
+              </a:rPr>
+              <a:t> (Cont. 2/2)</a:t>
             </a:r>
             <a:endParaRPr lang="en-US" sz="3400" dirty="0"/>
           </a:p>
@@ -24148,7 +22112,24 @@
                 <a:ea typeface="Pretendard" pitchFamily="34" charset="-122"/>
                 <a:cs typeface="Pretendard" pitchFamily="34" charset="-120"/>
               </a:rPr>
-              <a:t>Architecture (Cont. 2/2)</a:t>
+              <a:t>Architecture</a:t>
+            </a:r>
+            <a:pPr algn="ctr" indent="0" marL="0">
+              <a:lnSpc>
+                <a:spcPct val="120000"/>
+              </a:lnSpc>
+              <a:buNone/>
+            </a:pPr>
+            <a:r>
+              <a:rPr lang="en-US" sz="2000" dirty="0">
+                <a:solidFill>
+                  <a:srgbClr val="919191"/>
+                </a:solidFill>
+                <a:latin typeface="Pretendard" pitchFamily="34" charset="0"/>
+                <a:ea typeface="Pretendard" pitchFamily="34" charset="-122"/>
+                <a:cs typeface="Pretendard" pitchFamily="34" charset="-120"/>
+              </a:rPr>
+              <a:t> (Cont. 2/2)</a:t>
             </a:r>
             <a:endParaRPr lang="en-US" sz="3400" dirty="0"/>
           </a:p>
@@ -25362,243 +23343,16 @@
           <a:chExt cx="0" cy="0"/>
         </a:xfrm>
       </p:grpSpPr>
-      <p:pic>
-        <p:nvPicPr>
-          <p:cNvPr id="2" name="Image 0" descr="preencoded.png">    </p:cNvPr>
-          <p:cNvPicPr>
-            <a:picLocks noChangeAspect="1"/>
-          </p:cNvPicPr>
-          <p:nvPr/>
-        </p:nvPicPr>
-        <p:blipFill>
-          <a:blip r:embed="rId1">
-            <a:extLst>
-              <a:ext uri="{96DAC541-7B7A-43D3-8B79-37D633B846F1}">
-                <asvg:svgBlip xmlns:asvg="http://schemas.microsoft.com/office/drawing/2016/SVG/main" r:embed="rId2"/>
-              </a:ext>
-            </a:extLst>
-          </a:blip>
-          <a:stretch>
-            <a:fillRect/>
-          </a:stretch>
-        </p:blipFill>
-        <p:spPr>
-          <a:xfrm>
-            <a:off x="914400" y="1865376"/>
-            <a:ext cx="10241280" cy="1024128"/>
-          </a:xfrm>
-          <a:prstGeom prst="rect">
-            <a:avLst/>
-          </a:prstGeom>
-        </p:spPr>
-      </p:pic>
-      <p:sp>
-        <p:nvSpPr>
-          <p:cNvPr id="3" name="Shape 0"/>
+      <p:sp>
+        <p:nvSpPr>
+          <p:cNvPr id="2" name="Shape 0"/>
           <p:cNvSpPr/>
           <p:nvPr/>
         </p:nvSpPr>
         <p:spPr>
           <a:xfrm>
-            <a:off x="914400" y="1865376"/>
-            <a:ext cx="10241280" cy="1024128"/>
-          </a:xfrm>
-          <a:prstGeom prst="rect">
-            <a:avLst/>
-          </a:prstGeom>
-          <a:solidFill>
-            <a:srgbClr val="FFFFFF">
-              <a:alpha val="0"/>
-            </a:srgbClr>
-          </a:solidFill>
-          <a:ln w="12700">
-            <a:solidFill>
-              <a:srgbClr val="E2E8F0">
-                <a:alpha val="0"/>
-              </a:srgbClr>
-            </a:solidFill>
-            <a:prstDash val="solid"/>
-          </a:ln>
-          <a:effectLst>
-            <a:outerShdw sx="100000" sy="100000" kx="0" ky="0" algn="bl" rotWithShape="0" blurRad="12700" dist="50800" dir="2700000">
-              <a:srgbClr val="000000">
-                <a:alpha val="8000"/>
-              </a:srgbClr>
-            </a:outerShdw>
-          </a:effectLst>
-        </p:spPr>
-      </p:sp>
-      <p:pic>
-        <p:nvPicPr>
-          <p:cNvPr id="4" name="Image 1" descr="preencoded.png">    </p:cNvPr>
-          <p:cNvPicPr>
-            <a:picLocks noChangeAspect="1"/>
-          </p:cNvPicPr>
-          <p:nvPr/>
-        </p:nvPicPr>
-        <p:blipFill>
-          <a:blip r:embed="rId3">
-            <a:extLst>
-              <a:ext uri="{96DAC541-7B7A-43D3-8B79-37D633B846F1}">
-                <asvg:svgBlip xmlns:asvg="http://schemas.microsoft.com/office/drawing/2016/SVG/main" r:embed="rId4"/>
-              </a:ext>
-            </a:extLst>
-          </a:blip>
-          <a:stretch>
-            <a:fillRect/>
-          </a:stretch>
-        </p:blipFill>
-        <p:spPr>
-          <a:xfrm>
-            <a:off x="914400" y="3191256"/>
-            <a:ext cx="10241280" cy="1024128"/>
-          </a:xfrm>
-          <a:prstGeom prst="rect">
-            <a:avLst/>
-          </a:prstGeom>
-        </p:spPr>
-      </p:pic>
-      <p:sp>
-        <p:nvSpPr>
-          <p:cNvPr id="5" name="Shape 1"/>
-          <p:cNvSpPr/>
-          <p:nvPr/>
-        </p:nvSpPr>
-        <p:spPr>
-          <a:xfrm>
-            <a:off x="914400" y="3191256"/>
-            <a:ext cx="10241280" cy="1024128"/>
-          </a:xfrm>
-          <a:prstGeom prst="rect">
-            <a:avLst/>
-          </a:prstGeom>
-          <a:solidFill>
-            <a:srgbClr val="FFFFFF">
-              <a:alpha val="0"/>
-            </a:srgbClr>
-          </a:solidFill>
-          <a:ln w="12700">
-            <a:solidFill>
-              <a:srgbClr val="E2E8F0">
-                <a:alpha val="0"/>
-              </a:srgbClr>
-            </a:solidFill>
-            <a:prstDash val="solid"/>
-          </a:ln>
-          <a:effectLst>
-            <a:outerShdw sx="100000" sy="100000" kx="0" ky="0" algn="bl" rotWithShape="0" blurRad="12700" dist="50800" dir="2700000">
-              <a:srgbClr val="000000">
-                <a:alpha val="8000"/>
-              </a:srgbClr>
-            </a:outerShdw>
-          </a:effectLst>
-        </p:spPr>
-      </p:sp>
-      <p:pic>
-        <p:nvPicPr>
-          <p:cNvPr id="6" name="Image 2" descr="preencoded.png">    </p:cNvPr>
-          <p:cNvPicPr>
-            <a:picLocks noChangeAspect="1"/>
-          </p:cNvPicPr>
-          <p:nvPr/>
-        </p:nvPicPr>
-        <p:blipFill>
-          <a:blip r:embed="rId5">
-            <a:extLst>
-              <a:ext uri="{96DAC541-7B7A-43D3-8B79-37D633B846F1}">
-                <asvg:svgBlip xmlns:asvg="http://schemas.microsoft.com/office/drawing/2016/SVG/main" r:embed="rId6"/>
-              </a:ext>
-            </a:extLst>
-          </a:blip>
-          <a:stretch>
-            <a:fillRect/>
-          </a:stretch>
-        </p:blipFill>
-        <p:spPr>
-          <a:xfrm>
-            <a:off x="914400" y="4507992"/>
-            <a:ext cx="10241280" cy="1024128"/>
-          </a:xfrm>
-          <a:prstGeom prst="rect">
-            <a:avLst/>
-          </a:prstGeom>
-        </p:spPr>
-      </p:pic>
-      <p:sp>
-        <p:nvSpPr>
-          <p:cNvPr id="7" name="Shape 2"/>
-          <p:cNvSpPr/>
-          <p:nvPr/>
-        </p:nvSpPr>
-        <p:spPr>
-          <a:xfrm>
-            <a:off x="914400" y="4507992"/>
-            <a:ext cx="10241280" cy="1024128"/>
-          </a:xfrm>
-          <a:prstGeom prst="rect">
-            <a:avLst/>
-          </a:prstGeom>
-          <a:solidFill>
-            <a:srgbClr val="FFFFFF">
-              <a:alpha val="0"/>
-            </a:srgbClr>
-          </a:solidFill>
-          <a:ln w="12700">
-            <a:solidFill>
-              <a:srgbClr val="E2E8F0">
-                <a:alpha val="0"/>
-              </a:srgbClr>
-            </a:solidFill>
-            <a:prstDash val="solid"/>
-          </a:ln>
-          <a:effectLst>
-            <a:outerShdw sx="100000" sy="100000" kx="0" ky="0" algn="bl" rotWithShape="0" blurRad="12700" dist="50800" dir="2700000">
-              <a:srgbClr val="000000">
-                <a:alpha val="8000"/>
-              </a:srgbClr>
-            </a:outerShdw>
-          </a:effectLst>
-        </p:spPr>
-      </p:sp>
-      <p:sp>
-        <p:nvSpPr>
-          <p:cNvPr id="8" name="Shape 3"/>
-          <p:cNvSpPr/>
-          <p:nvPr/>
-        </p:nvSpPr>
-        <p:spPr>
-          <a:xfrm>
-            <a:off x="786384" y="1956816"/>
-            <a:ext cx="32004" cy="3483864"/>
-          </a:xfrm>
-          <a:prstGeom prst="rect">
-            <a:avLst/>
-          </a:prstGeom>
-          <a:solidFill>
-            <a:srgbClr val="DBEAFE">
-              <a:alpha val="80000"/>
-            </a:srgbClr>
-          </a:solidFill>
-          <a:ln w="12700">
-            <a:solidFill>
-              <a:srgbClr val="DBEAFE">
-                <a:alpha val="0"/>
-              </a:srgbClr>
-            </a:solidFill>
-            <a:prstDash val="solid"/>
-          </a:ln>
-        </p:spPr>
-      </p:sp>
-      <p:sp>
-        <p:nvSpPr>
-          <p:cNvPr id="9" name="Shape 4"/>
-          <p:cNvSpPr/>
-          <p:nvPr/>
-        </p:nvSpPr>
-        <p:spPr>
-          <a:xfrm>
-            <a:off x="914400" y="1865376"/>
-            <a:ext cx="73152" cy="1024128"/>
+            <a:off x="822960" y="1938528"/>
+            <a:ext cx="73152" cy="2514600"/>
           </a:xfrm>
           <a:prstGeom prst="rect">
             <a:avLst/>
@@ -25618,14 +23372,14 @@
       </p:sp>
       <p:sp>
         <p:nvSpPr>
-          <p:cNvPr id="10" name="Shape 5"/>
+          <p:cNvPr id="3" name="Shape 1"/>
           <p:cNvSpPr/>
           <p:nvPr/>
         </p:nvSpPr>
         <p:spPr>
           <a:xfrm>
-            <a:off x="914400" y="3191256"/>
-            <a:ext cx="73152" cy="1024128"/>
+            <a:off x="4343400" y="1938528"/>
+            <a:ext cx="73152" cy="2514600"/>
           </a:xfrm>
           <a:prstGeom prst="rect">
             <a:avLst/>
@@ -25645,14 +23399,14 @@
       </p:sp>
       <p:sp>
         <p:nvSpPr>
-          <p:cNvPr id="11" name="Shape 6"/>
+          <p:cNvPr id="4" name="Shape 2"/>
           <p:cNvSpPr/>
           <p:nvPr/>
         </p:nvSpPr>
         <p:spPr>
           <a:xfrm>
-            <a:off x="914400" y="4507992"/>
-            <a:ext cx="73152" cy="1024128"/>
+            <a:off x="7863840" y="1938528"/>
+            <a:ext cx="73152" cy="2514600"/>
           </a:xfrm>
           <a:prstGeom prst="rect">
             <a:avLst/>
@@ -25672,7 +23426,7 @@
       </p:sp>
       <p:sp>
         <p:nvSpPr>
-          <p:cNvPr id="12" name="mdpr:1-3-c49d80:title:__title:1-3-c49d80"/>
+          <p:cNvPr id="5" name="mdpr:1-3-c49d80:title:__title:1-3-c49d80"/>
           <p:cNvSpPr txBox="1"/>
           <p:nvPr/>
         </p:nvSpPr>
@@ -25714,14 +23468,14 @@
       </p:sp>
       <p:sp>
         <p:nvSpPr>
-          <p:cNvPr id="13" name="mdpr:1-3-c49d80:item-1:block-12-chunk-1"/>
+          <p:cNvPr id="6" name="mdpr:1-3-c49d80:item-1:block-12-chunk-1"/>
           <p:cNvSpPr txBox="1"/>
           <p:nvPr/>
         </p:nvSpPr>
         <p:spPr>
           <a:xfrm>
-            <a:off x="1133856" y="2164080"/>
-            <a:ext cx="9820656" cy="426720"/>
+            <a:off x="1042416" y="2982468"/>
+            <a:ext cx="2825496" cy="426720"/>
           </a:xfrm>
           <a:prstGeom prst="rect">
             <a:avLst/>
@@ -25756,14 +23510,14 @@
       </p:sp>
       <p:sp>
         <p:nvSpPr>
-          <p:cNvPr id="14" name="mdpr:1-3-c49d80:item-2:block-12-chunk-1"/>
+          <p:cNvPr id="7" name="mdpr:1-3-c49d80:item-2:block-12-chunk-1"/>
           <p:cNvSpPr txBox="1"/>
           <p:nvPr/>
         </p:nvSpPr>
         <p:spPr>
           <a:xfrm>
-            <a:off x="1133856" y="3489960"/>
-            <a:ext cx="9820656" cy="426720"/>
+            <a:off x="4562856" y="2982468"/>
+            <a:ext cx="2825496" cy="426720"/>
           </a:xfrm>
           <a:prstGeom prst="rect">
             <a:avLst/>
@@ -25798,14 +23552,14 @@
       </p:sp>
       <p:sp>
         <p:nvSpPr>
-          <p:cNvPr id="15" name="mdpr:1-3-c49d80:item-3:block-12-chunk-1"/>
+          <p:cNvPr id="8" name="mdpr:1-3-c49d80:item-3:block-12-chunk-1"/>
           <p:cNvSpPr txBox="1"/>
           <p:nvPr/>
         </p:nvSpPr>
         <p:spPr>
           <a:xfrm>
-            <a:off x="1133856" y="4806696"/>
-            <a:ext cx="9820656" cy="426720"/>
+            <a:off x="8083296" y="2982468"/>
+            <a:ext cx="2825496" cy="426720"/>
           </a:xfrm>
           <a:prstGeom prst="rect">
             <a:avLst/>

--- a/artifacts/mdpr-vs-skill/mdpr-baseline-result.pptx
+++ b/artifacts/mdpr-vs-skill/mdpr-baseline-result.pptx
@@ -4010,8 +4010,8 @@
         </p:nvSpPr>
         <p:spPr>
           <a:xfrm>
-            <a:off x="822960" y="1938528"/>
-            <a:ext cx="73152" cy="2514600"/>
+            <a:off x="822960" y="2487168"/>
+            <a:ext cx="73152" cy="1417320"/>
           </a:xfrm>
           <a:prstGeom prst="rect">
             <a:avLst/>
@@ -4037,8 +4037,8 @@
         </p:nvSpPr>
         <p:spPr>
           <a:xfrm>
-            <a:off x="4343400" y="1938528"/>
-            <a:ext cx="73152" cy="2514600"/>
+            <a:off x="4343400" y="2487168"/>
+            <a:ext cx="73152" cy="1417320"/>
           </a:xfrm>
           <a:prstGeom prst="rect">
             <a:avLst/>
@@ -4064,8 +4064,8 @@
         </p:nvSpPr>
         <p:spPr>
           <a:xfrm>
-            <a:off x="7863840" y="1938528"/>
-            <a:ext cx="73152" cy="2514600"/>
+            <a:off x="7863840" y="2487168"/>
+            <a:ext cx="73152" cy="1417320"/>
           </a:xfrm>
           <a:prstGeom prst="rect">
             <a:avLst/>
@@ -7574,8 +7574,8 @@
         </p:nvSpPr>
         <p:spPr>
           <a:xfrm>
-            <a:off x="822960" y="1938528"/>
-            <a:ext cx="73152" cy="2514600"/>
+            <a:off x="822960" y="2487168"/>
+            <a:ext cx="73152" cy="1417320"/>
           </a:xfrm>
           <a:prstGeom prst="rect">
             <a:avLst/>
@@ -7601,8 +7601,8 @@
         </p:nvSpPr>
         <p:spPr>
           <a:xfrm>
-            <a:off x="4343400" y="1938528"/>
-            <a:ext cx="73152" cy="2514600"/>
+            <a:off x="4343400" y="2487168"/>
+            <a:ext cx="73152" cy="1417320"/>
           </a:xfrm>
           <a:prstGeom prst="rect">
             <a:avLst/>
@@ -7628,8 +7628,8 @@
         </p:nvSpPr>
         <p:spPr>
           <a:xfrm>
-            <a:off x="7863840" y="1938528"/>
-            <a:ext cx="73152" cy="2514600"/>
+            <a:off x="7863840" y="2487168"/>
+            <a:ext cx="73152" cy="1417320"/>
           </a:xfrm>
           <a:prstGeom prst="rect">
             <a:avLst/>
@@ -11207,8 +11207,8 @@
         </p:nvSpPr>
         <p:spPr>
           <a:xfrm>
-            <a:off x="822960" y="1938528"/>
-            <a:ext cx="73152" cy="2514600"/>
+            <a:off x="822960" y="2487168"/>
+            <a:ext cx="73152" cy="1417320"/>
           </a:xfrm>
           <a:prstGeom prst="rect">
             <a:avLst/>
@@ -11234,8 +11234,8 @@
         </p:nvSpPr>
         <p:spPr>
           <a:xfrm>
-            <a:off x="4343400" y="1938528"/>
-            <a:ext cx="73152" cy="2514600"/>
+            <a:off x="4343400" y="2487168"/>
+            <a:ext cx="73152" cy="1417320"/>
           </a:xfrm>
           <a:prstGeom prst="rect">
             <a:avLst/>
@@ -11261,8 +11261,8 @@
         </p:nvSpPr>
         <p:spPr>
           <a:xfrm>
-            <a:off x="7863840" y="1938528"/>
-            <a:ext cx="73152" cy="2514600"/>
+            <a:off x="7863840" y="2487168"/>
+            <a:ext cx="73152" cy="1417320"/>
           </a:xfrm>
           <a:prstGeom prst="rect">
             <a:avLst/>
@@ -13100,8 +13100,8 @@
         </p:nvSpPr>
         <p:spPr>
           <a:xfrm>
-            <a:off x="822960" y="1938528"/>
-            <a:ext cx="73152" cy="2514600"/>
+            <a:off x="822960" y="2487168"/>
+            <a:ext cx="73152" cy="1417320"/>
           </a:xfrm>
           <a:prstGeom prst="rect">
             <a:avLst/>
@@ -13127,8 +13127,8 @@
         </p:nvSpPr>
         <p:spPr>
           <a:xfrm>
-            <a:off x="4343400" y="1938528"/>
-            <a:ext cx="73152" cy="2514600"/>
+            <a:off x="4343400" y="2487168"/>
+            <a:ext cx="73152" cy="1417320"/>
           </a:xfrm>
           <a:prstGeom prst="rect">
             <a:avLst/>
@@ -13154,8 +13154,8 @@
         </p:nvSpPr>
         <p:spPr>
           <a:xfrm>
-            <a:off x="7863840" y="1938528"/>
-            <a:ext cx="73152" cy="2514600"/>
+            <a:off x="7863840" y="2487168"/>
+            <a:ext cx="73152" cy="1417320"/>
           </a:xfrm>
           <a:prstGeom prst="rect">
             <a:avLst/>

--- a/artifacts/mdpr-vs-skill/mdpr-baseline-result.pptx
+++ b/artifacts/mdpr-vs-skill/mdpr-baseline-result.pptx
@@ -20862,8 +20862,8 @@
         </p:nvSpPr>
         <p:spPr>
           <a:xfrm>
-            <a:off x="6103620" y="2802407"/>
-            <a:ext cx="0" cy="430225"/>
+            <a:off x="6103620" y="3051581"/>
+            <a:ext cx="0" cy="389077"/>
           </a:xfrm>
           <a:prstGeom prst="line">
             <a:avLst/>
@@ -20886,8 +20886,8 @@
         </p:nvSpPr>
         <p:spPr>
           <a:xfrm>
-            <a:off x="6103620" y="4439183"/>
-            <a:ext cx="0" cy="430225"/>
+            <a:off x="6103620" y="4231157"/>
+            <a:ext cx="0" cy="389077"/>
           </a:xfrm>
           <a:prstGeom prst="line">
             <a:avLst/>
@@ -20910,12 +20910,12 @@
         </p:nvSpPr>
         <p:spPr>
           <a:xfrm>
-            <a:off x="2169871" y="1536192"/>
-            <a:ext cx="7867498" cy="1325880"/>
+            <a:off x="2169871" y="2221992"/>
+            <a:ext cx="7867498" cy="868680"/>
           </a:xfrm>
           <a:prstGeom prst="roundRect">
             <a:avLst>
-              <a:gd name="adj" fmla="val 4138"/>
+              <a:gd name="adj" fmla="val 6316"/>
             </a:avLst>
           </a:prstGeom>
           <a:solidFill>
@@ -20944,7 +20944,7 @@
         </p:nvSpPr>
         <p:spPr>
           <a:xfrm>
-            <a:off x="2169871" y="1536192"/>
+            <a:off x="2169871" y="2221992"/>
             <a:ext cx="7867498" cy="109728"/>
           </a:xfrm>
           <a:prstGeom prst="rect">
@@ -20971,8 +20971,8 @@
         </p:nvSpPr>
         <p:spPr>
           <a:xfrm>
-            <a:off x="2334463" y="1997964"/>
-            <a:ext cx="402336" cy="402336"/>
+            <a:off x="2334463" y="2482596"/>
+            <a:ext cx="347472" cy="347472"/>
           </a:xfrm>
           <a:prstGeom prst="ellipse">
             <a:avLst/>
@@ -20998,8 +20998,8 @@
         </p:nvSpPr>
         <p:spPr>
           <a:xfrm>
-            <a:off x="2334463" y="1997964"/>
-            <a:ext cx="402336" cy="402336"/>
+            <a:off x="2334463" y="2482596"/>
+            <a:ext cx="347472" cy="347472"/>
           </a:xfrm>
           <a:prstGeom prst="rect">
             <a:avLst/>
@@ -21042,8 +21042,8 @@
         </p:nvSpPr>
         <p:spPr>
           <a:xfrm>
-            <a:off x="2883103" y="1664208"/>
-            <a:ext cx="6989674" cy="1069848"/>
+            <a:off x="2828239" y="2350008"/>
+            <a:ext cx="7044538" cy="612648"/>
           </a:xfrm>
           <a:prstGeom prst="rect">
             <a:avLst/>
@@ -21086,12 +21086,12 @@
         </p:nvSpPr>
         <p:spPr>
           <a:xfrm>
-            <a:off x="2169871" y="3172968"/>
-            <a:ext cx="7867498" cy="1325880"/>
+            <a:off x="2169871" y="3401568"/>
+            <a:ext cx="7867498" cy="868680"/>
           </a:xfrm>
           <a:prstGeom prst="roundRect">
             <a:avLst>
-              <a:gd name="adj" fmla="val 4138"/>
+              <a:gd name="adj" fmla="val 6316"/>
             </a:avLst>
           </a:prstGeom>
           <a:solidFill>
@@ -21120,7 +21120,7 @@
         </p:nvSpPr>
         <p:spPr>
           <a:xfrm>
-            <a:off x="2169871" y="3172968"/>
+            <a:off x="2169871" y="3401568"/>
             <a:ext cx="7867498" cy="109728"/>
           </a:xfrm>
           <a:prstGeom prst="rect">
@@ -21147,8 +21147,8 @@
         </p:nvSpPr>
         <p:spPr>
           <a:xfrm>
-            <a:off x="2334463" y="3634740"/>
-            <a:ext cx="402336" cy="402336"/>
+            <a:off x="2334463" y="3662172"/>
+            <a:ext cx="347472" cy="347472"/>
           </a:xfrm>
           <a:prstGeom prst="ellipse">
             <a:avLst/>
@@ -21174,8 +21174,8 @@
         </p:nvSpPr>
         <p:spPr>
           <a:xfrm>
-            <a:off x="2334463" y="3634740"/>
-            <a:ext cx="402336" cy="402336"/>
+            <a:off x="2334463" y="3662172"/>
+            <a:ext cx="347472" cy="347472"/>
           </a:xfrm>
           <a:prstGeom prst="rect">
             <a:avLst/>
@@ -21218,8 +21218,8 @@
         </p:nvSpPr>
         <p:spPr>
           <a:xfrm>
-            <a:off x="2883103" y="3300984"/>
-            <a:ext cx="6989674" cy="1069848"/>
+            <a:off x="2828239" y="3529584"/>
+            <a:ext cx="7044538" cy="612648"/>
           </a:xfrm>
           <a:prstGeom prst="rect">
             <a:avLst/>
@@ -21262,12 +21262,12 @@
         </p:nvSpPr>
         <p:spPr>
           <a:xfrm>
-            <a:off x="2169871" y="4809744"/>
-            <a:ext cx="7867498" cy="1325880"/>
+            <a:off x="2169871" y="4581144"/>
+            <a:ext cx="7867498" cy="868680"/>
           </a:xfrm>
           <a:prstGeom prst="roundRect">
             <a:avLst>
-              <a:gd name="adj" fmla="val 4138"/>
+              <a:gd name="adj" fmla="val 6316"/>
             </a:avLst>
           </a:prstGeom>
           <a:solidFill>
@@ -21296,7 +21296,7 @@
         </p:nvSpPr>
         <p:spPr>
           <a:xfrm>
-            <a:off x="2169871" y="4809744"/>
+            <a:off x="2169871" y="4581144"/>
             <a:ext cx="7867498" cy="109728"/>
           </a:xfrm>
           <a:prstGeom prst="rect">
@@ -21323,8 +21323,8 @@
         </p:nvSpPr>
         <p:spPr>
           <a:xfrm>
-            <a:off x="2334463" y="5271516"/>
-            <a:ext cx="402336" cy="402336"/>
+            <a:off x="2334463" y="4841748"/>
+            <a:ext cx="347472" cy="347472"/>
           </a:xfrm>
           <a:prstGeom prst="ellipse">
             <a:avLst/>
@@ -21350,8 +21350,8 @@
         </p:nvSpPr>
         <p:spPr>
           <a:xfrm>
-            <a:off x="2334463" y="5271516"/>
-            <a:ext cx="402336" cy="402336"/>
+            <a:off x="2334463" y="4841748"/>
+            <a:ext cx="347472" cy="347472"/>
           </a:xfrm>
           <a:prstGeom prst="rect">
             <a:avLst/>
@@ -21394,8 +21394,8 @@
         </p:nvSpPr>
         <p:spPr>
           <a:xfrm>
-            <a:off x="2883103" y="4937760"/>
-            <a:ext cx="6989674" cy="1069848"/>
+            <a:off x="2828239" y="4709160"/>
+            <a:ext cx="7044538" cy="612648"/>
           </a:xfrm>
           <a:prstGeom prst="rect">
             <a:avLst/>

--- a/artifacts/mdpr-vs-skill/mdpr-baseline-result.pptx
+++ b/artifacts/mdpr-vs-skill/mdpr-baseline-result.pptx
@@ -18035,9 +18035,9 @@
             <a:tbl>
               <a:tblPr/>
               <a:tblGrid>
-                <a:gridCol w="3413760"/>
-                <a:gridCol w="3413760"/>
-                <a:gridCol w="3413760"/>
+                <a:gridCol w="1234440"/>
+                <a:gridCol w="4503420"/>
+                <a:gridCol w="4503420"/>
               </a:tblGrid>
               <a:tr h="905256">
                 <a:tc>

--- a/artifacts/mdpr-vs-skill/mdpr-baseline-result.pptx
+++ b/artifacts/mdpr-vs-skill/mdpr-baseline-result.pptx
@@ -4368,34 +4368,7 @@
       </p:sp>
       <p:sp>
         <p:nvSpPr>
-          <p:cNvPr id="4" name="Shape 1"/>
-          <p:cNvSpPr/>
-          <p:nvPr/>
-        </p:nvSpPr>
-        <p:spPr>
-          <a:xfrm>
-            <a:off x="822960" y="1417320"/>
-            <a:ext cx="3794760" cy="73152"/>
-          </a:xfrm>
-          <a:prstGeom prst="rect">
-            <a:avLst/>
-          </a:prstGeom>
-          <a:solidFill>
-            <a:srgbClr val="2563EB"/>
-          </a:solidFill>
-          <a:ln w="12700">
-            <a:solidFill>
-              <a:srgbClr val="2563EB">
-                <a:alpha val="0"/>
-              </a:srgbClr>
-            </a:solidFill>
-            <a:prstDash val="solid"/>
-          </a:ln>
-        </p:spPr>
-      </p:sp>
-      <p:sp>
-        <p:nvSpPr>
-          <p:cNvPr id="5" name="mdpr:3-3-a4649c:title:__title:3-3-a4649c"/>
+          <p:cNvPr id="4" name="mdpr:3-3-a4649c:title:__title:3-3-a4649c"/>
           <p:cNvSpPr txBox="1"/>
           <p:nvPr/>
         </p:nvSpPr>
@@ -4454,7 +4427,7 @@
       </p:sp>
       <p:sp>
         <p:nvSpPr>
-          <p:cNvPr id="6" name="mdpr:3-3-a4649c:body:block-12-chunk-3-block-14"/>
+          <p:cNvPr id="5" name="mdpr:3-3-a4649c:body:block-12-chunk-3-block-14"/>
           <p:cNvSpPr txBox="1"/>
           <p:nvPr/>
         </p:nvSpPr>
@@ -6405,34 +6378,7 @@
       </p:sp>
       <p:sp>
         <p:nvSpPr>
-          <p:cNvPr id="4" name="Shape 1"/>
-          <p:cNvSpPr/>
-          <p:nvPr/>
-        </p:nvSpPr>
-        <p:spPr>
-          <a:xfrm>
-            <a:off x="822960" y="1417320"/>
-            <a:ext cx="3794760" cy="73152"/>
-          </a:xfrm>
-          <a:prstGeom prst="rect">
-            <a:avLst/>
-          </a:prstGeom>
-          <a:solidFill>
-            <a:srgbClr val="2563EB"/>
-          </a:solidFill>
-          <a:ln w="12700">
-            <a:solidFill>
-              <a:srgbClr val="2563EB">
-                <a:alpha val="0"/>
-              </a:srgbClr>
-            </a:solidFill>
-            <a:prstDash val="solid"/>
-          </a:ln>
-        </p:spPr>
-      </p:sp>
-      <p:sp>
-        <p:nvSpPr>
-          <p:cNvPr id="5" name="mdpr:3-3-5eedd2:title:__title:3-3-5eedd2"/>
+          <p:cNvPr id="4" name="mdpr:3-3-5eedd2:title:__title:3-3-5eedd2"/>
           <p:cNvSpPr txBox="1"/>
           <p:nvPr/>
         </p:nvSpPr>
@@ -6491,7 +6437,7 @@
       </p:sp>
       <p:sp>
         <p:nvSpPr>
-          <p:cNvPr id="6" name="mdpr:3-3-5eedd2:body:block-16-chunk-3-block-18"/>
+          <p:cNvPr id="5" name="mdpr:3-3-5eedd2:body:block-16-chunk-3-block-18"/>
           <p:cNvSpPr txBox="1"/>
           <p:nvPr/>
         </p:nvSpPr>
@@ -7341,34 +7287,7 @@
       </p:grpSpPr>
       <p:sp>
         <p:nvSpPr>
-          <p:cNvPr id="2" name="Shape 0"/>
-          <p:cNvSpPr/>
-          <p:nvPr/>
-        </p:nvSpPr>
-        <p:spPr>
-          <a:xfrm>
-            <a:off x="914400" y="1463040"/>
-            <a:ext cx="10241280" cy="73152"/>
-          </a:xfrm>
-          <a:prstGeom prst="rect">
-            <a:avLst/>
-          </a:prstGeom>
-          <a:solidFill>
-            <a:srgbClr val="2563EB"/>
-          </a:solidFill>
-          <a:ln w="12700">
-            <a:solidFill>
-              <a:srgbClr val="2563EB">
-                <a:alpha val="0"/>
-              </a:srgbClr>
-            </a:solidFill>
-            <a:prstDash val="solid"/>
-          </a:ln>
-        </p:spPr>
-      </p:sp>
-      <p:sp>
-        <p:nvSpPr>
-          <p:cNvPr id="3" name="mdpr:1-3-0466ef:title:__title:1-3-0466ef"/>
+          <p:cNvPr id="2" name="mdpr:1-3-0466ef:title:__title:1-3-0466ef"/>
           <p:cNvSpPr txBox="1"/>
           <p:nvPr/>
         </p:nvSpPr>
@@ -7410,7 +7329,7 @@
       </p:sp>
       <p:sp>
         <p:nvSpPr>
-          <p:cNvPr id="4" name="mdpr:1-3-0466ef:body:block-20-chunk-1"/>
+          <p:cNvPr id="3" name="mdpr:1-3-0466ef:body:block-20-chunk-1"/>
           <p:cNvSpPr txBox="1"/>
           <p:nvPr/>
         </p:nvSpPr>
@@ -7452,7 +7371,7 @@
       </p:sp>
       <p:sp>
         <p:nvSpPr>
-          <p:cNvPr id="5" name="mdpr:1-3-0466ef:body:block-20-chunk-1"/>
+          <p:cNvPr id="4" name="mdpr:1-3-0466ef:body:block-20-chunk-1"/>
           <p:cNvSpPr txBox="1"/>
           <p:nvPr/>
         </p:nvSpPr>
@@ -7494,7 +7413,7 @@
       </p:sp>
       <p:sp>
         <p:nvSpPr>
-          <p:cNvPr id="6" name="mdpr:1-3-0466ef:body:block-20-chunk-1"/>
+          <p:cNvPr id="5" name="mdpr:1-3-0466ef:body:block-20-chunk-1"/>
           <p:cNvSpPr txBox="1"/>
           <p:nvPr/>
         </p:nvSpPr>

--- a/artifacts/mdpr-vs-skill/mdpr-baseline-result.pptx
+++ b/artifacts/mdpr-vs-skill/mdpr-baseline-result.pptx
@@ -19068,150 +19068,6 @@
         </p:nvSpPr>
         <p:spPr>
           <a:xfrm>
-            <a:off x="4002024" y="5317236"/>
-            <a:ext cx="457200" cy="0"/>
-          </a:xfrm>
-          <a:prstGeom prst="line">
-            <a:avLst/>
-          </a:prstGeom>
-          <a:noFill/>
-          <a:ln w="12700">
-            <a:solidFill>
-              <a:srgbClr val="2563EB"/>
-            </a:solidFill>
-            <a:prstDash val="solid"/>
-            <a:tailEnd type="triangle"/>
-          </a:ln>
-        </p:spPr>
-      </p:sp>
-      <p:sp>
-        <p:nvSpPr>
-          <p:cNvPr id="4" name="Shape 2"/>
-          <p:cNvSpPr/>
-          <p:nvPr/>
-        </p:nvSpPr>
-        <p:spPr>
-          <a:xfrm>
-            <a:off x="7748016" y="5317236"/>
-            <a:ext cx="457200" cy="0"/>
-          </a:xfrm>
-          <a:prstGeom prst="line">
-            <a:avLst/>
-          </a:prstGeom>
-          <a:noFill/>
-          <a:ln w="12700">
-            <a:solidFill>
-              <a:srgbClr val="2563EB"/>
-            </a:solidFill>
-            <a:prstDash val="solid"/>
-            <a:tailEnd type="triangle"/>
-          </a:ln>
-        </p:spPr>
-      </p:sp>
-      <p:sp>
-        <p:nvSpPr>
-          <p:cNvPr id="5" name="Shape 3"/>
-          <p:cNvSpPr/>
-          <p:nvPr/>
-        </p:nvSpPr>
-        <p:spPr>
-          <a:xfrm>
-            <a:off x="9849612" y="4368455"/>
-            <a:ext cx="0" cy="416235"/>
-          </a:xfrm>
-          <a:prstGeom prst="line">
-            <a:avLst/>
-          </a:prstGeom>
-          <a:noFill/>
-          <a:ln w="12700">
-            <a:solidFill>
-              <a:srgbClr val="2563EB"/>
-            </a:solidFill>
-            <a:prstDash val="solid"/>
-            <a:headEnd type="triangle"/>
-          </a:ln>
-        </p:spPr>
-      </p:sp>
-      <p:sp>
-        <p:nvSpPr>
-          <p:cNvPr id="6" name="Shape 4"/>
-          <p:cNvSpPr/>
-          <p:nvPr/>
-        </p:nvSpPr>
-        <p:spPr>
-          <a:xfrm>
-            <a:off x="9849612" y="2887127"/>
-            <a:ext cx="0" cy="416235"/>
-          </a:xfrm>
-          <a:prstGeom prst="line">
-            <a:avLst/>
-          </a:prstGeom>
-          <a:noFill/>
-          <a:ln w="12700">
-            <a:solidFill>
-              <a:srgbClr val="2563EB"/>
-            </a:solidFill>
-            <a:prstDash val="solid"/>
-            <a:headEnd type="triangle"/>
-          </a:ln>
-        </p:spPr>
-      </p:sp>
-      <p:sp>
-        <p:nvSpPr>
-          <p:cNvPr id="7" name="Shape 5"/>
-          <p:cNvSpPr/>
-          <p:nvPr/>
-        </p:nvSpPr>
-        <p:spPr>
-          <a:xfrm>
-            <a:off x="7748016" y="2354580"/>
-            <a:ext cx="457200" cy="0"/>
-          </a:xfrm>
-          <a:prstGeom prst="line">
-            <a:avLst/>
-          </a:prstGeom>
-          <a:noFill/>
-          <a:ln w="12700">
-            <a:solidFill>
-              <a:srgbClr val="2563EB"/>
-            </a:solidFill>
-            <a:prstDash val="solid"/>
-            <a:headEnd type="triangle"/>
-          </a:ln>
-        </p:spPr>
-      </p:sp>
-      <p:sp>
-        <p:nvSpPr>
-          <p:cNvPr id="8" name="Shape 6"/>
-          <p:cNvSpPr/>
-          <p:nvPr/>
-        </p:nvSpPr>
-        <p:spPr>
-          <a:xfrm>
-            <a:off x="4002024" y="2354580"/>
-            <a:ext cx="457200" cy="0"/>
-          </a:xfrm>
-          <a:prstGeom prst="line">
-            <a:avLst/>
-          </a:prstGeom>
-          <a:noFill/>
-          <a:ln w="12700">
-            <a:solidFill>
-              <a:srgbClr val="2563EB"/>
-            </a:solidFill>
-            <a:prstDash val="solid"/>
-            <a:headEnd type="triangle"/>
-          </a:ln>
-        </p:spPr>
-      </p:sp>
-      <p:sp>
-        <p:nvSpPr>
-          <p:cNvPr id="9" name="Shape 7"/>
-          <p:cNvSpPr/>
-          <p:nvPr/>
-        </p:nvSpPr>
-        <p:spPr>
-          <a:xfrm>
             <a:off x="4002024" y="2354580"/>
             <a:ext cx="228600" cy="0"/>
           </a:xfrm>
@@ -19229,7 +19085,7 @@
       </p:sp>
       <p:sp>
         <p:nvSpPr>
-          <p:cNvPr id="10" name="Shape 8"/>
+          <p:cNvPr id="4" name="Shape 2"/>
           <p:cNvSpPr/>
           <p:nvPr/>
         </p:nvSpPr>
@@ -19252,31 +19108,7 @@
       </p:sp>
       <p:sp>
         <p:nvSpPr>
-          <p:cNvPr id="11" name="Shape 9"/>
-          <p:cNvSpPr/>
-          <p:nvPr/>
-        </p:nvSpPr>
-        <p:spPr>
-          <a:xfrm>
-            <a:off x="4230624" y="3835908"/>
-            <a:ext cx="228600" cy="0"/>
-          </a:xfrm>
-          <a:prstGeom prst="line">
-            <a:avLst/>
-          </a:prstGeom>
-          <a:noFill/>
-          <a:ln w="12700">
-            <a:solidFill>
-              <a:srgbClr val="2563EB"/>
-            </a:solidFill>
-            <a:prstDash val="solid"/>
-            <a:tailEnd type="triangle"/>
-          </a:ln>
-        </p:spPr>
-      </p:sp>
-      <p:sp>
-        <p:nvSpPr>
-          <p:cNvPr id="12" name="Shape 10"/>
+          <p:cNvPr id="5" name="Shape 3"/>
           <p:cNvSpPr/>
           <p:nvPr/>
         </p:nvSpPr>
@@ -19310,149 +19142,7 @@
       </p:sp>
       <p:sp>
         <p:nvSpPr>
-          <p:cNvPr id="13" name="Shape 11"/>
-          <p:cNvSpPr/>
-          <p:nvPr/>
-        </p:nvSpPr>
-        <p:spPr>
-          <a:xfrm>
-            <a:off x="640080" y="4732020"/>
-            <a:ext cx="3435096" cy="109728"/>
-          </a:xfrm>
-          <a:prstGeom prst="rect">
-            <a:avLst/>
-          </a:prstGeom>
-          <a:solidFill>
-            <a:srgbClr val="2563EB"/>
-          </a:solidFill>
-          <a:ln w="12700">
-            <a:solidFill>
-              <a:srgbClr val="2563EB">
-                <a:alpha val="0"/>
-              </a:srgbClr>
-            </a:solidFill>
-            <a:prstDash val="solid"/>
-          </a:ln>
-        </p:spPr>
-      </p:sp>
-      <p:sp>
-        <p:nvSpPr>
-          <p:cNvPr id="14" name="Shape 12"/>
-          <p:cNvSpPr/>
-          <p:nvPr/>
-        </p:nvSpPr>
-        <p:spPr>
-          <a:xfrm>
-            <a:off x="804672" y="5129967"/>
-            <a:ext cx="374538" cy="374538"/>
-          </a:xfrm>
-          <a:prstGeom prst="ellipse">
-            <a:avLst/>
-          </a:prstGeom>
-          <a:solidFill>
-            <a:srgbClr val="2563EB"/>
-          </a:solidFill>
-          <a:ln w="12700">
-            <a:solidFill>
-              <a:srgbClr val="2563EB">
-                <a:alpha val="0"/>
-              </a:srgbClr>
-            </a:solidFill>
-            <a:prstDash val="solid"/>
-          </a:ln>
-        </p:spPr>
-      </p:sp>
-      <p:sp>
-        <p:nvSpPr>
-          <p:cNvPr id="15" name="Text 13"/>
-          <p:cNvSpPr txBox="1"/>
-          <p:nvPr/>
-        </p:nvSpPr>
-        <p:spPr>
-          <a:xfrm>
-            <a:off x="804672" y="5129967"/>
-            <a:ext cx="374538" cy="374538"/>
-          </a:xfrm>
-          <a:prstGeom prst="rect">
-            <a:avLst/>
-          </a:prstGeom>
-          <a:noFill/>
-          <a:ln/>
-        </p:spPr>
-        <p:txBody>
-          <a:bodyPr wrap="square" lIns="0" tIns="0" rIns="0" bIns="0" rtlCol="0" anchor="ctr">
-            <a:normAutofit/>
-          </a:bodyPr>
-          <a:lstStyle/>
-          <a:p>
-            <a:pPr algn="ctr" indent="0" marL="0">
-              <a:lnSpc>
-                <a:spcPct val="120000"/>
-              </a:lnSpc>
-              <a:buNone/>
-            </a:pPr>
-            <a:r>
-              <a:rPr lang="en-US" sz="1600" b="1" dirty="0">
-                <a:solidFill>
-                  <a:srgbClr val="F8FAFC"/>
-                </a:solidFill>
-                <a:latin typeface="Pretendard" pitchFamily="34" charset="0"/>
-                <a:ea typeface="Pretendard" pitchFamily="34" charset="-122"/>
-                <a:cs typeface="Pretendard" pitchFamily="34" charset="-120"/>
-              </a:rPr>
-              <a:t>1</a:t>
-            </a:r>
-            <a:endParaRPr lang="en-US" sz="1600" dirty="0"/>
-          </a:p>
-        </p:txBody>
-      </p:sp>
-      <p:sp>
-        <p:nvSpPr>
-          <p:cNvPr id="16" name="Text 14"/>
-          <p:cNvSpPr txBox="1"/>
-          <p:nvPr/>
-        </p:nvSpPr>
-        <p:spPr>
-          <a:xfrm>
-            <a:off x="1325514" y="4860036"/>
-            <a:ext cx="2585070" cy="914400"/>
-          </a:xfrm>
-          <a:prstGeom prst="rect">
-            <a:avLst/>
-          </a:prstGeom>
-          <a:noFill/>
-          <a:ln/>
-        </p:spPr>
-        <p:txBody>
-          <a:bodyPr wrap="square" lIns="0" tIns="25400" rIns="25400" bIns="0" rtlCol="0" anchor="ctr">
-            <a:normAutofit/>
-          </a:bodyPr>
-          <a:lstStyle/>
-          <a:p>
-            <a:pPr algn="l" indent="0" marL="0">
-              <a:lnSpc>
-                <a:spcPct val="92000"/>
-              </a:lnSpc>
-              <a:buNone/>
-            </a:pPr>
-            <a:r>
-              <a:rPr lang="en-US" sz="1600" dirty="0">
-                <a:solidFill>
-                  <a:srgbClr val="111111"/>
-                </a:solidFill>
-                <a:latin typeface="Pretendard" pitchFamily="34" charset="0"/>
-                <a:ea typeface="Pretendard" pitchFamily="34" charset="-122"/>
-                <a:cs typeface="Pretendard" pitchFamily="34" charset="-120"/>
-              </a:rPr>
-              <a:t>Markdown</a:t>
-            </a:r>
-            <a:endParaRPr lang="en-US" sz="1600" dirty="0"/>
-          </a:p>
-        </p:txBody>
-      </p:sp>
-      <p:sp>
-        <p:nvSpPr>
-          <p:cNvPr id="17" name="Shape 15"/>
+          <p:cNvPr id="6" name="Shape 4"/>
           <p:cNvSpPr/>
           <p:nvPr/>
         </p:nvSpPr>
@@ -19486,149 +19176,7 @@
       </p:sp>
       <p:sp>
         <p:nvSpPr>
-          <p:cNvPr id="18" name="Shape 16"/>
-          <p:cNvSpPr/>
-          <p:nvPr/>
-        </p:nvSpPr>
-        <p:spPr>
-          <a:xfrm>
-            <a:off x="4386072" y="4732020"/>
-            <a:ext cx="3435096" cy="109728"/>
-          </a:xfrm>
-          <a:prstGeom prst="rect">
-            <a:avLst/>
-          </a:prstGeom>
-          <a:solidFill>
-            <a:srgbClr val="2563EB"/>
-          </a:solidFill>
-          <a:ln w="12700">
-            <a:solidFill>
-              <a:srgbClr val="2563EB">
-                <a:alpha val="0"/>
-              </a:srgbClr>
-            </a:solidFill>
-            <a:prstDash val="solid"/>
-          </a:ln>
-        </p:spPr>
-      </p:sp>
-      <p:sp>
-        <p:nvSpPr>
-          <p:cNvPr id="19" name="Shape 17"/>
-          <p:cNvSpPr/>
-          <p:nvPr/>
-        </p:nvSpPr>
-        <p:spPr>
-          <a:xfrm>
-            <a:off x="4550664" y="5129967"/>
-            <a:ext cx="374538" cy="374538"/>
-          </a:xfrm>
-          <a:prstGeom prst="ellipse">
-            <a:avLst/>
-          </a:prstGeom>
-          <a:solidFill>
-            <a:srgbClr val="2563EB"/>
-          </a:solidFill>
-          <a:ln w="12700">
-            <a:solidFill>
-              <a:srgbClr val="2563EB">
-                <a:alpha val="0"/>
-              </a:srgbClr>
-            </a:solidFill>
-            <a:prstDash val="solid"/>
-          </a:ln>
-        </p:spPr>
-      </p:sp>
-      <p:sp>
-        <p:nvSpPr>
-          <p:cNvPr id="20" name="Text 18"/>
-          <p:cNvSpPr txBox="1"/>
-          <p:nvPr/>
-        </p:nvSpPr>
-        <p:spPr>
-          <a:xfrm>
-            <a:off x="4550664" y="5129967"/>
-            <a:ext cx="374538" cy="374538"/>
-          </a:xfrm>
-          <a:prstGeom prst="rect">
-            <a:avLst/>
-          </a:prstGeom>
-          <a:noFill/>
-          <a:ln/>
-        </p:spPr>
-        <p:txBody>
-          <a:bodyPr wrap="square" lIns="0" tIns="0" rIns="0" bIns="0" rtlCol="0" anchor="ctr">
-            <a:normAutofit/>
-          </a:bodyPr>
-          <a:lstStyle/>
-          <a:p>
-            <a:pPr algn="ctr" indent="0" marL="0">
-              <a:lnSpc>
-                <a:spcPct val="120000"/>
-              </a:lnSpc>
-              <a:buNone/>
-            </a:pPr>
-            <a:r>
-              <a:rPr lang="en-US" sz="1600" b="1" dirty="0">
-                <a:solidFill>
-                  <a:srgbClr val="F8FAFC"/>
-                </a:solidFill>
-                <a:latin typeface="Pretendard" pitchFamily="34" charset="0"/>
-                <a:ea typeface="Pretendard" pitchFamily="34" charset="-122"/>
-                <a:cs typeface="Pretendard" pitchFamily="34" charset="-120"/>
-              </a:rPr>
-              <a:t>2</a:t>
-            </a:r>
-            <a:endParaRPr lang="en-US" sz="1600" dirty="0"/>
-          </a:p>
-        </p:txBody>
-      </p:sp>
-      <p:sp>
-        <p:nvSpPr>
-          <p:cNvPr id="21" name="Text 19"/>
-          <p:cNvSpPr txBox="1"/>
-          <p:nvPr/>
-        </p:nvSpPr>
-        <p:spPr>
-          <a:xfrm>
-            <a:off x="5071506" y="4860036"/>
-            <a:ext cx="2585070" cy="914400"/>
-          </a:xfrm>
-          <a:prstGeom prst="rect">
-            <a:avLst/>
-          </a:prstGeom>
-          <a:noFill/>
-          <a:ln/>
-        </p:spPr>
-        <p:txBody>
-          <a:bodyPr wrap="square" lIns="0" tIns="25400" rIns="25400" bIns="0" rtlCol="0" anchor="ctr">
-            <a:normAutofit/>
-          </a:bodyPr>
-          <a:lstStyle/>
-          <a:p>
-            <a:pPr algn="l" indent="0" marL="0">
-              <a:lnSpc>
-                <a:spcPct val="92000"/>
-              </a:lnSpc>
-              <a:buNone/>
-            </a:pPr>
-            <a:r>
-              <a:rPr lang="en-US" sz="1600" dirty="0">
-                <a:solidFill>
-                  <a:srgbClr val="111111"/>
-                </a:solidFill>
-                <a:latin typeface="Pretendard" pitchFamily="34" charset="0"/>
-                <a:ea typeface="Pretendard" pitchFamily="34" charset="-122"/>
-                <a:cs typeface="Pretendard" pitchFamily="34" charset="-120"/>
-              </a:rPr>
-              <a:t>MDPR parser</a:t>
-            </a:r>
-            <a:endParaRPr lang="en-US" sz="1600" dirty="0"/>
-          </a:p>
-        </p:txBody>
-      </p:sp>
-      <p:sp>
-        <p:nvSpPr>
-          <p:cNvPr id="22" name="Shape 20"/>
+          <p:cNvPr id="7" name="Shape 5"/>
           <p:cNvSpPr/>
           <p:nvPr/>
         </p:nvSpPr>
@@ -19662,149 +19210,7 @@
       </p:sp>
       <p:sp>
         <p:nvSpPr>
-          <p:cNvPr id="23" name="Shape 21"/>
-          <p:cNvSpPr/>
-          <p:nvPr/>
-        </p:nvSpPr>
-        <p:spPr>
-          <a:xfrm>
-            <a:off x="8132064" y="4732020"/>
-            <a:ext cx="3435096" cy="109728"/>
-          </a:xfrm>
-          <a:prstGeom prst="rect">
-            <a:avLst/>
-          </a:prstGeom>
-          <a:solidFill>
-            <a:srgbClr val="2563EB"/>
-          </a:solidFill>
-          <a:ln w="12700">
-            <a:solidFill>
-              <a:srgbClr val="2563EB">
-                <a:alpha val="0"/>
-              </a:srgbClr>
-            </a:solidFill>
-            <a:prstDash val="solid"/>
-          </a:ln>
-        </p:spPr>
-      </p:sp>
-      <p:sp>
-        <p:nvSpPr>
-          <p:cNvPr id="24" name="Shape 22"/>
-          <p:cNvSpPr/>
-          <p:nvPr/>
-        </p:nvSpPr>
-        <p:spPr>
-          <a:xfrm>
-            <a:off x="8296656" y="5129967"/>
-            <a:ext cx="374538" cy="374538"/>
-          </a:xfrm>
-          <a:prstGeom prst="ellipse">
-            <a:avLst/>
-          </a:prstGeom>
-          <a:solidFill>
-            <a:srgbClr val="2563EB"/>
-          </a:solidFill>
-          <a:ln w="12700">
-            <a:solidFill>
-              <a:srgbClr val="2563EB">
-                <a:alpha val="0"/>
-              </a:srgbClr>
-            </a:solidFill>
-            <a:prstDash val="solid"/>
-          </a:ln>
-        </p:spPr>
-      </p:sp>
-      <p:sp>
-        <p:nvSpPr>
-          <p:cNvPr id="25" name="Text 23"/>
-          <p:cNvSpPr txBox="1"/>
-          <p:nvPr/>
-        </p:nvSpPr>
-        <p:spPr>
-          <a:xfrm>
-            <a:off x="8296656" y="5129967"/>
-            <a:ext cx="374538" cy="374538"/>
-          </a:xfrm>
-          <a:prstGeom prst="rect">
-            <a:avLst/>
-          </a:prstGeom>
-          <a:noFill/>
-          <a:ln/>
-        </p:spPr>
-        <p:txBody>
-          <a:bodyPr wrap="square" lIns="0" tIns="0" rIns="0" bIns="0" rtlCol="0" anchor="ctr">
-            <a:normAutofit/>
-          </a:bodyPr>
-          <a:lstStyle/>
-          <a:p>
-            <a:pPr algn="ctr" indent="0" marL="0">
-              <a:lnSpc>
-                <a:spcPct val="120000"/>
-              </a:lnSpc>
-              <a:buNone/>
-            </a:pPr>
-            <a:r>
-              <a:rPr lang="en-US" sz="1600" b="1" dirty="0">
-                <a:solidFill>
-                  <a:srgbClr val="F8FAFC"/>
-                </a:solidFill>
-                <a:latin typeface="Pretendard" pitchFamily="34" charset="0"/>
-                <a:ea typeface="Pretendard" pitchFamily="34" charset="-122"/>
-                <a:cs typeface="Pretendard" pitchFamily="34" charset="-120"/>
-              </a:rPr>
-              <a:t>3</a:t>
-            </a:r>
-            <a:endParaRPr lang="en-US" sz="1600" dirty="0"/>
-          </a:p>
-        </p:txBody>
-      </p:sp>
-      <p:sp>
-        <p:nvSpPr>
-          <p:cNvPr id="26" name="Text 24"/>
-          <p:cNvSpPr txBox="1"/>
-          <p:nvPr/>
-        </p:nvSpPr>
-        <p:spPr>
-          <a:xfrm>
-            <a:off x="8817498" y="4860036"/>
-            <a:ext cx="2585070" cy="914400"/>
-          </a:xfrm>
-          <a:prstGeom prst="rect">
-            <a:avLst/>
-          </a:prstGeom>
-          <a:noFill/>
-          <a:ln/>
-        </p:spPr>
-        <p:txBody>
-          <a:bodyPr wrap="square" lIns="0" tIns="25400" rIns="25400" bIns="0" rtlCol="0" anchor="ctr">
-            <a:normAutofit/>
-          </a:bodyPr>
-          <a:lstStyle/>
-          <a:p>
-            <a:pPr algn="l" indent="0" marL="0">
-              <a:lnSpc>
-                <a:spcPct val="92000"/>
-              </a:lnSpc>
-              <a:buNone/>
-            </a:pPr>
-            <a:r>
-              <a:rPr lang="en-US" sz="1600" dirty="0">
-                <a:solidFill>
-                  <a:srgbClr val="111111"/>
-                </a:solidFill>
-                <a:latin typeface="Pretendard" pitchFamily="34" charset="0"/>
-                <a:ea typeface="Pretendard" pitchFamily="34" charset="-122"/>
-                <a:cs typeface="Pretendard" pitchFamily="34" charset="-120"/>
-              </a:rPr>
-              <a:t>BlockIR</a:t>
-            </a:r>
-            <a:endParaRPr lang="en-US" sz="1600" dirty="0"/>
-          </a:p>
-        </p:txBody>
-      </p:sp>
-      <p:sp>
-        <p:nvSpPr>
-          <p:cNvPr id="27" name="Shape 25"/>
+          <p:cNvPr id="8" name="Shape 6"/>
           <p:cNvSpPr/>
           <p:nvPr/>
         </p:nvSpPr>
@@ -19838,149 +19244,7 @@
       </p:sp>
       <p:sp>
         <p:nvSpPr>
-          <p:cNvPr id="28" name="Shape 26"/>
-          <p:cNvSpPr/>
-          <p:nvPr/>
-        </p:nvSpPr>
-        <p:spPr>
-          <a:xfrm>
-            <a:off x="8132064" y="3250692"/>
-            <a:ext cx="3435096" cy="109728"/>
-          </a:xfrm>
-          <a:prstGeom prst="rect">
-            <a:avLst/>
-          </a:prstGeom>
-          <a:solidFill>
-            <a:srgbClr val="2563EB"/>
-          </a:solidFill>
-          <a:ln w="12700">
-            <a:solidFill>
-              <a:srgbClr val="2563EB">
-                <a:alpha val="0"/>
-              </a:srgbClr>
-            </a:solidFill>
-            <a:prstDash val="solid"/>
-          </a:ln>
-        </p:spPr>
-      </p:sp>
-      <p:sp>
-        <p:nvSpPr>
-          <p:cNvPr id="29" name="Shape 27"/>
-          <p:cNvSpPr/>
-          <p:nvPr/>
-        </p:nvSpPr>
-        <p:spPr>
-          <a:xfrm>
-            <a:off x="8296656" y="3648639"/>
-            <a:ext cx="374538" cy="374538"/>
-          </a:xfrm>
-          <a:prstGeom prst="ellipse">
-            <a:avLst/>
-          </a:prstGeom>
-          <a:solidFill>
-            <a:srgbClr val="2563EB"/>
-          </a:solidFill>
-          <a:ln w="12700">
-            <a:solidFill>
-              <a:srgbClr val="2563EB">
-                <a:alpha val="0"/>
-              </a:srgbClr>
-            </a:solidFill>
-            <a:prstDash val="solid"/>
-          </a:ln>
-        </p:spPr>
-      </p:sp>
-      <p:sp>
-        <p:nvSpPr>
-          <p:cNvPr id="30" name="Text 28"/>
-          <p:cNvSpPr txBox="1"/>
-          <p:nvPr/>
-        </p:nvSpPr>
-        <p:spPr>
-          <a:xfrm>
-            <a:off x="8296656" y="3648639"/>
-            <a:ext cx="374538" cy="374538"/>
-          </a:xfrm>
-          <a:prstGeom prst="rect">
-            <a:avLst/>
-          </a:prstGeom>
-          <a:noFill/>
-          <a:ln/>
-        </p:spPr>
-        <p:txBody>
-          <a:bodyPr wrap="square" lIns="0" tIns="0" rIns="0" bIns="0" rtlCol="0" anchor="ctr">
-            <a:normAutofit/>
-          </a:bodyPr>
-          <a:lstStyle/>
-          <a:p>
-            <a:pPr algn="ctr" indent="0" marL="0">
-              <a:lnSpc>
-                <a:spcPct val="120000"/>
-              </a:lnSpc>
-              <a:buNone/>
-            </a:pPr>
-            <a:r>
-              <a:rPr lang="en-US" sz="1600" b="1" dirty="0">
-                <a:solidFill>
-                  <a:srgbClr val="F8FAFC"/>
-                </a:solidFill>
-                <a:latin typeface="Pretendard" pitchFamily="34" charset="0"/>
-                <a:ea typeface="Pretendard" pitchFamily="34" charset="-122"/>
-                <a:cs typeface="Pretendard" pitchFamily="34" charset="-120"/>
-              </a:rPr>
-              <a:t>4</a:t>
-            </a:r>
-            <a:endParaRPr lang="en-US" sz="1600" dirty="0"/>
-          </a:p>
-        </p:txBody>
-      </p:sp>
-      <p:sp>
-        <p:nvSpPr>
-          <p:cNvPr id="31" name="Text 29"/>
-          <p:cNvSpPr txBox="1"/>
-          <p:nvPr/>
-        </p:nvSpPr>
-        <p:spPr>
-          <a:xfrm>
-            <a:off x="8817498" y="3378708"/>
-            <a:ext cx="2585070" cy="914400"/>
-          </a:xfrm>
-          <a:prstGeom prst="rect">
-            <a:avLst/>
-          </a:prstGeom>
-          <a:noFill/>
-          <a:ln/>
-        </p:spPr>
-        <p:txBody>
-          <a:bodyPr wrap="square" lIns="0" tIns="25400" rIns="25400" bIns="0" rtlCol="0" anchor="ctr">
-            <a:normAutofit/>
-          </a:bodyPr>
-          <a:lstStyle/>
-          <a:p>
-            <a:pPr algn="l" indent="0" marL="0">
-              <a:lnSpc>
-                <a:spcPct val="92000"/>
-              </a:lnSpc>
-              <a:buNone/>
-            </a:pPr>
-            <a:r>
-              <a:rPr lang="en-US" sz="1600" dirty="0">
-                <a:solidFill>
-                  <a:srgbClr val="111111"/>
-                </a:solidFill>
-                <a:latin typeface="Pretendard" pitchFamily="34" charset="0"/>
-                <a:ea typeface="Pretendard" pitchFamily="34" charset="-122"/>
-                <a:cs typeface="Pretendard" pitchFamily="34" charset="-120"/>
-              </a:rPr>
-              <a:t>Outline Tree</a:t>
-            </a:r>
-            <a:endParaRPr lang="en-US" sz="1600" dirty="0"/>
-          </a:p>
-        </p:txBody>
-      </p:sp>
-      <p:sp>
-        <p:nvSpPr>
-          <p:cNvPr id="32" name="Shape 30"/>
+          <p:cNvPr id="9" name="Shape 7"/>
           <p:cNvSpPr/>
           <p:nvPr/>
         </p:nvSpPr>
@@ -20014,149 +19278,7 @@
       </p:sp>
       <p:sp>
         <p:nvSpPr>
-          <p:cNvPr id="33" name="Shape 31"/>
-          <p:cNvSpPr/>
-          <p:nvPr/>
-        </p:nvSpPr>
-        <p:spPr>
-          <a:xfrm>
-            <a:off x="8132064" y="1769364"/>
-            <a:ext cx="3435096" cy="109728"/>
-          </a:xfrm>
-          <a:prstGeom prst="rect">
-            <a:avLst/>
-          </a:prstGeom>
-          <a:solidFill>
-            <a:srgbClr val="2563EB"/>
-          </a:solidFill>
-          <a:ln w="12700">
-            <a:solidFill>
-              <a:srgbClr val="2563EB">
-                <a:alpha val="0"/>
-              </a:srgbClr>
-            </a:solidFill>
-            <a:prstDash val="solid"/>
-          </a:ln>
-        </p:spPr>
-      </p:sp>
-      <p:sp>
-        <p:nvSpPr>
-          <p:cNvPr id="34" name="Shape 32"/>
-          <p:cNvSpPr/>
-          <p:nvPr/>
-        </p:nvSpPr>
-        <p:spPr>
-          <a:xfrm>
-            <a:off x="8296656" y="2167311"/>
-            <a:ext cx="374538" cy="374538"/>
-          </a:xfrm>
-          <a:prstGeom prst="ellipse">
-            <a:avLst/>
-          </a:prstGeom>
-          <a:solidFill>
-            <a:srgbClr val="2563EB"/>
-          </a:solidFill>
-          <a:ln w="12700">
-            <a:solidFill>
-              <a:srgbClr val="2563EB">
-                <a:alpha val="0"/>
-              </a:srgbClr>
-            </a:solidFill>
-            <a:prstDash val="solid"/>
-          </a:ln>
-        </p:spPr>
-      </p:sp>
-      <p:sp>
-        <p:nvSpPr>
-          <p:cNvPr id="35" name="Text 33"/>
-          <p:cNvSpPr txBox="1"/>
-          <p:nvPr/>
-        </p:nvSpPr>
-        <p:spPr>
-          <a:xfrm>
-            <a:off x="8296656" y="2167311"/>
-            <a:ext cx="374538" cy="374538"/>
-          </a:xfrm>
-          <a:prstGeom prst="rect">
-            <a:avLst/>
-          </a:prstGeom>
-          <a:noFill/>
-          <a:ln/>
-        </p:spPr>
-        <p:txBody>
-          <a:bodyPr wrap="square" lIns="0" tIns="0" rIns="0" bIns="0" rtlCol="0" anchor="ctr">
-            <a:normAutofit/>
-          </a:bodyPr>
-          <a:lstStyle/>
-          <a:p>
-            <a:pPr algn="ctr" indent="0" marL="0">
-              <a:lnSpc>
-                <a:spcPct val="120000"/>
-              </a:lnSpc>
-              <a:buNone/>
-            </a:pPr>
-            <a:r>
-              <a:rPr lang="en-US" sz="1600" b="1" dirty="0">
-                <a:solidFill>
-                  <a:srgbClr val="F8FAFC"/>
-                </a:solidFill>
-                <a:latin typeface="Pretendard" pitchFamily="34" charset="0"/>
-                <a:ea typeface="Pretendard" pitchFamily="34" charset="-122"/>
-                <a:cs typeface="Pretendard" pitchFamily="34" charset="-120"/>
-              </a:rPr>
-              <a:t>5</a:t>
-            </a:r>
-            <a:endParaRPr lang="en-US" sz="1600" dirty="0"/>
-          </a:p>
-        </p:txBody>
-      </p:sp>
-      <p:sp>
-        <p:nvSpPr>
-          <p:cNvPr id="36" name="Text 34"/>
-          <p:cNvSpPr txBox="1"/>
-          <p:nvPr/>
-        </p:nvSpPr>
-        <p:spPr>
-          <a:xfrm>
-            <a:off x="8817498" y="1897380"/>
-            <a:ext cx="2585070" cy="914400"/>
-          </a:xfrm>
-          <a:prstGeom prst="rect">
-            <a:avLst/>
-          </a:prstGeom>
-          <a:noFill/>
-          <a:ln/>
-        </p:spPr>
-        <p:txBody>
-          <a:bodyPr wrap="square" lIns="0" tIns="25400" rIns="25400" bIns="0" rtlCol="0" anchor="ctr">
-            <a:normAutofit/>
-          </a:bodyPr>
-          <a:lstStyle/>
-          <a:p>
-            <a:pPr algn="l" indent="0" marL="0">
-              <a:lnSpc>
-                <a:spcPct val="92000"/>
-              </a:lnSpc>
-              <a:buNone/>
-            </a:pPr>
-            <a:r>
-              <a:rPr lang="en-US" sz="1600" dirty="0">
-                <a:solidFill>
-                  <a:srgbClr val="111111"/>
-                </a:solidFill>
-                <a:latin typeface="Pretendard" pitchFamily="34" charset="0"/>
-                <a:ea typeface="Pretendard" pitchFamily="34" charset="-122"/>
-                <a:cs typeface="Pretendard" pitchFamily="34" charset="-120"/>
-              </a:rPr>
-              <a:t>Split Planner</a:t>
-            </a:r>
-            <a:endParaRPr lang="en-US" sz="1600" dirty="0"/>
-          </a:p>
-        </p:txBody>
-      </p:sp>
-      <p:sp>
-        <p:nvSpPr>
-          <p:cNvPr id="37" name="Shape 35"/>
+          <p:cNvPr id="10" name="Shape 8"/>
           <p:cNvSpPr/>
           <p:nvPr/>
         </p:nvSpPr>
@@ -20190,149 +19312,7 @@
       </p:sp>
       <p:sp>
         <p:nvSpPr>
-          <p:cNvPr id="38" name="Shape 36"/>
-          <p:cNvSpPr/>
-          <p:nvPr/>
-        </p:nvSpPr>
-        <p:spPr>
-          <a:xfrm>
-            <a:off x="4386072" y="1769364"/>
-            <a:ext cx="3435096" cy="109728"/>
-          </a:xfrm>
-          <a:prstGeom prst="rect">
-            <a:avLst/>
-          </a:prstGeom>
-          <a:solidFill>
-            <a:srgbClr val="2563EB"/>
-          </a:solidFill>
-          <a:ln w="12700">
-            <a:solidFill>
-              <a:srgbClr val="2563EB">
-                <a:alpha val="0"/>
-              </a:srgbClr>
-            </a:solidFill>
-            <a:prstDash val="solid"/>
-          </a:ln>
-        </p:spPr>
-      </p:sp>
-      <p:sp>
-        <p:nvSpPr>
-          <p:cNvPr id="39" name="Shape 37"/>
-          <p:cNvSpPr/>
-          <p:nvPr/>
-        </p:nvSpPr>
-        <p:spPr>
-          <a:xfrm>
-            <a:off x="4550664" y="2167311"/>
-            <a:ext cx="374538" cy="374538"/>
-          </a:xfrm>
-          <a:prstGeom prst="ellipse">
-            <a:avLst/>
-          </a:prstGeom>
-          <a:solidFill>
-            <a:srgbClr val="2563EB"/>
-          </a:solidFill>
-          <a:ln w="12700">
-            <a:solidFill>
-              <a:srgbClr val="2563EB">
-                <a:alpha val="0"/>
-              </a:srgbClr>
-            </a:solidFill>
-            <a:prstDash val="solid"/>
-          </a:ln>
-        </p:spPr>
-      </p:sp>
-      <p:sp>
-        <p:nvSpPr>
-          <p:cNvPr id="40" name="Text 38"/>
-          <p:cNvSpPr txBox="1"/>
-          <p:nvPr/>
-        </p:nvSpPr>
-        <p:spPr>
-          <a:xfrm>
-            <a:off x="4550664" y="2167311"/>
-            <a:ext cx="374538" cy="374538"/>
-          </a:xfrm>
-          <a:prstGeom prst="rect">
-            <a:avLst/>
-          </a:prstGeom>
-          <a:noFill/>
-          <a:ln/>
-        </p:spPr>
-        <p:txBody>
-          <a:bodyPr wrap="square" lIns="0" tIns="0" rIns="0" bIns="0" rtlCol="0" anchor="ctr">
-            <a:normAutofit/>
-          </a:bodyPr>
-          <a:lstStyle/>
-          <a:p>
-            <a:pPr algn="ctr" indent="0" marL="0">
-              <a:lnSpc>
-                <a:spcPct val="120000"/>
-              </a:lnSpc>
-              <a:buNone/>
-            </a:pPr>
-            <a:r>
-              <a:rPr lang="en-US" sz="1600" b="1" dirty="0">
-                <a:solidFill>
-                  <a:srgbClr val="F8FAFC"/>
-                </a:solidFill>
-                <a:latin typeface="Pretendard" pitchFamily="34" charset="0"/>
-                <a:ea typeface="Pretendard" pitchFamily="34" charset="-122"/>
-                <a:cs typeface="Pretendard" pitchFamily="34" charset="-120"/>
-              </a:rPr>
-              <a:t>6</a:t>
-            </a:r>
-            <a:endParaRPr lang="en-US" sz="1600" dirty="0"/>
-          </a:p>
-        </p:txBody>
-      </p:sp>
-      <p:sp>
-        <p:nvSpPr>
-          <p:cNvPr id="41" name="Text 39"/>
-          <p:cNvSpPr txBox="1"/>
-          <p:nvPr/>
-        </p:nvSpPr>
-        <p:spPr>
-          <a:xfrm>
-            <a:off x="5071506" y="1897380"/>
-            <a:ext cx="2585070" cy="914400"/>
-          </a:xfrm>
-          <a:prstGeom prst="rect">
-            <a:avLst/>
-          </a:prstGeom>
-          <a:noFill/>
-          <a:ln/>
-        </p:spPr>
-        <p:txBody>
-          <a:bodyPr wrap="square" lIns="0" tIns="25400" rIns="25400" bIns="0" rtlCol="0" anchor="ctr">
-            <a:normAutofit/>
-          </a:bodyPr>
-          <a:lstStyle/>
-          <a:p>
-            <a:pPr algn="l" indent="0" marL="0">
-              <a:lnSpc>
-                <a:spcPct val="92000"/>
-              </a:lnSpc>
-              <a:buNone/>
-            </a:pPr>
-            <a:r>
-              <a:rPr lang="en-US" sz="1600" dirty="0">
-                <a:solidFill>
-                  <a:srgbClr val="111111"/>
-                </a:solidFill>
-                <a:latin typeface="Pretendard" pitchFamily="34" charset="0"/>
-                <a:ea typeface="Pretendard" pitchFamily="34" charset="-122"/>
-                <a:cs typeface="Pretendard" pitchFamily="34" charset="-120"/>
-              </a:rPr>
-              <a:t>Presentation IR</a:t>
-            </a:r>
-            <a:endParaRPr lang="en-US" sz="1600" dirty="0"/>
-          </a:p>
-        </p:txBody>
-      </p:sp>
-      <p:sp>
-        <p:nvSpPr>
-          <p:cNvPr id="42" name="Shape 40"/>
+          <p:cNvPr id="11" name="Shape 9"/>
           <p:cNvSpPr/>
           <p:nvPr/>
         </p:nvSpPr>
@@ -20366,149 +19346,7 @@
       </p:sp>
       <p:sp>
         <p:nvSpPr>
-          <p:cNvPr id="43" name="Shape 41"/>
-          <p:cNvSpPr/>
-          <p:nvPr/>
-        </p:nvSpPr>
-        <p:spPr>
-          <a:xfrm>
-            <a:off x="640080" y="1769364"/>
-            <a:ext cx="3435096" cy="109728"/>
-          </a:xfrm>
-          <a:prstGeom prst="rect">
-            <a:avLst/>
-          </a:prstGeom>
-          <a:solidFill>
-            <a:srgbClr val="2563EB"/>
-          </a:solidFill>
-          <a:ln w="12700">
-            <a:solidFill>
-              <a:srgbClr val="2563EB">
-                <a:alpha val="0"/>
-              </a:srgbClr>
-            </a:solidFill>
-            <a:prstDash val="solid"/>
-          </a:ln>
-        </p:spPr>
-      </p:sp>
-      <p:sp>
-        <p:nvSpPr>
-          <p:cNvPr id="44" name="Shape 42"/>
-          <p:cNvSpPr/>
-          <p:nvPr/>
-        </p:nvSpPr>
-        <p:spPr>
-          <a:xfrm>
-            <a:off x="804672" y="2167311"/>
-            <a:ext cx="374538" cy="374538"/>
-          </a:xfrm>
-          <a:prstGeom prst="ellipse">
-            <a:avLst/>
-          </a:prstGeom>
-          <a:solidFill>
-            <a:srgbClr val="2563EB"/>
-          </a:solidFill>
-          <a:ln w="12700">
-            <a:solidFill>
-              <a:srgbClr val="2563EB">
-                <a:alpha val="0"/>
-              </a:srgbClr>
-            </a:solidFill>
-            <a:prstDash val="solid"/>
-          </a:ln>
-        </p:spPr>
-      </p:sp>
-      <p:sp>
-        <p:nvSpPr>
-          <p:cNvPr id="45" name="Text 43"/>
-          <p:cNvSpPr txBox="1"/>
-          <p:nvPr/>
-        </p:nvSpPr>
-        <p:spPr>
-          <a:xfrm>
-            <a:off x="804672" y="2167311"/>
-            <a:ext cx="374538" cy="374538"/>
-          </a:xfrm>
-          <a:prstGeom prst="rect">
-            <a:avLst/>
-          </a:prstGeom>
-          <a:noFill/>
-          <a:ln/>
-        </p:spPr>
-        <p:txBody>
-          <a:bodyPr wrap="square" lIns="0" tIns="0" rIns="0" bIns="0" rtlCol="0" anchor="ctr">
-            <a:normAutofit/>
-          </a:bodyPr>
-          <a:lstStyle/>
-          <a:p>
-            <a:pPr algn="ctr" indent="0" marL="0">
-              <a:lnSpc>
-                <a:spcPct val="120000"/>
-              </a:lnSpc>
-              <a:buNone/>
-            </a:pPr>
-            <a:r>
-              <a:rPr lang="en-US" sz="1600" b="1" dirty="0">
-                <a:solidFill>
-                  <a:srgbClr val="F8FAFC"/>
-                </a:solidFill>
-                <a:latin typeface="Pretendard" pitchFamily="34" charset="0"/>
-                <a:ea typeface="Pretendard" pitchFamily="34" charset="-122"/>
-                <a:cs typeface="Pretendard" pitchFamily="34" charset="-120"/>
-              </a:rPr>
-              <a:t>7</a:t>
-            </a:r>
-            <a:endParaRPr lang="en-US" sz="1600" dirty="0"/>
-          </a:p>
-        </p:txBody>
-      </p:sp>
-      <p:sp>
-        <p:nvSpPr>
-          <p:cNvPr id="46" name="Text 44"/>
-          <p:cNvSpPr txBox="1"/>
-          <p:nvPr/>
-        </p:nvSpPr>
-        <p:spPr>
-          <a:xfrm>
-            <a:off x="1325514" y="1897380"/>
-            <a:ext cx="2585070" cy="914400"/>
-          </a:xfrm>
-          <a:prstGeom prst="rect">
-            <a:avLst/>
-          </a:prstGeom>
-          <a:noFill/>
-          <a:ln/>
-        </p:spPr>
-        <p:txBody>
-          <a:bodyPr wrap="square" lIns="0" tIns="25400" rIns="25400" bIns="0" rtlCol="0" anchor="ctr">
-            <a:normAutofit/>
-          </a:bodyPr>
-          <a:lstStyle/>
-          <a:p>
-            <a:pPr algn="l" indent="0" marL="0">
-              <a:lnSpc>
-                <a:spcPct val="92000"/>
-              </a:lnSpc>
-              <a:buNone/>
-            </a:pPr>
-            <a:r>
-              <a:rPr lang="en-US" sz="1600" dirty="0">
-                <a:solidFill>
-                  <a:srgbClr val="111111"/>
-                </a:solidFill>
-                <a:latin typeface="Pretendard" pitchFamily="34" charset="0"/>
-                <a:ea typeface="Pretendard" pitchFamily="34" charset="-122"/>
-                <a:cs typeface="Pretendard" pitchFamily="34" charset="-120"/>
-              </a:rPr>
-              <a:t>Layout IR</a:t>
-            </a:r>
-            <a:endParaRPr lang="en-US" sz="1600" dirty="0"/>
-          </a:p>
-        </p:txBody>
-      </p:sp>
-      <p:sp>
-        <p:nvSpPr>
-          <p:cNvPr id="47" name="Shape 45"/>
+          <p:cNvPr id="12" name="Shape 10"/>
           <p:cNvSpPr/>
           <p:nvPr/>
         </p:nvSpPr>
@@ -20539,6 +19377,1168 @@
             </a:outerShdw>
           </a:effectLst>
         </p:spPr>
+      </p:sp>
+      <p:sp>
+        <p:nvSpPr>
+          <p:cNvPr id="13" name="Shape 11"/>
+          <p:cNvSpPr/>
+          <p:nvPr/>
+        </p:nvSpPr>
+        <p:spPr>
+          <a:xfrm>
+            <a:off x="4002024" y="5317236"/>
+            <a:ext cx="457200" cy="0"/>
+          </a:xfrm>
+          <a:prstGeom prst="line">
+            <a:avLst/>
+          </a:prstGeom>
+          <a:noFill/>
+          <a:ln w="12700">
+            <a:solidFill>
+              <a:srgbClr val="2563EB"/>
+            </a:solidFill>
+            <a:prstDash val="solid"/>
+            <a:tailEnd type="triangle"/>
+          </a:ln>
+        </p:spPr>
+      </p:sp>
+      <p:sp>
+        <p:nvSpPr>
+          <p:cNvPr id="14" name="Shape 12"/>
+          <p:cNvSpPr/>
+          <p:nvPr/>
+        </p:nvSpPr>
+        <p:spPr>
+          <a:xfrm>
+            <a:off x="7748016" y="5317236"/>
+            <a:ext cx="457200" cy="0"/>
+          </a:xfrm>
+          <a:prstGeom prst="line">
+            <a:avLst/>
+          </a:prstGeom>
+          <a:noFill/>
+          <a:ln w="12700">
+            <a:solidFill>
+              <a:srgbClr val="2563EB"/>
+            </a:solidFill>
+            <a:prstDash val="solid"/>
+            <a:tailEnd type="triangle"/>
+          </a:ln>
+        </p:spPr>
+      </p:sp>
+      <p:sp>
+        <p:nvSpPr>
+          <p:cNvPr id="15" name="Shape 13"/>
+          <p:cNvSpPr/>
+          <p:nvPr/>
+        </p:nvSpPr>
+        <p:spPr>
+          <a:xfrm>
+            <a:off x="9849612" y="4368455"/>
+            <a:ext cx="0" cy="416235"/>
+          </a:xfrm>
+          <a:prstGeom prst="line">
+            <a:avLst/>
+          </a:prstGeom>
+          <a:noFill/>
+          <a:ln w="12700">
+            <a:solidFill>
+              <a:srgbClr val="2563EB"/>
+            </a:solidFill>
+            <a:prstDash val="solid"/>
+            <a:headEnd type="triangle"/>
+          </a:ln>
+        </p:spPr>
+      </p:sp>
+      <p:sp>
+        <p:nvSpPr>
+          <p:cNvPr id="16" name="Shape 14"/>
+          <p:cNvSpPr/>
+          <p:nvPr/>
+        </p:nvSpPr>
+        <p:spPr>
+          <a:xfrm>
+            <a:off x="9849612" y="2887127"/>
+            <a:ext cx="0" cy="416235"/>
+          </a:xfrm>
+          <a:prstGeom prst="line">
+            <a:avLst/>
+          </a:prstGeom>
+          <a:noFill/>
+          <a:ln w="12700">
+            <a:solidFill>
+              <a:srgbClr val="2563EB"/>
+            </a:solidFill>
+            <a:prstDash val="solid"/>
+            <a:headEnd type="triangle"/>
+          </a:ln>
+        </p:spPr>
+      </p:sp>
+      <p:sp>
+        <p:nvSpPr>
+          <p:cNvPr id="17" name="Shape 15"/>
+          <p:cNvSpPr/>
+          <p:nvPr/>
+        </p:nvSpPr>
+        <p:spPr>
+          <a:xfrm>
+            <a:off x="7748016" y="2354580"/>
+            <a:ext cx="457200" cy="0"/>
+          </a:xfrm>
+          <a:prstGeom prst="line">
+            <a:avLst/>
+          </a:prstGeom>
+          <a:noFill/>
+          <a:ln w="12700">
+            <a:solidFill>
+              <a:srgbClr val="2563EB"/>
+            </a:solidFill>
+            <a:prstDash val="solid"/>
+            <a:headEnd type="triangle"/>
+          </a:ln>
+        </p:spPr>
+      </p:sp>
+      <p:sp>
+        <p:nvSpPr>
+          <p:cNvPr id="18" name="Shape 16"/>
+          <p:cNvSpPr/>
+          <p:nvPr/>
+        </p:nvSpPr>
+        <p:spPr>
+          <a:xfrm>
+            <a:off x="4002024" y="2354580"/>
+            <a:ext cx="457200" cy="0"/>
+          </a:xfrm>
+          <a:prstGeom prst="line">
+            <a:avLst/>
+          </a:prstGeom>
+          <a:noFill/>
+          <a:ln w="12700">
+            <a:solidFill>
+              <a:srgbClr val="2563EB"/>
+            </a:solidFill>
+            <a:prstDash val="solid"/>
+            <a:headEnd type="triangle"/>
+          </a:ln>
+        </p:spPr>
+      </p:sp>
+      <p:sp>
+        <p:nvSpPr>
+          <p:cNvPr id="19" name="Shape 17"/>
+          <p:cNvSpPr/>
+          <p:nvPr/>
+        </p:nvSpPr>
+        <p:spPr>
+          <a:xfrm>
+            <a:off x="4230624" y="3835908"/>
+            <a:ext cx="228600" cy="0"/>
+          </a:xfrm>
+          <a:prstGeom prst="line">
+            <a:avLst/>
+          </a:prstGeom>
+          <a:noFill/>
+          <a:ln w="12700">
+            <a:solidFill>
+              <a:srgbClr val="2563EB"/>
+            </a:solidFill>
+            <a:prstDash val="solid"/>
+            <a:tailEnd type="triangle"/>
+          </a:ln>
+        </p:spPr>
+      </p:sp>
+      <p:sp>
+        <p:nvSpPr>
+          <p:cNvPr id="20" name="Shape 18"/>
+          <p:cNvSpPr/>
+          <p:nvPr/>
+        </p:nvSpPr>
+        <p:spPr>
+          <a:xfrm>
+            <a:off x="640080" y="4732020"/>
+            <a:ext cx="3435096" cy="109728"/>
+          </a:xfrm>
+          <a:prstGeom prst="rect">
+            <a:avLst/>
+          </a:prstGeom>
+          <a:solidFill>
+            <a:srgbClr val="2563EB"/>
+          </a:solidFill>
+          <a:ln w="12700">
+            <a:solidFill>
+              <a:srgbClr val="2563EB">
+                <a:alpha val="0"/>
+              </a:srgbClr>
+            </a:solidFill>
+            <a:prstDash val="solid"/>
+          </a:ln>
+        </p:spPr>
+      </p:sp>
+      <p:sp>
+        <p:nvSpPr>
+          <p:cNvPr id="21" name="Shape 19"/>
+          <p:cNvSpPr/>
+          <p:nvPr/>
+        </p:nvSpPr>
+        <p:spPr>
+          <a:xfrm>
+            <a:off x="804672" y="5129967"/>
+            <a:ext cx="374538" cy="374538"/>
+          </a:xfrm>
+          <a:prstGeom prst="ellipse">
+            <a:avLst/>
+          </a:prstGeom>
+          <a:solidFill>
+            <a:srgbClr val="2563EB"/>
+          </a:solidFill>
+          <a:ln w="12700">
+            <a:solidFill>
+              <a:srgbClr val="2563EB">
+                <a:alpha val="0"/>
+              </a:srgbClr>
+            </a:solidFill>
+            <a:prstDash val="solid"/>
+          </a:ln>
+        </p:spPr>
+      </p:sp>
+      <p:sp>
+        <p:nvSpPr>
+          <p:cNvPr id="22" name="Text 20"/>
+          <p:cNvSpPr txBox="1"/>
+          <p:nvPr/>
+        </p:nvSpPr>
+        <p:spPr>
+          <a:xfrm>
+            <a:off x="804672" y="5129967"/>
+            <a:ext cx="374538" cy="374538"/>
+          </a:xfrm>
+          <a:prstGeom prst="rect">
+            <a:avLst/>
+          </a:prstGeom>
+          <a:noFill/>
+          <a:ln/>
+        </p:spPr>
+        <p:txBody>
+          <a:bodyPr wrap="square" lIns="0" tIns="0" rIns="0" bIns="0" rtlCol="0" anchor="ctr">
+            <a:normAutofit/>
+          </a:bodyPr>
+          <a:lstStyle/>
+          <a:p>
+            <a:pPr algn="ctr" indent="0" marL="0">
+              <a:lnSpc>
+                <a:spcPct val="120000"/>
+              </a:lnSpc>
+              <a:buNone/>
+            </a:pPr>
+            <a:r>
+              <a:rPr lang="en-US" sz="1600" b="1" dirty="0">
+                <a:solidFill>
+                  <a:srgbClr val="F8FAFC"/>
+                </a:solidFill>
+                <a:latin typeface="Pretendard" pitchFamily="34" charset="0"/>
+                <a:ea typeface="Pretendard" pitchFamily="34" charset="-122"/>
+                <a:cs typeface="Pretendard" pitchFamily="34" charset="-120"/>
+              </a:rPr>
+              <a:t>1</a:t>
+            </a:r>
+            <a:endParaRPr lang="en-US" sz="1600" dirty="0"/>
+          </a:p>
+        </p:txBody>
+      </p:sp>
+      <p:sp>
+        <p:nvSpPr>
+          <p:cNvPr id="23" name="Text 21"/>
+          <p:cNvSpPr txBox="1"/>
+          <p:nvPr/>
+        </p:nvSpPr>
+        <p:spPr>
+          <a:xfrm>
+            <a:off x="1325514" y="4860036"/>
+            <a:ext cx="2585070" cy="914400"/>
+          </a:xfrm>
+          <a:prstGeom prst="rect">
+            <a:avLst/>
+          </a:prstGeom>
+          <a:noFill/>
+          <a:ln/>
+        </p:spPr>
+        <p:txBody>
+          <a:bodyPr wrap="square" lIns="0" tIns="25400" rIns="25400" bIns="0" rtlCol="0" anchor="ctr">
+            <a:normAutofit/>
+          </a:bodyPr>
+          <a:lstStyle/>
+          <a:p>
+            <a:pPr algn="l" indent="0" marL="0">
+              <a:lnSpc>
+                <a:spcPct val="92000"/>
+              </a:lnSpc>
+              <a:buNone/>
+            </a:pPr>
+            <a:r>
+              <a:rPr lang="en-US" sz="1600" dirty="0">
+                <a:solidFill>
+                  <a:srgbClr val="111111"/>
+                </a:solidFill>
+                <a:latin typeface="Pretendard" pitchFamily="34" charset="0"/>
+                <a:ea typeface="Pretendard" pitchFamily="34" charset="-122"/>
+                <a:cs typeface="Pretendard" pitchFamily="34" charset="-120"/>
+              </a:rPr>
+              <a:t>Markdown</a:t>
+            </a:r>
+            <a:endParaRPr lang="en-US" sz="1600" dirty="0"/>
+          </a:p>
+        </p:txBody>
+      </p:sp>
+      <p:sp>
+        <p:nvSpPr>
+          <p:cNvPr id="24" name="Shape 22"/>
+          <p:cNvSpPr/>
+          <p:nvPr/>
+        </p:nvSpPr>
+        <p:spPr>
+          <a:xfrm>
+            <a:off x="4386072" y="4732020"/>
+            <a:ext cx="3435096" cy="109728"/>
+          </a:xfrm>
+          <a:prstGeom prst="rect">
+            <a:avLst/>
+          </a:prstGeom>
+          <a:solidFill>
+            <a:srgbClr val="2563EB"/>
+          </a:solidFill>
+          <a:ln w="12700">
+            <a:solidFill>
+              <a:srgbClr val="2563EB">
+                <a:alpha val="0"/>
+              </a:srgbClr>
+            </a:solidFill>
+            <a:prstDash val="solid"/>
+          </a:ln>
+        </p:spPr>
+      </p:sp>
+      <p:sp>
+        <p:nvSpPr>
+          <p:cNvPr id="25" name="Shape 23"/>
+          <p:cNvSpPr/>
+          <p:nvPr/>
+        </p:nvSpPr>
+        <p:spPr>
+          <a:xfrm>
+            <a:off x="4550664" y="5129967"/>
+            <a:ext cx="374538" cy="374538"/>
+          </a:xfrm>
+          <a:prstGeom prst="ellipse">
+            <a:avLst/>
+          </a:prstGeom>
+          <a:solidFill>
+            <a:srgbClr val="2563EB"/>
+          </a:solidFill>
+          <a:ln w="12700">
+            <a:solidFill>
+              <a:srgbClr val="2563EB">
+                <a:alpha val="0"/>
+              </a:srgbClr>
+            </a:solidFill>
+            <a:prstDash val="solid"/>
+          </a:ln>
+        </p:spPr>
+      </p:sp>
+      <p:sp>
+        <p:nvSpPr>
+          <p:cNvPr id="26" name="Text 24"/>
+          <p:cNvSpPr txBox="1"/>
+          <p:nvPr/>
+        </p:nvSpPr>
+        <p:spPr>
+          <a:xfrm>
+            <a:off x="4550664" y="5129967"/>
+            <a:ext cx="374538" cy="374538"/>
+          </a:xfrm>
+          <a:prstGeom prst="rect">
+            <a:avLst/>
+          </a:prstGeom>
+          <a:noFill/>
+          <a:ln/>
+        </p:spPr>
+        <p:txBody>
+          <a:bodyPr wrap="square" lIns="0" tIns="0" rIns="0" bIns="0" rtlCol="0" anchor="ctr">
+            <a:normAutofit/>
+          </a:bodyPr>
+          <a:lstStyle/>
+          <a:p>
+            <a:pPr algn="ctr" indent="0" marL="0">
+              <a:lnSpc>
+                <a:spcPct val="120000"/>
+              </a:lnSpc>
+              <a:buNone/>
+            </a:pPr>
+            <a:r>
+              <a:rPr lang="en-US" sz="1600" b="1" dirty="0">
+                <a:solidFill>
+                  <a:srgbClr val="F8FAFC"/>
+                </a:solidFill>
+                <a:latin typeface="Pretendard" pitchFamily="34" charset="0"/>
+                <a:ea typeface="Pretendard" pitchFamily="34" charset="-122"/>
+                <a:cs typeface="Pretendard" pitchFamily="34" charset="-120"/>
+              </a:rPr>
+              <a:t>2</a:t>
+            </a:r>
+            <a:endParaRPr lang="en-US" sz="1600" dirty="0"/>
+          </a:p>
+        </p:txBody>
+      </p:sp>
+      <p:sp>
+        <p:nvSpPr>
+          <p:cNvPr id="27" name="Text 25"/>
+          <p:cNvSpPr txBox="1"/>
+          <p:nvPr/>
+        </p:nvSpPr>
+        <p:spPr>
+          <a:xfrm>
+            <a:off x="5071506" y="4860036"/>
+            <a:ext cx="2585070" cy="914400"/>
+          </a:xfrm>
+          <a:prstGeom prst="rect">
+            <a:avLst/>
+          </a:prstGeom>
+          <a:noFill/>
+          <a:ln/>
+        </p:spPr>
+        <p:txBody>
+          <a:bodyPr wrap="square" lIns="0" tIns="25400" rIns="25400" bIns="0" rtlCol="0" anchor="ctr">
+            <a:normAutofit/>
+          </a:bodyPr>
+          <a:lstStyle/>
+          <a:p>
+            <a:pPr algn="l" indent="0" marL="0">
+              <a:lnSpc>
+                <a:spcPct val="92000"/>
+              </a:lnSpc>
+              <a:buNone/>
+            </a:pPr>
+            <a:r>
+              <a:rPr lang="en-US" sz="1600" dirty="0">
+                <a:solidFill>
+                  <a:srgbClr val="111111"/>
+                </a:solidFill>
+                <a:latin typeface="Pretendard" pitchFamily="34" charset="0"/>
+                <a:ea typeface="Pretendard" pitchFamily="34" charset="-122"/>
+                <a:cs typeface="Pretendard" pitchFamily="34" charset="-120"/>
+              </a:rPr>
+              <a:t>MDPR parser</a:t>
+            </a:r>
+            <a:endParaRPr lang="en-US" sz="1600" dirty="0"/>
+          </a:p>
+        </p:txBody>
+      </p:sp>
+      <p:sp>
+        <p:nvSpPr>
+          <p:cNvPr id="28" name="Shape 26"/>
+          <p:cNvSpPr/>
+          <p:nvPr/>
+        </p:nvSpPr>
+        <p:spPr>
+          <a:xfrm>
+            <a:off x="8132064" y="4732020"/>
+            <a:ext cx="3435096" cy="109728"/>
+          </a:xfrm>
+          <a:prstGeom prst="rect">
+            <a:avLst/>
+          </a:prstGeom>
+          <a:solidFill>
+            <a:srgbClr val="2563EB"/>
+          </a:solidFill>
+          <a:ln w="12700">
+            <a:solidFill>
+              <a:srgbClr val="2563EB">
+                <a:alpha val="0"/>
+              </a:srgbClr>
+            </a:solidFill>
+            <a:prstDash val="solid"/>
+          </a:ln>
+        </p:spPr>
+      </p:sp>
+      <p:sp>
+        <p:nvSpPr>
+          <p:cNvPr id="29" name="Shape 27"/>
+          <p:cNvSpPr/>
+          <p:nvPr/>
+        </p:nvSpPr>
+        <p:spPr>
+          <a:xfrm>
+            <a:off x="8296656" y="5129967"/>
+            <a:ext cx="374538" cy="374538"/>
+          </a:xfrm>
+          <a:prstGeom prst="ellipse">
+            <a:avLst/>
+          </a:prstGeom>
+          <a:solidFill>
+            <a:srgbClr val="2563EB"/>
+          </a:solidFill>
+          <a:ln w="12700">
+            <a:solidFill>
+              <a:srgbClr val="2563EB">
+                <a:alpha val="0"/>
+              </a:srgbClr>
+            </a:solidFill>
+            <a:prstDash val="solid"/>
+          </a:ln>
+        </p:spPr>
+      </p:sp>
+      <p:sp>
+        <p:nvSpPr>
+          <p:cNvPr id="30" name="Text 28"/>
+          <p:cNvSpPr txBox="1"/>
+          <p:nvPr/>
+        </p:nvSpPr>
+        <p:spPr>
+          <a:xfrm>
+            <a:off x="8296656" y="5129967"/>
+            <a:ext cx="374538" cy="374538"/>
+          </a:xfrm>
+          <a:prstGeom prst="rect">
+            <a:avLst/>
+          </a:prstGeom>
+          <a:noFill/>
+          <a:ln/>
+        </p:spPr>
+        <p:txBody>
+          <a:bodyPr wrap="square" lIns="0" tIns="0" rIns="0" bIns="0" rtlCol="0" anchor="ctr">
+            <a:normAutofit/>
+          </a:bodyPr>
+          <a:lstStyle/>
+          <a:p>
+            <a:pPr algn="ctr" indent="0" marL="0">
+              <a:lnSpc>
+                <a:spcPct val="120000"/>
+              </a:lnSpc>
+              <a:buNone/>
+            </a:pPr>
+            <a:r>
+              <a:rPr lang="en-US" sz="1600" b="1" dirty="0">
+                <a:solidFill>
+                  <a:srgbClr val="F8FAFC"/>
+                </a:solidFill>
+                <a:latin typeface="Pretendard" pitchFamily="34" charset="0"/>
+                <a:ea typeface="Pretendard" pitchFamily="34" charset="-122"/>
+                <a:cs typeface="Pretendard" pitchFamily="34" charset="-120"/>
+              </a:rPr>
+              <a:t>3</a:t>
+            </a:r>
+            <a:endParaRPr lang="en-US" sz="1600" dirty="0"/>
+          </a:p>
+        </p:txBody>
+      </p:sp>
+      <p:sp>
+        <p:nvSpPr>
+          <p:cNvPr id="31" name="Text 29"/>
+          <p:cNvSpPr txBox="1"/>
+          <p:nvPr/>
+        </p:nvSpPr>
+        <p:spPr>
+          <a:xfrm>
+            <a:off x="8817498" y="4860036"/>
+            <a:ext cx="2585070" cy="914400"/>
+          </a:xfrm>
+          <a:prstGeom prst="rect">
+            <a:avLst/>
+          </a:prstGeom>
+          <a:noFill/>
+          <a:ln/>
+        </p:spPr>
+        <p:txBody>
+          <a:bodyPr wrap="square" lIns="0" tIns="25400" rIns="25400" bIns="0" rtlCol="0" anchor="ctr">
+            <a:normAutofit/>
+          </a:bodyPr>
+          <a:lstStyle/>
+          <a:p>
+            <a:pPr algn="l" indent="0" marL="0">
+              <a:lnSpc>
+                <a:spcPct val="92000"/>
+              </a:lnSpc>
+              <a:buNone/>
+            </a:pPr>
+            <a:r>
+              <a:rPr lang="en-US" sz="1600" dirty="0">
+                <a:solidFill>
+                  <a:srgbClr val="111111"/>
+                </a:solidFill>
+                <a:latin typeface="Pretendard" pitchFamily="34" charset="0"/>
+                <a:ea typeface="Pretendard" pitchFamily="34" charset="-122"/>
+                <a:cs typeface="Pretendard" pitchFamily="34" charset="-120"/>
+              </a:rPr>
+              <a:t>BlockIR</a:t>
+            </a:r>
+            <a:endParaRPr lang="en-US" sz="1600" dirty="0"/>
+          </a:p>
+        </p:txBody>
+      </p:sp>
+      <p:sp>
+        <p:nvSpPr>
+          <p:cNvPr id="32" name="Shape 30"/>
+          <p:cNvSpPr/>
+          <p:nvPr/>
+        </p:nvSpPr>
+        <p:spPr>
+          <a:xfrm>
+            <a:off x="8132064" y="3250692"/>
+            <a:ext cx="3435096" cy="109728"/>
+          </a:xfrm>
+          <a:prstGeom prst="rect">
+            <a:avLst/>
+          </a:prstGeom>
+          <a:solidFill>
+            <a:srgbClr val="2563EB"/>
+          </a:solidFill>
+          <a:ln w="12700">
+            <a:solidFill>
+              <a:srgbClr val="2563EB">
+                <a:alpha val="0"/>
+              </a:srgbClr>
+            </a:solidFill>
+            <a:prstDash val="solid"/>
+          </a:ln>
+        </p:spPr>
+      </p:sp>
+      <p:sp>
+        <p:nvSpPr>
+          <p:cNvPr id="33" name="Shape 31"/>
+          <p:cNvSpPr/>
+          <p:nvPr/>
+        </p:nvSpPr>
+        <p:spPr>
+          <a:xfrm>
+            <a:off x="8296656" y="3648639"/>
+            <a:ext cx="374538" cy="374538"/>
+          </a:xfrm>
+          <a:prstGeom prst="ellipse">
+            <a:avLst/>
+          </a:prstGeom>
+          <a:solidFill>
+            <a:srgbClr val="2563EB"/>
+          </a:solidFill>
+          <a:ln w="12700">
+            <a:solidFill>
+              <a:srgbClr val="2563EB">
+                <a:alpha val="0"/>
+              </a:srgbClr>
+            </a:solidFill>
+            <a:prstDash val="solid"/>
+          </a:ln>
+        </p:spPr>
+      </p:sp>
+      <p:sp>
+        <p:nvSpPr>
+          <p:cNvPr id="34" name="Text 32"/>
+          <p:cNvSpPr txBox="1"/>
+          <p:nvPr/>
+        </p:nvSpPr>
+        <p:spPr>
+          <a:xfrm>
+            <a:off x="8296656" y="3648639"/>
+            <a:ext cx="374538" cy="374538"/>
+          </a:xfrm>
+          <a:prstGeom prst="rect">
+            <a:avLst/>
+          </a:prstGeom>
+          <a:noFill/>
+          <a:ln/>
+        </p:spPr>
+        <p:txBody>
+          <a:bodyPr wrap="square" lIns="0" tIns="0" rIns="0" bIns="0" rtlCol="0" anchor="ctr">
+            <a:normAutofit/>
+          </a:bodyPr>
+          <a:lstStyle/>
+          <a:p>
+            <a:pPr algn="ctr" indent="0" marL="0">
+              <a:lnSpc>
+                <a:spcPct val="120000"/>
+              </a:lnSpc>
+              <a:buNone/>
+            </a:pPr>
+            <a:r>
+              <a:rPr lang="en-US" sz="1600" b="1" dirty="0">
+                <a:solidFill>
+                  <a:srgbClr val="F8FAFC"/>
+                </a:solidFill>
+                <a:latin typeface="Pretendard" pitchFamily="34" charset="0"/>
+                <a:ea typeface="Pretendard" pitchFamily="34" charset="-122"/>
+                <a:cs typeface="Pretendard" pitchFamily="34" charset="-120"/>
+              </a:rPr>
+              <a:t>4</a:t>
+            </a:r>
+            <a:endParaRPr lang="en-US" sz="1600" dirty="0"/>
+          </a:p>
+        </p:txBody>
+      </p:sp>
+      <p:sp>
+        <p:nvSpPr>
+          <p:cNvPr id="35" name="Text 33"/>
+          <p:cNvSpPr txBox="1"/>
+          <p:nvPr/>
+        </p:nvSpPr>
+        <p:spPr>
+          <a:xfrm>
+            <a:off x="8817498" y="3378708"/>
+            <a:ext cx="2585070" cy="914400"/>
+          </a:xfrm>
+          <a:prstGeom prst="rect">
+            <a:avLst/>
+          </a:prstGeom>
+          <a:noFill/>
+          <a:ln/>
+        </p:spPr>
+        <p:txBody>
+          <a:bodyPr wrap="square" lIns="0" tIns="25400" rIns="25400" bIns="0" rtlCol="0" anchor="ctr">
+            <a:normAutofit/>
+          </a:bodyPr>
+          <a:lstStyle/>
+          <a:p>
+            <a:pPr algn="l" indent="0" marL="0">
+              <a:lnSpc>
+                <a:spcPct val="92000"/>
+              </a:lnSpc>
+              <a:buNone/>
+            </a:pPr>
+            <a:r>
+              <a:rPr lang="en-US" sz="1600" dirty="0">
+                <a:solidFill>
+                  <a:srgbClr val="111111"/>
+                </a:solidFill>
+                <a:latin typeface="Pretendard" pitchFamily="34" charset="0"/>
+                <a:ea typeface="Pretendard" pitchFamily="34" charset="-122"/>
+                <a:cs typeface="Pretendard" pitchFamily="34" charset="-120"/>
+              </a:rPr>
+              <a:t>Outline Tree</a:t>
+            </a:r>
+            <a:endParaRPr lang="en-US" sz="1600" dirty="0"/>
+          </a:p>
+        </p:txBody>
+      </p:sp>
+      <p:sp>
+        <p:nvSpPr>
+          <p:cNvPr id="36" name="Shape 34"/>
+          <p:cNvSpPr/>
+          <p:nvPr/>
+        </p:nvSpPr>
+        <p:spPr>
+          <a:xfrm>
+            <a:off x="8132064" y="1769364"/>
+            <a:ext cx="3435096" cy="109728"/>
+          </a:xfrm>
+          <a:prstGeom prst="rect">
+            <a:avLst/>
+          </a:prstGeom>
+          <a:solidFill>
+            <a:srgbClr val="2563EB"/>
+          </a:solidFill>
+          <a:ln w="12700">
+            <a:solidFill>
+              <a:srgbClr val="2563EB">
+                <a:alpha val="0"/>
+              </a:srgbClr>
+            </a:solidFill>
+            <a:prstDash val="solid"/>
+          </a:ln>
+        </p:spPr>
+      </p:sp>
+      <p:sp>
+        <p:nvSpPr>
+          <p:cNvPr id="37" name="Shape 35"/>
+          <p:cNvSpPr/>
+          <p:nvPr/>
+        </p:nvSpPr>
+        <p:spPr>
+          <a:xfrm>
+            <a:off x="8296656" y="2167311"/>
+            <a:ext cx="374538" cy="374538"/>
+          </a:xfrm>
+          <a:prstGeom prst="ellipse">
+            <a:avLst/>
+          </a:prstGeom>
+          <a:solidFill>
+            <a:srgbClr val="2563EB"/>
+          </a:solidFill>
+          <a:ln w="12700">
+            <a:solidFill>
+              <a:srgbClr val="2563EB">
+                <a:alpha val="0"/>
+              </a:srgbClr>
+            </a:solidFill>
+            <a:prstDash val="solid"/>
+          </a:ln>
+        </p:spPr>
+      </p:sp>
+      <p:sp>
+        <p:nvSpPr>
+          <p:cNvPr id="38" name="Text 36"/>
+          <p:cNvSpPr txBox="1"/>
+          <p:nvPr/>
+        </p:nvSpPr>
+        <p:spPr>
+          <a:xfrm>
+            <a:off x="8296656" y="2167311"/>
+            <a:ext cx="374538" cy="374538"/>
+          </a:xfrm>
+          <a:prstGeom prst="rect">
+            <a:avLst/>
+          </a:prstGeom>
+          <a:noFill/>
+          <a:ln/>
+        </p:spPr>
+        <p:txBody>
+          <a:bodyPr wrap="square" lIns="0" tIns="0" rIns="0" bIns="0" rtlCol="0" anchor="ctr">
+            <a:normAutofit/>
+          </a:bodyPr>
+          <a:lstStyle/>
+          <a:p>
+            <a:pPr algn="ctr" indent="0" marL="0">
+              <a:lnSpc>
+                <a:spcPct val="120000"/>
+              </a:lnSpc>
+              <a:buNone/>
+            </a:pPr>
+            <a:r>
+              <a:rPr lang="en-US" sz="1600" b="1" dirty="0">
+                <a:solidFill>
+                  <a:srgbClr val="F8FAFC"/>
+                </a:solidFill>
+                <a:latin typeface="Pretendard" pitchFamily="34" charset="0"/>
+                <a:ea typeface="Pretendard" pitchFamily="34" charset="-122"/>
+                <a:cs typeface="Pretendard" pitchFamily="34" charset="-120"/>
+              </a:rPr>
+              <a:t>5</a:t>
+            </a:r>
+            <a:endParaRPr lang="en-US" sz="1600" dirty="0"/>
+          </a:p>
+        </p:txBody>
+      </p:sp>
+      <p:sp>
+        <p:nvSpPr>
+          <p:cNvPr id="39" name="Text 37"/>
+          <p:cNvSpPr txBox="1"/>
+          <p:nvPr/>
+        </p:nvSpPr>
+        <p:spPr>
+          <a:xfrm>
+            <a:off x="8817498" y="1897380"/>
+            <a:ext cx="2585070" cy="914400"/>
+          </a:xfrm>
+          <a:prstGeom prst="rect">
+            <a:avLst/>
+          </a:prstGeom>
+          <a:noFill/>
+          <a:ln/>
+        </p:spPr>
+        <p:txBody>
+          <a:bodyPr wrap="square" lIns="0" tIns="25400" rIns="25400" bIns="0" rtlCol="0" anchor="ctr">
+            <a:normAutofit/>
+          </a:bodyPr>
+          <a:lstStyle/>
+          <a:p>
+            <a:pPr algn="l" indent="0" marL="0">
+              <a:lnSpc>
+                <a:spcPct val="92000"/>
+              </a:lnSpc>
+              <a:buNone/>
+            </a:pPr>
+            <a:r>
+              <a:rPr lang="en-US" sz="1600" dirty="0">
+                <a:solidFill>
+                  <a:srgbClr val="111111"/>
+                </a:solidFill>
+                <a:latin typeface="Pretendard" pitchFamily="34" charset="0"/>
+                <a:ea typeface="Pretendard" pitchFamily="34" charset="-122"/>
+                <a:cs typeface="Pretendard" pitchFamily="34" charset="-120"/>
+              </a:rPr>
+              <a:t>Split Planner</a:t>
+            </a:r>
+            <a:endParaRPr lang="en-US" sz="1600" dirty="0"/>
+          </a:p>
+        </p:txBody>
+      </p:sp>
+      <p:sp>
+        <p:nvSpPr>
+          <p:cNvPr id="40" name="Shape 38"/>
+          <p:cNvSpPr/>
+          <p:nvPr/>
+        </p:nvSpPr>
+        <p:spPr>
+          <a:xfrm>
+            <a:off x="4386072" y="1769364"/>
+            <a:ext cx="3435096" cy="109728"/>
+          </a:xfrm>
+          <a:prstGeom prst="rect">
+            <a:avLst/>
+          </a:prstGeom>
+          <a:solidFill>
+            <a:srgbClr val="2563EB"/>
+          </a:solidFill>
+          <a:ln w="12700">
+            <a:solidFill>
+              <a:srgbClr val="2563EB">
+                <a:alpha val="0"/>
+              </a:srgbClr>
+            </a:solidFill>
+            <a:prstDash val="solid"/>
+          </a:ln>
+        </p:spPr>
+      </p:sp>
+      <p:sp>
+        <p:nvSpPr>
+          <p:cNvPr id="41" name="Shape 39"/>
+          <p:cNvSpPr/>
+          <p:nvPr/>
+        </p:nvSpPr>
+        <p:spPr>
+          <a:xfrm>
+            <a:off x="4550664" y="2167311"/>
+            <a:ext cx="374538" cy="374538"/>
+          </a:xfrm>
+          <a:prstGeom prst="ellipse">
+            <a:avLst/>
+          </a:prstGeom>
+          <a:solidFill>
+            <a:srgbClr val="2563EB"/>
+          </a:solidFill>
+          <a:ln w="12700">
+            <a:solidFill>
+              <a:srgbClr val="2563EB">
+                <a:alpha val="0"/>
+              </a:srgbClr>
+            </a:solidFill>
+            <a:prstDash val="solid"/>
+          </a:ln>
+        </p:spPr>
+      </p:sp>
+      <p:sp>
+        <p:nvSpPr>
+          <p:cNvPr id="42" name="Text 40"/>
+          <p:cNvSpPr txBox="1"/>
+          <p:nvPr/>
+        </p:nvSpPr>
+        <p:spPr>
+          <a:xfrm>
+            <a:off x="4550664" y="2167311"/>
+            <a:ext cx="374538" cy="374538"/>
+          </a:xfrm>
+          <a:prstGeom prst="rect">
+            <a:avLst/>
+          </a:prstGeom>
+          <a:noFill/>
+          <a:ln/>
+        </p:spPr>
+        <p:txBody>
+          <a:bodyPr wrap="square" lIns="0" tIns="0" rIns="0" bIns="0" rtlCol="0" anchor="ctr">
+            <a:normAutofit/>
+          </a:bodyPr>
+          <a:lstStyle/>
+          <a:p>
+            <a:pPr algn="ctr" indent="0" marL="0">
+              <a:lnSpc>
+                <a:spcPct val="120000"/>
+              </a:lnSpc>
+              <a:buNone/>
+            </a:pPr>
+            <a:r>
+              <a:rPr lang="en-US" sz="1600" b="1" dirty="0">
+                <a:solidFill>
+                  <a:srgbClr val="F8FAFC"/>
+                </a:solidFill>
+                <a:latin typeface="Pretendard" pitchFamily="34" charset="0"/>
+                <a:ea typeface="Pretendard" pitchFamily="34" charset="-122"/>
+                <a:cs typeface="Pretendard" pitchFamily="34" charset="-120"/>
+              </a:rPr>
+              <a:t>6</a:t>
+            </a:r>
+            <a:endParaRPr lang="en-US" sz="1600" dirty="0"/>
+          </a:p>
+        </p:txBody>
+      </p:sp>
+      <p:sp>
+        <p:nvSpPr>
+          <p:cNvPr id="43" name="Text 41"/>
+          <p:cNvSpPr txBox="1"/>
+          <p:nvPr/>
+        </p:nvSpPr>
+        <p:spPr>
+          <a:xfrm>
+            <a:off x="5071506" y="1897380"/>
+            <a:ext cx="2585070" cy="914400"/>
+          </a:xfrm>
+          <a:prstGeom prst="rect">
+            <a:avLst/>
+          </a:prstGeom>
+          <a:noFill/>
+          <a:ln/>
+        </p:spPr>
+        <p:txBody>
+          <a:bodyPr wrap="square" lIns="0" tIns="25400" rIns="25400" bIns="0" rtlCol="0" anchor="ctr">
+            <a:normAutofit/>
+          </a:bodyPr>
+          <a:lstStyle/>
+          <a:p>
+            <a:pPr algn="l" indent="0" marL="0">
+              <a:lnSpc>
+                <a:spcPct val="92000"/>
+              </a:lnSpc>
+              <a:buNone/>
+            </a:pPr>
+            <a:r>
+              <a:rPr lang="en-US" sz="1600" dirty="0">
+                <a:solidFill>
+                  <a:srgbClr val="111111"/>
+                </a:solidFill>
+                <a:latin typeface="Pretendard" pitchFamily="34" charset="0"/>
+                <a:ea typeface="Pretendard" pitchFamily="34" charset="-122"/>
+                <a:cs typeface="Pretendard" pitchFamily="34" charset="-120"/>
+              </a:rPr>
+              <a:t>Presentation IR</a:t>
+            </a:r>
+            <a:endParaRPr lang="en-US" sz="1600" dirty="0"/>
+          </a:p>
+        </p:txBody>
+      </p:sp>
+      <p:sp>
+        <p:nvSpPr>
+          <p:cNvPr id="44" name="Shape 42"/>
+          <p:cNvSpPr/>
+          <p:nvPr/>
+        </p:nvSpPr>
+        <p:spPr>
+          <a:xfrm>
+            <a:off x="640080" y="1769364"/>
+            <a:ext cx="3435096" cy="109728"/>
+          </a:xfrm>
+          <a:prstGeom prst="rect">
+            <a:avLst/>
+          </a:prstGeom>
+          <a:solidFill>
+            <a:srgbClr val="2563EB"/>
+          </a:solidFill>
+          <a:ln w="12700">
+            <a:solidFill>
+              <a:srgbClr val="2563EB">
+                <a:alpha val="0"/>
+              </a:srgbClr>
+            </a:solidFill>
+            <a:prstDash val="solid"/>
+          </a:ln>
+        </p:spPr>
+      </p:sp>
+      <p:sp>
+        <p:nvSpPr>
+          <p:cNvPr id="45" name="Shape 43"/>
+          <p:cNvSpPr/>
+          <p:nvPr/>
+        </p:nvSpPr>
+        <p:spPr>
+          <a:xfrm>
+            <a:off x="804672" y="2167311"/>
+            <a:ext cx="374538" cy="374538"/>
+          </a:xfrm>
+          <a:prstGeom prst="ellipse">
+            <a:avLst/>
+          </a:prstGeom>
+          <a:solidFill>
+            <a:srgbClr val="2563EB"/>
+          </a:solidFill>
+          <a:ln w="12700">
+            <a:solidFill>
+              <a:srgbClr val="2563EB">
+                <a:alpha val="0"/>
+              </a:srgbClr>
+            </a:solidFill>
+            <a:prstDash val="solid"/>
+          </a:ln>
+        </p:spPr>
+      </p:sp>
+      <p:sp>
+        <p:nvSpPr>
+          <p:cNvPr id="46" name="Text 44"/>
+          <p:cNvSpPr txBox="1"/>
+          <p:nvPr/>
+        </p:nvSpPr>
+        <p:spPr>
+          <a:xfrm>
+            <a:off x="804672" y="2167311"/>
+            <a:ext cx="374538" cy="374538"/>
+          </a:xfrm>
+          <a:prstGeom prst="rect">
+            <a:avLst/>
+          </a:prstGeom>
+          <a:noFill/>
+          <a:ln/>
+        </p:spPr>
+        <p:txBody>
+          <a:bodyPr wrap="square" lIns="0" tIns="0" rIns="0" bIns="0" rtlCol="0" anchor="ctr">
+            <a:normAutofit/>
+          </a:bodyPr>
+          <a:lstStyle/>
+          <a:p>
+            <a:pPr algn="ctr" indent="0" marL="0">
+              <a:lnSpc>
+                <a:spcPct val="120000"/>
+              </a:lnSpc>
+              <a:buNone/>
+            </a:pPr>
+            <a:r>
+              <a:rPr lang="en-US" sz="1600" b="1" dirty="0">
+                <a:solidFill>
+                  <a:srgbClr val="F8FAFC"/>
+                </a:solidFill>
+                <a:latin typeface="Pretendard" pitchFamily="34" charset="0"/>
+                <a:ea typeface="Pretendard" pitchFamily="34" charset="-122"/>
+                <a:cs typeface="Pretendard" pitchFamily="34" charset="-120"/>
+              </a:rPr>
+              <a:t>7</a:t>
+            </a:r>
+            <a:endParaRPr lang="en-US" sz="1600" dirty="0"/>
+          </a:p>
+        </p:txBody>
+      </p:sp>
+      <p:sp>
+        <p:nvSpPr>
+          <p:cNvPr id="47" name="Text 45"/>
+          <p:cNvSpPr txBox="1"/>
+          <p:nvPr/>
+        </p:nvSpPr>
+        <p:spPr>
+          <a:xfrm>
+            <a:off x="1325514" y="1897380"/>
+            <a:ext cx="2585070" cy="914400"/>
+          </a:xfrm>
+          <a:prstGeom prst="rect">
+            <a:avLst/>
+          </a:prstGeom>
+          <a:noFill/>
+          <a:ln/>
+        </p:spPr>
+        <p:txBody>
+          <a:bodyPr wrap="square" lIns="0" tIns="25400" rIns="25400" bIns="0" rtlCol="0" anchor="ctr">
+            <a:normAutofit/>
+          </a:bodyPr>
+          <a:lstStyle/>
+          <a:p>
+            <a:pPr algn="l" indent="0" marL="0">
+              <a:lnSpc>
+                <a:spcPct val="92000"/>
+              </a:lnSpc>
+              <a:buNone/>
+            </a:pPr>
+            <a:r>
+              <a:rPr lang="en-US" sz="1600" dirty="0">
+                <a:solidFill>
+                  <a:srgbClr val="111111"/>
+                </a:solidFill>
+                <a:latin typeface="Pretendard" pitchFamily="34" charset="0"/>
+                <a:ea typeface="Pretendard" pitchFamily="34" charset="-122"/>
+                <a:cs typeface="Pretendard" pitchFamily="34" charset="-120"/>
+              </a:rPr>
+              <a:t>Layout IR</a:t>
+            </a:r>
+            <a:endParaRPr lang="en-US" sz="1600" dirty="0"/>
+          </a:p>
+        </p:txBody>
       </p:sp>
       <p:sp>
         <p:nvSpPr>
@@ -20781,54 +20781,6 @@
         </p:nvSpPr>
         <p:spPr>
           <a:xfrm>
-            <a:off x="6103620" y="3051581"/>
-            <a:ext cx="0" cy="389077"/>
-          </a:xfrm>
-          <a:prstGeom prst="line">
-            <a:avLst/>
-          </a:prstGeom>
-          <a:noFill/>
-          <a:ln w="12700">
-            <a:solidFill>
-              <a:srgbClr val="2563EB"/>
-            </a:solidFill>
-            <a:prstDash val="solid"/>
-            <a:tailEnd type="triangle"/>
-          </a:ln>
-        </p:spPr>
-      </p:sp>
-      <p:sp>
-        <p:nvSpPr>
-          <p:cNvPr id="4" name="Shape 2"/>
-          <p:cNvSpPr/>
-          <p:nvPr/>
-        </p:nvSpPr>
-        <p:spPr>
-          <a:xfrm>
-            <a:off x="6103620" y="4231157"/>
-            <a:ext cx="0" cy="389077"/>
-          </a:xfrm>
-          <a:prstGeom prst="line">
-            <a:avLst/>
-          </a:prstGeom>
-          <a:noFill/>
-          <a:ln w="12700">
-            <a:solidFill>
-              <a:srgbClr val="2563EB"/>
-            </a:solidFill>
-            <a:prstDash val="solid"/>
-            <a:tailEnd type="triangle"/>
-          </a:ln>
-        </p:spPr>
-      </p:sp>
-      <p:sp>
-        <p:nvSpPr>
-          <p:cNvPr id="5" name="Shape 3"/>
-          <p:cNvSpPr/>
-          <p:nvPr/>
-        </p:nvSpPr>
-        <p:spPr>
-          <a:xfrm>
             <a:off x="2169871" y="2221992"/>
             <a:ext cx="7867498" cy="868680"/>
           </a:xfrm>
@@ -20857,149 +20809,7 @@
       </p:sp>
       <p:sp>
         <p:nvSpPr>
-          <p:cNvPr id="6" name="Shape 4"/>
-          <p:cNvSpPr/>
-          <p:nvPr/>
-        </p:nvSpPr>
-        <p:spPr>
-          <a:xfrm>
-            <a:off x="2169871" y="2221992"/>
-            <a:ext cx="7867498" cy="109728"/>
-          </a:xfrm>
-          <a:prstGeom prst="rect">
-            <a:avLst/>
-          </a:prstGeom>
-          <a:solidFill>
-            <a:srgbClr val="2563EB"/>
-          </a:solidFill>
-          <a:ln w="12700">
-            <a:solidFill>
-              <a:srgbClr val="2563EB">
-                <a:alpha val="0"/>
-              </a:srgbClr>
-            </a:solidFill>
-            <a:prstDash val="solid"/>
-          </a:ln>
-        </p:spPr>
-      </p:sp>
-      <p:sp>
-        <p:nvSpPr>
-          <p:cNvPr id="7" name="Shape 5"/>
-          <p:cNvSpPr/>
-          <p:nvPr/>
-        </p:nvSpPr>
-        <p:spPr>
-          <a:xfrm>
-            <a:off x="2334463" y="2482596"/>
-            <a:ext cx="347472" cy="347472"/>
-          </a:xfrm>
-          <a:prstGeom prst="ellipse">
-            <a:avLst/>
-          </a:prstGeom>
-          <a:solidFill>
-            <a:srgbClr val="2563EB"/>
-          </a:solidFill>
-          <a:ln w="12700">
-            <a:solidFill>
-              <a:srgbClr val="2563EB">
-                <a:alpha val="0"/>
-              </a:srgbClr>
-            </a:solidFill>
-            <a:prstDash val="solid"/>
-          </a:ln>
-        </p:spPr>
-      </p:sp>
-      <p:sp>
-        <p:nvSpPr>
-          <p:cNvPr id="8" name="Text 6"/>
-          <p:cNvSpPr txBox="1"/>
-          <p:nvPr/>
-        </p:nvSpPr>
-        <p:spPr>
-          <a:xfrm>
-            <a:off x="2334463" y="2482596"/>
-            <a:ext cx="347472" cy="347472"/>
-          </a:xfrm>
-          <a:prstGeom prst="rect">
-            <a:avLst/>
-          </a:prstGeom>
-          <a:noFill/>
-          <a:ln/>
-        </p:spPr>
-        <p:txBody>
-          <a:bodyPr wrap="square" lIns="0" tIns="0" rIns="0" bIns="0" rtlCol="0" anchor="ctr">
-            <a:normAutofit/>
-          </a:bodyPr>
-          <a:lstStyle/>
-          <a:p>
-            <a:pPr algn="ctr" indent="0" marL="0">
-              <a:lnSpc>
-                <a:spcPct val="120000"/>
-              </a:lnSpc>
-              <a:buNone/>
-            </a:pPr>
-            <a:r>
-              <a:rPr lang="en-US" sz="1600" b="1" dirty="0">
-                <a:solidFill>
-                  <a:srgbClr val="F8FAFC"/>
-                </a:solidFill>
-                <a:latin typeface="Pretendard" pitchFamily="34" charset="0"/>
-                <a:ea typeface="Pretendard" pitchFamily="34" charset="-122"/>
-                <a:cs typeface="Pretendard" pitchFamily="34" charset="-120"/>
-              </a:rPr>
-              <a:t>1</a:t>
-            </a:r>
-            <a:endParaRPr lang="en-US" sz="1600" dirty="0"/>
-          </a:p>
-        </p:txBody>
-      </p:sp>
-      <p:sp>
-        <p:nvSpPr>
-          <p:cNvPr id="9" name="Text 7"/>
-          <p:cNvSpPr txBox="1"/>
-          <p:nvPr/>
-        </p:nvSpPr>
-        <p:spPr>
-          <a:xfrm>
-            <a:off x="2828239" y="2350008"/>
-            <a:ext cx="7044538" cy="612648"/>
-          </a:xfrm>
-          <a:prstGeom prst="rect">
-            <a:avLst/>
-          </a:prstGeom>
-          <a:noFill/>
-          <a:ln/>
-        </p:spPr>
-        <p:txBody>
-          <a:bodyPr wrap="square" lIns="0" tIns="25400" rIns="25400" bIns="0" rtlCol="0" anchor="ctr">
-            <a:normAutofit/>
-          </a:bodyPr>
-          <a:lstStyle/>
-          <a:p>
-            <a:pPr algn="l" indent="0" marL="0">
-              <a:lnSpc>
-                <a:spcPct val="92000"/>
-              </a:lnSpc>
-              <a:buNone/>
-            </a:pPr>
-            <a:r>
-              <a:rPr lang="en-US" sz="1600" dirty="0">
-                <a:solidFill>
-                  <a:srgbClr val="111111"/>
-                </a:solidFill>
-                <a:latin typeface="Pretendard" pitchFamily="34" charset="0"/>
-                <a:ea typeface="Pretendard" pitchFamily="34" charset="-122"/>
-                <a:cs typeface="Pretendard" pitchFamily="34" charset="-120"/>
-              </a:rPr>
-              <a:t>MDPR manifest and previews</a:t>
-            </a:r>
-            <a:endParaRPr lang="en-US" sz="1600" dirty="0"/>
-          </a:p>
-        </p:txBody>
-      </p:sp>
-      <p:sp>
-        <p:nvSpPr>
-          <p:cNvPr id="10" name="Shape 8"/>
+          <p:cNvPr id="4" name="Shape 2"/>
           <p:cNvSpPr/>
           <p:nvPr/>
         </p:nvSpPr>
@@ -21033,149 +20843,7 @@
       </p:sp>
       <p:sp>
         <p:nvSpPr>
-          <p:cNvPr id="11" name="Shape 9"/>
-          <p:cNvSpPr/>
-          <p:nvPr/>
-        </p:nvSpPr>
-        <p:spPr>
-          <a:xfrm>
-            <a:off x="2169871" y="3401568"/>
-            <a:ext cx="7867498" cy="109728"/>
-          </a:xfrm>
-          <a:prstGeom prst="rect">
-            <a:avLst/>
-          </a:prstGeom>
-          <a:solidFill>
-            <a:srgbClr val="2563EB"/>
-          </a:solidFill>
-          <a:ln w="12700">
-            <a:solidFill>
-              <a:srgbClr val="2563EB">
-                <a:alpha val="0"/>
-              </a:srgbClr>
-            </a:solidFill>
-            <a:prstDash val="solid"/>
-          </a:ln>
-        </p:spPr>
-      </p:sp>
-      <p:sp>
-        <p:nvSpPr>
-          <p:cNvPr id="12" name="Shape 10"/>
-          <p:cNvSpPr/>
-          <p:nvPr/>
-        </p:nvSpPr>
-        <p:spPr>
-          <a:xfrm>
-            <a:off x="2334463" y="3662172"/>
-            <a:ext cx="347472" cy="347472"/>
-          </a:xfrm>
-          <a:prstGeom prst="ellipse">
-            <a:avLst/>
-          </a:prstGeom>
-          <a:solidFill>
-            <a:srgbClr val="2563EB"/>
-          </a:solidFill>
-          <a:ln w="12700">
-            <a:solidFill>
-              <a:srgbClr val="2563EB">
-                <a:alpha val="0"/>
-              </a:srgbClr>
-            </a:solidFill>
-            <a:prstDash val="solid"/>
-          </a:ln>
-        </p:spPr>
-      </p:sp>
-      <p:sp>
-        <p:nvSpPr>
-          <p:cNvPr id="13" name="Text 11"/>
-          <p:cNvSpPr txBox="1"/>
-          <p:nvPr/>
-        </p:nvSpPr>
-        <p:spPr>
-          <a:xfrm>
-            <a:off x="2334463" y="3662172"/>
-            <a:ext cx="347472" cy="347472"/>
-          </a:xfrm>
-          <a:prstGeom prst="rect">
-            <a:avLst/>
-          </a:prstGeom>
-          <a:noFill/>
-          <a:ln/>
-        </p:spPr>
-        <p:txBody>
-          <a:bodyPr wrap="square" lIns="0" tIns="0" rIns="0" bIns="0" rtlCol="0" anchor="ctr">
-            <a:normAutofit/>
-          </a:bodyPr>
-          <a:lstStyle/>
-          <a:p>
-            <a:pPr algn="ctr" indent="0" marL="0">
-              <a:lnSpc>
-                <a:spcPct val="120000"/>
-              </a:lnSpc>
-              <a:buNone/>
-            </a:pPr>
-            <a:r>
-              <a:rPr lang="en-US" sz="1600" b="1" dirty="0">
-                <a:solidFill>
-                  <a:srgbClr val="F8FAFC"/>
-                </a:solidFill>
-                <a:latin typeface="Pretendard" pitchFamily="34" charset="0"/>
-                <a:ea typeface="Pretendard" pitchFamily="34" charset="-122"/>
-                <a:cs typeface="Pretendard" pitchFamily="34" charset="-120"/>
-              </a:rPr>
-              <a:t>2</a:t>
-            </a:r>
-            <a:endParaRPr lang="en-US" sz="1600" dirty="0"/>
-          </a:p>
-        </p:txBody>
-      </p:sp>
-      <p:sp>
-        <p:nvSpPr>
-          <p:cNvPr id="14" name="Text 12"/>
-          <p:cNvSpPr txBox="1"/>
-          <p:nvPr/>
-        </p:nvSpPr>
-        <p:spPr>
-          <a:xfrm>
-            <a:off x="2828239" y="3529584"/>
-            <a:ext cx="7044538" cy="612648"/>
-          </a:xfrm>
-          <a:prstGeom prst="rect">
-            <a:avLst/>
-          </a:prstGeom>
-          <a:noFill/>
-          <a:ln/>
-        </p:spPr>
-        <p:txBody>
-          <a:bodyPr wrap="square" lIns="0" tIns="25400" rIns="25400" bIns="0" rtlCol="0" anchor="ctr">
-            <a:normAutofit/>
-          </a:bodyPr>
-          <a:lstStyle/>
-          <a:p>
-            <a:pPr algn="l" indent="0" marL="0">
-              <a:lnSpc>
-                <a:spcPct val="92000"/>
-              </a:lnSpc>
-              <a:buNone/>
-            </a:pPr>
-            <a:r>
-              <a:rPr lang="en-US" sz="1600" dirty="0">
-                <a:solidFill>
-                  <a:srgbClr val="111111"/>
-                </a:solidFill>
-                <a:latin typeface="Pretendard" pitchFamily="34" charset="0"/>
-                <a:ea typeface="Pretendard" pitchFamily="34" charset="-122"/>
-                <a:cs typeface="Pretendard" pitchFamily="34" charset="-120"/>
-              </a:rPr>
-              <a:t>mdpr-skill hints or review findings</a:t>
-            </a:r>
-            <a:endParaRPr lang="en-US" sz="1600" dirty="0"/>
-          </a:p>
-        </p:txBody>
-      </p:sp>
-      <p:sp>
-        <p:nvSpPr>
-          <p:cNvPr id="15" name="Shape 13"/>
+          <p:cNvPr id="5" name="Shape 3"/>
           <p:cNvSpPr/>
           <p:nvPr/>
         </p:nvSpPr>
@@ -21206,6 +20874,338 @@
             </a:outerShdw>
           </a:effectLst>
         </p:spPr>
+      </p:sp>
+      <p:sp>
+        <p:nvSpPr>
+          <p:cNvPr id="6" name="Shape 4"/>
+          <p:cNvSpPr/>
+          <p:nvPr/>
+        </p:nvSpPr>
+        <p:spPr>
+          <a:xfrm>
+            <a:off x="6103620" y="3051581"/>
+            <a:ext cx="0" cy="389077"/>
+          </a:xfrm>
+          <a:prstGeom prst="line">
+            <a:avLst/>
+          </a:prstGeom>
+          <a:noFill/>
+          <a:ln w="12700">
+            <a:solidFill>
+              <a:srgbClr val="2563EB"/>
+            </a:solidFill>
+            <a:prstDash val="solid"/>
+            <a:tailEnd type="triangle"/>
+          </a:ln>
+        </p:spPr>
+      </p:sp>
+      <p:sp>
+        <p:nvSpPr>
+          <p:cNvPr id="7" name="Shape 5"/>
+          <p:cNvSpPr/>
+          <p:nvPr/>
+        </p:nvSpPr>
+        <p:spPr>
+          <a:xfrm>
+            <a:off x="6103620" y="4231157"/>
+            <a:ext cx="0" cy="389077"/>
+          </a:xfrm>
+          <a:prstGeom prst="line">
+            <a:avLst/>
+          </a:prstGeom>
+          <a:noFill/>
+          <a:ln w="12700">
+            <a:solidFill>
+              <a:srgbClr val="2563EB"/>
+            </a:solidFill>
+            <a:prstDash val="solid"/>
+            <a:tailEnd type="triangle"/>
+          </a:ln>
+        </p:spPr>
+      </p:sp>
+      <p:sp>
+        <p:nvSpPr>
+          <p:cNvPr id="8" name="Shape 6"/>
+          <p:cNvSpPr/>
+          <p:nvPr/>
+        </p:nvSpPr>
+        <p:spPr>
+          <a:xfrm>
+            <a:off x="2169871" y="2221992"/>
+            <a:ext cx="7867498" cy="109728"/>
+          </a:xfrm>
+          <a:prstGeom prst="rect">
+            <a:avLst/>
+          </a:prstGeom>
+          <a:solidFill>
+            <a:srgbClr val="2563EB"/>
+          </a:solidFill>
+          <a:ln w="12700">
+            <a:solidFill>
+              <a:srgbClr val="2563EB">
+                <a:alpha val="0"/>
+              </a:srgbClr>
+            </a:solidFill>
+            <a:prstDash val="solid"/>
+          </a:ln>
+        </p:spPr>
+      </p:sp>
+      <p:sp>
+        <p:nvSpPr>
+          <p:cNvPr id="9" name="Shape 7"/>
+          <p:cNvSpPr/>
+          <p:nvPr/>
+        </p:nvSpPr>
+        <p:spPr>
+          <a:xfrm>
+            <a:off x="2334463" y="2482596"/>
+            <a:ext cx="347472" cy="347472"/>
+          </a:xfrm>
+          <a:prstGeom prst="ellipse">
+            <a:avLst/>
+          </a:prstGeom>
+          <a:solidFill>
+            <a:srgbClr val="2563EB"/>
+          </a:solidFill>
+          <a:ln w="12700">
+            <a:solidFill>
+              <a:srgbClr val="2563EB">
+                <a:alpha val="0"/>
+              </a:srgbClr>
+            </a:solidFill>
+            <a:prstDash val="solid"/>
+          </a:ln>
+        </p:spPr>
+      </p:sp>
+      <p:sp>
+        <p:nvSpPr>
+          <p:cNvPr id="10" name="Text 8"/>
+          <p:cNvSpPr txBox="1"/>
+          <p:nvPr/>
+        </p:nvSpPr>
+        <p:spPr>
+          <a:xfrm>
+            <a:off x="2334463" y="2482596"/>
+            <a:ext cx="347472" cy="347472"/>
+          </a:xfrm>
+          <a:prstGeom prst="rect">
+            <a:avLst/>
+          </a:prstGeom>
+          <a:noFill/>
+          <a:ln/>
+        </p:spPr>
+        <p:txBody>
+          <a:bodyPr wrap="square" lIns="0" tIns="0" rIns="0" bIns="0" rtlCol="0" anchor="ctr">
+            <a:normAutofit/>
+          </a:bodyPr>
+          <a:lstStyle/>
+          <a:p>
+            <a:pPr algn="ctr" indent="0" marL="0">
+              <a:lnSpc>
+                <a:spcPct val="120000"/>
+              </a:lnSpc>
+              <a:buNone/>
+            </a:pPr>
+            <a:r>
+              <a:rPr lang="en-US" sz="1600" b="1" dirty="0">
+                <a:solidFill>
+                  <a:srgbClr val="F8FAFC"/>
+                </a:solidFill>
+                <a:latin typeface="Pretendard" pitchFamily="34" charset="0"/>
+                <a:ea typeface="Pretendard" pitchFamily="34" charset="-122"/>
+                <a:cs typeface="Pretendard" pitchFamily="34" charset="-120"/>
+              </a:rPr>
+              <a:t>1</a:t>
+            </a:r>
+            <a:endParaRPr lang="en-US" sz="1600" dirty="0"/>
+          </a:p>
+        </p:txBody>
+      </p:sp>
+      <p:sp>
+        <p:nvSpPr>
+          <p:cNvPr id="11" name="Text 9"/>
+          <p:cNvSpPr txBox="1"/>
+          <p:nvPr/>
+        </p:nvSpPr>
+        <p:spPr>
+          <a:xfrm>
+            <a:off x="2828239" y="2350008"/>
+            <a:ext cx="7044538" cy="612648"/>
+          </a:xfrm>
+          <a:prstGeom prst="rect">
+            <a:avLst/>
+          </a:prstGeom>
+          <a:noFill/>
+          <a:ln/>
+        </p:spPr>
+        <p:txBody>
+          <a:bodyPr wrap="square" lIns="0" tIns="25400" rIns="25400" bIns="0" rtlCol="0" anchor="ctr">
+            <a:normAutofit/>
+          </a:bodyPr>
+          <a:lstStyle/>
+          <a:p>
+            <a:pPr algn="l" indent="0" marL="0">
+              <a:lnSpc>
+                <a:spcPct val="92000"/>
+              </a:lnSpc>
+              <a:buNone/>
+            </a:pPr>
+            <a:r>
+              <a:rPr lang="en-US" sz="1600" dirty="0">
+                <a:solidFill>
+                  <a:srgbClr val="111111"/>
+                </a:solidFill>
+                <a:latin typeface="Pretendard" pitchFamily="34" charset="0"/>
+                <a:ea typeface="Pretendard" pitchFamily="34" charset="-122"/>
+                <a:cs typeface="Pretendard" pitchFamily="34" charset="-120"/>
+              </a:rPr>
+              <a:t>MDPR manifest and previews</a:t>
+            </a:r>
+            <a:endParaRPr lang="en-US" sz="1600" dirty="0"/>
+          </a:p>
+        </p:txBody>
+      </p:sp>
+      <p:sp>
+        <p:nvSpPr>
+          <p:cNvPr id="12" name="Shape 10"/>
+          <p:cNvSpPr/>
+          <p:nvPr/>
+        </p:nvSpPr>
+        <p:spPr>
+          <a:xfrm>
+            <a:off x="2169871" y="3401568"/>
+            <a:ext cx="7867498" cy="109728"/>
+          </a:xfrm>
+          <a:prstGeom prst="rect">
+            <a:avLst/>
+          </a:prstGeom>
+          <a:solidFill>
+            <a:srgbClr val="2563EB"/>
+          </a:solidFill>
+          <a:ln w="12700">
+            <a:solidFill>
+              <a:srgbClr val="2563EB">
+                <a:alpha val="0"/>
+              </a:srgbClr>
+            </a:solidFill>
+            <a:prstDash val="solid"/>
+          </a:ln>
+        </p:spPr>
+      </p:sp>
+      <p:sp>
+        <p:nvSpPr>
+          <p:cNvPr id="13" name="Shape 11"/>
+          <p:cNvSpPr/>
+          <p:nvPr/>
+        </p:nvSpPr>
+        <p:spPr>
+          <a:xfrm>
+            <a:off x="2334463" y="3662172"/>
+            <a:ext cx="347472" cy="347472"/>
+          </a:xfrm>
+          <a:prstGeom prst="ellipse">
+            <a:avLst/>
+          </a:prstGeom>
+          <a:solidFill>
+            <a:srgbClr val="2563EB"/>
+          </a:solidFill>
+          <a:ln w="12700">
+            <a:solidFill>
+              <a:srgbClr val="2563EB">
+                <a:alpha val="0"/>
+              </a:srgbClr>
+            </a:solidFill>
+            <a:prstDash val="solid"/>
+          </a:ln>
+        </p:spPr>
+      </p:sp>
+      <p:sp>
+        <p:nvSpPr>
+          <p:cNvPr id="14" name="Text 12"/>
+          <p:cNvSpPr txBox="1"/>
+          <p:nvPr/>
+        </p:nvSpPr>
+        <p:spPr>
+          <a:xfrm>
+            <a:off x="2334463" y="3662172"/>
+            <a:ext cx="347472" cy="347472"/>
+          </a:xfrm>
+          <a:prstGeom prst="rect">
+            <a:avLst/>
+          </a:prstGeom>
+          <a:noFill/>
+          <a:ln/>
+        </p:spPr>
+        <p:txBody>
+          <a:bodyPr wrap="square" lIns="0" tIns="0" rIns="0" bIns="0" rtlCol="0" anchor="ctr">
+            <a:normAutofit/>
+          </a:bodyPr>
+          <a:lstStyle/>
+          <a:p>
+            <a:pPr algn="ctr" indent="0" marL="0">
+              <a:lnSpc>
+                <a:spcPct val="120000"/>
+              </a:lnSpc>
+              <a:buNone/>
+            </a:pPr>
+            <a:r>
+              <a:rPr lang="en-US" sz="1600" b="1" dirty="0">
+                <a:solidFill>
+                  <a:srgbClr val="F8FAFC"/>
+                </a:solidFill>
+                <a:latin typeface="Pretendard" pitchFamily="34" charset="0"/>
+                <a:ea typeface="Pretendard" pitchFamily="34" charset="-122"/>
+                <a:cs typeface="Pretendard" pitchFamily="34" charset="-120"/>
+              </a:rPr>
+              <a:t>2</a:t>
+            </a:r>
+            <a:endParaRPr lang="en-US" sz="1600" dirty="0"/>
+          </a:p>
+        </p:txBody>
+      </p:sp>
+      <p:sp>
+        <p:nvSpPr>
+          <p:cNvPr id="15" name="Text 13"/>
+          <p:cNvSpPr txBox="1"/>
+          <p:nvPr/>
+        </p:nvSpPr>
+        <p:spPr>
+          <a:xfrm>
+            <a:off x="2828239" y="3529584"/>
+            <a:ext cx="7044538" cy="612648"/>
+          </a:xfrm>
+          <a:prstGeom prst="rect">
+            <a:avLst/>
+          </a:prstGeom>
+          <a:noFill/>
+          <a:ln/>
+        </p:spPr>
+        <p:txBody>
+          <a:bodyPr wrap="square" lIns="0" tIns="25400" rIns="25400" bIns="0" rtlCol="0" anchor="ctr">
+            <a:normAutofit/>
+          </a:bodyPr>
+          <a:lstStyle/>
+          <a:p>
+            <a:pPr algn="l" indent="0" marL="0">
+              <a:lnSpc>
+                <a:spcPct val="92000"/>
+              </a:lnSpc>
+              <a:buNone/>
+            </a:pPr>
+            <a:r>
+              <a:rPr lang="en-US" sz="1600" dirty="0">
+                <a:solidFill>
+                  <a:srgbClr val="111111"/>
+                </a:solidFill>
+                <a:latin typeface="Pretendard" pitchFamily="34" charset="0"/>
+                <a:ea typeface="Pretendard" pitchFamily="34" charset="-122"/>
+                <a:cs typeface="Pretendard" pitchFamily="34" charset="-120"/>
+              </a:rPr>
+              <a:t>mdpr-skill hints or review findings</a:t>
+            </a:r>
+            <a:endParaRPr lang="en-US" sz="1600" dirty="0"/>
+          </a:p>
+        </p:txBody>
       </p:sp>
       <p:sp>
         <p:nvSpPr>
@@ -22062,126 +22062,6 @@
         </p:nvSpPr>
         <p:spPr>
           <a:xfrm>
-            <a:off x="4002024" y="3095244"/>
-            <a:ext cx="457200" cy="0"/>
-          </a:xfrm>
-          <a:prstGeom prst="line">
-            <a:avLst/>
-          </a:prstGeom>
-          <a:noFill/>
-          <a:ln w="12700">
-            <a:solidFill>
-              <a:srgbClr val="2563EB"/>
-            </a:solidFill>
-            <a:prstDash val="solid"/>
-            <a:tailEnd type="triangle"/>
-          </a:ln>
-        </p:spPr>
-      </p:sp>
-      <p:sp>
-        <p:nvSpPr>
-          <p:cNvPr id="4" name="Shape 2"/>
-          <p:cNvSpPr/>
-          <p:nvPr/>
-        </p:nvSpPr>
-        <p:spPr>
-          <a:xfrm>
-            <a:off x="7748016" y="3095244"/>
-            <a:ext cx="457200" cy="0"/>
-          </a:xfrm>
-          <a:prstGeom prst="line">
-            <a:avLst/>
-          </a:prstGeom>
-          <a:noFill/>
-          <a:ln w="12700">
-            <a:solidFill>
-              <a:srgbClr val="2563EB"/>
-            </a:solidFill>
-            <a:prstDash val="solid"/>
-            <a:tailEnd type="triangle"/>
-          </a:ln>
-        </p:spPr>
-      </p:sp>
-      <p:sp>
-        <p:nvSpPr>
-          <p:cNvPr id="5" name="Shape 3"/>
-          <p:cNvSpPr/>
-          <p:nvPr/>
-        </p:nvSpPr>
-        <p:spPr>
-          <a:xfrm>
-            <a:off x="9849612" y="3627791"/>
-            <a:ext cx="0" cy="416235"/>
-          </a:xfrm>
-          <a:prstGeom prst="line">
-            <a:avLst/>
-          </a:prstGeom>
-          <a:noFill/>
-          <a:ln w="12700">
-            <a:solidFill>
-              <a:srgbClr val="2563EB"/>
-            </a:solidFill>
-            <a:prstDash val="solid"/>
-            <a:tailEnd type="triangle"/>
-          </a:ln>
-        </p:spPr>
-      </p:sp>
-      <p:sp>
-        <p:nvSpPr>
-          <p:cNvPr id="6" name="Shape 4"/>
-          <p:cNvSpPr/>
-          <p:nvPr/>
-        </p:nvSpPr>
-        <p:spPr>
-          <a:xfrm>
-            <a:off x="7748016" y="4576572"/>
-            <a:ext cx="457200" cy="0"/>
-          </a:xfrm>
-          <a:prstGeom prst="line">
-            <a:avLst/>
-          </a:prstGeom>
-          <a:noFill/>
-          <a:ln w="12700">
-            <a:solidFill>
-              <a:srgbClr val="2563EB"/>
-            </a:solidFill>
-            <a:prstDash val="solid"/>
-            <a:headEnd type="triangle"/>
-          </a:ln>
-        </p:spPr>
-      </p:sp>
-      <p:sp>
-        <p:nvSpPr>
-          <p:cNvPr id="7" name="Shape 5"/>
-          <p:cNvSpPr/>
-          <p:nvPr/>
-        </p:nvSpPr>
-        <p:spPr>
-          <a:xfrm>
-            <a:off x="4002024" y="4576572"/>
-            <a:ext cx="457200" cy="0"/>
-          </a:xfrm>
-          <a:prstGeom prst="line">
-            <a:avLst/>
-          </a:prstGeom>
-          <a:noFill/>
-          <a:ln w="12700">
-            <a:solidFill>
-              <a:srgbClr val="2563EB"/>
-            </a:solidFill>
-            <a:prstDash val="solid"/>
-            <a:headEnd type="triangle"/>
-          </a:ln>
-        </p:spPr>
-      </p:sp>
-      <p:sp>
-        <p:nvSpPr>
-          <p:cNvPr id="8" name="Shape 6"/>
-          <p:cNvSpPr/>
-          <p:nvPr/>
-        </p:nvSpPr>
-        <p:spPr>
-          <a:xfrm>
             <a:off x="640080" y="2510028"/>
             <a:ext cx="3435096" cy="1170432"/>
           </a:xfrm>
@@ -22210,149 +22090,7 @@
       </p:sp>
       <p:sp>
         <p:nvSpPr>
-          <p:cNvPr id="9" name="Shape 7"/>
-          <p:cNvSpPr/>
-          <p:nvPr/>
-        </p:nvSpPr>
-        <p:spPr>
-          <a:xfrm>
-            <a:off x="640080" y="2510028"/>
-            <a:ext cx="3435096" cy="109728"/>
-          </a:xfrm>
-          <a:prstGeom prst="rect">
-            <a:avLst/>
-          </a:prstGeom>
-          <a:solidFill>
-            <a:srgbClr val="2563EB"/>
-          </a:solidFill>
-          <a:ln w="12700">
-            <a:solidFill>
-              <a:srgbClr val="2563EB">
-                <a:alpha val="0"/>
-              </a:srgbClr>
-            </a:solidFill>
-            <a:prstDash val="solid"/>
-          </a:ln>
-        </p:spPr>
-      </p:sp>
-      <p:sp>
-        <p:nvSpPr>
-          <p:cNvPr id="10" name="Shape 8"/>
-          <p:cNvSpPr/>
-          <p:nvPr/>
-        </p:nvSpPr>
-        <p:spPr>
-          <a:xfrm>
-            <a:off x="804672" y="2907975"/>
-            <a:ext cx="374538" cy="374538"/>
-          </a:xfrm>
-          <a:prstGeom prst="ellipse">
-            <a:avLst/>
-          </a:prstGeom>
-          <a:solidFill>
-            <a:srgbClr val="2563EB"/>
-          </a:solidFill>
-          <a:ln w="12700">
-            <a:solidFill>
-              <a:srgbClr val="2563EB">
-                <a:alpha val="0"/>
-              </a:srgbClr>
-            </a:solidFill>
-            <a:prstDash val="solid"/>
-          </a:ln>
-        </p:spPr>
-      </p:sp>
-      <p:sp>
-        <p:nvSpPr>
-          <p:cNvPr id="11" name="Text 9"/>
-          <p:cNvSpPr txBox="1"/>
-          <p:nvPr/>
-        </p:nvSpPr>
-        <p:spPr>
-          <a:xfrm>
-            <a:off x="804672" y="2907975"/>
-            <a:ext cx="374538" cy="374538"/>
-          </a:xfrm>
-          <a:prstGeom prst="rect">
-            <a:avLst/>
-          </a:prstGeom>
-          <a:noFill/>
-          <a:ln/>
-        </p:spPr>
-        <p:txBody>
-          <a:bodyPr wrap="square" lIns="0" tIns="0" rIns="0" bIns="0" rtlCol="0" anchor="ctr">
-            <a:normAutofit/>
-          </a:bodyPr>
-          <a:lstStyle/>
-          <a:p>
-            <a:pPr algn="ctr" indent="0" marL="0">
-              <a:lnSpc>
-                <a:spcPct val="120000"/>
-              </a:lnSpc>
-              <a:buNone/>
-            </a:pPr>
-            <a:r>
-              <a:rPr lang="en-US" sz="1600" b="1" dirty="0">
-                <a:solidFill>
-                  <a:srgbClr val="F8FAFC"/>
-                </a:solidFill>
-                <a:latin typeface="Pretendard" pitchFamily="34" charset="0"/>
-                <a:ea typeface="Pretendard" pitchFamily="34" charset="-122"/>
-                <a:cs typeface="Pretendard" pitchFamily="34" charset="-120"/>
-              </a:rPr>
-              <a:t>1</a:t>
-            </a:r>
-            <a:endParaRPr lang="en-US" sz="1600" dirty="0"/>
-          </a:p>
-        </p:txBody>
-      </p:sp>
-      <p:sp>
-        <p:nvSpPr>
-          <p:cNvPr id="12" name="Text 10"/>
-          <p:cNvSpPr txBox="1"/>
-          <p:nvPr/>
-        </p:nvSpPr>
-        <p:spPr>
-          <a:xfrm>
-            <a:off x="1325514" y="2638044"/>
-            <a:ext cx="2585070" cy="914400"/>
-          </a:xfrm>
-          <a:prstGeom prst="rect">
-            <a:avLst/>
-          </a:prstGeom>
-          <a:noFill/>
-          <a:ln/>
-        </p:spPr>
-        <p:txBody>
-          <a:bodyPr wrap="square" lIns="0" tIns="25400" rIns="25400" bIns="0" rtlCol="0" anchor="ctr">
-            <a:normAutofit/>
-          </a:bodyPr>
-          <a:lstStyle/>
-          <a:p>
-            <a:pPr algn="l" indent="0" marL="0">
-              <a:lnSpc>
-                <a:spcPct val="92000"/>
-              </a:lnSpc>
-              <a:buNone/>
-            </a:pPr>
-            <a:r>
-              <a:rPr lang="en-US" sz="1600" dirty="0">
-                <a:solidFill>
-                  <a:srgbClr val="111111"/>
-                </a:solidFill>
-                <a:latin typeface="Pretendard" pitchFamily="34" charset="0"/>
-                <a:ea typeface="Pretendard" pitchFamily="34" charset="-122"/>
-                <a:cs typeface="Pretendard" pitchFamily="34" charset="-120"/>
-              </a:rPr>
-              <a:t>Markdown</a:t>
-            </a:r>
-            <a:endParaRPr lang="en-US" sz="1600" dirty="0"/>
-          </a:p>
-        </p:txBody>
-      </p:sp>
-      <p:sp>
-        <p:nvSpPr>
-          <p:cNvPr id="13" name="Shape 11"/>
+          <p:cNvPr id="4" name="Shape 2"/>
           <p:cNvSpPr/>
           <p:nvPr/>
         </p:nvSpPr>
@@ -22386,149 +22124,7 @@
       </p:sp>
       <p:sp>
         <p:nvSpPr>
-          <p:cNvPr id="14" name="Shape 12"/>
-          <p:cNvSpPr/>
-          <p:nvPr/>
-        </p:nvSpPr>
-        <p:spPr>
-          <a:xfrm>
-            <a:off x="4386072" y="2510028"/>
-            <a:ext cx="3435096" cy="109728"/>
-          </a:xfrm>
-          <a:prstGeom prst="rect">
-            <a:avLst/>
-          </a:prstGeom>
-          <a:solidFill>
-            <a:srgbClr val="2563EB"/>
-          </a:solidFill>
-          <a:ln w="12700">
-            <a:solidFill>
-              <a:srgbClr val="2563EB">
-                <a:alpha val="0"/>
-              </a:srgbClr>
-            </a:solidFill>
-            <a:prstDash val="solid"/>
-          </a:ln>
-        </p:spPr>
-      </p:sp>
-      <p:sp>
-        <p:nvSpPr>
-          <p:cNvPr id="15" name="Shape 13"/>
-          <p:cNvSpPr/>
-          <p:nvPr/>
-        </p:nvSpPr>
-        <p:spPr>
-          <a:xfrm>
-            <a:off x="4550664" y="2907975"/>
-            <a:ext cx="374538" cy="374538"/>
-          </a:xfrm>
-          <a:prstGeom prst="ellipse">
-            <a:avLst/>
-          </a:prstGeom>
-          <a:solidFill>
-            <a:srgbClr val="2563EB"/>
-          </a:solidFill>
-          <a:ln w="12700">
-            <a:solidFill>
-              <a:srgbClr val="2563EB">
-                <a:alpha val="0"/>
-              </a:srgbClr>
-            </a:solidFill>
-            <a:prstDash val="solid"/>
-          </a:ln>
-        </p:spPr>
-      </p:sp>
-      <p:sp>
-        <p:nvSpPr>
-          <p:cNvPr id="16" name="Text 14"/>
-          <p:cNvSpPr txBox="1"/>
-          <p:nvPr/>
-        </p:nvSpPr>
-        <p:spPr>
-          <a:xfrm>
-            <a:off x="4550664" y="2907975"/>
-            <a:ext cx="374538" cy="374538"/>
-          </a:xfrm>
-          <a:prstGeom prst="rect">
-            <a:avLst/>
-          </a:prstGeom>
-          <a:noFill/>
-          <a:ln/>
-        </p:spPr>
-        <p:txBody>
-          <a:bodyPr wrap="square" lIns="0" tIns="0" rIns="0" bIns="0" rtlCol="0" anchor="ctr">
-            <a:normAutofit/>
-          </a:bodyPr>
-          <a:lstStyle/>
-          <a:p>
-            <a:pPr algn="ctr" indent="0" marL="0">
-              <a:lnSpc>
-                <a:spcPct val="120000"/>
-              </a:lnSpc>
-              <a:buNone/>
-            </a:pPr>
-            <a:r>
-              <a:rPr lang="en-US" sz="1600" b="1" dirty="0">
-                <a:solidFill>
-                  <a:srgbClr val="F8FAFC"/>
-                </a:solidFill>
-                <a:latin typeface="Pretendard" pitchFamily="34" charset="0"/>
-                <a:ea typeface="Pretendard" pitchFamily="34" charset="-122"/>
-                <a:cs typeface="Pretendard" pitchFamily="34" charset="-120"/>
-              </a:rPr>
-              <a:t>2</a:t>
-            </a:r>
-            <a:endParaRPr lang="en-US" sz="1600" dirty="0"/>
-          </a:p>
-        </p:txBody>
-      </p:sp>
-      <p:sp>
-        <p:nvSpPr>
-          <p:cNvPr id="17" name="Text 15"/>
-          <p:cNvSpPr txBox="1"/>
-          <p:nvPr/>
-        </p:nvSpPr>
-        <p:spPr>
-          <a:xfrm>
-            <a:off x="5071506" y="2638044"/>
-            <a:ext cx="2585070" cy="914400"/>
-          </a:xfrm>
-          <a:prstGeom prst="rect">
-            <a:avLst/>
-          </a:prstGeom>
-          <a:noFill/>
-          <a:ln/>
-        </p:spPr>
-        <p:txBody>
-          <a:bodyPr wrap="square" lIns="0" tIns="25400" rIns="25400" bIns="0" rtlCol="0" anchor="ctr">
-            <a:normAutofit/>
-          </a:bodyPr>
-          <a:lstStyle/>
-          <a:p>
-            <a:pPr algn="l" indent="0" marL="0">
-              <a:lnSpc>
-                <a:spcPct val="92000"/>
-              </a:lnSpc>
-              <a:buNone/>
-            </a:pPr>
-            <a:r>
-              <a:rPr lang="en-US" sz="1600" dirty="0">
-                <a:solidFill>
-                  <a:srgbClr val="111111"/>
-                </a:solidFill>
-                <a:latin typeface="Pretendard" pitchFamily="34" charset="0"/>
-                <a:ea typeface="Pretendard" pitchFamily="34" charset="-122"/>
-                <a:cs typeface="Pretendard" pitchFamily="34" charset="-120"/>
-              </a:rPr>
-              <a:t>Parser (simple Markdown or Pandoc JSON)</a:t>
-            </a:r>
-            <a:endParaRPr lang="en-US" sz="1600" dirty="0"/>
-          </a:p>
-        </p:txBody>
-      </p:sp>
-      <p:sp>
-        <p:nvSpPr>
-          <p:cNvPr id="18" name="Shape 16"/>
+          <p:cNvPr id="5" name="Shape 3"/>
           <p:cNvSpPr/>
           <p:nvPr/>
         </p:nvSpPr>
@@ -22562,149 +22158,7 @@
       </p:sp>
       <p:sp>
         <p:nvSpPr>
-          <p:cNvPr id="19" name="Shape 17"/>
-          <p:cNvSpPr/>
-          <p:nvPr/>
-        </p:nvSpPr>
-        <p:spPr>
-          <a:xfrm>
-            <a:off x="8132064" y="2510028"/>
-            <a:ext cx="3435096" cy="109728"/>
-          </a:xfrm>
-          <a:prstGeom prst="rect">
-            <a:avLst/>
-          </a:prstGeom>
-          <a:solidFill>
-            <a:srgbClr val="2563EB"/>
-          </a:solidFill>
-          <a:ln w="12700">
-            <a:solidFill>
-              <a:srgbClr val="2563EB">
-                <a:alpha val="0"/>
-              </a:srgbClr>
-            </a:solidFill>
-            <a:prstDash val="solid"/>
-          </a:ln>
-        </p:spPr>
-      </p:sp>
-      <p:sp>
-        <p:nvSpPr>
-          <p:cNvPr id="20" name="Shape 18"/>
-          <p:cNvSpPr/>
-          <p:nvPr/>
-        </p:nvSpPr>
-        <p:spPr>
-          <a:xfrm>
-            <a:off x="8296656" y="2907975"/>
-            <a:ext cx="374538" cy="374538"/>
-          </a:xfrm>
-          <a:prstGeom prst="ellipse">
-            <a:avLst/>
-          </a:prstGeom>
-          <a:solidFill>
-            <a:srgbClr val="2563EB"/>
-          </a:solidFill>
-          <a:ln w="12700">
-            <a:solidFill>
-              <a:srgbClr val="2563EB">
-                <a:alpha val="0"/>
-              </a:srgbClr>
-            </a:solidFill>
-            <a:prstDash val="solid"/>
-          </a:ln>
-        </p:spPr>
-      </p:sp>
-      <p:sp>
-        <p:nvSpPr>
-          <p:cNvPr id="21" name="Text 19"/>
-          <p:cNvSpPr txBox="1"/>
-          <p:nvPr/>
-        </p:nvSpPr>
-        <p:spPr>
-          <a:xfrm>
-            <a:off x="8296656" y="2907975"/>
-            <a:ext cx="374538" cy="374538"/>
-          </a:xfrm>
-          <a:prstGeom prst="rect">
-            <a:avLst/>
-          </a:prstGeom>
-          <a:noFill/>
-          <a:ln/>
-        </p:spPr>
-        <p:txBody>
-          <a:bodyPr wrap="square" lIns="0" tIns="0" rIns="0" bIns="0" rtlCol="0" anchor="ctr">
-            <a:normAutofit/>
-          </a:bodyPr>
-          <a:lstStyle/>
-          <a:p>
-            <a:pPr algn="ctr" indent="0" marL="0">
-              <a:lnSpc>
-                <a:spcPct val="120000"/>
-              </a:lnSpc>
-              <a:buNone/>
-            </a:pPr>
-            <a:r>
-              <a:rPr lang="en-US" sz="1600" b="1" dirty="0">
-                <a:solidFill>
-                  <a:srgbClr val="F8FAFC"/>
-                </a:solidFill>
-                <a:latin typeface="Pretendard" pitchFamily="34" charset="0"/>
-                <a:ea typeface="Pretendard" pitchFamily="34" charset="-122"/>
-                <a:cs typeface="Pretendard" pitchFamily="34" charset="-120"/>
-              </a:rPr>
-              <a:t>3</a:t>
-            </a:r>
-            <a:endParaRPr lang="en-US" sz="1600" dirty="0"/>
-          </a:p>
-        </p:txBody>
-      </p:sp>
-      <p:sp>
-        <p:nvSpPr>
-          <p:cNvPr id="22" name="Text 20"/>
-          <p:cNvSpPr txBox="1"/>
-          <p:nvPr/>
-        </p:nvSpPr>
-        <p:spPr>
-          <a:xfrm>
-            <a:off x="8817498" y="2638044"/>
-            <a:ext cx="2585070" cy="914400"/>
-          </a:xfrm>
-          <a:prstGeom prst="rect">
-            <a:avLst/>
-          </a:prstGeom>
-          <a:noFill/>
-          <a:ln/>
-        </p:spPr>
-        <p:txBody>
-          <a:bodyPr wrap="square" lIns="0" tIns="25400" rIns="25400" bIns="0" rtlCol="0" anchor="ctr">
-            <a:normAutofit/>
-          </a:bodyPr>
-          <a:lstStyle/>
-          <a:p>
-            <a:pPr algn="l" indent="0" marL="0">
-              <a:lnSpc>
-                <a:spcPct val="92000"/>
-              </a:lnSpc>
-              <a:buNone/>
-            </a:pPr>
-            <a:r>
-              <a:rPr lang="en-US" sz="1600" dirty="0">
-                <a:solidFill>
-                  <a:srgbClr val="111111"/>
-                </a:solidFill>
-                <a:latin typeface="Pretendard" pitchFamily="34" charset="0"/>
-                <a:ea typeface="Pretendard" pitchFamily="34" charset="-122"/>
-                <a:cs typeface="Pretendard" pitchFamily="34" charset="-120"/>
-              </a:rPr>
-              <a:t>Outline Builder</a:t>
-            </a:r>
-            <a:endParaRPr lang="en-US" sz="1600" dirty="0"/>
-          </a:p>
-        </p:txBody>
-      </p:sp>
-      <p:sp>
-        <p:nvSpPr>
-          <p:cNvPr id="23" name="Shape 21"/>
+          <p:cNvPr id="6" name="Shape 4"/>
           <p:cNvSpPr/>
           <p:nvPr/>
         </p:nvSpPr>
@@ -22738,149 +22192,7 @@
       </p:sp>
       <p:sp>
         <p:nvSpPr>
-          <p:cNvPr id="24" name="Shape 22"/>
-          <p:cNvSpPr/>
-          <p:nvPr/>
-        </p:nvSpPr>
-        <p:spPr>
-          <a:xfrm>
-            <a:off x="8132064" y="3991356"/>
-            <a:ext cx="3435096" cy="109728"/>
-          </a:xfrm>
-          <a:prstGeom prst="rect">
-            <a:avLst/>
-          </a:prstGeom>
-          <a:solidFill>
-            <a:srgbClr val="2563EB"/>
-          </a:solidFill>
-          <a:ln w="12700">
-            <a:solidFill>
-              <a:srgbClr val="2563EB">
-                <a:alpha val="0"/>
-              </a:srgbClr>
-            </a:solidFill>
-            <a:prstDash val="solid"/>
-          </a:ln>
-        </p:spPr>
-      </p:sp>
-      <p:sp>
-        <p:nvSpPr>
-          <p:cNvPr id="25" name="Shape 23"/>
-          <p:cNvSpPr/>
-          <p:nvPr/>
-        </p:nvSpPr>
-        <p:spPr>
-          <a:xfrm>
-            <a:off x="8296656" y="4389303"/>
-            <a:ext cx="374538" cy="374538"/>
-          </a:xfrm>
-          <a:prstGeom prst="ellipse">
-            <a:avLst/>
-          </a:prstGeom>
-          <a:solidFill>
-            <a:srgbClr val="2563EB"/>
-          </a:solidFill>
-          <a:ln w="12700">
-            <a:solidFill>
-              <a:srgbClr val="2563EB">
-                <a:alpha val="0"/>
-              </a:srgbClr>
-            </a:solidFill>
-            <a:prstDash val="solid"/>
-          </a:ln>
-        </p:spPr>
-      </p:sp>
-      <p:sp>
-        <p:nvSpPr>
-          <p:cNvPr id="26" name="Text 24"/>
-          <p:cNvSpPr txBox="1"/>
-          <p:nvPr/>
-        </p:nvSpPr>
-        <p:spPr>
-          <a:xfrm>
-            <a:off x="8296656" y="4389303"/>
-            <a:ext cx="374538" cy="374538"/>
-          </a:xfrm>
-          <a:prstGeom prst="rect">
-            <a:avLst/>
-          </a:prstGeom>
-          <a:noFill/>
-          <a:ln/>
-        </p:spPr>
-        <p:txBody>
-          <a:bodyPr wrap="square" lIns="0" tIns="0" rIns="0" bIns="0" rtlCol="0" anchor="ctr">
-            <a:normAutofit/>
-          </a:bodyPr>
-          <a:lstStyle/>
-          <a:p>
-            <a:pPr algn="ctr" indent="0" marL="0">
-              <a:lnSpc>
-                <a:spcPct val="120000"/>
-              </a:lnSpc>
-              <a:buNone/>
-            </a:pPr>
-            <a:r>
-              <a:rPr lang="en-US" sz="1600" b="1" dirty="0">
-                <a:solidFill>
-                  <a:srgbClr val="F8FAFC"/>
-                </a:solidFill>
-                <a:latin typeface="Pretendard" pitchFamily="34" charset="0"/>
-                <a:ea typeface="Pretendard" pitchFamily="34" charset="-122"/>
-                <a:cs typeface="Pretendard" pitchFamily="34" charset="-120"/>
-              </a:rPr>
-              <a:t>4</a:t>
-            </a:r>
-            <a:endParaRPr lang="en-US" sz="1600" dirty="0"/>
-          </a:p>
-        </p:txBody>
-      </p:sp>
-      <p:sp>
-        <p:nvSpPr>
-          <p:cNvPr id="27" name="Text 25"/>
-          <p:cNvSpPr txBox="1"/>
-          <p:nvPr/>
-        </p:nvSpPr>
-        <p:spPr>
-          <a:xfrm>
-            <a:off x="8817498" y="4119372"/>
-            <a:ext cx="2585070" cy="914400"/>
-          </a:xfrm>
-          <a:prstGeom prst="rect">
-            <a:avLst/>
-          </a:prstGeom>
-          <a:noFill/>
-          <a:ln/>
-        </p:spPr>
-        <p:txBody>
-          <a:bodyPr wrap="square" lIns="0" tIns="25400" rIns="25400" bIns="0" rtlCol="0" anchor="ctr">
-            <a:normAutofit/>
-          </a:bodyPr>
-          <a:lstStyle/>
-          <a:p>
-            <a:pPr algn="l" indent="0" marL="0">
-              <a:lnSpc>
-                <a:spcPct val="92000"/>
-              </a:lnSpc>
-              <a:buNone/>
-            </a:pPr>
-            <a:r>
-              <a:rPr lang="en-US" sz="1600" dirty="0">
-                <a:solidFill>
-                  <a:srgbClr val="111111"/>
-                </a:solidFill>
-                <a:latin typeface="Pretendard" pitchFamily="34" charset="0"/>
-                <a:ea typeface="Pretendard" pitchFamily="34" charset="-122"/>
-                <a:cs typeface="Pretendard" pitchFamily="34" charset="-120"/>
-              </a:rPr>
-              <a:t>Split Planner</a:t>
-            </a:r>
-            <a:endParaRPr lang="en-US" sz="1600" dirty="0"/>
-          </a:p>
-        </p:txBody>
-      </p:sp>
-      <p:sp>
-        <p:nvSpPr>
-          <p:cNvPr id="28" name="Shape 26"/>
+          <p:cNvPr id="7" name="Shape 5"/>
           <p:cNvSpPr/>
           <p:nvPr/>
         </p:nvSpPr>
@@ -22914,149 +22226,7 @@
       </p:sp>
       <p:sp>
         <p:nvSpPr>
-          <p:cNvPr id="29" name="Shape 27"/>
-          <p:cNvSpPr/>
-          <p:nvPr/>
-        </p:nvSpPr>
-        <p:spPr>
-          <a:xfrm>
-            <a:off x="4386072" y="3991356"/>
-            <a:ext cx="3435096" cy="109728"/>
-          </a:xfrm>
-          <a:prstGeom prst="rect">
-            <a:avLst/>
-          </a:prstGeom>
-          <a:solidFill>
-            <a:srgbClr val="2563EB"/>
-          </a:solidFill>
-          <a:ln w="12700">
-            <a:solidFill>
-              <a:srgbClr val="2563EB">
-                <a:alpha val="0"/>
-              </a:srgbClr>
-            </a:solidFill>
-            <a:prstDash val="solid"/>
-          </a:ln>
-        </p:spPr>
-      </p:sp>
-      <p:sp>
-        <p:nvSpPr>
-          <p:cNvPr id="30" name="Shape 28"/>
-          <p:cNvSpPr/>
-          <p:nvPr/>
-        </p:nvSpPr>
-        <p:spPr>
-          <a:xfrm>
-            <a:off x="4550664" y="4389303"/>
-            <a:ext cx="374538" cy="374538"/>
-          </a:xfrm>
-          <a:prstGeom prst="ellipse">
-            <a:avLst/>
-          </a:prstGeom>
-          <a:solidFill>
-            <a:srgbClr val="2563EB"/>
-          </a:solidFill>
-          <a:ln w="12700">
-            <a:solidFill>
-              <a:srgbClr val="2563EB">
-                <a:alpha val="0"/>
-              </a:srgbClr>
-            </a:solidFill>
-            <a:prstDash val="solid"/>
-          </a:ln>
-        </p:spPr>
-      </p:sp>
-      <p:sp>
-        <p:nvSpPr>
-          <p:cNvPr id="31" name="Text 29"/>
-          <p:cNvSpPr txBox="1"/>
-          <p:nvPr/>
-        </p:nvSpPr>
-        <p:spPr>
-          <a:xfrm>
-            <a:off x="4550664" y="4389303"/>
-            <a:ext cx="374538" cy="374538"/>
-          </a:xfrm>
-          <a:prstGeom prst="rect">
-            <a:avLst/>
-          </a:prstGeom>
-          <a:noFill/>
-          <a:ln/>
-        </p:spPr>
-        <p:txBody>
-          <a:bodyPr wrap="square" lIns="0" tIns="0" rIns="0" bIns="0" rtlCol="0" anchor="ctr">
-            <a:normAutofit/>
-          </a:bodyPr>
-          <a:lstStyle/>
-          <a:p>
-            <a:pPr algn="ctr" indent="0" marL="0">
-              <a:lnSpc>
-                <a:spcPct val="120000"/>
-              </a:lnSpc>
-              <a:buNone/>
-            </a:pPr>
-            <a:r>
-              <a:rPr lang="en-US" sz="1600" b="1" dirty="0">
-                <a:solidFill>
-                  <a:srgbClr val="F8FAFC"/>
-                </a:solidFill>
-                <a:latin typeface="Pretendard" pitchFamily="34" charset="0"/>
-                <a:ea typeface="Pretendard" pitchFamily="34" charset="-122"/>
-                <a:cs typeface="Pretendard" pitchFamily="34" charset="-120"/>
-              </a:rPr>
-              <a:t>5</a:t>
-            </a:r>
-            <a:endParaRPr lang="en-US" sz="1600" dirty="0"/>
-          </a:p>
-        </p:txBody>
-      </p:sp>
-      <p:sp>
-        <p:nvSpPr>
-          <p:cNvPr id="32" name="Text 30"/>
-          <p:cNvSpPr txBox="1"/>
-          <p:nvPr/>
-        </p:nvSpPr>
-        <p:spPr>
-          <a:xfrm>
-            <a:off x="5071506" y="4119372"/>
-            <a:ext cx="2585070" cy="914400"/>
-          </a:xfrm>
-          <a:prstGeom prst="rect">
-            <a:avLst/>
-          </a:prstGeom>
-          <a:noFill/>
-          <a:ln/>
-        </p:spPr>
-        <p:txBody>
-          <a:bodyPr wrap="square" lIns="0" tIns="25400" rIns="25400" bIns="0" rtlCol="0" anchor="ctr">
-            <a:normAutofit/>
-          </a:bodyPr>
-          <a:lstStyle/>
-          <a:p>
-            <a:pPr algn="l" indent="0" marL="0">
-              <a:lnSpc>
-                <a:spcPct val="92000"/>
-              </a:lnSpc>
-              <a:buNone/>
-            </a:pPr>
-            <a:r>
-              <a:rPr lang="en-US" sz="1600" dirty="0">
-                <a:solidFill>
-                  <a:srgbClr val="111111"/>
-                </a:solidFill>
-                <a:latin typeface="Pretendard" pitchFamily="34" charset="0"/>
-                <a:ea typeface="Pretendard" pitchFamily="34" charset="-122"/>
-                <a:cs typeface="Pretendard" pitchFamily="34" charset="-120"/>
-              </a:rPr>
-              <a:t>Coherence Grouping</a:t>
-            </a:r>
-            <a:endParaRPr lang="en-US" sz="1600" dirty="0"/>
-          </a:p>
-        </p:txBody>
-      </p:sp>
-      <p:sp>
-        <p:nvSpPr>
-          <p:cNvPr id="33" name="Shape 31"/>
+          <p:cNvPr id="8" name="Shape 6"/>
           <p:cNvSpPr/>
           <p:nvPr/>
         </p:nvSpPr>
@@ -23087,6 +22257,836 @@
             </a:outerShdw>
           </a:effectLst>
         </p:spPr>
+      </p:sp>
+      <p:sp>
+        <p:nvSpPr>
+          <p:cNvPr id="9" name="Shape 7"/>
+          <p:cNvSpPr/>
+          <p:nvPr/>
+        </p:nvSpPr>
+        <p:spPr>
+          <a:xfrm>
+            <a:off x="4002024" y="3095244"/>
+            <a:ext cx="457200" cy="0"/>
+          </a:xfrm>
+          <a:prstGeom prst="line">
+            <a:avLst/>
+          </a:prstGeom>
+          <a:noFill/>
+          <a:ln w="12700">
+            <a:solidFill>
+              <a:srgbClr val="2563EB"/>
+            </a:solidFill>
+            <a:prstDash val="solid"/>
+            <a:tailEnd type="triangle"/>
+          </a:ln>
+        </p:spPr>
+      </p:sp>
+      <p:sp>
+        <p:nvSpPr>
+          <p:cNvPr id="10" name="Shape 8"/>
+          <p:cNvSpPr/>
+          <p:nvPr/>
+        </p:nvSpPr>
+        <p:spPr>
+          <a:xfrm>
+            <a:off x="7748016" y="3095244"/>
+            <a:ext cx="457200" cy="0"/>
+          </a:xfrm>
+          <a:prstGeom prst="line">
+            <a:avLst/>
+          </a:prstGeom>
+          <a:noFill/>
+          <a:ln w="12700">
+            <a:solidFill>
+              <a:srgbClr val="2563EB"/>
+            </a:solidFill>
+            <a:prstDash val="solid"/>
+            <a:tailEnd type="triangle"/>
+          </a:ln>
+        </p:spPr>
+      </p:sp>
+      <p:sp>
+        <p:nvSpPr>
+          <p:cNvPr id="11" name="Shape 9"/>
+          <p:cNvSpPr/>
+          <p:nvPr/>
+        </p:nvSpPr>
+        <p:spPr>
+          <a:xfrm>
+            <a:off x="9849612" y="3627791"/>
+            <a:ext cx="0" cy="416235"/>
+          </a:xfrm>
+          <a:prstGeom prst="line">
+            <a:avLst/>
+          </a:prstGeom>
+          <a:noFill/>
+          <a:ln w="12700">
+            <a:solidFill>
+              <a:srgbClr val="2563EB"/>
+            </a:solidFill>
+            <a:prstDash val="solid"/>
+            <a:tailEnd type="triangle"/>
+          </a:ln>
+        </p:spPr>
+      </p:sp>
+      <p:sp>
+        <p:nvSpPr>
+          <p:cNvPr id="12" name="Shape 10"/>
+          <p:cNvSpPr/>
+          <p:nvPr/>
+        </p:nvSpPr>
+        <p:spPr>
+          <a:xfrm>
+            <a:off x="7748016" y="4576572"/>
+            <a:ext cx="457200" cy="0"/>
+          </a:xfrm>
+          <a:prstGeom prst="line">
+            <a:avLst/>
+          </a:prstGeom>
+          <a:noFill/>
+          <a:ln w="12700">
+            <a:solidFill>
+              <a:srgbClr val="2563EB"/>
+            </a:solidFill>
+            <a:prstDash val="solid"/>
+            <a:headEnd type="triangle"/>
+          </a:ln>
+        </p:spPr>
+      </p:sp>
+      <p:sp>
+        <p:nvSpPr>
+          <p:cNvPr id="13" name="Shape 11"/>
+          <p:cNvSpPr/>
+          <p:nvPr/>
+        </p:nvSpPr>
+        <p:spPr>
+          <a:xfrm>
+            <a:off x="4002024" y="4576572"/>
+            <a:ext cx="457200" cy="0"/>
+          </a:xfrm>
+          <a:prstGeom prst="line">
+            <a:avLst/>
+          </a:prstGeom>
+          <a:noFill/>
+          <a:ln w="12700">
+            <a:solidFill>
+              <a:srgbClr val="2563EB"/>
+            </a:solidFill>
+            <a:prstDash val="solid"/>
+            <a:headEnd type="triangle"/>
+          </a:ln>
+        </p:spPr>
+      </p:sp>
+      <p:sp>
+        <p:nvSpPr>
+          <p:cNvPr id="14" name="Shape 12"/>
+          <p:cNvSpPr/>
+          <p:nvPr/>
+        </p:nvSpPr>
+        <p:spPr>
+          <a:xfrm>
+            <a:off x="640080" y="2510028"/>
+            <a:ext cx="3435096" cy="109728"/>
+          </a:xfrm>
+          <a:prstGeom prst="rect">
+            <a:avLst/>
+          </a:prstGeom>
+          <a:solidFill>
+            <a:srgbClr val="2563EB"/>
+          </a:solidFill>
+          <a:ln w="12700">
+            <a:solidFill>
+              <a:srgbClr val="2563EB">
+                <a:alpha val="0"/>
+              </a:srgbClr>
+            </a:solidFill>
+            <a:prstDash val="solid"/>
+          </a:ln>
+        </p:spPr>
+      </p:sp>
+      <p:sp>
+        <p:nvSpPr>
+          <p:cNvPr id="15" name="Shape 13"/>
+          <p:cNvSpPr/>
+          <p:nvPr/>
+        </p:nvSpPr>
+        <p:spPr>
+          <a:xfrm>
+            <a:off x="804672" y="2907975"/>
+            <a:ext cx="374538" cy="374538"/>
+          </a:xfrm>
+          <a:prstGeom prst="ellipse">
+            <a:avLst/>
+          </a:prstGeom>
+          <a:solidFill>
+            <a:srgbClr val="2563EB"/>
+          </a:solidFill>
+          <a:ln w="12700">
+            <a:solidFill>
+              <a:srgbClr val="2563EB">
+                <a:alpha val="0"/>
+              </a:srgbClr>
+            </a:solidFill>
+            <a:prstDash val="solid"/>
+          </a:ln>
+        </p:spPr>
+      </p:sp>
+      <p:sp>
+        <p:nvSpPr>
+          <p:cNvPr id="16" name="Text 14"/>
+          <p:cNvSpPr txBox="1"/>
+          <p:nvPr/>
+        </p:nvSpPr>
+        <p:spPr>
+          <a:xfrm>
+            <a:off x="804672" y="2907975"/>
+            <a:ext cx="374538" cy="374538"/>
+          </a:xfrm>
+          <a:prstGeom prst="rect">
+            <a:avLst/>
+          </a:prstGeom>
+          <a:noFill/>
+          <a:ln/>
+        </p:spPr>
+        <p:txBody>
+          <a:bodyPr wrap="square" lIns="0" tIns="0" rIns="0" bIns="0" rtlCol="0" anchor="ctr">
+            <a:normAutofit/>
+          </a:bodyPr>
+          <a:lstStyle/>
+          <a:p>
+            <a:pPr algn="ctr" indent="0" marL="0">
+              <a:lnSpc>
+                <a:spcPct val="120000"/>
+              </a:lnSpc>
+              <a:buNone/>
+            </a:pPr>
+            <a:r>
+              <a:rPr lang="en-US" sz="1600" b="1" dirty="0">
+                <a:solidFill>
+                  <a:srgbClr val="F8FAFC"/>
+                </a:solidFill>
+                <a:latin typeface="Pretendard" pitchFamily="34" charset="0"/>
+                <a:ea typeface="Pretendard" pitchFamily="34" charset="-122"/>
+                <a:cs typeface="Pretendard" pitchFamily="34" charset="-120"/>
+              </a:rPr>
+              <a:t>1</a:t>
+            </a:r>
+            <a:endParaRPr lang="en-US" sz="1600" dirty="0"/>
+          </a:p>
+        </p:txBody>
+      </p:sp>
+      <p:sp>
+        <p:nvSpPr>
+          <p:cNvPr id="17" name="Text 15"/>
+          <p:cNvSpPr txBox="1"/>
+          <p:nvPr/>
+        </p:nvSpPr>
+        <p:spPr>
+          <a:xfrm>
+            <a:off x="1325514" y="2638044"/>
+            <a:ext cx="2585070" cy="914400"/>
+          </a:xfrm>
+          <a:prstGeom prst="rect">
+            <a:avLst/>
+          </a:prstGeom>
+          <a:noFill/>
+          <a:ln/>
+        </p:spPr>
+        <p:txBody>
+          <a:bodyPr wrap="square" lIns="0" tIns="25400" rIns="25400" bIns="0" rtlCol="0" anchor="ctr">
+            <a:normAutofit/>
+          </a:bodyPr>
+          <a:lstStyle/>
+          <a:p>
+            <a:pPr algn="l" indent="0" marL="0">
+              <a:lnSpc>
+                <a:spcPct val="92000"/>
+              </a:lnSpc>
+              <a:buNone/>
+            </a:pPr>
+            <a:r>
+              <a:rPr lang="en-US" sz="1600" dirty="0">
+                <a:solidFill>
+                  <a:srgbClr val="111111"/>
+                </a:solidFill>
+                <a:latin typeface="Pretendard" pitchFamily="34" charset="0"/>
+                <a:ea typeface="Pretendard" pitchFamily="34" charset="-122"/>
+                <a:cs typeface="Pretendard" pitchFamily="34" charset="-120"/>
+              </a:rPr>
+              <a:t>Markdown</a:t>
+            </a:r>
+            <a:endParaRPr lang="en-US" sz="1600" dirty="0"/>
+          </a:p>
+        </p:txBody>
+      </p:sp>
+      <p:sp>
+        <p:nvSpPr>
+          <p:cNvPr id="18" name="Shape 16"/>
+          <p:cNvSpPr/>
+          <p:nvPr/>
+        </p:nvSpPr>
+        <p:spPr>
+          <a:xfrm>
+            <a:off x="4386072" y="2510028"/>
+            <a:ext cx="3435096" cy="109728"/>
+          </a:xfrm>
+          <a:prstGeom prst="rect">
+            <a:avLst/>
+          </a:prstGeom>
+          <a:solidFill>
+            <a:srgbClr val="2563EB"/>
+          </a:solidFill>
+          <a:ln w="12700">
+            <a:solidFill>
+              <a:srgbClr val="2563EB">
+                <a:alpha val="0"/>
+              </a:srgbClr>
+            </a:solidFill>
+            <a:prstDash val="solid"/>
+          </a:ln>
+        </p:spPr>
+      </p:sp>
+      <p:sp>
+        <p:nvSpPr>
+          <p:cNvPr id="19" name="Shape 17"/>
+          <p:cNvSpPr/>
+          <p:nvPr/>
+        </p:nvSpPr>
+        <p:spPr>
+          <a:xfrm>
+            <a:off x="4550664" y="2907975"/>
+            <a:ext cx="374538" cy="374538"/>
+          </a:xfrm>
+          <a:prstGeom prst="ellipse">
+            <a:avLst/>
+          </a:prstGeom>
+          <a:solidFill>
+            <a:srgbClr val="2563EB"/>
+          </a:solidFill>
+          <a:ln w="12700">
+            <a:solidFill>
+              <a:srgbClr val="2563EB">
+                <a:alpha val="0"/>
+              </a:srgbClr>
+            </a:solidFill>
+            <a:prstDash val="solid"/>
+          </a:ln>
+        </p:spPr>
+      </p:sp>
+      <p:sp>
+        <p:nvSpPr>
+          <p:cNvPr id="20" name="Text 18"/>
+          <p:cNvSpPr txBox="1"/>
+          <p:nvPr/>
+        </p:nvSpPr>
+        <p:spPr>
+          <a:xfrm>
+            <a:off x="4550664" y="2907975"/>
+            <a:ext cx="374538" cy="374538"/>
+          </a:xfrm>
+          <a:prstGeom prst="rect">
+            <a:avLst/>
+          </a:prstGeom>
+          <a:noFill/>
+          <a:ln/>
+        </p:spPr>
+        <p:txBody>
+          <a:bodyPr wrap="square" lIns="0" tIns="0" rIns="0" bIns="0" rtlCol="0" anchor="ctr">
+            <a:normAutofit/>
+          </a:bodyPr>
+          <a:lstStyle/>
+          <a:p>
+            <a:pPr algn="ctr" indent="0" marL="0">
+              <a:lnSpc>
+                <a:spcPct val="120000"/>
+              </a:lnSpc>
+              <a:buNone/>
+            </a:pPr>
+            <a:r>
+              <a:rPr lang="en-US" sz="1600" b="1" dirty="0">
+                <a:solidFill>
+                  <a:srgbClr val="F8FAFC"/>
+                </a:solidFill>
+                <a:latin typeface="Pretendard" pitchFamily="34" charset="0"/>
+                <a:ea typeface="Pretendard" pitchFamily="34" charset="-122"/>
+                <a:cs typeface="Pretendard" pitchFamily="34" charset="-120"/>
+              </a:rPr>
+              <a:t>2</a:t>
+            </a:r>
+            <a:endParaRPr lang="en-US" sz="1600" dirty="0"/>
+          </a:p>
+        </p:txBody>
+      </p:sp>
+      <p:sp>
+        <p:nvSpPr>
+          <p:cNvPr id="21" name="Text 19"/>
+          <p:cNvSpPr txBox="1"/>
+          <p:nvPr/>
+        </p:nvSpPr>
+        <p:spPr>
+          <a:xfrm>
+            <a:off x="5071506" y="2638044"/>
+            <a:ext cx="2585070" cy="914400"/>
+          </a:xfrm>
+          <a:prstGeom prst="rect">
+            <a:avLst/>
+          </a:prstGeom>
+          <a:noFill/>
+          <a:ln/>
+        </p:spPr>
+        <p:txBody>
+          <a:bodyPr wrap="square" lIns="0" tIns="25400" rIns="25400" bIns="0" rtlCol="0" anchor="ctr">
+            <a:normAutofit/>
+          </a:bodyPr>
+          <a:lstStyle/>
+          <a:p>
+            <a:pPr algn="l" indent="0" marL="0">
+              <a:lnSpc>
+                <a:spcPct val="92000"/>
+              </a:lnSpc>
+              <a:buNone/>
+            </a:pPr>
+            <a:r>
+              <a:rPr lang="en-US" sz="1600" dirty="0">
+                <a:solidFill>
+                  <a:srgbClr val="111111"/>
+                </a:solidFill>
+                <a:latin typeface="Pretendard" pitchFamily="34" charset="0"/>
+                <a:ea typeface="Pretendard" pitchFamily="34" charset="-122"/>
+                <a:cs typeface="Pretendard" pitchFamily="34" charset="-120"/>
+              </a:rPr>
+              <a:t>Parser (simple Markdown or Pandoc JSON)</a:t>
+            </a:r>
+            <a:endParaRPr lang="en-US" sz="1600" dirty="0"/>
+          </a:p>
+        </p:txBody>
+      </p:sp>
+      <p:sp>
+        <p:nvSpPr>
+          <p:cNvPr id="22" name="Shape 20"/>
+          <p:cNvSpPr/>
+          <p:nvPr/>
+        </p:nvSpPr>
+        <p:spPr>
+          <a:xfrm>
+            <a:off x="8132064" y="2510028"/>
+            <a:ext cx="3435096" cy="109728"/>
+          </a:xfrm>
+          <a:prstGeom prst="rect">
+            <a:avLst/>
+          </a:prstGeom>
+          <a:solidFill>
+            <a:srgbClr val="2563EB"/>
+          </a:solidFill>
+          <a:ln w="12700">
+            <a:solidFill>
+              <a:srgbClr val="2563EB">
+                <a:alpha val="0"/>
+              </a:srgbClr>
+            </a:solidFill>
+            <a:prstDash val="solid"/>
+          </a:ln>
+        </p:spPr>
+      </p:sp>
+      <p:sp>
+        <p:nvSpPr>
+          <p:cNvPr id="23" name="Shape 21"/>
+          <p:cNvSpPr/>
+          <p:nvPr/>
+        </p:nvSpPr>
+        <p:spPr>
+          <a:xfrm>
+            <a:off x="8296656" y="2907975"/>
+            <a:ext cx="374538" cy="374538"/>
+          </a:xfrm>
+          <a:prstGeom prst="ellipse">
+            <a:avLst/>
+          </a:prstGeom>
+          <a:solidFill>
+            <a:srgbClr val="2563EB"/>
+          </a:solidFill>
+          <a:ln w="12700">
+            <a:solidFill>
+              <a:srgbClr val="2563EB">
+                <a:alpha val="0"/>
+              </a:srgbClr>
+            </a:solidFill>
+            <a:prstDash val="solid"/>
+          </a:ln>
+        </p:spPr>
+      </p:sp>
+      <p:sp>
+        <p:nvSpPr>
+          <p:cNvPr id="24" name="Text 22"/>
+          <p:cNvSpPr txBox="1"/>
+          <p:nvPr/>
+        </p:nvSpPr>
+        <p:spPr>
+          <a:xfrm>
+            <a:off x="8296656" y="2907975"/>
+            <a:ext cx="374538" cy="374538"/>
+          </a:xfrm>
+          <a:prstGeom prst="rect">
+            <a:avLst/>
+          </a:prstGeom>
+          <a:noFill/>
+          <a:ln/>
+        </p:spPr>
+        <p:txBody>
+          <a:bodyPr wrap="square" lIns="0" tIns="0" rIns="0" bIns="0" rtlCol="0" anchor="ctr">
+            <a:normAutofit/>
+          </a:bodyPr>
+          <a:lstStyle/>
+          <a:p>
+            <a:pPr algn="ctr" indent="0" marL="0">
+              <a:lnSpc>
+                <a:spcPct val="120000"/>
+              </a:lnSpc>
+              <a:buNone/>
+            </a:pPr>
+            <a:r>
+              <a:rPr lang="en-US" sz="1600" b="1" dirty="0">
+                <a:solidFill>
+                  <a:srgbClr val="F8FAFC"/>
+                </a:solidFill>
+                <a:latin typeface="Pretendard" pitchFamily="34" charset="0"/>
+                <a:ea typeface="Pretendard" pitchFamily="34" charset="-122"/>
+                <a:cs typeface="Pretendard" pitchFamily="34" charset="-120"/>
+              </a:rPr>
+              <a:t>3</a:t>
+            </a:r>
+            <a:endParaRPr lang="en-US" sz="1600" dirty="0"/>
+          </a:p>
+        </p:txBody>
+      </p:sp>
+      <p:sp>
+        <p:nvSpPr>
+          <p:cNvPr id="25" name="Text 23"/>
+          <p:cNvSpPr txBox="1"/>
+          <p:nvPr/>
+        </p:nvSpPr>
+        <p:spPr>
+          <a:xfrm>
+            <a:off x="8817498" y="2638044"/>
+            <a:ext cx="2585070" cy="914400"/>
+          </a:xfrm>
+          <a:prstGeom prst="rect">
+            <a:avLst/>
+          </a:prstGeom>
+          <a:noFill/>
+          <a:ln/>
+        </p:spPr>
+        <p:txBody>
+          <a:bodyPr wrap="square" lIns="0" tIns="25400" rIns="25400" bIns="0" rtlCol="0" anchor="ctr">
+            <a:normAutofit/>
+          </a:bodyPr>
+          <a:lstStyle/>
+          <a:p>
+            <a:pPr algn="l" indent="0" marL="0">
+              <a:lnSpc>
+                <a:spcPct val="92000"/>
+              </a:lnSpc>
+              <a:buNone/>
+            </a:pPr>
+            <a:r>
+              <a:rPr lang="en-US" sz="1600" dirty="0">
+                <a:solidFill>
+                  <a:srgbClr val="111111"/>
+                </a:solidFill>
+                <a:latin typeface="Pretendard" pitchFamily="34" charset="0"/>
+                <a:ea typeface="Pretendard" pitchFamily="34" charset="-122"/>
+                <a:cs typeface="Pretendard" pitchFamily="34" charset="-120"/>
+              </a:rPr>
+              <a:t>Outline Builder</a:t>
+            </a:r>
+            <a:endParaRPr lang="en-US" sz="1600" dirty="0"/>
+          </a:p>
+        </p:txBody>
+      </p:sp>
+      <p:sp>
+        <p:nvSpPr>
+          <p:cNvPr id="26" name="Shape 24"/>
+          <p:cNvSpPr/>
+          <p:nvPr/>
+        </p:nvSpPr>
+        <p:spPr>
+          <a:xfrm>
+            <a:off x="8132064" y="3991356"/>
+            <a:ext cx="3435096" cy="109728"/>
+          </a:xfrm>
+          <a:prstGeom prst="rect">
+            <a:avLst/>
+          </a:prstGeom>
+          <a:solidFill>
+            <a:srgbClr val="2563EB"/>
+          </a:solidFill>
+          <a:ln w="12700">
+            <a:solidFill>
+              <a:srgbClr val="2563EB">
+                <a:alpha val="0"/>
+              </a:srgbClr>
+            </a:solidFill>
+            <a:prstDash val="solid"/>
+          </a:ln>
+        </p:spPr>
+      </p:sp>
+      <p:sp>
+        <p:nvSpPr>
+          <p:cNvPr id="27" name="Shape 25"/>
+          <p:cNvSpPr/>
+          <p:nvPr/>
+        </p:nvSpPr>
+        <p:spPr>
+          <a:xfrm>
+            <a:off x="8296656" y="4389303"/>
+            <a:ext cx="374538" cy="374538"/>
+          </a:xfrm>
+          <a:prstGeom prst="ellipse">
+            <a:avLst/>
+          </a:prstGeom>
+          <a:solidFill>
+            <a:srgbClr val="2563EB"/>
+          </a:solidFill>
+          <a:ln w="12700">
+            <a:solidFill>
+              <a:srgbClr val="2563EB">
+                <a:alpha val="0"/>
+              </a:srgbClr>
+            </a:solidFill>
+            <a:prstDash val="solid"/>
+          </a:ln>
+        </p:spPr>
+      </p:sp>
+      <p:sp>
+        <p:nvSpPr>
+          <p:cNvPr id="28" name="Text 26"/>
+          <p:cNvSpPr txBox="1"/>
+          <p:nvPr/>
+        </p:nvSpPr>
+        <p:spPr>
+          <a:xfrm>
+            <a:off x="8296656" y="4389303"/>
+            <a:ext cx="374538" cy="374538"/>
+          </a:xfrm>
+          <a:prstGeom prst="rect">
+            <a:avLst/>
+          </a:prstGeom>
+          <a:noFill/>
+          <a:ln/>
+        </p:spPr>
+        <p:txBody>
+          <a:bodyPr wrap="square" lIns="0" tIns="0" rIns="0" bIns="0" rtlCol="0" anchor="ctr">
+            <a:normAutofit/>
+          </a:bodyPr>
+          <a:lstStyle/>
+          <a:p>
+            <a:pPr algn="ctr" indent="0" marL="0">
+              <a:lnSpc>
+                <a:spcPct val="120000"/>
+              </a:lnSpc>
+              <a:buNone/>
+            </a:pPr>
+            <a:r>
+              <a:rPr lang="en-US" sz="1600" b="1" dirty="0">
+                <a:solidFill>
+                  <a:srgbClr val="F8FAFC"/>
+                </a:solidFill>
+                <a:latin typeface="Pretendard" pitchFamily="34" charset="0"/>
+                <a:ea typeface="Pretendard" pitchFamily="34" charset="-122"/>
+                <a:cs typeface="Pretendard" pitchFamily="34" charset="-120"/>
+              </a:rPr>
+              <a:t>4</a:t>
+            </a:r>
+            <a:endParaRPr lang="en-US" sz="1600" dirty="0"/>
+          </a:p>
+        </p:txBody>
+      </p:sp>
+      <p:sp>
+        <p:nvSpPr>
+          <p:cNvPr id="29" name="Text 27"/>
+          <p:cNvSpPr txBox="1"/>
+          <p:nvPr/>
+        </p:nvSpPr>
+        <p:spPr>
+          <a:xfrm>
+            <a:off x="8817498" y="4119372"/>
+            <a:ext cx="2585070" cy="914400"/>
+          </a:xfrm>
+          <a:prstGeom prst="rect">
+            <a:avLst/>
+          </a:prstGeom>
+          <a:noFill/>
+          <a:ln/>
+        </p:spPr>
+        <p:txBody>
+          <a:bodyPr wrap="square" lIns="0" tIns="25400" rIns="25400" bIns="0" rtlCol="0" anchor="ctr">
+            <a:normAutofit/>
+          </a:bodyPr>
+          <a:lstStyle/>
+          <a:p>
+            <a:pPr algn="l" indent="0" marL="0">
+              <a:lnSpc>
+                <a:spcPct val="92000"/>
+              </a:lnSpc>
+              <a:buNone/>
+            </a:pPr>
+            <a:r>
+              <a:rPr lang="en-US" sz="1600" dirty="0">
+                <a:solidFill>
+                  <a:srgbClr val="111111"/>
+                </a:solidFill>
+                <a:latin typeface="Pretendard" pitchFamily="34" charset="0"/>
+                <a:ea typeface="Pretendard" pitchFamily="34" charset="-122"/>
+                <a:cs typeface="Pretendard" pitchFamily="34" charset="-120"/>
+              </a:rPr>
+              <a:t>Split Planner</a:t>
+            </a:r>
+            <a:endParaRPr lang="en-US" sz="1600" dirty="0"/>
+          </a:p>
+        </p:txBody>
+      </p:sp>
+      <p:sp>
+        <p:nvSpPr>
+          <p:cNvPr id="30" name="Shape 28"/>
+          <p:cNvSpPr/>
+          <p:nvPr/>
+        </p:nvSpPr>
+        <p:spPr>
+          <a:xfrm>
+            <a:off x="4386072" y="3991356"/>
+            <a:ext cx="3435096" cy="109728"/>
+          </a:xfrm>
+          <a:prstGeom prst="rect">
+            <a:avLst/>
+          </a:prstGeom>
+          <a:solidFill>
+            <a:srgbClr val="2563EB"/>
+          </a:solidFill>
+          <a:ln w="12700">
+            <a:solidFill>
+              <a:srgbClr val="2563EB">
+                <a:alpha val="0"/>
+              </a:srgbClr>
+            </a:solidFill>
+            <a:prstDash val="solid"/>
+          </a:ln>
+        </p:spPr>
+      </p:sp>
+      <p:sp>
+        <p:nvSpPr>
+          <p:cNvPr id="31" name="Shape 29"/>
+          <p:cNvSpPr/>
+          <p:nvPr/>
+        </p:nvSpPr>
+        <p:spPr>
+          <a:xfrm>
+            <a:off x="4550664" y="4389303"/>
+            <a:ext cx="374538" cy="374538"/>
+          </a:xfrm>
+          <a:prstGeom prst="ellipse">
+            <a:avLst/>
+          </a:prstGeom>
+          <a:solidFill>
+            <a:srgbClr val="2563EB"/>
+          </a:solidFill>
+          <a:ln w="12700">
+            <a:solidFill>
+              <a:srgbClr val="2563EB">
+                <a:alpha val="0"/>
+              </a:srgbClr>
+            </a:solidFill>
+            <a:prstDash val="solid"/>
+          </a:ln>
+        </p:spPr>
+      </p:sp>
+      <p:sp>
+        <p:nvSpPr>
+          <p:cNvPr id="32" name="Text 30"/>
+          <p:cNvSpPr txBox="1"/>
+          <p:nvPr/>
+        </p:nvSpPr>
+        <p:spPr>
+          <a:xfrm>
+            <a:off x="4550664" y="4389303"/>
+            <a:ext cx="374538" cy="374538"/>
+          </a:xfrm>
+          <a:prstGeom prst="rect">
+            <a:avLst/>
+          </a:prstGeom>
+          <a:noFill/>
+          <a:ln/>
+        </p:spPr>
+        <p:txBody>
+          <a:bodyPr wrap="square" lIns="0" tIns="0" rIns="0" bIns="0" rtlCol="0" anchor="ctr">
+            <a:normAutofit/>
+          </a:bodyPr>
+          <a:lstStyle/>
+          <a:p>
+            <a:pPr algn="ctr" indent="0" marL="0">
+              <a:lnSpc>
+                <a:spcPct val="120000"/>
+              </a:lnSpc>
+              <a:buNone/>
+            </a:pPr>
+            <a:r>
+              <a:rPr lang="en-US" sz="1600" b="1" dirty="0">
+                <a:solidFill>
+                  <a:srgbClr val="F8FAFC"/>
+                </a:solidFill>
+                <a:latin typeface="Pretendard" pitchFamily="34" charset="0"/>
+                <a:ea typeface="Pretendard" pitchFamily="34" charset="-122"/>
+                <a:cs typeface="Pretendard" pitchFamily="34" charset="-120"/>
+              </a:rPr>
+              <a:t>5</a:t>
+            </a:r>
+            <a:endParaRPr lang="en-US" sz="1600" dirty="0"/>
+          </a:p>
+        </p:txBody>
+      </p:sp>
+      <p:sp>
+        <p:nvSpPr>
+          <p:cNvPr id="33" name="Text 31"/>
+          <p:cNvSpPr txBox="1"/>
+          <p:nvPr/>
+        </p:nvSpPr>
+        <p:spPr>
+          <a:xfrm>
+            <a:off x="5071506" y="4119372"/>
+            <a:ext cx="2585070" cy="914400"/>
+          </a:xfrm>
+          <a:prstGeom prst="rect">
+            <a:avLst/>
+          </a:prstGeom>
+          <a:noFill/>
+          <a:ln/>
+        </p:spPr>
+        <p:txBody>
+          <a:bodyPr wrap="square" lIns="0" tIns="25400" rIns="25400" bIns="0" rtlCol="0" anchor="ctr">
+            <a:normAutofit/>
+          </a:bodyPr>
+          <a:lstStyle/>
+          <a:p>
+            <a:pPr algn="l" indent="0" marL="0">
+              <a:lnSpc>
+                <a:spcPct val="92000"/>
+              </a:lnSpc>
+              <a:buNone/>
+            </a:pPr>
+            <a:r>
+              <a:rPr lang="en-US" sz="1600" dirty="0">
+                <a:solidFill>
+                  <a:srgbClr val="111111"/>
+                </a:solidFill>
+                <a:latin typeface="Pretendard" pitchFamily="34" charset="0"/>
+                <a:ea typeface="Pretendard" pitchFamily="34" charset="-122"/>
+                <a:cs typeface="Pretendard" pitchFamily="34" charset="-120"/>
+              </a:rPr>
+              <a:t>Coherence Grouping</a:t>
+            </a:r>
+            <a:endParaRPr lang="en-US" sz="1600" dirty="0"/>
+          </a:p>
+        </p:txBody>
       </p:sp>
       <p:sp>
         <p:nvSpPr>

--- a/artifacts/mdpr-vs-skill/mdpr-baseline-result.pptx
+++ b/artifacts/mdpr-vs-skill/mdpr-baseline-result.pptx
@@ -37,12 +37,9 @@
     <p:sldId id="285" r:id="rId31"/>
     <p:sldId id="286" r:id="rId32"/>
     <p:sldId id="287" r:id="rId33"/>
-    <p:sldId id="288" r:id="rId34"/>
-    <p:sldId id="289" r:id="rId35"/>
-    <p:sldId id="290" r:id="rId36"/>
   </p:sldIdLst>
   <p:notesMasterIdLst>
-    <p:notesMasterId r:id="rId37"/>
+    <p:notesMasterId r:id="rId34"/>
   </p:notesMasterIdLst>
   <p:sldSz cx="12191695" cy="6858000"/>
   <p:notesSz cx="6858000" cy="12191695"/>
@@ -2760,270 +2757,6 @@
             <a:fld id="{F7021451-1387-4CA6-816F-3879F97B5CBC}" type="slidenum">
               <a:rPr lang="en-US"/>
               <a:t>32</a:t>
-            </a:fld>
-            <a:endParaRPr lang="en-US"/>
-          </a:p>
-        </p:txBody>
-      </p:sp>
-    </p:spTree>
-    <p:extLst>
-      <p:ext uri="{BB962C8B-B14F-4D97-AF65-F5344CB8AC3E}">
-        <p14:creationId xmlns:p14="http://schemas.microsoft.com/office/powerpoint/2010/main" val="1024086991"/>
-      </p:ext>
-    </p:extLst>
-  </p:cSld>
-  <p:clrMapOvr>
-    <a:masterClrMapping/>
-  </p:clrMapOvr>
-</p:notes>
-</file>
-
-<file path=ppt/notesSlides/notesSlide33.xml><?xml version="1.0" encoding="utf-8"?>
-<p:notes xmlns:a="http://schemas.openxmlformats.org/drawingml/2006/main" xmlns:r="http://schemas.openxmlformats.org/officeDocument/2006/relationships" xmlns:p="http://schemas.openxmlformats.org/presentationml/2006/main">
-  <p:cSld>
-    <p:spTree>
-      <p:nvGrpSpPr>
-        <p:cNvPr id="1" name=""/>
-        <p:cNvGrpSpPr/>
-        <p:nvPr/>
-      </p:nvGrpSpPr>
-      <p:grpSpPr>
-        <a:xfrm>
-          <a:off x="0" y="0"/>
-          <a:ext cx="0" cy="0"/>
-          <a:chOff x="0" y="0"/>
-          <a:chExt cx="0" cy="0"/>
-        </a:xfrm>
-      </p:grpSpPr>
-      <p:sp>
-        <p:nvSpPr>
-          <p:cNvPr id="2" name="Slide Image Placeholder 1"/>
-          <p:cNvSpPr>
-            <a:spLocks noGrp="1" noRot="1" noChangeAspect="1"/>
-          </p:cNvSpPr>
-          <p:nvPr>
-            <p:ph type="sldImg"/>
-          </p:nvPr>
-        </p:nvSpPr>
-        <p:spPr/>
-      </p:sp>
-      <p:sp>
-        <p:nvSpPr>
-          <p:cNvPr id="3" name="Notes Placeholder 2"/>
-          <p:cNvSpPr>
-            <a:spLocks noGrp="1"/>
-          </p:cNvSpPr>
-          <p:nvPr>
-            <p:ph type="body" idx="1"/>
-          </p:nvPr>
-        </p:nvSpPr>
-        <p:spPr/>
-        <p:txBody>
-          <a:bodyPr/>
-          <a:lstStyle/>
-          <a:p>
-            <a:r>
-              <a:rPr lang="en-US" dirty="0"/>
-              <a:t/>
-            </a:r>
-            <a:endParaRPr lang="en-US" dirty="0"/>
-          </a:p>
-        </p:txBody>
-      </p:sp>
-      <p:sp>
-        <p:nvSpPr>
-          <p:cNvPr id="4" name="Slide Number Placeholder 3"/>
-          <p:cNvSpPr>
-            <a:spLocks noGrp="1"/>
-          </p:cNvSpPr>
-          <p:nvPr>
-            <p:ph type="sldNum" sz="quarter" idx="10"/>
-          </p:nvPr>
-        </p:nvSpPr>
-        <p:spPr/>
-        <p:txBody>
-          <a:bodyPr/>
-          <a:lstStyle/>
-          <a:p>
-            <a:fld id="{F7021451-1387-4CA6-816F-3879F97B5CBC}" type="slidenum">
-              <a:rPr lang="en-US"/>
-              <a:t>33</a:t>
-            </a:fld>
-            <a:endParaRPr lang="en-US"/>
-          </a:p>
-        </p:txBody>
-      </p:sp>
-    </p:spTree>
-    <p:extLst>
-      <p:ext uri="{BB962C8B-B14F-4D97-AF65-F5344CB8AC3E}">
-        <p14:creationId xmlns:p14="http://schemas.microsoft.com/office/powerpoint/2010/main" val="1024086991"/>
-      </p:ext>
-    </p:extLst>
-  </p:cSld>
-  <p:clrMapOvr>
-    <a:masterClrMapping/>
-  </p:clrMapOvr>
-</p:notes>
-</file>
-
-<file path=ppt/notesSlides/notesSlide34.xml><?xml version="1.0" encoding="utf-8"?>
-<p:notes xmlns:a="http://schemas.openxmlformats.org/drawingml/2006/main" xmlns:r="http://schemas.openxmlformats.org/officeDocument/2006/relationships" xmlns:p="http://schemas.openxmlformats.org/presentationml/2006/main">
-  <p:cSld>
-    <p:spTree>
-      <p:nvGrpSpPr>
-        <p:cNvPr id="1" name=""/>
-        <p:cNvGrpSpPr/>
-        <p:nvPr/>
-      </p:nvGrpSpPr>
-      <p:grpSpPr>
-        <a:xfrm>
-          <a:off x="0" y="0"/>
-          <a:ext cx="0" cy="0"/>
-          <a:chOff x="0" y="0"/>
-          <a:chExt cx="0" cy="0"/>
-        </a:xfrm>
-      </p:grpSpPr>
-      <p:sp>
-        <p:nvSpPr>
-          <p:cNvPr id="2" name="Slide Image Placeholder 1"/>
-          <p:cNvSpPr>
-            <a:spLocks noGrp="1" noRot="1" noChangeAspect="1"/>
-          </p:cNvSpPr>
-          <p:nvPr>
-            <p:ph type="sldImg"/>
-          </p:nvPr>
-        </p:nvSpPr>
-        <p:spPr/>
-      </p:sp>
-      <p:sp>
-        <p:nvSpPr>
-          <p:cNvPr id="3" name="Notes Placeholder 2"/>
-          <p:cNvSpPr>
-            <a:spLocks noGrp="1"/>
-          </p:cNvSpPr>
-          <p:nvPr>
-            <p:ph type="body" idx="1"/>
-          </p:nvPr>
-        </p:nvSpPr>
-        <p:spPr/>
-        <p:txBody>
-          <a:bodyPr/>
-          <a:lstStyle/>
-          <a:p>
-            <a:r>
-              <a:rPr lang="en-US" dirty="0"/>
-              <a:t/>
-            </a:r>
-            <a:endParaRPr lang="en-US" dirty="0"/>
-          </a:p>
-        </p:txBody>
-      </p:sp>
-      <p:sp>
-        <p:nvSpPr>
-          <p:cNvPr id="4" name="Slide Number Placeholder 3"/>
-          <p:cNvSpPr>
-            <a:spLocks noGrp="1"/>
-          </p:cNvSpPr>
-          <p:nvPr>
-            <p:ph type="sldNum" sz="quarter" idx="10"/>
-          </p:nvPr>
-        </p:nvSpPr>
-        <p:spPr/>
-        <p:txBody>
-          <a:bodyPr/>
-          <a:lstStyle/>
-          <a:p>
-            <a:fld id="{F7021451-1387-4CA6-816F-3879F97B5CBC}" type="slidenum">
-              <a:rPr lang="en-US"/>
-              <a:t>34</a:t>
-            </a:fld>
-            <a:endParaRPr lang="en-US"/>
-          </a:p>
-        </p:txBody>
-      </p:sp>
-    </p:spTree>
-    <p:extLst>
-      <p:ext uri="{BB962C8B-B14F-4D97-AF65-F5344CB8AC3E}">
-        <p14:creationId xmlns:p14="http://schemas.microsoft.com/office/powerpoint/2010/main" val="1024086991"/>
-      </p:ext>
-    </p:extLst>
-  </p:cSld>
-  <p:clrMapOvr>
-    <a:masterClrMapping/>
-  </p:clrMapOvr>
-</p:notes>
-</file>
-
-<file path=ppt/notesSlides/notesSlide35.xml><?xml version="1.0" encoding="utf-8"?>
-<p:notes xmlns:a="http://schemas.openxmlformats.org/drawingml/2006/main" xmlns:r="http://schemas.openxmlformats.org/officeDocument/2006/relationships" xmlns:p="http://schemas.openxmlformats.org/presentationml/2006/main">
-  <p:cSld>
-    <p:spTree>
-      <p:nvGrpSpPr>
-        <p:cNvPr id="1" name=""/>
-        <p:cNvGrpSpPr/>
-        <p:nvPr/>
-      </p:nvGrpSpPr>
-      <p:grpSpPr>
-        <a:xfrm>
-          <a:off x="0" y="0"/>
-          <a:ext cx="0" cy="0"/>
-          <a:chOff x="0" y="0"/>
-          <a:chExt cx="0" cy="0"/>
-        </a:xfrm>
-      </p:grpSpPr>
-      <p:sp>
-        <p:nvSpPr>
-          <p:cNvPr id="2" name="Slide Image Placeholder 1"/>
-          <p:cNvSpPr>
-            <a:spLocks noGrp="1" noRot="1" noChangeAspect="1"/>
-          </p:cNvSpPr>
-          <p:nvPr>
-            <p:ph type="sldImg"/>
-          </p:nvPr>
-        </p:nvSpPr>
-        <p:spPr/>
-      </p:sp>
-      <p:sp>
-        <p:nvSpPr>
-          <p:cNvPr id="3" name="Notes Placeholder 2"/>
-          <p:cNvSpPr>
-            <a:spLocks noGrp="1"/>
-          </p:cNvSpPr>
-          <p:nvPr>
-            <p:ph type="body" idx="1"/>
-          </p:nvPr>
-        </p:nvSpPr>
-        <p:spPr/>
-        <p:txBody>
-          <a:bodyPr/>
-          <a:lstStyle/>
-          <a:p>
-            <a:r>
-              <a:rPr lang="en-US" dirty="0"/>
-              <a:t/>
-            </a:r>
-            <a:endParaRPr lang="en-US" dirty="0"/>
-          </a:p>
-        </p:txBody>
-      </p:sp>
-      <p:sp>
-        <p:nvSpPr>
-          <p:cNvPr id="4" name="Slide Number Placeholder 3"/>
-          <p:cNvSpPr>
-            <a:spLocks noGrp="1"/>
-          </p:cNvSpPr>
-          <p:nvPr>
-            <p:ph type="sldNum" sz="quarter" idx="10"/>
-          </p:nvPr>
-        </p:nvSpPr>
-        <p:spPr/>
-        <p:txBody>
-          <a:bodyPr/>
-          <a:lstStyle/>
-          <a:p>
-            <a:fld id="{F7021451-1387-4CA6-816F-3879F97B5CBC}" type="slidenum">
-              <a:rPr lang="en-US"/>
-              <a:t>35</a:t>
             </a:fld>
             <a:endParaRPr lang="en-US"/>
           </a:p>
@@ -10030,8 +9763,8 @@
         </p:blipFill>
         <p:spPr>
           <a:xfrm>
-            <a:off x="822960" y="1463040"/>
-            <a:ext cx="5029200" cy="1920240"/>
+            <a:off x="914400" y="1417320"/>
+            <a:ext cx="10241280" cy="4526280"/>
           </a:xfrm>
           <a:prstGeom prst="rect">
             <a:avLst/>
@@ -10046,8 +9779,8 @@
         </p:nvSpPr>
         <p:spPr>
           <a:xfrm>
-            <a:off x="822960" y="1463040"/>
-            <a:ext cx="5029200" cy="1920240"/>
+            <a:off x="914400" y="1417320"/>
+            <a:ext cx="10241280" cy="4526280"/>
           </a:xfrm>
           <a:prstGeom prst="rect">
             <a:avLst/>
@@ -10074,315 +9807,9 @@
           </a:effectLst>
         </p:spPr>
       </p:sp>
-      <p:pic>
-        <p:nvPicPr>
-          <p:cNvPr id="4" name="Image 1" descr="preencoded.png">    </p:cNvPr>
-          <p:cNvPicPr>
-            <a:picLocks noChangeAspect="1"/>
-          </p:cNvPicPr>
-          <p:nvPr/>
-        </p:nvPicPr>
-        <p:blipFill>
-          <a:blip r:embed="rId3">
-            <a:extLst>
-              <a:ext uri="{96DAC541-7B7A-43D3-8B79-37D633B846F1}">
-                <asvg:svgBlip xmlns:asvg="http://schemas.microsoft.com/office/drawing/2016/SVG/main" r:embed="rId4"/>
-              </a:ext>
-            </a:extLst>
-          </a:blip>
-          <a:stretch>
-            <a:fillRect/>
-          </a:stretch>
-        </p:blipFill>
-        <p:spPr>
-          <a:xfrm>
-            <a:off x="6309360" y="1463040"/>
-            <a:ext cx="5029200" cy="1920240"/>
-          </a:xfrm>
-          <a:prstGeom prst="rect">
-            <a:avLst/>
-          </a:prstGeom>
-        </p:spPr>
-      </p:pic>
-      <p:sp>
-        <p:nvSpPr>
-          <p:cNvPr id="5" name="Shape 1"/>
-          <p:cNvSpPr/>
-          <p:nvPr/>
-        </p:nvSpPr>
-        <p:spPr>
-          <a:xfrm>
-            <a:off x="6309360" y="1463040"/>
-            <a:ext cx="5029200" cy="1920240"/>
-          </a:xfrm>
-          <a:prstGeom prst="rect">
-            <a:avLst/>
-          </a:prstGeom>
-          <a:solidFill>
-            <a:srgbClr val="FFFFFF">
-              <a:alpha val="0"/>
-            </a:srgbClr>
-          </a:solidFill>
-          <a:ln w="12700">
-            <a:solidFill>
-              <a:srgbClr val="E2E8F0">
-                <a:alpha val="0"/>
-              </a:srgbClr>
-            </a:solidFill>
-            <a:prstDash val="solid"/>
-          </a:ln>
-          <a:effectLst>
-            <a:outerShdw sx="100000" sy="100000" kx="0" ky="0" algn="bl" rotWithShape="0" blurRad="12700" dist="50800" dir="2700000">
-              <a:srgbClr val="000000">
-                <a:alpha val="8000"/>
-              </a:srgbClr>
-            </a:outerShdw>
-          </a:effectLst>
-        </p:spPr>
-      </p:sp>
-      <p:pic>
-        <p:nvPicPr>
-          <p:cNvPr id="6" name="Image 2" descr="preencoded.png">    </p:cNvPr>
-          <p:cNvPicPr>
-            <a:picLocks noChangeAspect="1"/>
-          </p:cNvPicPr>
-          <p:nvPr/>
-        </p:nvPicPr>
-        <p:blipFill>
-          <a:blip r:embed="rId5">
-            <a:extLst>
-              <a:ext uri="{96DAC541-7B7A-43D3-8B79-37D633B846F1}">
-                <asvg:svgBlip xmlns:asvg="http://schemas.microsoft.com/office/drawing/2016/SVG/main" r:embed="rId6"/>
-              </a:ext>
-            </a:extLst>
-          </a:blip>
-          <a:stretch>
-            <a:fillRect/>
-          </a:stretch>
-        </p:blipFill>
-        <p:spPr>
-          <a:xfrm>
-            <a:off x="822960" y="3749040"/>
-            <a:ext cx="5029200" cy="1920240"/>
-          </a:xfrm>
-          <a:prstGeom prst="rect">
-            <a:avLst/>
-          </a:prstGeom>
-        </p:spPr>
-      </p:pic>
-      <p:sp>
-        <p:nvSpPr>
-          <p:cNvPr id="7" name="Shape 2"/>
-          <p:cNvSpPr/>
-          <p:nvPr/>
-        </p:nvSpPr>
-        <p:spPr>
-          <a:xfrm>
-            <a:off x="822960" y="3749040"/>
-            <a:ext cx="5029200" cy="1920240"/>
-          </a:xfrm>
-          <a:prstGeom prst="rect">
-            <a:avLst/>
-          </a:prstGeom>
-          <a:solidFill>
-            <a:srgbClr val="FFFFFF">
-              <a:alpha val="0"/>
-            </a:srgbClr>
-          </a:solidFill>
-          <a:ln w="12700">
-            <a:solidFill>
-              <a:srgbClr val="E2E8F0">
-                <a:alpha val="0"/>
-              </a:srgbClr>
-            </a:solidFill>
-            <a:prstDash val="solid"/>
-          </a:ln>
-          <a:effectLst>
-            <a:outerShdw sx="100000" sy="100000" kx="0" ky="0" algn="bl" rotWithShape="0" blurRad="12700" dist="50800" dir="2700000">
-              <a:srgbClr val="000000">
-                <a:alpha val="8000"/>
-              </a:srgbClr>
-            </a:outerShdw>
-          </a:effectLst>
-        </p:spPr>
-      </p:sp>
-      <p:pic>
-        <p:nvPicPr>
-          <p:cNvPr id="8" name="Image 3" descr="preencoded.png">    </p:cNvPr>
-          <p:cNvPicPr>
-            <a:picLocks noChangeAspect="1"/>
-          </p:cNvPicPr>
-          <p:nvPr/>
-        </p:nvPicPr>
-        <p:blipFill>
-          <a:blip r:embed="rId7">
-            <a:extLst>
-              <a:ext uri="{96DAC541-7B7A-43D3-8B79-37D633B846F1}">
-                <asvg:svgBlip xmlns:asvg="http://schemas.microsoft.com/office/drawing/2016/SVG/main" r:embed="rId8"/>
-              </a:ext>
-            </a:extLst>
-          </a:blip>
-          <a:stretch>
-            <a:fillRect/>
-          </a:stretch>
-        </p:blipFill>
-        <p:spPr>
-          <a:xfrm>
-            <a:off x="6309360" y="3749040"/>
-            <a:ext cx="5029200" cy="1920240"/>
-          </a:xfrm>
-          <a:prstGeom prst="rect">
-            <a:avLst/>
-          </a:prstGeom>
-        </p:spPr>
-      </p:pic>
-      <p:sp>
-        <p:nvSpPr>
-          <p:cNvPr id="9" name="Shape 3"/>
-          <p:cNvSpPr/>
-          <p:nvPr/>
-        </p:nvSpPr>
-        <p:spPr>
-          <a:xfrm>
-            <a:off x="6309360" y="3749040"/>
-            <a:ext cx="5029200" cy="1920240"/>
-          </a:xfrm>
-          <a:prstGeom prst="rect">
-            <a:avLst/>
-          </a:prstGeom>
-          <a:solidFill>
-            <a:srgbClr val="FFFFFF">
-              <a:alpha val="0"/>
-            </a:srgbClr>
-          </a:solidFill>
-          <a:ln w="12700">
-            <a:solidFill>
-              <a:srgbClr val="E2E8F0">
-                <a:alpha val="0"/>
-              </a:srgbClr>
-            </a:solidFill>
-            <a:prstDash val="solid"/>
-          </a:ln>
-          <a:effectLst>
-            <a:outerShdw sx="100000" sy="100000" kx="0" ky="0" algn="bl" rotWithShape="0" blurRad="12700" dist="50800" dir="2700000">
-              <a:srgbClr val="000000">
-                <a:alpha val="8000"/>
-              </a:srgbClr>
-            </a:outerShdw>
-          </a:effectLst>
-        </p:spPr>
-      </p:sp>
-      <p:sp>
-        <p:nvSpPr>
-          <p:cNvPr id="10" name="Shape 4"/>
-          <p:cNvSpPr/>
-          <p:nvPr/>
-        </p:nvSpPr>
-        <p:spPr>
-          <a:xfrm>
-            <a:off x="822960" y="1463040"/>
-            <a:ext cx="73152" cy="1920240"/>
-          </a:xfrm>
-          <a:prstGeom prst="rect">
-            <a:avLst/>
-          </a:prstGeom>
-          <a:solidFill>
-            <a:srgbClr val="2563EB"/>
-          </a:solidFill>
-          <a:ln w="12700">
-            <a:solidFill>
-              <a:srgbClr val="2563EB">
-                <a:alpha val="0"/>
-              </a:srgbClr>
-            </a:solidFill>
-            <a:prstDash val="solid"/>
-          </a:ln>
-        </p:spPr>
-      </p:sp>
-      <p:sp>
-        <p:nvSpPr>
-          <p:cNvPr id="11" name="Shape 5"/>
-          <p:cNvSpPr/>
-          <p:nvPr/>
-        </p:nvSpPr>
-        <p:spPr>
-          <a:xfrm>
-            <a:off x="6309360" y="1463040"/>
-            <a:ext cx="73152" cy="1920240"/>
-          </a:xfrm>
-          <a:prstGeom prst="rect">
-            <a:avLst/>
-          </a:prstGeom>
-          <a:solidFill>
-            <a:srgbClr val="DBEAFE"/>
-          </a:solidFill>
-          <a:ln w="12700">
-            <a:solidFill>
-              <a:srgbClr val="DBEAFE">
-                <a:alpha val="0"/>
-              </a:srgbClr>
-            </a:solidFill>
-            <a:prstDash val="solid"/>
-          </a:ln>
-        </p:spPr>
-      </p:sp>
-      <p:sp>
-        <p:nvSpPr>
-          <p:cNvPr id="12" name="Shape 6"/>
-          <p:cNvSpPr/>
-          <p:nvPr/>
-        </p:nvSpPr>
-        <p:spPr>
-          <a:xfrm>
-            <a:off x="822960" y="3749040"/>
-            <a:ext cx="73152" cy="1920240"/>
-          </a:xfrm>
-          <a:prstGeom prst="rect">
-            <a:avLst/>
-          </a:prstGeom>
-          <a:solidFill>
-            <a:srgbClr val="2563EB"/>
-          </a:solidFill>
-          <a:ln w="12700">
-            <a:solidFill>
-              <a:srgbClr val="2563EB">
-                <a:alpha val="0"/>
-              </a:srgbClr>
-            </a:solidFill>
-            <a:prstDash val="solid"/>
-          </a:ln>
-        </p:spPr>
-      </p:sp>
-      <p:sp>
-        <p:nvSpPr>
-          <p:cNvPr id="13" name="Shape 7"/>
-          <p:cNvSpPr/>
-          <p:nvPr/>
-        </p:nvSpPr>
-        <p:spPr>
-          <a:xfrm>
-            <a:off x="6309360" y="3749040"/>
-            <a:ext cx="73152" cy="1920240"/>
-          </a:xfrm>
-          <a:prstGeom prst="rect">
-            <a:avLst/>
-          </a:prstGeom>
-          <a:solidFill>
-            <a:srgbClr val="DBEAFE"/>
-          </a:solidFill>
-          <a:ln w="12700">
-            <a:solidFill>
-              <a:srgbClr val="DBEAFE">
-                <a:alpha val="0"/>
-              </a:srgbClr>
-            </a:solidFill>
-            <a:prstDash val="solid"/>
-          </a:ln>
-        </p:spPr>
-      </p:sp>
-      <p:sp>
-        <p:nvSpPr>
-          <p:cNvPr id="14" name="mdpr:1-3-7e86e7:title:__title:1-3-7e86e7"/>
+      <p:sp>
+        <p:nvSpPr>
+          <p:cNvPr id="4" name="mdpr:example-examples-basic-deck-md-90c3cd:title:__title:example-examples-basic-deck-md-90c3cd"/>
           <p:cNvSpPr txBox="1"/>
           <p:nvPr/>
         </p:nvSpPr>
@@ -10422,174 +9849,580 @@
           </a:p>
         </p:txBody>
       </p:sp>
-      <p:sp>
-        <p:nvSpPr>
-          <p:cNvPr id="15" name="mdpr:1-3-7e86e7:item-1:block-28-chunk-1"/>
-          <p:cNvSpPr txBox="1"/>
-          <p:nvPr/>
-        </p:nvSpPr>
-        <p:spPr>
-          <a:xfrm>
-            <a:off x="1042416" y="2209800"/>
-            <a:ext cx="4608576" cy="426720"/>
-          </a:xfrm>
-          <a:prstGeom prst="rect">
-            <a:avLst/>
-          </a:prstGeom>
-          <a:noFill/>
-          <a:ln/>
-        </p:spPr>
-        <p:txBody>
-          <a:bodyPr wrap="square" lIns="0" tIns="25400" rIns="25400" bIns="0" rtlCol="0" anchor="ctr"/>
-          <a:lstStyle/>
-          <a:p>
-            <a:pPr algn="ctr" indent="0" marL="0">
-              <a:lnSpc>
-                <a:spcPct val="120000"/>
-              </a:lnSpc>
-              <a:buNone/>
-            </a:pPr>
-            <a:r>
-              <a:rPr lang="en-US" sz="2200" dirty="0">
-                <a:solidFill>
-                  <a:srgbClr val="111111"/>
-                </a:solidFill>
-                <a:latin typeface="Pretendard" pitchFamily="34" charset="0"/>
-                <a:ea typeface="Pretendard" pitchFamily="34" charset="-122"/>
-                <a:cs typeface="Pretendard" pitchFamily="34" charset="-120"/>
-              </a:rPr>
-              <a:t>AI Workflow Automation Proposal</a:t>
-            </a:r>
-            <a:endParaRPr lang="en-US" sz="2200" dirty="0"/>
-          </a:p>
-        </p:txBody>
-      </p:sp>
-      <p:sp>
-        <p:nvSpPr>
-          <p:cNvPr id="16" name="mdpr:1-3-7e86e7:item-2:block-28-chunk-1"/>
-          <p:cNvSpPr txBox="1"/>
-          <p:nvPr/>
-        </p:nvSpPr>
-        <p:spPr>
-          <a:xfrm>
-            <a:off x="6528816" y="2209800"/>
-            <a:ext cx="4608576" cy="426720"/>
-          </a:xfrm>
-          <a:prstGeom prst="rect">
-            <a:avLst/>
-          </a:prstGeom>
-          <a:noFill/>
-          <a:ln/>
-        </p:spPr>
-        <p:txBody>
-          <a:bodyPr wrap="square" lIns="0" tIns="25400" rIns="25400" bIns="0" rtlCol="0" anchor="ctr"/>
-          <a:lstStyle/>
-          <a:p>
-            <a:pPr algn="ctr" indent="0" marL="0">
-              <a:lnSpc>
-                <a:spcPct val="120000"/>
-              </a:lnSpc>
-              <a:buNone/>
-            </a:pPr>
-            <a:r>
-              <a:rPr lang="en-US" sz="2200" dirty="0">
-                <a:solidFill>
-                  <a:srgbClr val="111111"/>
-                </a:solidFill>
-                <a:latin typeface="Pretendard" pitchFamily="34" charset="0"/>
-                <a:ea typeface="Pretendard" pitchFamily="34" charset="-122"/>
-                <a:cs typeface="Pretendard" pitchFamily="34" charset="-120"/>
-              </a:rPr>
-              <a:t>Problem Definition</a:t>
-            </a:r>
-            <a:endParaRPr lang="en-US" sz="2200" dirty="0"/>
-          </a:p>
-        </p:txBody>
-      </p:sp>
-      <p:sp>
-        <p:nvSpPr>
-          <p:cNvPr id="17" name="mdpr:1-3-7e86e7:item-3:block-28-chunk-1"/>
-          <p:cNvSpPr txBox="1"/>
-          <p:nvPr/>
-        </p:nvSpPr>
-        <p:spPr>
-          <a:xfrm>
-            <a:off x="1042416" y="4495800"/>
-            <a:ext cx="4608576" cy="426720"/>
-          </a:xfrm>
-          <a:prstGeom prst="rect">
-            <a:avLst/>
-          </a:prstGeom>
-          <a:noFill/>
-          <a:ln/>
-        </p:spPr>
-        <p:txBody>
-          <a:bodyPr wrap="square" lIns="0" tIns="25400" rIns="25400" bIns="0" rtlCol="0" anchor="ctr"/>
-          <a:lstStyle/>
-          <a:p>
-            <a:pPr algn="ctr" indent="0" marL="0">
-              <a:lnSpc>
-                <a:spcPct val="120000"/>
-              </a:lnSpc>
-              <a:buNone/>
-            </a:pPr>
-            <a:r>
-              <a:rPr lang="en-US" sz="2200" dirty="0">
-                <a:solidFill>
-                  <a:srgbClr val="111111"/>
-                </a:solidFill>
-                <a:latin typeface="Pretendard" pitchFamily="34" charset="0"/>
-                <a:ea typeface="Pretendard" pitchFamily="34" charset="-122"/>
-                <a:cs typeface="Pretendard" pitchFamily="34" charset="-120"/>
-              </a:rPr>
-              <a:t>Repetitive Work Is Growing</a:t>
-            </a:r>
-            <a:endParaRPr lang="en-US" sz="2200" dirty="0"/>
-          </a:p>
-        </p:txBody>
-      </p:sp>
-      <p:sp>
-        <p:nvSpPr>
-          <p:cNvPr id="18" name="mdpr:1-3-7e86e7:item-4:block-28-chunk-1"/>
-          <p:cNvSpPr txBox="1"/>
-          <p:nvPr/>
-        </p:nvSpPr>
-        <p:spPr>
-          <a:xfrm>
-            <a:off x="6528816" y="4495800"/>
-            <a:ext cx="4608576" cy="426720"/>
-          </a:xfrm>
-          <a:prstGeom prst="rect">
-            <a:avLst/>
-          </a:prstGeom>
-          <a:noFill/>
-          <a:ln/>
-        </p:spPr>
-        <p:txBody>
-          <a:bodyPr wrap="square" lIns="0" tIns="25400" rIns="25400" bIns="0" rtlCol="0" anchor="ctr"/>
-          <a:lstStyle/>
-          <a:p>
-            <a:pPr algn="ctr" indent="0" marL="0">
-              <a:lnSpc>
-                <a:spcPct val="120000"/>
-              </a:lnSpc>
-              <a:buNone/>
-            </a:pPr>
-            <a:r>
-              <a:rPr lang="en-US" sz="2200" dirty="0">
-                <a:solidFill>
-                  <a:srgbClr val="111111"/>
-                </a:solidFill>
-                <a:latin typeface="Pretendard" pitchFamily="34" charset="0"/>
-                <a:ea typeface="Pretendard" pitchFamily="34" charset="-122"/>
-                <a:cs typeface="Pretendard" pitchFamily="34" charset="-120"/>
-              </a:rPr>
-              <a:t>Search Costs Are Growing</a:t>
-            </a:r>
-            <a:endParaRPr lang="en-US" sz="2200" dirty="0"/>
-          </a:p>
-        </p:txBody>
-      </p:sp>
+      <p:graphicFrame>
+        <p:nvGraphicFramePr>
+          <p:cNvPr id="23" name="mdpr:example-examples-basic-deck-md-90c3cd:table:block-28"/>
+          <p:cNvGraphicFramePr>
+            <a:graphicFrameLocks noGrp="1"/>
+          </p:cNvGraphicFramePr>
+          <p:nvPr>
+            <p:extLst>
+              <p:ext uri="{D42A27DB-BD31-4B8C-83A1-F6EECF244321}">
+                <p14:modId xmlns:p14="http://schemas.microsoft.com/office/powerpoint/2010/main" val="1579011935"/>
+              </p:ext>
+            </p:extLst>
+          </p:nvPr>
+        </p:nvGraphicFramePr>
+        <p:xfrm>
+          <a:off x="914400" y="1417320"/>
+          <a:ext cx="10241280" cy="4526280"/>
+        </p:xfrm>
+        <a:graphic>
+          <a:graphicData uri="http://schemas.openxmlformats.org/drawingml/2006/table">
+            <a:tbl>
+              <a:tblPr/>
+              <a:tblGrid>
+                <a:gridCol w="5120640"/>
+                <a:gridCol w="5120640"/>
+              </a:tblGrid>
+              <a:tr h="1131570">
+                <a:tc>
+                  <a:txBody>
+                    <a:bodyPr/>
+                    <a:lstStyle/>
+                    <a:p>
+                      <a:pPr algn="ctr" indent="0" marL="0">
+                        <a:buNone/>
+                      </a:pPr>
+                      <a:r>
+                        <a:rPr lang="en-US" sz="1800" b="1" dirty="0">
+                          <a:solidFill>
+                            <a:srgbClr val="FFFFFF"/>
+                          </a:solidFill>
+                          <a:latin typeface="Pretendard" pitchFamily="34" charset="0"/>
+                          <a:ea typeface="Pretendard" pitchFamily="34" charset="-122"/>
+                          <a:cs typeface="Pretendard" pitchFamily="34" charset="-120"/>
+                        </a:rPr>
+                        <a:t>Current Approach</a:t>
+                      </a:r>
+                      <a:endParaRPr lang="en-US" sz="1800" dirty="0">
+                        <a:latin typeface="Pretendard" charset="0"/>
+                        <a:ea typeface="Pretendard" charset="0"/>
+                        <a:cs typeface="Pretendard" charset="0"/>
+                      </a:endParaRPr>
+                    </a:p>
+                  </a:txBody>
+                  <a:tcPr marL="54864" marR="54864" marT="36576" marB="36576" anchor="ctr">
+                    <a:lnL w="12700" cap="flat" cmpd="sng" algn="ctr">
+                      <a:solidFill>
+                        <a:srgbClr val="E2E8F0"/>
+                      </a:solidFill>
+                      <a:prstDash val="solid"/>
+                      <a:round/>
+                      <a:headEnd type="none" w="med" len="med"/>
+                      <a:tailEnd type="none" w="med" len="med"/>
+                    </a:lnL>
+                    <a:lnR w="12700" cap="flat" cmpd="sng" algn="ctr">
+                      <a:solidFill>
+                        <a:srgbClr val="E2E8F0"/>
+                      </a:solidFill>
+                      <a:prstDash val="solid"/>
+                      <a:round/>
+                      <a:headEnd type="none" w="med" len="med"/>
+                      <a:tailEnd type="none" w="med" len="med"/>
+                    </a:lnR>
+                    <a:lnT w="12700" cap="flat" cmpd="sng" algn="ctr">
+                      <a:solidFill>
+                        <a:srgbClr val="E2E8F0"/>
+                      </a:solidFill>
+                      <a:prstDash val="solid"/>
+                      <a:round/>
+                      <a:headEnd type="none" w="med" len="med"/>
+                      <a:tailEnd type="none" w="med" len="med"/>
+                    </a:lnT>
+                    <a:lnB w="12700" cap="flat" cmpd="sng" algn="ctr">
+                      <a:solidFill>
+                        <a:srgbClr val="E2E8F0"/>
+                      </a:solidFill>
+                      <a:prstDash val="solid"/>
+                      <a:round/>
+                      <a:headEnd type="none" w="med" len="med"/>
+                      <a:tailEnd type="none" w="med" len="med"/>
+                    </a:lnB>
+                    <a:solidFill>
+                      <a:srgbClr val="2563EB"/>
+                    </a:solidFill>
+                  </a:tcPr>
+                </a:tc>
+                <a:tc>
+                  <a:txBody>
+                    <a:bodyPr/>
+                    <a:lstStyle/>
+                    <a:p>
+                      <a:pPr algn="ctr" indent="0" marL="0">
+                        <a:buNone/>
+                      </a:pPr>
+                      <a:r>
+                        <a:rPr lang="en-US" sz="1800" b="1" dirty="0">
+                          <a:solidFill>
+                            <a:srgbClr val="FFFFFF"/>
+                          </a:solidFill>
+                          <a:latin typeface="Pretendard" pitchFamily="34" charset="0"/>
+                          <a:ea typeface="Pretendard" pitchFamily="34" charset="-122"/>
+                          <a:cs typeface="Pretendard" pitchFamily="34" charset="-120"/>
+                        </a:rPr>
+                        <a:t>Improved Approach</a:t>
+                      </a:r>
+                      <a:endParaRPr lang="en-US" sz="1800" dirty="0">
+                        <a:latin typeface="Pretendard" charset="0"/>
+                        <a:ea typeface="Pretendard" charset="0"/>
+                        <a:cs typeface="Pretendard" charset="0"/>
+                      </a:endParaRPr>
+                    </a:p>
+                  </a:txBody>
+                  <a:tcPr marL="54864" marR="54864" marT="36576" marB="36576" anchor="ctr">
+                    <a:lnL w="12700" cap="flat" cmpd="sng" algn="ctr">
+                      <a:solidFill>
+                        <a:srgbClr val="E2E8F0"/>
+                      </a:solidFill>
+                      <a:prstDash val="solid"/>
+                      <a:round/>
+                      <a:headEnd type="none" w="med" len="med"/>
+                      <a:tailEnd type="none" w="med" len="med"/>
+                    </a:lnL>
+                    <a:lnR w="12700" cap="flat" cmpd="sng" algn="ctr">
+                      <a:solidFill>
+                        <a:srgbClr val="E2E8F0"/>
+                      </a:solidFill>
+                      <a:prstDash val="solid"/>
+                      <a:round/>
+                      <a:headEnd type="none" w="med" len="med"/>
+                      <a:tailEnd type="none" w="med" len="med"/>
+                    </a:lnR>
+                    <a:lnT w="12700" cap="flat" cmpd="sng" algn="ctr">
+                      <a:solidFill>
+                        <a:srgbClr val="E2E8F0"/>
+                      </a:solidFill>
+                      <a:prstDash val="solid"/>
+                      <a:round/>
+                      <a:headEnd type="none" w="med" len="med"/>
+                      <a:tailEnd type="none" w="med" len="med"/>
+                    </a:lnT>
+                    <a:lnB w="12700" cap="flat" cmpd="sng" algn="ctr">
+                      <a:solidFill>
+                        <a:srgbClr val="E2E8F0"/>
+                      </a:solidFill>
+                      <a:prstDash val="solid"/>
+                      <a:round/>
+                      <a:headEnd type="none" w="med" len="med"/>
+                      <a:tailEnd type="none" w="med" len="med"/>
+                    </a:lnB>
+                    <a:solidFill>
+                      <a:srgbClr val="2563EB"/>
+                    </a:solidFill>
+                  </a:tcPr>
+                </a:tc>
+              </a:tr>
+              <a:tr h="1131570">
+                <a:tc>
+                  <a:txBody>
+                    <a:bodyPr/>
+                    <a:lstStyle/>
+                    <a:p>
+                      <a:pPr algn="l" indent="0" marL="0">
+                        <a:buNone/>
+                      </a:pPr>
+                      <a:r>
+                        <a:rPr lang="en-US" sz="1800" b="1" dirty="0">
+                          <a:solidFill>
+                            <a:srgbClr val="111111"/>
+                          </a:solidFill>
+                          <a:latin typeface="Pretendard" pitchFamily="34" charset="0"/>
+                          <a:ea typeface="Pretendard" pitchFamily="34" charset="-122"/>
+                          <a:cs typeface="Pretendard" pitchFamily="34" charset="-120"/>
+                        </a:rPr>
+                        <a:t>Owners manually prepare documents</a:t>
+                      </a:r>
+                      <a:endParaRPr lang="en-US" sz="1800" dirty="0">
+                        <a:latin typeface="Pretendard" charset="0"/>
+                        <a:ea typeface="Pretendard" charset="0"/>
+                        <a:cs typeface="Pretendard" charset="0"/>
+                      </a:endParaRPr>
+                    </a:p>
+                  </a:txBody>
+                  <a:tcPr marL="54864" marR="54864" marT="36576" marB="36576" anchor="ctr">
+                    <a:lnL w="12700" cap="flat" cmpd="sng" algn="ctr">
+                      <a:solidFill>
+                        <a:srgbClr val="E2E8F0"/>
+                      </a:solidFill>
+                      <a:prstDash val="solid"/>
+                      <a:round/>
+                      <a:headEnd type="none" w="med" len="med"/>
+                      <a:tailEnd type="none" w="med" len="med"/>
+                    </a:lnL>
+                    <a:lnR w="12700" cap="flat" cmpd="sng" algn="ctr">
+                      <a:solidFill>
+                        <a:srgbClr val="E2E8F0"/>
+                      </a:solidFill>
+                      <a:prstDash val="solid"/>
+                      <a:round/>
+                      <a:headEnd type="none" w="med" len="med"/>
+                      <a:tailEnd type="none" w="med" len="med"/>
+                    </a:lnR>
+                    <a:lnT w="12700" cap="flat" cmpd="sng" algn="ctr">
+                      <a:solidFill>
+                        <a:srgbClr val="E2E8F0"/>
+                      </a:solidFill>
+                      <a:prstDash val="solid"/>
+                      <a:round/>
+                      <a:headEnd type="none" w="med" len="med"/>
+                      <a:tailEnd type="none" w="med" len="med"/>
+                    </a:lnT>
+                    <a:lnB w="12700" cap="flat" cmpd="sng" algn="ctr">
+                      <a:solidFill>
+                        <a:srgbClr val="E2E8F0"/>
+                      </a:solidFill>
+                      <a:prstDash val="solid"/>
+                      <a:round/>
+                      <a:headEnd type="none" w="med" len="med"/>
+                      <a:tailEnd type="none" w="med" len="med"/>
+                    </a:lnB>
+                  </a:tcPr>
+                </a:tc>
+                <a:tc>
+                  <a:txBody>
+                    <a:bodyPr/>
+                    <a:lstStyle/>
+                    <a:p>
+                      <a:pPr algn="l" indent="0" marL="0">
+                        <a:buNone/>
+                      </a:pPr>
+                      <a:r>
+                        <a:rPr lang="en-US" sz="1800" dirty="0">
+                          <a:solidFill>
+                            <a:srgbClr val="111111"/>
+                          </a:solidFill>
+                          <a:latin typeface="Pretendard" pitchFamily="34" charset="0"/>
+                          <a:ea typeface="Pretendard" pitchFamily="34" charset="-122"/>
+                          <a:cs typeface="Pretendard" pitchFamily="34" charset="-120"/>
+                        </a:rPr>
+                        <a:t>Meeting notes and report drafts are generated automatically</a:t>
+                      </a:r>
+                      <a:endParaRPr lang="en-US" sz="1800" dirty="0">
+                        <a:latin typeface="Pretendard" charset="0"/>
+                        <a:ea typeface="Pretendard" charset="0"/>
+                        <a:cs typeface="Pretendard" charset="0"/>
+                      </a:endParaRPr>
+                    </a:p>
+                  </a:txBody>
+                  <a:tcPr marL="54864" marR="54864" marT="36576" marB="36576" anchor="ctr">
+                    <a:lnL w="12700" cap="flat" cmpd="sng" algn="ctr">
+                      <a:solidFill>
+                        <a:srgbClr val="E2E8F0"/>
+                      </a:solidFill>
+                      <a:prstDash val="solid"/>
+                      <a:round/>
+                      <a:headEnd type="none" w="med" len="med"/>
+                      <a:tailEnd type="none" w="med" len="med"/>
+                    </a:lnL>
+                    <a:lnR w="12700" cap="flat" cmpd="sng" algn="ctr">
+                      <a:solidFill>
+                        <a:srgbClr val="E2E8F0"/>
+                      </a:solidFill>
+                      <a:prstDash val="solid"/>
+                      <a:round/>
+                      <a:headEnd type="none" w="med" len="med"/>
+                      <a:tailEnd type="none" w="med" len="med"/>
+                    </a:lnR>
+                    <a:lnT w="12700" cap="flat" cmpd="sng" algn="ctr">
+                      <a:solidFill>
+                        <a:srgbClr val="E2E8F0"/>
+                      </a:solidFill>
+                      <a:prstDash val="solid"/>
+                      <a:round/>
+                      <a:headEnd type="none" w="med" len="med"/>
+                      <a:tailEnd type="none" w="med" len="med"/>
+                    </a:lnT>
+                    <a:lnB w="12700" cap="flat" cmpd="sng" algn="ctr">
+                      <a:solidFill>
+                        <a:srgbClr val="E2E8F0"/>
+                      </a:solidFill>
+                      <a:prstDash val="solid"/>
+                      <a:round/>
+                      <a:headEnd type="none" w="med" len="med"/>
+                      <a:tailEnd type="none" w="med" len="med"/>
+                    </a:lnB>
+                  </a:tcPr>
+                </a:tc>
+              </a:tr>
+              <a:tr h="1131570">
+                <a:tc>
+                  <a:txBody>
+                    <a:bodyPr/>
+                    <a:lstStyle/>
+                    <a:p>
+                      <a:pPr algn="l" indent="0" marL="0">
+                        <a:buNone/>
+                      </a:pPr>
+                      <a:r>
+                        <a:rPr lang="en-US" sz="1800" b="1" dirty="0">
+                          <a:solidFill>
+                            <a:srgbClr val="111111"/>
+                          </a:solidFill>
+                          <a:latin typeface="Pretendard" pitchFamily="34" charset="0"/>
+                          <a:ea typeface="Pretendard" pitchFamily="34" charset="-122"/>
+                          <a:cs typeface="Pretendard" pitchFamily="34" charset="-120"/>
+                        </a:rPr>
+                        <a:t>Quality depends on individual skill</a:t>
+                      </a:r>
+                      <a:endParaRPr lang="en-US" sz="1800" dirty="0">
+                        <a:latin typeface="Pretendard" charset="0"/>
+                        <a:ea typeface="Pretendard" charset="0"/>
+                        <a:cs typeface="Pretendard" charset="0"/>
+                      </a:endParaRPr>
+                    </a:p>
+                  </a:txBody>
+                  <a:tcPr marL="54864" marR="54864" marT="36576" marB="36576" anchor="ctr">
+                    <a:lnL w="12700" cap="flat" cmpd="sng" algn="ctr">
+                      <a:solidFill>
+                        <a:srgbClr val="E2E8F0"/>
+                      </a:solidFill>
+                      <a:prstDash val="solid"/>
+                      <a:round/>
+                      <a:headEnd type="none" w="med" len="med"/>
+                      <a:tailEnd type="none" w="med" len="med"/>
+                    </a:lnL>
+                    <a:lnR w="12700" cap="flat" cmpd="sng" algn="ctr">
+                      <a:solidFill>
+                        <a:srgbClr val="E2E8F0"/>
+                      </a:solidFill>
+                      <a:prstDash val="solid"/>
+                      <a:round/>
+                      <a:headEnd type="none" w="med" len="med"/>
+                      <a:tailEnd type="none" w="med" len="med"/>
+                    </a:lnR>
+                    <a:lnT w="12700" cap="flat" cmpd="sng" algn="ctr">
+                      <a:solidFill>
+                        <a:srgbClr val="E2E8F0"/>
+                      </a:solidFill>
+                      <a:prstDash val="solid"/>
+                      <a:round/>
+                      <a:headEnd type="none" w="med" len="med"/>
+                      <a:tailEnd type="none" w="med" len="med"/>
+                    </a:lnT>
+                    <a:lnB w="12700" cap="flat" cmpd="sng" algn="ctr">
+                      <a:solidFill>
+                        <a:srgbClr val="E2E8F0"/>
+                      </a:solidFill>
+                      <a:prstDash val="solid"/>
+                      <a:round/>
+                      <a:headEnd type="none" w="med" len="med"/>
+                      <a:tailEnd type="none" w="med" len="med"/>
+                    </a:lnB>
+                    <a:solidFill>
+                      <a:srgbClr val="FFFFFF">
+                        <a:alpha val="80000"/>
+                      </a:srgbClr>
+                    </a:solidFill>
+                  </a:tcPr>
+                </a:tc>
+                <a:tc>
+                  <a:txBody>
+                    <a:bodyPr/>
+                    <a:lstStyle/>
+                    <a:p>
+                      <a:pPr algn="l" indent="0" marL="0">
+                        <a:buNone/>
+                      </a:pPr>
+                      <a:r>
+                        <a:rPr lang="en-US" sz="1800" dirty="0">
+                          <a:solidFill>
+                            <a:srgbClr val="111111"/>
+                          </a:solidFill>
+                          <a:latin typeface="Pretendard" pitchFamily="34" charset="0"/>
+                          <a:ea typeface="Pretendard" pitchFamily="34" charset="-122"/>
+                          <a:cs typeface="Pretendard" pitchFamily="34" charset="-120"/>
+                        </a:rPr>
+                        <a:t>Documents follow a consistent structure</a:t>
+                      </a:r>
+                      <a:endParaRPr lang="en-US" sz="1800" dirty="0">
+                        <a:latin typeface="Pretendard" charset="0"/>
+                        <a:ea typeface="Pretendard" charset="0"/>
+                        <a:cs typeface="Pretendard" charset="0"/>
+                      </a:endParaRPr>
+                    </a:p>
+                  </a:txBody>
+                  <a:tcPr marL="54864" marR="54864" marT="36576" marB="36576" anchor="ctr">
+                    <a:lnL w="12700" cap="flat" cmpd="sng" algn="ctr">
+                      <a:solidFill>
+                        <a:srgbClr val="E2E8F0"/>
+                      </a:solidFill>
+                      <a:prstDash val="solid"/>
+                      <a:round/>
+                      <a:headEnd type="none" w="med" len="med"/>
+                      <a:tailEnd type="none" w="med" len="med"/>
+                    </a:lnL>
+                    <a:lnR w="12700" cap="flat" cmpd="sng" algn="ctr">
+                      <a:solidFill>
+                        <a:srgbClr val="E2E8F0"/>
+                      </a:solidFill>
+                      <a:prstDash val="solid"/>
+                      <a:round/>
+                      <a:headEnd type="none" w="med" len="med"/>
+                      <a:tailEnd type="none" w="med" len="med"/>
+                    </a:lnR>
+                    <a:lnT w="12700" cap="flat" cmpd="sng" algn="ctr">
+                      <a:solidFill>
+                        <a:srgbClr val="E2E8F0"/>
+                      </a:solidFill>
+                      <a:prstDash val="solid"/>
+                      <a:round/>
+                      <a:headEnd type="none" w="med" len="med"/>
+                      <a:tailEnd type="none" w="med" len="med"/>
+                    </a:lnT>
+                    <a:lnB w="12700" cap="flat" cmpd="sng" algn="ctr">
+                      <a:solidFill>
+                        <a:srgbClr val="E2E8F0"/>
+                      </a:solidFill>
+                      <a:prstDash val="solid"/>
+                      <a:round/>
+                      <a:headEnd type="none" w="med" len="med"/>
+                      <a:tailEnd type="none" w="med" len="med"/>
+                    </a:lnB>
+                    <a:solidFill>
+                      <a:srgbClr val="FFFFFF">
+                        <a:alpha val="80000"/>
+                      </a:srgbClr>
+                    </a:solidFill>
+                  </a:tcPr>
+                </a:tc>
+              </a:tr>
+              <a:tr h="1131570">
+                <a:tc>
+                  <a:txBody>
+                    <a:bodyPr/>
+                    <a:lstStyle/>
+                    <a:p>
+                      <a:pPr algn="l" indent="0" marL="0">
+                        <a:buNone/>
+                      </a:pPr>
+                      <a:r>
+                        <a:rPr lang="en-US" sz="1800" b="1" dirty="0">
+                          <a:solidFill>
+                            <a:srgbClr val="111111"/>
+                          </a:solidFill>
+                          <a:latin typeface="Pretendard" pitchFamily="34" charset="0"/>
+                          <a:ea typeface="Pretendard" pitchFamily="34" charset="-122"/>
+                          <a:cs typeface="Pretendard" pitchFamily="34" charset="-120"/>
+                        </a:rPr>
+                        <a:t>Search and reuse are difficult</a:t>
+                      </a:r>
+                      <a:endParaRPr lang="en-US" sz="1800" dirty="0">
+                        <a:latin typeface="Pretendard" charset="0"/>
+                        <a:ea typeface="Pretendard" charset="0"/>
+                        <a:cs typeface="Pretendard" charset="0"/>
+                      </a:endParaRPr>
+                    </a:p>
+                  </a:txBody>
+                  <a:tcPr marL="54864" marR="54864" marT="36576" marB="36576" anchor="ctr">
+                    <a:lnL w="12700" cap="flat" cmpd="sng" algn="ctr">
+                      <a:solidFill>
+                        <a:srgbClr val="E2E8F0"/>
+                      </a:solidFill>
+                      <a:prstDash val="solid"/>
+                      <a:round/>
+                      <a:headEnd type="none" w="med" len="med"/>
+                      <a:tailEnd type="none" w="med" len="med"/>
+                    </a:lnL>
+                    <a:lnR w="12700" cap="flat" cmpd="sng" algn="ctr">
+                      <a:solidFill>
+                        <a:srgbClr val="E2E8F0"/>
+                      </a:solidFill>
+                      <a:prstDash val="solid"/>
+                      <a:round/>
+                      <a:headEnd type="none" w="med" len="med"/>
+                      <a:tailEnd type="none" w="med" len="med"/>
+                    </a:lnR>
+                    <a:lnT w="12700" cap="flat" cmpd="sng" algn="ctr">
+                      <a:solidFill>
+                        <a:srgbClr val="E2E8F0"/>
+                      </a:solidFill>
+                      <a:prstDash val="solid"/>
+                      <a:round/>
+                      <a:headEnd type="none" w="med" len="med"/>
+                      <a:tailEnd type="none" w="med" len="med"/>
+                    </a:lnT>
+                    <a:lnB w="12700" cap="flat" cmpd="sng" algn="ctr">
+                      <a:solidFill>
+                        <a:srgbClr val="E2E8F0"/>
+                      </a:solidFill>
+                      <a:prstDash val="solid"/>
+                      <a:round/>
+                      <a:headEnd type="none" w="med" len="med"/>
+                      <a:tailEnd type="none" w="med" len="med"/>
+                    </a:lnB>
+                  </a:tcPr>
+                </a:tc>
+                <a:tc>
+                  <a:txBody>
+                    <a:bodyPr/>
+                    <a:lstStyle/>
+                    <a:p>
+                      <a:pPr algn="l" indent="0" marL="0">
+                        <a:buNone/>
+                      </a:pPr>
+                      <a:r>
+                        <a:rPr lang="en-US" sz="1800" dirty="0">
+                          <a:solidFill>
+                            <a:srgbClr val="111111"/>
+                          </a:solidFill>
+                          <a:latin typeface="Pretendard" pitchFamily="34" charset="0"/>
+                          <a:ea typeface="Pretendard" pitchFamily="34" charset="-122"/>
+                          <a:cs typeface="Pretendard" pitchFamily="34" charset="-120"/>
+                        </a:rPr>
+                        <a:t>Materials are found with semantic search</a:t>
+                      </a:r>
+                      <a:endParaRPr lang="en-US" sz="1800" dirty="0">
+                        <a:latin typeface="Pretendard" charset="0"/>
+                        <a:ea typeface="Pretendard" charset="0"/>
+                        <a:cs typeface="Pretendard" charset="0"/>
+                      </a:endParaRPr>
+                    </a:p>
+                  </a:txBody>
+                  <a:tcPr marL="54864" marR="54864" marT="36576" marB="36576" anchor="ctr">
+                    <a:lnL w="12700" cap="flat" cmpd="sng" algn="ctr">
+                      <a:solidFill>
+                        <a:srgbClr val="E2E8F0"/>
+                      </a:solidFill>
+                      <a:prstDash val="solid"/>
+                      <a:round/>
+                      <a:headEnd type="none" w="med" len="med"/>
+                      <a:tailEnd type="none" w="med" len="med"/>
+                    </a:lnL>
+                    <a:lnR w="12700" cap="flat" cmpd="sng" algn="ctr">
+                      <a:solidFill>
+                        <a:srgbClr val="E2E8F0"/>
+                      </a:solidFill>
+                      <a:prstDash val="solid"/>
+                      <a:round/>
+                      <a:headEnd type="none" w="med" len="med"/>
+                      <a:tailEnd type="none" w="med" len="med"/>
+                    </a:lnR>
+                    <a:lnT w="12700" cap="flat" cmpd="sng" algn="ctr">
+                      <a:solidFill>
+                        <a:srgbClr val="E2E8F0"/>
+                      </a:solidFill>
+                      <a:prstDash val="solid"/>
+                      <a:round/>
+                      <a:headEnd type="none" w="med" len="med"/>
+                      <a:tailEnd type="none" w="med" len="med"/>
+                    </a:lnT>
+                    <a:lnB w="12700" cap="flat" cmpd="sng" algn="ctr">
+                      <a:solidFill>
+                        <a:srgbClr val="E2E8F0"/>
+                      </a:solidFill>
+                      <a:prstDash val="solid"/>
+                      <a:round/>
+                      <a:headEnd type="none" w="med" len="med"/>
+                      <a:tailEnd type="none" w="med" len="med"/>
+                    </a:lnB>
+                  </a:tcPr>
+                </a:tc>
+              </a:tr>
+            </a:tbl>
+          </a:graphicData>
+        </a:graphic>
+      </p:graphicFrame>
     </p:spTree>
   </p:cSld>
   <p:clrMapOvr>
@@ -10644,8 +10477,8 @@
         </p:blipFill>
         <p:spPr>
           <a:xfrm>
-            <a:off x="914400" y="1865376"/>
-            <a:ext cx="10241280" cy="1024128"/>
+            <a:off x="914400" y="1417320"/>
+            <a:ext cx="10241280" cy="4526280"/>
           </a:xfrm>
           <a:prstGeom prst="rect">
             <a:avLst/>
@@ -10660,8 +10493,8 @@
         </p:nvSpPr>
         <p:spPr>
           <a:xfrm>
-            <a:off x="914400" y="1865376"/>
-            <a:ext cx="10241280" cy="1024128"/>
+            <a:off x="914400" y="1417320"/>
+            <a:ext cx="10241280" cy="4526280"/>
           </a:xfrm>
           <a:prstGeom prst="rect">
             <a:avLst/>
@@ -10688,222 +10521,9 @@
           </a:effectLst>
         </p:spPr>
       </p:sp>
-      <p:pic>
-        <p:nvPicPr>
-          <p:cNvPr id="4" name="Image 1" descr="preencoded.png">    </p:cNvPr>
-          <p:cNvPicPr>
-            <a:picLocks noChangeAspect="1"/>
-          </p:cNvPicPr>
-          <p:nvPr/>
-        </p:nvPicPr>
-        <p:blipFill>
-          <a:blip r:embed="rId3">
-            <a:extLst>
-              <a:ext uri="{96DAC541-7B7A-43D3-8B79-37D633B846F1}">
-                <asvg:svgBlip xmlns:asvg="http://schemas.microsoft.com/office/drawing/2016/SVG/main" r:embed="rId4"/>
-              </a:ext>
-            </a:extLst>
-          </a:blip>
-          <a:stretch>
-            <a:fillRect/>
-          </a:stretch>
-        </p:blipFill>
-        <p:spPr>
-          <a:xfrm>
-            <a:off x="914400" y="3191256"/>
-            <a:ext cx="10241280" cy="1024128"/>
-          </a:xfrm>
-          <a:prstGeom prst="rect">
-            <a:avLst/>
-          </a:prstGeom>
-        </p:spPr>
-      </p:pic>
-      <p:sp>
-        <p:nvSpPr>
-          <p:cNvPr id="5" name="Shape 1"/>
-          <p:cNvSpPr/>
-          <p:nvPr/>
-        </p:nvSpPr>
-        <p:spPr>
-          <a:xfrm>
-            <a:off x="914400" y="3191256"/>
-            <a:ext cx="10241280" cy="1024128"/>
-          </a:xfrm>
-          <a:prstGeom prst="rect">
-            <a:avLst/>
-          </a:prstGeom>
-          <a:solidFill>
-            <a:srgbClr val="FFFFFF">
-              <a:alpha val="0"/>
-            </a:srgbClr>
-          </a:solidFill>
-          <a:ln w="12700">
-            <a:solidFill>
-              <a:srgbClr val="E2E8F0">
-                <a:alpha val="0"/>
-              </a:srgbClr>
-            </a:solidFill>
-            <a:prstDash val="solid"/>
-          </a:ln>
-          <a:effectLst>
-            <a:outerShdw sx="100000" sy="100000" kx="0" ky="0" algn="bl" rotWithShape="0" blurRad="12700" dist="50800" dir="2700000">
-              <a:srgbClr val="000000">
-                <a:alpha val="8000"/>
-              </a:srgbClr>
-            </a:outerShdw>
-          </a:effectLst>
-        </p:spPr>
-      </p:sp>
-      <p:pic>
-        <p:nvPicPr>
-          <p:cNvPr id="6" name="Image 2" descr="preencoded.png">    </p:cNvPr>
-          <p:cNvPicPr>
-            <a:picLocks noChangeAspect="1"/>
-          </p:cNvPicPr>
-          <p:nvPr/>
-        </p:nvPicPr>
-        <p:blipFill>
-          <a:blip r:embed="rId5">
-            <a:extLst>
-              <a:ext uri="{96DAC541-7B7A-43D3-8B79-37D633B846F1}">
-                <asvg:svgBlip xmlns:asvg="http://schemas.microsoft.com/office/drawing/2016/SVG/main" r:embed="rId6"/>
-              </a:ext>
-            </a:extLst>
-          </a:blip>
-          <a:stretch>
-            <a:fillRect/>
-          </a:stretch>
-        </p:blipFill>
-        <p:spPr>
-          <a:xfrm>
-            <a:off x="914400" y="4507992"/>
-            <a:ext cx="10241280" cy="1024128"/>
-          </a:xfrm>
-          <a:prstGeom prst="rect">
-            <a:avLst/>
-          </a:prstGeom>
-        </p:spPr>
-      </p:pic>
-      <p:sp>
-        <p:nvSpPr>
-          <p:cNvPr id="7" name="Shape 2"/>
-          <p:cNvSpPr/>
-          <p:nvPr/>
-        </p:nvSpPr>
-        <p:spPr>
-          <a:xfrm>
-            <a:off x="914400" y="4507992"/>
-            <a:ext cx="10241280" cy="1024128"/>
-          </a:xfrm>
-          <a:prstGeom prst="rect">
-            <a:avLst/>
-          </a:prstGeom>
-          <a:solidFill>
-            <a:srgbClr val="FFFFFF">
-              <a:alpha val="0"/>
-            </a:srgbClr>
-          </a:solidFill>
-          <a:ln w="12700">
-            <a:solidFill>
-              <a:srgbClr val="E2E8F0">
-                <a:alpha val="0"/>
-              </a:srgbClr>
-            </a:solidFill>
-            <a:prstDash val="solid"/>
-          </a:ln>
-          <a:effectLst>
-            <a:outerShdw sx="100000" sy="100000" kx="0" ky="0" algn="bl" rotWithShape="0" blurRad="12700" dist="50800" dir="2700000">
-              <a:srgbClr val="000000">
-                <a:alpha val="8000"/>
-              </a:srgbClr>
-            </a:outerShdw>
-          </a:effectLst>
-        </p:spPr>
-      </p:sp>
-      <p:sp>
-        <p:nvSpPr>
-          <p:cNvPr id="8" name="Shape 3"/>
-          <p:cNvSpPr/>
-          <p:nvPr/>
-        </p:nvSpPr>
-        <p:spPr>
-          <a:xfrm>
-            <a:off x="914400" y="1865376"/>
-            <a:ext cx="73152" cy="1024128"/>
-          </a:xfrm>
-          <a:prstGeom prst="rect">
-            <a:avLst/>
-          </a:prstGeom>
-          <a:solidFill>
-            <a:srgbClr val="2563EB"/>
-          </a:solidFill>
-          <a:ln w="12700">
-            <a:solidFill>
-              <a:srgbClr val="2563EB">
-                <a:alpha val="0"/>
-              </a:srgbClr>
-            </a:solidFill>
-            <a:prstDash val="solid"/>
-          </a:ln>
-        </p:spPr>
-      </p:sp>
-      <p:sp>
-        <p:nvSpPr>
-          <p:cNvPr id="9" name="Shape 4"/>
-          <p:cNvSpPr/>
-          <p:nvPr/>
-        </p:nvSpPr>
-        <p:spPr>
-          <a:xfrm>
-            <a:off x="914400" y="3191256"/>
-            <a:ext cx="73152" cy="1024128"/>
-          </a:xfrm>
-          <a:prstGeom prst="rect">
-            <a:avLst/>
-          </a:prstGeom>
-          <a:solidFill>
-            <a:srgbClr val="DBEAFE"/>
-          </a:solidFill>
-          <a:ln w="12700">
-            <a:solidFill>
-              <a:srgbClr val="DBEAFE">
-                <a:alpha val="0"/>
-              </a:srgbClr>
-            </a:solidFill>
-            <a:prstDash val="solid"/>
-          </a:ln>
-        </p:spPr>
-      </p:sp>
-      <p:sp>
-        <p:nvSpPr>
-          <p:cNvPr id="10" name="Shape 5"/>
-          <p:cNvSpPr/>
-          <p:nvPr/>
-        </p:nvSpPr>
-        <p:spPr>
-          <a:xfrm>
-            <a:off x="914400" y="4507992"/>
-            <a:ext cx="73152" cy="1024128"/>
-          </a:xfrm>
-          <a:prstGeom prst="rect">
-            <a:avLst/>
-          </a:prstGeom>
-          <a:solidFill>
-            <a:srgbClr val="2563EB"/>
-          </a:solidFill>
-          <a:ln w="12700">
-            <a:solidFill>
-              <a:srgbClr val="2563EB">
-                <a:alpha val="0"/>
-              </a:srgbClr>
-            </a:solidFill>
-            <a:prstDash val="solid"/>
-          </a:ln>
-        </p:spPr>
-      </p:sp>
-      <p:sp>
-        <p:nvSpPr>
-          <p:cNvPr id="11" name="mdpr:2-3-4f52c2:title:__title:2-3-4f52c2"/>
+      <p:sp>
+        <p:nvSpPr>
+          <p:cNvPr id="4" name="mdpr:example-examples-comparison-deck-md-12e155:title:__title:example-examples-comparison-deck-md-12e155"/>
           <p:cNvSpPr txBox="1"/>
           <p:nvPr/>
         </p:nvSpPr>
@@ -10937,155 +10557,586 @@
                 <a:ea typeface="Pretendard" pitchFamily="34" charset="-122"/>
                 <a:cs typeface="Pretendard" pitchFamily="34" charset="-120"/>
               </a:rPr>
-              <a:t>Example: examples/basic/deck.md</a:t>
-            </a:r>
-            <a:pPr algn="ctr" indent="0" marL="0">
-              <a:lnSpc>
-                <a:spcPct val="120000"/>
-              </a:lnSpc>
-              <a:buNone/>
-            </a:pPr>
-            <a:r>
-              <a:rPr lang="en-US" sz="2000" dirty="0">
-                <a:solidFill>
-                  <a:srgbClr val="919191"/>
-                </a:solidFill>
-                <a:latin typeface="Pretendard" pitchFamily="34" charset="0"/>
-                <a:ea typeface="Pretendard" pitchFamily="34" charset="-122"/>
-                <a:cs typeface="Pretendard" pitchFamily="34" charset="-120"/>
-              </a:rPr>
-              <a:t> (Cont. 2/3)</a:t>
+              <a:t>Example: examples/comparison/deck.md</a:t>
             </a:r>
             <a:endParaRPr lang="en-US" sz="3400" dirty="0"/>
           </a:p>
         </p:txBody>
       </p:sp>
-      <p:sp>
-        <p:nvSpPr>
-          <p:cNvPr id="12" name="mdpr:2-3-4f52c2:item-1:block-28-chunk-2"/>
-          <p:cNvSpPr txBox="1"/>
-          <p:nvPr/>
-        </p:nvSpPr>
-        <p:spPr>
-          <a:xfrm>
-            <a:off x="1133856" y="2164080"/>
-            <a:ext cx="9820656" cy="426720"/>
-          </a:xfrm>
-          <a:prstGeom prst="rect">
-            <a:avLst/>
-          </a:prstGeom>
-          <a:noFill/>
-          <a:ln/>
-        </p:spPr>
-        <p:txBody>
-          <a:bodyPr wrap="square" lIns="0" tIns="25400" rIns="25400" bIns="0" rtlCol="0" anchor="ctr"/>
-          <a:lstStyle/>
-          <a:p>
-            <a:pPr algn="ctr" indent="0" marL="0">
-              <a:lnSpc>
-                <a:spcPct val="120000"/>
-              </a:lnSpc>
-              <a:buNone/>
-            </a:pPr>
-            <a:r>
-              <a:rPr lang="en-US" sz="2200" dirty="0">
-                <a:solidFill>
-                  <a:srgbClr val="111111"/>
-                </a:solidFill>
-                <a:latin typeface="Pretendard" pitchFamily="34" charset="0"/>
-                <a:ea typeface="Pretendard" pitchFamily="34" charset="-122"/>
-                <a:cs typeface="Pretendard" pitchFamily="34" charset="-120"/>
-              </a:rPr>
-              <a:t>Current Approach and Improved Approach</a:t>
-            </a:r>
-            <a:endParaRPr lang="en-US" sz="2200" dirty="0"/>
-          </a:p>
-        </p:txBody>
-      </p:sp>
-      <p:sp>
-        <p:nvSpPr>
-          <p:cNvPr id="13" name="mdpr:2-3-4f52c2:item-2:block-28-chunk-2"/>
-          <p:cNvSpPr txBox="1"/>
-          <p:nvPr/>
-        </p:nvSpPr>
-        <p:spPr>
-          <a:xfrm>
-            <a:off x="1133856" y="3489960"/>
-            <a:ext cx="9820656" cy="426720"/>
-          </a:xfrm>
-          <a:prstGeom prst="rect">
-            <a:avLst/>
-          </a:prstGeom>
-          <a:noFill/>
-          <a:ln/>
-        </p:spPr>
-        <p:txBody>
-          <a:bodyPr wrap="square" lIns="0" tIns="25400" rIns="25400" bIns="0" rtlCol="0" anchor="ctr"/>
-          <a:lstStyle/>
-          <a:p>
-            <a:pPr algn="ctr" indent="0" marL="0">
-              <a:lnSpc>
-                <a:spcPct val="120000"/>
-              </a:lnSpc>
-              <a:buNone/>
-            </a:pPr>
-            <a:r>
-              <a:rPr lang="en-US" sz="2200" dirty="0">
-                <a:solidFill>
-                  <a:srgbClr val="111111"/>
-                </a:solidFill>
-                <a:latin typeface="Pretendard" pitchFamily="34" charset="0"/>
-                <a:ea typeface="Pretendard" pitchFamily="34" charset="-122"/>
-                <a:cs typeface="Pretendard" pitchFamily="34" charset="-120"/>
-              </a:rPr>
-              <a:t>Current Approach</a:t>
-            </a:r>
-            <a:endParaRPr lang="en-US" sz="2200" dirty="0"/>
-          </a:p>
-        </p:txBody>
-      </p:sp>
-      <p:sp>
-        <p:nvSpPr>
-          <p:cNvPr id="14" name="mdpr:2-3-4f52c2:item-3:block-28-chunk-2"/>
-          <p:cNvSpPr txBox="1"/>
-          <p:nvPr/>
-        </p:nvSpPr>
-        <p:spPr>
-          <a:xfrm>
-            <a:off x="1133856" y="4806696"/>
-            <a:ext cx="9820656" cy="426720"/>
-          </a:xfrm>
-          <a:prstGeom prst="rect">
-            <a:avLst/>
-          </a:prstGeom>
-          <a:noFill/>
-          <a:ln/>
-        </p:spPr>
-        <p:txBody>
-          <a:bodyPr wrap="square" lIns="0" tIns="25400" rIns="25400" bIns="0" rtlCol="0" anchor="ctr"/>
-          <a:lstStyle/>
-          <a:p>
-            <a:pPr algn="ctr" indent="0" marL="0">
-              <a:lnSpc>
-                <a:spcPct val="120000"/>
-              </a:lnSpc>
-              <a:buNone/>
-            </a:pPr>
-            <a:r>
-              <a:rPr lang="en-US" sz="2200" dirty="0">
-                <a:solidFill>
-                  <a:srgbClr val="111111"/>
-                </a:solidFill>
-                <a:latin typeface="Pretendard" pitchFamily="34" charset="0"/>
-                <a:ea typeface="Pretendard" pitchFamily="34" charset="-122"/>
-                <a:cs typeface="Pretendard" pitchFamily="34" charset="-120"/>
-              </a:rPr>
-              <a:t>Meeting note cleanup</a:t>
-            </a:r>
-            <a:endParaRPr lang="en-US" sz="2200" dirty="0"/>
-          </a:p>
-        </p:txBody>
-      </p:sp>
+      <p:graphicFrame>
+        <p:nvGraphicFramePr>
+          <p:cNvPr id="24" name="mdpr:example-examples-comparison-deck-md-12e155:table:block-30"/>
+          <p:cNvGraphicFramePr>
+            <a:graphicFrameLocks noGrp="1"/>
+          </p:cNvGraphicFramePr>
+          <p:nvPr>
+            <p:extLst>
+              <p:ext uri="{D42A27DB-BD31-4B8C-83A1-F6EECF244321}">
+                <p14:modId xmlns:p14="http://schemas.microsoft.com/office/powerpoint/2010/main" val="1579011935"/>
+              </p:ext>
+            </p:extLst>
+          </p:nvPr>
+        </p:nvGraphicFramePr>
+        <p:xfrm>
+          <a:off x="914400" y="1417320"/>
+          <a:ext cx="10241280" cy="4526280"/>
+        </p:xfrm>
+        <a:graphic>
+          <a:graphicData uri="http://schemas.openxmlformats.org/drawingml/2006/table">
+            <a:tbl>
+              <a:tblPr/>
+              <a:tblGrid>
+                <a:gridCol w="5120640"/>
+                <a:gridCol w="5120640"/>
+              </a:tblGrid>
+              <a:tr h="1131570">
+                <a:tc>
+                  <a:txBody>
+                    <a:bodyPr/>
+                    <a:lstStyle/>
+                    <a:p>
+                      <a:pPr algn="ctr" indent="0" marL="0">
+                        <a:buNone/>
+                      </a:pPr>
+                      <a:r>
+                        <a:rPr lang="en-US" sz="1800" b="1" dirty="0">
+                          <a:solidFill>
+                            <a:srgbClr val="FFFFFF"/>
+                          </a:solidFill>
+                          <a:latin typeface="Pretendard" pitchFamily="34" charset="0"/>
+                          <a:ea typeface="Pretendard" pitchFamily="34" charset="-122"/>
+                          <a:cs typeface="Pretendard" pitchFamily="34" charset="-120"/>
+                        </a:rPr>
+                        <a:t>Current Approach</a:t>
+                      </a:r>
+                      <a:endParaRPr lang="en-US" sz="1800" dirty="0">
+                        <a:latin typeface="Pretendard" charset="0"/>
+                        <a:ea typeface="Pretendard" charset="0"/>
+                        <a:cs typeface="Pretendard" charset="0"/>
+                      </a:endParaRPr>
+                    </a:p>
+                  </a:txBody>
+                  <a:tcPr marL="54864" marR="54864" marT="36576" marB="36576" anchor="ctr">
+                    <a:lnL w="12700" cap="flat" cmpd="sng" algn="ctr">
+                      <a:solidFill>
+                        <a:srgbClr val="E2E8F0"/>
+                      </a:solidFill>
+                      <a:prstDash val="solid"/>
+                      <a:round/>
+                      <a:headEnd type="none" w="med" len="med"/>
+                      <a:tailEnd type="none" w="med" len="med"/>
+                    </a:lnL>
+                    <a:lnR w="12700" cap="flat" cmpd="sng" algn="ctr">
+                      <a:solidFill>
+                        <a:srgbClr val="E2E8F0"/>
+                      </a:solidFill>
+                      <a:prstDash val="solid"/>
+                      <a:round/>
+                      <a:headEnd type="none" w="med" len="med"/>
+                      <a:tailEnd type="none" w="med" len="med"/>
+                    </a:lnR>
+                    <a:lnT w="12700" cap="flat" cmpd="sng" algn="ctr">
+                      <a:solidFill>
+                        <a:srgbClr val="E2E8F0"/>
+                      </a:solidFill>
+                      <a:prstDash val="solid"/>
+                      <a:round/>
+                      <a:headEnd type="none" w="med" len="med"/>
+                      <a:tailEnd type="none" w="med" len="med"/>
+                    </a:lnT>
+                    <a:lnB w="12700" cap="flat" cmpd="sng" algn="ctr">
+                      <a:solidFill>
+                        <a:srgbClr val="E2E8F0"/>
+                      </a:solidFill>
+                      <a:prstDash val="solid"/>
+                      <a:round/>
+                      <a:headEnd type="none" w="med" len="med"/>
+                      <a:tailEnd type="none" w="med" len="med"/>
+                    </a:lnB>
+                    <a:solidFill>
+                      <a:srgbClr val="2563EB"/>
+                    </a:solidFill>
+                  </a:tcPr>
+                </a:tc>
+                <a:tc>
+                  <a:txBody>
+                    <a:bodyPr/>
+                    <a:lstStyle/>
+                    <a:p>
+                      <a:pPr algn="ctr" indent="0" marL="0">
+                        <a:buNone/>
+                      </a:pPr>
+                      <a:r>
+                        <a:rPr lang="en-US" sz="1800" b="1" dirty="0">
+                          <a:solidFill>
+                            <a:srgbClr val="FFFFFF"/>
+                          </a:solidFill>
+                          <a:latin typeface="Pretendard" pitchFamily="34" charset="0"/>
+                          <a:ea typeface="Pretendard" pitchFamily="34" charset="-122"/>
+                          <a:cs typeface="Pretendard" pitchFamily="34" charset="-120"/>
+                        </a:rPr>
+                        <a:t>Improved Approach</a:t>
+                      </a:r>
+                      <a:endParaRPr lang="en-US" sz="1800" dirty="0">
+                        <a:latin typeface="Pretendard" charset="0"/>
+                        <a:ea typeface="Pretendard" charset="0"/>
+                        <a:cs typeface="Pretendard" charset="0"/>
+                      </a:endParaRPr>
+                    </a:p>
+                  </a:txBody>
+                  <a:tcPr marL="54864" marR="54864" marT="36576" marB="36576" anchor="ctr">
+                    <a:lnL w="12700" cap="flat" cmpd="sng" algn="ctr">
+                      <a:solidFill>
+                        <a:srgbClr val="E2E8F0"/>
+                      </a:solidFill>
+                      <a:prstDash val="solid"/>
+                      <a:round/>
+                      <a:headEnd type="none" w="med" len="med"/>
+                      <a:tailEnd type="none" w="med" len="med"/>
+                    </a:lnL>
+                    <a:lnR w="12700" cap="flat" cmpd="sng" algn="ctr">
+                      <a:solidFill>
+                        <a:srgbClr val="E2E8F0"/>
+                      </a:solidFill>
+                      <a:prstDash val="solid"/>
+                      <a:round/>
+                      <a:headEnd type="none" w="med" len="med"/>
+                      <a:tailEnd type="none" w="med" len="med"/>
+                    </a:lnR>
+                    <a:lnT w="12700" cap="flat" cmpd="sng" algn="ctr">
+                      <a:solidFill>
+                        <a:srgbClr val="E2E8F0"/>
+                      </a:solidFill>
+                      <a:prstDash val="solid"/>
+                      <a:round/>
+                      <a:headEnd type="none" w="med" len="med"/>
+                      <a:tailEnd type="none" w="med" len="med"/>
+                    </a:lnT>
+                    <a:lnB w="12700" cap="flat" cmpd="sng" algn="ctr">
+                      <a:solidFill>
+                        <a:srgbClr val="E2E8F0"/>
+                      </a:solidFill>
+                      <a:prstDash val="solid"/>
+                      <a:round/>
+                      <a:headEnd type="none" w="med" len="med"/>
+                      <a:tailEnd type="none" w="med" len="med"/>
+                    </a:lnB>
+                    <a:solidFill>
+                      <a:srgbClr val="2563EB"/>
+                    </a:solidFill>
+                  </a:tcPr>
+                </a:tc>
+              </a:tr>
+              <a:tr h="1131570">
+                <a:tc>
+                  <a:txBody>
+                    <a:bodyPr/>
+                    <a:lstStyle/>
+                    <a:p>
+                      <a:pPr algn="l" indent="0" marL="0">
+                        <a:buNone/>
+                      </a:pPr>
+                      <a:r>
+                        <a:rPr lang="en-US" sz="1800" b="1" dirty="0">
+                          <a:solidFill>
+                            <a:srgbClr val="111111"/>
+                          </a:solidFill>
+                          <a:latin typeface="Pretendard" pitchFamily="34" charset="0"/>
+                          <a:ea typeface="Pretendard" pitchFamily="34" charset="-122"/>
+                          <a:cs typeface="Pretendard" pitchFamily="34" charset="-120"/>
+                        </a:rPr>
+                        <a:t>Documents are written manually</a:t>
+                      </a:r>
+                      <a:endParaRPr lang="en-US" sz="1800" dirty="0">
+                        <a:latin typeface="Pretendard" charset="0"/>
+                        <a:ea typeface="Pretendard" charset="0"/>
+                        <a:cs typeface="Pretendard" charset="0"/>
+                      </a:endParaRPr>
+                    </a:p>
+                  </a:txBody>
+                  <a:tcPr marL="54864" marR="54864" marT="36576" marB="36576" anchor="ctr">
+                    <a:lnL w="12700" cap="flat" cmpd="sng" algn="ctr">
+                      <a:solidFill>
+                        <a:srgbClr val="E2E8F0"/>
+                      </a:solidFill>
+                      <a:prstDash val="solid"/>
+                      <a:round/>
+                      <a:headEnd type="none" w="med" len="med"/>
+                      <a:tailEnd type="none" w="med" len="med"/>
+                    </a:lnL>
+                    <a:lnR w="12700" cap="flat" cmpd="sng" algn="ctr">
+                      <a:solidFill>
+                        <a:srgbClr val="E2E8F0"/>
+                      </a:solidFill>
+                      <a:prstDash val="solid"/>
+                      <a:round/>
+                      <a:headEnd type="none" w="med" len="med"/>
+                      <a:tailEnd type="none" w="med" len="med"/>
+                    </a:lnR>
+                    <a:lnT w="12700" cap="flat" cmpd="sng" algn="ctr">
+                      <a:solidFill>
+                        <a:srgbClr val="E2E8F0"/>
+                      </a:solidFill>
+                      <a:prstDash val="solid"/>
+                      <a:round/>
+                      <a:headEnd type="none" w="med" len="med"/>
+                      <a:tailEnd type="none" w="med" len="med"/>
+                    </a:lnT>
+                    <a:lnB w="12700" cap="flat" cmpd="sng" algn="ctr">
+                      <a:solidFill>
+                        <a:srgbClr val="E2E8F0"/>
+                      </a:solidFill>
+                      <a:prstDash val="solid"/>
+                      <a:round/>
+                      <a:headEnd type="none" w="med" len="med"/>
+                      <a:tailEnd type="none" w="med" len="med"/>
+                    </a:lnB>
+                  </a:tcPr>
+                </a:tc>
+                <a:tc>
+                  <a:txBody>
+                    <a:bodyPr/>
+                    <a:lstStyle/>
+                    <a:p>
+                      <a:pPr algn="l" indent="0" marL="0">
+                        <a:buNone/>
+                      </a:pPr>
+                      <a:r>
+                        <a:rPr lang="en-US" sz="1800" dirty="0">
+                          <a:solidFill>
+                            <a:srgbClr val="111111"/>
+                          </a:solidFill>
+                          <a:latin typeface="Pretendard" pitchFamily="34" charset="0"/>
+                          <a:ea typeface="Pretendard" pitchFamily="34" charset="-122"/>
+                          <a:cs typeface="Pretendard" pitchFamily="34" charset="-120"/>
+                        </a:rPr>
+                        <a:t>Drafts are generated automatically</a:t>
+                      </a:r>
+                      <a:endParaRPr lang="en-US" sz="1800" dirty="0">
+                        <a:latin typeface="Pretendard" charset="0"/>
+                        <a:ea typeface="Pretendard" charset="0"/>
+                        <a:cs typeface="Pretendard" charset="0"/>
+                      </a:endParaRPr>
+                    </a:p>
+                  </a:txBody>
+                  <a:tcPr marL="54864" marR="54864" marT="36576" marB="36576" anchor="ctr">
+                    <a:lnL w="12700" cap="flat" cmpd="sng" algn="ctr">
+                      <a:solidFill>
+                        <a:srgbClr val="E2E8F0"/>
+                      </a:solidFill>
+                      <a:prstDash val="solid"/>
+                      <a:round/>
+                      <a:headEnd type="none" w="med" len="med"/>
+                      <a:tailEnd type="none" w="med" len="med"/>
+                    </a:lnL>
+                    <a:lnR w="12700" cap="flat" cmpd="sng" algn="ctr">
+                      <a:solidFill>
+                        <a:srgbClr val="E2E8F0"/>
+                      </a:solidFill>
+                      <a:prstDash val="solid"/>
+                      <a:round/>
+                      <a:headEnd type="none" w="med" len="med"/>
+                      <a:tailEnd type="none" w="med" len="med"/>
+                    </a:lnR>
+                    <a:lnT w="12700" cap="flat" cmpd="sng" algn="ctr">
+                      <a:solidFill>
+                        <a:srgbClr val="E2E8F0"/>
+                      </a:solidFill>
+                      <a:prstDash val="solid"/>
+                      <a:round/>
+                      <a:headEnd type="none" w="med" len="med"/>
+                      <a:tailEnd type="none" w="med" len="med"/>
+                    </a:lnT>
+                    <a:lnB w="12700" cap="flat" cmpd="sng" algn="ctr">
+                      <a:solidFill>
+                        <a:srgbClr val="E2E8F0"/>
+                      </a:solidFill>
+                      <a:prstDash val="solid"/>
+                      <a:round/>
+                      <a:headEnd type="none" w="med" len="med"/>
+                      <a:tailEnd type="none" w="med" len="med"/>
+                    </a:lnB>
+                  </a:tcPr>
+                </a:tc>
+              </a:tr>
+              <a:tr h="1131570">
+                <a:tc>
+                  <a:txBody>
+                    <a:bodyPr/>
+                    <a:lstStyle/>
+                    <a:p>
+                      <a:pPr algn="l" indent="0" marL="0">
+                        <a:buNone/>
+                      </a:pPr>
+                      <a:r>
+                        <a:rPr lang="en-US" sz="1800" b="1" dirty="0">
+                          <a:solidFill>
+                            <a:srgbClr val="111111"/>
+                          </a:solidFill>
+                          <a:latin typeface="Pretendard" pitchFamily="34" charset="0"/>
+                          <a:ea typeface="Pretendard" pitchFamily="34" charset="-122"/>
+                          <a:cs typeface="Pretendard" pitchFamily="34" charset="-120"/>
+                        </a:rPr>
+                        <a:t>Format varies by person</a:t>
+                      </a:r>
+                      <a:endParaRPr lang="en-US" sz="1800" dirty="0">
+                        <a:latin typeface="Pretendard" charset="0"/>
+                        <a:ea typeface="Pretendard" charset="0"/>
+                        <a:cs typeface="Pretendard" charset="0"/>
+                      </a:endParaRPr>
+                    </a:p>
+                  </a:txBody>
+                  <a:tcPr marL="54864" marR="54864" marT="36576" marB="36576" anchor="ctr">
+                    <a:lnL w="12700" cap="flat" cmpd="sng" algn="ctr">
+                      <a:solidFill>
+                        <a:srgbClr val="E2E8F0"/>
+                      </a:solidFill>
+                      <a:prstDash val="solid"/>
+                      <a:round/>
+                      <a:headEnd type="none" w="med" len="med"/>
+                      <a:tailEnd type="none" w="med" len="med"/>
+                    </a:lnL>
+                    <a:lnR w="12700" cap="flat" cmpd="sng" algn="ctr">
+                      <a:solidFill>
+                        <a:srgbClr val="E2E8F0"/>
+                      </a:solidFill>
+                      <a:prstDash val="solid"/>
+                      <a:round/>
+                      <a:headEnd type="none" w="med" len="med"/>
+                      <a:tailEnd type="none" w="med" len="med"/>
+                    </a:lnR>
+                    <a:lnT w="12700" cap="flat" cmpd="sng" algn="ctr">
+                      <a:solidFill>
+                        <a:srgbClr val="E2E8F0"/>
+                      </a:solidFill>
+                      <a:prstDash val="solid"/>
+                      <a:round/>
+                      <a:headEnd type="none" w="med" len="med"/>
+                      <a:tailEnd type="none" w="med" len="med"/>
+                    </a:lnT>
+                    <a:lnB w="12700" cap="flat" cmpd="sng" algn="ctr">
+                      <a:solidFill>
+                        <a:srgbClr val="E2E8F0"/>
+                      </a:solidFill>
+                      <a:prstDash val="solid"/>
+                      <a:round/>
+                      <a:headEnd type="none" w="med" len="med"/>
+                      <a:tailEnd type="none" w="med" len="med"/>
+                    </a:lnB>
+                    <a:solidFill>
+                      <a:srgbClr val="FFFFFF">
+                        <a:alpha val="80000"/>
+                      </a:srgbClr>
+                    </a:solidFill>
+                  </a:tcPr>
+                </a:tc>
+                <a:tc>
+                  <a:txBody>
+                    <a:bodyPr/>
+                    <a:lstStyle/>
+                    <a:p>
+                      <a:pPr algn="l" indent="0" marL="0">
+                        <a:buNone/>
+                      </a:pPr>
+                      <a:r>
+                        <a:rPr lang="en-US" sz="1800" dirty="0">
+                          <a:solidFill>
+                            <a:srgbClr val="111111"/>
+                          </a:solidFill>
+                          <a:latin typeface="Pretendard" pitchFamily="34" charset="0"/>
+                          <a:ea typeface="Pretendard" pitchFamily="34" charset="-122"/>
+                          <a:cs typeface="Pretendard" pitchFamily="34" charset="-120"/>
+                        </a:rPr>
+                        <a:t>Format is standardized by template</a:t>
+                      </a:r>
+                      <a:endParaRPr lang="en-US" sz="1800" dirty="0">
+                        <a:latin typeface="Pretendard" charset="0"/>
+                        <a:ea typeface="Pretendard" charset="0"/>
+                        <a:cs typeface="Pretendard" charset="0"/>
+                      </a:endParaRPr>
+                    </a:p>
+                  </a:txBody>
+                  <a:tcPr marL="54864" marR="54864" marT="36576" marB="36576" anchor="ctr">
+                    <a:lnL w="12700" cap="flat" cmpd="sng" algn="ctr">
+                      <a:solidFill>
+                        <a:srgbClr val="E2E8F0"/>
+                      </a:solidFill>
+                      <a:prstDash val="solid"/>
+                      <a:round/>
+                      <a:headEnd type="none" w="med" len="med"/>
+                      <a:tailEnd type="none" w="med" len="med"/>
+                    </a:lnL>
+                    <a:lnR w="12700" cap="flat" cmpd="sng" algn="ctr">
+                      <a:solidFill>
+                        <a:srgbClr val="E2E8F0"/>
+                      </a:solidFill>
+                      <a:prstDash val="solid"/>
+                      <a:round/>
+                      <a:headEnd type="none" w="med" len="med"/>
+                      <a:tailEnd type="none" w="med" len="med"/>
+                    </a:lnR>
+                    <a:lnT w="12700" cap="flat" cmpd="sng" algn="ctr">
+                      <a:solidFill>
+                        <a:srgbClr val="E2E8F0"/>
+                      </a:solidFill>
+                      <a:prstDash val="solid"/>
+                      <a:round/>
+                      <a:headEnd type="none" w="med" len="med"/>
+                      <a:tailEnd type="none" w="med" len="med"/>
+                    </a:lnT>
+                    <a:lnB w="12700" cap="flat" cmpd="sng" algn="ctr">
+                      <a:solidFill>
+                        <a:srgbClr val="E2E8F0"/>
+                      </a:solidFill>
+                      <a:prstDash val="solid"/>
+                      <a:round/>
+                      <a:headEnd type="none" w="med" len="med"/>
+                      <a:tailEnd type="none" w="med" len="med"/>
+                    </a:lnB>
+                    <a:solidFill>
+                      <a:srgbClr val="FFFFFF">
+                        <a:alpha val="80000"/>
+                      </a:srgbClr>
+                    </a:solidFill>
+                  </a:tcPr>
+                </a:tc>
+              </a:tr>
+              <a:tr h="1131570">
+                <a:tc>
+                  <a:txBody>
+                    <a:bodyPr/>
+                    <a:lstStyle/>
+                    <a:p>
+                      <a:pPr algn="l" indent="0" marL="0">
+                        <a:buNone/>
+                      </a:pPr>
+                      <a:r>
+                        <a:rPr lang="en-US" sz="1800" b="1" dirty="0">
+                          <a:solidFill>
+                            <a:srgbClr val="111111"/>
+                          </a:solidFill>
+                          <a:latin typeface="Pretendard" pitchFamily="34" charset="0"/>
+                          <a:ea typeface="Pretendard" pitchFamily="34" charset="-122"/>
+                          <a:cs typeface="Pretendard" pitchFamily="34" charset="-120"/>
+                        </a:rPr>
+                        <a:t>Search is difficult</a:t>
+                      </a:r>
+                      <a:endParaRPr lang="en-US" sz="1800" dirty="0">
+                        <a:latin typeface="Pretendard" charset="0"/>
+                        <a:ea typeface="Pretendard" charset="0"/>
+                        <a:cs typeface="Pretendard" charset="0"/>
+                      </a:endParaRPr>
+                    </a:p>
+                  </a:txBody>
+                  <a:tcPr marL="54864" marR="54864" marT="36576" marB="36576" anchor="ctr">
+                    <a:lnL w="12700" cap="flat" cmpd="sng" algn="ctr">
+                      <a:solidFill>
+                        <a:srgbClr val="E2E8F0"/>
+                      </a:solidFill>
+                      <a:prstDash val="solid"/>
+                      <a:round/>
+                      <a:headEnd type="none" w="med" len="med"/>
+                      <a:tailEnd type="none" w="med" len="med"/>
+                    </a:lnL>
+                    <a:lnR w="12700" cap="flat" cmpd="sng" algn="ctr">
+                      <a:solidFill>
+                        <a:srgbClr val="E2E8F0"/>
+                      </a:solidFill>
+                      <a:prstDash val="solid"/>
+                      <a:round/>
+                      <a:headEnd type="none" w="med" len="med"/>
+                      <a:tailEnd type="none" w="med" len="med"/>
+                    </a:lnR>
+                    <a:lnT w="12700" cap="flat" cmpd="sng" algn="ctr">
+                      <a:solidFill>
+                        <a:srgbClr val="E2E8F0"/>
+                      </a:solidFill>
+                      <a:prstDash val="solid"/>
+                      <a:round/>
+                      <a:headEnd type="none" w="med" len="med"/>
+                      <a:tailEnd type="none" w="med" len="med"/>
+                    </a:lnT>
+                    <a:lnB w="12700" cap="flat" cmpd="sng" algn="ctr">
+                      <a:solidFill>
+                        <a:srgbClr val="E2E8F0"/>
+                      </a:solidFill>
+                      <a:prstDash val="solid"/>
+                      <a:round/>
+                      <a:headEnd type="none" w="med" len="med"/>
+                      <a:tailEnd type="none" w="med" len="med"/>
+                    </a:lnB>
+                  </a:tcPr>
+                </a:tc>
+                <a:tc>
+                  <a:txBody>
+                    <a:bodyPr/>
+                    <a:lstStyle/>
+                    <a:p>
+                      <a:pPr algn="l" indent="0" marL="0">
+                        <a:buNone/>
+                      </a:pPr>
+                      <a:r>
+                        <a:rPr lang="en-US" sz="1800" dirty="0">
+                          <a:solidFill>
+                            <a:srgbClr val="111111"/>
+                          </a:solidFill>
+                          <a:latin typeface="Pretendard" pitchFamily="34" charset="0"/>
+                          <a:ea typeface="Pretendard" pitchFamily="34" charset="-122"/>
+                          <a:cs typeface="Pretendard" pitchFamily="34" charset="-120"/>
+                        </a:rPr>
+                        <a:t>Semantic search is available</a:t>
+                      </a:r>
+                      <a:endParaRPr lang="en-US" sz="1800" dirty="0">
+                        <a:latin typeface="Pretendard" charset="0"/>
+                        <a:ea typeface="Pretendard" charset="0"/>
+                        <a:cs typeface="Pretendard" charset="0"/>
+                      </a:endParaRPr>
+                    </a:p>
+                  </a:txBody>
+                  <a:tcPr marL="54864" marR="54864" marT="36576" marB="36576" anchor="ctr">
+                    <a:lnL w="12700" cap="flat" cmpd="sng" algn="ctr">
+                      <a:solidFill>
+                        <a:srgbClr val="E2E8F0"/>
+                      </a:solidFill>
+                      <a:prstDash val="solid"/>
+                      <a:round/>
+                      <a:headEnd type="none" w="med" len="med"/>
+                      <a:tailEnd type="none" w="med" len="med"/>
+                    </a:lnL>
+                    <a:lnR w="12700" cap="flat" cmpd="sng" algn="ctr">
+                      <a:solidFill>
+                        <a:srgbClr val="E2E8F0"/>
+                      </a:solidFill>
+                      <a:prstDash val="solid"/>
+                      <a:round/>
+                      <a:headEnd type="none" w="med" len="med"/>
+                      <a:tailEnd type="none" w="med" len="med"/>
+                    </a:lnR>
+                    <a:lnT w="12700" cap="flat" cmpd="sng" algn="ctr">
+                      <a:solidFill>
+                        <a:srgbClr val="E2E8F0"/>
+                      </a:solidFill>
+                      <a:prstDash val="solid"/>
+                      <a:round/>
+                      <a:headEnd type="none" w="med" len="med"/>
+                      <a:tailEnd type="none" w="med" len="med"/>
+                    </a:lnT>
+                    <a:lnB w="12700" cap="flat" cmpd="sng" algn="ctr">
+                      <a:solidFill>
+                        <a:srgbClr val="E2E8F0"/>
+                      </a:solidFill>
+                      <a:prstDash val="solid"/>
+                      <a:round/>
+                      <a:headEnd type="none" w="med" len="med"/>
+                      <a:tailEnd type="none" w="med" len="med"/>
+                    </a:lnB>
+                  </a:tcPr>
+                </a:tc>
+              </a:tr>
+            </a:tbl>
+          </a:graphicData>
+        </a:graphic>
+      </p:graphicFrame>
     </p:spTree>
   </p:cSld>
   <p:clrMapOvr>
@@ -11118,16 +11169,280 @@
           <a:chExt cx="0" cy="0"/>
         </a:xfrm>
       </p:grpSpPr>
-      <p:sp>
-        <p:nvSpPr>
-          <p:cNvPr id="2" name="Shape 0"/>
+      <p:pic>
+        <p:nvPicPr>
+          <p:cNvPr id="2" name="Image 0" descr="preencoded.png">    </p:cNvPr>
+          <p:cNvPicPr>
+            <a:picLocks noChangeAspect="1"/>
+          </p:cNvPicPr>
+          <p:nvPr/>
+        </p:nvPicPr>
+        <p:blipFill>
+          <a:blip r:embed="rId1">
+            <a:extLst>
+              <a:ext uri="{96DAC541-7B7A-43D3-8B79-37D633B846F1}">
+                <asvg:svgBlip xmlns:asvg="http://schemas.microsoft.com/office/drawing/2016/SVG/main" r:embed="rId2"/>
+              </a:ext>
+            </a:extLst>
+          </a:blip>
+          <a:stretch>
+            <a:fillRect/>
+          </a:stretch>
+        </p:blipFill>
+        <p:spPr>
+          <a:xfrm>
+            <a:off x="822960" y="1463040"/>
+            <a:ext cx="5029200" cy="1920240"/>
+          </a:xfrm>
+          <a:prstGeom prst="rect">
+            <a:avLst/>
+          </a:prstGeom>
+        </p:spPr>
+      </p:pic>
+      <p:sp>
+        <p:nvSpPr>
+          <p:cNvPr id="3" name="Shape 0"/>
           <p:cNvSpPr/>
           <p:nvPr/>
         </p:nvSpPr>
         <p:spPr>
           <a:xfrm>
-            <a:off x="822960" y="2487168"/>
-            <a:ext cx="73152" cy="1417320"/>
+            <a:off x="822960" y="1463040"/>
+            <a:ext cx="5029200" cy="1920240"/>
+          </a:xfrm>
+          <a:prstGeom prst="rect">
+            <a:avLst/>
+          </a:prstGeom>
+          <a:solidFill>
+            <a:srgbClr val="FFFFFF">
+              <a:alpha val="0"/>
+            </a:srgbClr>
+          </a:solidFill>
+          <a:ln w="12700">
+            <a:solidFill>
+              <a:srgbClr val="E2E8F0">
+                <a:alpha val="0"/>
+              </a:srgbClr>
+            </a:solidFill>
+            <a:prstDash val="solid"/>
+          </a:ln>
+          <a:effectLst>
+            <a:outerShdw sx="100000" sy="100000" kx="0" ky="0" algn="bl" rotWithShape="0" blurRad="12700" dist="50800" dir="2700000">
+              <a:srgbClr val="000000">
+                <a:alpha val="8000"/>
+              </a:srgbClr>
+            </a:outerShdw>
+          </a:effectLst>
+        </p:spPr>
+      </p:sp>
+      <p:pic>
+        <p:nvPicPr>
+          <p:cNvPr id="4" name="Image 1" descr="preencoded.png">    </p:cNvPr>
+          <p:cNvPicPr>
+            <a:picLocks noChangeAspect="1"/>
+          </p:cNvPicPr>
+          <p:nvPr/>
+        </p:nvPicPr>
+        <p:blipFill>
+          <a:blip r:embed="rId3">
+            <a:extLst>
+              <a:ext uri="{96DAC541-7B7A-43D3-8B79-37D633B846F1}">
+                <asvg:svgBlip xmlns:asvg="http://schemas.microsoft.com/office/drawing/2016/SVG/main" r:embed="rId4"/>
+              </a:ext>
+            </a:extLst>
+          </a:blip>
+          <a:stretch>
+            <a:fillRect/>
+          </a:stretch>
+        </p:blipFill>
+        <p:spPr>
+          <a:xfrm>
+            <a:off x="6309360" y="1463040"/>
+            <a:ext cx="5029200" cy="1920240"/>
+          </a:xfrm>
+          <a:prstGeom prst="rect">
+            <a:avLst/>
+          </a:prstGeom>
+        </p:spPr>
+      </p:pic>
+      <p:sp>
+        <p:nvSpPr>
+          <p:cNvPr id="5" name="Shape 1"/>
+          <p:cNvSpPr/>
+          <p:nvPr/>
+        </p:nvSpPr>
+        <p:spPr>
+          <a:xfrm>
+            <a:off x="6309360" y="1463040"/>
+            <a:ext cx="5029200" cy="1920240"/>
+          </a:xfrm>
+          <a:prstGeom prst="rect">
+            <a:avLst/>
+          </a:prstGeom>
+          <a:solidFill>
+            <a:srgbClr val="FFFFFF">
+              <a:alpha val="0"/>
+            </a:srgbClr>
+          </a:solidFill>
+          <a:ln w="12700">
+            <a:solidFill>
+              <a:srgbClr val="E2E8F0">
+                <a:alpha val="0"/>
+              </a:srgbClr>
+            </a:solidFill>
+            <a:prstDash val="solid"/>
+          </a:ln>
+          <a:effectLst>
+            <a:outerShdw sx="100000" sy="100000" kx="0" ky="0" algn="bl" rotWithShape="0" blurRad="12700" dist="50800" dir="2700000">
+              <a:srgbClr val="000000">
+                <a:alpha val="8000"/>
+              </a:srgbClr>
+            </a:outerShdw>
+          </a:effectLst>
+        </p:spPr>
+      </p:sp>
+      <p:pic>
+        <p:nvPicPr>
+          <p:cNvPr id="6" name="Image 2" descr="preencoded.png">    </p:cNvPr>
+          <p:cNvPicPr>
+            <a:picLocks noChangeAspect="1"/>
+          </p:cNvPicPr>
+          <p:nvPr/>
+        </p:nvPicPr>
+        <p:blipFill>
+          <a:blip r:embed="rId5">
+            <a:extLst>
+              <a:ext uri="{96DAC541-7B7A-43D3-8B79-37D633B846F1}">
+                <asvg:svgBlip xmlns:asvg="http://schemas.microsoft.com/office/drawing/2016/SVG/main" r:embed="rId6"/>
+              </a:ext>
+            </a:extLst>
+          </a:blip>
+          <a:stretch>
+            <a:fillRect/>
+          </a:stretch>
+        </p:blipFill>
+        <p:spPr>
+          <a:xfrm>
+            <a:off x="822960" y="3749040"/>
+            <a:ext cx="5029200" cy="1920240"/>
+          </a:xfrm>
+          <a:prstGeom prst="rect">
+            <a:avLst/>
+          </a:prstGeom>
+        </p:spPr>
+      </p:pic>
+      <p:sp>
+        <p:nvSpPr>
+          <p:cNvPr id="7" name="Shape 2"/>
+          <p:cNvSpPr/>
+          <p:nvPr/>
+        </p:nvSpPr>
+        <p:spPr>
+          <a:xfrm>
+            <a:off x="822960" y="3749040"/>
+            <a:ext cx="5029200" cy="1920240"/>
+          </a:xfrm>
+          <a:prstGeom prst="rect">
+            <a:avLst/>
+          </a:prstGeom>
+          <a:solidFill>
+            <a:srgbClr val="FFFFFF">
+              <a:alpha val="0"/>
+            </a:srgbClr>
+          </a:solidFill>
+          <a:ln w="12700">
+            <a:solidFill>
+              <a:srgbClr val="E2E8F0">
+                <a:alpha val="0"/>
+              </a:srgbClr>
+            </a:solidFill>
+            <a:prstDash val="solid"/>
+          </a:ln>
+          <a:effectLst>
+            <a:outerShdw sx="100000" sy="100000" kx="0" ky="0" algn="bl" rotWithShape="0" blurRad="12700" dist="50800" dir="2700000">
+              <a:srgbClr val="000000">
+                <a:alpha val="8000"/>
+              </a:srgbClr>
+            </a:outerShdw>
+          </a:effectLst>
+        </p:spPr>
+      </p:sp>
+      <p:pic>
+        <p:nvPicPr>
+          <p:cNvPr id="8" name="Image 3" descr="preencoded.png">    </p:cNvPr>
+          <p:cNvPicPr>
+            <a:picLocks noChangeAspect="1"/>
+          </p:cNvPicPr>
+          <p:nvPr/>
+        </p:nvPicPr>
+        <p:blipFill>
+          <a:blip r:embed="rId7">
+            <a:extLst>
+              <a:ext uri="{96DAC541-7B7A-43D3-8B79-37D633B846F1}">
+                <asvg:svgBlip xmlns:asvg="http://schemas.microsoft.com/office/drawing/2016/SVG/main" r:embed="rId8"/>
+              </a:ext>
+            </a:extLst>
+          </a:blip>
+          <a:stretch>
+            <a:fillRect/>
+          </a:stretch>
+        </p:blipFill>
+        <p:spPr>
+          <a:xfrm>
+            <a:off x="6309360" y="3749040"/>
+            <a:ext cx="5029200" cy="1920240"/>
+          </a:xfrm>
+          <a:prstGeom prst="rect">
+            <a:avLst/>
+          </a:prstGeom>
+        </p:spPr>
+      </p:pic>
+      <p:sp>
+        <p:nvSpPr>
+          <p:cNvPr id="9" name="Shape 3"/>
+          <p:cNvSpPr/>
+          <p:nvPr/>
+        </p:nvSpPr>
+        <p:spPr>
+          <a:xfrm>
+            <a:off x="6309360" y="3749040"/>
+            <a:ext cx="5029200" cy="1920240"/>
+          </a:xfrm>
+          <a:prstGeom prst="rect">
+            <a:avLst/>
+          </a:prstGeom>
+          <a:solidFill>
+            <a:srgbClr val="FFFFFF">
+              <a:alpha val="0"/>
+            </a:srgbClr>
+          </a:solidFill>
+          <a:ln w="12700">
+            <a:solidFill>
+              <a:srgbClr val="E2E8F0">
+                <a:alpha val="0"/>
+              </a:srgbClr>
+            </a:solidFill>
+            <a:prstDash val="solid"/>
+          </a:ln>
+          <a:effectLst>
+            <a:outerShdw sx="100000" sy="100000" kx="0" ky="0" algn="bl" rotWithShape="0" blurRad="12700" dist="50800" dir="2700000">
+              <a:srgbClr val="000000">
+                <a:alpha val="8000"/>
+              </a:srgbClr>
+            </a:outerShdw>
+          </a:effectLst>
+        </p:spPr>
+      </p:sp>
+      <p:sp>
+        <p:nvSpPr>
+          <p:cNvPr id="10" name="Shape 4"/>
+          <p:cNvSpPr/>
+          <p:nvPr/>
+        </p:nvSpPr>
+        <p:spPr>
+          <a:xfrm>
+            <a:off x="822960" y="1463040"/>
+            <a:ext cx="73152" cy="1920240"/>
           </a:xfrm>
           <a:prstGeom prst="rect">
             <a:avLst/>
@@ -11147,14 +11462,14 @@
       </p:sp>
       <p:sp>
         <p:nvSpPr>
-          <p:cNvPr id="3" name="Shape 1"/>
+          <p:cNvPr id="11" name="Shape 5"/>
           <p:cNvSpPr/>
           <p:nvPr/>
         </p:nvSpPr>
         <p:spPr>
           <a:xfrm>
-            <a:off x="4343400" y="2487168"/>
-            <a:ext cx="73152" cy="1417320"/>
+            <a:off x="6309360" y="1463040"/>
+            <a:ext cx="73152" cy="1920240"/>
           </a:xfrm>
           <a:prstGeom prst="rect">
             <a:avLst/>
@@ -11174,14 +11489,14 @@
       </p:sp>
       <p:sp>
         <p:nvSpPr>
-          <p:cNvPr id="4" name="Shape 2"/>
+          <p:cNvPr id="12" name="Shape 6"/>
           <p:cNvSpPr/>
           <p:nvPr/>
         </p:nvSpPr>
         <p:spPr>
           <a:xfrm>
-            <a:off x="7863840" y="2487168"/>
-            <a:ext cx="73152" cy="1417320"/>
+            <a:off x="822960" y="3749040"/>
+            <a:ext cx="73152" cy="1920240"/>
           </a:xfrm>
           <a:prstGeom prst="rect">
             <a:avLst/>
@@ -11201,7 +11516,34 @@
       </p:sp>
       <p:sp>
         <p:nvSpPr>
-          <p:cNvPr id="5" name="mdpr:3-3-9304f5:title:__title:3-3-9304f5"/>
+          <p:cNvPr id="13" name="Shape 7"/>
+          <p:cNvSpPr/>
+          <p:nvPr/>
+        </p:nvSpPr>
+        <p:spPr>
+          <a:xfrm>
+            <a:off x="6309360" y="3749040"/>
+            <a:ext cx="73152" cy="1920240"/>
+          </a:xfrm>
+          <a:prstGeom prst="rect">
+            <a:avLst/>
+          </a:prstGeom>
+          <a:solidFill>
+            <a:srgbClr val="DBEAFE"/>
+          </a:solidFill>
+          <a:ln w="12700">
+            <a:solidFill>
+              <a:srgbClr val="DBEAFE">
+                <a:alpha val="0"/>
+              </a:srgbClr>
+            </a:solidFill>
+            <a:prstDash val="solid"/>
+          </a:ln>
+        </p:spPr>
+      </p:sp>
+      <p:sp>
+        <p:nvSpPr>
+          <p:cNvPr id="14" name="mdpr:1-2-1624b4:title:__title:1-2-1624b4"/>
           <p:cNvSpPr txBox="1"/>
           <p:nvPr/>
         </p:nvSpPr>
@@ -11235,24 +11577,7 @@
                 <a:ea typeface="Pretendard" pitchFamily="34" charset="-122"/>
                 <a:cs typeface="Pretendard" pitchFamily="34" charset="-120"/>
               </a:rPr>
-              <a:t>Example: examples/basic/deck.md</a:t>
-            </a:r>
-            <a:pPr algn="ctr" indent="0" marL="0">
-              <a:lnSpc>
-                <a:spcPct val="120000"/>
-              </a:lnSpc>
-              <a:buNone/>
-            </a:pPr>
-            <a:r>
-              <a:rPr lang="en-US" sz="2000" dirty="0">
-                <a:solidFill>
-                  <a:srgbClr val="919191"/>
-                </a:solidFill>
-                <a:latin typeface="Pretendard" pitchFamily="34" charset="0"/>
-                <a:ea typeface="Pretendard" pitchFamily="34" charset="-122"/>
-                <a:cs typeface="Pretendard" pitchFamily="34" charset="-120"/>
-              </a:rPr>
-              <a:t> (Cont. 3/3)</a:t>
+              <a:t>Example: examples/pipeline/deck.md</a:t>
             </a:r>
             <a:endParaRPr lang="en-US" sz="3400" dirty="0"/>
           </a:p>
@@ -11260,14 +11585,14 @@
       </p:sp>
       <p:sp>
         <p:nvSpPr>
-          <p:cNvPr id="6" name="mdpr:3-3-9304f5:item-1:block-28-chunk-3"/>
+          <p:cNvPr id="15" name="mdpr:1-2-1624b4:item-1:block-32-chunk-1"/>
           <p:cNvSpPr txBox="1"/>
           <p:nvPr/>
         </p:nvSpPr>
         <p:spPr>
           <a:xfrm>
-            <a:off x="1042416" y="2982468"/>
-            <a:ext cx="2825496" cy="426720"/>
+            <a:off x="1042416" y="2209800"/>
+            <a:ext cx="4608576" cy="426720"/>
           </a:xfrm>
           <a:prstGeom prst="rect">
             <a:avLst/>
@@ -11294,7 +11619,7 @@
                 <a:ea typeface="Pretendard" pitchFamily="34" charset="-122"/>
                 <a:cs typeface="Pretendard" pitchFamily="34" charset="-120"/>
               </a:rPr>
-              <a:t>Report draft writing</a:t>
+              <a:t>Pipeline Example</a:t>
             </a:r>
             <a:endParaRPr lang="en-US" sz="2200" dirty="0"/>
           </a:p>
@@ -11302,14 +11627,14 @@
       </p:sp>
       <p:sp>
         <p:nvSpPr>
-          <p:cNvPr id="7" name="mdpr:3-3-9304f5:item-2:block-28-chunk-3"/>
+          <p:cNvPr id="16" name="mdpr:1-2-1624b4:item-2:block-32-chunk-1"/>
           <p:cNvSpPr txBox="1"/>
           <p:nvPr/>
         </p:nvSpPr>
         <p:spPr>
           <a:xfrm>
-            <a:off x="4562856" y="2982468"/>
-            <a:ext cx="2825496" cy="426720"/>
+            <a:off x="6528816" y="2209800"/>
+            <a:ext cx="4608576" cy="426720"/>
           </a:xfrm>
           <a:prstGeom prst="rect">
             <a:avLst/>
@@ -11336,7 +11661,7 @@
                 <a:ea typeface="Pretendard" pitchFamily="34" charset="-122"/>
                 <a:cs typeface="Pretendard" pitchFamily="34" charset="-120"/>
               </a:rPr>
-              <a:t>Data collection</a:t>
+              <a:t>Publishing Flow</a:t>
             </a:r>
             <a:endParaRPr lang="en-US" sz="2200" dirty="0"/>
           </a:p>
@@ -11344,14 +11669,14 @@
       </p:sp>
       <p:sp>
         <p:nvSpPr>
-          <p:cNvPr id="8" name="mdpr:3-3-9304f5:item-3:block-28-chunk-3"/>
+          <p:cNvPr id="17" name="mdpr:1-2-1624b4:item-3:block-32-chunk-1"/>
           <p:cNvSpPr txBox="1"/>
           <p:nvPr/>
         </p:nvSpPr>
         <p:spPr>
           <a:xfrm>
-            <a:off x="8083296" y="2814828"/>
-            <a:ext cx="2825496" cy="762000"/>
+            <a:off x="1042416" y="4495800"/>
+            <a:ext cx="4608576" cy="426720"/>
           </a:xfrm>
           <a:prstGeom prst="rect">
             <a:avLst/>
@@ -11378,7 +11703,49 @@
                 <a:ea typeface="Pretendard" pitchFamily="34" charset="-122"/>
                 <a:cs typeface="Pretendard" pitchFamily="34" charset="-120"/>
               </a:rPr>
-              <a:t>Source location is unclear</a:t>
+              <a:t>Five-Part Method</a:t>
+            </a:r>
+            <a:endParaRPr lang="en-US" sz="2200" dirty="0"/>
+          </a:p>
+        </p:txBody>
+      </p:sp>
+      <p:sp>
+        <p:nvSpPr>
+          <p:cNvPr id="18" name="mdpr:1-2-1624b4:item-4:block-32-chunk-1"/>
+          <p:cNvSpPr txBox="1"/>
+          <p:nvPr/>
+        </p:nvSpPr>
+        <p:spPr>
+          <a:xfrm>
+            <a:off x="6729984" y="4495800"/>
+            <a:ext cx="4407408" cy="426720"/>
+          </a:xfrm>
+          <a:prstGeom prst="rect">
+            <a:avLst/>
+          </a:prstGeom>
+          <a:noFill/>
+          <a:ln/>
+        </p:spPr>
+        <p:txBody>
+          <a:bodyPr wrap="square" lIns="0" tIns="25400" rIns="25400" bIns="0" rtlCol="0" anchor="ctr"/>
+          <a:lstStyle/>
+          <a:p>
+            <a:pPr algn="ctr" indent="0" marL="0">
+              <a:lnSpc>
+                <a:spcPct val="120000"/>
+              </a:lnSpc>
+              <a:buNone/>
+            </a:pPr>
+            <a:r>
+              <a:rPr lang="en-US" sz="2200" dirty="0">
+                <a:solidFill>
+                  <a:srgbClr val="111111"/>
+                </a:solidFill>
+                <a:latin typeface="Pretendard" pitchFamily="34" charset="0"/>
+                <a:ea typeface="Pretendard" pitchFamily="34" charset="-122"/>
+                <a:cs typeface="Pretendard" pitchFamily="34" charset="-120"/>
+              </a:rPr>
+              <a:t>  Capture source</a:t>
             </a:r>
             <a:endParaRPr lang="en-US" sz="2200" dirty="0"/>
           </a:p>
@@ -11438,8 +11805,8 @@
         </p:blipFill>
         <p:spPr>
           <a:xfrm>
-            <a:off x="822960" y="1463040"/>
-            <a:ext cx="5029200" cy="1920240"/>
+            <a:off x="914400" y="1865376"/>
+            <a:ext cx="10241280" cy="1024128"/>
           </a:xfrm>
           <a:prstGeom prst="rect">
             <a:avLst/>
@@ -11454,8 +11821,8 @@
         </p:nvSpPr>
         <p:spPr>
           <a:xfrm>
-            <a:off x="822960" y="1463040"/>
-            <a:ext cx="5029200" cy="1920240"/>
+            <a:off x="914400" y="1865376"/>
+            <a:ext cx="10241280" cy="1024128"/>
           </a:xfrm>
           <a:prstGeom prst="rect">
             <a:avLst/>
@@ -11504,8 +11871,8 @@
         </p:blipFill>
         <p:spPr>
           <a:xfrm>
-            <a:off x="6309360" y="1463040"/>
-            <a:ext cx="5029200" cy="1920240"/>
+            <a:off x="914400" y="3191256"/>
+            <a:ext cx="10241280" cy="1024128"/>
           </a:xfrm>
           <a:prstGeom prst="rect">
             <a:avLst/>
@@ -11520,8 +11887,8 @@
         </p:nvSpPr>
         <p:spPr>
           <a:xfrm>
-            <a:off x="6309360" y="1463040"/>
-            <a:ext cx="5029200" cy="1920240"/>
+            <a:off x="914400" y="3191256"/>
+            <a:ext cx="10241280" cy="1024128"/>
           </a:xfrm>
           <a:prstGeom prst="rect">
             <a:avLst/>
@@ -11570,8 +11937,8 @@
         </p:blipFill>
         <p:spPr>
           <a:xfrm>
-            <a:off x="822960" y="3749040"/>
-            <a:ext cx="5029200" cy="1920240"/>
+            <a:off x="914400" y="4507992"/>
+            <a:ext cx="10241280" cy="1024128"/>
           </a:xfrm>
           <a:prstGeom prst="rect">
             <a:avLst/>
@@ -11586,8 +11953,8 @@
         </p:nvSpPr>
         <p:spPr>
           <a:xfrm>
-            <a:off x="822960" y="3749040"/>
-            <a:ext cx="5029200" cy="1920240"/>
+            <a:off x="914400" y="4507992"/>
+            <a:ext cx="10241280" cy="1024128"/>
           </a:xfrm>
           <a:prstGeom prst="rect">
             <a:avLst/>
@@ -11614,82 +11981,16 @@
           </a:effectLst>
         </p:spPr>
       </p:sp>
-      <p:pic>
-        <p:nvPicPr>
-          <p:cNvPr id="8" name="Image 3" descr="preencoded.png">    </p:cNvPr>
-          <p:cNvPicPr>
-            <a:picLocks noChangeAspect="1"/>
-          </p:cNvPicPr>
-          <p:nvPr/>
-        </p:nvPicPr>
-        <p:blipFill>
-          <a:blip r:embed="rId7">
-            <a:extLst>
-              <a:ext uri="{96DAC541-7B7A-43D3-8B79-37D633B846F1}">
-                <asvg:svgBlip xmlns:asvg="http://schemas.microsoft.com/office/drawing/2016/SVG/main" r:embed="rId8"/>
-              </a:ext>
-            </a:extLst>
-          </a:blip>
-          <a:stretch>
-            <a:fillRect/>
-          </a:stretch>
-        </p:blipFill>
-        <p:spPr>
-          <a:xfrm>
-            <a:off x="6309360" y="3749040"/>
-            <a:ext cx="5029200" cy="1920240"/>
-          </a:xfrm>
-          <a:prstGeom prst="rect">
-            <a:avLst/>
-          </a:prstGeom>
-        </p:spPr>
-      </p:pic>
-      <p:sp>
-        <p:nvSpPr>
-          <p:cNvPr id="9" name="Shape 3"/>
+      <p:sp>
+        <p:nvSpPr>
+          <p:cNvPr id="8" name="Shape 3"/>
           <p:cNvSpPr/>
           <p:nvPr/>
         </p:nvSpPr>
         <p:spPr>
           <a:xfrm>
-            <a:off x="6309360" y="3749040"/>
-            <a:ext cx="5029200" cy="1920240"/>
-          </a:xfrm>
-          <a:prstGeom prst="rect">
-            <a:avLst/>
-          </a:prstGeom>
-          <a:solidFill>
-            <a:srgbClr val="FFFFFF">
-              <a:alpha val="0"/>
-            </a:srgbClr>
-          </a:solidFill>
-          <a:ln w="12700">
-            <a:solidFill>
-              <a:srgbClr val="E2E8F0">
-                <a:alpha val="0"/>
-              </a:srgbClr>
-            </a:solidFill>
-            <a:prstDash val="solid"/>
-          </a:ln>
-          <a:effectLst>
-            <a:outerShdw sx="100000" sy="100000" kx="0" ky="0" algn="bl" rotWithShape="0" blurRad="12700" dist="50800" dir="2700000">
-              <a:srgbClr val="000000">
-                <a:alpha val="8000"/>
-              </a:srgbClr>
-            </a:outerShdw>
-          </a:effectLst>
-        </p:spPr>
-      </p:sp>
-      <p:sp>
-        <p:nvSpPr>
-          <p:cNvPr id="10" name="Shape 4"/>
-          <p:cNvSpPr/>
-          <p:nvPr/>
-        </p:nvSpPr>
-        <p:spPr>
-          <a:xfrm>
-            <a:off x="822960" y="1463040"/>
-            <a:ext cx="73152" cy="1920240"/>
+            <a:off x="914400" y="1865376"/>
+            <a:ext cx="73152" cy="1024128"/>
           </a:xfrm>
           <a:prstGeom prst="rect">
             <a:avLst/>
@@ -11709,14 +12010,14 @@
       </p:sp>
       <p:sp>
         <p:nvSpPr>
-          <p:cNvPr id="11" name="Shape 5"/>
+          <p:cNvPr id="9" name="Shape 4"/>
           <p:cNvSpPr/>
           <p:nvPr/>
         </p:nvSpPr>
         <p:spPr>
           <a:xfrm>
-            <a:off x="6309360" y="1463040"/>
-            <a:ext cx="73152" cy="1920240"/>
+            <a:off x="914400" y="3191256"/>
+            <a:ext cx="73152" cy="1024128"/>
           </a:xfrm>
           <a:prstGeom prst="rect">
             <a:avLst/>
@@ -11736,14 +12037,14 @@
       </p:sp>
       <p:sp>
         <p:nvSpPr>
-          <p:cNvPr id="12" name="Shape 6"/>
+          <p:cNvPr id="10" name="Shape 5"/>
           <p:cNvSpPr/>
           <p:nvPr/>
         </p:nvSpPr>
         <p:spPr>
           <a:xfrm>
-            <a:off x="822960" y="3749040"/>
-            <a:ext cx="73152" cy="1920240"/>
+            <a:off x="914400" y="4507992"/>
+            <a:ext cx="73152" cy="1024128"/>
           </a:xfrm>
           <a:prstGeom prst="rect">
             <a:avLst/>
@@ -11763,34 +12064,7 @@
       </p:sp>
       <p:sp>
         <p:nvSpPr>
-          <p:cNvPr id="13" name="Shape 7"/>
-          <p:cNvSpPr/>
-          <p:nvPr/>
-        </p:nvSpPr>
-        <p:spPr>
-          <a:xfrm>
-            <a:off x="6309360" y="3749040"/>
-            <a:ext cx="73152" cy="1920240"/>
-          </a:xfrm>
-          <a:prstGeom prst="rect">
-            <a:avLst/>
-          </a:prstGeom>
-          <a:solidFill>
-            <a:srgbClr val="DBEAFE"/>
-          </a:solidFill>
-          <a:ln w="12700">
-            <a:solidFill>
-              <a:srgbClr val="DBEAFE">
-                <a:alpha val="0"/>
-              </a:srgbClr>
-            </a:solidFill>
-            <a:prstDash val="solid"/>
-          </a:ln>
-        </p:spPr>
-      </p:sp>
-      <p:sp>
-        <p:nvSpPr>
-          <p:cNvPr id="14" name="mdpr:1-2-d8deb6:title:__title:1-2-d8deb6"/>
+          <p:cNvPr id="11" name="mdpr:2-2-a2c94a:title:__title:2-2-a2c94a"/>
           <p:cNvSpPr txBox="1"/>
           <p:nvPr/>
         </p:nvSpPr>
@@ -11824,7 +12098,24 @@
                 <a:ea typeface="Pretendard" pitchFamily="34" charset="-122"/>
                 <a:cs typeface="Pretendard" pitchFamily="34" charset="-120"/>
               </a:rPr>
-              <a:t>Example: examples/comparison/deck.md</a:t>
+              <a:t>Example: examples/pipeline/deck.md</a:t>
+            </a:r>
+            <a:pPr algn="ctr" indent="0" marL="0">
+              <a:lnSpc>
+                <a:spcPct val="120000"/>
+              </a:lnSpc>
+              <a:buNone/>
+            </a:pPr>
+            <a:r>
+              <a:rPr lang="en-US" sz="2000" dirty="0">
+                <a:solidFill>
+                  <a:srgbClr val="919191"/>
+                </a:solidFill>
+                <a:latin typeface="Pretendard" pitchFamily="34" charset="0"/>
+                <a:ea typeface="Pretendard" pitchFamily="34" charset="-122"/>
+                <a:cs typeface="Pretendard" pitchFamily="34" charset="-120"/>
+              </a:rPr>
+              <a:t> (Cont. 2/2)</a:t>
             </a:r>
             <a:endParaRPr lang="en-US" sz="3400" dirty="0"/>
           </a:p>
@@ -11832,14 +12123,14 @@
       </p:sp>
       <p:sp>
         <p:nvSpPr>
-          <p:cNvPr id="15" name="mdpr:1-2-d8deb6:item-1:block-30-chunk-1"/>
+          <p:cNvPr id="12" name="mdpr:2-2-a2c94a:item-1:block-32-chunk-2"/>
           <p:cNvSpPr txBox="1"/>
           <p:nvPr/>
         </p:nvSpPr>
         <p:spPr>
           <a:xfrm>
-            <a:off x="1042416" y="2209800"/>
-            <a:ext cx="4608576" cy="426720"/>
+            <a:off x="1335024" y="2164080"/>
+            <a:ext cx="9619488" cy="426720"/>
           </a:xfrm>
           <a:prstGeom prst="rect">
             <a:avLst/>
@@ -11866,7 +12157,7 @@
                 <a:ea typeface="Pretendard" pitchFamily="34" charset="-122"/>
                 <a:cs typeface="Pretendard" pitchFamily="34" charset="-120"/>
               </a:rPr>
-              <a:t>Comparison Structure Example</a:t>
+              <a:t>  Split structure</a:t>
             </a:r>
             <a:endParaRPr lang="en-US" sz="2200" dirty="0"/>
           </a:p>
@@ -11874,14 +12165,14 @@
       </p:sp>
       <p:sp>
         <p:nvSpPr>
-          <p:cNvPr id="16" name="mdpr:1-2-d8deb6:item-2:block-30-chunk-1"/>
+          <p:cNvPr id="13" name="mdpr:2-2-a2c94a:item-2:block-32-chunk-2"/>
           <p:cNvSpPr txBox="1"/>
           <p:nvPr/>
         </p:nvSpPr>
         <p:spPr>
           <a:xfrm>
-            <a:off x="6528816" y="2042160"/>
-            <a:ext cx="4608576" cy="762000"/>
+            <a:off x="1335024" y="3489960"/>
+            <a:ext cx="9619488" cy="426720"/>
           </a:xfrm>
           <a:prstGeom prst="rect">
             <a:avLst/>
@@ -11908,7 +12199,7 @@
                 <a:ea typeface="Pretendard" pitchFamily="34" charset="-122"/>
                 <a:cs typeface="Pretendard" pitchFamily="34" charset="-120"/>
               </a:rPr>
-              <a:t>Current Approach and Improved Approach</a:t>
+              <a:t>  Plan layout</a:t>
             </a:r>
             <a:endParaRPr lang="en-US" sz="2200" dirty="0"/>
           </a:p>
@@ -11916,14 +12207,14 @@
       </p:sp>
       <p:sp>
         <p:nvSpPr>
-          <p:cNvPr id="17" name="mdpr:1-2-d8deb6:item-3:block-30-chunk-1"/>
+          <p:cNvPr id="14" name="mdpr:2-2-a2c94a:item-3:block-32-chunk-2"/>
           <p:cNvSpPr txBox="1"/>
           <p:nvPr/>
         </p:nvSpPr>
         <p:spPr>
           <a:xfrm>
-            <a:off x="1042416" y="4495800"/>
-            <a:ext cx="4608576" cy="426720"/>
+            <a:off x="1335024" y="4806696"/>
+            <a:ext cx="9619488" cy="426720"/>
           </a:xfrm>
           <a:prstGeom prst="rect">
             <a:avLst/>
@@ -11950,49 +12241,7 @@
                 <a:ea typeface="Pretendard" pitchFamily="34" charset="-122"/>
                 <a:cs typeface="Pretendard" pitchFamily="34" charset="-120"/>
               </a:rPr>
-              <a:t>Current Approach</a:t>
-            </a:r>
-            <a:endParaRPr lang="en-US" sz="2200" dirty="0"/>
-          </a:p>
-        </p:txBody>
-      </p:sp>
-      <p:sp>
-        <p:nvSpPr>
-          <p:cNvPr id="18" name="mdpr:1-2-d8deb6:item-4:block-30-chunk-1"/>
-          <p:cNvSpPr txBox="1"/>
-          <p:nvPr/>
-        </p:nvSpPr>
-        <p:spPr>
-          <a:xfrm>
-            <a:off x="6528816" y="4495800"/>
-            <a:ext cx="4608576" cy="426720"/>
-          </a:xfrm>
-          <a:prstGeom prst="rect">
-            <a:avLst/>
-          </a:prstGeom>
-          <a:noFill/>
-          <a:ln/>
-        </p:spPr>
-        <p:txBody>
-          <a:bodyPr wrap="square" lIns="0" tIns="25400" rIns="25400" bIns="0" rtlCol="0" anchor="ctr"/>
-          <a:lstStyle/>
-          <a:p>
-            <a:pPr algn="ctr" indent="0" marL="0">
-              <a:lnSpc>
-                <a:spcPct val="120000"/>
-              </a:lnSpc>
-              <a:buNone/>
-            </a:pPr>
-            <a:r>
-              <a:rPr lang="en-US" sz="2200" dirty="0">
-                <a:solidFill>
-                  <a:srgbClr val="111111"/>
-                </a:solidFill>
-                <a:latin typeface="Pretendard" pitchFamily="34" charset="0"/>
-                <a:ea typeface="Pretendard" pitchFamily="34" charset="-122"/>
-                <a:cs typeface="Pretendard" pitchFamily="34" charset="-120"/>
-              </a:rPr>
-              <a:t>Improved Approach</a:t>
+              <a:t>  Render outputs</a:t>
             </a:r>
             <a:endParaRPr lang="en-US" sz="2200" dirty="0"/>
           </a:p>
@@ -12030,16 +12279,412 @@
           <a:chExt cx="0" cy="0"/>
         </a:xfrm>
       </p:grpSpPr>
-      <p:sp>
-        <p:nvSpPr>
-          <p:cNvPr id="2" name="Shape 0"/>
+      <p:pic>
+        <p:nvPicPr>
+          <p:cNvPr id="2" name="Image 0" descr="preencoded.png">    </p:cNvPr>
+          <p:cNvPicPr>
+            <a:picLocks noChangeAspect="1"/>
+          </p:cNvPicPr>
+          <p:nvPr/>
+        </p:nvPicPr>
+        <p:blipFill>
+          <a:blip r:embed="rId1">
+            <a:extLst>
+              <a:ext uri="{96DAC541-7B7A-43D3-8B79-37D633B846F1}">
+                <asvg:svgBlip xmlns:asvg="http://schemas.microsoft.com/office/drawing/2016/SVG/main" r:embed="rId2"/>
+              </a:ext>
+            </a:extLst>
+          </a:blip>
+          <a:stretch>
+            <a:fillRect/>
+          </a:stretch>
+        </p:blipFill>
+        <p:spPr>
+          <a:xfrm>
+            <a:off x="822960" y="1463040"/>
+            <a:ext cx="3246120" cy="1920240"/>
+          </a:xfrm>
+          <a:prstGeom prst="rect">
+            <a:avLst/>
+          </a:prstGeom>
+        </p:spPr>
+      </p:pic>
+      <p:sp>
+        <p:nvSpPr>
+          <p:cNvPr id="3" name="Shape 0"/>
           <p:cNvSpPr/>
           <p:nvPr/>
         </p:nvSpPr>
         <p:spPr>
           <a:xfrm>
-            <a:off x="685800" y="2103120"/>
-            <a:ext cx="73152" cy="2240280"/>
+            <a:off x="822960" y="1463040"/>
+            <a:ext cx="3246120" cy="1920240"/>
+          </a:xfrm>
+          <a:prstGeom prst="rect">
+            <a:avLst/>
+          </a:prstGeom>
+          <a:solidFill>
+            <a:srgbClr val="FFFFFF">
+              <a:alpha val="0"/>
+            </a:srgbClr>
+          </a:solidFill>
+          <a:ln w="12700">
+            <a:solidFill>
+              <a:srgbClr val="E2E8F0">
+                <a:alpha val="0"/>
+              </a:srgbClr>
+            </a:solidFill>
+            <a:prstDash val="solid"/>
+          </a:ln>
+          <a:effectLst>
+            <a:outerShdw sx="100000" sy="100000" kx="0" ky="0" algn="bl" rotWithShape="0" blurRad="12700" dist="50800" dir="2700000">
+              <a:srgbClr val="000000">
+                <a:alpha val="8000"/>
+              </a:srgbClr>
+            </a:outerShdw>
+          </a:effectLst>
+        </p:spPr>
+      </p:sp>
+      <p:pic>
+        <p:nvPicPr>
+          <p:cNvPr id="4" name="Image 1" descr="preencoded.png">    </p:cNvPr>
+          <p:cNvPicPr>
+            <a:picLocks noChangeAspect="1"/>
+          </p:cNvPicPr>
+          <p:nvPr/>
+        </p:nvPicPr>
+        <p:blipFill>
+          <a:blip r:embed="rId3">
+            <a:extLst>
+              <a:ext uri="{96DAC541-7B7A-43D3-8B79-37D633B846F1}">
+                <asvg:svgBlip xmlns:asvg="http://schemas.microsoft.com/office/drawing/2016/SVG/main" r:embed="rId4"/>
+              </a:ext>
+            </a:extLst>
+          </a:blip>
+          <a:stretch>
+            <a:fillRect/>
+          </a:stretch>
+        </p:blipFill>
+        <p:spPr>
+          <a:xfrm>
+            <a:off x="4343400" y="1463040"/>
+            <a:ext cx="3246120" cy="1920240"/>
+          </a:xfrm>
+          <a:prstGeom prst="rect">
+            <a:avLst/>
+          </a:prstGeom>
+        </p:spPr>
+      </p:pic>
+      <p:sp>
+        <p:nvSpPr>
+          <p:cNvPr id="5" name="Shape 1"/>
+          <p:cNvSpPr/>
+          <p:nvPr/>
+        </p:nvSpPr>
+        <p:spPr>
+          <a:xfrm>
+            <a:off x="4343400" y="1463040"/>
+            <a:ext cx="3246120" cy="1920240"/>
+          </a:xfrm>
+          <a:prstGeom prst="rect">
+            <a:avLst/>
+          </a:prstGeom>
+          <a:solidFill>
+            <a:srgbClr val="FFFFFF">
+              <a:alpha val="0"/>
+            </a:srgbClr>
+          </a:solidFill>
+          <a:ln w="12700">
+            <a:solidFill>
+              <a:srgbClr val="E2E8F0">
+                <a:alpha val="0"/>
+              </a:srgbClr>
+            </a:solidFill>
+            <a:prstDash val="solid"/>
+          </a:ln>
+          <a:effectLst>
+            <a:outerShdw sx="100000" sy="100000" kx="0" ky="0" algn="bl" rotWithShape="0" blurRad="12700" dist="50800" dir="2700000">
+              <a:srgbClr val="000000">
+                <a:alpha val="8000"/>
+              </a:srgbClr>
+            </a:outerShdw>
+          </a:effectLst>
+        </p:spPr>
+      </p:sp>
+      <p:pic>
+        <p:nvPicPr>
+          <p:cNvPr id="6" name="Image 2" descr="preencoded.png">    </p:cNvPr>
+          <p:cNvPicPr>
+            <a:picLocks noChangeAspect="1"/>
+          </p:cNvPicPr>
+          <p:nvPr/>
+        </p:nvPicPr>
+        <p:blipFill>
+          <a:blip r:embed="rId5">
+            <a:extLst>
+              <a:ext uri="{96DAC541-7B7A-43D3-8B79-37D633B846F1}">
+                <asvg:svgBlip xmlns:asvg="http://schemas.microsoft.com/office/drawing/2016/SVG/main" r:embed="rId6"/>
+              </a:ext>
+            </a:extLst>
+          </a:blip>
+          <a:stretch>
+            <a:fillRect/>
+          </a:stretch>
+        </p:blipFill>
+        <p:spPr>
+          <a:xfrm>
+            <a:off x="7863840" y="1463040"/>
+            <a:ext cx="3246120" cy="1920240"/>
+          </a:xfrm>
+          <a:prstGeom prst="rect">
+            <a:avLst/>
+          </a:prstGeom>
+        </p:spPr>
+      </p:pic>
+      <p:sp>
+        <p:nvSpPr>
+          <p:cNvPr id="7" name="Shape 2"/>
+          <p:cNvSpPr/>
+          <p:nvPr/>
+        </p:nvSpPr>
+        <p:spPr>
+          <a:xfrm>
+            <a:off x="7863840" y="1463040"/>
+            <a:ext cx="3246120" cy="1920240"/>
+          </a:xfrm>
+          <a:prstGeom prst="rect">
+            <a:avLst/>
+          </a:prstGeom>
+          <a:solidFill>
+            <a:srgbClr val="FFFFFF">
+              <a:alpha val="0"/>
+            </a:srgbClr>
+          </a:solidFill>
+          <a:ln w="12700">
+            <a:solidFill>
+              <a:srgbClr val="E2E8F0">
+                <a:alpha val="0"/>
+              </a:srgbClr>
+            </a:solidFill>
+            <a:prstDash val="solid"/>
+          </a:ln>
+          <a:effectLst>
+            <a:outerShdw sx="100000" sy="100000" kx="0" ky="0" algn="bl" rotWithShape="0" blurRad="12700" dist="50800" dir="2700000">
+              <a:srgbClr val="000000">
+                <a:alpha val="8000"/>
+              </a:srgbClr>
+            </a:outerShdw>
+          </a:effectLst>
+        </p:spPr>
+      </p:sp>
+      <p:pic>
+        <p:nvPicPr>
+          <p:cNvPr id="8" name="Image 3" descr="preencoded.png">    </p:cNvPr>
+          <p:cNvPicPr>
+            <a:picLocks noChangeAspect="1"/>
+          </p:cNvPicPr>
+          <p:nvPr/>
+        </p:nvPicPr>
+        <p:blipFill>
+          <a:blip r:embed="rId7">
+            <a:extLst>
+              <a:ext uri="{96DAC541-7B7A-43D3-8B79-37D633B846F1}">
+                <asvg:svgBlip xmlns:asvg="http://schemas.microsoft.com/office/drawing/2016/SVG/main" r:embed="rId8"/>
+              </a:ext>
+            </a:extLst>
+          </a:blip>
+          <a:stretch>
+            <a:fillRect/>
+          </a:stretch>
+        </p:blipFill>
+        <p:spPr>
+          <a:xfrm>
+            <a:off x="822960" y="3749040"/>
+            <a:ext cx="3246120" cy="1920240"/>
+          </a:xfrm>
+          <a:prstGeom prst="rect">
+            <a:avLst/>
+          </a:prstGeom>
+        </p:spPr>
+      </p:pic>
+      <p:sp>
+        <p:nvSpPr>
+          <p:cNvPr id="9" name="Shape 3"/>
+          <p:cNvSpPr/>
+          <p:nvPr/>
+        </p:nvSpPr>
+        <p:spPr>
+          <a:xfrm>
+            <a:off x="822960" y="3749040"/>
+            <a:ext cx="3246120" cy="1920240"/>
+          </a:xfrm>
+          <a:prstGeom prst="rect">
+            <a:avLst/>
+          </a:prstGeom>
+          <a:solidFill>
+            <a:srgbClr val="FFFFFF">
+              <a:alpha val="0"/>
+            </a:srgbClr>
+          </a:solidFill>
+          <a:ln w="12700">
+            <a:solidFill>
+              <a:srgbClr val="E2E8F0">
+                <a:alpha val="0"/>
+              </a:srgbClr>
+            </a:solidFill>
+            <a:prstDash val="solid"/>
+          </a:ln>
+          <a:effectLst>
+            <a:outerShdw sx="100000" sy="100000" kx="0" ky="0" algn="bl" rotWithShape="0" blurRad="12700" dist="50800" dir="2700000">
+              <a:srgbClr val="000000">
+                <a:alpha val="8000"/>
+              </a:srgbClr>
+            </a:outerShdw>
+          </a:effectLst>
+        </p:spPr>
+      </p:sp>
+      <p:pic>
+        <p:nvPicPr>
+          <p:cNvPr id="10" name="Image 4" descr="preencoded.png">    </p:cNvPr>
+          <p:cNvPicPr>
+            <a:picLocks noChangeAspect="1"/>
+          </p:cNvPicPr>
+          <p:nvPr/>
+        </p:nvPicPr>
+        <p:blipFill>
+          <a:blip r:embed="rId9">
+            <a:extLst>
+              <a:ext uri="{96DAC541-7B7A-43D3-8B79-37D633B846F1}">
+                <asvg:svgBlip xmlns:asvg="http://schemas.microsoft.com/office/drawing/2016/SVG/main" r:embed="rId10"/>
+              </a:ext>
+            </a:extLst>
+          </a:blip>
+          <a:stretch>
+            <a:fillRect/>
+          </a:stretch>
+        </p:blipFill>
+        <p:spPr>
+          <a:xfrm>
+            <a:off x="4343400" y="3749040"/>
+            <a:ext cx="3246120" cy="1920240"/>
+          </a:xfrm>
+          <a:prstGeom prst="rect">
+            <a:avLst/>
+          </a:prstGeom>
+        </p:spPr>
+      </p:pic>
+      <p:sp>
+        <p:nvSpPr>
+          <p:cNvPr id="11" name="Shape 4"/>
+          <p:cNvSpPr/>
+          <p:nvPr/>
+        </p:nvSpPr>
+        <p:spPr>
+          <a:xfrm>
+            <a:off x="4343400" y="3749040"/>
+            <a:ext cx="3246120" cy="1920240"/>
+          </a:xfrm>
+          <a:prstGeom prst="rect">
+            <a:avLst/>
+          </a:prstGeom>
+          <a:solidFill>
+            <a:srgbClr val="FFFFFF">
+              <a:alpha val="0"/>
+            </a:srgbClr>
+          </a:solidFill>
+          <a:ln w="12700">
+            <a:solidFill>
+              <a:srgbClr val="E2E8F0">
+                <a:alpha val="0"/>
+              </a:srgbClr>
+            </a:solidFill>
+            <a:prstDash val="solid"/>
+          </a:ln>
+          <a:effectLst>
+            <a:outerShdw sx="100000" sy="100000" kx="0" ky="0" algn="bl" rotWithShape="0" blurRad="12700" dist="50800" dir="2700000">
+              <a:srgbClr val="000000">
+                <a:alpha val="8000"/>
+              </a:srgbClr>
+            </a:outerShdw>
+          </a:effectLst>
+        </p:spPr>
+      </p:sp>
+      <p:pic>
+        <p:nvPicPr>
+          <p:cNvPr id="12" name="Image 5" descr="preencoded.png">    </p:cNvPr>
+          <p:cNvPicPr>
+            <a:picLocks noChangeAspect="1"/>
+          </p:cNvPicPr>
+          <p:nvPr/>
+        </p:nvPicPr>
+        <p:blipFill>
+          <a:blip r:embed="rId11">
+            <a:extLst>
+              <a:ext uri="{96DAC541-7B7A-43D3-8B79-37D633B846F1}">
+                <asvg:svgBlip xmlns:asvg="http://schemas.microsoft.com/office/drawing/2016/SVG/main" r:embed="rId12"/>
+              </a:ext>
+            </a:extLst>
+          </a:blip>
+          <a:stretch>
+            <a:fillRect/>
+          </a:stretch>
+        </p:blipFill>
+        <p:spPr>
+          <a:xfrm>
+            <a:off x="7863840" y="3749040"/>
+            <a:ext cx="3246120" cy="1920240"/>
+          </a:xfrm>
+          <a:prstGeom prst="rect">
+            <a:avLst/>
+          </a:prstGeom>
+        </p:spPr>
+      </p:pic>
+      <p:sp>
+        <p:nvSpPr>
+          <p:cNvPr id="13" name="Shape 5"/>
+          <p:cNvSpPr/>
+          <p:nvPr/>
+        </p:nvSpPr>
+        <p:spPr>
+          <a:xfrm>
+            <a:off x="7863840" y="3749040"/>
+            <a:ext cx="3246120" cy="1920240"/>
+          </a:xfrm>
+          <a:prstGeom prst="rect">
+            <a:avLst/>
+          </a:prstGeom>
+          <a:solidFill>
+            <a:srgbClr val="FFFFFF">
+              <a:alpha val="0"/>
+            </a:srgbClr>
+          </a:solidFill>
+          <a:ln w="12700">
+            <a:solidFill>
+              <a:srgbClr val="E2E8F0">
+                <a:alpha val="0"/>
+              </a:srgbClr>
+            </a:solidFill>
+            <a:prstDash val="solid"/>
+          </a:ln>
+          <a:effectLst>
+            <a:outerShdw sx="100000" sy="100000" kx="0" ky="0" algn="bl" rotWithShape="0" blurRad="12700" dist="50800" dir="2700000">
+              <a:srgbClr val="000000">
+                <a:alpha val="8000"/>
+              </a:srgbClr>
+            </a:outerShdw>
+          </a:effectLst>
+        </p:spPr>
+      </p:sp>
+      <p:sp>
+        <p:nvSpPr>
+          <p:cNvPr id="14" name="Shape 6"/>
+          <p:cNvSpPr/>
+          <p:nvPr/>
+        </p:nvSpPr>
+        <p:spPr>
+          <a:xfrm>
+            <a:off x="822960" y="1463040"/>
+            <a:ext cx="73152" cy="1920240"/>
           </a:xfrm>
           <a:prstGeom prst="rect">
             <a:avLst/>
@@ -12059,14 +12704,14 @@
       </p:sp>
       <p:sp>
         <p:nvSpPr>
-          <p:cNvPr id="3" name="Shape 1"/>
+          <p:cNvPr id="15" name="Shape 7"/>
           <p:cNvSpPr/>
           <p:nvPr/>
         </p:nvSpPr>
         <p:spPr>
           <a:xfrm>
-            <a:off x="3520440" y="2103120"/>
-            <a:ext cx="73152" cy="2240280"/>
+            <a:off x="4343400" y="1463040"/>
+            <a:ext cx="73152" cy="1920240"/>
           </a:xfrm>
           <a:prstGeom prst="rect">
             <a:avLst/>
@@ -12086,14 +12731,14 @@
       </p:sp>
       <p:sp>
         <p:nvSpPr>
-          <p:cNvPr id="4" name="Shape 2"/>
+          <p:cNvPr id="16" name="Shape 8"/>
           <p:cNvSpPr/>
           <p:nvPr/>
         </p:nvSpPr>
         <p:spPr>
           <a:xfrm>
-            <a:off x="6355080" y="2103120"/>
-            <a:ext cx="73152" cy="2240280"/>
+            <a:off x="7863840" y="1463040"/>
+            <a:ext cx="73152" cy="1920240"/>
           </a:xfrm>
           <a:prstGeom prst="rect">
             <a:avLst/>
@@ -12113,14 +12758,14 @@
       </p:sp>
       <p:sp>
         <p:nvSpPr>
-          <p:cNvPr id="5" name="Shape 3"/>
+          <p:cNvPr id="17" name="Shape 9"/>
           <p:cNvSpPr/>
           <p:nvPr/>
         </p:nvSpPr>
         <p:spPr>
           <a:xfrm>
-            <a:off x="9189720" y="2103120"/>
-            <a:ext cx="73152" cy="2240280"/>
+            <a:off x="822960" y="3749040"/>
+            <a:ext cx="73152" cy="1920240"/>
           </a:xfrm>
           <a:prstGeom prst="rect">
             <a:avLst/>
@@ -12140,7 +12785,61 @@
       </p:sp>
       <p:sp>
         <p:nvSpPr>
-          <p:cNvPr id="6" name="mdpr:2-2-447582:title:__title:2-2-447582"/>
+          <p:cNvPr id="18" name="Shape 10"/>
+          <p:cNvSpPr/>
+          <p:nvPr/>
+        </p:nvSpPr>
+        <p:spPr>
+          <a:xfrm>
+            <a:off x="4343400" y="3749040"/>
+            <a:ext cx="73152" cy="1920240"/>
+          </a:xfrm>
+          <a:prstGeom prst="rect">
+            <a:avLst/>
+          </a:prstGeom>
+          <a:solidFill>
+            <a:srgbClr val="2563EB"/>
+          </a:solidFill>
+          <a:ln w="12700">
+            <a:solidFill>
+              <a:srgbClr val="2563EB">
+                <a:alpha val="0"/>
+              </a:srgbClr>
+            </a:solidFill>
+            <a:prstDash val="solid"/>
+          </a:ln>
+        </p:spPr>
+      </p:sp>
+      <p:sp>
+        <p:nvSpPr>
+          <p:cNvPr id="19" name="Shape 11"/>
+          <p:cNvSpPr/>
+          <p:nvPr/>
+        </p:nvSpPr>
+        <p:spPr>
+          <a:xfrm>
+            <a:off x="7863840" y="3749040"/>
+            <a:ext cx="73152" cy="1920240"/>
+          </a:xfrm>
+          <a:prstGeom prst="rect">
+            <a:avLst/>
+          </a:prstGeom>
+          <a:solidFill>
+            <a:srgbClr val="DBEAFE"/>
+          </a:solidFill>
+          <a:ln w="12700">
+            <a:solidFill>
+              <a:srgbClr val="DBEAFE">
+                <a:alpha val="0"/>
+              </a:srgbClr>
+            </a:solidFill>
+            <a:prstDash val="solid"/>
+          </a:ln>
+        </p:spPr>
+      </p:sp>
+      <p:sp>
+        <p:nvSpPr>
+          <p:cNvPr id="20" name="mdpr:example-examples-diagram-arrangements-deck-md-adac59:title:__title:example-examples-diagram-arrangements-deck-md-adac59"/>
           <p:cNvSpPr txBox="1"/>
           <p:nvPr/>
         </p:nvSpPr>
@@ -12174,8 +12873,33 @@
                 <a:ea typeface="Pretendard" pitchFamily="34" charset="-122"/>
                 <a:cs typeface="Pretendard" pitchFamily="34" charset="-120"/>
               </a:rPr>
-              <a:t>Example: examples/comparison/deck.md</a:t>
+              <a:t>Example: examples/diagram-arrangements/deck.md</a:t>
             </a:r>
+            <a:endParaRPr lang="en-US" sz="3400" dirty="0"/>
+          </a:p>
+        </p:txBody>
+      </p:sp>
+      <p:sp>
+        <p:nvSpPr>
+          <p:cNvPr id="21" name="mdpr:example-examples-diagram-arrangements-deck-md-adac59:item-1:block-34"/>
+          <p:cNvSpPr txBox="1"/>
+          <p:nvPr/>
+        </p:nvSpPr>
+        <p:spPr>
+          <a:xfrm>
+            <a:off x="1042416" y="2103120"/>
+            <a:ext cx="2825496" cy="640080"/>
+          </a:xfrm>
+          <a:prstGeom prst="rect">
+            <a:avLst/>
+          </a:prstGeom>
+          <a:noFill/>
+          <a:ln/>
+        </p:spPr>
+        <p:txBody>
+          <a:bodyPr wrap="square" lIns="0" tIns="25400" rIns="25400" bIns="0" rtlCol="0" anchor="ctr"/>
+          <a:lstStyle/>
+          <a:p>
             <a:pPr algn="ctr" indent="0" marL="0">
               <a:lnSpc>
                 <a:spcPct val="120000"/>
@@ -12183,30 +12907,30 @@
               <a:buNone/>
             </a:pPr>
             <a:r>
-              <a:rPr lang="en-US" sz="2000" dirty="0">
+              <a:rPr lang="en-US" sz="1800" dirty="0">
                 <a:solidFill>
-                  <a:srgbClr val="919191"/>
+                  <a:srgbClr val="111111"/>
                 </a:solidFill>
                 <a:latin typeface="Pretendard" pitchFamily="34" charset="0"/>
                 <a:ea typeface="Pretendard" pitchFamily="34" charset="-122"/>
                 <a:cs typeface="Pretendard" pitchFamily="34" charset="-120"/>
               </a:rPr>
-              <a:t> (Cont. 2/2)</a:t>
+              <a:t>Diagram Arrangement Examples</a:t>
             </a:r>
-            <a:endParaRPr lang="en-US" sz="3400" dirty="0"/>
+            <a:endParaRPr lang="en-US" sz="1800" dirty="0"/>
           </a:p>
         </p:txBody>
       </p:sp>
       <p:sp>
         <p:nvSpPr>
-          <p:cNvPr id="7" name="mdpr:2-2-447582:item-1:block-30-chunk-2"/>
+          <p:cNvPr id="22" name="mdpr:example-examples-diagram-arrangements-deck-md-adac59:item-2:block-34"/>
           <p:cNvSpPr txBox="1"/>
           <p:nvPr/>
         </p:nvSpPr>
         <p:spPr>
           <a:xfrm>
-            <a:off x="905256" y="2674620"/>
-            <a:ext cx="1911096" cy="1097280"/>
+            <a:off x="4562856" y="2240280"/>
+            <a:ext cx="2825496" cy="365760"/>
           </a:xfrm>
           <a:prstGeom prst="rect">
             <a:avLst/>
@@ -12225,7 +12949,7 @@
               <a:buNone/>
             </a:pPr>
             <a:r>
-              <a:rPr lang="en-US" sz="2200" dirty="0">
+              <a:rPr lang="en-US" sz="1800" dirty="0">
                 <a:solidFill>
                   <a:srgbClr val="111111"/>
                 </a:solidFill>
@@ -12233,22 +12957,22 @@
                 <a:ea typeface="Pretendard" pitchFamily="34" charset="-122"/>
                 <a:cs typeface="Pretendard" pitchFamily="34" charset="-120"/>
               </a:rPr>
-              <a:t>Documents are written manually</a:t>
+              <a:t>Horizontal Flow</a:t>
             </a:r>
-            <a:endParaRPr lang="en-US" sz="2200" dirty="0"/>
+            <a:endParaRPr lang="en-US" sz="1800" dirty="0"/>
           </a:p>
         </p:txBody>
       </p:sp>
       <p:sp>
         <p:nvSpPr>
-          <p:cNvPr id="8" name="mdpr:2-2-447582:item-2:block-30-chunk-2"/>
+          <p:cNvPr id="23" name="mdpr:example-examples-diagram-arrangements-deck-md-adac59:item-3:block-34"/>
           <p:cNvSpPr txBox="1"/>
           <p:nvPr/>
         </p:nvSpPr>
         <p:spPr>
           <a:xfrm>
-            <a:off x="3739896" y="2842260"/>
-            <a:ext cx="1911096" cy="762000"/>
+            <a:off x="8083296" y="2240280"/>
+            <a:ext cx="2825496" cy="365760"/>
           </a:xfrm>
           <a:prstGeom prst="rect">
             <a:avLst/>
@@ -12267,7 +12991,7 @@
               <a:buNone/>
             </a:pPr>
             <a:r>
-              <a:rPr lang="en-US" sz="2200" dirty="0">
+              <a:rPr lang="en-US" sz="1800" dirty="0">
                 <a:solidFill>
                   <a:srgbClr val="111111"/>
                 </a:solidFill>
@@ -12275,22 +12999,22 @@
                 <a:ea typeface="Pretendard" pitchFamily="34" charset="-122"/>
                 <a:cs typeface="Pretendard" pitchFamily="34" charset="-120"/>
               </a:rPr>
-              <a:t>Format varies by person</a:t>
+              <a:t>Vertical Flow</a:t>
             </a:r>
-            <a:endParaRPr lang="en-US" sz="2200" dirty="0"/>
+            <a:endParaRPr lang="en-US" sz="1800" dirty="0"/>
           </a:p>
         </p:txBody>
       </p:sp>
       <p:sp>
         <p:nvSpPr>
-          <p:cNvPr id="9" name="mdpr:2-2-447582:item-3:block-30-chunk-2"/>
+          <p:cNvPr id="24" name="mdpr:example-examples-diagram-arrangements-deck-md-adac59:item-4:block-34"/>
           <p:cNvSpPr txBox="1"/>
           <p:nvPr/>
         </p:nvSpPr>
         <p:spPr>
           <a:xfrm>
-            <a:off x="6574536" y="2842260"/>
-            <a:ext cx="1911096" cy="762000"/>
+            <a:off x="1042416" y="4526280"/>
+            <a:ext cx="2825496" cy="365760"/>
           </a:xfrm>
           <a:prstGeom prst="rect">
             <a:avLst/>
@@ -12309,7 +13033,7 @@
               <a:buNone/>
             </a:pPr>
             <a:r>
-              <a:rPr lang="en-US" sz="2200" dirty="0">
+              <a:rPr lang="en-US" sz="1800" dirty="0">
                 <a:solidFill>
                   <a:srgbClr val="111111"/>
                 </a:solidFill>
@@ -12317,22 +13041,22 @@
                 <a:ea typeface="Pretendard" pitchFamily="34" charset="-122"/>
                 <a:cs typeface="Pretendard" pitchFamily="34" charset="-120"/>
               </a:rPr>
-              <a:t>Search is difficult</a:t>
+              <a:t>U-Shaped Flow</a:t>
             </a:r>
-            <a:endParaRPr lang="en-US" sz="2200" dirty="0"/>
+            <a:endParaRPr lang="en-US" sz="1800" dirty="0"/>
           </a:p>
         </p:txBody>
       </p:sp>
       <p:sp>
         <p:nvSpPr>
-          <p:cNvPr id="10" name="mdpr:2-2-447582:item-4:block-30-chunk-2"/>
+          <p:cNvPr id="25" name="mdpr:example-examples-diagram-arrangements-deck-md-adac59:item-5:block-34"/>
           <p:cNvSpPr txBox="1"/>
           <p:nvPr/>
         </p:nvSpPr>
         <p:spPr>
           <a:xfrm>
-            <a:off x="9409176" y="2674620"/>
-            <a:ext cx="1911096" cy="1097280"/>
+            <a:off x="4562856" y="4526280"/>
+            <a:ext cx="2825496" cy="365760"/>
           </a:xfrm>
           <a:prstGeom prst="rect">
             <a:avLst/>
@@ -12351,7 +13075,7 @@
               <a:buNone/>
             </a:pPr>
             <a:r>
-              <a:rPr lang="en-US" sz="2200" dirty="0">
+              <a:rPr lang="en-US" sz="1800" dirty="0">
                 <a:solidFill>
                   <a:srgbClr val="111111"/>
                 </a:solidFill>
@@ -12359,9 +13083,51 @@
                 <a:ea typeface="Pretendard" pitchFamily="34" charset="-122"/>
                 <a:cs typeface="Pretendard" pitchFamily="34" charset="-120"/>
               </a:rPr>
-              <a:t>Drafts are generated automatically</a:t>
+              <a:t>Reverse-U Flow</a:t>
             </a:r>
-            <a:endParaRPr lang="en-US" sz="2200" dirty="0"/>
+            <a:endParaRPr lang="en-US" sz="1800" dirty="0"/>
+          </a:p>
+        </p:txBody>
+      </p:sp>
+      <p:sp>
+        <p:nvSpPr>
+          <p:cNvPr id="26" name="mdpr:example-examples-diagram-arrangements-deck-md-adac59:item-6:block-34"/>
+          <p:cNvSpPr txBox="1"/>
+          <p:nvPr/>
+        </p:nvSpPr>
+        <p:spPr>
+          <a:xfrm>
+            <a:off x="8083296" y="4526280"/>
+            <a:ext cx="2825496" cy="365760"/>
+          </a:xfrm>
+          <a:prstGeom prst="rect">
+            <a:avLst/>
+          </a:prstGeom>
+          <a:noFill/>
+          <a:ln/>
+        </p:spPr>
+        <p:txBody>
+          <a:bodyPr wrap="square" lIns="0" tIns="25400" rIns="25400" bIns="0" rtlCol="0" anchor="ctr"/>
+          <a:lstStyle/>
+          <a:p>
+            <a:pPr algn="ctr" indent="0" marL="0">
+              <a:lnSpc>
+                <a:spcPct val="120000"/>
+              </a:lnSpc>
+              <a:buNone/>
+            </a:pPr>
+            <a:r>
+              <a:rPr lang="en-US" sz="1800" dirty="0">
+                <a:solidFill>
+                  <a:srgbClr val="111111"/>
+                </a:solidFill>
+                <a:latin typeface="Pretendard" pitchFamily="34" charset="0"/>
+                <a:ea typeface="Pretendard" pitchFamily="34" charset="-122"/>
+                <a:cs typeface="Pretendard" pitchFamily="34" charset="-120"/>
+              </a:rPr>
+              <a:t>Cycle-Like Flow</a:t>
+            </a:r>
+            <a:endParaRPr lang="en-US" sz="1800" dirty="0"/>
           </a:p>
         </p:txBody>
       </p:sp>
@@ -12420,7 +13186,7 @@
         <p:spPr>
           <a:xfrm>
             <a:off x="822960" y="1463040"/>
-            <a:ext cx="5029200" cy="1920240"/>
+            <a:ext cx="3246120" cy="1920240"/>
           </a:xfrm>
           <a:prstGeom prst="rect">
             <a:avLst/>
@@ -12436,7 +13202,7 @@
         <p:spPr>
           <a:xfrm>
             <a:off x="822960" y="1463040"/>
-            <a:ext cx="5029200" cy="1920240"/>
+            <a:ext cx="3246120" cy="1920240"/>
           </a:xfrm>
           <a:prstGeom prst="rect">
             <a:avLst/>
@@ -12485,8 +13251,8 @@
         </p:blipFill>
         <p:spPr>
           <a:xfrm>
-            <a:off x="6309360" y="1463040"/>
-            <a:ext cx="5029200" cy="1920240"/>
+            <a:off x="4343400" y="1463040"/>
+            <a:ext cx="3246120" cy="1920240"/>
           </a:xfrm>
           <a:prstGeom prst="rect">
             <a:avLst/>
@@ -12501,8 +13267,8 @@
         </p:nvSpPr>
         <p:spPr>
           <a:xfrm>
-            <a:off x="6309360" y="1463040"/>
-            <a:ext cx="5029200" cy="1920240"/>
+            <a:off x="4343400" y="1463040"/>
+            <a:ext cx="3246120" cy="1920240"/>
           </a:xfrm>
           <a:prstGeom prst="rect">
             <a:avLst/>
@@ -12551,8 +13317,8 @@
         </p:blipFill>
         <p:spPr>
           <a:xfrm>
-            <a:off x="822960" y="3749040"/>
-            <a:ext cx="5029200" cy="1920240"/>
+            <a:off x="7863840" y="1463040"/>
+            <a:ext cx="3246120" cy="1920240"/>
           </a:xfrm>
           <a:prstGeom prst="rect">
             <a:avLst/>
@@ -12567,8 +13333,8 @@
         </p:nvSpPr>
         <p:spPr>
           <a:xfrm>
-            <a:off x="822960" y="3749040"/>
-            <a:ext cx="5029200" cy="1920240"/>
+            <a:off x="7863840" y="1463040"/>
+            <a:ext cx="3246120" cy="1920240"/>
           </a:xfrm>
           <a:prstGeom prst="rect">
             <a:avLst/>
@@ -12617,8 +13383,8 @@
         </p:blipFill>
         <p:spPr>
           <a:xfrm>
-            <a:off x="6309360" y="3749040"/>
-            <a:ext cx="5029200" cy="1920240"/>
+            <a:off x="822960" y="3749040"/>
+            <a:ext cx="3246120" cy="1920240"/>
           </a:xfrm>
           <a:prstGeom prst="rect">
             <a:avLst/>
@@ -12633,8 +13399,8 @@
         </p:nvSpPr>
         <p:spPr>
           <a:xfrm>
-            <a:off x="6309360" y="3749040"/>
-            <a:ext cx="5029200" cy="1920240"/>
+            <a:off x="822960" y="3749040"/>
+            <a:ext cx="3246120" cy="1920240"/>
           </a:xfrm>
           <a:prstGeom prst="rect">
             <a:avLst/>
@@ -12661,9 +13427,141 @@
           </a:effectLst>
         </p:spPr>
       </p:sp>
-      <p:sp>
-        <p:nvSpPr>
-          <p:cNvPr id="10" name="Shape 4"/>
+      <p:pic>
+        <p:nvPicPr>
+          <p:cNvPr id="10" name="Image 4" descr="preencoded.png">    </p:cNvPr>
+          <p:cNvPicPr>
+            <a:picLocks noChangeAspect="1"/>
+          </p:cNvPicPr>
+          <p:nvPr/>
+        </p:nvPicPr>
+        <p:blipFill>
+          <a:blip r:embed="rId9">
+            <a:extLst>
+              <a:ext uri="{96DAC541-7B7A-43D3-8B79-37D633B846F1}">
+                <asvg:svgBlip xmlns:asvg="http://schemas.microsoft.com/office/drawing/2016/SVG/main" r:embed="rId10"/>
+              </a:ext>
+            </a:extLst>
+          </a:blip>
+          <a:stretch>
+            <a:fillRect/>
+          </a:stretch>
+        </p:blipFill>
+        <p:spPr>
+          <a:xfrm>
+            <a:off x="4343400" y="3749040"/>
+            <a:ext cx="3246120" cy="1920240"/>
+          </a:xfrm>
+          <a:prstGeom prst="rect">
+            <a:avLst/>
+          </a:prstGeom>
+        </p:spPr>
+      </p:pic>
+      <p:sp>
+        <p:nvSpPr>
+          <p:cNvPr id="11" name="Shape 4"/>
+          <p:cNvSpPr/>
+          <p:nvPr/>
+        </p:nvSpPr>
+        <p:spPr>
+          <a:xfrm>
+            <a:off x="4343400" y="3749040"/>
+            <a:ext cx="3246120" cy="1920240"/>
+          </a:xfrm>
+          <a:prstGeom prst="rect">
+            <a:avLst/>
+          </a:prstGeom>
+          <a:solidFill>
+            <a:srgbClr val="FFFFFF">
+              <a:alpha val="0"/>
+            </a:srgbClr>
+          </a:solidFill>
+          <a:ln w="12700">
+            <a:solidFill>
+              <a:srgbClr val="E2E8F0">
+                <a:alpha val="0"/>
+              </a:srgbClr>
+            </a:solidFill>
+            <a:prstDash val="solid"/>
+          </a:ln>
+          <a:effectLst>
+            <a:outerShdw sx="100000" sy="100000" kx="0" ky="0" algn="bl" rotWithShape="0" blurRad="12700" dist="50800" dir="2700000">
+              <a:srgbClr val="000000">
+                <a:alpha val="8000"/>
+              </a:srgbClr>
+            </a:outerShdw>
+          </a:effectLst>
+        </p:spPr>
+      </p:sp>
+      <p:pic>
+        <p:nvPicPr>
+          <p:cNvPr id="12" name="Image 5" descr="preencoded.png">    </p:cNvPr>
+          <p:cNvPicPr>
+            <a:picLocks noChangeAspect="1"/>
+          </p:cNvPicPr>
+          <p:nvPr/>
+        </p:nvPicPr>
+        <p:blipFill>
+          <a:blip r:embed="rId11">
+            <a:extLst>
+              <a:ext uri="{96DAC541-7B7A-43D3-8B79-37D633B846F1}">
+                <asvg:svgBlip xmlns:asvg="http://schemas.microsoft.com/office/drawing/2016/SVG/main" r:embed="rId12"/>
+              </a:ext>
+            </a:extLst>
+          </a:blip>
+          <a:stretch>
+            <a:fillRect/>
+          </a:stretch>
+        </p:blipFill>
+        <p:spPr>
+          <a:xfrm>
+            <a:off x="7863840" y="3749040"/>
+            <a:ext cx="3246120" cy="1920240"/>
+          </a:xfrm>
+          <a:prstGeom prst="rect">
+            <a:avLst/>
+          </a:prstGeom>
+        </p:spPr>
+      </p:pic>
+      <p:sp>
+        <p:nvSpPr>
+          <p:cNvPr id="13" name="Shape 5"/>
+          <p:cNvSpPr/>
+          <p:nvPr/>
+        </p:nvSpPr>
+        <p:spPr>
+          <a:xfrm>
+            <a:off x="7863840" y="3749040"/>
+            <a:ext cx="3246120" cy="1920240"/>
+          </a:xfrm>
+          <a:prstGeom prst="rect">
+            <a:avLst/>
+          </a:prstGeom>
+          <a:solidFill>
+            <a:srgbClr val="FFFFFF">
+              <a:alpha val="0"/>
+            </a:srgbClr>
+          </a:solidFill>
+          <a:ln w="12700">
+            <a:solidFill>
+              <a:srgbClr val="E2E8F0">
+                <a:alpha val="0"/>
+              </a:srgbClr>
+            </a:solidFill>
+            <a:prstDash val="solid"/>
+          </a:ln>
+          <a:effectLst>
+            <a:outerShdw sx="100000" sy="100000" kx="0" ky="0" algn="bl" rotWithShape="0" blurRad="12700" dist="50800" dir="2700000">
+              <a:srgbClr val="000000">
+                <a:alpha val="8000"/>
+              </a:srgbClr>
+            </a:outerShdw>
+          </a:effectLst>
+        </p:spPr>
+      </p:sp>
+      <p:sp>
+        <p:nvSpPr>
+          <p:cNvPr id="14" name="Shape 6"/>
           <p:cNvSpPr/>
           <p:nvPr/>
         </p:nvSpPr>
@@ -12690,13 +13588,13 @@
       </p:sp>
       <p:sp>
         <p:nvSpPr>
-          <p:cNvPr id="11" name="Shape 5"/>
+          <p:cNvPr id="15" name="Shape 7"/>
           <p:cNvSpPr/>
           <p:nvPr/>
         </p:nvSpPr>
         <p:spPr>
           <a:xfrm>
-            <a:off x="6309360" y="1463040"/>
+            <a:off x="4343400" y="1463040"/>
             <a:ext cx="73152" cy="1920240"/>
           </a:xfrm>
           <a:prstGeom prst="rect">
@@ -12717,13 +13615,13 @@
       </p:sp>
       <p:sp>
         <p:nvSpPr>
-          <p:cNvPr id="12" name="Shape 6"/>
+          <p:cNvPr id="16" name="Shape 8"/>
           <p:cNvSpPr/>
           <p:nvPr/>
         </p:nvSpPr>
         <p:spPr>
           <a:xfrm>
-            <a:off x="822960" y="3749040"/>
+            <a:off x="7863840" y="1463040"/>
             <a:ext cx="73152" cy="1920240"/>
           </a:xfrm>
           <a:prstGeom prst="rect">
@@ -12744,13 +13642,13 @@
       </p:sp>
       <p:sp>
         <p:nvSpPr>
-          <p:cNvPr id="13" name="Shape 7"/>
+          <p:cNvPr id="17" name="Shape 9"/>
           <p:cNvSpPr/>
           <p:nvPr/>
         </p:nvSpPr>
         <p:spPr>
           <a:xfrm>
-            <a:off x="6309360" y="3749040"/>
+            <a:off x="822960" y="3749040"/>
             <a:ext cx="73152" cy="1920240"/>
           </a:xfrm>
           <a:prstGeom prst="rect">
@@ -12771,7 +13669,61 @@
       </p:sp>
       <p:sp>
         <p:nvSpPr>
-          <p:cNvPr id="14" name="mdpr:1-2-1624b4:title:__title:1-2-1624b4"/>
+          <p:cNvPr id="18" name="Shape 10"/>
+          <p:cNvSpPr/>
+          <p:nvPr/>
+        </p:nvSpPr>
+        <p:spPr>
+          <a:xfrm>
+            <a:off x="4343400" y="3749040"/>
+            <a:ext cx="73152" cy="1920240"/>
+          </a:xfrm>
+          <a:prstGeom prst="rect">
+            <a:avLst/>
+          </a:prstGeom>
+          <a:solidFill>
+            <a:srgbClr val="2563EB"/>
+          </a:solidFill>
+          <a:ln w="12700">
+            <a:solidFill>
+              <a:srgbClr val="2563EB">
+                <a:alpha val="0"/>
+              </a:srgbClr>
+            </a:solidFill>
+            <a:prstDash val="solid"/>
+          </a:ln>
+        </p:spPr>
+      </p:sp>
+      <p:sp>
+        <p:nvSpPr>
+          <p:cNvPr id="19" name="Shape 11"/>
+          <p:cNvSpPr/>
+          <p:nvPr/>
+        </p:nvSpPr>
+        <p:spPr>
+          <a:xfrm>
+            <a:off x="7863840" y="3749040"/>
+            <a:ext cx="73152" cy="1920240"/>
+          </a:xfrm>
+          <a:prstGeom prst="rect">
+            <a:avLst/>
+          </a:prstGeom>
+          <a:solidFill>
+            <a:srgbClr val="DBEAFE"/>
+          </a:solidFill>
+          <a:ln w="12700">
+            <a:solidFill>
+              <a:srgbClr val="DBEAFE">
+                <a:alpha val="0"/>
+              </a:srgbClr>
+            </a:solidFill>
+            <a:prstDash val="solid"/>
+          </a:ln>
+        </p:spPr>
+      </p:sp>
+      <p:sp>
+        <p:nvSpPr>
+          <p:cNvPr id="20" name="mdpr:example-examples-five-methods-deck-md-6608d8:title:__title:example-examples-five-methods-deck-md-6608d8"/>
           <p:cNvSpPr txBox="1"/>
           <p:nvPr/>
         </p:nvSpPr>
@@ -12805,7 +13757,7 @@
                 <a:ea typeface="Pretendard" pitchFamily="34" charset="-122"/>
                 <a:cs typeface="Pretendard" pitchFamily="34" charset="-120"/>
               </a:rPr>
-              <a:t>Example: examples/pipeline/deck.md</a:t>
+              <a:t>Example: examples/five-methods/deck.md</a:t>
             </a:r>
             <a:endParaRPr lang="en-US" sz="3400" dirty="0"/>
           </a:p>
@@ -12813,14 +13765,14 @@
       </p:sp>
       <p:sp>
         <p:nvSpPr>
-          <p:cNvPr id="15" name="mdpr:1-2-1624b4:item-1:block-32-chunk-1"/>
+          <p:cNvPr id="21" name="mdpr:example-examples-five-methods-deck-md-6608d8:item-1:block-36"/>
           <p:cNvSpPr txBox="1"/>
           <p:nvPr/>
         </p:nvSpPr>
         <p:spPr>
           <a:xfrm>
-            <a:off x="1042416" y="2209800"/>
-            <a:ext cx="4608576" cy="426720"/>
+            <a:off x="1042416" y="2240280"/>
+            <a:ext cx="2825496" cy="365760"/>
           </a:xfrm>
           <a:prstGeom prst="rect">
             <a:avLst/>
@@ -12839,7 +13791,7 @@
               <a:buNone/>
             </a:pPr>
             <a:r>
-              <a:rPr lang="en-US" sz="2200" dirty="0">
+              <a:rPr lang="en-US" sz="1800" dirty="0">
                 <a:solidFill>
                   <a:srgbClr val="111111"/>
                 </a:solidFill>
@@ -12847,22 +13799,22 @@
                 <a:ea typeface="Pretendard" pitchFamily="34" charset="-122"/>
                 <a:cs typeface="Pretendard" pitchFamily="34" charset="-120"/>
               </a:rPr>
-              <a:t>Pipeline Example</a:t>
+              <a:t>Five-Item Layout Example</a:t>
             </a:r>
-            <a:endParaRPr lang="en-US" sz="2200" dirty="0"/>
+            <a:endParaRPr lang="en-US" sz="1800" dirty="0"/>
           </a:p>
         </p:txBody>
       </p:sp>
       <p:sp>
         <p:nvSpPr>
-          <p:cNvPr id="16" name="mdpr:1-2-1624b4:item-2:block-32-chunk-1"/>
+          <p:cNvPr id="22" name="mdpr:example-examples-five-methods-deck-md-6608d8:item-2:block-36"/>
           <p:cNvSpPr txBox="1"/>
           <p:nvPr/>
         </p:nvSpPr>
         <p:spPr>
           <a:xfrm>
-            <a:off x="6528816" y="2209800"/>
-            <a:ext cx="4608576" cy="426720"/>
+            <a:off x="4562856" y="2240280"/>
+            <a:ext cx="2825496" cy="365760"/>
           </a:xfrm>
           <a:prstGeom prst="rect">
             <a:avLst/>
@@ -12881,7 +13833,7 @@
               <a:buNone/>
             </a:pPr>
             <a:r>
-              <a:rPr lang="en-US" sz="2200" dirty="0">
+              <a:rPr lang="en-US" sz="1800" dirty="0">
                 <a:solidFill>
                   <a:srgbClr val="111111"/>
                 </a:solidFill>
@@ -12889,22 +13841,22 @@
                 <a:ea typeface="Pretendard" pitchFamily="34" charset="-122"/>
                 <a:cs typeface="Pretendard" pitchFamily="34" charset="-120"/>
               </a:rPr>
-              <a:t>Publishing Flow</a:t>
+              <a:t>Five Execution Steps</a:t>
             </a:r>
-            <a:endParaRPr lang="en-US" sz="2200" dirty="0"/>
+            <a:endParaRPr lang="en-US" sz="1800" dirty="0"/>
           </a:p>
         </p:txBody>
       </p:sp>
       <p:sp>
         <p:nvSpPr>
-          <p:cNvPr id="17" name="mdpr:1-2-1624b4:item-3:block-32-chunk-1"/>
+          <p:cNvPr id="23" name="mdpr:example-examples-five-methods-deck-md-6608d8:item-3:block-36"/>
           <p:cNvSpPr txBox="1"/>
           <p:nvPr/>
         </p:nvSpPr>
         <p:spPr>
           <a:xfrm>
-            <a:off x="1042416" y="4495800"/>
-            <a:ext cx="4608576" cy="426720"/>
+            <a:off x="8284464" y="2240280"/>
+            <a:ext cx="2624328" cy="365760"/>
           </a:xfrm>
           <a:prstGeom prst="rect">
             <a:avLst/>
@@ -12923,7 +13875,7 @@
               <a:buNone/>
             </a:pPr>
             <a:r>
-              <a:rPr lang="en-US" sz="2200" dirty="0">
+              <a:rPr lang="en-US" sz="1800" dirty="0">
                 <a:solidFill>
                   <a:srgbClr val="111111"/>
                 </a:solidFill>
@@ -12931,22 +13883,22 @@
                 <a:ea typeface="Pretendard" pitchFamily="34" charset="-122"/>
                 <a:cs typeface="Pretendard" pitchFamily="34" charset="-120"/>
               </a:rPr>
-              <a:t>Five-Part Method</a:t>
+              <a:t>  Select a pilot team</a:t>
             </a:r>
-            <a:endParaRPr lang="en-US" sz="2200" dirty="0"/>
+            <a:endParaRPr lang="en-US" sz="1800" dirty="0"/>
           </a:p>
         </p:txBody>
       </p:sp>
       <p:sp>
         <p:nvSpPr>
-          <p:cNvPr id="18" name="mdpr:1-2-1624b4:item-4:block-32-chunk-1"/>
+          <p:cNvPr id="24" name="mdpr:example-examples-five-methods-deck-md-6608d8:item-4:block-36"/>
           <p:cNvSpPr txBox="1"/>
           <p:nvPr/>
         </p:nvSpPr>
         <p:spPr>
           <a:xfrm>
-            <a:off x="6528816" y="4495800"/>
-            <a:ext cx="4608576" cy="426720"/>
+            <a:off x="1243584" y="4389120"/>
+            <a:ext cx="2624328" cy="640080"/>
           </a:xfrm>
           <a:prstGeom prst="rect">
             <a:avLst/>
@@ -12965,7 +13917,7 @@
               <a:buNone/>
             </a:pPr>
             <a:r>
-              <a:rPr lang="en-US" sz="2200" dirty="0">
+              <a:rPr lang="en-US" sz="1800" dirty="0">
                 <a:solidFill>
                   <a:srgbClr val="111111"/>
                 </a:solidFill>
@@ -12973,9 +13925,93 @@
                 <a:ea typeface="Pretendard" pitchFamily="34" charset="-122"/>
                 <a:cs typeface="Pretendard" pitchFamily="34" charset="-120"/>
               </a:rPr>
-              <a:t>Capture source</a:t>
+              <a:t>  Analyze repetitive document types</a:t>
             </a:r>
-            <a:endParaRPr lang="en-US" sz="2200" dirty="0"/>
+            <a:endParaRPr lang="en-US" sz="1800" dirty="0"/>
+          </a:p>
+        </p:txBody>
+      </p:sp>
+      <p:sp>
+        <p:nvSpPr>
+          <p:cNvPr id="25" name="mdpr:example-examples-five-methods-deck-md-6608d8:item-5:block-36"/>
+          <p:cNvSpPr txBox="1"/>
+          <p:nvPr/>
+        </p:nvSpPr>
+        <p:spPr>
+          <a:xfrm>
+            <a:off x="4764024" y="4389120"/>
+            <a:ext cx="2624328" cy="640080"/>
+          </a:xfrm>
+          <a:prstGeom prst="rect">
+            <a:avLst/>
+          </a:prstGeom>
+          <a:noFill/>
+          <a:ln/>
+        </p:spPr>
+        <p:txBody>
+          <a:bodyPr wrap="square" lIns="0" tIns="25400" rIns="25400" bIns="0" rtlCol="0" anchor="ctr"/>
+          <a:lstStyle/>
+          <a:p>
+            <a:pPr algn="ctr" indent="0" marL="0">
+              <a:lnSpc>
+                <a:spcPct val="120000"/>
+              </a:lnSpc>
+              <a:buNone/>
+            </a:pPr>
+            <a:r>
+              <a:rPr lang="en-US" sz="1800" dirty="0">
+                <a:solidFill>
+                  <a:srgbClr val="111111"/>
+                </a:solidFill>
+                <a:latin typeface="Pretendard" pitchFamily="34" charset="0"/>
+                <a:ea typeface="Pretendard" pitchFamily="34" charset="-122"/>
+                <a:cs typeface="Pretendard" pitchFamily="34" charset="-120"/>
+              </a:rPr>
+              <a:t>  Design automation templates</a:t>
+            </a:r>
+            <a:endParaRPr lang="en-US" sz="1800" dirty="0"/>
+          </a:p>
+        </p:txBody>
+      </p:sp>
+      <p:sp>
+        <p:nvSpPr>
+          <p:cNvPr id="26" name="mdpr:example-examples-five-methods-deck-md-6608d8:item-6:block-36"/>
+          <p:cNvSpPr txBox="1"/>
+          <p:nvPr/>
+        </p:nvSpPr>
+        <p:spPr>
+          <a:xfrm>
+            <a:off x="8284464" y="4389120"/>
+            <a:ext cx="2624328" cy="640080"/>
+          </a:xfrm>
+          <a:prstGeom prst="rect">
+            <a:avLst/>
+          </a:prstGeom>
+          <a:noFill/>
+          <a:ln/>
+        </p:spPr>
+        <p:txBody>
+          <a:bodyPr wrap="square" lIns="0" tIns="25400" rIns="25400" bIns="0" rtlCol="0" anchor="ctr"/>
+          <a:lstStyle/>
+          <a:p>
+            <a:pPr algn="ctr" indent="0" marL="0">
+              <a:lnSpc>
+                <a:spcPct val="120000"/>
+              </a:lnSpc>
+              <a:buNone/>
+            </a:pPr>
+            <a:r>
+              <a:rPr lang="en-US" sz="1800" dirty="0">
+                <a:solidFill>
+                  <a:srgbClr val="111111"/>
+                </a:solidFill>
+                <a:latin typeface="Pretendard" pitchFamily="34" charset="0"/>
+                <a:ea typeface="Pretendard" pitchFamily="34" charset="-122"/>
+                <a:cs typeface="Pretendard" pitchFamily="34" charset="-120"/>
+              </a:rPr>
+              <a:t>  Build a knowledge search index</a:t>
+            </a:r>
+            <a:endParaRPr lang="en-US" sz="1800" dirty="0"/>
           </a:p>
         </p:txBody>
       </p:sp>
@@ -13011,16 +14047,280 @@
           <a:chExt cx="0" cy="0"/>
         </a:xfrm>
       </p:grpSpPr>
-      <p:sp>
-        <p:nvSpPr>
-          <p:cNvPr id="2" name="Shape 0"/>
+      <p:pic>
+        <p:nvPicPr>
+          <p:cNvPr id="2" name="Image 0" descr="preencoded.png">    </p:cNvPr>
+          <p:cNvPicPr>
+            <a:picLocks noChangeAspect="1"/>
+          </p:cNvPicPr>
+          <p:nvPr/>
+        </p:nvPicPr>
+        <p:blipFill>
+          <a:blip r:embed="rId1">
+            <a:extLst>
+              <a:ext uri="{96DAC541-7B7A-43D3-8B79-37D633B846F1}">
+                <asvg:svgBlip xmlns:asvg="http://schemas.microsoft.com/office/drawing/2016/SVG/main" r:embed="rId2"/>
+              </a:ext>
+            </a:extLst>
+          </a:blip>
+          <a:stretch>
+            <a:fillRect/>
+          </a:stretch>
+        </p:blipFill>
+        <p:spPr>
+          <a:xfrm>
+            <a:off x="822960" y="1463040"/>
+            <a:ext cx="5029200" cy="1920240"/>
+          </a:xfrm>
+          <a:prstGeom prst="rect">
+            <a:avLst/>
+          </a:prstGeom>
+        </p:spPr>
+      </p:pic>
+      <p:sp>
+        <p:nvSpPr>
+          <p:cNvPr id="3" name="Shape 0"/>
           <p:cNvSpPr/>
           <p:nvPr/>
         </p:nvSpPr>
         <p:spPr>
           <a:xfrm>
-            <a:off x="822960" y="2487168"/>
-            <a:ext cx="73152" cy="1417320"/>
+            <a:off x="822960" y="1463040"/>
+            <a:ext cx="5029200" cy="1920240"/>
+          </a:xfrm>
+          <a:prstGeom prst="rect">
+            <a:avLst/>
+          </a:prstGeom>
+          <a:solidFill>
+            <a:srgbClr val="FFFFFF">
+              <a:alpha val="0"/>
+            </a:srgbClr>
+          </a:solidFill>
+          <a:ln w="12700">
+            <a:solidFill>
+              <a:srgbClr val="E2E8F0">
+                <a:alpha val="0"/>
+              </a:srgbClr>
+            </a:solidFill>
+            <a:prstDash val="solid"/>
+          </a:ln>
+          <a:effectLst>
+            <a:outerShdw sx="100000" sy="100000" kx="0" ky="0" algn="bl" rotWithShape="0" blurRad="12700" dist="50800" dir="2700000">
+              <a:srgbClr val="000000">
+                <a:alpha val="8000"/>
+              </a:srgbClr>
+            </a:outerShdw>
+          </a:effectLst>
+        </p:spPr>
+      </p:sp>
+      <p:pic>
+        <p:nvPicPr>
+          <p:cNvPr id="4" name="Image 1" descr="preencoded.png">    </p:cNvPr>
+          <p:cNvPicPr>
+            <a:picLocks noChangeAspect="1"/>
+          </p:cNvPicPr>
+          <p:nvPr/>
+        </p:nvPicPr>
+        <p:blipFill>
+          <a:blip r:embed="rId3">
+            <a:extLst>
+              <a:ext uri="{96DAC541-7B7A-43D3-8B79-37D633B846F1}">
+                <asvg:svgBlip xmlns:asvg="http://schemas.microsoft.com/office/drawing/2016/SVG/main" r:embed="rId4"/>
+              </a:ext>
+            </a:extLst>
+          </a:blip>
+          <a:stretch>
+            <a:fillRect/>
+          </a:stretch>
+        </p:blipFill>
+        <p:spPr>
+          <a:xfrm>
+            <a:off x="6309360" y="1463040"/>
+            <a:ext cx="5029200" cy="1920240"/>
+          </a:xfrm>
+          <a:prstGeom prst="rect">
+            <a:avLst/>
+          </a:prstGeom>
+        </p:spPr>
+      </p:pic>
+      <p:sp>
+        <p:nvSpPr>
+          <p:cNvPr id="5" name="Shape 1"/>
+          <p:cNvSpPr/>
+          <p:nvPr/>
+        </p:nvSpPr>
+        <p:spPr>
+          <a:xfrm>
+            <a:off x="6309360" y="1463040"/>
+            <a:ext cx="5029200" cy="1920240"/>
+          </a:xfrm>
+          <a:prstGeom prst="rect">
+            <a:avLst/>
+          </a:prstGeom>
+          <a:solidFill>
+            <a:srgbClr val="FFFFFF">
+              <a:alpha val="0"/>
+            </a:srgbClr>
+          </a:solidFill>
+          <a:ln w="12700">
+            <a:solidFill>
+              <a:srgbClr val="E2E8F0">
+                <a:alpha val="0"/>
+              </a:srgbClr>
+            </a:solidFill>
+            <a:prstDash val="solid"/>
+          </a:ln>
+          <a:effectLst>
+            <a:outerShdw sx="100000" sy="100000" kx="0" ky="0" algn="bl" rotWithShape="0" blurRad="12700" dist="50800" dir="2700000">
+              <a:srgbClr val="000000">
+                <a:alpha val="8000"/>
+              </a:srgbClr>
+            </a:outerShdw>
+          </a:effectLst>
+        </p:spPr>
+      </p:sp>
+      <p:pic>
+        <p:nvPicPr>
+          <p:cNvPr id="6" name="Image 2" descr="preencoded.png">    </p:cNvPr>
+          <p:cNvPicPr>
+            <a:picLocks noChangeAspect="1"/>
+          </p:cNvPicPr>
+          <p:nvPr/>
+        </p:nvPicPr>
+        <p:blipFill>
+          <a:blip r:embed="rId5">
+            <a:extLst>
+              <a:ext uri="{96DAC541-7B7A-43D3-8B79-37D633B846F1}">
+                <asvg:svgBlip xmlns:asvg="http://schemas.microsoft.com/office/drawing/2016/SVG/main" r:embed="rId6"/>
+              </a:ext>
+            </a:extLst>
+          </a:blip>
+          <a:stretch>
+            <a:fillRect/>
+          </a:stretch>
+        </p:blipFill>
+        <p:spPr>
+          <a:xfrm>
+            <a:off x="822960" y="3749040"/>
+            <a:ext cx="5029200" cy="1920240"/>
+          </a:xfrm>
+          <a:prstGeom prst="rect">
+            <a:avLst/>
+          </a:prstGeom>
+        </p:spPr>
+      </p:pic>
+      <p:sp>
+        <p:nvSpPr>
+          <p:cNvPr id="7" name="Shape 2"/>
+          <p:cNvSpPr/>
+          <p:nvPr/>
+        </p:nvSpPr>
+        <p:spPr>
+          <a:xfrm>
+            <a:off x="822960" y="3749040"/>
+            <a:ext cx="5029200" cy="1920240"/>
+          </a:xfrm>
+          <a:prstGeom prst="rect">
+            <a:avLst/>
+          </a:prstGeom>
+          <a:solidFill>
+            <a:srgbClr val="FFFFFF">
+              <a:alpha val="0"/>
+            </a:srgbClr>
+          </a:solidFill>
+          <a:ln w="12700">
+            <a:solidFill>
+              <a:srgbClr val="E2E8F0">
+                <a:alpha val="0"/>
+              </a:srgbClr>
+            </a:solidFill>
+            <a:prstDash val="solid"/>
+          </a:ln>
+          <a:effectLst>
+            <a:outerShdw sx="100000" sy="100000" kx="0" ky="0" algn="bl" rotWithShape="0" blurRad="12700" dist="50800" dir="2700000">
+              <a:srgbClr val="000000">
+                <a:alpha val="8000"/>
+              </a:srgbClr>
+            </a:outerShdw>
+          </a:effectLst>
+        </p:spPr>
+      </p:sp>
+      <p:pic>
+        <p:nvPicPr>
+          <p:cNvPr id="8" name="Image 3" descr="preencoded.png">    </p:cNvPr>
+          <p:cNvPicPr>
+            <a:picLocks noChangeAspect="1"/>
+          </p:cNvPicPr>
+          <p:nvPr/>
+        </p:nvPicPr>
+        <p:blipFill>
+          <a:blip r:embed="rId7">
+            <a:extLst>
+              <a:ext uri="{96DAC541-7B7A-43D3-8B79-37D633B846F1}">
+                <asvg:svgBlip xmlns:asvg="http://schemas.microsoft.com/office/drawing/2016/SVG/main" r:embed="rId8"/>
+              </a:ext>
+            </a:extLst>
+          </a:blip>
+          <a:stretch>
+            <a:fillRect/>
+          </a:stretch>
+        </p:blipFill>
+        <p:spPr>
+          <a:xfrm>
+            <a:off x="6309360" y="3749040"/>
+            <a:ext cx="5029200" cy="1920240"/>
+          </a:xfrm>
+          <a:prstGeom prst="rect">
+            <a:avLst/>
+          </a:prstGeom>
+        </p:spPr>
+      </p:pic>
+      <p:sp>
+        <p:nvSpPr>
+          <p:cNvPr id="9" name="Shape 3"/>
+          <p:cNvSpPr/>
+          <p:nvPr/>
+        </p:nvSpPr>
+        <p:spPr>
+          <a:xfrm>
+            <a:off x="6309360" y="3749040"/>
+            <a:ext cx="5029200" cy="1920240"/>
+          </a:xfrm>
+          <a:prstGeom prst="rect">
+            <a:avLst/>
+          </a:prstGeom>
+          <a:solidFill>
+            <a:srgbClr val="FFFFFF">
+              <a:alpha val="0"/>
+            </a:srgbClr>
+          </a:solidFill>
+          <a:ln w="12700">
+            <a:solidFill>
+              <a:srgbClr val="E2E8F0">
+                <a:alpha val="0"/>
+              </a:srgbClr>
+            </a:solidFill>
+            <a:prstDash val="solid"/>
+          </a:ln>
+          <a:effectLst>
+            <a:outerShdw sx="100000" sy="100000" kx="0" ky="0" algn="bl" rotWithShape="0" blurRad="12700" dist="50800" dir="2700000">
+              <a:srgbClr val="000000">
+                <a:alpha val="8000"/>
+              </a:srgbClr>
+            </a:outerShdw>
+          </a:effectLst>
+        </p:spPr>
+      </p:sp>
+      <p:sp>
+        <p:nvSpPr>
+          <p:cNvPr id="10" name="Shape 4"/>
+          <p:cNvSpPr/>
+          <p:nvPr/>
+        </p:nvSpPr>
+        <p:spPr>
+          <a:xfrm>
+            <a:off x="822960" y="1463040"/>
+            <a:ext cx="73152" cy="1920240"/>
           </a:xfrm>
           <a:prstGeom prst="rect">
             <a:avLst/>
@@ -13040,14 +14340,14 @@
       </p:sp>
       <p:sp>
         <p:nvSpPr>
-          <p:cNvPr id="3" name="Shape 1"/>
+          <p:cNvPr id="11" name="Shape 5"/>
           <p:cNvSpPr/>
           <p:nvPr/>
         </p:nvSpPr>
         <p:spPr>
           <a:xfrm>
-            <a:off x="4343400" y="2487168"/>
-            <a:ext cx="73152" cy="1417320"/>
+            <a:off x="6309360" y="1463040"/>
+            <a:ext cx="73152" cy="1920240"/>
           </a:xfrm>
           <a:prstGeom prst="rect">
             <a:avLst/>
@@ -13067,14 +14367,14 @@
       </p:sp>
       <p:sp>
         <p:nvSpPr>
-          <p:cNvPr id="4" name="Shape 2"/>
+          <p:cNvPr id="12" name="Shape 6"/>
           <p:cNvSpPr/>
           <p:nvPr/>
         </p:nvSpPr>
         <p:spPr>
           <a:xfrm>
-            <a:off x="7863840" y="2487168"/>
-            <a:ext cx="73152" cy="1417320"/>
+            <a:off x="822960" y="3749040"/>
+            <a:ext cx="73152" cy="1920240"/>
           </a:xfrm>
           <a:prstGeom prst="rect">
             <a:avLst/>
@@ -13094,7 +14394,34 @@
       </p:sp>
       <p:sp>
         <p:nvSpPr>
-          <p:cNvPr id="5" name="mdpr:2-2-a2c94a:title:__title:2-2-a2c94a"/>
+          <p:cNvPr id="13" name="Shape 7"/>
+          <p:cNvSpPr/>
+          <p:nvPr/>
+        </p:nvSpPr>
+        <p:spPr>
+          <a:xfrm>
+            <a:off x="6309360" y="3749040"/>
+            <a:ext cx="73152" cy="1920240"/>
+          </a:xfrm>
+          <a:prstGeom prst="rect">
+            <a:avLst/>
+          </a:prstGeom>
+          <a:solidFill>
+            <a:srgbClr val="DBEAFE"/>
+          </a:solidFill>
+          <a:ln w="12700">
+            <a:solidFill>
+              <a:srgbClr val="DBEAFE">
+                <a:alpha val="0"/>
+              </a:srgbClr>
+            </a:solidFill>
+            <a:prstDash val="solid"/>
+          </a:ln>
+        </p:spPr>
+      </p:sp>
+      <p:sp>
+        <p:nvSpPr>
+          <p:cNvPr id="14" name="mdpr:1-3-9e7dc8:title:__title:1-3-9e7dc8"/>
           <p:cNvSpPr txBox="1"/>
           <p:nvPr/>
         </p:nvSpPr>
@@ -13128,24 +14455,7 @@
                 <a:ea typeface="Pretendard" pitchFamily="34" charset="-122"/>
                 <a:cs typeface="Pretendard" pitchFamily="34" charset="-120"/>
               </a:rPr>
-              <a:t>Example: examples/pipeline/deck.md</a:t>
-            </a:r>
-            <a:pPr algn="ctr" indent="0" marL="0">
-              <a:lnSpc>
-                <a:spcPct val="120000"/>
-              </a:lnSpc>
-              <a:buNone/>
-            </a:pPr>
-            <a:r>
-              <a:rPr lang="en-US" sz="2000" dirty="0">
-                <a:solidFill>
-                  <a:srgbClr val="919191"/>
-                </a:solidFill>
-                <a:latin typeface="Pretendard" pitchFamily="34" charset="0"/>
-                <a:ea typeface="Pretendard" pitchFamily="34" charset="-122"/>
-                <a:cs typeface="Pretendard" pitchFamily="34" charset="-120"/>
-              </a:rPr>
-              <a:t> (Cont. 2/2)</a:t>
+              <a:t>Example: examples/theme-preview-en/deck.md</a:t>
             </a:r>
             <a:endParaRPr lang="en-US" sz="3400" dirty="0"/>
           </a:p>
@@ -13153,14 +14463,14 @@
       </p:sp>
       <p:sp>
         <p:nvSpPr>
-          <p:cNvPr id="6" name="mdpr:2-2-a2c94a:item-1:block-32-chunk-2"/>
+          <p:cNvPr id="15" name="mdpr:1-3-9e7dc8:item-1:block-38-chunk-1"/>
           <p:cNvSpPr txBox="1"/>
           <p:nvPr/>
         </p:nvSpPr>
         <p:spPr>
           <a:xfrm>
-            <a:off x="1042416" y="2982468"/>
-            <a:ext cx="2825496" cy="426720"/>
+            <a:off x="1042416" y="2209800"/>
+            <a:ext cx="4608576" cy="426720"/>
           </a:xfrm>
           <a:prstGeom prst="rect">
             <a:avLst/>
@@ -13187,7 +14497,7 @@
                 <a:ea typeface="Pretendard" pitchFamily="34" charset="-122"/>
                 <a:cs typeface="Pretendard" pitchFamily="34" charset="-120"/>
               </a:rPr>
-              <a:t>Split structure</a:t>
+              <a:t>MDPR Design Grammar</a:t>
             </a:r>
             <a:endParaRPr lang="en-US" sz="2200" dirty="0"/>
           </a:p>
@@ -13195,14 +14505,14 @@
       </p:sp>
       <p:sp>
         <p:nvSpPr>
-          <p:cNvPr id="7" name="mdpr:2-2-a2c94a:item-2:block-32-chunk-2"/>
+          <p:cNvPr id="16" name="mdpr:1-3-9e7dc8:item-2:block-38-chunk-1"/>
           <p:cNvSpPr txBox="1"/>
           <p:nvPr/>
         </p:nvSpPr>
         <p:spPr>
           <a:xfrm>
-            <a:off x="4562856" y="2982468"/>
-            <a:ext cx="2825496" cy="426720"/>
+            <a:off x="6528816" y="2209800"/>
+            <a:ext cx="4608576" cy="426720"/>
           </a:xfrm>
           <a:prstGeom prst="rect">
             <a:avLst/>
@@ -13229,7 +14539,7 @@
                 <a:ea typeface="Pretendard" pitchFamily="34" charset="-122"/>
                 <a:cs typeface="Pretendard" pitchFamily="34" charset="-120"/>
               </a:rPr>
-              <a:t>Plan layout</a:t>
+              <a:t>Teaser Summary</a:t>
             </a:r>
             <a:endParaRPr lang="en-US" sz="2200" dirty="0"/>
           </a:p>
@@ -13237,14 +14547,14 @@
       </p:sp>
       <p:sp>
         <p:nvSpPr>
-          <p:cNvPr id="8" name="mdpr:2-2-a2c94a:item-3:block-32-chunk-2"/>
+          <p:cNvPr id="17" name="mdpr:1-3-9e7dc8:item-3:block-38-chunk-1"/>
           <p:cNvSpPr txBox="1"/>
           <p:nvPr/>
         </p:nvSpPr>
         <p:spPr>
           <a:xfrm>
-            <a:off x="8083296" y="2982468"/>
-            <a:ext cx="2825496" cy="426720"/>
+            <a:off x="1042416" y="3913632"/>
+            <a:ext cx="4608576" cy="1591056"/>
           </a:xfrm>
           <a:prstGeom prst="rect">
             <a:avLst/>
@@ -13256,7 +14566,24 @@
           <a:bodyPr wrap="square" lIns="0" tIns="25400" rIns="25400" bIns="0" rtlCol="0" anchor="ctr"/>
           <a:lstStyle/>
           <a:p>
-            <a:pPr algn="ctr" indent="0" marL="0">
+            <a:pPr algn="l" indent="0" marL="0">
+              <a:lnSpc>
+                <a:spcPct val="120000"/>
+              </a:lnSpc>
+              <a:buNone/>
+            </a:pPr>
+            <a:r>
+              <a:rPr lang="en-US" sz="2200" b="1" dirty="0">
+                <a:solidFill>
+                  <a:srgbClr val="2563EB"/>
+                </a:solidFill>
+                <a:latin typeface="Pretendard" pitchFamily="34" charset="0"/>
+                <a:ea typeface="Pretendard" pitchFamily="34" charset="-122"/>
+                <a:cs typeface="Pretendard" pitchFamily="34" charset="-120"/>
+              </a:rPr>
+              <a:t>  Preview styles</a:t>
+            </a:r>
+            <a:pPr algn="l" indent="0" marL="0">
               <a:lnSpc>
                 <a:spcPct val="120000"/>
               </a:lnSpc>
@@ -13271,7 +14598,66 @@
                 <a:ea typeface="Pretendard" pitchFamily="34" charset="-122"/>
                 <a:cs typeface="Pretendard" pitchFamily="34" charset="-120"/>
               </a:rPr>
-              <a:t>Render outputs</a:t>
+              <a:t>    9 distinct decoration grammars, not palette-only swaps.</a:t>
+            </a:r>
+            <a:endParaRPr lang="en-US" sz="2200" dirty="0"/>
+          </a:p>
+        </p:txBody>
+      </p:sp>
+      <p:sp>
+        <p:nvSpPr>
+          <p:cNvPr id="18" name="mdpr:1-3-9e7dc8:item-4:block-38-chunk-1"/>
+          <p:cNvSpPr txBox="1"/>
+          <p:nvPr/>
+        </p:nvSpPr>
+        <p:spPr>
+          <a:xfrm>
+            <a:off x="6528816" y="3913632"/>
+            <a:ext cx="4608576" cy="1591056"/>
+          </a:xfrm>
+          <a:prstGeom prst="rect">
+            <a:avLst/>
+          </a:prstGeom>
+          <a:noFill/>
+          <a:ln/>
+        </p:spPr>
+        <p:txBody>
+          <a:bodyPr wrap="square" lIns="0" tIns="25400" rIns="25400" bIns="0" rtlCol="0" anchor="ctr"/>
+          <a:lstStyle/>
+          <a:p>
+            <a:pPr algn="l" indent="0" marL="0">
+              <a:lnSpc>
+                <a:spcPct val="120000"/>
+              </a:lnSpc>
+              <a:buNone/>
+            </a:pPr>
+            <a:r>
+              <a:rPr lang="en-US" sz="2200" b="1" dirty="0">
+                <a:solidFill>
+                  <a:srgbClr val="2563EB"/>
+                </a:solidFill>
+                <a:latin typeface="Pretendard" pitchFamily="34" charset="0"/>
+                <a:ea typeface="Pretendard" pitchFamily="34" charset="-122"/>
+                <a:cs typeface="Pretendard" pitchFamily="34" charset="-120"/>
+              </a:rPr>
+              <a:t>  Pattern range</a:t>
+            </a:r>
+            <a:pPr algn="l" indent="0" marL="0">
+              <a:lnSpc>
+                <a:spcPct val="120000"/>
+              </a:lnSpc>
+              <a:buNone/>
+            </a:pPr>
+            <a:r>
+              <a:rPr lang="en-US" sz="2200" dirty="0">
+                <a:solidFill>
+                  <a:srgbClr val="111111"/>
+                </a:solidFill>
+                <a:latin typeface="Pretendard" pitchFamily="34" charset="0"/>
+                <a:ea typeface="Pretendard" pitchFamily="34" charset="-122"/>
+                <a:cs typeface="Pretendard" pitchFamily="34" charset="-120"/>
+              </a:rPr>
+              <a:t>    36+ decoration and layout patterns selected by content role.</a:t>
             </a:r>
             <a:endParaRPr lang="en-US" sz="2200" dirty="0"/>
           </a:p>
@@ -13309,412 +14695,16 @@
           <a:chExt cx="0" cy="0"/>
         </a:xfrm>
       </p:grpSpPr>
-      <p:pic>
-        <p:nvPicPr>
-          <p:cNvPr id="2" name="Image 0" descr="preencoded.png">    </p:cNvPr>
-          <p:cNvPicPr>
-            <a:picLocks noChangeAspect="1"/>
-          </p:cNvPicPr>
-          <p:nvPr/>
-        </p:nvPicPr>
-        <p:blipFill>
-          <a:blip r:embed="rId1">
-            <a:extLst>
-              <a:ext uri="{96DAC541-7B7A-43D3-8B79-37D633B846F1}">
-                <asvg:svgBlip xmlns:asvg="http://schemas.microsoft.com/office/drawing/2016/SVG/main" r:embed="rId2"/>
-              </a:ext>
-            </a:extLst>
-          </a:blip>
-          <a:stretch>
-            <a:fillRect/>
-          </a:stretch>
-        </p:blipFill>
-        <p:spPr>
-          <a:xfrm>
-            <a:off x="822960" y="1463040"/>
-            <a:ext cx="3246120" cy="1920240"/>
-          </a:xfrm>
-          <a:prstGeom prst="rect">
-            <a:avLst/>
-          </a:prstGeom>
-        </p:spPr>
-      </p:pic>
-      <p:sp>
-        <p:nvSpPr>
-          <p:cNvPr id="3" name="Shape 0"/>
+      <p:sp>
+        <p:nvSpPr>
+          <p:cNvPr id="2" name="Shape 0"/>
           <p:cNvSpPr/>
           <p:nvPr/>
         </p:nvSpPr>
         <p:spPr>
           <a:xfrm>
-            <a:off x="822960" y="1463040"/>
-            <a:ext cx="3246120" cy="1920240"/>
-          </a:xfrm>
-          <a:prstGeom prst="rect">
-            <a:avLst/>
-          </a:prstGeom>
-          <a:solidFill>
-            <a:srgbClr val="FFFFFF">
-              <a:alpha val="0"/>
-            </a:srgbClr>
-          </a:solidFill>
-          <a:ln w="12700">
-            <a:solidFill>
-              <a:srgbClr val="E2E8F0">
-                <a:alpha val="0"/>
-              </a:srgbClr>
-            </a:solidFill>
-            <a:prstDash val="solid"/>
-          </a:ln>
-          <a:effectLst>
-            <a:outerShdw sx="100000" sy="100000" kx="0" ky="0" algn="bl" rotWithShape="0" blurRad="12700" dist="50800" dir="2700000">
-              <a:srgbClr val="000000">
-                <a:alpha val="8000"/>
-              </a:srgbClr>
-            </a:outerShdw>
-          </a:effectLst>
-        </p:spPr>
-      </p:sp>
-      <p:pic>
-        <p:nvPicPr>
-          <p:cNvPr id="4" name="Image 1" descr="preencoded.png">    </p:cNvPr>
-          <p:cNvPicPr>
-            <a:picLocks noChangeAspect="1"/>
-          </p:cNvPicPr>
-          <p:nvPr/>
-        </p:nvPicPr>
-        <p:blipFill>
-          <a:blip r:embed="rId3">
-            <a:extLst>
-              <a:ext uri="{96DAC541-7B7A-43D3-8B79-37D633B846F1}">
-                <asvg:svgBlip xmlns:asvg="http://schemas.microsoft.com/office/drawing/2016/SVG/main" r:embed="rId4"/>
-              </a:ext>
-            </a:extLst>
-          </a:blip>
-          <a:stretch>
-            <a:fillRect/>
-          </a:stretch>
-        </p:blipFill>
-        <p:spPr>
-          <a:xfrm>
-            <a:off x="4343400" y="1463040"/>
-            <a:ext cx="3246120" cy="1920240"/>
-          </a:xfrm>
-          <a:prstGeom prst="rect">
-            <a:avLst/>
-          </a:prstGeom>
-        </p:spPr>
-      </p:pic>
-      <p:sp>
-        <p:nvSpPr>
-          <p:cNvPr id="5" name="Shape 1"/>
-          <p:cNvSpPr/>
-          <p:nvPr/>
-        </p:nvSpPr>
-        <p:spPr>
-          <a:xfrm>
-            <a:off x="4343400" y="1463040"/>
-            <a:ext cx="3246120" cy="1920240"/>
-          </a:xfrm>
-          <a:prstGeom prst="rect">
-            <a:avLst/>
-          </a:prstGeom>
-          <a:solidFill>
-            <a:srgbClr val="FFFFFF">
-              <a:alpha val="0"/>
-            </a:srgbClr>
-          </a:solidFill>
-          <a:ln w="12700">
-            <a:solidFill>
-              <a:srgbClr val="E2E8F0">
-                <a:alpha val="0"/>
-              </a:srgbClr>
-            </a:solidFill>
-            <a:prstDash val="solid"/>
-          </a:ln>
-          <a:effectLst>
-            <a:outerShdw sx="100000" sy="100000" kx="0" ky="0" algn="bl" rotWithShape="0" blurRad="12700" dist="50800" dir="2700000">
-              <a:srgbClr val="000000">
-                <a:alpha val="8000"/>
-              </a:srgbClr>
-            </a:outerShdw>
-          </a:effectLst>
-        </p:spPr>
-      </p:sp>
-      <p:pic>
-        <p:nvPicPr>
-          <p:cNvPr id="6" name="Image 2" descr="preencoded.png">    </p:cNvPr>
-          <p:cNvPicPr>
-            <a:picLocks noChangeAspect="1"/>
-          </p:cNvPicPr>
-          <p:nvPr/>
-        </p:nvPicPr>
-        <p:blipFill>
-          <a:blip r:embed="rId5">
-            <a:extLst>
-              <a:ext uri="{96DAC541-7B7A-43D3-8B79-37D633B846F1}">
-                <asvg:svgBlip xmlns:asvg="http://schemas.microsoft.com/office/drawing/2016/SVG/main" r:embed="rId6"/>
-              </a:ext>
-            </a:extLst>
-          </a:blip>
-          <a:stretch>
-            <a:fillRect/>
-          </a:stretch>
-        </p:blipFill>
-        <p:spPr>
-          <a:xfrm>
-            <a:off x="7863840" y="1463040"/>
-            <a:ext cx="3246120" cy="1920240"/>
-          </a:xfrm>
-          <a:prstGeom prst="rect">
-            <a:avLst/>
-          </a:prstGeom>
-        </p:spPr>
-      </p:pic>
-      <p:sp>
-        <p:nvSpPr>
-          <p:cNvPr id="7" name="Shape 2"/>
-          <p:cNvSpPr/>
-          <p:nvPr/>
-        </p:nvSpPr>
-        <p:spPr>
-          <a:xfrm>
-            <a:off x="7863840" y="1463040"/>
-            <a:ext cx="3246120" cy="1920240"/>
-          </a:xfrm>
-          <a:prstGeom prst="rect">
-            <a:avLst/>
-          </a:prstGeom>
-          <a:solidFill>
-            <a:srgbClr val="FFFFFF">
-              <a:alpha val="0"/>
-            </a:srgbClr>
-          </a:solidFill>
-          <a:ln w="12700">
-            <a:solidFill>
-              <a:srgbClr val="E2E8F0">
-                <a:alpha val="0"/>
-              </a:srgbClr>
-            </a:solidFill>
-            <a:prstDash val="solid"/>
-          </a:ln>
-          <a:effectLst>
-            <a:outerShdw sx="100000" sy="100000" kx="0" ky="0" algn="bl" rotWithShape="0" blurRad="12700" dist="50800" dir="2700000">
-              <a:srgbClr val="000000">
-                <a:alpha val="8000"/>
-              </a:srgbClr>
-            </a:outerShdw>
-          </a:effectLst>
-        </p:spPr>
-      </p:sp>
-      <p:pic>
-        <p:nvPicPr>
-          <p:cNvPr id="8" name="Image 3" descr="preencoded.png">    </p:cNvPr>
-          <p:cNvPicPr>
-            <a:picLocks noChangeAspect="1"/>
-          </p:cNvPicPr>
-          <p:nvPr/>
-        </p:nvPicPr>
-        <p:blipFill>
-          <a:blip r:embed="rId7">
-            <a:extLst>
-              <a:ext uri="{96DAC541-7B7A-43D3-8B79-37D633B846F1}">
-                <asvg:svgBlip xmlns:asvg="http://schemas.microsoft.com/office/drawing/2016/SVG/main" r:embed="rId8"/>
-              </a:ext>
-            </a:extLst>
-          </a:blip>
-          <a:stretch>
-            <a:fillRect/>
-          </a:stretch>
-        </p:blipFill>
-        <p:spPr>
-          <a:xfrm>
-            <a:off x="822960" y="3749040"/>
-            <a:ext cx="3246120" cy="1920240"/>
-          </a:xfrm>
-          <a:prstGeom prst="rect">
-            <a:avLst/>
-          </a:prstGeom>
-        </p:spPr>
-      </p:pic>
-      <p:sp>
-        <p:nvSpPr>
-          <p:cNvPr id="9" name="Shape 3"/>
-          <p:cNvSpPr/>
-          <p:nvPr/>
-        </p:nvSpPr>
-        <p:spPr>
-          <a:xfrm>
-            <a:off x="822960" y="3749040"/>
-            <a:ext cx="3246120" cy="1920240"/>
-          </a:xfrm>
-          <a:prstGeom prst="rect">
-            <a:avLst/>
-          </a:prstGeom>
-          <a:solidFill>
-            <a:srgbClr val="FFFFFF">
-              <a:alpha val="0"/>
-            </a:srgbClr>
-          </a:solidFill>
-          <a:ln w="12700">
-            <a:solidFill>
-              <a:srgbClr val="E2E8F0">
-                <a:alpha val="0"/>
-              </a:srgbClr>
-            </a:solidFill>
-            <a:prstDash val="solid"/>
-          </a:ln>
-          <a:effectLst>
-            <a:outerShdw sx="100000" sy="100000" kx="0" ky="0" algn="bl" rotWithShape="0" blurRad="12700" dist="50800" dir="2700000">
-              <a:srgbClr val="000000">
-                <a:alpha val="8000"/>
-              </a:srgbClr>
-            </a:outerShdw>
-          </a:effectLst>
-        </p:spPr>
-      </p:sp>
-      <p:pic>
-        <p:nvPicPr>
-          <p:cNvPr id="10" name="Image 4" descr="preencoded.png">    </p:cNvPr>
-          <p:cNvPicPr>
-            <a:picLocks noChangeAspect="1"/>
-          </p:cNvPicPr>
-          <p:nvPr/>
-        </p:nvPicPr>
-        <p:blipFill>
-          <a:blip r:embed="rId9">
-            <a:extLst>
-              <a:ext uri="{96DAC541-7B7A-43D3-8B79-37D633B846F1}">
-                <asvg:svgBlip xmlns:asvg="http://schemas.microsoft.com/office/drawing/2016/SVG/main" r:embed="rId10"/>
-              </a:ext>
-            </a:extLst>
-          </a:blip>
-          <a:stretch>
-            <a:fillRect/>
-          </a:stretch>
-        </p:blipFill>
-        <p:spPr>
-          <a:xfrm>
-            <a:off x="4343400" y="3749040"/>
-            <a:ext cx="3246120" cy="1920240"/>
-          </a:xfrm>
-          <a:prstGeom prst="rect">
-            <a:avLst/>
-          </a:prstGeom>
-        </p:spPr>
-      </p:pic>
-      <p:sp>
-        <p:nvSpPr>
-          <p:cNvPr id="11" name="Shape 4"/>
-          <p:cNvSpPr/>
-          <p:nvPr/>
-        </p:nvSpPr>
-        <p:spPr>
-          <a:xfrm>
-            <a:off x="4343400" y="3749040"/>
-            <a:ext cx="3246120" cy="1920240"/>
-          </a:xfrm>
-          <a:prstGeom prst="rect">
-            <a:avLst/>
-          </a:prstGeom>
-          <a:solidFill>
-            <a:srgbClr val="FFFFFF">
-              <a:alpha val="0"/>
-            </a:srgbClr>
-          </a:solidFill>
-          <a:ln w="12700">
-            <a:solidFill>
-              <a:srgbClr val="E2E8F0">
-                <a:alpha val="0"/>
-              </a:srgbClr>
-            </a:solidFill>
-            <a:prstDash val="solid"/>
-          </a:ln>
-          <a:effectLst>
-            <a:outerShdw sx="100000" sy="100000" kx="0" ky="0" algn="bl" rotWithShape="0" blurRad="12700" dist="50800" dir="2700000">
-              <a:srgbClr val="000000">
-                <a:alpha val="8000"/>
-              </a:srgbClr>
-            </a:outerShdw>
-          </a:effectLst>
-        </p:spPr>
-      </p:sp>
-      <p:pic>
-        <p:nvPicPr>
-          <p:cNvPr id="12" name="Image 5" descr="preencoded.png">    </p:cNvPr>
-          <p:cNvPicPr>
-            <a:picLocks noChangeAspect="1"/>
-          </p:cNvPicPr>
-          <p:nvPr/>
-        </p:nvPicPr>
-        <p:blipFill>
-          <a:blip r:embed="rId11">
-            <a:extLst>
-              <a:ext uri="{96DAC541-7B7A-43D3-8B79-37D633B846F1}">
-                <asvg:svgBlip xmlns:asvg="http://schemas.microsoft.com/office/drawing/2016/SVG/main" r:embed="rId12"/>
-              </a:ext>
-            </a:extLst>
-          </a:blip>
-          <a:stretch>
-            <a:fillRect/>
-          </a:stretch>
-        </p:blipFill>
-        <p:spPr>
-          <a:xfrm>
-            <a:off x="7863840" y="3749040"/>
-            <a:ext cx="3246120" cy="1920240"/>
-          </a:xfrm>
-          <a:prstGeom prst="rect">
-            <a:avLst/>
-          </a:prstGeom>
-        </p:spPr>
-      </p:pic>
-      <p:sp>
-        <p:nvSpPr>
-          <p:cNvPr id="13" name="Shape 5"/>
-          <p:cNvSpPr/>
-          <p:nvPr/>
-        </p:nvSpPr>
-        <p:spPr>
-          <a:xfrm>
-            <a:off x="7863840" y="3749040"/>
-            <a:ext cx="3246120" cy="1920240"/>
-          </a:xfrm>
-          <a:prstGeom prst="rect">
-            <a:avLst/>
-          </a:prstGeom>
-          <a:solidFill>
-            <a:srgbClr val="FFFFFF">
-              <a:alpha val="0"/>
-            </a:srgbClr>
-          </a:solidFill>
-          <a:ln w="12700">
-            <a:solidFill>
-              <a:srgbClr val="E2E8F0">
-                <a:alpha val="0"/>
-              </a:srgbClr>
-            </a:solidFill>
-            <a:prstDash val="solid"/>
-          </a:ln>
-          <a:effectLst>
-            <a:outerShdw sx="100000" sy="100000" kx="0" ky="0" algn="bl" rotWithShape="0" blurRad="12700" dist="50800" dir="2700000">
-              <a:srgbClr val="000000">
-                <a:alpha val="8000"/>
-              </a:srgbClr>
-            </a:outerShdw>
-          </a:effectLst>
-        </p:spPr>
-      </p:sp>
-      <p:sp>
-        <p:nvSpPr>
-          <p:cNvPr id="14" name="Shape 6"/>
-          <p:cNvSpPr/>
-          <p:nvPr/>
-        </p:nvSpPr>
-        <p:spPr>
-          <a:xfrm>
-            <a:off x="822960" y="1463040"/>
-            <a:ext cx="73152" cy="1920240"/>
+            <a:off x="822960" y="1938528"/>
+            <a:ext cx="73152" cy="2514600"/>
           </a:xfrm>
           <a:prstGeom prst="rect">
             <a:avLst/>
@@ -13734,14 +14724,14 @@
       </p:sp>
       <p:sp>
         <p:nvSpPr>
-          <p:cNvPr id="15" name="Shape 7"/>
+          <p:cNvPr id="3" name="Shape 1"/>
           <p:cNvSpPr/>
           <p:nvPr/>
         </p:nvSpPr>
         <p:spPr>
           <a:xfrm>
-            <a:off x="4343400" y="1463040"/>
-            <a:ext cx="73152" cy="1920240"/>
+            <a:off x="4343400" y="1938528"/>
+            <a:ext cx="73152" cy="2514600"/>
           </a:xfrm>
           <a:prstGeom prst="rect">
             <a:avLst/>
@@ -13761,14 +14751,14 @@
       </p:sp>
       <p:sp>
         <p:nvSpPr>
-          <p:cNvPr id="16" name="Shape 8"/>
+          <p:cNvPr id="4" name="Shape 2"/>
           <p:cNvSpPr/>
           <p:nvPr/>
         </p:nvSpPr>
         <p:spPr>
           <a:xfrm>
-            <a:off x="7863840" y="1463040"/>
-            <a:ext cx="73152" cy="1920240"/>
+            <a:off x="7863840" y="1938528"/>
+            <a:ext cx="73152" cy="2514600"/>
           </a:xfrm>
           <a:prstGeom prst="rect">
             <a:avLst/>
@@ -13788,88 +14778,7 @@
       </p:sp>
       <p:sp>
         <p:nvSpPr>
-          <p:cNvPr id="17" name="Shape 9"/>
-          <p:cNvSpPr/>
-          <p:nvPr/>
-        </p:nvSpPr>
-        <p:spPr>
-          <a:xfrm>
-            <a:off x="822960" y="3749040"/>
-            <a:ext cx="73152" cy="1920240"/>
-          </a:xfrm>
-          <a:prstGeom prst="rect">
-            <a:avLst/>
-          </a:prstGeom>
-          <a:solidFill>
-            <a:srgbClr val="DBEAFE"/>
-          </a:solidFill>
-          <a:ln w="12700">
-            <a:solidFill>
-              <a:srgbClr val="DBEAFE">
-                <a:alpha val="0"/>
-              </a:srgbClr>
-            </a:solidFill>
-            <a:prstDash val="solid"/>
-          </a:ln>
-        </p:spPr>
-      </p:sp>
-      <p:sp>
-        <p:nvSpPr>
-          <p:cNvPr id="18" name="Shape 10"/>
-          <p:cNvSpPr/>
-          <p:nvPr/>
-        </p:nvSpPr>
-        <p:spPr>
-          <a:xfrm>
-            <a:off x="4343400" y="3749040"/>
-            <a:ext cx="73152" cy="1920240"/>
-          </a:xfrm>
-          <a:prstGeom prst="rect">
-            <a:avLst/>
-          </a:prstGeom>
-          <a:solidFill>
-            <a:srgbClr val="2563EB"/>
-          </a:solidFill>
-          <a:ln w="12700">
-            <a:solidFill>
-              <a:srgbClr val="2563EB">
-                <a:alpha val="0"/>
-              </a:srgbClr>
-            </a:solidFill>
-            <a:prstDash val="solid"/>
-          </a:ln>
-        </p:spPr>
-      </p:sp>
-      <p:sp>
-        <p:nvSpPr>
-          <p:cNvPr id="19" name="Shape 11"/>
-          <p:cNvSpPr/>
-          <p:nvPr/>
-        </p:nvSpPr>
-        <p:spPr>
-          <a:xfrm>
-            <a:off x="7863840" y="3749040"/>
-            <a:ext cx="73152" cy="1920240"/>
-          </a:xfrm>
-          <a:prstGeom prst="rect">
-            <a:avLst/>
-          </a:prstGeom>
-          <a:solidFill>
-            <a:srgbClr val="DBEAFE"/>
-          </a:solidFill>
-          <a:ln w="12700">
-            <a:solidFill>
-              <a:srgbClr val="DBEAFE">
-                <a:alpha val="0"/>
-              </a:srgbClr>
-            </a:solidFill>
-            <a:prstDash val="solid"/>
-          </a:ln>
-        </p:spPr>
-      </p:sp>
-      <p:sp>
-        <p:nvSpPr>
-          <p:cNvPr id="20" name="mdpr:example-examples-diagram-arrangements-deck-md-adac59:title:__title:example-examples-diagram-arrangements-deck-md-adac59"/>
+          <p:cNvPr id="5" name="mdpr:2-3-298275:title:__title:2-3-298275"/>
           <p:cNvSpPr txBox="1"/>
           <p:nvPr/>
         </p:nvSpPr>
@@ -13903,33 +14812,8 @@
                 <a:ea typeface="Pretendard" pitchFamily="34" charset="-122"/>
                 <a:cs typeface="Pretendard" pitchFamily="34" charset="-120"/>
               </a:rPr>
-              <a:t>Example: examples/diagram-arrangements/deck.md</a:t>
+              <a:t>Example: examples/theme-preview-en/deck.md</a:t>
             </a:r>
-            <a:endParaRPr lang="en-US" sz="3400" dirty="0"/>
-          </a:p>
-        </p:txBody>
-      </p:sp>
-      <p:sp>
-        <p:nvSpPr>
-          <p:cNvPr id="21" name="mdpr:example-examples-diagram-arrangements-deck-md-adac59:item-1:block-34"/>
-          <p:cNvSpPr txBox="1"/>
-          <p:nvPr/>
-        </p:nvSpPr>
-        <p:spPr>
-          <a:xfrm>
-            <a:off x="1042416" y="2103120"/>
-            <a:ext cx="2825496" cy="640080"/>
-          </a:xfrm>
-          <a:prstGeom prst="rect">
-            <a:avLst/>
-          </a:prstGeom>
-          <a:noFill/>
-          <a:ln/>
-        </p:spPr>
-        <p:txBody>
-          <a:bodyPr wrap="square" lIns="0" tIns="25400" rIns="25400" bIns="0" rtlCol="0" anchor="ctr"/>
-          <a:lstStyle/>
-          <a:p>
             <a:pPr algn="ctr" indent="0" marL="0">
               <a:lnSpc>
                 <a:spcPct val="120000"/>
@@ -13937,7 +14821,66 @@
               <a:buNone/>
             </a:pPr>
             <a:r>
-              <a:rPr lang="en-US" sz="1800" dirty="0">
+              <a:rPr lang="en-US" sz="2000" dirty="0">
+                <a:solidFill>
+                  <a:srgbClr val="919191"/>
+                </a:solidFill>
+                <a:latin typeface="Pretendard" pitchFamily="34" charset="0"/>
+                <a:ea typeface="Pretendard" pitchFamily="34" charset="-122"/>
+                <a:cs typeface="Pretendard" pitchFamily="34" charset="-120"/>
+              </a:rPr>
+              <a:t> (Cont. 2/3)</a:t>
+            </a:r>
+            <a:endParaRPr lang="en-US" sz="3400" dirty="0"/>
+          </a:p>
+        </p:txBody>
+      </p:sp>
+      <p:sp>
+        <p:nvSpPr>
+          <p:cNvPr id="6" name="mdpr:2-3-298275:item-1:block-38-chunk-2"/>
+          <p:cNvSpPr txBox="1"/>
+          <p:nvPr/>
+        </p:nvSpPr>
+        <p:spPr>
+          <a:xfrm>
+            <a:off x="1042416" y="2103120"/>
+            <a:ext cx="2825496" cy="2185416"/>
+          </a:xfrm>
+          <a:prstGeom prst="rect">
+            <a:avLst/>
+          </a:prstGeom>
+          <a:noFill/>
+          <a:ln/>
+        </p:spPr>
+        <p:txBody>
+          <a:bodyPr wrap="square" lIns="0" tIns="25400" rIns="25400" bIns="0" rtlCol="0" anchor="ctr"/>
+          <a:lstStyle/>
+          <a:p>
+            <a:pPr algn="l" indent="0" marL="0">
+              <a:lnSpc>
+                <a:spcPct val="120000"/>
+              </a:lnSpc>
+              <a:buNone/>
+            </a:pPr>
+            <a:r>
+              <a:rPr lang="en-US" sz="2200" b="1" dirty="0">
+                <a:solidFill>
+                  <a:srgbClr val="2563EB"/>
+                </a:solidFill>
+                <a:latin typeface="Pretendard" pitchFamily="34" charset="0"/>
+                <a:ea typeface="Pretendard" pitchFamily="34" charset="-122"/>
+                <a:cs typeface="Pretendard" pitchFamily="34" charset="-120"/>
+              </a:rPr>
+              <a:t>  Object support</a:t>
+            </a:r>
+            <a:pPr algn="l" indent="0" marL="0">
+              <a:lnSpc>
+                <a:spcPct val="120000"/>
+              </a:lnSpc>
+              <a:buNone/>
+            </a:pPr>
+            <a:r>
+              <a:rPr lang="en-US" sz="2200" dirty="0">
                 <a:solidFill>
                   <a:srgbClr val="111111"/>
                 </a:solidFill>
@@ -13945,22 +14888,81 @@
                 <a:ea typeface="Pretendard" pitchFamily="34" charset="-122"/>
                 <a:cs typeface="Pretendard" pitchFamily="34" charset="-120"/>
               </a:rPr>
-              <a:t>Diagram Arrangement Examples</a:t>
+              <a:t>    native tables, charts, proof objects, diagrams, images, and icon slots.</a:t>
             </a:r>
-            <a:endParaRPr lang="en-US" sz="1800" dirty="0"/>
+            <a:endParaRPr lang="en-US" sz="2200" dirty="0"/>
           </a:p>
         </p:txBody>
       </p:sp>
       <p:sp>
         <p:nvSpPr>
-          <p:cNvPr id="22" name="mdpr:example-examples-diagram-arrangements-deck-md-adac59:item-2:block-34"/>
+          <p:cNvPr id="7" name="mdpr:2-3-298275:item-2:block-38-chunk-2"/>
           <p:cNvSpPr txBox="1"/>
           <p:nvPr/>
         </p:nvSpPr>
         <p:spPr>
           <a:xfrm>
-            <a:off x="4562856" y="2240280"/>
-            <a:ext cx="2825496" cy="365760"/>
+            <a:off x="4562856" y="2103120"/>
+            <a:ext cx="2825496" cy="2185416"/>
+          </a:xfrm>
+          <a:prstGeom prst="rect">
+            <a:avLst/>
+          </a:prstGeom>
+          <a:noFill/>
+          <a:ln/>
+        </p:spPr>
+        <p:txBody>
+          <a:bodyPr wrap="square" lIns="0" tIns="25400" rIns="25400" bIns="0" rtlCol="0" anchor="ctr"/>
+          <a:lstStyle/>
+          <a:p>
+            <a:pPr algn="l" indent="0" marL="0">
+              <a:lnSpc>
+                <a:spcPct val="120000"/>
+              </a:lnSpc>
+              <a:buNone/>
+            </a:pPr>
+            <a:r>
+              <a:rPr lang="en-US" sz="2200" b="1" dirty="0">
+                <a:solidFill>
+                  <a:srgbClr val="2563EB"/>
+                </a:solidFill>
+                <a:latin typeface="Pretendard" pitchFamily="34" charset="0"/>
+                <a:ea typeface="Pretendard" pitchFamily="34" charset="-122"/>
+                <a:cs typeface="Pretendard" pitchFamily="34" charset="-120"/>
+              </a:rPr>
+              <a:t>  Validation contract</a:t>
+            </a:r>
+            <a:pPr algn="l" indent="0" marL="0">
+              <a:lnSpc>
+                <a:spcPct val="120000"/>
+              </a:lnSpc>
+              <a:buNone/>
+            </a:pPr>
+            <a:r>
+              <a:rPr lang="en-US" sz="2200" dirty="0">
+                <a:solidFill>
+                  <a:srgbClr val="111111"/>
+                </a:solidFill>
+                <a:latin typeface="Pretendard" pitchFamily="34" charset="0"/>
+                <a:ea typeface="Pretendard" pitchFamily="34" charset="-122"/>
+                <a:cs typeface="Pretendard" pitchFamily="34" charset="-120"/>
+              </a:rPr>
+              <a:t>    readable text, bounded objects, aligned connectors, and editable PPTX output.</a:t>
+            </a:r>
+            <a:endParaRPr lang="en-US" sz="2200" dirty="0"/>
+          </a:p>
+        </p:txBody>
+      </p:sp>
+      <p:sp>
+        <p:nvSpPr>
+          <p:cNvPr id="8" name="mdpr:2-3-298275:item-3:block-38-chunk-2"/>
+          <p:cNvSpPr txBox="1"/>
+          <p:nvPr/>
+        </p:nvSpPr>
+        <p:spPr>
+          <a:xfrm>
+            <a:off x="8083296" y="2982468"/>
+            <a:ext cx="2825496" cy="426720"/>
           </a:xfrm>
           <a:prstGeom prst="rect">
             <a:avLst/>
@@ -13979,7 +14981,7 @@
               <a:buNone/>
             </a:pPr>
             <a:r>
-              <a:rPr lang="en-US" sz="1800" dirty="0">
+              <a:rPr lang="en-US" sz="2200" dirty="0">
                 <a:solidFill>
                   <a:srgbClr val="111111"/>
                 </a:solidFill>
@@ -13987,177 +14989,9 @@
                 <a:ea typeface="Pretendard" pitchFamily="34" charset="-122"/>
                 <a:cs typeface="Pretendard" pitchFamily="34" charset="-120"/>
               </a:rPr>
-              <a:t>Horizontal Flow</a:t>
+              <a:t>Composition Contract</a:t>
             </a:r>
-            <a:endParaRPr lang="en-US" sz="1800" dirty="0"/>
-          </a:p>
-        </p:txBody>
-      </p:sp>
-      <p:sp>
-        <p:nvSpPr>
-          <p:cNvPr id="23" name="mdpr:example-examples-diagram-arrangements-deck-md-adac59:item-3:block-34"/>
-          <p:cNvSpPr txBox="1"/>
-          <p:nvPr/>
-        </p:nvSpPr>
-        <p:spPr>
-          <a:xfrm>
-            <a:off x="8083296" y="2240280"/>
-            <a:ext cx="2825496" cy="365760"/>
-          </a:xfrm>
-          <a:prstGeom prst="rect">
-            <a:avLst/>
-          </a:prstGeom>
-          <a:noFill/>
-          <a:ln/>
-        </p:spPr>
-        <p:txBody>
-          <a:bodyPr wrap="square" lIns="0" tIns="25400" rIns="25400" bIns="0" rtlCol="0" anchor="ctr"/>
-          <a:lstStyle/>
-          <a:p>
-            <a:pPr algn="ctr" indent="0" marL="0">
-              <a:lnSpc>
-                <a:spcPct val="120000"/>
-              </a:lnSpc>
-              <a:buNone/>
-            </a:pPr>
-            <a:r>
-              <a:rPr lang="en-US" sz="1800" dirty="0">
-                <a:solidFill>
-                  <a:srgbClr val="111111"/>
-                </a:solidFill>
-                <a:latin typeface="Pretendard" pitchFamily="34" charset="0"/>
-                <a:ea typeface="Pretendard" pitchFamily="34" charset="-122"/>
-                <a:cs typeface="Pretendard" pitchFamily="34" charset="-120"/>
-              </a:rPr>
-              <a:t>Vertical Flow</a:t>
-            </a:r>
-            <a:endParaRPr lang="en-US" sz="1800" dirty="0"/>
-          </a:p>
-        </p:txBody>
-      </p:sp>
-      <p:sp>
-        <p:nvSpPr>
-          <p:cNvPr id="24" name="mdpr:example-examples-diagram-arrangements-deck-md-adac59:item-4:block-34"/>
-          <p:cNvSpPr txBox="1"/>
-          <p:nvPr/>
-        </p:nvSpPr>
-        <p:spPr>
-          <a:xfrm>
-            <a:off x="1042416" y="4526280"/>
-            <a:ext cx="2825496" cy="365760"/>
-          </a:xfrm>
-          <a:prstGeom prst="rect">
-            <a:avLst/>
-          </a:prstGeom>
-          <a:noFill/>
-          <a:ln/>
-        </p:spPr>
-        <p:txBody>
-          <a:bodyPr wrap="square" lIns="0" tIns="25400" rIns="25400" bIns="0" rtlCol="0" anchor="ctr"/>
-          <a:lstStyle/>
-          <a:p>
-            <a:pPr algn="ctr" indent="0" marL="0">
-              <a:lnSpc>
-                <a:spcPct val="120000"/>
-              </a:lnSpc>
-              <a:buNone/>
-            </a:pPr>
-            <a:r>
-              <a:rPr lang="en-US" sz="1800" dirty="0">
-                <a:solidFill>
-                  <a:srgbClr val="111111"/>
-                </a:solidFill>
-                <a:latin typeface="Pretendard" pitchFamily="34" charset="0"/>
-                <a:ea typeface="Pretendard" pitchFamily="34" charset="-122"/>
-                <a:cs typeface="Pretendard" pitchFamily="34" charset="-120"/>
-              </a:rPr>
-              <a:t>U-Shaped Flow</a:t>
-            </a:r>
-            <a:endParaRPr lang="en-US" sz="1800" dirty="0"/>
-          </a:p>
-        </p:txBody>
-      </p:sp>
-      <p:sp>
-        <p:nvSpPr>
-          <p:cNvPr id="25" name="mdpr:example-examples-diagram-arrangements-deck-md-adac59:item-5:block-34"/>
-          <p:cNvSpPr txBox="1"/>
-          <p:nvPr/>
-        </p:nvSpPr>
-        <p:spPr>
-          <a:xfrm>
-            <a:off x="4562856" y="4526280"/>
-            <a:ext cx="2825496" cy="365760"/>
-          </a:xfrm>
-          <a:prstGeom prst="rect">
-            <a:avLst/>
-          </a:prstGeom>
-          <a:noFill/>
-          <a:ln/>
-        </p:spPr>
-        <p:txBody>
-          <a:bodyPr wrap="square" lIns="0" tIns="25400" rIns="25400" bIns="0" rtlCol="0" anchor="ctr"/>
-          <a:lstStyle/>
-          <a:p>
-            <a:pPr algn="ctr" indent="0" marL="0">
-              <a:lnSpc>
-                <a:spcPct val="120000"/>
-              </a:lnSpc>
-              <a:buNone/>
-            </a:pPr>
-            <a:r>
-              <a:rPr lang="en-US" sz="1800" dirty="0">
-                <a:solidFill>
-                  <a:srgbClr val="111111"/>
-                </a:solidFill>
-                <a:latin typeface="Pretendard" pitchFamily="34" charset="0"/>
-                <a:ea typeface="Pretendard" pitchFamily="34" charset="-122"/>
-                <a:cs typeface="Pretendard" pitchFamily="34" charset="-120"/>
-              </a:rPr>
-              <a:t>Reverse-U Flow</a:t>
-            </a:r>
-            <a:endParaRPr lang="en-US" sz="1800" dirty="0"/>
-          </a:p>
-        </p:txBody>
-      </p:sp>
-      <p:sp>
-        <p:nvSpPr>
-          <p:cNvPr id="26" name="mdpr:example-examples-diagram-arrangements-deck-md-adac59:item-6:block-34"/>
-          <p:cNvSpPr txBox="1"/>
-          <p:nvPr/>
-        </p:nvSpPr>
-        <p:spPr>
-          <a:xfrm>
-            <a:off x="8083296" y="4526280"/>
-            <a:ext cx="2825496" cy="365760"/>
-          </a:xfrm>
-          <a:prstGeom prst="rect">
-            <a:avLst/>
-          </a:prstGeom>
-          <a:noFill/>
-          <a:ln/>
-        </p:spPr>
-        <p:txBody>
-          <a:bodyPr wrap="square" lIns="0" tIns="25400" rIns="25400" bIns="0" rtlCol="0" anchor="ctr"/>
-          <a:lstStyle/>
-          <a:p>
-            <a:pPr algn="ctr" indent="0" marL="0">
-              <a:lnSpc>
-                <a:spcPct val="120000"/>
-              </a:lnSpc>
-              <a:buNone/>
-            </a:pPr>
-            <a:r>
-              <a:rPr lang="en-US" sz="1800" dirty="0">
-                <a:solidFill>
-                  <a:srgbClr val="111111"/>
-                </a:solidFill>
-                <a:latin typeface="Pretendard" pitchFamily="34" charset="0"/>
-                <a:ea typeface="Pretendard" pitchFamily="34" charset="-122"/>
-                <a:cs typeface="Pretendard" pitchFamily="34" charset="-120"/>
-              </a:rPr>
-              <a:t>Cycle-Like Flow</a:t>
-            </a:r>
-            <a:endParaRPr lang="en-US" sz="1800" dirty="0"/>
+            <a:endParaRPr lang="en-US" sz="2200" dirty="0"/>
           </a:p>
         </p:txBody>
       </p:sp>
@@ -14836,412 +15670,16 @@
           <a:chExt cx="0" cy="0"/>
         </a:xfrm>
       </p:grpSpPr>
-      <p:pic>
-        <p:nvPicPr>
-          <p:cNvPr id="2" name="Image 0" descr="preencoded.png">    </p:cNvPr>
-          <p:cNvPicPr>
-            <a:picLocks noChangeAspect="1"/>
-          </p:cNvPicPr>
-          <p:nvPr/>
-        </p:nvPicPr>
-        <p:blipFill>
-          <a:blip r:embed="rId1">
-            <a:extLst>
-              <a:ext uri="{96DAC541-7B7A-43D3-8B79-37D633B846F1}">
-                <asvg:svgBlip xmlns:asvg="http://schemas.microsoft.com/office/drawing/2016/SVG/main" r:embed="rId2"/>
-              </a:ext>
-            </a:extLst>
-          </a:blip>
-          <a:stretch>
-            <a:fillRect/>
-          </a:stretch>
-        </p:blipFill>
-        <p:spPr>
-          <a:xfrm>
-            <a:off x="822960" y="1463040"/>
-            <a:ext cx="3246120" cy="1920240"/>
-          </a:xfrm>
-          <a:prstGeom prst="rect">
-            <a:avLst/>
-          </a:prstGeom>
-        </p:spPr>
-      </p:pic>
-      <p:sp>
-        <p:nvSpPr>
-          <p:cNvPr id="3" name="Shape 0"/>
+      <p:sp>
+        <p:nvSpPr>
+          <p:cNvPr id="2" name="Shape 0"/>
           <p:cNvSpPr/>
           <p:nvPr/>
         </p:nvSpPr>
         <p:spPr>
           <a:xfrm>
-            <a:off x="822960" y="1463040"/>
-            <a:ext cx="3246120" cy="1920240"/>
-          </a:xfrm>
-          <a:prstGeom prst="rect">
-            <a:avLst/>
-          </a:prstGeom>
-          <a:solidFill>
-            <a:srgbClr val="FFFFFF">
-              <a:alpha val="0"/>
-            </a:srgbClr>
-          </a:solidFill>
-          <a:ln w="12700">
-            <a:solidFill>
-              <a:srgbClr val="E2E8F0">
-                <a:alpha val="0"/>
-              </a:srgbClr>
-            </a:solidFill>
-            <a:prstDash val="solid"/>
-          </a:ln>
-          <a:effectLst>
-            <a:outerShdw sx="100000" sy="100000" kx="0" ky="0" algn="bl" rotWithShape="0" blurRad="12700" dist="50800" dir="2700000">
-              <a:srgbClr val="000000">
-                <a:alpha val="8000"/>
-              </a:srgbClr>
-            </a:outerShdw>
-          </a:effectLst>
-        </p:spPr>
-      </p:sp>
-      <p:pic>
-        <p:nvPicPr>
-          <p:cNvPr id="4" name="Image 1" descr="preencoded.png">    </p:cNvPr>
-          <p:cNvPicPr>
-            <a:picLocks noChangeAspect="1"/>
-          </p:cNvPicPr>
-          <p:nvPr/>
-        </p:nvPicPr>
-        <p:blipFill>
-          <a:blip r:embed="rId3">
-            <a:extLst>
-              <a:ext uri="{96DAC541-7B7A-43D3-8B79-37D633B846F1}">
-                <asvg:svgBlip xmlns:asvg="http://schemas.microsoft.com/office/drawing/2016/SVG/main" r:embed="rId4"/>
-              </a:ext>
-            </a:extLst>
-          </a:blip>
-          <a:stretch>
-            <a:fillRect/>
-          </a:stretch>
-        </p:blipFill>
-        <p:spPr>
-          <a:xfrm>
-            <a:off x="4343400" y="1463040"/>
-            <a:ext cx="3246120" cy="1920240"/>
-          </a:xfrm>
-          <a:prstGeom prst="rect">
-            <a:avLst/>
-          </a:prstGeom>
-        </p:spPr>
-      </p:pic>
-      <p:sp>
-        <p:nvSpPr>
-          <p:cNvPr id="5" name="Shape 1"/>
-          <p:cNvSpPr/>
-          <p:nvPr/>
-        </p:nvSpPr>
-        <p:spPr>
-          <a:xfrm>
-            <a:off x="4343400" y="1463040"/>
-            <a:ext cx="3246120" cy="1920240"/>
-          </a:xfrm>
-          <a:prstGeom prst="rect">
-            <a:avLst/>
-          </a:prstGeom>
-          <a:solidFill>
-            <a:srgbClr val="FFFFFF">
-              <a:alpha val="0"/>
-            </a:srgbClr>
-          </a:solidFill>
-          <a:ln w="12700">
-            <a:solidFill>
-              <a:srgbClr val="E2E8F0">
-                <a:alpha val="0"/>
-              </a:srgbClr>
-            </a:solidFill>
-            <a:prstDash val="solid"/>
-          </a:ln>
-          <a:effectLst>
-            <a:outerShdw sx="100000" sy="100000" kx="0" ky="0" algn="bl" rotWithShape="0" blurRad="12700" dist="50800" dir="2700000">
-              <a:srgbClr val="000000">
-                <a:alpha val="8000"/>
-              </a:srgbClr>
-            </a:outerShdw>
-          </a:effectLst>
-        </p:spPr>
-      </p:sp>
-      <p:pic>
-        <p:nvPicPr>
-          <p:cNvPr id="6" name="Image 2" descr="preencoded.png">    </p:cNvPr>
-          <p:cNvPicPr>
-            <a:picLocks noChangeAspect="1"/>
-          </p:cNvPicPr>
-          <p:nvPr/>
-        </p:nvPicPr>
-        <p:blipFill>
-          <a:blip r:embed="rId5">
-            <a:extLst>
-              <a:ext uri="{96DAC541-7B7A-43D3-8B79-37D633B846F1}">
-                <asvg:svgBlip xmlns:asvg="http://schemas.microsoft.com/office/drawing/2016/SVG/main" r:embed="rId6"/>
-              </a:ext>
-            </a:extLst>
-          </a:blip>
-          <a:stretch>
-            <a:fillRect/>
-          </a:stretch>
-        </p:blipFill>
-        <p:spPr>
-          <a:xfrm>
-            <a:off x="7863840" y="1463040"/>
-            <a:ext cx="3246120" cy="1920240"/>
-          </a:xfrm>
-          <a:prstGeom prst="rect">
-            <a:avLst/>
-          </a:prstGeom>
-        </p:spPr>
-      </p:pic>
-      <p:sp>
-        <p:nvSpPr>
-          <p:cNvPr id="7" name="Shape 2"/>
-          <p:cNvSpPr/>
-          <p:nvPr/>
-        </p:nvSpPr>
-        <p:spPr>
-          <a:xfrm>
-            <a:off x="7863840" y="1463040"/>
-            <a:ext cx="3246120" cy="1920240"/>
-          </a:xfrm>
-          <a:prstGeom prst="rect">
-            <a:avLst/>
-          </a:prstGeom>
-          <a:solidFill>
-            <a:srgbClr val="FFFFFF">
-              <a:alpha val="0"/>
-            </a:srgbClr>
-          </a:solidFill>
-          <a:ln w="12700">
-            <a:solidFill>
-              <a:srgbClr val="E2E8F0">
-                <a:alpha val="0"/>
-              </a:srgbClr>
-            </a:solidFill>
-            <a:prstDash val="solid"/>
-          </a:ln>
-          <a:effectLst>
-            <a:outerShdw sx="100000" sy="100000" kx="0" ky="0" algn="bl" rotWithShape="0" blurRad="12700" dist="50800" dir="2700000">
-              <a:srgbClr val="000000">
-                <a:alpha val="8000"/>
-              </a:srgbClr>
-            </a:outerShdw>
-          </a:effectLst>
-        </p:spPr>
-      </p:sp>
-      <p:pic>
-        <p:nvPicPr>
-          <p:cNvPr id="8" name="Image 3" descr="preencoded.png">    </p:cNvPr>
-          <p:cNvPicPr>
-            <a:picLocks noChangeAspect="1"/>
-          </p:cNvPicPr>
-          <p:nvPr/>
-        </p:nvPicPr>
-        <p:blipFill>
-          <a:blip r:embed="rId7">
-            <a:extLst>
-              <a:ext uri="{96DAC541-7B7A-43D3-8B79-37D633B846F1}">
-                <asvg:svgBlip xmlns:asvg="http://schemas.microsoft.com/office/drawing/2016/SVG/main" r:embed="rId8"/>
-              </a:ext>
-            </a:extLst>
-          </a:blip>
-          <a:stretch>
-            <a:fillRect/>
-          </a:stretch>
-        </p:blipFill>
-        <p:spPr>
-          <a:xfrm>
-            <a:off x="822960" y="3749040"/>
-            <a:ext cx="3246120" cy="1920240"/>
-          </a:xfrm>
-          <a:prstGeom prst="rect">
-            <a:avLst/>
-          </a:prstGeom>
-        </p:spPr>
-      </p:pic>
-      <p:sp>
-        <p:nvSpPr>
-          <p:cNvPr id="9" name="Shape 3"/>
-          <p:cNvSpPr/>
-          <p:nvPr/>
-        </p:nvSpPr>
-        <p:spPr>
-          <a:xfrm>
-            <a:off x="822960" y="3749040"/>
-            <a:ext cx="3246120" cy="1920240"/>
-          </a:xfrm>
-          <a:prstGeom prst="rect">
-            <a:avLst/>
-          </a:prstGeom>
-          <a:solidFill>
-            <a:srgbClr val="FFFFFF">
-              <a:alpha val="0"/>
-            </a:srgbClr>
-          </a:solidFill>
-          <a:ln w="12700">
-            <a:solidFill>
-              <a:srgbClr val="E2E8F0">
-                <a:alpha val="0"/>
-              </a:srgbClr>
-            </a:solidFill>
-            <a:prstDash val="solid"/>
-          </a:ln>
-          <a:effectLst>
-            <a:outerShdw sx="100000" sy="100000" kx="0" ky="0" algn="bl" rotWithShape="0" blurRad="12700" dist="50800" dir="2700000">
-              <a:srgbClr val="000000">
-                <a:alpha val="8000"/>
-              </a:srgbClr>
-            </a:outerShdw>
-          </a:effectLst>
-        </p:spPr>
-      </p:sp>
-      <p:pic>
-        <p:nvPicPr>
-          <p:cNvPr id="10" name="Image 4" descr="preencoded.png">    </p:cNvPr>
-          <p:cNvPicPr>
-            <a:picLocks noChangeAspect="1"/>
-          </p:cNvPicPr>
-          <p:nvPr/>
-        </p:nvPicPr>
-        <p:blipFill>
-          <a:blip r:embed="rId9">
-            <a:extLst>
-              <a:ext uri="{96DAC541-7B7A-43D3-8B79-37D633B846F1}">
-                <asvg:svgBlip xmlns:asvg="http://schemas.microsoft.com/office/drawing/2016/SVG/main" r:embed="rId10"/>
-              </a:ext>
-            </a:extLst>
-          </a:blip>
-          <a:stretch>
-            <a:fillRect/>
-          </a:stretch>
-        </p:blipFill>
-        <p:spPr>
-          <a:xfrm>
-            <a:off x="4343400" y="3749040"/>
-            <a:ext cx="3246120" cy="1920240"/>
-          </a:xfrm>
-          <a:prstGeom prst="rect">
-            <a:avLst/>
-          </a:prstGeom>
-        </p:spPr>
-      </p:pic>
-      <p:sp>
-        <p:nvSpPr>
-          <p:cNvPr id="11" name="Shape 4"/>
-          <p:cNvSpPr/>
-          <p:nvPr/>
-        </p:nvSpPr>
-        <p:spPr>
-          <a:xfrm>
-            <a:off x="4343400" y="3749040"/>
-            <a:ext cx="3246120" cy="1920240"/>
-          </a:xfrm>
-          <a:prstGeom prst="rect">
-            <a:avLst/>
-          </a:prstGeom>
-          <a:solidFill>
-            <a:srgbClr val="FFFFFF">
-              <a:alpha val="0"/>
-            </a:srgbClr>
-          </a:solidFill>
-          <a:ln w="12700">
-            <a:solidFill>
-              <a:srgbClr val="E2E8F0">
-                <a:alpha val="0"/>
-              </a:srgbClr>
-            </a:solidFill>
-            <a:prstDash val="solid"/>
-          </a:ln>
-          <a:effectLst>
-            <a:outerShdw sx="100000" sy="100000" kx="0" ky="0" algn="bl" rotWithShape="0" blurRad="12700" dist="50800" dir="2700000">
-              <a:srgbClr val="000000">
-                <a:alpha val="8000"/>
-              </a:srgbClr>
-            </a:outerShdw>
-          </a:effectLst>
-        </p:spPr>
-      </p:sp>
-      <p:pic>
-        <p:nvPicPr>
-          <p:cNvPr id="12" name="Image 5" descr="preencoded.png">    </p:cNvPr>
-          <p:cNvPicPr>
-            <a:picLocks noChangeAspect="1"/>
-          </p:cNvPicPr>
-          <p:nvPr/>
-        </p:nvPicPr>
-        <p:blipFill>
-          <a:blip r:embed="rId11">
-            <a:extLst>
-              <a:ext uri="{96DAC541-7B7A-43D3-8B79-37D633B846F1}">
-                <asvg:svgBlip xmlns:asvg="http://schemas.microsoft.com/office/drawing/2016/SVG/main" r:embed="rId12"/>
-              </a:ext>
-            </a:extLst>
-          </a:blip>
-          <a:stretch>
-            <a:fillRect/>
-          </a:stretch>
-        </p:blipFill>
-        <p:spPr>
-          <a:xfrm>
-            <a:off x="7863840" y="3749040"/>
-            <a:ext cx="3246120" cy="1920240"/>
-          </a:xfrm>
-          <a:prstGeom prst="rect">
-            <a:avLst/>
-          </a:prstGeom>
-        </p:spPr>
-      </p:pic>
-      <p:sp>
-        <p:nvSpPr>
-          <p:cNvPr id="13" name="Shape 5"/>
-          <p:cNvSpPr/>
-          <p:nvPr/>
-        </p:nvSpPr>
-        <p:spPr>
-          <a:xfrm>
-            <a:off x="7863840" y="3749040"/>
-            <a:ext cx="3246120" cy="1920240"/>
-          </a:xfrm>
-          <a:prstGeom prst="rect">
-            <a:avLst/>
-          </a:prstGeom>
-          <a:solidFill>
-            <a:srgbClr val="FFFFFF">
-              <a:alpha val="0"/>
-            </a:srgbClr>
-          </a:solidFill>
-          <a:ln w="12700">
-            <a:solidFill>
-              <a:srgbClr val="E2E8F0">
-                <a:alpha val="0"/>
-              </a:srgbClr>
-            </a:solidFill>
-            <a:prstDash val="solid"/>
-          </a:ln>
-          <a:effectLst>
-            <a:outerShdw sx="100000" sy="100000" kx="0" ky="0" algn="bl" rotWithShape="0" blurRad="12700" dist="50800" dir="2700000">
-              <a:srgbClr val="000000">
-                <a:alpha val="8000"/>
-              </a:srgbClr>
-            </a:outerShdw>
-          </a:effectLst>
-        </p:spPr>
-      </p:sp>
-      <p:sp>
-        <p:nvSpPr>
-          <p:cNvPr id="14" name="Shape 6"/>
-          <p:cNvSpPr/>
-          <p:nvPr/>
-        </p:nvSpPr>
-        <p:spPr>
-          <a:xfrm>
-            <a:off x="822960" y="1463040"/>
-            <a:ext cx="73152" cy="1920240"/>
+            <a:off x="822960" y="2487168"/>
+            <a:ext cx="73152" cy="1417320"/>
           </a:xfrm>
           <a:prstGeom prst="rect">
             <a:avLst/>
@@ -15261,14 +15699,14 @@
       </p:sp>
       <p:sp>
         <p:nvSpPr>
-          <p:cNvPr id="15" name="Shape 7"/>
+          <p:cNvPr id="3" name="Shape 1"/>
           <p:cNvSpPr/>
           <p:nvPr/>
         </p:nvSpPr>
         <p:spPr>
           <a:xfrm>
-            <a:off x="4343400" y="1463040"/>
-            <a:ext cx="73152" cy="1920240"/>
+            <a:off x="4343400" y="2487168"/>
+            <a:ext cx="73152" cy="1417320"/>
           </a:xfrm>
           <a:prstGeom prst="rect">
             <a:avLst/>
@@ -15288,14 +15726,14 @@
       </p:sp>
       <p:sp>
         <p:nvSpPr>
-          <p:cNvPr id="16" name="Shape 8"/>
+          <p:cNvPr id="4" name="Shape 2"/>
           <p:cNvSpPr/>
           <p:nvPr/>
         </p:nvSpPr>
         <p:spPr>
           <a:xfrm>
-            <a:off x="7863840" y="1463040"/>
-            <a:ext cx="73152" cy="1920240"/>
+            <a:off x="7863840" y="2487168"/>
+            <a:ext cx="73152" cy="1417320"/>
           </a:xfrm>
           <a:prstGeom prst="rect">
             <a:avLst/>
@@ -15315,88 +15753,7 @@
       </p:sp>
       <p:sp>
         <p:nvSpPr>
-          <p:cNvPr id="17" name="Shape 9"/>
-          <p:cNvSpPr/>
-          <p:nvPr/>
-        </p:nvSpPr>
-        <p:spPr>
-          <a:xfrm>
-            <a:off x="822960" y="3749040"/>
-            <a:ext cx="73152" cy="1920240"/>
-          </a:xfrm>
-          <a:prstGeom prst="rect">
-            <a:avLst/>
-          </a:prstGeom>
-          <a:solidFill>
-            <a:srgbClr val="DBEAFE"/>
-          </a:solidFill>
-          <a:ln w="12700">
-            <a:solidFill>
-              <a:srgbClr val="DBEAFE">
-                <a:alpha val="0"/>
-              </a:srgbClr>
-            </a:solidFill>
-            <a:prstDash val="solid"/>
-          </a:ln>
-        </p:spPr>
-      </p:sp>
-      <p:sp>
-        <p:nvSpPr>
-          <p:cNvPr id="18" name="Shape 10"/>
-          <p:cNvSpPr/>
-          <p:nvPr/>
-        </p:nvSpPr>
-        <p:spPr>
-          <a:xfrm>
-            <a:off x="4343400" y="3749040"/>
-            <a:ext cx="73152" cy="1920240"/>
-          </a:xfrm>
-          <a:prstGeom prst="rect">
-            <a:avLst/>
-          </a:prstGeom>
-          <a:solidFill>
-            <a:srgbClr val="2563EB"/>
-          </a:solidFill>
-          <a:ln w="12700">
-            <a:solidFill>
-              <a:srgbClr val="2563EB">
-                <a:alpha val="0"/>
-              </a:srgbClr>
-            </a:solidFill>
-            <a:prstDash val="solid"/>
-          </a:ln>
-        </p:spPr>
-      </p:sp>
-      <p:sp>
-        <p:nvSpPr>
-          <p:cNvPr id="19" name="Shape 11"/>
-          <p:cNvSpPr/>
-          <p:nvPr/>
-        </p:nvSpPr>
-        <p:spPr>
-          <a:xfrm>
-            <a:off x="7863840" y="3749040"/>
-            <a:ext cx="73152" cy="1920240"/>
-          </a:xfrm>
-          <a:prstGeom prst="rect">
-            <a:avLst/>
-          </a:prstGeom>
-          <a:solidFill>
-            <a:srgbClr val="DBEAFE"/>
-          </a:solidFill>
-          <a:ln w="12700">
-            <a:solidFill>
-              <a:srgbClr val="DBEAFE">
-                <a:alpha val="0"/>
-              </a:srgbClr>
-            </a:solidFill>
-            <a:prstDash val="solid"/>
-          </a:ln>
-        </p:spPr>
-      </p:sp>
-      <p:sp>
-        <p:nvSpPr>
-          <p:cNvPr id="20" name="mdpr:example-examples-five-methods-deck-md-6608d8:title:__title:example-examples-five-methods-deck-md-6608d8"/>
+          <p:cNvPr id="5" name="mdpr:3-3-bec926:title:__title:3-3-bec926"/>
           <p:cNvSpPr txBox="1"/>
           <p:nvPr/>
         </p:nvSpPr>
@@ -15430,33 +15787,8 @@
                 <a:ea typeface="Pretendard" pitchFamily="34" charset="-122"/>
                 <a:cs typeface="Pretendard" pitchFamily="34" charset="-120"/>
               </a:rPr>
-              <a:t>Example: examples/five-methods/deck.md</a:t>
+              <a:t>Example: examples/theme-preview-en/deck.md</a:t>
             </a:r>
-            <a:endParaRPr lang="en-US" sz="3400" dirty="0"/>
-          </a:p>
-        </p:txBody>
-      </p:sp>
-      <p:sp>
-        <p:nvSpPr>
-          <p:cNvPr id="21" name="mdpr:example-examples-five-methods-deck-md-6608d8:item-1:block-36"/>
-          <p:cNvSpPr txBox="1"/>
-          <p:nvPr/>
-        </p:nvSpPr>
-        <p:spPr>
-          <a:xfrm>
-            <a:off x="1042416" y="2240280"/>
-            <a:ext cx="2825496" cy="365760"/>
-          </a:xfrm>
-          <a:prstGeom prst="rect">
-            <a:avLst/>
-          </a:prstGeom>
-          <a:noFill/>
-          <a:ln/>
-        </p:spPr>
-        <p:txBody>
-          <a:bodyPr wrap="square" lIns="0" tIns="25400" rIns="25400" bIns="0" rtlCol="0" anchor="ctr"/>
-          <a:lstStyle/>
-          <a:p>
             <a:pPr algn="ctr" indent="0" marL="0">
               <a:lnSpc>
                 <a:spcPct val="120000"/>
@@ -15464,7 +15796,49 @@
               <a:buNone/>
             </a:pPr>
             <a:r>
-              <a:rPr lang="en-US" sz="1800" dirty="0">
+              <a:rPr lang="en-US" sz="2000" dirty="0">
+                <a:solidFill>
+                  <a:srgbClr val="919191"/>
+                </a:solidFill>
+                <a:latin typeface="Pretendard" pitchFamily="34" charset="0"/>
+                <a:ea typeface="Pretendard" pitchFamily="34" charset="-122"/>
+                <a:cs typeface="Pretendard" pitchFamily="34" charset="-120"/>
+              </a:rPr>
+              <a:t> (Cont. 3/3)</a:t>
+            </a:r>
+            <a:endParaRPr lang="en-US" sz="3400" dirty="0"/>
+          </a:p>
+        </p:txBody>
+      </p:sp>
+      <p:sp>
+        <p:nvSpPr>
+          <p:cNvPr id="6" name="mdpr:3-3-bec926:item-1:block-38-chunk-3"/>
+          <p:cNvSpPr txBox="1"/>
+          <p:nvPr/>
+        </p:nvSpPr>
+        <p:spPr>
+          <a:xfrm>
+            <a:off x="1042416" y="2814828"/>
+            <a:ext cx="2825496" cy="762000"/>
+          </a:xfrm>
+          <a:prstGeom prst="rect">
+            <a:avLst/>
+          </a:prstGeom>
+          <a:noFill/>
+          <a:ln/>
+        </p:spPr>
+        <p:txBody>
+          <a:bodyPr wrap="square" lIns="0" tIns="25400" rIns="25400" bIns="0" rtlCol="0" anchor="ctr"/>
+          <a:lstStyle/>
+          <a:p>
+            <a:pPr algn="ctr" indent="0" marL="0">
+              <a:lnSpc>
+                <a:spcPct val="120000"/>
+              </a:lnSpc>
+              <a:buNone/>
+            </a:pPr>
+            <a:r>
+              <a:rPr lang="en-US" sz="2200" dirty="0">
                 <a:solidFill>
                   <a:srgbClr val="111111"/>
                 </a:solidFill>
@@ -15472,22 +15846,22 @@
                 <a:ea typeface="Pretendard" pitchFamily="34" charset="-122"/>
                 <a:cs typeface="Pretendard" pitchFamily="34" charset="-120"/>
               </a:rPr>
-              <a:t>Five-Item Layout Example</a:t>
+              <a:t>Pruned Style Families</a:t>
             </a:r>
-            <a:endParaRPr lang="en-US" sz="1800" dirty="0"/>
+            <a:endParaRPr lang="en-US" sz="2200" dirty="0"/>
           </a:p>
         </p:txBody>
       </p:sp>
       <p:sp>
         <p:nvSpPr>
-          <p:cNvPr id="22" name="mdpr:example-examples-five-methods-deck-md-6608d8:item-2:block-36"/>
+          <p:cNvPr id="7" name="mdpr:3-3-bec926:item-2:block-38-chunk-3"/>
           <p:cNvSpPr txBox="1"/>
           <p:nvPr/>
         </p:nvSpPr>
         <p:spPr>
           <a:xfrm>
-            <a:off x="4562856" y="2240280"/>
-            <a:ext cx="2825496" cy="365760"/>
+            <a:off x="4562856" y="2982468"/>
+            <a:ext cx="2825496" cy="426720"/>
           </a:xfrm>
           <a:prstGeom prst="rect">
             <a:avLst/>
@@ -15506,7 +15880,7 @@
               <a:buNone/>
             </a:pPr>
             <a:r>
-              <a:rPr lang="en-US" sz="1800" dirty="0">
+              <a:rPr lang="en-US" sz="2200" dirty="0">
                 <a:solidFill>
                   <a:srgbClr val="111111"/>
                 </a:solidFill>
@@ -15514,22 +15888,22 @@
                 <a:ea typeface="Pretendard" pitchFamily="34" charset="-122"/>
                 <a:cs typeface="Pretendard" pitchFamily="34" charset="-120"/>
               </a:rPr>
-              <a:t>Five Execution Steps</a:t>
+              <a:t>Semantic Blocks</a:t>
             </a:r>
-            <a:endParaRPr lang="en-US" sz="1800" dirty="0"/>
+            <a:endParaRPr lang="en-US" sz="2200" dirty="0"/>
           </a:p>
         </p:txBody>
       </p:sp>
       <p:sp>
         <p:nvSpPr>
-          <p:cNvPr id="23" name="mdpr:example-examples-five-methods-deck-md-6608d8:item-3:block-36"/>
+          <p:cNvPr id="8" name="mdpr:3-3-bec926:item-3:block-38-chunk-3"/>
           <p:cNvSpPr txBox="1"/>
           <p:nvPr/>
         </p:nvSpPr>
         <p:spPr>
           <a:xfrm>
-            <a:off x="8083296" y="2240280"/>
-            <a:ext cx="2825496" cy="365760"/>
+            <a:off x="8083296" y="2982468"/>
+            <a:ext cx="2825496" cy="426720"/>
           </a:xfrm>
           <a:prstGeom prst="rect">
             <a:avLst/>
@@ -15548,7 +15922,7 @@
               <a:buNone/>
             </a:pPr>
             <a:r>
-              <a:rPr lang="en-US" sz="1800" dirty="0">
+              <a:rPr lang="en-US" sz="2200" dirty="0">
                 <a:solidFill>
                   <a:srgbClr val="111111"/>
                 </a:solidFill>
@@ -15556,135 +15930,9 @@
                 <a:ea typeface="Pretendard" pitchFamily="34" charset="-122"/>
                 <a:cs typeface="Pretendard" pitchFamily="34" charset="-120"/>
               </a:rPr>
-              <a:t>Select a pilot team</a:t>
+              <a:t>Pipeline Diagram</a:t>
             </a:r>
-            <a:endParaRPr lang="en-US" sz="1800" dirty="0"/>
-          </a:p>
-        </p:txBody>
-      </p:sp>
-      <p:sp>
-        <p:nvSpPr>
-          <p:cNvPr id="24" name="mdpr:example-examples-five-methods-deck-md-6608d8:item-4:block-36"/>
-          <p:cNvSpPr txBox="1"/>
-          <p:nvPr/>
-        </p:nvSpPr>
-        <p:spPr>
-          <a:xfrm>
-            <a:off x="1042416" y="4389120"/>
-            <a:ext cx="2825496" cy="640080"/>
-          </a:xfrm>
-          <a:prstGeom prst="rect">
-            <a:avLst/>
-          </a:prstGeom>
-          <a:noFill/>
-          <a:ln/>
-        </p:spPr>
-        <p:txBody>
-          <a:bodyPr wrap="square" lIns="0" tIns="25400" rIns="25400" bIns="0" rtlCol="0" anchor="ctr"/>
-          <a:lstStyle/>
-          <a:p>
-            <a:pPr algn="ctr" indent="0" marL="0">
-              <a:lnSpc>
-                <a:spcPct val="120000"/>
-              </a:lnSpc>
-              <a:buNone/>
-            </a:pPr>
-            <a:r>
-              <a:rPr lang="en-US" sz="1800" dirty="0">
-                <a:solidFill>
-                  <a:srgbClr val="111111"/>
-                </a:solidFill>
-                <a:latin typeface="Pretendard" pitchFamily="34" charset="0"/>
-                <a:ea typeface="Pretendard" pitchFamily="34" charset="-122"/>
-                <a:cs typeface="Pretendard" pitchFamily="34" charset="-120"/>
-              </a:rPr>
-              <a:t>Analyze repetitive document types</a:t>
-            </a:r>
-            <a:endParaRPr lang="en-US" sz="1800" dirty="0"/>
-          </a:p>
-        </p:txBody>
-      </p:sp>
-      <p:sp>
-        <p:nvSpPr>
-          <p:cNvPr id="25" name="mdpr:example-examples-five-methods-deck-md-6608d8:item-5:block-36"/>
-          <p:cNvSpPr txBox="1"/>
-          <p:nvPr/>
-        </p:nvSpPr>
-        <p:spPr>
-          <a:xfrm>
-            <a:off x="4562856" y="4389120"/>
-            <a:ext cx="2825496" cy="640080"/>
-          </a:xfrm>
-          <a:prstGeom prst="rect">
-            <a:avLst/>
-          </a:prstGeom>
-          <a:noFill/>
-          <a:ln/>
-        </p:spPr>
-        <p:txBody>
-          <a:bodyPr wrap="square" lIns="0" tIns="25400" rIns="25400" bIns="0" rtlCol="0" anchor="ctr"/>
-          <a:lstStyle/>
-          <a:p>
-            <a:pPr algn="ctr" indent="0" marL="0">
-              <a:lnSpc>
-                <a:spcPct val="120000"/>
-              </a:lnSpc>
-              <a:buNone/>
-            </a:pPr>
-            <a:r>
-              <a:rPr lang="en-US" sz="1800" dirty="0">
-                <a:solidFill>
-                  <a:srgbClr val="111111"/>
-                </a:solidFill>
-                <a:latin typeface="Pretendard" pitchFamily="34" charset="0"/>
-                <a:ea typeface="Pretendard" pitchFamily="34" charset="-122"/>
-                <a:cs typeface="Pretendard" pitchFamily="34" charset="-120"/>
-              </a:rPr>
-              <a:t>Design automation templates</a:t>
-            </a:r>
-            <a:endParaRPr lang="en-US" sz="1800" dirty="0"/>
-          </a:p>
-        </p:txBody>
-      </p:sp>
-      <p:sp>
-        <p:nvSpPr>
-          <p:cNvPr id="26" name="mdpr:example-examples-five-methods-deck-md-6608d8:item-6:block-36"/>
-          <p:cNvSpPr txBox="1"/>
-          <p:nvPr/>
-        </p:nvSpPr>
-        <p:spPr>
-          <a:xfrm>
-            <a:off x="8083296" y="4389120"/>
-            <a:ext cx="2825496" cy="640080"/>
-          </a:xfrm>
-          <a:prstGeom prst="rect">
-            <a:avLst/>
-          </a:prstGeom>
-          <a:noFill/>
-          <a:ln/>
-        </p:spPr>
-        <p:txBody>
-          <a:bodyPr wrap="square" lIns="0" tIns="25400" rIns="25400" bIns="0" rtlCol="0" anchor="ctr"/>
-          <a:lstStyle/>
-          <a:p>
-            <a:pPr algn="ctr" indent="0" marL="0">
-              <a:lnSpc>
-                <a:spcPct val="120000"/>
-              </a:lnSpc>
-              <a:buNone/>
-            </a:pPr>
-            <a:r>
-              <a:rPr lang="en-US" sz="1800" dirty="0">
-                <a:solidFill>
-                  <a:srgbClr val="111111"/>
-                </a:solidFill>
-                <a:latin typeface="Pretendard" pitchFamily="34" charset="0"/>
-                <a:ea typeface="Pretendard" pitchFamily="34" charset="-122"/>
-                <a:cs typeface="Pretendard" pitchFamily="34" charset="-120"/>
-              </a:rPr>
-              <a:t>Build a knowledge search index</a:t>
-            </a:r>
-            <a:endParaRPr lang="en-US" sz="1800" dirty="0"/>
+            <a:endParaRPr lang="en-US" sz="2200" dirty="0"/>
           </a:p>
         </p:txBody>
       </p:sp>
@@ -16094,1284 +16342,6 @@
       </p:sp>
       <p:sp>
         <p:nvSpPr>
-          <p:cNvPr id="14" name="mdpr:1-3-9e7dc8:title:__title:1-3-9e7dc8"/>
-          <p:cNvSpPr txBox="1"/>
-          <p:nvPr/>
-        </p:nvSpPr>
-        <p:spPr>
-          <a:xfrm>
-            <a:off x="731520" y="457200"/>
-            <a:ext cx="10698480" cy="731520"/>
-          </a:xfrm>
-          <a:prstGeom prst="rect">
-            <a:avLst/>
-          </a:prstGeom>
-          <a:noFill/>
-          <a:ln/>
-        </p:spPr>
-        <p:txBody>
-          <a:bodyPr wrap="square" lIns="0" tIns="0" rIns="0" bIns="0" rtlCol="0" anchor="ctr"/>
-          <a:lstStyle/>
-          <a:p>
-            <a:pPr algn="ctr" indent="0" marL="0">
-              <a:lnSpc>
-                <a:spcPct val="120000"/>
-              </a:lnSpc>
-              <a:buNone/>
-            </a:pPr>
-            <a:r>
-              <a:rPr lang="en-US" sz="3400" b="1" dirty="0">
-                <a:solidFill>
-                  <a:srgbClr val="111111"/>
-                </a:solidFill>
-                <a:latin typeface="Pretendard" pitchFamily="34" charset="0"/>
-                <a:ea typeface="Pretendard" pitchFamily="34" charset="-122"/>
-                <a:cs typeface="Pretendard" pitchFamily="34" charset="-120"/>
-              </a:rPr>
-              <a:t>Example: examples/theme-preview-en/deck.md</a:t>
-            </a:r>
-            <a:endParaRPr lang="en-US" sz="3400" dirty="0"/>
-          </a:p>
-        </p:txBody>
-      </p:sp>
-      <p:sp>
-        <p:nvSpPr>
-          <p:cNvPr id="15" name="mdpr:1-3-9e7dc8:item-1:block-38-chunk-1"/>
-          <p:cNvSpPr txBox="1"/>
-          <p:nvPr/>
-        </p:nvSpPr>
-        <p:spPr>
-          <a:xfrm>
-            <a:off x="1042416" y="2209800"/>
-            <a:ext cx="4608576" cy="426720"/>
-          </a:xfrm>
-          <a:prstGeom prst="rect">
-            <a:avLst/>
-          </a:prstGeom>
-          <a:noFill/>
-          <a:ln/>
-        </p:spPr>
-        <p:txBody>
-          <a:bodyPr wrap="square" lIns="0" tIns="25400" rIns="25400" bIns="0" rtlCol="0" anchor="ctr"/>
-          <a:lstStyle/>
-          <a:p>
-            <a:pPr algn="ctr" indent="0" marL="0">
-              <a:lnSpc>
-                <a:spcPct val="120000"/>
-              </a:lnSpc>
-              <a:buNone/>
-            </a:pPr>
-            <a:r>
-              <a:rPr lang="en-US" sz="2200" dirty="0">
-                <a:solidFill>
-                  <a:srgbClr val="111111"/>
-                </a:solidFill>
-                <a:latin typeface="Pretendard" pitchFamily="34" charset="0"/>
-                <a:ea typeface="Pretendard" pitchFamily="34" charset="-122"/>
-                <a:cs typeface="Pretendard" pitchFamily="34" charset="-120"/>
-              </a:rPr>
-              <a:t>MDPR Design Grammar</a:t>
-            </a:r>
-            <a:endParaRPr lang="en-US" sz="2200" dirty="0"/>
-          </a:p>
-        </p:txBody>
-      </p:sp>
-      <p:sp>
-        <p:nvSpPr>
-          <p:cNvPr id="16" name="mdpr:1-3-9e7dc8:item-2:block-38-chunk-1"/>
-          <p:cNvSpPr txBox="1"/>
-          <p:nvPr/>
-        </p:nvSpPr>
-        <p:spPr>
-          <a:xfrm>
-            <a:off x="6528816" y="2209800"/>
-            <a:ext cx="4608576" cy="426720"/>
-          </a:xfrm>
-          <a:prstGeom prst="rect">
-            <a:avLst/>
-          </a:prstGeom>
-          <a:noFill/>
-          <a:ln/>
-        </p:spPr>
-        <p:txBody>
-          <a:bodyPr wrap="square" lIns="0" tIns="25400" rIns="25400" bIns="0" rtlCol="0" anchor="ctr"/>
-          <a:lstStyle/>
-          <a:p>
-            <a:pPr algn="ctr" indent="0" marL="0">
-              <a:lnSpc>
-                <a:spcPct val="120000"/>
-              </a:lnSpc>
-              <a:buNone/>
-            </a:pPr>
-            <a:r>
-              <a:rPr lang="en-US" sz="2200" dirty="0">
-                <a:solidFill>
-                  <a:srgbClr val="111111"/>
-                </a:solidFill>
-                <a:latin typeface="Pretendard" pitchFamily="34" charset="0"/>
-                <a:ea typeface="Pretendard" pitchFamily="34" charset="-122"/>
-                <a:cs typeface="Pretendard" pitchFamily="34" charset="-120"/>
-              </a:rPr>
-              <a:t>Teaser Summary</a:t>
-            </a:r>
-            <a:endParaRPr lang="en-US" sz="2200" dirty="0"/>
-          </a:p>
-        </p:txBody>
-      </p:sp>
-      <p:sp>
-        <p:nvSpPr>
-          <p:cNvPr id="17" name="mdpr:1-3-9e7dc8:item-3:block-38-chunk-1"/>
-          <p:cNvSpPr txBox="1"/>
-          <p:nvPr/>
-        </p:nvSpPr>
-        <p:spPr>
-          <a:xfrm>
-            <a:off x="1042416" y="4495800"/>
-            <a:ext cx="4608576" cy="426720"/>
-          </a:xfrm>
-          <a:prstGeom prst="rect">
-            <a:avLst/>
-          </a:prstGeom>
-          <a:noFill/>
-          <a:ln/>
-        </p:spPr>
-        <p:txBody>
-          <a:bodyPr wrap="square" lIns="0" tIns="25400" rIns="25400" bIns="0" rtlCol="0" anchor="ctr"/>
-          <a:lstStyle/>
-          <a:p>
-            <a:pPr algn="ctr" indent="0" marL="0">
-              <a:lnSpc>
-                <a:spcPct val="120000"/>
-              </a:lnSpc>
-              <a:buNone/>
-            </a:pPr>
-            <a:r>
-              <a:rPr lang="en-US" sz="2200" dirty="0">
-                <a:solidFill>
-                  <a:srgbClr val="111111"/>
-                </a:solidFill>
-                <a:latin typeface="Pretendard" pitchFamily="34" charset="0"/>
-                <a:ea typeface="Pretendard" pitchFamily="34" charset="-122"/>
-                <a:cs typeface="Pretendard" pitchFamily="34" charset="-120"/>
-              </a:rPr>
-              <a:t>Composition Contract</a:t>
-            </a:r>
-            <a:endParaRPr lang="en-US" sz="2200" dirty="0"/>
-          </a:p>
-        </p:txBody>
-      </p:sp>
-      <p:sp>
-        <p:nvSpPr>
-          <p:cNvPr id="18" name="mdpr:1-3-9e7dc8:item-4:block-38-chunk-1"/>
-          <p:cNvSpPr txBox="1"/>
-          <p:nvPr/>
-        </p:nvSpPr>
-        <p:spPr>
-          <a:xfrm>
-            <a:off x="6528816" y="4495800"/>
-            <a:ext cx="4608576" cy="426720"/>
-          </a:xfrm>
-          <a:prstGeom prst="rect">
-            <a:avLst/>
-          </a:prstGeom>
-          <a:noFill/>
-          <a:ln/>
-        </p:spPr>
-        <p:txBody>
-          <a:bodyPr wrap="square" lIns="0" tIns="25400" rIns="25400" bIns="0" rtlCol="0" anchor="ctr"/>
-          <a:lstStyle/>
-          <a:p>
-            <a:pPr algn="ctr" indent="0" marL="0">
-              <a:lnSpc>
-                <a:spcPct val="120000"/>
-              </a:lnSpc>
-              <a:buNone/>
-            </a:pPr>
-            <a:r>
-              <a:rPr lang="en-US" sz="2200" dirty="0">
-                <a:solidFill>
-                  <a:srgbClr val="111111"/>
-                </a:solidFill>
-                <a:latin typeface="Pretendard" pitchFamily="34" charset="0"/>
-                <a:ea typeface="Pretendard" pitchFamily="34" charset="-122"/>
-                <a:cs typeface="Pretendard" pitchFamily="34" charset="-120"/>
-              </a:rPr>
-              <a:t>Pruned Style Families</a:t>
-            </a:r>
-            <a:endParaRPr lang="en-US" sz="2200" dirty="0"/>
-          </a:p>
-        </p:txBody>
-      </p:sp>
-    </p:spTree>
-  </p:cSld>
-  <p:clrMapOvr>
-    <a:masterClrMapping/>
-  </p:clrMapOvr>
-</p:sld>
-</file>
-
-<file path=ppt/slides/slide32.xml><?xml version="1.0" encoding="utf-8"?>
-<p:sld xmlns:a="http://schemas.openxmlformats.org/drawingml/2006/main" xmlns:r="http://schemas.openxmlformats.org/officeDocument/2006/relationships" xmlns:p="http://schemas.openxmlformats.org/presentationml/2006/main">
-  <p:cSld name="Slide 32">
-    <p:bg>
-      <p:bgPr>
-        <a:solidFill>
-          <a:srgbClr val="F8FAFC"/>
-        </a:solidFill>
-      </p:bgPr>
-    </p:bg>
-    <p:spTree>
-      <p:nvGrpSpPr>
-        <p:cNvPr id="1" name=""/>
-        <p:cNvGrpSpPr/>
-        <p:nvPr/>
-      </p:nvGrpSpPr>
-      <p:grpSpPr>
-        <a:xfrm>
-          <a:off x="0" y="0"/>
-          <a:ext cx="0" cy="0"/>
-          <a:chOff x="0" y="0"/>
-          <a:chExt cx="0" cy="0"/>
-        </a:xfrm>
-      </p:grpSpPr>
-      <p:sp>
-        <p:nvSpPr>
-          <p:cNvPr id="2" name="Shape 0"/>
-          <p:cNvSpPr/>
-          <p:nvPr/>
-        </p:nvSpPr>
-        <p:spPr>
-          <a:xfrm>
-            <a:off x="822960" y="1938528"/>
-            <a:ext cx="73152" cy="2514600"/>
-          </a:xfrm>
-          <a:prstGeom prst="rect">
-            <a:avLst/>
-          </a:prstGeom>
-          <a:solidFill>
-            <a:srgbClr val="2563EB"/>
-          </a:solidFill>
-          <a:ln w="12700">
-            <a:solidFill>
-              <a:srgbClr val="2563EB">
-                <a:alpha val="0"/>
-              </a:srgbClr>
-            </a:solidFill>
-            <a:prstDash val="solid"/>
-          </a:ln>
-        </p:spPr>
-      </p:sp>
-      <p:sp>
-        <p:nvSpPr>
-          <p:cNvPr id="3" name="Shape 1"/>
-          <p:cNvSpPr/>
-          <p:nvPr/>
-        </p:nvSpPr>
-        <p:spPr>
-          <a:xfrm>
-            <a:off x="4343400" y="1938528"/>
-            <a:ext cx="73152" cy="2514600"/>
-          </a:xfrm>
-          <a:prstGeom prst="rect">
-            <a:avLst/>
-          </a:prstGeom>
-          <a:solidFill>
-            <a:srgbClr val="DBEAFE"/>
-          </a:solidFill>
-          <a:ln w="12700">
-            <a:solidFill>
-              <a:srgbClr val="DBEAFE">
-                <a:alpha val="0"/>
-              </a:srgbClr>
-            </a:solidFill>
-            <a:prstDash val="solid"/>
-          </a:ln>
-        </p:spPr>
-      </p:sp>
-      <p:sp>
-        <p:nvSpPr>
-          <p:cNvPr id="4" name="Shape 2"/>
-          <p:cNvSpPr/>
-          <p:nvPr/>
-        </p:nvSpPr>
-        <p:spPr>
-          <a:xfrm>
-            <a:off x="7863840" y="1938528"/>
-            <a:ext cx="73152" cy="2514600"/>
-          </a:xfrm>
-          <a:prstGeom prst="rect">
-            <a:avLst/>
-          </a:prstGeom>
-          <a:solidFill>
-            <a:srgbClr val="2563EB"/>
-          </a:solidFill>
-          <a:ln w="12700">
-            <a:solidFill>
-              <a:srgbClr val="2563EB">
-                <a:alpha val="0"/>
-              </a:srgbClr>
-            </a:solidFill>
-            <a:prstDash val="solid"/>
-          </a:ln>
-        </p:spPr>
-      </p:sp>
-      <p:sp>
-        <p:nvSpPr>
-          <p:cNvPr id="5" name="mdpr:2-3-298275:title:__title:2-3-298275"/>
-          <p:cNvSpPr txBox="1"/>
-          <p:nvPr/>
-        </p:nvSpPr>
-        <p:spPr>
-          <a:xfrm>
-            <a:off x="731520" y="457200"/>
-            <a:ext cx="10698480" cy="731520"/>
-          </a:xfrm>
-          <a:prstGeom prst="rect">
-            <a:avLst/>
-          </a:prstGeom>
-          <a:noFill/>
-          <a:ln/>
-        </p:spPr>
-        <p:txBody>
-          <a:bodyPr wrap="square" lIns="0" tIns="0" rIns="0" bIns="0" rtlCol="0" anchor="ctr"/>
-          <a:lstStyle/>
-          <a:p>
-            <a:pPr algn="ctr" indent="0" marL="0">
-              <a:lnSpc>
-                <a:spcPct val="120000"/>
-              </a:lnSpc>
-              <a:buNone/>
-            </a:pPr>
-            <a:r>
-              <a:rPr lang="en-US" sz="3400" b="1" dirty="0">
-                <a:solidFill>
-                  <a:srgbClr val="111111"/>
-                </a:solidFill>
-                <a:latin typeface="Pretendard" pitchFamily="34" charset="0"/>
-                <a:ea typeface="Pretendard" pitchFamily="34" charset="-122"/>
-                <a:cs typeface="Pretendard" pitchFamily="34" charset="-120"/>
-              </a:rPr>
-              <a:t>Example: examples/theme-preview-en/deck.md</a:t>
-            </a:r>
-            <a:pPr algn="ctr" indent="0" marL="0">
-              <a:lnSpc>
-                <a:spcPct val="120000"/>
-              </a:lnSpc>
-              <a:buNone/>
-            </a:pPr>
-            <a:r>
-              <a:rPr lang="en-US" sz="2000" dirty="0">
-                <a:solidFill>
-                  <a:srgbClr val="919191"/>
-                </a:solidFill>
-                <a:latin typeface="Pretendard" pitchFamily="34" charset="0"/>
-                <a:ea typeface="Pretendard" pitchFamily="34" charset="-122"/>
-                <a:cs typeface="Pretendard" pitchFamily="34" charset="-120"/>
-              </a:rPr>
-              <a:t> (Cont. 2/3)</a:t>
-            </a:r>
-            <a:endParaRPr lang="en-US" sz="3400" dirty="0"/>
-          </a:p>
-        </p:txBody>
-      </p:sp>
-      <p:sp>
-        <p:nvSpPr>
-          <p:cNvPr id="6" name="mdpr:2-3-298275:item-1:block-38-chunk-2"/>
-          <p:cNvSpPr txBox="1"/>
-          <p:nvPr/>
-        </p:nvSpPr>
-        <p:spPr>
-          <a:xfrm>
-            <a:off x="1042416" y="2982468"/>
-            <a:ext cx="2825496" cy="426720"/>
-          </a:xfrm>
-          <a:prstGeom prst="rect">
-            <a:avLst/>
-          </a:prstGeom>
-          <a:noFill/>
-          <a:ln/>
-        </p:spPr>
-        <p:txBody>
-          <a:bodyPr wrap="square" lIns="0" tIns="25400" rIns="25400" bIns="0" rtlCol="0" anchor="ctr"/>
-          <a:lstStyle/>
-          <a:p>
-            <a:pPr algn="ctr" indent="0" marL="0">
-              <a:lnSpc>
-                <a:spcPct val="120000"/>
-              </a:lnSpc>
-              <a:buNone/>
-            </a:pPr>
-            <a:r>
-              <a:rPr lang="en-US" sz="2200" dirty="0">
-                <a:solidFill>
-                  <a:srgbClr val="111111"/>
-                </a:solidFill>
-                <a:latin typeface="Pretendard" pitchFamily="34" charset="0"/>
-                <a:ea typeface="Pretendard" pitchFamily="34" charset="-122"/>
-                <a:cs typeface="Pretendard" pitchFamily="34" charset="-120"/>
-              </a:rPr>
-              <a:t>Semantic Blocks</a:t>
-            </a:r>
-            <a:endParaRPr lang="en-US" sz="2200" dirty="0"/>
-          </a:p>
-        </p:txBody>
-      </p:sp>
-      <p:sp>
-        <p:nvSpPr>
-          <p:cNvPr id="7" name="mdpr:2-3-298275:item-2:block-38-chunk-2"/>
-          <p:cNvSpPr txBox="1"/>
-          <p:nvPr/>
-        </p:nvSpPr>
-        <p:spPr>
-          <a:xfrm>
-            <a:off x="4562856" y="2982468"/>
-            <a:ext cx="2825496" cy="426720"/>
-          </a:xfrm>
-          <a:prstGeom prst="rect">
-            <a:avLst/>
-          </a:prstGeom>
-          <a:noFill/>
-          <a:ln/>
-        </p:spPr>
-        <p:txBody>
-          <a:bodyPr wrap="square" lIns="0" tIns="25400" rIns="25400" bIns="0" rtlCol="0" anchor="ctr"/>
-          <a:lstStyle/>
-          <a:p>
-            <a:pPr algn="ctr" indent="0" marL="0">
-              <a:lnSpc>
-                <a:spcPct val="120000"/>
-              </a:lnSpc>
-              <a:buNone/>
-            </a:pPr>
-            <a:r>
-              <a:rPr lang="en-US" sz="2200" dirty="0">
-                <a:solidFill>
-                  <a:srgbClr val="111111"/>
-                </a:solidFill>
-                <a:latin typeface="Pretendard" pitchFamily="34" charset="0"/>
-                <a:ea typeface="Pretendard" pitchFamily="34" charset="-122"/>
-                <a:cs typeface="Pretendard" pitchFamily="34" charset="-120"/>
-              </a:rPr>
-              <a:t>Pipeline Diagram</a:t>
-            </a:r>
-            <a:endParaRPr lang="en-US" sz="2200" dirty="0"/>
-          </a:p>
-        </p:txBody>
-      </p:sp>
-      <p:sp>
-        <p:nvSpPr>
-          <p:cNvPr id="8" name="mdpr:2-3-298275:item-3:block-38-chunk-2"/>
-          <p:cNvSpPr txBox="1"/>
-          <p:nvPr/>
-        </p:nvSpPr>
-        <p:spPr>
-          <a:xfrm>
-            <a:off x="8083296" y="2103120"/>
-            <a:ext cx="2825496" cy="2185416"/>
-          </a:xfrm>
-          <a:prstGeom prst="rect">
-            <a:avLst/>
-          </a:prstGeom>
-          <a:noFill/>
-          <a:ln/>
-        </p:spPr>
-        <p:txBody>
-          <a:bodyPr wrap="square" lIns="0" tIns="25400" rIns="25400" bIns="0" rtlCol="0" anchor="ctr"/>
-          <a:lstStyle/>
-          <a:p>
-            <a:pPr algn="l" indent="0" marL="0">
-              <a:lnSpc>
-                <a:spcPct val="120000"/>
-              </a:lnSpc>
-              <a:buNone/>
-            </a:pPr>
-            <a:r>
-              <a:rPr lang="en-US" sz="2200" b="1" dirty="0">
-                <a:solidFill>
-                  <a:srgbClr val="2563EB"/>
-                </a:solidFill>
-                <a:latin typeface="Pretendard" pitchFamily="34" charset="0"/>
-                <a:ea typeface="Pretendard" pitchFamily="34" charset="-122"/>
-                <a:cs typeface="Pretendard" pitchFamily="34" charset="-120"/>
-              </a:rPr>
-              <a:t>Preview styles</a:t>
-            </a:r>
-            <a:pPr algn="l" indent="0" marL="0">
-              <a:lnSpc>
-                <a:spcPct val="120000"/>
-              </a:lnSpc>
-              <a:buNone/>
-            </a:pPr>
-            <a:r>
-              <a:rPr lang="en-US" sz="2200" dirty="0">
-                <a:solidFill>
-                  <a:srgbClr val="111111"/>
-                </a:solidFill>
-                <a:latin typeface="Pretendard" pitchFamily="34" charset="0"/>
-                <a:ea typeface="Pretendard" pitchFamily="34" charset="-122"/>
-                <a:cs typeface="Pretendard" pitchFamily="34" charset="-120"/>
-              </a:rPr>
-              <a:t>  9 distinct decoration grammars, not palette-only swaps.</a:t>
-            </a:r>
-            <a:endParaRPr lang="en-US" sz="2200" dirty="0"/>
-          </a:p>
-        </p:txBody>
-      </p:sp>
-    </p:spTree>
-  </p:cSld>
-  <p:clrMapOvr>
-    <a:masterClrMapping/>
-  </p:clrMapOvr>
-</p:sld>
-</file>
-
-<file path=ppt/slides/slide33.xml><?xml version="1.0" encoding="utf-8"?>
-<p:sld xmlns:a="http://schemas.openxmlformats.org/drawingml/2006/main" xmlns:r="http://schemas.openxmlformats.org/officeDocument/2006/relationships" xmlns:p="http://schemas.openxmlformats.org/presentationml/2006/main">
-  <p:cSld name="Slide 33">
-    <p:bg>
-      <p:bgPr>
-        <a:solidFill>
-          <a:srgbClr val="F8FAFC"/>
-        </a:solidFill>
-      </p:bgPr>
-    </p:bg>
-    <p:spTree>
-      <p:nvGrpSpPr>
-        <p:cNvPr id="1" name=""/>
-        <p:cNvGrpSpPr/>
-        <p:nvPr/>
-      </p:nvGrpSpPr>
-      <p:grpSpPr>
-        <a:xfrm>
-          <a:off x="0" y="0"/>
-          <a:ext cx="0" cy="0"/>
-          <a:chOff x="0" y="0"/>
-          <a:chExt cx="0" cy="0"/>
-        </a:xfrm>
-      </p:grpSpPr>
-      <p:sp>
-        <p:nvSpPr>
-          <p:cNvPr id="2" name="Shape 0"/>
-          <p:cNvSpPr/>
-          <p:nvPr/>
-        </p:nvSpPr>
-        <p:spPr>
-          <a:xfrm>
-            <a:off x="822960" y="1938528"/>
-            <a:ext cx="73152" cy="2514600"/>
-          </a:xfrm>
-          <a:prstGeom prst="rect">
-            <a:avLst/>
-          </a:prstGeom>
-          <a:solidFill>
-            <a:srgbClr val="2563EB"/>
-          </a:solidFill>
-          <a:ln w="12700">
-            <a:solidFill>
-              <a:srgbClr val="2563EB">
-                <a:alpha val="0"/>
-              </a:srgbClr>
-            </a:solidFill>
-            <a:prstDash val="solid"/>
-          </a:ln>
-        </p:spPr>
-      </p:sp>
-      <p:sp>
-        <p:nvSpPr>
-          <p:cNvPr id="3" name="Shape 1"/>
-          <p:cNvSpPr/>
-          <p:nvPr/>
-        </p:nvSpPr>
-        <p:spPr>
-          <a:xfrm>
-            <a:off x="4343400" y="1938528"/>
-            <a:ext cx="73152" cy="2514600"/>
-          </a:xfrm>
-          <a:prstGeom prst="rect">
-            <a:avLst/>
-          </a:prstGeom>
-          <a:solidFill>
-            <a:srgbClr val="DBEAFE"/>
-          </a:solidFill>
-          <a:ln w="12700">
-            <a:solidFill>
-              <a:srgbClr val="DBEAFE">
-                <a:alpha val="0"/>
-              </a:srgbClr>
-            </a:solidFill>
-            <a:prstDash val="solid"/>
-          </a:ln>
-        </p:spPr>
-      </p:sp>
-      <p:sp>
-        <p:nvSpPr>
-          <p:cNvPr id="4" name="Shape 2"/>
-          <p:cNvSpPr/>
-          <p:nvPr/>
-        </p:nvSpPr>
-        <p:spPr>
-          <a:xfrm>
-            <a:off x="7863840" y="1938528"/>
-            <a:ext cx="73152" cy="2514600"/>
-          </a:xfrm>
-          <a:prstGeom prst="rect">
-            <a:avLst/>
-          </a:prstGeom>
-          <a:solidFill>
-            <a:srgbClr val="2563EB"/>
-          </a:solidFill>
-          <a:ln w="12700">
-            <a:solidFill>
-              <a:srgbClr val="2563EB">
-                <a:alpha val="0"/>
-              </a:srgbClr>
-            </a:solidFill>
-            <a:prstDash val="solid"/>
-          </a:ln>
-        </p:spPr>
-      </p:sp>
-      <p:sp>
-        <p:nvSpPr>
-          <p:cNvPr id="5" name="mdpr:3-3-bec926:title:__title:3-3-bec926"/>
-          <p:cNvSpPr txBox="1"/>
-          <p:nvPr/>
-        </p:nvSpPr>
-        <p:spPr>
-          <a:xfrm>
-            <a:off x="731520" y="457200"/>
-            <a:ext cx="10698480" cy="731520"/>
-          </a:xfrm>
-          <a:prstGeom prst="rect">
-            <a:avLst/>
-          </a:prstGeom>
-          <a:noFill/>
-          <a:ln/>
-        </p:spPr>
-        <p:txBody>
-          <a:bodyPr wrap="square" lIns="0" tIns="0" rIns="0" bIns="0" rtlCol="0" anchor="ctr"/>
-          <a:lstStyle/>
-          <a:p>
-            <a:pPr algn="ctr" indent="0" marL="0">
-              <a:lnSpc>
-                <a:spcPct val="120000"/>
-              </a:lnSpc>
-              <a:buNone/>
-            </a:pPr>
-            <a:r>
-              <a:rPr lang="en-US" sz="3400" b="1" dirty="0">
-                <a:solidFill>
-                  <a:srgbClr val="111111"/>
-                </a:solidFill>
-                <a:latin typeface="Pretendard" pitchFamily="34" charset="0"/>
-                <a:ea typeface="Pretendard" pitchFamily="34" charset="-122"/>
-                <a:cs typeface="Pretendard" pitchFamily="34" charset="-120"/>
-              </a:rPr>
-              <a:t>Example: examples/theme-preview-en/deck.md</a:t>
-            </a:r>
-            <a:pPr algn="ctr" indent="0" marL="0">
-              <a:lnSpc>
-                <a:spcPct val="120000"/>
-              </a:lnSpc>
-              <a:buNone/>
-            </a:pPr>
-            <a:r>
-              <a:rPr lang="en-US" sz="2000" dirty="0">
-                <a:solidFill>
-                  <a:srgbClr val="919191"/>
-                </a:solidFill>
-                <a:latin typeface="Pretendard" pitchFamily="34" charset="0"/>
-                <a:ea typeface="Pretendard" pitchFamily="34" charset="-122"/>
-                <a:cs typeface="Pretendard" pitchFamily="34" charset="-120"/>
-              </a:rPr>
-              <a:t> (Cont. 3/3)</a:t>
-            </a:r>
-            <a:endParaRPr lang="en-US" sz="3400" dirty="0"/>
-          </a:p>
-        </p:txBody>
-      </p:sp>
-      <p:sp>
-        <p:nvSpPr>
-          <p:cNvPr id="6" name="mdpr:3-3-bec926:item-1:block-38-chunk-3"/>
-          <p:cNvSpPr txBox="1"/>
-          <p:nvPr/>
-        </p:nvSpPr>
-        <p:spPr>
-          <a:xfrm>
-            <a:off x="1042416" y="2103120"/>
-            <a:ext cx="2825496" cy="2185416"/>
-          </a:xfrm>
-          <a:prstGeom prst="rect">
-            <a:avLst/>
-          </a:prstGeom>
-          <a:noFill/>
-          <a:ln/>
-        </p:spPr>
-        <p:txBody>
-          <a:bodyPr wrap="square" lIns="0" tIns="25400" rIns="25400" bIns="0" rtlCol="0" anchor="ctr"/>
-          <a:lstStyle/>
-          <a:p>
-            <a:pPr algn="l" indent="0" marL="0">
-              <a:lnSpc>
-                <a:spcPct val="120000"/>
-              </a:lnSpc>
-              <a:buNone/>
-            </a:pPr>
-            <a:r>
-              <a:rPr lang="en-US" sz="2200" b="1" dirty="0">
-                <a:solidFill>
-                  <a:srgbClr val="2563EB"/>
-                </a:solidFill>
-                <a:latin typeface="Pretendard" pitchFamily="34" charset="0"/>
-                <a:ea typeface="Pretendard" pitchFamily="34" charset="-122"/>
-                <a:cs typeface="Pretendard" pitchFamily="34" charset="-120"/>
-              </a:rPr>
-              <a:t>Pattern range</a:t>
-            </a:r>
-            <a:pPr algn="l" indent="0" marL="0">
-              <a:lnSpc>
-                <a:spcPct val="120000"/>
-              </a:lnSpc>
-              <a:buNone/>
-            </a:pPr>
-            <a:r>
-              <a:rPr lang="en-US" sz="2200" dirty="0">
-                <a:solidFill>
-                  <a:srgbClr val="111111"/>
-                </a:solidFill>
-                <a:latin typeface="Pretendard" pitchFamily="34" charset="0"/>
-                <a:ea typeface="Pretendard" pitchFamily="34" charset="-122"/>
-                <a:cs typeface="Pretendard" pitchFamily="34" charset="-120"/>
-              </a:rPr>
-              <a:t>  36+ decoration and layout patterns selected by content role.</a:t>
-            </a:r>
-            <a:endParaRPr lang="en-US" sz="2200" dirty="0"/>
-          </a:p>
-        </p:txBody>
-      </p:sp>
-      <p:sp>
-        <p:nvSpPr>
-          <p:cNvPr id="7" name="mdpr:3-3-bec926:item-2:block-38-chunk-3"/>
-          <p:cNvSpPr txBox="1"/>
-          <p:nvPr/>
-        </p:nvSpPr>
-        <p:spPr>
-          <a:xfrm>
-            <a:off x="4562856" y="2103120"/>
-            <a:ext cx="2825496" cy="2185416"/>
-          </a:xfrm>
-          <a:prstGeom prst="rect">
-            <a:avLst/>
-          </a:prstGeom>
-          <a:noFill/>
-          <a:ln/>
-        </p:spPr>
-        <p:txBody>
-          <a:bodyPr wrap="square" lIns="0" tIns="25400" rIns="25400" bIns="0" rtlCol="0" anchor="ctr"/>
-          <a:lstStyle/>
-          <a:p>
-            <a:pPr algn="l" indent="0" marL="0">
-              <a:lnSpc>
-                <a:spcPct val="120000"/>
-              </a:lnSpc>
-              <a:buNone/>
-            </a:pPr>
-            <a:r>
-              <a:rPr lang="en-US" sz="2200" b="1" dirty="0">
-                <a:solidFill>
-                  <a:srgbClr val="2563EB"/>
-                </a:solidFill>
-                <a:latin typeface="Pretendard" pitchFamily="34" charset="0"/>
-                <a:ea typeface="Pretendard" pitchFamily="34" charset="-122"/>
-                <a:cs typeface="Pretendard" pitchFamily="34" charset="-120"/>
-              </a:rPr>
-              <a:t>Object support</a:t>
-            </a:r>
-            <a:pPr algn="l" indent="0" marL="0">
-              <a:lnSpc>
-                <a:spcPct val="120000"/>
-              </a:lnSpc>
-              <a:buNone/>
-            </a:pPr>
-            <a:r>
-              <a:rPr lang="en-US" sz="2200" dirty="0">
-                <a:solidFill>
-                  <a:srgbClr val="111111"/>
-                </a:solidFill>
-                <a:latin typeface="Pretendard" pitchFamily="34" charset="0"/>
-                <a:ea typeface="Pretendard" pitchFamily="34" charset="-122"/>
-                <a:cs typeface="Pretendard" pitchFamily="34" charset="-120"/>
-              </a:rPr>
-              <a:t>  native tables, charts, proof objects, diagrams, images, and icon slots.</a:t>
-            </a:r>
-            <a:endParaRPr lang="en-US" sz="2200" dirty="0"/>
-          </a:p>
-        </p:txBody>
-      </p:sp>
-      <p:sp>
-        <p:nvSpPr>
-          <p:cNvPr id="8" name="mdpr:3-3-bec926:item-3:block-38-chunk-3"/>
-          <p:cNvSpPr txBox="1"/>
-          <p:nvPr/>
-        </p:nvSpPr>
-        <p:spPr>
-          <a:xfrm>
-            <a:off x="8083296" y="2103120"/>
-            <a:ext cx="2825496" cy="2185416"/>
-          </a:xfrm>
-          <a:prstGeom prst="rect">
-            <a:avLst/>
-          </a:prstGeom>
-          <a:noFill/>
-          <a:ln/>
-        </p:spPr>
-        <p:txBody>
-          <a:bodyPr wrap="square" lIns="0" tIns="25400" rIns="25400" bIns="0" rtlCol="0" anchor="ctr"/>
-          <a:lstStyle/>
-          <a:p>
-            <a:pPr algn="l" indent="0" marL="0">
-              <a:lnSpc>
-                <a:spcPct val="120000"/>
-              </a:lnSpc>
-              <a:buNone/>
-            </a:pPr>
-            <a:r>
-              <a:rPr lang="en-US" sz="2200" b="1" dirty="0">
-                <a:solidFill>
-                  <a:srgbClr val="2563EB"/>
-                </a:solidFill>
-                <a:latin typeface="Pretendard" pitchFamily="34" charset="0"/>
-                <a:ea typeface="Pretendard" pitchFamily="34" charset="-122"/>
-                <a:cs typeface="Pretendard" pitchFamily="34" charset="-120"/>
-              </a:rPr>
-              <a:t>Validation contract</a:t>
-            </a:r>
-            <a:pPr algn="l" indent="0" marL="0">
-              <a:lnSpc>
-                <a:spcPct val="120000"/>
-              </a:lnSpc>
-              <a:buNone/>
-            </a:pPr>
-            <a:r>
-              <a:rPr lang="en-US" sz="2200" dirty="0">
-                <a:solidFill>
-                  <a:srgbClr val="111111"/>
-                </a:solidFill>
-                <a:latin typeface="Pretendard" pitchFamily="34" charset="0"/>
-                <a:ea typeface="Pretendard" pitchFamily="34" charset="-122"/>
-                <a:cs typeface="Pretendard" pitchFamily="34" charset="-120"/>
-              </a:rPr>
-              <a:t>  readable text, bounded objects, aligned connectors, and editable PPTX output.</a:t>
-            </a:r>
-            <a:endParaRPr lang="en-US" sz="2200" dirty="0"/>
-          </a:p>
-        </p:txBody>
-      </p:sp>
-    </p:spTree>
-  </p:cSld>
-  <p:clrMapOvr>
-    <a:masterClrMapping/>
-  </p:clrMapOvr>
-</p:sld>
-</file>
-
-<file path=ppt/slides/slide34.xml><?xml version="1.0" encoding="utf-8"?>
-<p:sld xmlns:a="http://schemas.openxmlformats.org/drawingml/2006/main" xmlns:r="http://schemas.openxmlformats.org/officeDocument/2006/relationships" xmlns:p="http://schemas.openxmlformats.org/presentationml/2006/main">
-  <p:cSld name="Slide 34">
-    <p:bg>
-      <p:bgPr>
-        <a:solidFill>
-          <a:srgbClr val="F8FAFC"/>
-        </a:solidFill>
-      </p:bgPr>
-    </p:bg>
-    <p:spTree>
-      <p:nvGrpSpPr>
-        <p:cNvPr id="1" name=""/>
-        <p:cNvGrpSpPr/>
-        <p:nvPr/>
-      </p:nvGrpSpPr>
-      <p:grpSpPr>
-        <a:xfrm>
-          <a:off x="0" y="0"/>
-          <a:ext cx="0" cy="0"/>
-          <a:chOff x="0" y="0"/>
-          <a:chExt cx="0" cy="0"/>
-        </a:xfrm>
-      </p:grpSpPr>
-      <p:pic>
-        <p:nvPicPr>
-          <p:cNvPr id="2" name="Image 0" descr="preencoded.png">    </p:cNvPr>
-          <p:cNvPicPr>
-            <a:picLocks noChangeAspect="1"/>
-          </p:cNvPicPr>
-          <p:nvPr/>
-        </p:nvPicPr>
-        <p:blipFill>
-          <a:blip r:embed="rId1">
-            <a:extLst>
-              <a:ext uri="{96DAC541-7B7A-43D3-8B79-37D633B846F1}">
-                <asvg:svgBlip xmlns:asvg="http://schemas.microsoft.com/office/drawing/2016/SVG/main" r:embed="rId2"/>
-              </a:ext>
-            </a:extLst>
-          </a:blip>
-          <a:stretch>
-            <a:fillRect/>
-          </a:stretch>
-        </p:blipFill>
-        <p:spPr>
-          <a:xfrm>
-            <a:off x="822960" y="1463040"/>
-            <a:ext cx="5029200" cy="1920240"/>
-          </a:xfrm>
-          <a:prstGeom prst="rect">
-            <a:avLst/>
-          </a:prstGeom>
-        </p:spPr>
-      </p:pic>
-      <p:sp>
-        <p:nvSpPr>
-          <p:cNvPr id="3" name="Shape 0"/>
-          <p:cNvSpPr/>
-          <p:nvPr/>
-        </p:nvSpPr>
-        <p:spPr>
-          <a:xfrm>
-            <a:off x="822960" y="1463040"/>
-            <a:ext cx="5029200" cy="1920240"/>
-          </a:xfrm>
-          <a:prstGeom prst="rect">
-            <a:avLst/>
-          </a:prstGeom>
-          <a:solidFill>
-            <a:srgbClr val="FFFFFF">
-              <a:alpha val="0"/>
-            </a:srgbClr>
-          </a:solidFill>
-          <a:ln w="12700">
-            <a:solidFill>
-              <a:srgbClr val="E2E8F0">
-                <a:alpha val="0"/>
-              </a:srgbClr>
-            </a:solidFill>
-            <a:prstDash val="solid"/>
-          </a:ln>
-          <a:effectLst>
-            <a:outerShdw sx="100000" sy="100000" kx="0" ky="0" algn="bl" rotWithShape="0" blurRad="12700" dist="50800" dir="2700000">
-              <a:srgbClr val="000000">
-                <a:alpha val="8000"/>
-              </a:srgbClr>
-            </a:outerShdw>
-          </a:effectLst>
-        </p:spPr>
-      </p:sp>
-      <p:pic>
-        <p:nvPicPr>
-          <p:cNvPr id="4" name="Image 1" descr="preencoded.png">    </p:cNvPr>
-          <p:cNvPicPr>
-            <a:picLocks noChangeAspect="1"/>
-          </p:cNvPicPr>
-          <p:nvPr/>
-        </p:nvPicPr>
-        <p:blipFill>
-          <a:blip r:embed="rId3">
-            <a:extLst>
-              <a:ext uri="{96DAC541-7B7A-43D3-8B79-37D633B846F1}">
-                <asvg:svgBlip xmlns:asvg="http://schemas.microsoft.com/office/drawing/2016/SVG/main" r:embed="rId4"/>
-              </a:ext>
-            </a:extLst>
-          </a:blip>
-          <a:stretch>
-            <a:fillRect/>
-          </a:stretch>
-        </p:blipFill>
-        <p:spPr>
-          <a:xfrm>
-            <a:off x="6309360" y="1463040"/>
-            <a:ext cx="5029200" cy="1920240"/>
-          </a:xfrm>
-          <a:prstGeom prst="rect">
-            <a:avLst/>
-          </a:prstGeom>
-        </p:spPr>
-      </p:pic>
-      <p:sp>
-        <p:nvSpPr>
-          <p:cNvPr id="5" name="Shape 1"/>
-          <p:cNvSpPr/>
-          <p:nvPr/>
-        </p:nvSpPr>
-        <p:spPr>
-          <a:xfrm>
-            <a:off x="6309360" y="1463040"/>
-            <a:ext cx="5029200" cy="1920240"/>
-          </a:xfrm>
-          <a:prstGeom prst="rect">
-            <a:avLst/>
-          </a:prstGeom>
-          <a:solidFill>
-            <a:srgbClr val="FFFFFF">
-              <a:alpha val="0"/>
-            </a:srgbClr>
-          </a:solidFill>
-          <a:ln w="12700">
-            <a:solidFill>
-              <a:srgbClr val="E2E8F0">
-                <a:alpha val="0"/>
-              </a:srgbClr>
-            </a:solidFill>
-            <a:prstDash val="solid"/>
-          </a:ln>
-          <a:effectLst>
-            <a:outerShdw sx="100000" sy="100000" kx="0" ky="0" algn="bl" rotWithShape="0" blurRad="12700" dist="50800" dir="2700000">
-              <a:srgbClr val="000000">
-                <a:alpha val="8000"/>
-              </a:srgbClr>
-            </a:outerShdw>
-          </a:effectLst>
-        </p:spPr>
-      </p:sp>
-      <p:pic>
-        <p:nvPicPr>
-          <p:cNvPr id="6" name="Image 2" descr="preencoded.png">    </p:cNvPr>
-          <p:cNvPicPr>
-            <a:picLocks noChangeAspect="1"/>
-          </p:cNvPicPr>
-          <p:nvPr/>
-        </p:nvPicPr>
-        <p:blipFill>
-          <a:blip r:embed="rId5">
-            <a:extLst>
-              <a:ext uri="{96DAC541-7B7A-43D3-8B79-37D633B846F1}">
-                <asvg:svgBlip xmlns:asvg="http://schemas.microsoft.com/office/drawing/2016/SVG/main" r:embed="rId6"/>
-              </a:ext>
-            </a:extLst>
-          </a:blip>
-          <a:stretch>
-            <a:fillRect/>
-          </a:stretch>
-        </p:blipFill>
-        <p:spPr>
-          <a:xfrm>
-            <a:off x="822960" y="3749040"/>
-            <a:ext cx="5029200" cy="1920240"/>
-          </a:xfrm>
-          <a:prstGeom prst="rect">
-            <a:avLst/>
-          </a:prstGeom>
-        </p:spPr>
-      </p:pic>
-      <p:sp>
-        <p:nvSpPr>
-          <p:cNvPr id="7" name="Shape 2"/>
-          <p:cNvSpPr/>
-          <p:nvPr/>
-        </p:nvSpPr>
-        <p:spPr>
-          <a:xfrm>
-            <a:off x="822960" y="3749040"/>
-            <a:ext cx="5029200" cy="1920240"/>
-          </a:xfrm>
-          <a:prstGeom prst="rect">
-            <a:avLst/>
-          </a:prstGeom>
-          <a:solidFill>
-            <a:srgbClr val="FFFFFF">
-              <a:alpha val="0"/>
-            </a:srgbClr>
-          </a:solidFill>
-          <a:ln w="12700">
-            <a:solidFill>
-              <a:srgbClr val="E2E8F0">
-                <a:alpha val="0"/>
-              </a:srgbClr>
-            </a:solidFill>
-            <a:prstDash val="solid"/>
-          </a:ln>
-          <a:effectLst>
-            <a:outerShdw sx="100000" sy="100000" kx="0" ky="0" algn="bl" rotWithShape="0" blurRad="12700" dist="50800" dir="2700000">
-              <a:srgbClr val="000000">
-                <a:alpha val="8000"/>
-              </a:srgbClr>
-            </a:outerShdw>
-          </a:effectLst>
-        </p:spPr>
-      </p:sp>
-      <p:pic>
-        <p:nvPicPr>
-          <p:cNvPr id="8" name="Image 3" descr="preencoded.png">    </p:cNvPr>
-          <p:cNvPicPr>
-            <a:picLocks noChangeAspect="1"/>
-          </p:cNvPicPr>
-          <p:nvPr/>
-        </p:nvPicPr>
-        <p:blipFill>
-          <a:blip r:embed="rId7">
-            <a:extLst>
-              <a:ext uri="{96DAC541-7B7A-43D3-8B79-37D633B846F1}">
-                <asvg:svgBlip xmlns:asvg="http://schemas.microsoft.com/office/drawing/2016/SVG/main" r:embed="rId8"/>
-              </a:ext>
-            </a:extLst>
-          </a:blip>
-          <a:stretch>
-            <a:fillRect/>
-          </a:stretch>
-        </p:blipFill>
-        <p:spPr>
-          <a:xfrm>
-            <a:off x="6309360" y="3749040"/>
-            <a:ext cx="5029200" cy="1920240"/>
-          </a:xfrm>
-          <a:prstGeom prst="rect">
-            <a:avLst/>
-          </a:prstGeom>
-        </p:spPr>
-      </p:pic>
-      <p:sp>
-        <p:nvSpPr>
-          <p:cNvPr id="9" name="Shape 3"/>
-          <p:cNvSpPr/>
-          <p:nvPr/>
-        </p:nvSpPr>
-        <p:spPr>
-          <a:xfrm>
-            <a:off x="6309360" y="3749040"/>
-            <a:ext cx="5029200" cy="1920240"/>
-          </a:xfrm>
-          <a:prstGeom prst="rect">
-            <a:avLst/>
-          </a:prstGeom>
-          <a:solidFill>
-            <a:srgbClr val="FFFFFF">
-              <a:alpha val="0"/>
-            </a:srgbClr>
-          </a:solidFill>
-          <a:ln w="12700">
-            <a:solidFill>
-              <a:srgbClr val="E2E8F0">
-                <a:alpha val="0"/>
-              </a:srgbClr>
-            </a:solidFill>
-            <a:prstDash val="solid"/>
-          </a:ln>
-          <a:effectLst>
-            <a:outerShdw sx="100000" sy="100000" kx="0" ky="0" algn="bl" rotWithShape="0" blurRad="12700" dist="50800" dir="2700000">
-              <a:srgbClr val="000000">
-                <a:alpha val="8000"/>
-              </a:srgbClr>
-            </a:outerShdw>
-          </a:effectLst>
-        </p:spPr>
-      </p:sp>
-      <p:sp>
-        <p:nvSpPr>
-          <p:cNvPr id="10" name="Shape 4"/>
-          <p:cNvSpPr/>
-          <p:nvPr/>
-        </p:nvSpPr>
-        <p:spPr>
-          <a:xfrm>
-            <a:off x="822960" y="1463040"/>
-            <a:ext cx="73152" cy="1920240"/>
-          </a:xfrm>
-          <a:prstGeom prst="rect">
-            <a:avLst/>
-          </a:prstGeom>
-          <a:solidFill>
-            <a:srgbClr val="2563EB"/>
-          </a:solidFill>
-          <a:ln w="12700">
-            <a:solidFill>
-              <a:srgbClr val="2563EB">
-                <a:alpha val="0"/>
-              </a:srgbClr>
-            </a:solidFill>
-            <a:prstDash val="solid"/>
-          </a:ln>
-        </p:spPr>
-      </p:sp>
-      <p:sp>
-        <p:nvSpPr>
-          <p:cNvPr id="11" name="Shape 5"/>
-          <p:cNvSpPr/>
-          <p:nvPr/>
-        </p:nvSpPr>
-        <p:spPr>
-          <a:xfrm>
-            <a:off x="6309360" y="1463040"/>
-            <a:ext cx="73152" cy="1920240"/>
-          </a:xfrm>
-          <a:prstGeom prst="rect">
-            <a:avLst/>
-          </a:prstGeom>
-          <a:solidFill>
-            <a:srgbClr val="DBEAFE"/>
-          </a:solidFill>
-          <a:ln w="12700">
-            <a:solidFill>
-              <a:srgbClr val="DBEAFE">
-                <a:alpha val="0"/>
-              </a:srgbClr>
-            </a:solidFill>
-            <a:prstDash val="solid"/>
-          </a:ln>
-        </p:spPr>
-      </p:sp>
-      <p:sp>
-        <p:nvSpPr>
-          <p:cNvPr id="12" name="Shape 6"/>
-          <p:cNvSpPr/>
-          <p:nvPr/>
-        </p:nvSpPr>
-        <p:spPr>
-          <a:xfrm>
-            <a:off x="822960" y="3749040"/>
-            <a:ext cx="73152" cy="1920240"/>
-          </a:xfrm>
-          <a:prstGeom prst="rect">
-            <a:avLst/>
-          </a:prstGeom>
-          <a:solidFill>
-            <a:srgbClr val="2563EB"/>
-          </a:solidFill>
-          <a:ln w="12700">
-            <a:solidFill>
-              <a:srgbClr val="2563EB">
-                <a:alpha val="0"/>
-              </a:srgbClr>
-            </a:solidFill>
-            <a:prstDash val="solid"/>
-          </a:ln>
-        </p:spPr>
-      </p:sp>
-      <p:sp>
-        <p:nvSpPr>
-          <p:cNvPr id="13" name="Shape 7"/>
-          <p:cNvSpPr/>
-          <p:nvPr/>
-        </p:nvSpPr>
-        <p:spPr>
-          <a:xfrm>
-            <a:off x="6309360" y="3749040"/>
-            <a:ext cx="73152" cy="1920240"/>
-          </a:xfrm>
-          <a:prstGeom prst="rect">
-            <a:avLst/>
-          </a:prstGeom>
-          <a:solidFill>
-            <a:srgbClr val="DBEAFE"/>
-          </a:solidFill>
-          <a:ln w="12700">
-            <a:solidFill>
-              <a:srgbClr val="DBEAFE">
-                <a:alpha val="0"/>
-              </a:srgbClr>
-            </a:solidFill>
-            <a:prstDash val="solid"/>
-          </a:ln>
-        </p:spPr>
-      </p:sp>
-      <p:sp>
-        <p:nvSpPr>
           <p:cNvPr id="14" name="mdpr:current-skill-output-expectations-e56835:title:__title:current-skill-output-expectations-e56835"/>
           <p:cNvSpPr txBox="1"/>
           <p:nvPr/>
@@ -17588,9 +16558,9 @@
 </p:sld>
 </file>
 
-<file path=ppt/slides/slide35.xml><?xml version="1.0" encoding="utf-8"?>
+<file path=ppt/slides/slide32.xml><?xml version="1.0" encoding="utf-8"?>
 <p:sld xmlns:a="http://schemas.openxmlformats.org/drawingml/2006/main" xmlns:r="http://schemas.openxmlformats.org/officeDocument/2006/relationships" xmlns:p="http://schemas.openxmlformats.org/presentationml/2006/main">
-  <p:cSld name="Slide 35">
+  <p:cSld name="Slide 32">
     <p:bg>
       <p:bgPr>
         <a:solidFill>

--- a/artifacts/mdpr-vs-skill/mdpr-baseline-result.pptx
+++ b/artifacts/mdpr-vs-skill/mdpr-baseline-result.pptx
@@ -9457,9 +9457,288 @@
           <a:chExt cx="0" cy="0"/>
         </a:xfrm>
       </p:grpSpPr>
-      <p:sp>
-        <p:nvSpPr>
-          <p:cNvPr id="2" name="mdpr:example-decks-from-mdpr-1f8782:title:__title:example-decks-from-mdpr-1f8782"/>
+      <p:pic>
+        <p:nvPicPr>
+          <p:cNvPr id="2" name="Image 0" descr="preencoded.png">    </p:cNvPr>
+          <p:cNvPicPr>
+            <a:picLocks noChangeAspect="1"/>
+          </p:cNvPicPr>
+          <p:nvPr/>
+        </p:nvPicPr>
+        <p:blipFill>
+          <a:blip r:embed="rId1">
+            <a:extLst>
+              <a:ext uri="{96DAC541-7B7A-43D3-8B79-37D633B846F1}">
+                <asvg:svgBlip xmlns:asvg="http://schemas.microsoft.com/office/drawing/2016/SVG/main" r:embed="rId2"/>
+              </a:ext>
+            </a:extLst>
+          </a:blip>
+          <a:stretch>
+            <a:fillRect/>
+          </a:stretch>
+        </p:blipFill>
+        <p:spPr>
+          <a:xfrm>
+            <a:off x="914400" y="1865376"/>
+            <a:ext cx="10241280" cy="1024128"/>
+          </a:xfrm>
+          <a:prstGeom prst="rect">
+            <a:avLst/>
+          </a:prstGeom>
+        </p:spPr>
+      </p:pic>
+      <p:sp>
+        <p:nvSpPr>
+          <p:cNvPr id="3" name="Shape 0"/>
+          <p:cNvSpPr/>
+          <p:nvPr/>
+        </p:nvSpPr>
+        <p:spPr>
+          <a:xfrm>
+            <a:off x="914400" y="1865376"/>
+            <a:ext cx="10241280" cy="1024128"/>
+          </a:xfrm>
+          <a:prstGeom prst="rect">
+            <a:avLst/>
+          </a:prstGeom>
+          <a:solidFill>
+            <a:srgbClr val="FFFFFF">
+              <a:alpha val="0"/>
+            </a:srgbClr>
+          </a:solidFill>
+          <a:ln w="12700">
+            <a:solidFill>
+              <a:srgbClr val="E2E8F0">
+                <a:alpha val="0"/>
+              </a:srgbClr>
+            </a:solidFill>
+            <a:prstDash val="solid"/>
+          </a:ln>
+          <a:effectLst>
+            <a:outerShdw sx="100000" sy="100000" kx="0" ky="0" algn="bl" rotWithShape="0" blurRad="12700" dist="50800" dir="2700000">
+              <a:srgbClr val="000000">
+                <a:alpha val="8000"/>
+              </a:srgbClr>
+            </a:outerShdw>
+          </a:effectLst>
+        </p:spPr>
+      </p:sp>
+      <p:pic>
+        <p:nvPicPr>
+          <p:cNvPr id="4" name="Image 1" descr="preencoded.png">    </p:cNvPr>
+          <p:cNvPicPr>
+            <a:picLocks noChangeAspect="1"/>
+          </p:cNvPicPr>
+          <p:nvPr/>
+        </p:nvPicPr>
+        <p:blipFill>
+          <a:blip r:embed="rId3">
+            <a:extLst>
+              <a:ext uri="{96DAC541-7B7A-43D3-8B79-37D633B846F1}">
+                <asvg:svgBlip xmlns:asvg="http://schemas.microsoft.com/office/drawing/2016/SVG/main" r:embed="rId4"/>
+              </a:ext>
+            </a:extLst>
+          </a:blip>
+          <a:stretch>
+            <a:fillRect/>
+          </a:stretch>
+        </p:blipFill>
+        <p:spPr>
+          <a:xfrm>
+            <a:off x="914400" y="3191256"/>
+            <a:ext cx="10241280" cy="1024128"/>
+          </a:xfrm>
+          <a:prstGeom prst="rect">
+            <a:avLst/>
+          </a:prstGeom>
+        </p:spPr>
+      </p:pic>
+      <p:sp>
+        <p:nvSpPr>
+          <p:cNvPr id="5" name="Shape 1"/>
+          <p:cNvSpPr/>
+          <p:nvPr/>
+        </p:nvSpPr>
+        <p:spPr>
+          <a:xfrm>
+            <a:off x="914400" y="3191256"/>
+            <a:ext cx="10241280" cy="1024128"/>
+          </a:xfrm>
+          <a:prstGeom prst="rect">
+            <a:avLst/>
+          </a:prstGeom>
+          <a:solidFill>
+            <a:srgbClr val="FFFFFF">
+              <a:alpha val="0"/>
+            </a:srgbClr>
+          </a:solidFill>
+          <a:ln w="12700">
+            <a:solidFill>
+              <a:srgbClr val="E2E8F0">
+                <a:alpha val="0"/>
+              </a:srgbClr>
+            </a:solidFill>
+            <a:prstDash val="solid"/>
+          </a:ln>
+          <a:effectLst>
+            <a:outerShdw sx="100000" sy="100000" kx="0" ky="0" algn="bl" rotWithShape="0" blurRad="12700" dist="50800" dir="2700000">
+              <a:srgbClr val="000000">
+                <a:alpha val="8000"/>
+              </a:srgbClr>
+            </a:outerShdw>
+          </a:effectLst>
+        </p:spPr>
+      </p:sp>
+      <p:pic>
+        <p:nvPicPr>
+          <p:cNvPr id="6" name="Image 2" descr="preencoded.png">    </p:cNvPr>
+          <p:cNvPicPr>
+            <a:picLocks noChangeAspect="1"/>
+          </p:cNvPicPr>
+          <p:nvPr/>
+        </p:nvPicPr>
+        <p:blipFill>
+          <a:blip r:embed="rId5">
+            <a:extLst>
+              <a:ext uri="{96DAC541-7B7A-43D3-8B79-37D633B846F1}">
+                <asvg:svgBlip xmlns:asvg="http://schemas.microsoft.com/office/drawing/2016/SVG/main" r:embed="rId6"/>
+              </a:ext>
+            </a:extLst>
+          </a:blip>
+          <a:stretch>
+            <a:fillRect/>
+          </a:stretch>
+        </p:blipFill>
+        <p:spPr>
+          <a:xfrm>
+            <a:off x="914400" y="4507992"/>
+            <a:ext cx="10241280" cy="1024128"/>
+          </a:xfrm>
+          <a:prstGeom prst="rect">
+            <a:avLst/>
+          </a:prstGeom>
+        </p:spPr>
+      </p:pic>
+      <p:sp>
+        <p:nvSpPr>
+          <p:cNvPr id="7" name="Shape 2"/>
+          <p:cNvSpPr/>
+          <p:nvPr/>
+        </p:nvSpPr>
+        <p:spPr>
+          <a:xfrm>
+            <a:off x="914400" y="4507992"/>
+            <a:ext cx="10241280" cy="1024128"/>
+          </a:xfrm>
+          <a:prstGeom prst="rect">
+            <a:avLst/>
+          </a:prstGeom>
+          <a:solidFill>
+            <a:srgbClr val="FFFFFF">
+              <a:alpha val="0"/>
+            </a:srgbClr>
+          </a:solidFill>
+          <a:ln w="12700">
+            <a:solidFill>
+              <a:srgbClr val="E2E8F0">
+                <a:alpha val="0"/>
+              </a:srgbClr>
+            </a:solidFill>
+            <a:prstDash val="solid"/>
+          </a:ln>
+          <a:effectLst>
+            <a:outerShdw sx="100000" sy="100000" kx="0" ky="0" algn="bl" rotWithShape="0" blurRad="12700" dist="50800" dir="2700000">
+              <a:srgbClr val="000000">
+                <a:alpha val="8000"/>
+              </a:srgbClr>
+            </a:outerShdw>
+          </a:effectLst>
+        </p:spPr>
+      </p:sp>
+      <p:sp>
+        <p:nvSpPr>
+          <p:cNvPr id="8" name="Shape 3"/>
+          <p:cNvSpPr/>
+          <p:nvPr/>
+        </p:nvSpPr>
+        <p:spPr>
+          <a:xfrm>
+            <a:off x="914400" y="1865376"/>
+            <a:ext cx="73152" cy="1024128"/>
+          </a:xfrm>
+          <a:prstGeom prst="rect">
+            <a:avLst/>
+          </a:prstGeom>
+          <a:solidFill>
+            <a:srgbClr val="2563EB"/>
+          </a:solidFill>
+          <a:ln w="12700">
+            <a:solidFill>
+              <a:srgbClr val="2563EB">
+                <a:alpha val="0"/>
+              </a:srgbClr>
+            </a:solidFill>
+            <a:prstDash val="solid"/>
+          </a:ln>
+        </p:spPr>
+      </p:sp>
+      <p:sp>
+        <p:nvSpPr>
+          <p:cNvPr id="9" name="Shape 4"/>
+          <p:cNvSpPr/>
+          <p:nvPr/>
+        </p:nvSpPr>
+        <p:spPr>
+          <a:xfrm>
+            <a:off x="914400" y="3191256"/>
+            <a:ext cx="73152" cy="1024128"/>
+          </a:xfrm>
+          <a:prstGeom prst="rect">
+            <a:avLst/>
+          </a:prstGeom>
+          <a:solidFill>
+            <a:srgbClr val="DBEAFE"/>
+          </a:solidFill>
+          <a:ln w="12700">
+            <a:solidFill>
+              <a:srgbClr val="DBEAFE">
+                <a:alpha val="0"/>
+              </a:srgbClr>
+            </a:solidFill>
+            <a:prstDash val="solid"/>
+          </a:ln>
+        </p:spPr>
+      </p:sp>
+      <p:sp>
+        <p:nvSpPr>
+          <p:cNvPr id="10" name="Shape 5"/>
+          <p:cNvSpPr/>
+          <p:nvPr/>
+        </p:nvSpPr>
+        <p:spPr>
+          <a:xfrm>
+            <a:off x="914400" y="4507992"/>
+            <a:ext cx="73152" cy="1024128"/>
+          </a:xfrm>
+          <a:prstGeom prst="rect">
+            <a:avLst/>
+          </a:prstGeom>
+          <a:solidFill>
+            <a:srgbClr val="2563EB"/>
+          </a:solidFill>
+          <a:ln w="12700">
+            <a:solidFill>
+              <a:srgbClr val="2563EB">
+                <a:alpha val="0"/>
+              </a:srgbClr>
+            </a:solidFill>
+            <a:prstDash val="solid"/>
+          </a:ln>
+        </p:spPr>
+      </p:sp>
+      <p:sp>
+        <p:nvSpPr>
+          <p:cNvPr id="11" name="mdpr:example-decks-from-mdpr-1f8782:title:__title:example-decks-from-mdpr-1f8782"/>
           <p:cNvSpPr txBox="1"/>
           <p:nvPr/>
         </p:nvSpPr>
@@ -9501,14 +9780,14 @@
       </p:sp>
       <p:sp>
         <p:nvSpPr>
-          <p:cNvPr id="3" name="mdpr:example-decks-from-mdpr-1f8782:left:block-26-block-26-block-26"/>
+          <p:cNvPr id="12" name="mdpr:example-decks-from-mdpr-1f8782:item-1:block-26"/>
           <p:cNvSpPr txBox="1"/>
           <p:nvPr/>
         </p:nvSpPr>
         <p:spPr>
           <a:xfrm>
-            <a:off x="896112" y="1463040"/>
-            <a:ext cx="4791456" cy="762000"/>
+            <a:off x="1133856" y="2164080"/>
+            <a:ext cx="9820656" cy="426720"/>
           </a:xfrm>
           <a:prstGeom prst="rect">
             <a:avLst/>
@@ -9517,10 +9796,10 @@
           <a:ln/>
         </p:spPr>
         <p:txBody>
-          <a:bodyPr wrap="square" lIns="0" tIns="25400" rIns="25400" bIns="0" rtlCol="0" anchor="t"/>
+          <a:bodyPr wrap="square" lIns="0" tIns="25400" rIns="25400" bIns="0" rtlCol="0" anchor="ctr"/>
           <a:lstStyle/>
           <a:p>
-            <a:pPr algn="l" indent="0" marL="0">
+            <a:pPr algn="ctr" indent="0" marL="0">
               <a:lnSpc>
                 <a:spcPct val="120000"/>
               </a:lnSpc>
@@ -9535,7 +9814,7 @@
                 <a:ea typeface="Pretendard" pitchFamily="34" charset="-122"/>
                 <a:cs typeface="Pretendard" pitchFamily="34" charset="-120"/>
               </a:rPr>
-              <a:t>- basic/deck.md covers core flow and expected effects.</a:t>
+              <a:t>basic/deck.md · comparison/deck.md</a:t>
             </a:r>
             <a:endParaRPr lang="en-US" sz="2200" dirty="0"/>
           </a:p>
@@ -9543,14 +9822,14 @@
       </p:sp>
       <p:sp>
         <p:nvSpPr>
-          <p:cNvPr id="4" name="mdpr:example-decks-from-mdpr-1f8782:left:block-26-block-26-block-26"/>
+          <p:cNvPr id="13" name="mdpr:example-decks-from-mdpr-1f8782:item-2:block-26"/>
           <p:cNvSpPr txBox="1"/>
           <p:nvPr/>
         </p:nvSpPr>
         <p:spPr>
           <a:xfrm>
-            <a:off x="896112" y="2225040"/>
-            <a:ext cx="4791456" cy="762000"/>
+            <a:off x="1133856" y="3489960"/>
+            <a:ext cx="9820656" cy="426720"/>
           </a:xfrm>
           <a:prstGeom prst="rect">
             <a:avLst/>
@@ -9559,10 +9838,10 @@
           <a:ln/>
         </p:spPr>
         <p:txBody>
-          <a:bodyPr wrap="square" lIns="0" tIns="25400" rIns="25400" bIns="0" rtlCol="0" anchor="t"/>
+          <a:bodyPr wrap="square" lIns="0" tIns="25400" rIns="25400" bIns="0" rtlCol="0" anchor="ctr"/>
           <a:lstStyle/>
           <a:p>
-            <a:pPr algn="l" indent="0" marL="0">
+            <a:pPr algn="ctr" indent="0" marL="0">
               <a:lnSpc>
                 <a:spcPct val="120000"/>
               </a:lnSpc>
@@ -9577,7 +9856,7 @@
                 <a:ea typeface="Pretendard" pitchFamily="34" charset="-122"/>
                 <a:cs typeface="Pretendard" pitchFamily="34" charset="-120"/>
               </a:rPr>
-              <a:t>- comparison/deck.md exercises before/after content.</a:t>
+              <a:t>pipeline/deck.md · diagram-arrangements/deck.md</a:t>
             </a:r>
             <a:endParaRPr lang="en-US" sz="2200" dirty="0"/>
           </a:p>
@@ -9585,14 +9864,14 @@
       </p:sp>
       <p:sp>
         <p:nvSpPr>
-          <p:cNvPr id="5" name="mdpr:example-decks-from-mdpr-1f8782:left:block-26-block-26-block-26"/>
+          <p:cNvPr id="14" name="mdpr:example-decks-from-mdpr-1f8782:item-3:block-26"/>
           <p:cNvSpPr txBox="1"/>
           <p:nvPr/>
         </p:nvSpPr>
         <p:spPr>
           <a:xfrm>
-            <a:off x="896112" y="2987040"/>
-            <a:ext cx="4791456" cy="762000"/>
+            <a:off x="1133856" y="4639056"/>
+            <a:ext cx="9820656" cy="762000"/>
           </a:xfrm>
           <a:prstGeom prst="rect">
             <a:avLst/>
@@ -9601,10 +9880,10 @@
           <a:ln/>
         </p:spPr>
         <p:txBody>
-          <a:bodyPr wrap="square" lIns="0" tIns="25400" rIns="25400" bIns="0" rtlCol="0" anchor="t"/>
+          <a:bodyPr wrap="square" lIns="0" tIns="25400" rIns="25400" bIns="0" rtlCol="0" anchor="ctr"/>
           <a:lstStyle/>
           <a:p>
-            <a:pPr algn="l" indent="0" marL="0">
+            <a:pPr algn="ctr" indent="0" marL="0">
               <a:lnSpc>
                 <a:spcPct val="120000"/>
               </a:lnSpc>
@@ -9619,91 +9898,7 @@
                 <a:ea typeface="Pretendard" pitchFamily="34" charset="-122"/>
                 <a:cs typeface="Pretendard" pitchFamily="34" charset="-120"/>
               </a:rPr>
-              <a:t>- pipeline/deck.md exercises diagram conversion.</a:t>
-            </a:r>
-            <a:endParaRPr lang="en-US" sz="2200" dirty="0"/>
-          </a:p>
-        </p:txBody>
-      </p:sp>
-      <p:sp>
-        <p:nvSpPr>
-          <p:cNvPr id="6" name="mdpr:example-decks-from-mdpr-1f8782:right:block-26-block-26"/>
-          <p:cNvSpPr txBox="1"/>
-          <p:nvPr/>
-        </p:nvSpPr>
-        <p:spPr>
-          <a:xfrm>
-            <a:off x="6473952" y="1463040"/>
-            <a:ext cx="4791456" cy="1097280"/>
-          </a:xfrm>
-          <a:prstGeom prst="rect">
-            <a:avLst/>
-          </a:prstGeom>
-          <a:noFill/>
-          <a:ln/>
-        </p:spPr>
-        <p:txBody>
-          <a:bodyPr wrap="square" lIns="0" tIns="25400" rIns="25400" bIns="0" rtlCol="0" anchor="t"/>
-          <a:lstStyle/>
-          <a:p>
-            <a:pPr algn="l" indent="0" marL="0">
-              <a:lnSpc>
-                <a:spcPct val="120000"/>
-              </a:lnSpc>
-              <a:buNone/>
-            </a:pPr>
-            <a:r>
-              <a:rPr lang="en-US" sz="2200" dirty="0">
-                <a:solidFill>
-                  <a:srgbClr val="111111"/>
-                </a:solidFill>
-                <a:latin typeface="Pretendard" pitchFamily="34" charset="0"/>
-                <a:ea typeface="Pretendard" pitchFamily="34" charset="-122"/>
-                <a:cs typeface="Pretendard" pitchFamily="34" charset="-120"/>
-              </a:rPr>
-              <a:t>- diagram-arrangements/deck.md exercises multiple diagram structures.</a:t>
-            </a:r>
-            <a:endParaRPr lang="en-US" sz="2200" dirty="0"/>
-          </a:p>
-        </p:txBody>
-      </p:sp>
-      <p:sp>
-        <p:nvSpPr>
-          <p:cNvPr id="7" name="mdpr:example-decks-from-mdpr-1f8782:right:block-26-block-26"/>
-          <p:cNvSpPr txBox="1"/>
-          <p:nvPr/>
-        </p:nvSpPr>
-        <p:spPr>
-          <a:xfrm>
-            <a:off x="6473952" y="2560320"/>
-            <a:ext cx="4791456" cy="762000"/>
-          </a:xfrm>
-          <a:prstGeom prst="rect">
-            <a:avLst/>
-          </a:prstGeom>
-          <a:noFill/>
-          <a:ln/>
-        </p:spPr>
-        <p:txBody>
-          <a:bodyPr wrap="square" lIns="0" tIns="25400" rIns="25400" bIns="0" rtlCol="0" anchor="t"/>
-          <a:lstStyle/>
-          <a:p>
-            <a:pPr algn="l" indent="0" marL="0">
-              <a:lnSpc>
-                <a:spcPct val="120000"/>
-              </a:lnSpc>
-              <a:buNone/>
-            </a:pPr>
-            <a:r>
-              <a:rPr lang="en-US" sz="2200" dirty="0">
-                <a:solidFill>
-                  <a:srgbClr val="111111"/>
-                </a:solidFill>
-                <a:latin typeface="Pretendard" pitchFamily="34" charset="0"/>
-                <a:ea typeface="Pretendard" pitchFamily="34" charset="-122"/>
-                <a:cs typeface="Pretendard" pitchFamily="34" charset="-120"/>
-              </a:rPr>
-              <a:t>- theme-preview decks exercise preset variety.</a:t>
+              <a:t>five-methods/deck.md — Five-Item Layout Example · theme-preview-en/deck.md</a:t>
             </a:r>
             <a:endParaRPr lang="en-US" sz="2200" dirty="0"/>
           </a:p>
@@ -11783,214 +11978,16 @@
           <a:chExt cx="0" cy="0"/>
         </a:xfrm>
       </p:grpSpPr>
-      <p:pic>
-        <p:nvPicPr>
-          <p:cNvPr id="2" name="Image 0" descr="preencoded.png">    </p:cNvPr>
-          <p:cNvPicPr>
-            <a:picLocks noChangeAspect="1"/>
-          </p:cNvPicPr>
-          <p:nvPr/>
-        </p:nvPicPr>
-        <p:blipFill>
-          <a:blip r:embed="rId1">
-            <a:extLst>
-              <a:ext uri="{96DAC541-7B7A-43D3-8B79-37D633B846F1}">
-                <asvg:svgBlip xmlns:asvg="http://schemas.microsoft.com/office/drawing/2016/SVG/main" r:embed="rId2"/>
-              </a:ext>
-            </a:extLst>
-          </a:blip>
-          <a:stretch>
-            <a:fillRect/>
-          </a:stretch>
-        </p:blipFill>
-        <p:spPr>
-          <a:xfrm>
-            <a:off x="914400" y="1865376"/>
-            <a:ext cx="10241280" cy="1024128"/>
-          </a:xfrm>
-          <a:prstGeom prst="rect">
-            <a:avLst/>
-          </a:prstGeom>
-        </p:spPr>
-      </p:pic>
-      <p:sp>
-        <p:nvSpPr>
-          <p:cNvPr id="3" name="Shape 0"/>
+      <p:sp>
+        <p:nvSpPr>
+          <p:cNvPr id="2" name="Shape 0"/>
           <p:cNvSpPr/>
           <p:nvPr/>
         </p:nvSpPr>
         <p:spPr>
           <a:xfrm>
-            <a:off x="914400" y="1865376"/>
-            <a:ext cx="10241280" cy="1024128"/>
-          </a:xfrm>
-          <a:prstGeom prst="rect">
-            <a:avLst/>
-          </a:prstGeom>
-          <a:solidFill>
-            <a:srgbClr val="FFFFFF">
-              <a:alpha val="0"/>
-            </a:srgbClr>
-          </a:solidFill>
-          <a:ln w="12700">
-            <a:solidFill>
-              <a:srgbClr val="E2E8F0">
-                <a:alpha val="0"/>
-              </a:srgbClr>
-            </a:solidFill>
-            <a:prstDash val="solid"/>
-          </a:ln>
-          <a:effectLst>
-            <a:outerShdw sx="100000" sy="100000" kx="0" ky="0" algn="bl" rotWithShape="0" blurRad="12700" dist="50800" dir="2700000">
-              <a:srgbClr val="000000">
-                <a:alpha val="8000"/>
-              </a:srgbClr>
-            </a:outerShdw>
-          </a:effectLst>
-        </p:spPr>
-      </p:sp>
-      <p:pic>
-        <p:nvPicPr>
-          <p:cNvPr id="4" name="Image 1" descr="preencoded.png">    </p:cNvPr>
-          <p:cNvPicPr>
-            <a:picLocks noChangeAspect="1"/>
-          </p:cNvPicPr>
-          <p:nvPr/>
-        </p:nvPicPr>
-        <p:blipFill>
-          <a:blip r:embed="rId3">
-            <a:extLst>
-              <a:ext uri="{96DAC541-7B7A-43D3-8B79-37D633B846F1}">
-                <asvg:svgBlip xmlns:asvg="http://schemas.microsoft.com/office/drawing/2016/SVG/main" r:embed="rId4"/>
-              </a:ext>
-            </a:extLst>
-          </a:blip>
-          <a:stretch>
-            <a:fillRect/>
-          </a:stretch>
-        </p:blipFill>
-        <p:spPr>
-          <a:xfrm>
-            <a:off x="914400" y="3191256"/>
-            <a:ext cx="10241280" cy="1024128"/>
-          </a:xfrm>
-          <a:prstGeom prst="rect">
-            <a:avLst/>
-          </a:prstGeom>
-        </p:spPr>
-      </p:pic>
-      <p:sp>
-        <p:nvSpPr>
-          <p:cNvPr id="5" name="Shape 1"/>
-          <p:cNvSpPr/>
-          <p:nvPr/>
-        </p:nvSpPr>
-        <p:spPr>
-          <a:xfrm>
-            <a:off x="914400" y="3191256"/>
-            <a:ext cx="10241280" cy="1024128"/>
-          </a:xfrm>
-          <a:prstGeom prst="rect">
-            <a:avLst/>
-          </a:prstGeom>
-          <a:solidFill>
-            <a:srgbClr val="FFFFFF">
-              <a:alpha val="0"/>
-            </a:srgbClr>
-          </a:solidFill>
-          <a:ln w="12700">
-            <a:solidFill>
-              <a:srgbClr val="E2E8F0">
-                <a:alpha val="0"/>
-              </a:srgbClr>
-            </a:solidFill>
-            <a:prstDash val="solid"/>
-          </a:ln>
-          <a:effectLst>
-            <a:outerShdw sx="100000" sy="100000" kx="0" ky="0" algn="bl" rotWithShape="0" blurRad="12700" dist="50800" dir="2700000">
-              <a:srgbClr val="000000">
-                <a:alpha val="8000"/>
-              </a:srgbClr>
-            </a:outerShdw>
-          </a:effectLst>
-        </p:spPr>
-      </p:sp>
-      <p:pic>
-        <p:nvPicPr>
-          <p:cNvPr id="6" name="Image 2" descr="preencoded.png">    </p:cNvPr>
-          <p:cNvPicPr>
-            <a:picLocks noChangeAspect="1"/>
-          </p:cNvPicPr>
-          <p:nvPr/>
-        </p:nvPicPr>
-        <p:blipFill>
-          <a:blip r:embed="rId5">
-            <a:extLst>
-              <a:ext uri="{96DAC541-7B7A-43D3-8B79-37D633B846F1}">
-                <asvg:svgBlip xmlns:asvg="http://schemas.microsoft.com/office/drawing/2016/SVG/main" r:embed="rId6"/>
-              </a:ext>
-            </a:extLst>
-          </a:blip>
-          <a:stretch>
-            <a:fillRect/>
-          </a:stretch>
-        </p:blipFill>
-        <p:spPr>
-          <a:xfrm>
-            <a:off x="914400" y="4507992"/>
-            <a:ext cx="10241280" cy="1024128"/>
-          </a:xfrm>
-          <a:prstGeom prst="rect">
-            <a:avLst/>
-          </a:prstGeom>
-        </p:spPr>
-      </p:pic>
-      <p:sp>
-        <p:nvSpPr>
-          <p:cNvPr id="7" name="Shape 2"/>
-          <p:cNvSpPr/>
-          <p:nvPr/>
-        </p:nvSpPr>
-        <p:spPr>
-          <a:xfrm>
-            <a:off x="914400" y="4507992"/>
-            <a:ext cx="10241280" cy="1024128"/>
-          </a:xfrm>
-          <a:prstGeom prst="rect">
-            <a:avLst/>
-          </a:prstGeom>
-          <a:solidFill>
-            <a:srgbClr val="FFFFFF">
-              <a:alpha val="0"/>
-            </a:srgbClr>
-          </a:solidFill>
-          <a:ln w="12700">
-            <a:solidFill>
-              <a:srgbClr val="E2E8F0">
-                <a:alpha val="0"/>
-              </a:srgbClr>
-            </a:solidFill>
-            <a:prstDash val="solid"/>
-          </a:ln>
-          <a:effectLst>
-            <a:outerShdw sx="100000" sy="100000" kx="0" ky="0" algn="bl" rotWithShape="0" blurRad="12700" dist="50800" dir="2700000">
-              <a:srgbClr val="000000">
-                <a:alpha val="8000"/>
-              </a:srgbClr>
-            </a:outerShdw>
-          </a:effectLst>
-        </p:spPr>
-      </p:sp>
-      <p:sp>
-        <p:nvSpPr>
-          <p:cNvPr id="8" name="Shape 3"/>
-          <p:cNvSpPr/>
-          <p:nvPr/>
-        </p:nvSpPr>
-        <p:spPr>
-          <a:xfrm>
-            <a:off x="914400" y="1865376"/>
-            <a:ext cx="73152" cy="1024128"/>
+            <a:off x="822960" y="2487168"/>
+            <a:ext cx="73152" cy="1417320"/>
           </a:xfrm>
           <a:prstGeom prst="rect">
             <a:avLst/>
@@ -12010,14 +12007,14 @@
       </p:sp>
       <p:sp>
         <p:nvSpPr>
-          <p:cNvPr id="9" name="Shape 4"/>
+          <p:cNvPr id="3" name="Shape 1"/>
           <p:cNvSpPr/>
           <p:nvPr/>
         </p:nvSpPr>
         <p:spPr>
           <a:xfrm>
-            <a:off x="914400" y="3191256"/>
-            <a:ext cx="73152" cy="1024128"/>
+            <a:off x="4343400" y="2487168"/>
+            <a:ext cx="73152" cy="1417320"/>
           </a:xfrm>
           <a:prstGeom prst="rect">
             <a:avLst/>
@@ -12037,14 +12034,14 @@
       </p:sp>
       <p:sp>
         <p:nvSpPr>
-          <p:cNvPr id="10" name="Shape 5"/>
+          <p:cNvPr id="4" name="Shape 2"/>
           <p:cNvSpPr/>
           <p:nvPr/>
         </p:nvSpPr>
         <p:spPr>
           <a:xfrm>
-            <a:off x="914400" y="4507992"/>
-            <a:ext cx="73152" cy="1024128"/>
+            <a:off x="7863840" y="2487168"/>
+            <a:ext cx="73152" cy="1417320"/>
           </a:xfrm>
           <a:prstGeom prst="rect">
             <a:avLst/>
@@ -12064,7 +12061,7 @@
       </p:sp>
       <p:sp>
         <p:nvSpPr>
-          <p:cNvPr id="11" name="mdpr:2-2-a2c94a:title:__title:2-2-a2c94a"/>
+          <p:cNvPr id="5" name="mdpr:2-2-a2c94a:title:__title:2-2-a2c94a"/>
           <p:cNvSpPr txBox="1"/>
           <p:nvPr/>
         </p:nvSpPr>
@@ -12123,14 +12120,14 @@
       </p:sp>
       <p:sp>
         <p:nvSpPr>
-          <p:cNvPr id="12" name="mdpr:2-2-a2c94a:item-1:block-32-chunk-2"/>
+          <p:cNvPr id="6" name="mdpr:2-2-a2c94a:item-1:block-32-chunk-2"/>
           <p:cNvSpPr txBox="1"/>
           <p:nvPr/>
         </p:nvSpPr>
         <p:spPr>
           <a:xfrm>
-            <a:off x="1335024" y="2164080"/>
-            <a:ext cx="9619488" cy="426720"/>
+            <a:off x="1243584" y="2982468"/>
+            <a:ext cx="2624328" cy="426720"/>
           </a:xfrm>
           <a:prstGeom prst="rect">
             <a:avLst/>
@@ -12165,14 +12162,14 @@
       </p:sp>
       <p:sp>
         <p:nvSpPr>
-          <p:cNvPr id="13" name="mdpr:2-2-a2c94a:item-2:block-32-chunk-2"/>
+          <p:cNvPr id="7" name="mdpr:2-2-a2c94a:item-2:block-32-chunk-2"/>
           <p:cNvSpPr txBox="1"/>
           <p:nvPr/>
         </p:nvSpPr>
         <p:spPr>
           <a:xfrm>
-            <a:off x="1335024" y="3489960"/>
-            <a:ext cx="9619488" cy="426720"/>
+            <a:off x="4764024" y="2982468"/>
+            <a:ext cx="2624328" cy="426720"/>
           </a:xfrm>
           <a:prstGeom prst="rect">
             <a:avLst/>
@@ -12207,14 +12204,14 @@
       </p:sp>
       <p:sp>
         <p:nvSpPr>
-          <p:cNvPr id="14" name="mdpr:2-2-a2c94a:item-3:block-32-chunk-2"/>
+          <p:cNvPr id="8" name="mdpr:2-2-a2c94a:item-3:block-32-chunk-2"/>
           <p:cNvSpPr txBox="1"/>
           <p:nvPr/>
         </p:nvSpPr>
         <p:spPr>
           <a:xfrm>
-            <a:off x="1335024" y="4806696"/>
-            <a:ext cx="9619488" cy="426720"/>
+            <a:off x="8284464" y="2982468"/>
+            <a:ext cx="2624328" cy="426720"/>
           </a:xfrm>
           <a:prstGeom prst="rect">
             <a:avLst/>
